--- a/demo_session/deck_gauges_edit.pptx
+++ b/demo_session/deck_gauges_edit.pptx
@@ -6376,7 +6376,7 @@
                 </a:solidFill>
                 <a:latin typeface="Arial"/>
               </a:rPr>
-              <a:t>Three jobs, one bench, four ways of sensing; the record on a 30 nm working surface; lenses or mirrors; what remains</a:t>
+              <a:t>Three jobs, one bench, four ways of sensing</a:t>
             </a:r>
           </a:p>
         </p:txBody>
@@ -6459,7 +6459,7 @@
                 </a:solidFill>
                 <a:latin typeface="Arial"/>
               </a:rPr>
-              <a:t>•  The jobs and the bench (3-8): measure, capture, hold; one bench, four ways of sensing; the splitter angle; parts common to every configuration, the interferometer's, the sensors'.</a:t>
+              <a:t>•  3-8 The jobs; the bench and its parts</a:t>
             </a:r>
           </a:p>
           <a:p>
@@ -6475,7 +6475,7 @@
                 </a:solidFill>
                 <a:latin typeface="Arial"/>
               </a:rPr>
-              <a:t>•  The four approaches (9-19): the Twyman-Green interferometer, its node and its stations; the Zernike dimple and its stations; the vector Zernike, its layout and stations; the stepped pinhole, its layout and stations.</a:t>
+              <a:t>•  9-19 The four approaches: interferometer, Zernike, vector Zernike, pinhole</a:t>
             </a:r>
           </a:p>
           <a:p>
@@ -6491,7 +6491,7 @@
                 </a:solidFill>
                 <a:latin typeface="Arial"/>
               </a:rPr>
-              <a:t>•  Performance on the working surface (20-25): side by side; capture range and its photon price; photons for 1 pm; the servo; capturing the initial figure.</a:t>
+              <a:t>•  20-25 Performance on the working surface: rows, capture, photons, servo</a:t>
             </a:r>
           </a:p>
           <a:p>
@@ -6507,7 +6507,7 @@
                 </a:solidFill>
                 <a:latin typeface="Arial"/>
               </a:rPr>
-              <a:t>•  Lenses or off-axis mirrors (26-28): the record; the reflective front end redesigned; measured.</a:t>
+              <a:t>•  26-28 Lenses or off-axis mirrors</a:t>
             </a:r>
           </a:p>
         </p:txBody>
@@ -6546,7 +6546,7 @@
                 </a:solidFill>
                 <a:latin typeface="Arial"/>
               </a:rPr>
-              <a:t>•  Systematics and the recommendation (29-30).</a:t>
+              <a:t>•  29-30 Systematics; recommendation</a:t>
             </a:r>
           </a:p>
           <a:p>
@@ -6562,7 +6562,7 @@
                 </a:solidFill>
                 <a:latin typeface="Arial"/>
               </a:rPr>
-              <a:t>•  Operating the gauge (31-33): the modes from launch to hold; the complex amplitude for two-mirror control; one bench, every mode.</a:t>
+              <a:t>•  31-33 Operating the gauge</a:t>
             </a:r>
           </a:p>
           <a:p>
@@ -6578,7 +6578,7 @@
                 </a:solidFill>
                 <a:latin typeface="Arial"/>
               </a:rPr>
-              <a:t>•  Future work (34-36): a second color for capture; other approaches; from this model to as-built performance.</a:t>
+              <a:t>•  34-36 Future work</a:t>
             </a:r>
           </a:p>
           <a:p>
@@ -6594,7 +6594,7 @@
                 </a:solidFill>
                 <a:latin typeface="Arial"/>
               </a:rPr>
-              <a:t>•  Method (37-38): how every configuration was analyzed; run it yourself.</a:t>
+              <a:t>•  37-38 Method; run it yourself</a:t>
             </a:r>
           </a:p>
           <a:p>
@@ -6610,46 +6610,7 @@
                 </a:solidFill>
                 <a:latin typeface="Arial"/>
               </a:rPr>
-              <a:t>•  Backup (39-48): the three phase-shift forms; the record's mirror rig; the Zernike readings that lost; the pinhole trades; drift within a measurement; the vector sensor's polarization terms; sampling and color; the clearance scan; the path per configuration; provenance.</a:t>
-            </a:r>
-          </a:p>
-        </p:txBody>
-      </p:sp>
-      <p:sp>
-        <p:nvSpPr>
-          <p:cNvPr id="6" name="TextBox 5"/>
-          <p:cNvSpPr txBox="1"/>
-          <p:nvPr/>
-        </p:nvSpPr>
-        <p:spPr>
-          <a:xfrm>
-            <a:off x="6400800" y="4215384"/>
-            <a:ext cx="5394960" cy="274320"/>
-          </a:xfrm>
-          <a:prstGeom prst="rect">
-            <a:avLst/>
-          </a:prstGeom>
-          <a:noFill/>
-        </p:spPr>
-        <p:txBody>
-          <a:bodyPr wrap="square">
-            <a:spAutoFit/>
-          </a:bodyPr>
-          <a:lstStyle/>
-          <a:p>
-            <a:pPr>
-              <a:spcAft>
-                <a:spcPts val="600"/>
-              </a:spcAft>
-            </a:pPr>
-            <a:r>
-              <a:rPr sz="1050" b="0">
-                <a:solidFill>
-                  <a:srgbClr val="6E6E6E"/>
-                </a:solidFill>
-                <a:latin typeface="Arial"/>
-              </a:rPr>
-              <a:t>Every number carries a run tag on its slide; the tags resolve to committed run directories of the shared model (provenance, slide 48).</a:t>
+              <a:t>•  39-48 Backup</a:t>
             </a:r>
           </a:p>
         </p:txBody>

--- a/demo_session/deck_gauges_edit.pptx
+++ b/demo_session/deck_gauges_edit.pptx
@@ -3600,7 +3600,7 @@
       </p:sp>
       <p:pic>
         <p:nvPicPr>
-          <p:cNvPr id="4" name="Picture 3" descr="oapifol2_stations.png"/>
+          <p:cNvPr id="4" name="Picture 3" descr="stnoap_stations.png"/>
           <p:cNvPicPr>
             <a:picLocks noChangeAspect="1"/>
           </p:cNvPicPr>
@@ -3614,8 +3614,8 @@
         </p:blipFill>
         <p:spPr>
           <a:xfrm>
-            <a:off x="2231570" y="1298448"/>
-            <a:ext cx="7728554" cy="2531872"/>
+            <a:off x="2026767" y="1298448"/>
+            <a:ext cx="8138160" cy="2531872"/>
           </a:xfrm>
           <a:prstGeom prst="rect">
             <a:avLst/>
@@ -3734,7 +3734,7 @@
                 </a:solidFill>
                 <a:latin typeface="Arial"/>
               </a:rPr>
-              <a:t>Run tag oapifol2 (seed detector leg, record resolution); the lens rig's figure is being regenerated at the same width.</a:t>
+              <a:t>Run tag stnoap (the redesigned mirror rig, seed detector leg; bit-identical to the servo run's figure).  The lens rig's figure exists but its residual panel reads 62 nm against the engine, a misregistration under investigation, so it is not shown.</a:t>
             </a:r>
           </a:p>
         </p:txBody>
@@ -8467,9 +8467,9 @@
                 <a:tableStyleId>{5C22544A-7EE6-4342-B048-85BDC9FD1C3A}</a:tableStyleId>
               </a:tblPr>
               <a:tblGrid>
-                <a:gridCol w="1721163"/>
-                <a:gridCol w="7020533"/>
-                <a:gridCol w="2627038"/>
+                <a:gridCol w="1435255"/>
+                <a:gridCol w="7742826"/>
+                <a:gridCol w="2190653"/>
               </a:tblGrid>
               <a:tr h="468630">
                 <a:tc>
@@ -9028,7 +9028,7 @@
                           </a:solidFill>
                           <a:latin typeface="Arial"/>
                         </a:rPr>
-                        <a:t>interferometer, mirror rig, redesigned</a:t>
+                        <a:t>interferometer, either rig</a:t>
                       </a:r>
                     </a:p>
                   </a:txBody>
@@ -9050,7 +9050,7 @@
                           </a:solidFill>
                           <a:latin typeface="Arial"/>
                         </a:rPr>
-                        <a:t>0.99 / 2 pm to 60 nm; the raw reading folds at 120 nm (lens rig at 240): two wrapped maps subtracted, an arithmetic of the ladder, not a limit of the bench</a:t>
+                        <a:t>0.99 / 2 pm to 60 nm; between 60 and 120 nm the raw four-step reading wraps (the base past λ/2 of surface reads 91 nm rms whatever it is) on lens and mirror rigs alike; unwrapping restores it (next slides)</a:t>
                       </a:r>
                     </a:p>
                   </a:txBody>
@@ -14673,7 +14673,7 @@
                 </a:solidFill>
                 <a:latin typeface="Arial"/>
               </a:rPr>
-              <a:t>•  Open: the raw interferometer reading folds at 120 nm of surface on this rig and at 240 on the lens rig, which is the ladder subtracting two wrapped maps rather than a bench limit; both rigs capture with unwrapping.  The detector leg here is the geometric seed (the tuner's objective prefers a leg that does not read: a known defect, being fixed).</a:t>
+              <a:t>•  Closed: the raw interferometer reading wraps between 60 and 120 nm of surface on both rigs, lens and mirror alike (a base the four-step cannot follow reads λ/2 ÷ √12 = 91 nm rms, measured 89-92 on both); the capture range is set by the reading, not the optics, and unwrapping restores it.  The detector leg here is the geometric seed (the tuner's objective prefers a leg that does not read: a known defect, being fixed).</a:t>
             </a:r>
           </a:p>
         </p:txBody>
@@ -14686,7 +14686,7 @@
         </p:nvSpPr>
         <p:spPr>
           <a:xfrm>
-            <a:off x="411480" y="5487924"/>
+            <a:off x="411480" y="5735574"/>
             <a:ext cx="11368735" cy="274320"/>
           </a:xfrm>
           <a:prstGeom prst="rect">
@@ -21051,7 +21051,7 @@
         </p:nvGraphicFramePr>
         <p:xfrm>
           <a:off x="411480" y="3730752"/>
-          <a:ext cx="11368734" cy="2440305"/>
+          <a:ext cx="11368735" cy="2628900"/>
         </p:xfrm>
         <a:graphic>
           <a:graphicData uri="http://schemas.openxmlformats.org/drawingml/2006/table">
@@ -21061,8 +21061,8 @@
               </a:tblPr>
               <a:tblGrid>
                 <a:gridCol w="1235964"/>
-                <a:gridCol w="3898704"/>
-                <a:gridCol w="6234066"/>
+                <a:gridCol w="3635559"/>
+                <a:gridCol w="6497212"/>
               </a:tblGrid>
               <a:tr h="280035">
                 <a:tc>
@@ -21190,7 +21190,7 @@
                   </a:tcPr>
                 </a:tc>
               </a:tr>
-              <a:tr h="845820">
+              <a:tr h="1034415">
                 <a:tc>
                   <a:txBody>
                     <a:bodyPr wrap="square"/>
@@ -21247,7 +21247,7 @@
                           </a:solidFill>
                           <a:latin typeface="Arial"/>
                         </a:rPr>
-                        <a:t>the metal folds polarize: the vector reading needs its two channels calibrated (634 pm raw, 0.054 pm calibrated; a quarter-wave overcoat halves the raw error); 10 µrad of mirror tilt moves the null 95-103 nm; the raw reading folds over at 120 nm of surface where the lens rig's does at 240, and both capture with unwrapping</a:t>
+                        <a:t>the metal folds polarize: the vector reading needs its two channels calibrated (634 pm raw, 0.054 pm calibrated; a quarter-wave overcoat halves the raw error); 10 µrad of mirror tilt moves the null 95-103 nm; the raw four-step reading wraps between 60 and 120 nm of surface on both rigs (a base past λ/2 reads 91 nm whatever it is); both capture with unwrapping</a:t>
                       </a:r>
                     </a:p>
                   </a:txBody>
@@ -21338,7 +21338,7 @@
         </p:nvSpPr>
         <p:spPr>
           <a:xfrm>
-            <a:off x="411480" y="6317361"/>
+            <a:off x="411480" y="6505956"/>
             <a:ext cx="11368735" cy="274320"/>
           </a:xfrm>
           <a:prstGeom prst="rect">
@@ -27225,7 +27225,7 @@
                 </a:solidFill>
                 <a:latin typeface="Arial"/>
               </a:rPr>
-              <a:t>•  Interferometer (tg_psi_dm96_oap/runs): lens_deck, lens_deck_se2, lens_deck_se5, loop_lens, loop_lens_cam, loop_lens_intra, loop_lens_se2, descent_lens, oap_deck, loop_oap, descent_oap, oap_bareAl, oap_coat, oap_jones, zoap (the 7° rigs); lens22, lens22g, lens22h, node22t, fold1-4, loss, loss_src, loss_a2, conj, zseat, zseat2, oap22d, oapdraw3, oap22d_tail, tailA, tailB, oapifo2, oapifol2, oapdesc2, oapuw2, lensuw2, thk22, sub22, aoi_lens22, aoi_oap22, gate3_win, gate3_lens (the 22.5° bench and the redesigned reflective rig); pdi_dm96/runs/psriclear2 (the P/SRI bench through the clearance tool).  Reports REPORT_gauge_ifo.md (CCMac) with REPORT_oap.md, REPORT_bench_realism.md and REPORT_reflective.md (TO), and README.md.</a:t>
+              <a:t>•  Interferometer (tg_psi_dm96_oap/runs): lens_deck, lens_deck_se2, lens_deck_se5, loop_lens, loop_lens_cam, loop_lens_intra, loop_lens_se2, descent_lens, oap_deck, loop_oap, descent_oap, oap_bareAl, oap_coat, oap_jones, zoap (the 7° rigs); lens22, lens22g, lens22h, node22t, fold1-4, loss, loss_src, loss_a2, conj, zseat, zseat2, oap22d, oapdraw3, oap22d_tail, tailA, tailB, oapifo2, oapifol2, oapdesc2, oapuw2, lensuw2, thk22, sub22, aoi_lens22, aoi_oap22, gate3_win, gate3_lens, wrapoap, wraplens, stnoap, stnlens (the 22.5° bench and the redesigned reflective rig); pdi_dm96/runs/psriclear2 (the P/SRI bench through the clearance tool).  Reports REPORT_gauge_ifo.md (CCMac) with REPORT_oap.md, REPORT_bench_realism.md and REPORT_reflective.md (TO), and README.md.</a:t>
             </a:r>
           </a:p>
           <a:p>
@@ -28427,7 +28427,7 @@
         </p:nvGraphicFramePr>
         <p:xfrm>
           <a:off x="411480" y="1298448"/>
-          <a:ext cx="11368734" cy="6852285"/>
+          <a:ext cx="11368734" cy="8549640"/>
         </p:xfrm>
         <a:graphic>
           <a:graphicData uri="http://schemas.openxmlformats.org/drawingml/2006/table">
@@ -28437,10 +28437,10 @@
               </a:tblPr>
               <a:tblGrid>
                 <a:gridCol w="1962404"/>
-                <a:gridCol w="5406970"/>
+                <a:gridCol w="5700809"/>
                 <a:gridCol w="2180336"/>
                 <a:gridCol w="509524"/>
-                <a:gridCol w="1309500"/>
+                <a:gridCol w="1015661"/>
               </a:tblGrid>
               <a:tr h="280035">
                 <a:tc>
@@ -28554,7 +28554,7 @@
                   </a:tcPr>
                 </a:tc>
               </a:tr>
-              <a:tr h="657225">
+              <a:tr h="845820">
                 <a:tc>
                   <a:txBody>
                     <a:bodyPr wrap="square"/>
@@ -28778,6 +28778,118 @@
                   </a:tcPr>
                 </a:tc>
               </a:tr>
+              <a:tr h="1034415">
+                <a:tc>
+                  <a:txBody>
+                    <a:bodyPr wrap="square"/>
+                    <a:lstStyle/>
+                    <a:p>
+                      <a:r>
+                        <a:rPr sz="1100" b="0">
+                          <a:solidFill>
+                            <a:srgbClr val="282828"/>
+                          </a:solidFill>
+                          <a:latin typeface="Arial"/>
+                        </a:rPr>
+                        <a:t>plate splitter</a:t>
+                      </a:r>
+                    </a:p>
+                  </a:txBody>
+                  <a:tcPr marL="54864" marR="54864" marT="18288" marB="18288">
+                    <a:solidFill>
+                      <a:srgbClr val="FFFFFF"/>
+                    </a:solidFill>
+                  </a:tcPr>
+                </a:tc>
+                <a:tc>
+                  <a:txBody>
+                    <a:bodyPr wrap="square"/>
+                    <a:lstStyle/>
+                    <a:p>
+                      <a:r>
+                        <a:rPr sz="1100" b="0">
+                          <a:solidFill>
+                            <a:srgbClr val="282828"/>
+                          </a:solidFill>
+                          <a:latin typeface="Arial"/>
+                        </a:rPr>
+                        <a:t>103 mm, 22.5° incidence, 50/50; 10 mm thick (modeled): shifts the transmitted beam 1.39 mm, which the compensator cannot undo; the interferometer's flat null rises from 0.13 to 20 nm and its reading is attenuated 13%, a cost in floor and SNR, not gain (differential rows 1.00-1.01, single actuator 0.989; capture unchanged); the sensors do not move</a:t>
+                      </a:r>
+                    </a:p>
+                  </a:txBody>
+                  <a:tcPr marL="54864" marR="54864" marT="18288" marB="18288">
+                    <a:solidFill>
+                      <a:srgbClr val="FFFFFF"/>
+                    </a:solidFill>
+                  </a:tcPr>
+                </a:tc>
+                <a:tc>
+                  <a:txBody>
+                    <a:bodyPr wrap="square"/>
+                    <a:lstStyle/>
+                    <a:p>
+                      <a:r>
+                        <a:rPr sz="1100" b="0">
+                          <a:solidFill>
+                            <a:srgbClr val="282828"/>
+                          </a:solidFill>
+                          <a:latin typeface="Arial"/>
+                        </a:rPr>
+                        <a:t>50/50 front coating, AR back</a:t>
+                      </a:r>
+                    </a:p>
+                  </a:txBody>
+                  <a:tcPr marL="54864" marR="54864" marT="18288" marB="18288">
+                    <a:solidFill>
+                      <a:srgbClr val="FFFFFF"/>
+                    </a:solidFill>
+                  </a:tcPr>
+                </a:tc>
+                <a:tc>
+                  <a:txBody>
+                    <a:bodyPr wrap="square"/>
+                    <a:lstStyle/>
+                    <a:p>
+                      <a:r>
+                        <a:rPr sz="1100" b="0">
+                          <a:solidFill>
+                            <a:srgbClr val="282828"/>
+                          </a:solidFill>
+                          <a:latin typeface="Arial"/>
+                        </a:rPr>
+                        <a:t>1</a:t>
+                      </a:r>
+                    </a:p>
+                  </a:txBody>
+                  <a:tcPr marL="54864" marR="54864" marT="18288" marB="18288">
+                    <a:solidFill>
+                      <a:srgbClr val="FFFFFF"/>
+                    </a:solidFill>
+                  </a:tcPr>
+                </a:tc>
+                <a:tc>
+                  <a:txBody>
+                    <a:bodyPr wrap="square"/>
+                    <a:lstStyle/>
+                    <a:p>
+                      <a:r>
+                        <a:rPr sz="1100" b="0">
+                          <a:solidFill>
+                            <a:srgbClr val="282828"/>
+                          </a:solidFill>
+                          <a:latin typeface="Arial"/>
+                        </a:rPr>
+                        <a:t>splits to the mirror and the reference arm</a:t>
+                      </a:r>
+                    </a:p>
+                  </a:txBody>
+                  <a:tcPr marL="54864" marR="54864" marT="18288" marB="18288">
+                    <a:solidFill>
+                      <a:srgbClr val="FFFFFF"/>
+                    </a:solidFill>
+                  </a:tcPr>
+                </a:tc>
+              </a:tr>
               <a:tr h="845820">
                 <a:tc>
                   <a:txBody>
@@ -28791,57 +28903,57 @@
                           </a:solidFill>
                           <a:latin typeface="Arial"/>
                         </a:rPr>
-                        <a:t>plate splitter</a:t>
-                      </a:r>
-                    </a:p>
-                  </a:txBody>
-                  <a:tcPr marL="54864" marR="54864" marT="18288" marB="18288">
-                    <a:solidFill>
-                      <a:srgbClr val="FFFFFF"/>
-                    </a:solidFill>
-                  </a:tcPr>
-                </a:tc>
-                <a:tc>
-                  <a:txBody>
-                    <a:bodyPr wrap="square"/>
-                    <a:lstStyle/>
-                    <a:p>
-                      <a:r>
-                        <a:rPr sz="1100" b="0">
-                          <a:solidFill>
-                            <a:srgbClr val="282828"/>
-                          </a:solidFill>
-                          <a:latin typeface="Arial"/>
-                        </a:rPr>
-                        <a:t>103 mm, 22.5° incidence, 50/50; 10 mm thick (modeled): shifts the transmitted beam 1.39 mm, which the compensator cannot undo, so the interferometer's flat null rises from 0.13 to 20 nm (its differential rows are being re-measured; the sensors do not move)</a:t>
-                      </a:r>
-                    </a:p>
-                  </a:txBody>
-                  <a:tcPr marL="54864" marR="54864" marT="18288" marB="18288">
-                    <a:solidFill>
-                      <a:srgbClr val="FFFFFF"/>
-                    </a:solidFill>
-                  </a:tcPr>
-                </a:tc>
-                <a:tc>
-                  <a:txBody>
-                    <a:bodyPr wrap="square"/>
-                    <a:lstStyle/>
-                    <a:p>
-                      <a:r>
-                        <a:rPr sz="1100" b="0">
-                          <a:solidFill>
-                            <a:srgbClr val="282828"/>
-                          </a:solidFill>
-                          <a:latin typeface="Arial"/>
-                        </a:rPr>
-                        <a:t>50/50 front coating, AR back</a:t>
-                      </a:r>
-                    </a:p>
-                  </a:txBody>
-                  <a:tcPr marL="54864" marR="54864" marT="18288" marB="18288">
-                    <a:solidFill>
-                      <a:srgbClr val="FFFFFF"/>
+                        <a:t>compensator plate</a:t>
+                      </a:r>
+                    </a:p>
+                  </a:txBody>
+                  <a:tcPr marL="54864" marR="54864" marT="18288" marB="18288">
+                    <a:solidFill>
+                      <a:srgbClr val="ECF1F6"/>
+                    </a:solidFill>
+                  </a:tcPr>
+                </a:tc>
+                <a:tc>
+                  <a:txBody>
+                    <a:bodyPr wrap="square"/>
+                    <a:lstStyle/>
+                    <a:p>
+                      <a:r>
+                        <a:rPr sz="1100" b="0">
+                          <a:solidFill>
+                            <a:srgbClr val="282828"/>
+                          </a:solidFill>
+                          <a:latin typeface="Arial"/>
+                        </a:rPr>
+                        <a:t>103 mm, matched to the splitter, in the mirror leg</a:t>
+                      </a:r>
+                    </a:p>
+                  </a:txBody>
+                  <a:tcPr marL="54864" marR="54864" marT="18288" marB="18288">
+                    <a:solidFill>
+                      <a:srgbClr val="ECF1F6"/>
+                    </a:solidFill>
+                  </a:tcPr>
+                </a:tc>
+                <a:tc>
+                  <a:txBody>
+                    <a:bodyPr wrap="square"/>
+                    <a:lstStyle/>
+                    <a:p>
+                      <a:r>
+                        <a:rPr sz="1100" b="0">
+                          <a:solidFill>
+                            <a:srgbClr val="282828"/>
+                          </a:solidFill>
+                          <a:latin typeface="Arial"/>
+                        </a:rPr>
+                        <a:t>AR</a:t>
+                      </a:r>
+                    </a:p>
+                  </a:txBody>
+                  <a:tcPr marL="54864" marR="54864" marT="18288" marB="18288">
+                    <a:solidFill>
+                      <a:srgbClr val="ECF1F6"/>
                     </a:solidFill>
                   </a:tcPr>
                 </a:tc>
@@ -28863,29 +28975,477 @@
                   </a:txBody>
                   <a:tcPr marL="54864" marR="54864" marT="18288" marB="18288">
                     <a:solidFill>
-                      <a:srgbClr val="FFFFFF"/>
-                    </a:solidFill>
-                  </a:tcPr>
-                </a:tc>
-                <a:tc>
-                  <a:txBody>
-                    <a:bodyPr wrap="square"/>
-                    <a:lstStyle/>
-                    <a:p>
-                      <a:r>
-                        <a:rPr sz="1100" b="0">
-                          <a:solidFill>
-                            <a:srgbClr val="282828"/>
-                          </a:solidFill>
-                          <a:latin typeface="Arial"/>
-                        </a:rPr>
-                        <a:t>splits to the mirror and the reference arm</a:t>
-                      </a:r>
-                    </a:p>
-                  </a:txBody>
-                  <a:tcPr marL="54864" marR="54864" marT="18288" marB="18288">
-                    <a:solidFill>
-                      <a:srgbClr val="FFFFFF"/>
+                      <a:srgbClr val="ECF1F6"/>
+                    </a:solidFill>
+                  </a:tcPr>
+                </a:tc>
+                <a:tc>
+                  <a:txBody>
+                    <a:bodyPr wrap="square"/>
+                    <a:lstStyle/>
+                    <a:p>
+                      <a:r>
+                        <a:rPr sz="1100" b="0">
+                          <a:solidFill>
+                            <a:srgbClr val="282828"/>
+                          </a:solidFill>
+                          <a:latin typeface="Arial"/>
+                        </a:rPr>
+                        <a:t>balances the glass path through the splitter</a:t>
+                      </a:r>
+                    </a:p>
+                  </a:txBody>
+                  <a:tcPr marL="54864" marR="54864" marT="18288" marB="18288">
+                    <a:solidFill>
+                      <a:srgbClr val="ECF1F6"/>
+                    </a:solidFill>
+                  </a:tcPr>
+                </a:tc>
+              </a:tr>
+              <a:tr h="845820">
+                <a:tc>
+                  <a:txBody>
+                    <a:bodyPr wrap="square"/>
+                    <a:lstStyle/>
+                    <a:p>
+                      <a:r>
+                        <a:rPr sz="1100" b="0">
+                          <a:solidFill>
+                            <a:srgbClr val="282828"/>
+                          </a:solidFill>
+                          <a:latin typeface="Arial"/>
+                        </a:rPr>
+                        <a:t>deformable mirror</a:t>
+                      </a:r>
+                    </a:p>
+                  </a:txBody>
+                  <a:tcPr marL="54864" marR="54864" marT="18288" marB="18288">
+                    <a:solidFill>
+                      <a:srgbClr val="FFFFFF"/>
+                    </a:solidFill>
+                  </a:tcPr>
+                </a:tc>
+                <a:tc>
+                  <a:txBody>
+                    <a:bodyPr wrap="square"/>
+                    <a:lstStyle/>
+                    <a:p>
+                      <a:r>
+                        <a:rPr sz="1100" b="0">
+                          <a:solidFill>
+                            <a:srgbClr val="282828"/>
+                          </a:solidFill>
+                          <a:latin typeface="Arial"/>
+                        </a:rPr>
+                        <a:t>96×96, 1 mm pitch, 96 mm, 700 mm leg</a:t>
+                      </a:r>
+                    </a:p>
+                  </a:txBody>
+                  <a:tcPr marL="54864" marR="54864" marT="18288" marB="18288">
+                    <a:solidFill>
+                      <a:srgbClr val="FFFFFF"/>
+                    </a:solidFill>
+                  </a:tcPr>
+                </a:tc>
+                <a:tc>
+                  <a:txBody>
+                    <a:bodyPr wrap="square"/>
+                    <a:lstStyle/>
+                    <a:p>
+                      <a:r>
+                        <a:rPr sz="1100" b="0">
+                          <a:solidFill>
+                            <a:srgbClr val="282828"/>
+                          </a:solidFill>
+                          <a:latin typeface="Arial"/>
+                        </a:rPr>
+                        <a:t>protected aluminum</a:t>
+                      </a:r>
+                    </a:p>
+                  </a:txBody>
+                  <a:tcPr marL="54864" marR="54864" marT="18288" marB="18288">
+                    <a:solidFill>
+                      <a:srgbClr val="FFFFFF"/>
+                    </a:solidFill>
+                  </a:tcPr>
+                </a:tc>
+                <a:tc>
+                  <a:txBody>
+                    <a:bodyPr wrap="square"/>
+                    <a:lstStyle/>
+                    <a:p>
+                      <a:r>
+                        <a:rPr sz="1100" b="0">
+                          <a:solidFill>
+                            <a:srgbClr val="282828"/>
+                          </a:solidFill>
+                          <a:latin typeface="Arial"/>
+                        </a:rPr>
+                        <a:t>1</a:t>
+                      </a:r>
+                    </a:p>
+                  </a:txBody>
+                  <a:tcPr marL="54864" marR="54864" marT="18288" marB="18288">
+                    <a:solidFill>
+                      <a:srgbClr val="FFFFFF"/>
+                    </a:solidFill>
+                  </a:tcPr>
+                </a:tc>
+                <a:tc>
+                  <a:txBody>
+                    <a:bodyPr wrap="square"/>
+                    <a:lstStyle/>
+                    <a:p>
+                      <a:r>
+                        <a:rPr sz="1100" b="0">
+                          <a:solidFill>
+                            <a:srgbClr val="282828"/>
+                          </a:solidFill>
+                          <a:latin typeface="Arial"/>
+                        </a:rPr>
+                        <a:t>the test object; its surface is the measurand</a:t>
+                      </a:r>
+                    </a:p>
+                  </a:txBody>
+                  <a:tcPr marL="54864" marR="54864" marT="18288" marB="18288">
+                    <a:solidFill>
+                      <a:srgbClr val="FFFFFF"/>
+                    </a:solidFill>
+                  </a:tcPr>
+                </a:tc>
+              </a:tr>
+              <a:tr h="845820">
+                <a:tc>
+                  <a:txBody>
+                    <a:bodyPr wrap="square"/>
+                    <a:lstStyle/>
+                    <a:p>
+                      <a:r>
+                        <a:rPr sz="1100" b="0">
+                          <a:solidFill>
+                            <a:srgbClr val="282828"/>
+                          </a:solidFill>
+                          <a:latin typeface="Arial"/>
+                        </a:rPr>
+                        <a:t>focuser L2</a:t>
+                      </a:r>
+                    </a:p>
+                  </a:txBody>
+                  <a:tcPr marL="54864" marR="54864" marT="18288" marB="18288">
+                    <a:solidFill>
+                      <a:srgbClr val="ECF1F6"/>
+                    </a:solidFill>
+                  </a:tcPr>
+                </a:tc>
+                <a:tc>
+                  <a:txBody>
+                    <a:bodyPr wrap="square"/>
+                    <a:lstStyle/>
+                    <a:p>
+                      <a:r>
+                        <a:rPr sz="1100" b="0">
+                          <a:solidFill>
+                            <a:srgbClr val="282828"/>
+                          </a:solidFill>
+                          <a:latin typeface="Arial"/>
+                        </a:rPr>
+                        <a:t>f 429 mm, 103 mm, plano-convex conic; modeled 8 mm center</a:t>
+                      </a:r>
+                    </a:p>
+                  </a:txBody>
+                  <a:tcPr marL="54864" marR="54864" marT="18288" marB="18288">
+                    <a:solidFill>
+                      <a:srgbClr val="ECF1F6"/>
+                    </a:solidFill>
+                  </a:tcPr>
+                </a:tc>
+                <a:tc>
+                  <a:txBody>
+                    <a:bodyPr wrap="square"/>
+                    <a:lstStyle/>
+                    <a:p>
+                      <a:r>
+                        <a:rPr sz="1100" b="0">
+                          <a:solidFill>
+                            <a:srgbClr val="282828"/>
+                          </a:solidFill>
+                          <a:latin typeface="Arial"/>
+                        </a:rPr>
+                        <a:t>AR</a:t>
+                      </a:r>
+                    </a:p>
+                  </a:txBody>
+                  <a:tcPr marL="54864" marR="54864" marT="18288" marB="18288">
+                    <a:solidFill>
+                      <a:srgbClr val="ECF1F6"/>
+                    </a:solidFill>
+                  </a:tcPr>
+                </a:tc>
+                <a:tc>
+                  <a:txBody>
+                    <a:bodyPr wrap="square"/>
+                    <a:lstStyle/>
+                    <a:p>
+                      <a:r>
+                        <a:rPr sz="1100" b="0">
+                          <a:solidFill>
+                            <a:srgbClr val="282828"/>
+                          </a:solidFill>
+                          <a:latin typeface="Arial"/>
+                        </a:rPr>
+                        <a:t>1</a:t>
+                      </a:r>
+                    </a:p>
+                  </a:txBody>
+                  <a:tcPr marL="54864" marR="54864" marT="18288" marB="18288">
+                    <a:solidFill>
+                      <a:srgbClr val="ECF1F6"/>
+                    </a:solidFill>
+                  </a:tcPr>
+                </a:tc>
+                <a:tc>
+                  <a:txBody>
+                    <a:bodyPr wrap="square"/>
+                    <a:lstStyle/>
+                    <a:p>
+                      <a:r>
+                        <a:rPr sz="1100" b="0">
+                          <a:solidFill>
+                            <a:srgbClr val="282828"/>
+                          </a:solidFill>
+                          <a:latin typeface="Arial"/>
+                        </a:rPr>
+                        <a:t>the internal focus at F/4.2 where the masks sit</a:t>
+                      </a:r>
+                    </a:p>
+                  </a:txBody>
+                  <a:tcPr marL="54864" marR="54864" marT="18288" marB="18288">
+                    <a:solidFill>
+                      <a:srgbClr val="ECF1F6"/>
+                    </a:solidFill>
+                  </a:tcPr>
+                </a:tc>
+              </a:tr>
+              <a:tr h="1034415">
+                <a:tc>
+                  <a:txBody>
+                    <a:bodyPr wrap="square"/>
+                    <a:lstStyle/>
+                    <a:p>
+                      <a:r>
+                        <a:rPr sz="1100" b="0">
+                          <a:solidFill>
+                            <a:srgbClr val="282828"/>
+                          </a:solidFill>
+                          <a:latin typeface="Arial"/>
+                        </a:rPr>
+                        <a:t>mask seat</a:t>
+                      </a:r>
+                    </a:p>
+                  </a:txBody>
+                  <a:tcPr marL="54864" marR="54864" marT="18288" marB="18288">
+                    <a:solidFill>
+                      <a:srgbClr val="FFFFFF"/>
+                    </a:solidFill>
+                  </a:tcPr>
+                </a:tc>
+                <a:tc>
+                  <a:txBody>
+                    <a:bodyPr wrap="square"/>
+                    <a:lstStyle/>
+                    <a:p>
+                      <a:r>
+                        <a:rPr sz="1100" b="0">
+                          <a:solidFill>
+                            <a:srgbClr val="282828"/>
+                          </a:solidFill>
+                          <a:latin typeface="Arial"/>
+                        </a:rPr>
+                        <a:t>translation stage at the internal focus</a:t>
+                      </a:r>
+                    </a:p>
+                  </a:txBody>
+                  <a:tcPr marL="54864" marR="54864" marT="18288" marB="18288">
+                    <a:solidFill>
+                      <a:srgbClr val="FFFFFF"/>
+                    </a:solidFill>
+                  </a:tcPr>
+                </a:tc>
+                <a:tc>
+                  <a:txBody>
+                    <a:bodyPr wrap="square"/>
+                    <a:lstStyle/>
+                    <a:p>
+                      <a:r>
+                        <a:rPr sz="1100" b="0">
+                          <a:solidFill>
+                            <a:srgbClr val="282828"/>
+                          </a:solidFill>
+                          <a:latin typeface="Arial"/>
+                        </a:rPr>
+                        <a:t>—</a:t>
+                      </a:r>
+                    </a:p>
+                  </a:txBody>
+                  <a:tcPr marL="54864" marR="54864" marT="18288" marB="18288">
+                    <a:solidFill>
+                      <a:srgbClr val="FFFFFF"/>
+                    </a:solidFill>
+                  </a:tcPr>
+                </a:tc>
+                <a:tc>
+                  <a:txBody>
+                    <a:bodyPr wrap="square"/>
+                    <a:lstStyle/>
+                    <a:p>
+                      <a:r>
+                        <a:rPr sz="1100" b="0">
+                          <a:solidFill>
+                            <a:srgbClr val="282828"/>
+                          </a:solidFill>
+                          <a:latin typeface="Arial"/>
+                        </a:rPr>
+                        <a:t>1</a:t>
+                      </a:r>
+                    </a:p>
+                  </a:txBody>
+                  <a:tcPr marL="54864" marR="54864" marT="18288" marB="18288">
+                    <a:solidFill>
+                      <a:srgbClr val="FFFFFF"/>
+                    </a:solidFill>
+                  </a:tcPr>
+                </a:tc>
+                <a:tc>
+                  <a:txBody>
+                    <a:bodyPr wrap="square"/>
+                    <a:lstStyle/>
+                    <a:p>
+                      <a:r>
+                        <a:rPr sz="1100" b="0">
+                          <a:solidFill>
+                            <a:srgbClr val="282828"/>
+                          </a:solidFill>
+                          <a:latin typeface="Arial"/>
+                        </a:rPr>
+                        <a:t>selects the sensor: clear window, dimple, metasurface, pinhole</a:t>
+                      </a:r>
+                    </a:p>
+                  </a:txBody>
+                  <a:tcPr marL="54864" marR="54864" marT="18288" marB="18288">
+                    <a:solidFill>
+                      <a:srgbClr val="FFFFFF"/>
+                    </a:solidFill>
+                  </a:tcPr>
+                </a:tc>
+              </a:tr>
+              <a:tr h="1034415">
+                <a:tc>
+                  <a:txBody>
+                    <a:bodyPr wrap="square"/>
+                    <a:lstStyle/>
+                    <a:p>
+                      <a:r>
+                        <a:rPr sz="1100" b="0">
+                          <a:solidFill>
+                            <a:srgbClr val="282828"/>
+                          </a:solidFill>
+                          <a:latin typeface="Arial"/>
+                        </a:rPr>
+                        <a:t>field lens</a:t>
+                      </a:r>
+                    </a:p>
+                  </a:txBody>
+                  <a:tcPr marL="54864" marR="54864" marT="18288" marB="18288">
+                    <a:solidFill>
+                      <a:srgbClr val="ECF1F6"/>
+                    </a:solidFill>
+                  </a:tcPr>
+                </a:tc>
+                <a:tc>
+                  <a:txBody>
+                    <a:bodyPr wrap="square"/>
+                    <a:lstStyle/>
+                    <a:p>
+                      <a:r>
+                        <a:rPr sz="1100" b="0">
+                          <a:solidFill>
+                            <a:srgbClr val="282828"/>
+                          </a:solidFill>
+                          <a:latin typeface="Arial"/>
+                        </a:rPr>
+                        <a:t>f 43 mm, 21 mm</a:t>
+                      </a:r>
+                    </a:p>
+                  </a:txBody>
+                  <a:tcPr marL="54864" marR="54864" marT="18288" marB="18288">
+                    <a:solidFill>
+                      <a:srgbClr val="ECF1F6"/>
+                    </a:solidFill>
+                  </a:tcPr>
+                </a:tc>
+                <a:tc>
+                  <a:txBody>
+                    <a:bodyPr wrap="square"/>
+                    <a:lstStyle/>
+                    <a:p>
+                      <a:r>
+                        <a:rPr sz="1100" b="0">
+                          <a:solidFill>
+                            <a:srgbClr val="282828"/>
+                          </a:solidFill>
+                          <a:latin typeface="Arial"/>
+                        </a:rPr>
+                        <a:t>AR</a:t>
+                      </a:r>
+                    </a:p>
+                  </a:txBody>
+                  <a:tcPr marL="54864" marR="54864" marT="18288" marB="18288">
+                    <a:solidFill>
+                      <a:srgbClr val="ECF1F6"/>
+                    </a:solidFill>
+                  </a:tcPr>
+                </a:tc>
+                <a:tc>
+                  <a:txBody>
+                    <a:bodyPr wrap="square"/>
+                    <a:lstStyle/>
+                    <a:p>
+                      <a:r>
+                        <a:rPr sz="1100" b="0">
+                          <a:solidFill>
+                            <a:srgbClr val="282828"/>
+                          </a:solidFill>
+                          <a:latin typeface="Arial"/>
+                        </a:rPr>
+                        <a:t>1</a:t>
+                      </a:r>
+                    </a:p>
+                  </a:txBody>
+                  <a:tcPr marL="54864" marR="54864" marT="18288" marB="18288">
+                    <a:solidFill>
+                      <a:srgbClr val="ECF1F6"/>
+                    </a:solidFill>
+                  </a:tcPr>
+                </a:tc>
+                <a:tc>
+                  <a:txBody>
+                    <a:bodyPr wrap="square"/>
+                    <a:lstStyle/>
+                    <a:p>
+                      <a:r>
+                        <a:rPr sz="1100" b="0">
+                          <a:solidFill>
+                            <a:srgbClr val="282828"/>
+                          </a:solidFill>
+                          <a:latin typeface="Arial"/>
+                        </a:rPr>
+                        <a:t>reimages the pupil (7.5-7.8 mm as traced) 32 mm behind it</a:t>
+                      </a:r>
+                    </a:p>
+                  </a:txBody>
+                  <a:tcPr marL="54864" marR="54864" marT="18288" marB="18288">
+                    <a:solidFill>
+                      <a:srgbClr val="ECF1F6"/>
                     </a:solidFill>
                   </a:tcPr>
                 </a:tc>
@@ -28903,57 +29463,57 @@
                           </a:solidFill>
                           <a:latin typeface="Arial"/>
                         </a:rPr>
-                        <a:t>compensator plate</a:t>
-                      </a:r>
-                    </a:p>
-                  </a:txBody>
-                  <a:tcPr marL="54864" marR="54864" marT="18288" marB="18288">
-                    <a:solidFill>
-                      <a:srgbClr val="ECF1F6"/>
-                    </a:solidFill>
-                  </a:tcPr>
-                </a:tc>
-                <a:tc>
-                  <a:txBody>
-                    <a:bodyPr wrap="square"/>
-                    <a:lstStyle/>
-                    <a:p>
-                      <a:r>
-                        <a:rPr sz="1100" b="0">
-                          <a:solidFill>
-                            <a:srgbClr val="282828"/>
-                          </a:solidFill>
-                          <a:latin typeface="Arial"/>
-                        </a:rPr>
-                        <a:t>103 mm, matched to the splitter, in the mirror leg</a:t>
-                      </a:r>
-                    </a:p>
-                  </a:txBody>
-                  <a:tcPr marL="54864" marR="54864" marT="18288" marB="18288">
-                    <a:solidFill>
-                      <a:srgbClr val="ECF1F6"/>
-                    </a:solidFill>
-                  </a:tcPr>
-                </a:tc>
-                <a:tc>
-                  <a:txBody>
-                    <a:bodyPr wrap="square"/>
-                    <a:lstStyle/>
-                    <a:p>
-                      <a:r>
-                        <a:rPr sz="1100" b="0">
-                          <a:solidFill>
-                            <a:srgbClr val="282828"/>
-                          </a:solidFill>
-                          <a:latin typeface="Arial"/>
-                        </a:rPr>
-                        <a:t>AR</a:t>
-                      </a:r>
-                    </a:p>
-                  </a:txBody>
-                  <a:tcPr marL="54864" marR="54864" marT="18288" marB="18288">
-                    <a:solidFill>
-                      <a:srgbClr val="ECF1F6"/>
+                        <a:t>camera A</a:t>
+                      </a:r>
+                    </a:p>
+                  </a:txBody>
+                  <a:tcPr marL="54864" marR="54864" marT="18288" marB="18288">
+                    <a:solidFill>
+                      <a:srgbClr val="FFFFFF"/>
+                    </a:solidFill>
+                  </a:tcPr>
+                </a:tc>
+                <a:tc>
+                  <a:txBody>
+                    <a:bodyPr wrap="square"/>
+                    <a:lstStyle/>
+                    <a:p>
+                      <a:r>
+                        <a:rPr sz="1100" b="0">
+                          <a:solidFill>
+                            <a:srgbClr val="282828"/>
+                          </a:solidFill>
+                          <a:latin typeface="Arial"/>
+                        </a:rPr>
+                        <a:t>sCMOS 2048×2048, 6.5 µm (13.3 mm): 1155 raw pixels across the 7.5 mm pupil image, binned 3 to 385 or 6 to the modeled 193</a:t>
+                      </a:r>
+                    </a:p>
+                  </a:txBody>
+                  <a:tcPr marL="54864" marR="54864" marT="18288" marB="18288">
+                    <a:solidFill>
+                      <a:srgbClr val="FFFFFF"/>
+                    </a:solidFill>
+                  </a:tcPr>
+                </a:tc>
+                <a:tc>
+                  <a:txBody>
+                    <a:bodyPr wrap="square"/>
+                    <a:lstStyle/>
+                    <a:p>
+                      <a:r>
+                        <a:rPr sz="1100" b="0">
+                          <a:solidFill>
+                            <a:srgbClr val="282828"/>
+                          </a:solidFill>
+                          <a:latin typeface="Arial"/>
+                        </a:rPr>
+                        <a:t>—</a:t>
+                      </a:r>
+                    </a:p>
+                  </a:txBody>
+                  <a:tcPr marL="54864" marR="54864" marT="18288" marB="18288">
+                    <a:solidFill>
+                      <a:srgbClr val="FFFFFF"/>
                     </a:solidFill>
                   </a:tcPr>
                 </a:tc>
@@ -28975,594 +29535,34 @@
                   </a:txBody>
                   <a:tcPr marL="54864" marR="54864" marT="18288" marB="18288">
                     <a:solidFill>
-                      <a:srgbClr val="ECF1F6"/>
-                    </a:solidFill>
-                  </a:tcPr>
-                </a:tc>
-                <a:tc>
-                  <a:txBody>
-                    <a:bodyPr wrap="square"/>
-                    <a:lstStyle/>
-                    <a:p>
-                      <a:r>
-                        <a:rPr sz="1100" b="0">
-                          <a:solidFill>
-                            <a:srgbClr val="282828"/>
-                          </a:solidFill>
-                          <a:latin typeface="Arial"/>
-                        </a:rPr>
-                        <a:t>balances the glass path through the splitter</a:t>
-                      </a:r>
-                    </a:p>
-                  </a:txBody>
-                  <a:tcPr marL="54864" marR="54864" marT="18288" marB="18288">
-                    <a:solidFill>
-                      <a:srgbClr val="ECF1F6"/>
+                      <a:srgbClr val="FFFFFF"/>
+                    </a:solidFill>
+                  </a:tcPr>
+                </a:tc>
+                <a:tc>
+                  <a:txBody>
+                    <a:bodyPr wrap="square"/>
+                    <a:lstStyle/>
+                    <a:p>
+                      <a:r>
+                        <a:rPr sz="1100" b="0">
+                          <a:solidFill>
+                            <a:srgbClr val="282828"/>
+                          </a:solidFill>
+                          <a:latin typeface="Arial"/>
+                        </a:rPr>
+                        <a:t>every configuration's pupil image</a:t>
+                      </a:r>
+                    </a:p>
+                  </a:txBody>
+                  <a:tcPr marL="54864" marR="54864" marT="18288" marB="18288">
+                    <a:solidFill>
+                      <a:srgbClr val="FFFFFF"/>
                     </a:solidFill>
                   </a:tcPr>
                 </a:tc>
               </a:tr>
               <a:tr h="657225">
-                <a:tc>
-                  <a:txBody>
-                    <a:bodyPr wrap="square"/>
-                    <a:lstStyle/>
-                    <a:p>
-                      <a:r>
-                        <a:rPr sz="1100" b="0">
-                          <a:solidFill>
-                            <a:srgbClr val="282828"/>
-                          </a:solidFill>
-                          <a:latin typeface="Arial"/>
-                        </a:rPr>
-                        <a:t>deformable mirror</a:t>
-                      </a:r>
-                    </a:p>
-                  </a:txBody>
-                  <a:tcPr marL="54864" marR="54864" marT="18288" marB="18288">
-                    <a:solidFill>
-                      <a:srgbClr val="FFFFFF"/>
-                    </a:solidFill>
-                  </a:tcPr>
-                </a:tc>
-                <a:tc>
-                  <a:txBody>
-                    <a:bodyPr wrap="square"/>
-                    <a:lstStyle/>
-                    <a:p>
-                      <a:r>
-                        <a:rPr sz="1100" b="0">
-                          <a:solidFill>
-                            <a:srgbClr val="282828"/>
-                          </a:solidFill>
-                          <a:latin typeface="Arial"/>
-                        </a:rPr>
-                        <a:t>96×96, 1 mm pitch, 96 mm, 700 mm leg</a:t>
-                      </a:r>
-                    </a:p>
-                  </a:txBody>
-                  <a:tcPr marL="54864" marR="54864" marT="18288" marB="18288">
-                    <a:solidFill>
-                      <a:srgbClr val="FFFFFF"/>
-                    </a:solidFill>
-                  </a:tcPr>
-                </a:tc>
-                <a:tc>
-                  <a:txBody>
-                    <a:bodyPr wrap="square"/>
-                    <a:lstStyle/>
-                    <a:p>
-                      <a:r>
-                        <a:rPr sz="1100" b="0">
-                          <a:solidFill>
-                            <a:srgbClr val="282828"/>
-                          </a:solidFill>
-                          <a:latin typeface="Arial"/>
-                        </a:rPr>
-                        <a:t>protected aluminum</a:t>
-                      </a:r>
-                    </a:p>
-                  </a:txBody>
-                  <a:tcPr marL="54864" marR="54864" marT="18288" marB="18288">
-                    <a:solidFill>
-                      <a:srgbClr val="FFFFFF"/>
-                    </a:solidFill>
-                  </a:tcPr>
-                </a:tc>
-                <a:tc>
-                  <a:txBody>
-                    <a:bodyPr wrap="square"/>
-                    <a:lstStyle/>
-                    <a:p>
-                      <a:r>
-                        <a:rPr sz="1100" b="0">
-                          <a:solidFill>
-                            <a:srgbClr val="282828"/>
-                          </a:solidFill>
-                          <a:latin typeface="Arial"/>
-                        </a:rPr>
-                        <a:t>1</a:t>
-                      </a:r>
-                    </a:p>
-                  </a:txBody>
-                  <a:tcPr marL="54864" marR="54864" marT="18288" marB="18288">
-                    <a:solidFill>
-                      <a:srgbClr val="FFFFFF"/>
-                    </a:solidFill>
-                  </a:tcPr>
-                </a:tc>
-                <a:tc>
-                  <a:txBody>
-                    <a:bodyPr wrap="square"/>
-                    <a:lstStyle/>
-                    <a:p>
-                      <a:r>
-                        <a:rPr sz="1100" b="0">
-                          <a:solidFill>
-                            <a:srgbClr val="282828"/>
-                          </a:solidFill>
-                          <a:latin typeface="Arial"/>
-                        </a:rPr>
-                        <a:t>the test object; its surface is the measurand</a:t>
-                      </a:r>
-                    </a:p>
-                  </a:txBody>
-                  <a:tcPr marL="54864" marR="54864" marT="18288" marB="18288">
-                    <a:solidFill>
-                      <a:srgbClr val="FFFFFF"/>
-                    </a:solidFill>
-                  </a:tcPr>
-                </a:tc>
-              </a:tr>
-              <a:tr h="657225">
-                <a:tc>
-                  <a:txBody>
-                    <a:bodyPr wrap="square"/>
-                    <a:lstStyle/>
-                    <a:p>
-                      <a:r>
-                        <a:rPr sz="1100" b="0">
-                          <a:solidFill>
-                            <a:srgbClr val="282828"/>
-                          </a:solidFill>
-                          <a:latin typeface="Arial"/>
-                        </a:rPr>
-                        <a:t>focuser L2</a:t>
-                      </a:r>
-                    </a:p>
-                  </a:txBody>
-                  <a:tcPr marL="54864" marR="54864" marT="18288" marB="18288">
-                    <a:solidFill>
-                      <a:srgbClr val="ECF1F6"/>
-                    </a:solidFill>
-                  </a:tcPr>
-                </a:tc>
-                <a:tc>
-                  <a:txBody>
-                    <a:bodyPr wrap="square"/>
-                    <a:lstStyle/>
-                    <a:p>
-                      <a:r>
-                        <a:rPr sz="1100" b="0">
-                          <a:solidFill>
-                            <a:srgbClr val="282828"/>
-                          </a:solidFill>
-                          <a:latin typeface="Arial"/>
-                        </a:rPr>
-                        <a:t>f 429 mm, 103 mm, plano-convex conic; modeled 8 mm center</a:t>
-                      </a:r>
-                    </a:p>
-                  </a:txBody>
-                  <a:tcPr marL="54864" marR="54864" marT="18288" marB="18288">
-                    <a:solidFill>
-                      <a:srgbClr val="ECF1F6"/>
-                    </a:solidFill>
-                  </a:tcPr>
-                </a:tc>
-                <a:tc>
-                  <a:txBody>
-                    <a:bodyPr wrap="square"/>
-                    <a:lstStyle/>
-                    <a:p>
-                      <a:r>
-                        <a:rPr sz="1100" b="0">
-                          <a:solidFill>
-                            <a:srgbClr val="282828"/>
-                          </a:solidFill>
-                          <a:latin typeface="Arial"/>
-                        </a:rPr>
-                        <a:t>AR</a:t>
-                      </a:r>
-                    </a:p>
-                  </a:txBody>
-                  <a:tcPr marL="54864" marR="54864" marT="18288" marB="18288">
-                    <a:solidFill>
-                      <a:srgbClr val="ECF1F6"/>
-                    </a:solidFill>
-                  </a:tcPr>
-                </a:tc>
-                <a:tc>
-                  <a:txBody>
-                    <a:bodyPr wrap="square"/>
-                    <a:lstStyle/>
-                    <a:p>
-                      <a:r>
-                        <a:rPr sz="1100" b="0">
-                          <a:solidFill>
-                            <a:srgbClr val="282828"/>
-                          </a:solidFill>
-                          <a:latin typeface="Arial"/>
-                        </a:rPr>
-                        <a:t>1</a:t>
-                      </a:r>
-                    </a:p>
-                  </a:txBody>
-                  <a:tcPr marL="54864" marR="54864" marT="18288" marB="18288">
-                    <a:solidFill>
-                      <a:srgbClr val="ECF1F6"/>
-                    </a:solidFill>
-                  </a:tcPr>
-                </a:tc>
-                <a:tc>
-                  <a:txBody>
-                    <a:bodyPr wrap="square"/>
-                    <a:lstStyle/>
-                    <a:p>
-                      <a:r>
-                        <a:rPr sz="1100" b="0">
-                          <a:solidFill>
-                            <a:srgbClr val="282828"/>
-                          </a:solidFill>
-                          <a:latin typeface="Arial"/>
-                        </a:rPr>
-                        <a:t>the internal focus at F/4.2 where the masks sit</a:t>
-                      </a:r>
-                    </a:p>
-                  </a:txBody>
-                  <a:tcPr marL="54864" marR="54864" marT="18288" marB="18288">
-                    <a:solidFill>
-                      <a:srgbClr val="ECF1F6"/>
-                    </a:solidFill>
-                  </a:tcPr>
-                </a:tc>
-              </a:tr>
-              <a:tr h="845820">
-                <a:tc>
-                  <a:txBody>
-                    <a:bodyPr wrap="square"/>
-                    <a:lstStyle/>
-                    <a:p>
-                      <a:r>
-                        <a:rPr sz="1100" b="0">
-                          <a:solidFill>
-                            <a:srgbClr val="282828"/>
-                          </a:solidFill>
-                          <a:latin typeface="Arial"/>
-                        </a:rPr>
-                        <a:t>mask seat</a:t>
-                      </a:r>
-                    </a:p>
-                  </a:txBody>
-                  <a:tcPr marL="54864" marR="54864" marT="18288" marB="18288">
-                    <a:solidFill>
-                      <a:srgbClr val="FFFFFF"/>
-                    </a:solidFill>
-                  </a:tcPr>
-                </a:tc>
-                <a:tc>
-                  <a:txBody>
-                    <a:bodyPr wrap="square"/>
-                    <a:lstStyle/>
-                    <a:p>
-                      <a:r>
-                        <a:rPr sz="1100" b="0">
-                          <a:solidFill>
-                            <a:srgbClr val="282828"/>
-                          </a:solidFill>
-                          <a:latin typeface="Arial"/>
-                        </a:rPr>
-                        <a:t>translation stage at the internal focus</a:t>
-                      </a:r>
-                    </a:p>
-                  </a:txBody>
-                  <a:tcPr marL="54864" marR="54864" marT="18288" marB="18288">
-                    <a:solidFill>
-                      <a:srgbClr val="FFFFFF"/>
-                    </a:solidFill>
-                  </a:tcPr>
-                </a:tc>
-                <a:tc>
-                  <a:txBody>
-                    <a:bodyPr wrap="square"/>
-                    <a:lstStyle/>
-                    <a:p>
-                      <a:r>
-                        <a:rPr sz="1100" b="0">
-                          <a:solidFill>
-                            <a:srgbClr val="282828"/>
-                          </a:solidFill>
-                          <a:latin typeface="Arial"/>
-                        </a:rPr>
-                        <a:t>—</a:t>
-                      </a:r>
-                    </a:p>
-                  </a:txBody>
-                  <a:tcPr marL="54864" marR="54864" marT="18288" marB="18288">
-                    <a:solidFill>
-                      <a:srgbClr val="FFFFFF"/>
-                    </a:solidFill>
-                  </a:tcPr>
-                </a:tc>
-                <a:tc>
-                  <a:txBody>
-                    <a:bodyPr wrap="square"/>
-                    <a:lstStyle/>
-                    <a:p>
-                      <a:r>
-                        <a:rPr sz="1100" b="0">
-                          <a:solidFill>
-                            <a:srgbClr val="282828"/>
-                          </a:solidFill>
-                          <a:latin typeface="Arial"/>
-                        </a:rPr>
-                        <a:t>1</a:t>
-                      </a:r>
-                    </a:p>
-                  </a:txBody>
-                  <a:tcPr marL="54864" marR="54864" marT="18288" marB="18288">
-                    <a:solidFill>
-                      <a:srgbClr val="FFFFFF"/>
-                    </a:solidFill>
-                  </a:tcPr>
-                </a:tc>
-                <a:tc>
-                  <a:txBody>
-                    <a:bodyPr wrap="square"/>
-                    <a:lstStyle/>
-                    <a:p>
-                      <a:r>
-                        <a:rPr sz="1100" b="0">
-                          <a:solidFill>
-                            <a:srgbClr val="282828"/>
-                          </a:solidFill>
-                          <a:latin typeface="Arial"/>
-                        </a:rPr>
-                        <a:t>selects the sensor: clear window, dimple, metasurface, pinhole</a:t>
-                      </a:r>
-                    </a:p>
-                  </a:txBody>
-                  <a:tcPr marL="54864" marR="54864" marT="18288" marB="18288">
-                    <a:solidFill>
-                      <a:srgbClr val="FFFFFF"/>
-                    </a:solidFill>
-                  </a:tcPr>
-                </a:tc>
-              </a:tr>
-              <a:tr h="845820">
-                <a:tc>
-                  <a:txBody>
-                    <a:bodyPr wrap="square"/>
-                    <a:lstStyle/>
-                    <a:p>
-                      <a:r>
-                        <a:rPr sz="1100" b="0">
-                          <a:solidFill>
-                            <a:srgbClr val="282828"/>
-                          </a:solidFill>
-                          <a:latin typeface="Arial"/>
-                        </a:rPr>
-                        <a:t>field lens</a:t>
-                      </a:r>
-                    </a:p>
-                  </a:txBody>
-                  <a:tcPr marL="54864" marR="54864" marT="18288" marB="18288">
-                    <a:solidFill>
-                      <a:srgbClr val="ECF1F6"/>
-                    </a:solidFill>
-                  </a:tcPr>
-                </a:tc>
-                <a:tc>
-                  <a:txBody>
-                    <a:bodyPr wrap="square"/>
-                    <a:lstStyle/>
-                    <a:p>
-                      <a:r>
-                        <a:rPr sz="1100" b="0">
-                          <a:solidFill>
-                            <a:srgbClr val="282828"/>
-                          </a:solidFill>
-                          <a:latin typeface="Arial"/>
-                        </a:rPr>
-                        <a:t>f 43 mm, 21 mm</a:t>
-                      </a:r>
-                    </a:p>
-                  </a:txBody>
-                  <a:tcPr marL="54864" marR="54864" marT="18288" marB="18288">
-                    <a:solidFill>
-                      <a:srgbClr val="ECF1F6"/>
-                    </a:solidFill>
-                  </a:tcPr>
-                </a:tc>
-                <a:tc>
-                  <a:txBody>
-                    <a:bodyPr wrap="square"/>
-                    <a:lstStyle/>
-                    <a:p>
-                      <a:r>
-                        <a:rPr sz="1100" b="0">
-                          <a:solidFill>
-                            <a:srgbClr val="282828"/>
-                          </a:solidFill>
-                          <a:latin typeface="Arial"/>
-                        </a:rPr>
-                        <a:t>AR</a:t>
-                      </a:r>
-                    </a:p>
-                  </a:txBody>
-                  <a:tcPr marL="54864" marR="54864" marT="18288" marB="18288">
-                    <a:solidFill>
-                      <a:srgbClr val="ECF1F6"/>
-                    </a:solidFill>
-                  </a:tcPr>
-                </a:tc>
-                <a:tc>
-                  <a:txBody>
-                    <a:bodyPr wrap="square"/>
-                    <a:lstStyle/>
-                    <a:p>
-                      <a:r>
-                        <a:rPr sz="1100" b="0">
-                          <a:solidFill>
-                            <a:srgbClr val="282828"/>
-                          </a:solidFill>
-                          <a:latin typeface="Arial"/>
-                        </a:rPr>
-                        <a:t>1</a:t>
-                      </a:r>
-                    </a:p>
-                  </a:txBody>
-                  <a:tcPr marL="54864" marR="54864" marT="18288" marB="18288">
-                    <a:solidFill>
-                      <a:srgbClr val="ECF1F6"/>
-                    </a:solidFill>
-                  </a:tcPr>
-                </a:tc>
-                <a:tc>
-                  <a:txBody>
-                    <a:bodyPr wrap="square"/>
-                    <a:lstStyle/>
-                    <a:p>
-                      <a:r>
-                        <a:rPr sz="1100" b="0">
-                          <a:solidFill>
-                            <a:srgbClr val="282828"/>
-                          </a:solidFill>
-                          <a:latin typeface="Arial"/>
-                        </a:rPr>
-                        <a:t>reimages the pupil (7.5-7.8 mm as traced) 32 mm behind it</a:t>
-                      </a:r>
-                    </a:p>
-                  </a:txBody>
-                  <a:tcPr marL="54864" marR="54864" marT="18288" marB="18288">
-                    <a:solidFill>
-                      <a:srgbClr val="ECF1F6"/>
-                    </a:solidFill>
-                  </a:tcPr>
-                </a:tc>
-              </a:tr>
-              <a:tr h="468630">
-                <a:tc>
-                  <a:txBody>
-                    <a:bodyPr wrap="square"/>
-                    <a:lstStyle/>
-                    <a:p>
-                      <a:r>
-                        <a:rPr sz="1100" b="0">
-                          <a:solidFill>
-                            <a:srgbClr val="282828"/>
-                          </a:solidFill>
-                          <a:latin typeface="Arial"/>
-                        </a:rPr>
-                        <a:t>camera A</a:t>
-                      </a:r>
-                    </a:p>
-                  </a:txBody>
-                  <a:tcPr marL="54864" marR="54864" marT="18288" marB="18288">
-                    <a:solidFill>
-                      <a:srgbClr val="FFFFFF"/>
-                    </a:solidFill>
-                  </a:tcPr>
-                </a:tc>
-                <a:tc>
-                  <a:txBody>
-                    <a:bodyPr wrap="square"/>
-                    <a:lstStyle/>
-                    <a:p>
-                      <a:r>
-                        <a:rPr sz="1100" b="0">
-                          <a:solidFill>
-                            <a:srgbClr val="282828"/>
-                          </a:solidFill>
-                          <a:latin typeface="Arial"/>
-                        </a:rPr>
-                        <a:t>sCMOS 2048×2048, 6.5 µm (13.3 mm): 1155 raw pixels across the 7.5 mm pupil image, binned 3 to 385 or 6 to the modeled 193</a:t>
-                      </a:r>
-                    </a:p>
-                  </a:txBody>
-                  <a:tcPr marL="54864" marR="54864" marT="18288" marB="18288">
-                    <a:solidFill>
-                      <a:srgbClr val="FFFFFF"/>
-                    </a:solidFill>
-                  </a:tcPr>
-                </a:tc>
-                <a:tc>
-                  <a:txBody>
-                    <a:bodyPr wrap="square"/>
-                    <a:lstStyle/>
-                    <a:p>
-                      <a:r>
-                        <a:rPr sz="1100" b="0">
-                          <a:solidFill>
-                            <a:srgbClr val="282828"/>
-                          </a:solidFill>
-                          <a:latin typeface="Arial"/>
-                        </a:rPr>
-                        <a:t>—</a:t>
-                      </a:r>
-                    </a:p>
-                  </a:txBody>
-                  <a:tcPr marL="54864" marR="54864" marT="18288" marB="18288">
-                    <a:solidFill>
-                      <a:srgbClr val="FFFFFF"/>
-                    </a:solidFill>
-                  </a:tcPr>
-                </a:tc>
-                <a:tc>
-                  <a:txBody>
-                    <a:bodyPr wrap="square"/>
-                    <a:lstStyle/>
-                    <a:p>
-                      <a:r>
-                        <a:rPr sz="1100" b="0">
-                          <a:solidFill>
-                            <a:srgbClr val="282828"/>
-                          </a:solidFill>
-                          <a:latin typeface="Arial"/>
-                        </a:rPr>
-                        <a:t>1</a:t>
-                      </a:r>
-                    </a:p>
-                  </a:txBody>
-                  <a:tcPr marL="54864" marR="54864" marT="18288" marB="18288">
-                    <a:solidFill>
-                      <a:srgbClr val="FFFFFF"/>
-                    </a:solidFill>
-                  </a:tcPr>
-                </a:tc>
-                <a:tc>
-                  <a:txBody>
-                    <a:bodyPr wrap="square"/>
-                    <a:lstStyle/>
-                    <a:p>
-                      <a:r>
-                        <a:rPr sz="1100" b="0">
-                          <a:solidFill>
-                            <a:srgbClr val="282828"/>
-                          </a:solidFill>
-                          <a:latin typeface="Arial"/>
-                        </a:rPr>
-                        <a:t>every configuration's pupil image</a:t>
-                      </a:r>
-                    </a:p>
-                  </a:txBody>
-                  <a:tcPr marL="54864" marR="54864" marT="18288" marB="18288">
-                    <a:solidFill>
-                      <a:srgbClr val="FFFFFF"/>
-                    </a:solidFill>
-                  </a:tcPr>
-                </a:tc>
-              </a:tr>
-              <a:tr h="468630">
                 <a:tc>
                   <a:txBody>
                     <a:bodyPr wrap="square"/>
@@ -29686,7 +29686,7 @@
         </p:nvSpPr>
         <p:spPr>
           <a:xfrm>
-            <a:off x="411480" y="8297037"/>
+            <a:off x="411480" y="9994392"/>
             <a:ext cx="11368735" cy="274320"/>
           </a:xfrm>
           <a:prstGeom prst="rect">

--- a/demo_session/deck_gauges_edit.pptx
+++ b/demo_session/deck_gauges_edit.pptx
@@ -10023,7 +10023,7 @@
                 </a:solidFill>
                 <a:latin typeface="Arial"/>
               </a:rPr>
-              <a:t>In closed loop at gain 0.5 the vector Zernike holds 3 pm from 1.5e12 photons per cycle, the pinhole and stepped Zernike from 2.3-2.6e12, the interferometer from 5.4-5.5e12 on either front end — and the sensors carry no fixed error</a:t>
+              <a:t>In closed loop at gain 0.5 the vector Zernike holds 3 pm from 1.5-1.7e12 photons per cycle, the pinhole and stepped Zernike from 2.3-2.7e12, the interferometer from 5.4-5.5e12, on either front end — and the sensors carry no fixed error</a:t>
             </a:r>
           </a:p>
         </p:txBody>
@@ -10082,7 +10082,7 @@
         </p:nvGraphicFramePr>
         <p:xfrm>
           <a:off x="411480" y="1298448"/>
-          <a:ext cx="5806437" cy="3463290"/>
+          <a:ext cx="5806437" cy="4869180"/>
         </p:xfrm>
         <a:graphic>
           <a:graphicData uri="http://schemas.openxmlformats.org/drawingml/2006/table">
@@ -10894,73 +10894,73 @@
                           </a:solidFill>
                           <a:latin typeface="Arial"/>
                         </a:rPr>
-                        <a:t>interferometer, mirror rig, redesigned</a:t>
-                      </a:r>
-                    </a:p>
-                  </a:txBody>
-                  <a:tcPr marL="54864" marR="54864" marT="18288" marB="18288">
-                    <a:solidFill>
-                      <a:srgbClr val="FFFFFF"/>
-                    </a:solidFill>
-                  </a:tcPr>
-                </a:tc>
-                <a:tc>
-                  <a:txBody>
-                    <a:bodyPr wrap="square"/>
-                    <a:lstStyle/>
-                    <a:p>
-                      <a:r>
-                        <a:rPr sz="1100" b="0">
-                          <a:solidFill>
-                            <a:srgbClr val="282828"/>
-                          </a:solidFill>
-                          <a:latin typeface="Arial"/>
-                        </a:rPr>
-                        <a:t>5.4e12</a:t>
-                      </a:r>
-                    </a:p>
-                  </a:txBody>
-                  <a:tcPr marL="54864" marR="54864" marT="18288" marB="18288">
-                    <a:solidFill>
-                      <a:srgbClr val="FFFFFF"/>
-                    </a:solidFill>
-                  </a:tcPr>
-                </a:tc>
-                <a:tc>
-                  <a:txBody>
-                    <a:bodyPr wrap="square"/>
-                    <a:lstStyle/>
-                    <a:p>
-                      <a:r>
-                        <a:rPr sz="1100" b="0">
-                          <a:solidFill>
-                            <a:srgbClr val="282828"/>
-                          </a:solidFill>
-                          <a:latin typeface="Arial"/>
-                        </a:rPr>
-                        <a:t>1.7e13</a:t>
-                      </a:r>
-                    </a:p>
-                  </a:txBody>
-                  <a:tcPr marL="54864" marR="54864" marT="18288" marB="18288">
-                    <a:solidFill>
-                      <a:srgbClr val="FFFFFF"/>
-                    </a:solidFill>
-                  </a:tcPr>
-                </a:tc>
-                <a:tc>
-                  <a:txBody>
-                    <a:bodyPr wrap="square"/>
-                    <a:lstStyle/>
-                    <a:p>
-                      <a:r>
-                        <a:rPr sz="1100" b="0">
-                          <a:solidFill>
-                            <a:srgbClr val="282828"/>
-                          </a:solidFill>
-                          <a:latin typeface="Arial"/>
-                        </a:rPr>
-                        <a:t>10.0 pm</a:t>
+                        <a:t>vector Zernike, mirror rig</a:t>
+                      </a:r>
+                    </a:p>
+                  </a:txBody>
+                  <a:tcPr marL="54864" marR="54864" marT="18288" marB="18288">
+                    <a:solidFill>
+                      <a:srgbClr val="FFFFFF"/>
+                    </a:solidFill>
+                  </a:tcPr>
+                </a:tc>
+                <a:tc>
+                  <a:txBody>
+                    <a:bodyPr wrap="square"/>
+                    <a:lstStyle/>
+                    <a:p>
+                      <a:r>
+                        <a:rPr sz="1100" b="0">
+                          <a:solidFill>
+                            <a:srgbClr val="282828"/>
+                          </a:solidFill>
+                          <a:latin typeface="Arial"/>
+                        </a:rPr>
+                        <a:t>1.7e12</a:t>
+                      </a:r>
+                    </a:p>
+                  </a:txBody>
+                  <a:tcPr marL="54864" marR="54864" marT="18288" marB="18288">
+                    <a:solidFill>
+                      <a:srgbClr val="FFFFFF"/>
+                    </a:solidFill>
+                  </a:tcPr>
+                </a:tc>
+                <a:tc>
+                  <a:txBody>
+                    <a:bodyPr wrap="square"/>
+                    <a:lstStyle/>
+                    <a:p>
+                      <a:r>
+                        <a:rPr sz="1100" b="0">
+                          <a:solidFill>
+                            <a:srgbClr val="282828"/>
+                          </a:solidFill>
+                          <a:latin typeface="Arial"/>
+                        </a:rPr>
+                        <a:t>5.7e12</a:t>
+                      </a:r>
+                    </a:p>
+                  </a:txBody>
+                  <a:tcPr marL="54864" marR="54864" marT="18288" marB="18288">
+                    <a:solidFill>
+                      <a:srgbClr val="FFFFFF"/>
+                    </a:solidFill>
+                  </a:tcPr>
+                </a:tc>
+                <a:tc>
+                  <a:txBody>
+                    <a:bodyPr wrap="square"/>
+                    <a:lstStyle/>
+                    <a:p>
+                      <a:r>
+                        <a:rPr sz="1100" b="0">
+                          <a:solidFill>
+                            <a:srgbClr val="282828"/>
+                          </a:solidFill>
+                          <a:latin typeface="Arial"/>
+                        </a:rPr>
+                        <a:t>9.8 pm</a:t>
                       </a:r>
                     </a:p>
                   </a:txBody>
@@ -11006,13 +11006,349 @@
                           </a:solidFill>
                           <a:latin typeface="Arial"/>
                         </a:rPr>
+                        <a:t>stepped pinhole, mirror rig</a:t>
+                      </a:r>
+                    </a:p>
+                  </a:txBody>
+                  <a:tcPr marL="54864" marR="54864" marT="18288" marB="18288">
+                    <a:solidFill>
+                      <a:srgbClr val="ECF1F6"/>
+                    </a:solidFill>
+                  </a:tcPr>
+                </a:tc>
+                <a:tc>
+                  <a:txBody>
+                    <a:bodyPr wrap="square"/>
+                    <a:lstStyle/>
+                    <a:p>
+                      <a:r>
+                        <a:rPr sz="1100" b="0">
+                          <a:solidFill>
+                            <a:srgbClr val="282828"/>
+                          </a:solidFill>
+                          <a:latin typeface="Arial"/>
+                        </a:rPr>
+                        <a:t>2.5e12</a:t>
+                      </a:r>
+                    </a:p>
+                  </a:txBody>
+                  <a:tcPr marL="54864" marR="54864" marT="18288" marB="18288">
+                    <a:solidFill>
+                      <a:srgbClr val="ECF1F6"/>
+                    </a:solidFill>
+                  </a:tcPr>
+                </a:tc>
+                <a:tc>
+                  <a:txBody>
+                    <a:bodyPr wrap="square"/>
+                    <a:lstStyle/>
+                    <a:p>
+                      <a:r>
+                        <a:rPr sz="1100" b="0">
+                          <a:solidFill>
+                            <a:srgbClr val="282828"/>
+                          </a:solidFill>
+                          <a:latin typeface="Arial"/>
+                        </a:rPr>
+                        <a:t>7.4e12</a:t>
+                      </a:r>
+                    </a:p>
+                  </a:txBody>
+                  <a:tcPr marL="54864" marR="54864" marT="18288" marB="18288">
+                    <a:solidFill>
+                      <a:srgbClr val="ECF1F6"/>
+                    </a:solidFill>
+                  </a:tcPr>
+                </a:tc>
+                <a:tc>
+                  <a:txBody>
+                    <a:bodyPr wrap="square"/>
+                    <a:lstStyle/>
+                    <a:p>
+                      <a:r>
+                        <a:rPr sz="1100" b="0">
+                          <a:solidFill>
+                            <a:srgbClr val="282828"/>
+                          </a:solidFill>
+                          <a:latin typeface="Arial"/>
+                        </a:rPr>
+                        <a:t>9.9 pm</a:t>
+                      </a:r>
+                    </a:p>
+                  </a:txBody>
+                  <a:tcPr marL="54864" marR="54864" marT="18288" marB="18288">
+                    <a:solidFill>
+                      <a:srgbClr val="ECF1F6"/>
+                    </a:solidFill>
+                  </a:tcPr>
+                </a:tc>
+                <a:tc>
+                  <a:txBody>
+                    <a:bodyPr wrap="square"/>
+                    <a:lstStyle/>
+                    <a:p>
+                      <a:r>
+                        <a:rPr sz="1100" b="0">
+                          <a:solidFill>
+                            <a:srgbClr val="282828"/>
+                          </a:solidFill>
+                          <a:latin typeface="Arial"/>
+                        </a:rPr>
+                        <a:t>—</a:t>
+                      </a:r>
+                    </a:p>
+                  </a:txBody>
+                  <a:tcPr marL="54864" marR="54864" marT="18288" marB="18288">
+                    <a:solidFill>
+                      <a:srgbClr val="ECF1F6"/>
+                    </a:solidFill>
+                  </a:tcPr>
+                </a:tc>
+              </a:tr>
+              <a:tr h="468630">
+                <a:tc>
+                  <a:txBody>
+                    <a:bodyPr wrap="square"/>
+                    <a:lstStyle/>
+                    <a:p>
+                      <a:r>
+                        <a:rPr sz="1100" b="0">
+                          <a:solidFill>
+                            <a:srgbClr val="282828"/>
+                          </a:solidFill>
+                          <a:latin typeface="Arial"/>
+                        </a:rPr>
+                        <a:t>Zernike stepped, mirror rig</a:t>
+                      </a:r>
+                    </a:p>
+                  </a:txBody>
+                  <a:tcPr marL="54864" marR="54864" marT="18288" marB="18288">
+                    <a:solidFill>
+                      <a:srgbClr val="FFFFFF"/>
+                    </a:solidFill>
+                  </a:tcPr>
+                </a:tc>
+                <a:tc>
+                  <a:txBody>
+                    <a:bodyPr wrap="square"/>
+                    <a:lstStyle/>
+                    <a:p>
+                      <a:r>
+                        <a:rPr sz="1100" b="0">
+                          <a:solidFill>
+                            <a:srgbClr val="282828"/>
+                          </a:solidFill>
+                          <a:latin typeface="Arial"/>
+                        </a:rPr>
+                        <a:t>2.7e12</a:t>
+                      </a:r>
+                    </a:p>
+                  </a:txBody>
+                  <a:tcPr marL="54864" marR="54864" marT="18288" marB="18288">
+                    <a:solidFill>
+                      <a:srgbClr val="FFFFFF"/>
+                    </a:solidFill>
+                  </a:tcPr>
+                </a:tc>
+                <a:tc>
+                  <a:txBody>
+                    <a:bodyPr wrap="square"/>
+                    <a:lstStyle/>
+                    <a:p>
+                      <a:r>
+                        <a:rPr sz="1100" b="0">
+                          <a:solidFill>
+                            <a:srgbClr val="282828"/>
+                          </a:solidFill>
+                          <a:latin typeface="Arial"/>
+                        </a:rPr>
+                        <a:t>7.9e12</a:t>
+                      </a:r>
+                    </a:p>
+                  </a:txBody>
+                  <a:tcPr marL="54864" marR="54864" marT="18288" marB="18288">
+                    <a:solidFill>
+                      <a:srgbClr val="FFFFFF"/>
+                    </a:solidFill>
+                  </a:tcPr>
+                </a:tc>
+                <a:tc>
+                  <a:txBody>
+                    <a:bodyPr wrap="square"/>
+                    <a:lstStyle/>
+                    <a:p>
+                      <a:r>
+                        <a:rPr sz="1100" b="0">
+                          <a:solidFill>
+                            <a:srgbClr val="282828"/>
+                          </a:solidFill>
+                          <a:latin typeface="Arial"/>
+                        </a:rPr>
+                        <a:t>10.0 pm</a:t>
+                      </a:r>
+                    </a:p>
+                  </a:txBody>
+                  <a:tcPr marL="54864" marR="54864" marT="18288" marB="18288">
+                    <a:solidFill>
+                      <a:srgbClr val="FFFFFF"/>
+                    </a:solidFill>
+                  </a:tcPr>
+                </a:tc>
+                <a:tc>
+                  <a:txBody>
+                    <a:bodyPr wrap="square"/>
+                    <a:lstStyle/>
+                    <a:p>
+                      <a:r>
+                        <a:rPr sz="1100" b="0">
+                          <a:solidFill>
+                            <a:srgbClr val="282828"/>
+                          </a:solidFill>
+                          <a:latin typeface="Arial"/>
+                        </a:rPr>
+                        <a:t>—</a:t>
+                      </a:r>
+                    </a:p>
+                  </a:txBody>
+                  <a:tcPr marL="54864" marR="54864" marT="18288" marB="18288">
+                    <a:solidFill>
+                      <a:srgbClr val="FFFFFF"/>
+                    </a:solidFill>
+                  </a:tcPr>
+                </a:tc>
+              </a:tr>
+              <a:tr h="468630">
+                <a:tc>
+                  <a:txBody>
+                    <a:bodyPr wrap="square"/>
+                    <a:lstStyle/>
+                    <a:p>
+                      <a:r>
+                        <a:rPr sz="1100" b="0">
+                          <a:solidFill>
+                            <a:srgbClr val="282828"/>
+                          </a:solidFill>
+                          <a:latin typeface="Arial"/>
+                        </a:rPr>
+                        <a:t>interferometer, mirror rig, redesigned</a:t>
+                      </a:r>
+                    </a:p>
+                  </a:txBody>
+                  <a:tcPr marL="54864" marR="54864" marT="18288" marB="18288">
+                    <a:solidFill>
+                      <a:srgbClr val="ECF1F6"/>
+                    </a:solidFill>
+                  </a:tcPr>
+                </a:tc>
+                <a:tc>
+                  <a:txBody>
+                    <a:bodyPr wrap="square"/>
+                    <a:lstStyle/>
+                    <a:p>
+                      <a:r>
+                        <a:rPr sz="1100" b="0">
+                          <a:solidFill>
+                            <a:srgbClr val="282828"/>
+                          </a:solidFill>
+                          <a:latin typeface="Arial"/>
+                        </a:rPr>
+                        <a:t>5.4e12</a:t>
+                      </a:r>
+                    </a:p>
+                  </a:txBody>
+                  <a:tcPr marL="54864" marR="54864" marT="18288" marB="18288">
+                    <a:solidFill>
+                      <a:srgbClr val="ECF1F6"/>
+                    </a:solidFill>
+                  </a:tcPr>
+                </a:tc>
+                <a:tc>
+                  <a:txBody>
+                    <a:bodyPr wrap="square"/>
+                    <a:lstStyle/>
+                    <a:p>
+                      <a:r>
+                        <a:rPr sz="1100" b="0">
+                          <a:solidFill>
+                            <a:srgbClr val="282828"/>
+                          </a:solidFill>
+                          <a:latin typeface="Arial"/>
+                        </a:rPr>
+                        <a:t>1.7e13</a:t>
+                      </a:r>
+                    </a:p>
+                  </a:txBody>
+                  <a:tcPr marL="54864" marR="54864" marT="18288" marB="18288">
+                    <a:solidFill>
+                      <a:srgbClr val="ECF1F6"/>
+                    </a:solidFill>
+                  </a:tcPr>
+                </a:tc>
+                <a:tc>
+                  <a:txBody>
+                    <a:bodyPr wrap="square"/>
+                    <a:lstStyle/>
+                    <a:p>
+                      <a:r>
+                        <a:rPr sz="1100" b="0">
+                          <a:solidFill>
+                            <a:srgbClr val="282828"/>
+                          </a:solidFill>
+                          <a:latin typeface="Arial"/>
+                        </a:rPr>
+                        <a:t>10.0 pm</a:t>
+                      </a:r>
+                    </a:p>
+                  </a:txBody>
+                  <a:tcPr marL="54864" marR="54864" marT="18288" marB="18288">
+                    <a:solidFill>
+                      <a:srgbClr val="ECF1F6"/>
+                    </a:solidFill>
+                  </a:tcPr>
+                </a:tc>
+                <a:tc>
+                  <a:txBody>
+                    <a:bodyPr wrap="square"/>
+                    <a:lstStyle/>
+                    <a:p>
+                      <a:r>
+                        <a:rPr sz="1100" b="0">
+                          <a:solidFill>
+                            <a:srgbClr val="282828"/>
+                          </a:solidFill>
+                          <a:latin typeface="Arial"/>
+                        </a:rPr>
+                        <a:t>—</a:t>
+                      </a:r>
+                    </a:p>
+                  </a:txBody>
+                  <a:tcPr marL="54864" marR="54864" marT="18288" marB="18288">
+                    <a:solidFill>
+                      <a:srgbClr val="ECF1F6"/>
+                    </a:solidFill>
+                  </a:tcPr>
+                </a:tc>
+              </a:tr>
+              <a:tr h="468630">
+                <a:tc>
+                  <a:txBody>
+                    <a:bodyPr wrap="square"/>
+                    <a:lstStyle/>
+                    <a:p>
+                      <a:r>
+                        <a:rPr sz="1100" b="0">
+                          <a:solidFill>
+                            <a:srgbClr val="282828"/>
+                          </a:solidFill>
+                          <a:latin typeface="Arial"/>
+                        </a:rPr>
                         <a:t>interferometer, mirror rig, record (7°)</a:t>
                       </a:r>
                     </a:p>
                   </a:txBody>
                   <a:tcPr marL="54864" marR="54864" marT="18288" marB="18288">
                     <a:solidFill>
-                      <a:srgbClr val="ECF1F6"/>
+                      <a:srgbClr val="FFFFFF"/>
                     </a:solidFill>
                   </a:tcPr>
                 </a:tc>
@@ -11034,7 +11370,7 @@
                   </a:txBody>
                   <a:tcPr marL="54864" marR="54864" marT="18288" marB="18288">
                     <a:solidFill>
-                      <a:srgbClr val="ECF1F6"/>
+                      <a:srgbClr val="FFFFFF"/>
                     </a:solidFill>
                   </a:tcPr>
                 </a:tc>
@@ -11056,7 +11392,7 @@
                   </a:txBody>
                   <a:tcPr marL="54864" marR="54864" marT="18288" marB="18288">
                     <a:solidFill>
-                      <a:srgbClr val="ECF1F6"/>
+                      <a:srgbClr val="FFFFFF"/>
                     </a:solidFill>
                   </a:tcPr>
                 </a:tc>
@@ -11078,7 +11414,7 @@
                   </a:txBody>
                   <a:tcPr marL="54864" marR="54864" marT="18288" marB="18288">
                     <a:solidFill>
-                      <a:srgbClr val="ECF1F6"/>
+                      <a:srgbClr val="FFFFFF"/>
                     </a:solidFill>
                   </a:tcPr>
                 </a:tc>
@@ -11100,7 +11436,7 @@
                   </a:txBody>
                   <a:tcPr marL="54864" marR="54864" marT="18288" marB="18288">
                     <a:solidFill>
-                      <a:srgbClr val="ECF1F6"/>
+                      <a:srgbClr val="FFFFFF"/>
                     </a:solidFill>
                   </a:tcPr>
                 </a:tc>
@@ -11206,7 +11542,7 @@
                 </a:solidFill>
                 <a:latin typeface="Arial"/>
               </a:rPr>
-              <a:t>7.5e12 photons per cycle is 2.4 µJ, 9 ms of a 1 mW laser.  The ramp floor of 10 pm is the loop's lag (rate ÷ gain), the same for every reading with no fixed error, and it is low-order: 9.2 of its 10 pm sits below 4 cycles per aperture, so a faster or higher-gain low-order loop removes it while light buys nothing.  Both drift floors are the textbook formulas, reproduced by the engine to 1%.  The exact one-frame Zernike reading diverges in the loop.  Run tags vloop193, ploop193, loop193, pfdeck_loop, loop_lens, loop_oap, oapifol2.</a:t>
+              <a:t>7.5e12 photons per cycle is 2.4 µJ, 9 ms of a 1 mW laser.  The ramp floor of 10 pm is the loop's lag (rate ÷ gain), the same for every reading with no fixed error, and it is low-order: 9.2 of its 10 pm sits below 4 cycles per aperture, so a faster or higher-gain low-order loop removes it while light buys nothing.  Both drift floors are the textbook formulas, reproduced by the engine to 1%.  The exact one-frame Zernike reading diverges in the loop.  Run tags vloop193, ploop193, loop193, pfdeck_loop, loop_lens, loop_oap, oapifol2, oaploop22 (the sensors on the mirror rig).</a:t>
             </a:r>
           </a:p>
         </p:txBody>
@@ -13895,7 +14231,7 @@
         </p:nvGraphicFramePr>
         <p:xfrm>
           <a:off x="411480" y="1298448"/>
-          <a:ext cx="11368735" cy="2240280"/>
+          <a:ext cx="11368735" cy="2520315"/>
         </p:xfrm>
         <a:graphic>
           <a:graphicData uri="http://schemas.openxmlformats.org/drawingml/2006/table">
@@ -13904,9 +14240,9 @@
                 <a:tableStyleId>{5C22544A-7EE6-4342-B048-85BDC9FD1C3A}</a:tableStyleId>
               </a:tblPr>
               <a:tblGrid>
-                <a:gridCol w="3830648"/>
+                <a:gridCol w="4350344"/>
                 <a:gridCol w="1889760"/>
-                <a:gridCol w="3395347"/>
+                <a:gridCol w="2875651"/>
                 <a:gridCol w="2252980"/>
               </a:tblGrid>
               <a:tr h="280035">
@@ -14272,7 +14608,7 @@
                           </a:solidFill>
                           <a:latin typeface="Arial"/>
                         </a:rPr>
-                        <a:t>servo: 3 pm noise only / under the 2 pm walk</a:t>
+                        <a:t>interferometer servo: 3 pm noise only / under the 2 pm walk</a:t>
                       </a:r>
                     </a:p>
                   </a:txBody>
@@ -14362,73 +14698,73 @@
                           </a:solidFill>
                           <a:latin typeface="Arial"/>
                         </a:rPr>
-                        <a:t>capture with unwrapping</a:t>
-                      </a:r>
-                    </a:p>
-                  </a:txBody>
-                  <a:tcPr marL="54864" marR="54864" marT="18288" marB="18288">
-                    <a:solidFill>
-                      <a:srgbClr val="FFFFFF"/>
-                    </a:solidFill>
-                  </a:tcPr>
-                </a:tc>
-                <a:tc>
-                  <a:txBody>
-                    <a:bodyPr wrap="square"/>
-                    <a:lstStyle/>
-                    <a:p>
-                      <a:r>
-                        <a:rPr sz="1100" b="0">
-                          <a:solidFill>
-                            <a:srgbClr val="282828"/>
-                          </a:solidFill>
-                          <a:latin typeface="Arial"/>
-                        </a:rPr>
-                        <a:t>stalls from 60 nm</a:t>
-                      </a:r>
-                    </a:p>
-                  </a:txBody>
-                  <a:tcPr marL="54864" marR="54864" marT="18288" marB="18288">
-                    <a:solidFill>
-                      <a:srgbClr val="FFFFFF"/>
-                    </a:solidFill>
-                  </a:tcPr>
-                </a:tc>
-                <a:tc>
-                  <a:txBody>
-                    <a:bodyPr wrap="square"/>
-                    <a:lstStyle/>
-                    <a:p>
-                      <a:r>
-                        <a:rPr sz="1100" b="0">
-                          <a:solidFill>
-                            <a:srgbClr val="282828"/>
-                          </a:solidFill>
-                          <a:latin typeface="Arial"/>
-                        </a:rPr>
-                        <a:t>3 pm from 200 nm in 19 cycles</a:t>
-                      </a:r>
-                    </a:p>
-                  </a:txBody>
-                  <a:tcPr marL="54864" marR="54864" marT="18288" marB="18288">
-                    <a:solidFill>
-                      <a:srgbClr val="FFFFFF"/>
-                    </a:solidFill>
-                  </a:tcPr>
-                </a:tc>
-                <a:tc>
-                  <a:txBody>
-                    <a:bodyPr wrap="square"/>
-                    <a:lstStyle/>
-                    <a:p>
-                      <a:r>
-                        <a:rPr sz="1100" b="0">
-                          <a:solidFill>
-                            <a:srgbClr val="282828"/>
-                          </a:solidFill>
-                          <a:latin typeface="Arial"/>
-                        </a:rPr>
-                        <a:t>3 pm from 300 nm in 43 cycles</a:t>
+                        <a:t>sensors' servo under the walk: vector / pinhole / stepped</a:t>
+                      </a:r>
+                    </a:p>
+                  </a:txBody>
+                  <a:tcPr marL="54864" marR="54864" marT="18288" marB="18288">
+                    <a:solidFill>
+                      <a:srgbClr val="FFFFFF"/>
+                    </a:solidFill>
+                  </a:tcPr>
+                </a:tc>
+                <a:tc>
+                  <a:txBody>
+                    <a:bodyPr wrap="square"/>
+                    <a:lstStyle/>
+                    <a:p>
+                      <a:r>
+                        <a:rPr sz="1100" b="0">
+                          <a:solidFill>
+                            <a:srgbClr val="282828"/>
+                          </a:solidFill>
+                          <a:latin typeface="Arial"/>
+                        </a:rPr>
+                        <a:t>—</a:t>
+                      </a:r>
+                    </a:p>
+                  </a:txBody>
+                  <a:tcPr marL="54864" marR="54864" marT="18288" marB="18288">
+                    <a:solidFill>
+                      <a:srgbClr val="FFFFFF"/>
+                    </a:solidFill>
+                  </a:tcPr>
+                </a:tc>
+                <a:tc>
+                  <a:txBody>
+                    <a:bodyPr wrap="square"/>
+                    <a:lstStyle/>
+                    <a:p>
+                      <a:r>
+                        <a:rPr sz="1100" b="0">
+                          <a:solidFill>
+                            <a:srgbClr val="282828"/>
+                          </a:solidFill>
+                          <a:latin typeface="Arial"/>
+                        </a:rPr>
+                        <a:t>5.7e12 / 7.4e12 / 7.9e12</a:t>
+                      </a:r>
+                    </a:p>
+                  </a:txBody>
+                  <a:tcPr marL="54864" marR="54864" marT="18288" marB="18288">
+                    <a:solidFill>
+                      <a:srgbClr val="FFFFFF"/>
+                    </a:solidFill>
+                  </a:tcPr>
+                </a:tc>
+                <a:tc>
+                  <a:txBody>
+                    <a:bodyPr wrap="square"/>
+                    <a:lstStyle/>
+                    <a:p>
+                      <a:r>
+                        <a:rPr sz="1100" b="0">
+                          <a:solidFill>
+                            <a:srgbClr val="282828"/>
+                          </a:solidFill>
+                          <a:latin typeface="Arial"/>
+                        </a:rPr>
+                        <a:t>5.3e12 / 7.0e12 / 7.5e12</a:t>
                       </a:r>
                     </a:p>
                   </a:txBody>
@@ -14452,7 +14788,7 @@
                           </a:solidFill>
                           <a:latin typeface="Arial"/>
                         </a:rPr>
-                        <a:t>vector Zernike, 100 nm pokes (fold gate)</a:t>
+                        <a:t>capture with unwrapping</a:t>
                       </a:r>
                     </a:p>
                   </a:txBody>
@@ -14474,7 +14810,7 @@
                           </a:solidFill>
                           <a:latin typeface="Arial"/>
                         </a:rPr>
-                        <a:t>19.6 pm, fails</a:t>
+                        <a:t>stalls from 60 nm</a:t>
                       </a:r>
                     </a:p>
                   </a:txBody>
@@ -14496,7 +14832,7 @@
                           </a:solidFill>
                           <a:latin typeface="Arial"/>
                         </a:rPr>
-                        <a:t>634 pm raw; 0.054 pm calibrated: passes</a:t>
+                        <a:t>3 pm from 200 nm in 19 cycles</a:t>
                       </a:r>
                     </a:p>
                   </a:txBody>
@@ -14518,7 +14854,7 @@
                           </a:solidFill>
                           <a:latin typeface="Arial"/>
                         </a:rPr>
-                        <a:t>0.05 pm</a:t>
+                        <a:t>3 pm from 300 nm in 43 cycles</a:t>
                       </a:r>
                     </a:p>
                   </a:txBody>
@@ -14542,13 +14878,103 @@
                           </a:solidFill>
                           <a:latin typeface="Arial"/>
                         </a:rPr>
+                        <a:t>vector Zernike, 100 nm pokes (fold gate)</a:t>
+                      </a:r>
+                    </a:p>
+                  </a:txBody>
+                  <a:tcPr marL="54864" marR="54864" marT="18288" marB="18288">
+                    <a:solidFill>
+                      <a:srgbClr val="FFFFFF"/>
+                    </a:solidFill>
+                  </a:tcPr>
+                </a:tc>
+                <a:tc>
+                  <a:txBody>
+                    <a:bodyPr wrap="square"/>
+                    <a:lstStyle/>
+                    <a:p>
+                      <a:r>
+                        <a:rPr sz="1100" b="0">
+                          <a:solidFill>
+                            <a:srgbClr val="282828"/>
+                          </a:solidFill>
+                          <a:latin typeface="Arial"/>
+                        </a:rPr>
+                        <a:t>19.6 pm, fails</a:t>
+                      </a:r>
+                    </a:p>
+                  </a:txBody>
+                  <a:tcPr marL="54864" marR="54864" marT="18288" marB="18288">
+                    <a:solidFill>
+                      <a:srgbClr val="FFFFFF"/>
+                    </a:solidFill>
+                  </a:tcPr>
+                </a:tc>
+                <a:tc>
+                  <a:txBody>
+                    <a:bodyPr wrap="square"/>
+                    <a:lstStyle/>
+                    <a:p>
+                      <a:r>
+                        <a:rPr sz="1100" b="0">
+                          <a:solidFill>
+                            <a:srgbClr val="282828"/>
+                          </a:solidFill>
+                          <a:latin typeface="Arial"/>
+                        </a:rPr>
+                        <a:t>634 pm raw; 0.054 pm calibrated: passes</a:t>
+                      </a:r>
+                    </a:p>
+                  </a:txBody>
+                  <a:tcPr marL="54864" marR="54864" marT="18288" marB="18288">
+                    <a:solidFill>
+                      <a:srgbClr val="FFFFFF"/>
+                    </a:solidFill>
+                  </a:tcPr>
+                </a:tc>
+                <a:tc>
+                  <a:txBody>
+                    <a:bodyPr wrap="square"/>
+                    <a:lstStyle/>
+                    <a:p>
+                      <a:r>
+                        <a:rPr sz="1100" b="0">
+                          <a:solidFill>
+                            <a:srgbClr val="282828"/>
+                          </a:solidFill>
+                          <a:latin typeface="Arial"/>
+                        </a:rPr>
+                        <a:t>0.05 pm</a:t>
+                      </a:r>
+                    </a:p>
+                  </a:txBody>
+                  <a:tcPr marL="54864" marR="54864" marT="18288" marB="18288">
+                    <a:solidFill>
+                      <a:srgbClr val="FFFFFF"/>
+                    </a:solidFill>
+                  </a:tcPr>
+                </a:tc>
+              </a:tr>
+              <a:tr h="280035">
+                <a:tc>
+                  <a:txBody>
+                    <a:bodyPr wrap="square"/>
+                    <a:lstStyle/>
+                    <a:p>
+                      <a:r>
+                        <a:rPr sz="1100" b="0">
+                          <a:solidFill>
+                            <a:srgbClr val="282828"/>
+                          </a:solidFill>
+                          <a:latin typeface="Arial"/>
+                        </a:rPr>
                         <a:t>stepped pinhole, 100 nm pokes</a:t>
                       </a:r>
                     </a:p>
                   </a:txBody>
                   <a:tcPr marL="54864" marR="54864" marT="18288" marB="18288">
                     <a:solidFill>
-                      <a:srgbClr val="FFFFFF"/>
+                      <a:srgbClr val="ECF1F6"/>
                     </a:solidFill>
                   </a:tcPr>
                 </a:tc>
@@ -14570,7 +14996,7 @@
                   </a:txBody>
                   <a:tcPr marL="54864" marR="54864" marT="18288" marB="18288">
                     <a:solidFill>
-                      <a:srgbClr val="FFFFFF"/>
+                      <a:srgbClr val="ECF1F6"/>
                     </a:solidFill>
                   </a:tcPr>
                 </a:tc>
@@ -14592,7 +15018,7 @@
                   </a:txBody>
                   <a:tcPr marL="54864" marR="54864" marT="18288" marB="18288">
                     <a:solidFill>
-                      <a:srgbClr val="FFFFFF"/>
+                      <a:srgbClr val="ECF1F6"/>
                     </a:solidFill>
                   </a:tcPr>
                 </a:tc>
@@ -14614,7 +15040,7 @@
                   </a:txBody>
                   <a:tcPr marL="54864" marR="54864" marT="18288" marB="18288">
                     <a:solidFill>
-                      <a:srgbClr val="FFFFFF"/>
+                      <a:srgbClr val="ECF1F6"/>
                     </a:solidFill>
                   </a:tcPr>
                 </a:tc>
@@ -14631,7 +15057,7 @@
         </p:nvSpPr>
         <p:spPr>
           <a:xfrm>
-            <a:off x="411480" y="3685032"/>
+            <a:off x="411480" y="3965066"/>
             <a:ext cx="11368735" cy="274320"/>
           </a:xfrm>
           <a:prstGeom prst="rect">
@@ -14673,7 +15099,7 @@
                 </a:solidFill>
                 <a:latin typeface="Arial"/>
               </a:rPr>
-              <a:t>•  Closed: the raw interferometer reading wraps between 60 and 120 nm of surface on both rigs, lens and mirror alike (a base the four-step cannot follow reads λ/2 ÷ √12 = 91 nm rms, measured 89-92 on both); the capture range is set by the reading, not the optics, and unwrapping restores it.  The detector leg here is the geometric seed (the tuner's objective prefers a leg that does not read: a known defect, being fixed).</a:t>
+              <a:t>•  Closed: the raw interferometer reading wraps between 60 and 120 nm of surface on both rigs, lens and mirror alike (a base the four-step cannot follow reads λ/2 ÷ √12 = 91 nm rms, measured 89-92 on both); the capture range is set by the reading, not the optics, and unwrapping restores it.  The detector leg here is the geometric seed; the tuner's winner is now gated against the seed through the same estimator, so a leg that does not read cannot be handed to a bench.</a:t>
             </a:r>
           </a:p>
         </p:txBody>
@@ -14686,7 +15112,7 @@
         </p:nvSpPr>
         <p:spPr>
           <a:xfrm>
-            <a:off x="411480" y="5735574"/>
+            <a:off x="411480" y="6015608"/>
             <a:ext cx="11368735" cy="274320"/>
           </a:xfrm>
           <a:prstGeom prst="rect">
@@ -14712,7 +15138,7 @@
                 </a:solidFill>
                 <a:latin typeface="Arial"/>
               </a:rPr>
-              <a:t>Run tags oapifo2, oapifol2, oapdesc2, oapsens22, vqw22, vmap22, oapuw2, lensuw2; tg_psi_dm96_oap/REPORT_reflective.md (TO, 2026-09-16).</a:t>
+              <a:t>Run tags oapifo2, oapifol2, oapdesc2, oapsens22, vqw22, vmap22, oapuw2, lensuw2, oaploop22; tg_psi_dm96_oap/REPORT_reflective.md (TO, 2026-09-16).</a:t>
             </a:r>
           </a:p>
         </p:txBody>
@@ -16711,7 +17137,7 @@
                 </a:solidFill>
                 <a:latin typeface="Arial"/>
               </a:rPr>
-              <a:t>•  Front end: either builds.  The redesigned mirror rig matches the lens rig on the rows, the servo (1.7e13 vs 2.0e13 photons per cycle) and capture (200 nm), and its sensors pass once calibrated; it buys any color and no glass in the beam, and costs alignment tolerance (10 µrad = 100 nm of null) and a polarization calibration of the vector reading.  The record's stance was lenses; the measured trade is now on the table for a ruling.</a:t>
+              <a:t>•  Front end: either builds.  The redesigned mirror rig matches the lens rig on the rows, the servo (interferometer 1.7e13 vs 2.0e13 photons per cycle; the sensors within 10%) and capture (200 nm), and its sensors pass once calibrated; it buys any color and no glass in the beam, and costs alignment tolerance (10 µrad = 100 nm of null) and a polarization calibration of the vector reading.  The record's stance was lenses; the measured trade is now on the table for a ruling.</a:t>
             </a:r>
           </a:p>
         </p:txBody>
@@ -27241,7 +27667,7 @@
                 </a:solidFill>
                 <a:latin typeface="Arial"/>
               </a:rPr>
-              <a:t>•  Zernike sensors (zwfs_dm96/runs): matbase, matbase385, m2048, m2048_lat, cap385, cap385_b60-b160, noise193_b30-b160, rec193full, loop193, loop385, v193base, v193noise, vloop193, fold_diag, v2g, v2loop, v3arm, v3s, v3loop, an193_ref/cube/q300/q100/az1/bound/clear, stations193, gate22_193, sub22, thk22 (the 22.5° bench with substrates and thicknesses), oapsens22, oapsens22n, vqw22, vmap22 (the sensors on the redesigned mirror rig).  README.md (CCL) and deck_zwfs.md.</a:t>
+              <a:t>•  Zernike sensors (zwfs_dm96/runs): matbase, matbase385, m2048, m2048_lat, cap385, cap385_b60-b160, noise193_b30-b160, rec193full, loop193, loop385, v193base, v193noise, vloop193, fold_diag, v2g, v2loop, v3arm, v3s, v3loop, an193_ref/cube/q300/q100/az1/bound/clear, stations193, gate22_193, sub22, thk22 (the 22.5° bench with substrates and thicknesses), oapsens22, oapsens22n, vqw22, vmap22, oaploop22 (the sensors on the redesigned mirror rig).  README.md (CCL) and deck_zwfs.md.</a:t>
             </a:r>
           </a:p>
           <a:p>
@@ -27302,7 +27728,7 @@
         </p:nvSpPr>
         <p:spPr>
           <a:xfrm>
-            <a:off x="411480" y="6989064"/>
+            <a:off x="411480" y="7236714"/>
             <a:ext cx="11368735" cy="274320"/>
           </a:xfrm>
           <a:prstGeom prst="rect">

--- a/demo_session/deck_gauges_edit.pptx
+++ b/demo_session/deck_gauges_edit.pptx
@@ -9233,7 +9233,7 @@
                 </a:solidFill>
                 <a:latin typeface="Arial"/>
               </a:rPr>
-              <a:t>On the flat calibration the sensors need 3-6e13 photons per measurement and the interferometer 1.4-2.5e14; on the working surface the sensors' cost roughly doubles and the two-arm instruments' does not</a:t>
+              <a:t>On the flat calibration the sensors need 3-6e13 photons per measurement and the interferometer 1.4-2.5e14; on the working surface the sensors' cost roughly doubles, on either front end, and the two-arm instruments' does not</a:t>
             </a:r>
           </a:p>
         </p:txBody>
@@ -9292,7 +9292,7 @@
         </p:nvGraphicFramePr>
         <p:xfrm>
           <a:off x="411480" y="1298448"/>
-          <a:ext cx="5806438" cy="2617470"/>
+          <a:ext cx="5806439" cy="3086100"/>
         </p:xfrm>
         <a:graphic>
           <a:graphicData uri="http://schemas.openxmlformats.org/drawingml/2006/table">
@@ -9301,9 +9301,9 @@
                 <a:tableStyleId>{5C22544A-7EE6-4342-B048-85BDC9FD1C3A}</a:tableStyleId>
               </a:tblPr>
               <a:tblGrid>
-                <a:gridCol w="2148382"/>
-                <a:gridCol w="1683867"/>
-                <a:gridCol w="1974189"/>
+                <a:gridCol w="3116692"/>
+                <a:gridCol w="1238137"/>
+                <a:gridCol w="1451610"/>
               </a:tblGrid>
               <a:tr h="468630">
                 <a:tc>
@@ -9713,6 +9713,74 @@
                   </a:tcPr>
                 </a:tc>
               </a:tr>
+              <a:tr h="468630">
+                <a:tc>
+                  <a:txBody>
+                    <a:bodyPr wrap="square"/>
+                    <a:lstStyle/>
+                    <a:p>
+                      <a:r>
+                        <a:rPr sz="1100" b="0">
+                          <a:solidFill>
+                            <a:srgbClr val="282828"/>
+                          </a:solidFill>
+                          <a:latin typeface="Arial"/>
+                        </a:rPr>
+                        <a:t>interferometer, lens rig</a:t>
+                      </a:r>
+                    </a:p>
+                  </a:txBody>
+                  <a:tcPr marL="54864" marR="54864" marT="18288" marB="18288">
+                    <a:solidFill>
+                      <a:srgbClr val="ECF1F6"/>
+                    </a:solidFill>
+                  </a:tcPr>
+                </a:tc>
+                <a:tc>
+                  <a:txBody>
+                    <a:bodyPr wrap="square"/>
+                    <a:lstStyle/>
+                    <a:p>
+                      <a:r>
+                        <a:rPr sz="1100" b="0">
+                          <a:solidFill>
+                            <a:srgbClr val="282828"/>
+                          </a:solidFill>
+                          <a:latin typeface="Arial"/>
+                        </a:rPr>
+                        <a:t>1.4e14 (servo form)</a:t>
+                      </a:r>
+                    </a:p>
+                  </a:txBody>
+                  <a:tcPr marL="54864" marR="54864" marT="18288" marB="18288">
+                    <a:solidFill>
+                      <a:srgbClr val="ECF1F6"/>
+                    </a:solidFill>
+                  </a:tcPr>
+                </a:tc>
+                <a:tc>
+                  <a:txBody>
+                    <a:bodyPr wrap="square"/>
+                    <a:lstStyle/>
+                    <a:p>
+                      <a:r>
+                        <a:rPr sz="1100" b="0">
+                          <a:solidFill>
+                            <a:srgbClr val="282828"/>
+                          </a:solidFill>
+                          <a:latin typeface="Arial"/>
+                        </a:rPr>
+                        <a:t>2.5e14</a:t>
+                      </a:r>
+                    </a:p>
+                  </a:txBody>
+                  <a:tcPr marL="54864" marR="54864" marT="18288" marB="18288">
+                    <a:solidFill>
+                      <a:srgbClr val="ECF1F6"/>
+                    </a:solidFill>
+                  </a:tcPr>
+                </a:tc>
+              </a:tr>
               <a:tr h="280035">
                 <a:tc>
                   <a:txBody>
@@ -9726,57 +9794,57 @@
                           </a:solidFill>
                           <a:latin typeface="Arial"/>
                         </a:rPr>
-                        <a:t>interferometer, lens rig</a:t>
-                      </a:r>
-                    </a:p>
-                  </a:txBody>
-                  <a:tcPr marL="54864" marR="54864" marT="18288" marB="18288">
-                    <a:solidFill>
-                      <a:srgbClr val="ECF1F6"/>
-                    </a:solidFill>
-                  </a:tcPr>
-                </a:tc>
-                <a:tc>
-                  <a:txBody>
-                    <a:bodyPr wrap="square"/>
-                    <a:lstStyle/>
-                    <a:p>
-                      <a:r>
-                        <a:rPr sz="1100" b="0">
-                          <a:solidFill>
-                            <a:srgbClr val="282828"/>
-                          </a:solidFill>
-                          <a:latin typeface="Arial"/>
-                        </a:rPr>
-                        <a:t>1.4e14 (servo form)</a:t>
-                      </a:r>
-                    </a:p>
-                  </a:txBody>
-                  <a:tcPr marL="54864" marR="54864" marT="18288" marB="18288">
-                    <a:solidFill>
-                      <a:srgbClr val="ECF1F6"/>
-                    </a:solidFill>
-                  </a:tcPr>
-                </a:tc>
-                <a:tc>
-                  <a:txBody>
-                    <a:bodyPr wrap="square"/>
-                    <a:lstStyle/>
-                    <a:p>
-                      <a:r>
-                        <a:rPr sz="1100" b="0">
-                          <a:solidFill>
-                            <a:srgbClr val="282828"/>
-                          </a:solidFill>
-                          <a:latin typeface="Arial"/>
-                        </a:rPr>
-                        <a:t>2.5e14</a:t>
-                      </a:r>
-                    </a:p>
-                  </a:txBody>
-                  <a:tcPr marL="54864" marR="54864" marT="18288" marB="18288">
-                    <a:solidFill>
-                      <a:srgbClr val="ECF1F6"/>
+                        <a:t>interferometer, mirror rig, record 7°</a:t>
+                      </a:r>
+                    </a:p>
+                  </a:txBody>
+                  <a:tcPr marL="54864" marR="54864" marT="18288" marB="18288">
+                    <a:solidFill>
+                      <a:srgbClr val="FFFFFF"/>
+                    </a:solidFill>
+                  </a:tcPr>
+                </a:tc>
+                <a:tc>
+                  <a:txBody>
+                    <a:bodyPr wrap="square"/>
+                    <a:lstStyle/>
+                    <a:p>
+                      <a:r>
+                        <a:rPr sz="1100" b="0">
+                          <a:solidFill>
+                            <a:srgbClr val="282828"/>
+                          </a:solidFill>
+                          <a:latin typeface="Arial"/>
+                        </a:rPr>
+                        <a:t>4.9e14</a:t>
+                      </a:r>
+                    </a:p>
+                  </a:txBody>
+                  <a:tcPr marL="54864" marR="54864" marT="18288" marB="18288">
+                    <a:solidFill>
+                      <a:srgbClr val="FFFFFF"/>
+                    </a:solidFill>
+                  </a:tcPr>
+                </a:tc>
+                <a:tc>
+                  <a:txBody>
+                    <a:bodyPr wrap="square"/>
+                    <a:lstStyle/>
+                    <a:p>
+                      <a:r>
+                        <a:rPr sz="1100" b="0">
+                          <a:solidFill>
+                            <a:srgbClr val="282828"/>
+                          </a:solidFill>
+                          <a:latin typeface="Arial"/>
+                        </a:rPr>
+                        <a:t>6.2e14</a:t>
+                      </a:r>
+                    </a:p>
+                  </a:txBody>
+                  <a:tcPr marL="54864" marR="54864" marT="18288" marB="18288">
+                    <a:solidFill>
+                      <a:srgbClr val="FFFFFF"/>
                     </a:solidFill>
                   </a:tcPr>
                 </a:tc>
@@ -9794,57 +9862,57 @@
                           </a:solidFill>
                           <a:latin typeface="Arial"/>
                         </a:rPr>
-                        <a:t>interferometer, mirror rig, record 7°</a:t>
-                      </a:r>
-                    </a:p>
-                  </a:txBody>
-                  <a:tcPr marL="54864" marR="54864" marT="18288" marB="18288">
-                    <a:solidFill>
-                      <a:srgbClr val="FFFFFF"/>
-                    </a:solidFill>
-                  </a:tcPr>
-                </a:tc>
-                <a:tc>
-                  <a:txBody>
-                    <a:bodyPr wrap="square"/>
-                    <a:lstStyle/>
-                    <a:p>
-                      <a:r>
-                        <a:rPr sz="1100" b="0">
-                          <a:solidFill>
-                            <a:srgbClr val="282828"/>
-                          </a:solidFill>
-                          <a:latin typeface="Arial"/>
-                        </a:rPr>
-                        <a:t>4.9e14</a:t>
-                      </a:r>
-                    </a:p>
-                  </a:txBody>
-                  <a:tcPr marL="54864" marR="54864" marT="18288" marB="18288">
-                    <a:solidFill>
-                      <a:srgbClr val="FFFFFF"/>
-                    </a:solidFill>
-                  </a:tcPr>
-                </a:tc>
-                <a:tc>
-                  <a:txBody>
-                    <a:bodyPr wrap="square"/>
-                    <a:lstStyle/>
-                    <a:p>
-                      <a:r>
-                        <a:rPr sz="1100" b="0">
-                          <a:solidFill>
-                            <a:srgbClr val="282828"/>
-                          </a:solidFill>
-                          <a:latin typeface="Arial"/>
-                        </a:rPr>
-                        <a:t>6.2e14</a:t>
-                      </a:r>
-                    </a:p>
-                  </a:txBody>
-                  <a:tcPr marL="54864" marR="54864" marT="18288" marB="18288">
-                    <a:solidFill>
-                      <a:srgbClr val="FFFFFF"/>
+                        <a:t>stepped pinhole / vector Zernike / Zernike stepped, redesigned mirror rig</a:t>
+                      </a:r>
+                    </a:p>
+                  </a:txBody>
+                  <a:tcPr marL="54864" marR="54864" marT="18288" marB="18288">
+                    <a:solidFill>
+                      <a:srgbClr val="ECF1F6"/>
+                    </a:solidFill>
+                  </a:tcPr>
+                </a:tc>
+                <a:tc>
+                  <a:txBody>
+                    <a:bodyPr wrap="square"/>
+                    <a:lstStyle/>
+                    <a:p>
+                      <a:r>
+                        <a:rPr sz="1100" b="0">
+                          <a:solidFill>
+                            <a:srgbClr val="282828"/>
+                          </a:solidFill>
+                          <a:latin typeface="Arial"/>
+                        </a:rPr>
+                        <a:t>—</a:t>
+                      </a:r>
+                    </a:p>
+                  </a:txBody>
+                  <a:tcPr marL="54864" marR="54864" marT="18288" marB="18288">
+                    <a:solidFill>
+                      <a:srgbClr val="ECF1F6"/>
+                    </a:solidFill>
+                  </a:tcPr>
+                </a:tc>
+                <a:tc>
+                  <a:txBody>
+                    <a:bodyPr wrap="square"/>
+                    <a:lstStyle/>
+                    <a:p>
+                      <a:r>
+                        <a:rPr sz="1100" b="0">
+                          <a:solidFill>
+                            <a:srgbClr val="282828"/>
+                          </a:solidFill>
+                          <a:latin typeface="Arial"/>
+                        </a:rPr>
+                        <a:t>8.5e13 / 7.3e13 / 5.8e13</a:t>
+                      </a:r>
+                    </a:p>
+                  </a:txBody>
+                  <a:tcPr marL="54864" marR="54864" marT="18288" marB="18288">
+                    <a:solidFill>
+                      <a:srgbClr val="ECF1F6"/>
                     </a:solidFill>
                   </a:tcPr>
                 </a:tc>
@@ -9950,7 +10018,7 @@
                 </a:solidFill>
                 <a:latin typeface="Arial"/>
               </a:rPr>
-              <a:t>One measurement at 1e14 photons is 31 µJ: 0.13 s of a 1 mW laser at 25% throughput.  The camera's well depth, not the laser, sets the time (future-work slide).  Run tags pdi193f, v193noise, rec193full, noise193_b30, noise193p_b30, pfdeck, loop_lens, lens_deck, oap_deck.</a:t>
+              <a:t>One measurement at 1e14 photons is 31 µJ: 0.13 s of a 1 mW laser at 25% throughput.  The camera's well depth, not the laser, sets the time (future-work slide).  Run tags pdi193f, v193noise, rec193full, noise193_b30, noise193p_b30, pfdeck, loop_lens, lens_deck, oap_deck, oapnoise22 (the sensors on the mirror rig).</a:t>
             </a:r>
           </a:p>
         </p:txBody>
@@ -27667,7 +27735,7 @@
                 </a:solidFill>
                 <a:latin typeface="Arial"/>
               </a:rPr>
-              <a:t>•  Zernike sensors (zwfs_dm96/runs): matbase, matbase385, m2048, m2048_lat, cap385, cap385_b60-b160, noise193_b30-b160, rec193full, loop193, loop385, v193base, v193noise, vloop193, fold_diag, v2g, v2loop, v3arm, v3s, v3loop, an193_ref/cube/q300/q100/az1/bound/clear, stations193, gate22_193, sub22, thk22 (the 22.5° bench with substrates and thicknesses), oapsens22, oapsens22n, vqw22, vmap22, oaploop22 (the sensors on the redesigned mirror rig).  README.md (CCL) and deck_zwfs.md.</a:t>
+              <a:t>•  Zernike sensors (zwfs_dm96/runs): matbase, matbase385, m2048, m2048_lat, cap385, cap385_b60-b160, noise193_b30-b160, rec193full, loop193, loop385, v193base, v193noise, vloop193, fold_diag, v2g, v2loop, v3arm, v3s, v3loop, an193_ref/cube/q300/q100/az1/bound/clear, stations193, gate22_193, sub22, thk22 (the 22.5° bench with substrates and thicknesses), oapsens22, oapsens22n, vqw22, vmap22, oaploop22, oapnoise22 (the sensors on the redesigned mirror rig).  README.md (CCL) and deck_zwfs.md.</a:t>
             </a:r>
           </a:p>
           <a:p>

--- a/demo_session/deck_gauges_edit.pptx
+++ b/demo_session/deck_gauges_edit.pptx
@@ -6459,7 +6459,7 @@
                 </a:solidFill>
                 <a:latin typeface="Arial"/>
               </a:rPr>
-              <a:t>•  3-8 The jobs; the bench and its parts</a:t>
+              <a:t>•  3 Introduction: the three jobs and how they are scored</a:t>
             </a:r>
           </a:p>
           <a:p>
@@ -6475,7 +6475,7 @@
                 </a:solidFill>
                 <a:latin typeface="Arial"/>
               </a:rPr>
-              <a:t>•  9-19 The four approaches: interferometer, Zernike, vector Zernike, pinhole</a:t>
+              <a:t>•  4 The bench layout</a:t>
             </a:r>
           </a:p>
           <a:p>
@@ -6491,7 +6491,7 @@
                 </a:solidFill>
                 <a:latin typeface="Arial"/>
               </a:rPr>
-              <a:t>•  20-25 Performance on the working surface: rows, capture, photons, servo</a:t>
+              <a:t>•  6 Parts</a:t>
             </a:r>
           </a:p>
           <a:p>
@@ -6507,7 +6507,71 @@
                 </a:solidFill>
                 <a:latin typeface="Arial"/>
               </a:rPr>
-              <a:t>•  26-28 Lenses or off-axis mirrors</a:t>
+              <a:t>•  9 Twyman-Green interferometer</a:t>
+            </a:r>
+          </a:p>
+          <a:p>
+            <a:pPr>
+              <a:spcAft>
+                <a:spcPts val="600"/>
+              </a:spcAft>
+            </a:pPr>
+            <a:r>
+              <a:rPr sz="1200" b="0">
+                <a:solidFill>
+                  <a:srgbClr val="282828"/>
+                </a:solidFill>
+                <a:latin typeface="Arial"/>
+              </a:rPr>
+              <a:t>•  12 Zernike sensor</a:t>
+            </a:r>
+          </a:p>
+          <a:p>
+            <a:pPr>
+              <a:spcAft>
+                <a:spcPts val="600"/>
+              </a:spcAft>
+            </a:pPr>
+            <a:r>
+              <a:rPr sz="1200" b="0">
+                <a:solidFill>
+                  <a:srgbClr val="282828"/>
+                </a:solidFill>
+                <a:latin typeface="Arial"/>
+              </a:rPr>
+              <a:t>•  14 Vector Zernike sensor</a:t>
+            </a:r>
+          </a:p>
+          <a:p>
+            <a:pPr>
+              <a:spcAft>
+                <a:spcPts val="600"/>
+              </a:spcAft>
+            </a:pPr>
+            <a:r>
+              <a:rPr sz="1200" b="0">
+                <a:solidFill>
+                  <a:srgbClr val="282828"/>
+                </a:solidFill>
+                <a:latin typeface="Arial"/>
+              </a:rPr>
+              <a:t>•  17 Point-diffraction sensor</a:t>
+            </a:r>
+          </a:p>
+          <a:p>
+            <a:pPr>
+              <a:spcAft>
+                <a:spcPts val="600"/>
+              </a:spcAft>
+            </a:pPr>
+            <a:r>
+              <a:rPr sz="1200" b="0">
+                <a:solidFill>
+                  <a:srgbClr val="282828"/>
+                </a:solidFill>
+                <a:latin typeface="Arial"/>
+              </a:rPr>
+              <a:t>•  20 Performance: rows, capture, photons, servo</a:t>
             </a:r>
           </a:p>
         </p:txBody>
@@ -6546,7 +6610,7 @@
                 </a:solidFill>
                 <a:latin typeface="Arial"/>
               </a:rPr>
-              <a:t>•  29-30 Systematics; recommendation</a:t>
+              <a:t>•  26 Lenses versus off-axis parabolas</a:t>
             </a:r>
           </a:p>
           <a:p>
@@ -6562,7 +6626,7 @@
                 </a:solidFill>
                 <a:latin typeface="Arial"/>
               </a:rPr>
-              <a:t>•  31-33 Operating the gauge</a:t>
+              <a:t>•  27 The reflective front end and its performance</a:t>
             </a:r>
           </a:p>
           <a:p>
@@ -6578,7 +6642,7 @@
                 </a:solidFill>
                 <a:latin typeface="Arial"/>
               </a:rPr>
-              <a:t>•  34-36 Future work</a:t>
+              <a:t>•  29 Comparison and recommendation</a:t>
             </a:r>
           </a:p>
           <a:p>
@@ -6594,7 +6658,7 @@
                 </a:solidFill>
                 <a:latin typeface="Arial"/>
               </a:rPr>
-              <a:t>•  37-38 Method; run it yourself</a:t>
+              <a:t>•  32 Complex amplitude</a:t>
             </a:r>
           </a:p>
           <a:p>
@@ -6610,7 +6674,39 @@
                 </a:solidFill>
                 <a:latin typeface="Arial"/>
               </a:rPr>
-              <a:t>•  39-48 Backup</a:t>
+              <a:t>•  33 Summary and future work</a:t>
+            </a:r>
+          </a:p>
+          <a:p>
+            <a:pPr>
+              <a:spcAft>
+                <a:spcPts val="600"/>
+              </a:spcAft>
+            </a:pPr>
+            <a:r>
+              <a:rPr sz="1200" b="0">
+                <a:solidFill>
+                  <a:srgbClr val="282828"/>
+                </a:solidFill>
+                <a:latin typeface="Arial"/>
+              </a:rPr>
+              <a:t>•  38 Run it yourself</a:t>
+            </a:r>
+          </a:p>
+          <a:p>
+            <a:pPr>
+              <a:spcAft>
+                <a:spcPts val="600"/>
+              </a:spcAft>
+            </a:pPr>
+            <a:r>
+              <a:rPr sz="1200" b="0">
+                <a:solidFill>
+                  <a:srgbClr val="282828"/>
+                </a:solidFill>
+                <a:latin typeface="Arial"/>
+              </a:rPr>
+              <a:t>•  39 Backup</a:t>
             </a:r>
           </a:p>
         </p:txBody>

--- a/demo_session/deck_gauges_edit.pptx
+++ b/demo_session/deck_gauges_edit.pptx
@@ -53,6 +53,7 @@
     <p:sldId id="301" r:id="rId52"/>
     <p:sldId id="302" r:id="rId53"/>
     <p:sldId id="303" r:id="rId54"/>
+    <p:sldId id="304" r:id="rId55"/>
   </p:sldIdLst>
   <p:sldSz cx="12191695" cy="6858000" type="screen4x3"/>
   <p:notesSz cx="6858000" cy="9144000"/>
@@ -3791,6 +3792,647 @@
                 </a:solidFill>
                 <a:latin typeface="Arial"/>
               </a:rPr>
+              <a:t>Interferometer: pupil image quality</a:t>
+            </a:r>
+          </a:p>
+          <a:p>
+            <a:pPr>
+              <a:spcAft>
+                <a:spcPts val="0"/>
+              </a:spcAft>
+            </a:pPr>
+            <a:r>
+              <a:rPr sz="1250" b="0">
+                <a:solidFill>
+                  <a:srgbClr val="6E6E6E"/>
+                </a:solidFill>
+                <a:latin typeface="Arial"/>
+              </a:rPr>
+              <a:t>The camera sees the DM sharply on both front ends; against a single global mapping the image is distorted by a third of a pitch at the edge on lenses and most of a pitch on mirrors, which the measured response matrix absorbs and a geometric mapping would not</a:t>
+            </a:r>
+          </a:p>
+        </p:txBody>
+      </p:sp>
+      <p:sp>
+        <p:nvSpPr>
+          <p:cNvPr id="3" name="Rectangle 2"/>
+          <p:cNvSpPr/>
+          <p:nvPr/>
+        </p:nvSpPr>
+        <p:spPr>
+          <a:xfrm>
+            <a:off x="411480" y="1133856"/>
+            <a:ext cx="11368735" cy="20320"/>
+          </a:xfrm>
+          <a:prstGeom prst="rect">
+            <a:avLst/>
+          </a:prstGeom>
+          <a:solidFill>
+            <a:srgbClr val="B8C6D4"/>
+          </a:solidFill>
+          <a:ln>
+            <a:noFill/>
+          </a:ln>
+          <a:effectLst/>
+        </p:spPr>
+        <p:style>
+          <a:lnRef idx="1">
+            <a:schemeClr val="accent1"/>
+          </a:lnRef>
+          <a:fillRef idx="3">
+            <a:schemeClr val="accent1"/>
+          </a:fillRef>
+          <a:effectRef idx="2">
+            <a:schemeClr val="accent1"/>
+          </a:effectRef>
+          <a:fontRef idx="minor">
+            <a:schemeClr val="lt1"/>
+          </a:fontRef>
+        </p:style>
+        <p:txBody>
+          <a:bodyPr rtlCol="0" anchor="ctr"/>
+          <a:lstStyle/>
+          <a:p>
+            <a:pPr algn="ctr"/>
+          </a:p>
+        </p:txBody>
+      </p:sp>
+      <p:pic>
+        <p:nvPicPr>
+          <p:cNvPr id="4" name="Picture 3" descr="pupilq_lens_pupil.png"/>
+          <p:cNvPicPr>
+            <a:picLocks noChangeAspect="1"/>
+          </p:cNvPicPr>
+          <p:nvPr/>
+        </p:nvPicPr>
+        <p:blipFill>
+          <a:blip r:embed="rId2"/>
+          <a:stretch>
+            <a:fillRect/>
+          </a:stretch>
+        </p:blipFill>
+        <p:spPr>
+          <a:xfrm>
+            <a:off x="1366701" y="1298448"/>
+            <a:ext cx="3895997" cy="1818132"/>
+          </a:xfrm>
+          <a:prstGeom prst="rect">
+            <a:avLst/>
+          </a:prstGeom>
+        </p:spPr>
+      </p:pic>
+      <p:sp>
+        <p:nvSpPr>
+          <p:cNvPr id="5" name="TextBox 4"/>
+          <p:cNvSpPr txBox="1"/>
+          <p:nvPr/>
+        </p:nvSpPr>
+        <p:spPr>
+          <a:xfrm>
+            <a:off x="411480" y="3134868"/>
+            <a:ext cx="5806440" cy="559307"/>
+          </a:xfrm>
+          <a:prstGeom prst="rect">
+            <a:avLst/>
+          </a:prstGeom>
+          <a:noFill/>
+        </p:spPr>
+        <p:txBody>
+          <a:bodyPr wrap="square">
+            <a:spAutoFit/>
+          </a:bodyPr>
+          <a:lstStyle/>
+          <a:p>
+            <a:pPr algn="ctr">
+              <a:spcAft>
+                <a:spcPts val="0"/>
+              </a:spcAft>
+            </a:pPr>
+            <a:r>
+              <a:rPr sz="1000" b="0">
+                <a:solidFill>
+                  <a:srgbClr val="6E6E6E"/>
+                </a:solidFill>
+                <a:latin typeface="Arial"/>
+              </a:rPr>
+              <a:t>The DM's image at the camera on the lens rig, the DM as the stop: left, distortion against the global affine (arrows ×3, DM mm); right, the blur of each zone's image over the band of tilts the DM can make.  The runner's own figure.</a:t>
+            </a:r>
+          </a:p>
+        </p:txBody>
+      </p:sp>
+      <p:graphicFrame>
+        <p:nvGraphicFramePr>
+          <p:cNvPr id="6" name="Table 5"/>
+          <p:cNvGraphicFramePr>
+            <a:graphicFrameLocks noGrp="1"/>
+          </p:cNvGraphicFramePr>
+          <p:nvPr/>
+        </p:nvGraphicFramePr>
+        <p:xfrm>
+          <a:off x="6400800" y="1298448"/>
+          <a:ext cx="5394958" cy="1314450"/>
+        </p:xfrm>
+        <a:graphic>
+          <a:graphicData uri="http://schemas.openxmlformats.org/drawingml/2006/table">
+            <a:tbl>
+              <a:tblPr firstRow="1" bandRow="1">
+                <a:tableStyleId>{5C22544A-7EE6-4342-B048-85BDC9FD1C3A}</a:tableStyleId>
+              </a:tblPr>
+              <a:tblGrid>
+                <a:gridCol w="3159202"/>
+                <a:gridCol w="1098853"/>
+                <a:gridCol w="1136903"/>
+              </a:tblGrid>
+              <a:tr h="262890">
+                <a:tc>
+                  <a:txBody>
+                    <a:bodyPr wrap="square"/>
+                    <a:lstStyle/>
+                    <a:p>
+                      <a:r>
+                        <a:rPr sz="1000" b="1">
+                          <a:solidFill>
+                            <a:srgbClr val="FFFFFF"/>
+                          </a:solidFill>
+                          <a:latin typeface="Arial"/>
+                        </a:rPr>
+                        <a:t>DM mm unless stated</a:t>
+                      </a:r>
+                    </a:p>
+                  </a:txBody>
+                  <a:tcPr marL="54864" marR="54864" marT="18288" marB="18288">
+                    <a:solidFill>
+                      <a:srgbClr val="1F4E79"/>
+                    </a:solidFill>
+                  </a:tcPr>
+                </a:tc>
+                <a:tc>
+                  <a:txBody>
+                    <a:bodyPr wrap="square"/>
+                    <a:lstStyle/>
+                    <a:p>
+                      <a:r>
+                        <a:rPr sz="1000" b="1">
+                          <a:solidFill>
+                            <a:srgbClr val="FFFFFF"/>
+                          </a:solidFill>
+                          <a:latin typeface="Arial"/>
+                        </a:rPr>
+                        <a:t>lens rig</a:t>
+                      </a:r>
+                    </a:p>
+                  </a:txBody>
+                  <a:tcPr marL="54864" marR="54864" marT="18288" marB="18288">
+                    <a:solidFill>
+                      <a:srgbClr val="1F4E79"/>
+                    </a:solidFill>
+                  </a:tcPr>
+                </a:tc>
+                <a:tc>
+                  <a:txBody>
+                    <a:bodyPr wrap="square"/>
+                    <a:lstStyle/>
+                    <a:p>
+                      <a:r>
+                        <a:rPr sz="1000" b="1">
+                          <a:solidFill>
+                            <a:srgbClr val="FFFFFF"/>
+                          </a:solidFill>
+                          <a:latin typeface="Arial"/>
+                        </a:rPr>
+                        <a:t>mirror rig</a:t>
+                      </a:r>
+                    </a:p>
+                  </a:txBody>
+                  <a:tcPr marL="54864" marR="54864" marT="18288" marB="18288">
+                    <a:solidFill>
+                      <a:srgbClr val="1F4E79"/>
+                    </a:solidFill>
+                  </a:tcPr>
+                </a:tc>
+              </a:tr>
+              <a:tr h="262890">
+                <a:tc>
+                  <a:txBody>
+                    <a:bodyPr wrap="square"/>
+                    <a:lstStyle/>
+                    <a:p>
+                      <a:r>
+                        <a:rPr sz="1000" b="0">
+                          <a:solidFill>
+                            <a:srgbClr val="282828"/>
+                          </a:solidFill>
+                          <a:latin typeface="Arial"/>
+                        </a:rPr>
+                        <a:t>distortion vs one affine: rms / edge</a:t>
+                      </a:r>
+                    </a:p>
+                  </a:txBody>
+                  <a:tcPr marL="54864" marR="54864" marT="18288" marB="18288">
+                    <a:solidFill>
+                      <a:srgbClr val="FFFFFF"/>
+                    </a:solidFill>
+                  </a:tcPr>
+                </a:tc>
+                <a:tc>
+                  <a:txBody>
+                    <a:bodyPr wrap="square"/>
+                    <a:lstStyle/>
+                    <a:p>
+                      <a:r>
+                        <a:rPr sz="1000" b="0">
+                          <a:solidFill>
+                            <a:srgbClr val="282828"/>
+                          </a:solidFill>
+                          <a:latin typeface="Arial"/>
+                        </a:rPr>
+                        <a:t>0.13 / 0.30</a:t>
+                      </a:r>
+                    </a:p>
+                  </a:txBody>
+                  <a:tcPr marL="54864" marR="54864" marT="18288" marB="18288">
+                    <a:solidFill>
+                      <a:srgbClr val="FFFFFF"/>
+                    </a:solidFill>
+                  </a:tcPr>
+                </a:tc>
+                <a:tc>
+                  <a:txBody>
+                    <a:bodyPr wrap="square"/>
+                    <a:lstStyle/>
+                    <a:p>
+                      <a:r>
+                        <a:rPr sz="1000" b="0">
+                          <a:solidFill>
+                            <a:srgbClr val="282828"/>
+                          </a:solidFill>
+                          <a:latin typeface="Arial"/>
+                        </a:rPr>
+                        <a:t>0.45 / 0.85</a:t>
+                      </a:r>
+                    </a:p>
+                  </a:txBody>
+                  <a:tcPr marL="54864" marR="54864" marT="18288" marB="18288">
+                    <a:solidFill>
+                      <a:srgbClr val="FFFFFF"/>
+                    </a:solidFill>
+                  </a:tcPr>
+                </a:tc>
+              </a:tr>
+              <a:tr h="262890">
+                <a:tc>
+                  <a:txBody>
+                    <a:bodyPr wrap="square"/>
+                    <a:lstStyle/>
+                    <a:p>
+                      <a:r>
+                        <a:rPr sz="1000" b="0">
+                          <a:solidFill>
+                            <a:srgbClr val="282828"/>
+                          </a:solidFill>
+                          <a:latin typeface="Arial"/>
+                        </a:rPr>
+                        <a:t>blur over the actuator band: rms / max</a:t>
+                      </a:r>
+                    </a:p>
+                  </a:txBody>
+                  <a:tcPr marL="54864" marR="54864" marT="18288" marB="18288">
+                    <a:solidFill>
+                      <a:srgbClr val="ECF1F6"/>
+                    </a:solidFill>
+                  </a:tcPr>
+                </a:tc>
+                <a:tc>
+                  <a:txBody>
+                    <a:bodyPr wrap="square"/>
+                    <a:lstStyle/>
+                    <a:p>
+                      <a:r>
+                        <a:rPr sz="1000" b="0">
+                          <a:solidFill>
+                            <a:srgbClr val="282828"/>
+                          </a:solidFill>
+                          <a:latin typeface="Arial"/>
+                        </a:rPr>
+                        <a:t>0.023 / 0.060</a:t>
+                      </a:r>
+                    </a:p>
+                  </a:txBody>
+                  <a:tcPr marL="54864" marR="54864" marT="18288" marB="18288">
+                    <a:solidFill>
+                      <a:srgbClr val="ECF1F6"/>
+                    </a:solidFill>
+                  </a:tcPr>
+                </a:tc>
+                <a:tc>
+                  <a:txBody>
+                    <a:bodyPr wrap="square"/>
+                    <a:lstStyle/>
+                    <a:p>
+                      <a:r>
+                        <a:rPr sz="1000" b="0">
+                          <a:solidFill>
+                            <a:srgbClr val="282828"/>
+                          </a:solidFill>
+                          <a:latin typeface="Arial"/>
+                        </a:rPr>
+                        <a:t>0.032 / 0.093</a:t>
+                      </a:r>
+                    </a:p>
+                  </a:txBody>
+                  <a:tcPr marL="54864" marR="54864" marT="18288" marB="18288">
+                    <a:solidFill>
+                      <a:srgbClr val="ECF1F6"/>
+                    </a:solidFill>
+                  </a:tcPr>
+                </a:tc>
+              </a:tr>
+              <a:tr h="262890">
+                <a:tc>
+                  <a:txBody>
+                    <a:bodyPr wrap="square"/>
+                    <a:lstStyle/>
+                    <a:p>
+                      <a:r>
+                        <a:rPr sz="1000" b="0">
+                          <a:solidFill>
+                            <a:srgbClr val="282828"/>
+                          </a:solidFill>
+                          <a:latin typeface="Arial"/>
+                        </a:rPr>
+                        <a:t>image surface: defocus / tilt (mm of sag)</a:t>
+                      </a:r>
+                    </a:p>
+                  </a:txBody>
+                  <a:tcPr marL="54864" marR="54864" marT="18288" marB="18288">
+                    <a:solidFill>
+                      <a:srgbClr val="FFFFFF"/>
+                    </a:solidFill>
+                  </a:tcPr>
+                </a:tc>
+                <a:tc>
+                  <a:txBody>
+                    <a:bodyPr wrap="square"/>
+                    <a:lstStyle/>
+                    <a:p>
+                      <a:r>
+                        <a:rPr sz="1000" b="0">
+                          <a:solidFill>
+                            <a:srgbClr val="282828"/>
+                          </a:solidFill>
+                          <a:latin typeface="Arial"/>
+                        </a:rPr>
+                        <a:t>3.8 / 0.0</a:t>
+                      </a:r>
+                    </a:p>
+                  </a:txBody>
+                  <a:tcPr marL="54864" marR="54864" marT="18288" marB="18288">
+                    <a:solidFill>
+                      <a:srgbClr val="FFFFFF"/>
+                    </a:solidFill>
+                  </a:tcPr>
+                </a:tc>
+                <a:tc>
+                  <a:txBody>
+                    <a:bodyPr wrap="square"/>
+                    <a:lstStyle/>
+                    <a:p>
+                      <a:r>
+                        <a:rPr sz="1000" b="0">
+                          <a:solidFill>
+                            <a:srgbClr val="282828"/>
+                          </a:solidFill>
+                          <a:latin typeface="Arial"/>
+                        </a:rPr>
+                        <a:t>-0.5 / 0.45</a:t>
+                      </a:r>
+                    </a:p>
+                  </a:txBody>
+                  <a:tcPr marL="54864" marR="54864" marT="18288" marB="18288">
+                    <a:solidFill>
+                      <a:srgbClr val="FFFFFF"/>
+                    </a:solidFill>
+                  </a:tcPr>
+                </a:tc>
+              </a:tr>
+              <a:tr h="262890">
+                <a:tc>
+                  <a:txBody>
+                    <a:bodyPr wrap="square"/>
+                    <a:lstStyle/>
+                    <a:p>
+                      <a:r>
+                        <a:rPr sz="1000" b="0">
+                          <a:solidFill>
+                            <a:srgbClr val="282828"/>
+                          </a:solidFill>
+                          <a:latin typeface="Arial"/>
+                        </a:rPr>
+                        <a:t>focal spot on axis / at the actuator-band tilt</a:t>
+                      </a:r>
+                    </a:p>
+                  </a:txBody>
+                  <a:tcPr marL="54864" marR="54864" marT="18288" marB="18288">
+                    <a:solidFill>
+                      <a:srgbClr val="ECF1F6"/>
+                    </a:solidFill>
+                  </a:tcPr>
+                </a:tc>
+                <a:tc>
+                  <a:txBody>
+                    <a:bodyPr wrap="square"/>
+                    <a:lstStyle/>
+                    <a:p>
+                      <a:r>
+                        <a:rPr sz="1000" b="0">
+                          <a:solidFill>
+                            <a:srgbClr val="282828"/>
+                          </a:solidFill>
+                          <a:latin typeface="Arial"/>
+                        </a:rPr>
+                        <a:t>0.16 / 0.16 λF/D</a:t>
+                      </a:r>
+                    </a:p>
+                  </a:txBody>
+                  <a:tcPr marL="54864" marR="54864" marT="18288" marB="18288">
+                    <a:solidFill>
+                      <a:srgbClr val="ECF1F6"/>
+                    </a:solidFill>
+                  </a:tcPr>
+                </a:tc>
+                <a:tc>
+                  <a:txBody>
+                    <a:bodyPr wrap="square"/>
+                    <a:lstStyle/>
+                    <a:p>
+                      <a:r>
+                        <a:rPr sz="1000" b="0">
+                          <a:solidFill>
+                            <a:srgbClr val="282828"/>
+                          </a:solidFill>
+                          <a:latin typeface="Arial"/>
+                        </a:rPr>
+                        <a:t>0.00 / 2.3 λF/D</a:t>
+                      </a:r>
+                    </a:p>
+                  </a:txBody>
+                  <a:tcPr marL="54864" marR="54864" marT="18288" marB="18288">
+                    <a:solidFill>
+                      <a:srgbClr val="ECF1F6"/>
+                    </a:solidFill>
+                  </a:tcPr>
+                </a:tc>
+              </a:tr>
+            </a:tbl>
+          </a:graphicData>
+        </a:graphic>
+      </p:graphicFrame>
+      <p:sp>
+        <p:nvSpPr>
+          <p:cNvPr id="7" name="TextBox 6"/>
+          <p:cNvSpPr txBox="1"/>
+          <p:nvPr/>
+        </p:nvSpPr>
+        <p:spPr>
+          <a:xfrm>
+            <a:off x="6400800" y="2759202"/>
+            <a:ext cx="5394960" cy="274320"/>
+          </a:xfrm>
+          <a:prstGeom prst="rect">
+            <a:avLst/>
+          </a:prstGeom>
+          <a:noFill/>
+        </p:spPr>
+        <p:txBody>
+          <a:bodyPr wrap="square">
+            <a:spAutoFit/>
+          </a:bodyPr>
+          <a:lstStyle/>
+          <a:p>
+            <a:pPr>
+              <a:spcAft>
+                <a:spcPts val="600"/>
+              </a:spcAft>
+            </a:pPr>
+            <a:r>
+              <a:rPr sz="1200" b="0">
+                <a:solidFill>
+                  <a:srgbClr val="282828"/>
+                </a:solidFill>
+                <a:latin typeface="Arial"/>
+              </a:rPr>
+              <a:t>•  Method: the DM declared the stop; the field a tilt about it (a spatial frequency on its surface); two traces a small field step apart cross at each zone's image at the camera; scored in DM millimeters against the 1 mm pitch and the 0.4 mm pixel.</a:t>
+            </a:r>
+          </a:p>
+          <a:p>
+            <a:pPr>
+              <a:spcAft>
+                <a:spcPts val="600"/>
+              </a:spcAft>
+            </a:pPr>
+            <a:r>
+              <a:rPr sz="1200" b="0">
+                <a:solidFill>
+                  <a:srgbClr val="282828"/>
+                </a:solidFill>
+                <a:latin typeface="Arial"/>
+              </a:rPr>
+              <a:t>•  The mirror rig's focus is perfect on axis and coma-limited off it (2.3 λF/D at the actuator-band tilt); not a pupil-image or mask-sensor cost, a number to know for any off-axis reading at the seat.</a:t>
+            </a:r>
+          </a:p>
+        </p:txBody>
+      </p:sp>
+      <p:sp>
+        <p:nvSpPr>
+          <p:cNvPr id="8" name="TextBox 7"/>
+          <p:cNvSpPr txBox="1"/>
+          <p:nvPr/>
+        </p:nvSpPr>
+        <p:spPr>
+          <a:xfrm>
+            <a:off x="6400800" y="4463034"/>
+            <a:ext cx="5394960" cy="274320"/>
+          </a:xfrm>
+          <a:prstGeom prst="rect">
+            <a:avLst/>
+          </a:prstGeom>
+          <a:noFill/>
+        </p:spPr>
+        <p:txBody>
+          <a:bodyPr wrap="square">
+            <a:spAutoFit/>
+          </a:bodyPr>
+          <a:lstStyle/>
+          <a:p>
+            <a:pPr>
+              <a:spcAft>
+                <a:spcPts val="600"/>
+              </a:spcAft>
+            </a:pPr>
+            <a:r>
+              <a:rPr sz="1050" b="0">
+                <a:solidFill>
+                  <a:srgbClr val="6E6E6E"/>
+                </a:solidFill>
+                <a:latin typeface="Arial"/>
+              </a:rPr>
+              <a:t>Run tags pupilq_lens, pupilq_oap (tg96_pupilq, model 512); tg_psi_dm96_oap/REPORT_bench_realism.md section 6.  Requested by Fang Shi.</a:t>
+            </a:r>
+          </a:p>
+        </p:txBody>
+      </p:sp>
+    </p:spTree>
+  </p:cSld>
+  <p:clrMapOvr>
+    <a:masterClrMapping/>
+  </p:clrMapOvr>
+</p:sld>
+</file>
+
+<file path=ppt/slides/slide13.xml><?xml version="1.0" encoding="utf-8"?>
+<p:sld xmlns:a="http://schemas.openxmlformats.org/drawingml/2006/main" xmlns:p="http://schemas.openxmlformats.org/presentationml/2006/main" xmlns:r="http://schemas.openxmlformats.org/officeDocument/2006/relationships">
+  <p:cSld>
+    <p:spTree>
+      <p:nvGrpSpPr>
+        <p:cNvPr id="1" name=""/>
+        <p:cNvGrpSpPr/>
+        <p:nvPr/>
+      </p:nvGrpSpPr>
+      <p:grpSpPr/>
+      <p:sp>
+        <p:nvSpPr>
+          <p:cNvPr id="2" name="TextBox 1"/>
+          <p:cNvSpPr txBox="1"/>
+          <p:nvPr/>
+        </p:nvSpPr>
+        <p:spPr>
+          <a:xfrm>
+            <a:off x="411480" y="201168"/>
+            <a:ext cx="11368735" cy="914400"/>
+          </a:xfrm>
+          <a:prstGeom prst="rect">
+            <a:avLst/>
+          </a:prstGeom>
+          <a:noFill/>
+        </p:spPr>
+        <p:txBody>
+          <a:bodyPr wrap="square">
+            <a:spAutoFit/>
+          </a:bodyPr>
+          <a:lstStyle/>
+          <a:p>
+            <a:pPr>
+              <a:spcAft>
+                <a:spcPts val="400"/>
+              </a:spcAft>
+            </a:pPr>
+            <a:r>
+              <a:rPr sz="2400" b="1">
+                <a:solidFill>
+                  <a:srgbClr val="1F4E79"/>
+                </a:solidFill>
+                <a:latin typeface="Arial"/>
+              </a:rPr>
               <a:t>Zernike sensor: a quarter-wave dimple at the focus</a:t>
             </a:r>
           </a:p>
@@ -4037,7 +4679,7 @@
 </p:sld>
 </file>
 
-<file path=ppt/slides/slide13.xml><?xml version="1.0" encoding="utf-8"?>
+<file path=ppt/slides/slide14.xml><?xml version="1.0" encoding="utf-8"?>
 <p:sld xmlns:a="http://schemas.openxmlformats.org/drawingml/2006/main" xmlns:p="http://schemas.openxmlformats.org/presentationml/2006/main" xmlns:r="http://schemas.openxmlformats.org/officeDocument/2006/relationships">
   <p:cSld>
     <p:spTree>
@@ -4295,7 +4937,7 @@
 </p:sld>
 </file>
 
-<file path=ppt/slides/slide14.xml><?xml version="1.0" encoding="utf-8"?>
+<file path=ppt/slides/slide15.xml><?xml version="1.0" encoding="utf-8"?>
 <p:sld xmlns:a="http://schemas.openxmlformats.org/drawingml/2006/main" xmlns:p="http://schemas.openxmlformats.org/presentationml/2006/main" xmlns:r="http://schemas.openxmlformats.org/officeDocument/2006/relationships">
   <p:cSld>
     <p:spTree>
@@ -4824,7 +5466,7 @@
 </p:sld>
 </file>
 
-<file path=ppt/slides/slide15.xml><?xml version="1.0" encoding="utf-8"?>
+<file path=ppt/slides/slide16.xml><?xml version="1.0" encoding="utf-8"?>
 <p:sld xmlns:a="http://schemas.openxmlformats.org/drawingml/2006/main" xmlns:p="http://schemas.openxmlformats.org/presentationml/2006/main" xmlns:r="http://schemas.openxmlformats.org/officeDocument/2006/relationships">
   <p:cSld>
     <p:spTree>
@@ -5082,7 +5724,7 @@
 </p:sld>
 </file>
 
-<file path=ppt/slides/slide16.xml><?xml version="1.0" encoding="utf-8"?>
+<file path=ppt/slides/slide17.xml><?xml version="1.0" encoding="utf-8"?>
 <p:sld xmlns:a="http://schemas.openxmlformats.org/drawingml/2006/main" xmlns:p="http://schemas.openxmlformats.org/presentationml/2006/main" xmlns:r="http://schemas.openxmlformats.org/officeDocument/2006/relationships">
   <p:cSld>
     <p:spTree>
@@ -5340,7 +5982,7 @@
 </p:sld>
 </file>
 
-<file path=ppt/slides/slide17.xml><?xml version="1.0" encoding="utf-8"?>
+<file path=ppt/slides/slide18.xml><?xml version="1.0" encoding="utf-8"?>
 <p:sld xmlns:a="http://schemas.openxmlformats.org/drawingml/2006/main" xmlns:p="http://schemas.openxmlformats.org/presentationml/2006/main" xmlns:r="http://schemas.openxmlformats.org/officeDocument/2006/relationships">
   <p:cSld>
     <p:spTree>
@@ -5839,7 +6481,7 @@
 </p:sld>
 </file>
 
-<file path=ppt/slides/slide18.xml><?xml version="1.0" encoding="utf-8"?>
+<file path=ppt/slides/slide19.xml><?xml version="1.0" encoding="utf-8"?>
 <p:sld xmlns:a="http://schemas.openxmlformats.org/drawingml/2006/main" xmlns:p="http://schemas.openxmlformats.org/presentationml/2006/main" xmlns:r="http://schemas.openxmlformats.org/officeDocument/2006/relationships">
   <p:cSld>
     <p:spTree>
@@ -6058,7 +6700,410 @@
 </p:sld>
 </file>
 
-<file path=ppt/slides/slide19.xml><?xml version="1.0" encoding="utf-8"?>
+<file path=ppt/slides/slide2.xml><?xml version="1.0" encoding="utf-8"?>
+<p:sld xmlns:a="http://schemas.openxmlformats.org/drawingml/2006/main" xmlns:p="http://schemas.openxmlformats.org/presentationml/2006/main" xmlns:r="http://schemas.openxmlformats.org/officeDocument/2006/relationships">
+  <p:cSld>
+    <p:spTree>
+      <p:nvGrpSpPr>
+        <p:cNvPr id="1" name=""/>
+        <p:cNvGrpSpPr/>
+        <p:nvPr/>
+      </p:nvGrpSpPr>
+      <p:grpSpPr/>
+      <p:sp>
+        <p:nvSpPr>
+          <p:cNvPr id="2" name="TextBox 1"/>
+          <p:cNvSpPr txBox="1"/>
+          <p:nvPr/>
+        </p:nvSpPr>
+        <p:spPr>
+          <a:xfrm>
+            <a:off x="411480" y="201168"/>
+            <a:ext cx="11368735" cy="914400"/>
+          </a:xfrm>
+          <a:prstGeom prst="rect">
+            <a:avLst/>
+          </a:prstGeom>
+          <a:noFill/>
+        </p:spPr>
+        <p:txBody>
+          <a:bodyPr wrap="square">
+            <a:spAutoFit/>
+          </a:bodyPr>
+          <a:lstStyle/>
+          <a:p>
+            <a:pPr>
+              <a:spcAft>
+                <a:spcPts val="400"/>
+              </a:spcAft>
+            </a:pPr>
+            <a:r>
+              <a:rPr sz="2400" b="1">
+                <a:solidFill>
+                  <a:srgbClr val="1F4E79"/>
+                </a:solidFill>
+                <a:latin typeface="Arial"/>
+              </a:rPr>
+              <a:t>Contents</a:t>
+            </a:r>
+          </a:p>
+          <a:p>
+            <a:pPr>
+              <a:spcAft>
+                <a:spcPts val="0"/>
+              </a:spcAft>
+            </a:pPr>
+            <a:r>
+              <a:rPr sz="1250" b="0">
+                <a:solidFill>
+                  <a:srgbClr val="6E6E6E"/>
+                </a:solidFill>
+                <a:latin typeface="Arial"/>
+              </a:rPr>
+              <a:t>Three jobs, one bench, four ways of sensing</a:t>
+            </a:r>
+          </a:p>
+        </p:txBody>
+      </p:sp>
+      <p:sp>
+        <p:nvSpPr>
+          <p:cNvPr id="3" name="Rectangle 2"/>
+          <p:cNvSpPr/>
+          <p:nvPr/>
+        </p:nvSpPr>
+        <p:spPr>
+          <a:xfrm>
+            <a:off x="411480" y="1133856"/>
+            <a:ext cx="11368735" cy="20320"/>
+          </a:xfrm>
+          <a:prstGeom prst="rect">
+            <a:avLst/>
+          </a:prstGeom>
+          <a:solidFill>
+            <a:srgbClr val="B8C6D4"/>
+          </a:solidFill>
+          <a:ln>
+            <a:noFill/>
+          </a:ln>
+          <a:effectLst/>
+        </p:spPr>
+        <p:style>
+          <a:lnRef idx="1">
+            <a:schemeClr val="accent1"/>
+          </a:lnRef>
+          <a:fillRef idx="3">
+            <a:schemeClr val="accent1"/>
+          </a:fillRef>
+          <a:effectRef idx="2">
+            <a:schemeClr val="accent1"/>
+          </a:effectRef>
+          <a:fontRef idx="minor">
+            <a:schemeClr val="lt1"/>
+          </a:fontRef>
+        </p:style>
+        <p:txBody>
+          <a:bodyPr rtlCol="0" anchor="ctr"/>
+          <a:lstStyle/>
+          <a:p>
+            <a:pPr algn="ctr"/>
+          </a:p>
+        </p:txBody>
+      </p:sp>
+      <p:sp>
+        <p:nvSpPr>
+          <p:cNvPr id="4" name="TextBox 3"/>
+          <p:cNvSpPr txBox="1"/>
+          <p:nvPr/>
+        </p:nvSpPr>
+        <p:spPr>
+          <a:xfrm>
+            <a:off x="411480" y="1298448"/>
+            <a:ext cx="5806440" cy="274320"/>
+          </a:xfrm>
+          <a:prstGeom prst="rect">
+            <a:avLst/>
+          </a:prstGeom>
+          <a:noFill/>
+        </p:spPr>
+        <p:txBody>
+          <a:bodyPr wrap="square">
+            <a:spAutoFit/>
+          </a:bodyPr>
+          <a:lstStyle/>
+          <a:p>
+            <a:pPr>
+              <a:spcAft>
+                <a:spcPts val="600"/>
+              </a:spcAft>
+            </a:pPr>
+            <a:r>
+              <a:rPr sz="1200" b="0">
+                <a:solidFill>
+                  <a:srgbClr val="282828"/>
+                </a:solidFill>
+                <a:latin typeface="Arial"/>
+              </a:rPr>
+              <a:t>•  3 Introduction: the three jobs and how they are scored</a:t>
+            </a:r>
+          </a:p>
+          <a:p>
+            <a:pPr>
+              <a:spcAft>
+                <a:spcPts val="600"/>
+              </a:spcAft>
+            </a:pPr>
+            <a:r>
+              <a:rPr sz="1200" b="0">
+                <a:solidFill>
+                  <a:srgbClr val="282828"/>
+                </a:solidFill>
+                <a:latin typeface="Arial"/>
+              </a:rPr>
+              <a:t>•  4 The bench layout</a:t>
+            </a:r>
+          </a:p>
+          <a:p>
+            <a:pPr>
+              <a:spcAft>
+                <a:spcPts val="600"/>
+              </a:spcAft>
+            </a:pPr>
+            <a:r>
+              <a:rPr sz="1200" b="0">
+                <a:solidFill>
+                  <a:srgbClr val="282828"/>
+                </a:solidFill>
+                <a:latin typeface="Arial"/>
+              </a:rPr>
+              <a:t>•  6 Parts</a:t>
+            </a:r>
+          </a:p>
+          <a:p>
+            <a:pPr>
+              <a:spcAft>
+                <a:spcPts val="600"/>
+              </a:spcAft>
+            </a:pPr>
+            <a:r>
+              <a:rPr sz="1200" b="0">
+                <a:solidFill>
+                  <a:srgbClr val="282828"/>
+                </a:solidFill>
+                <a:latin typeface="Arial"/>
+              </a:rPr>
+              <a:t>•  9 Twyman-Green interferometer</a:t>
+            </a:r>
+          </a:p>
+          <a:p>
+            <a:pPr>
+              <a:spcAft>
+                <a:spcPts val="600"/>
+              </a:spcAft>
+            </a:pPr>
+            <a:r>
+              <a:rPr sz="1200" b="0">
+                <a:solidFill>
+                  <a:srgbClr val="282828"/>
+                </a:solidFill>
+                <a:latin typeface="Arial"/>
+              </a:rPr>
+              <a:t>•  13 Zernike sensor</a:t>
+            </a:r>
+          </a:p>
+          <a:p>
+            <a:pPr>
+              <a:spcAft>
+                <a:spcPts val="600"/>
+              </a:spcAft>
+            </a:pPr>
+            <a:r>
+              <a:rPr sz="1200" b="0">
+                <a:solidFill>
+                  <a:srgbClr val="282828"/>
+                </a:solidFill>
+                <a:latin typeface="Arial"/>
+              </a:rPr>
+              <a:t>•  15 Vector Zernike sensor</a:t>
+            </a:r>
+          </a:p>
+          <a:p>
+            <a:pPr>
+              <a:spcAft>
+                <a:spcPts val="600"/>
+              </a:spcAft>
+            </a:pPr>
+            <a:r>
+              <a:rPr sz="1200" b="0">
+                <a:solidFill>
+                  <a:srgbClr val="282828"/>
+                </a:solidFill>
+                <a:latin typeface="Arial"/>
+              </a:rPr>
+              <a:t>•  18 Point-diffraction sensor</a:t>
+            </a:r>
+          </a:p>
+          <a:p>
+            <a:pPr>
+              <a:spcAft>
+                <a:spcPts val="600"/>
+              </a:spcAft>
+            </a:pPr>
+            <a:r>
+              <a:rPr sz="1200" b="0">
+                <a:solidFill>
+                  <a:srgbClr val="282828"/>
+                </a:solidFill>
+                <a:latin typeface="Arial"/>
+              </a:rPr>
+              <a:t>•  21 Performance: rows, capture, photons, servo</a:t>
+            </a:r>
+          </a:p>
+        </p:txBody>
+      </p:sp>
+      <p:sp>
+        <p:nvSpPr>
+          <p:cNvPr id="5" name="TextBox 4"/>
+          <p:cNvSpPr txBox="1"/>
+          <p:nvPr/>
+        </p:nvSpPr>
+        <p:spPr>
+          <a:xfrm>
+            <a:off x="6400800" y="1298448"/>
+            <a:ext cx="5394960" cy="274320"/>
+          </a:xfrm>
+          <a:prstGeom prst="rect">
+            <a:avLst/>
+          </a:prstGeom>
+          <a:noFill/>
+        </p:spPr>
+        <p:txBody>
+          <a:bodyPr wrap="square">
+            <a:spAutoFit/>
+          </a:bodyPr>
+          <a:lstStyle/>
+          <a:p>
+            <a:pPr>
+              <a:spcAft>
+                <a:spcPts val="600"/>
+              </a:spcAft>
+            </a:pPr>
+            <a:r>
+              <a:rPr sz="1200" b="0">
+                <a:solidFill>
+                  <a:srgbClr val="282828"/>
+                </a:solidFill>
+                <a:latin typeface="Arial"/>
+              </a:rPr>
+              <a:t>•  27 Lenses versus off-axis parabolas</a:t>
+            </a:r>
+          </a:p>
+          <a:p>
+            <a:pPr>
+              <a:spcAft>
+                <a:spcPts val="600"/>
+              </a:spcAft>
+            </a:pPr>
+            <a:r>
+              <a:rPr sz="1200" b="0">
+                <a:solidFill>
+                  <a:srgbClr val="282828"/>
+                </a:solidFill>
+                <a:latin typeface="Arial"/>
+              </a:rPr>
+              <a:t>•  28 The reflective front end and its performance</a:t>
+            </a:r>
+          </a:p>
+          <a:p>
+            <a:pPr>
+              <a:spcAft>
+                <a:spcPts val="600"/>
+              </a:spcAft>
+            </a:pPr>
+            <a:r>
+              <a:rPr sz="1200" b="0">
+                <a:solidFill>
+                  <a:srgbClr val="282828"/>
+                </a:solidFill>
+                <a:latin typeface="Arial"/>
+              </a:rPr>
+              <a:t>•  30 Comparison and recommendation</a:t>
+            </a:r>
+          </a:p>
+          <a:p>
+            <a:pPr>
+              <a:spcAft>
+                <a:spcPts val="600"/>
+              </a:spcAft>
+            </a:pPr>
+            <a:r>
+              <a:rPr sz="1200" b="0">
+                <a:solidFill>
+                  <a:srgbClr val="282828"/>
+                </a:solidFill>
+                <a:latin typeface="Arial"/>
+              </a:rPr>
+              <a:t>•  33 Complex amplitude</a:t>
+            </a:r>
+          </a:p>
+          <a:p>
+            <a:pPr>
+              <a:spcAft>
+                <a:spcPts val="600"/>
+              </a:spcAft>
+            </a:pPr>
+            <a:r>
+              <a:rPr sz="1200" b="0">
+                <a:solidFill>
+                  <a:srgbClr val="282828"/>
+                </a:solidFill>
+                <a:latin typeface="Arial"/>
+              </a:rPr>
+              <a:t>•  34 Summary and future work</a:t>
+            </a:r>
+          </a:p>
+          <a:p>
+            <a:pPr>
+              <a:spcAft>
+                <a:spcPts val="600"/>
+              </a:spcAft>
+            </a:pPr>
+            <a:r>
+              <a:rPr sz="1200" b="0">
+                <a:solidFill>
+                  <a:srgbClr val="282828"/>
+                </a:solidFill>
+                <a:latin typeface="Arial"/>
+              </a:rPr>
+              <a:t>•  39 Run it yourself</a:t>
+            </a:r>
+          </a:p>
+          <a:p>
+            <a:pPr>
+              <a:spcAft>
+                <a:spcPts val="600"/>
+              </a:spcAft>
+            </a:pPr>
+            <a:r>
+              <a:rPr sz="1200" b="0">
+                <a:solidFill>
+                  <a:srgbClr val="282828"/>
+                </a:solidFill>
+                <a:latin typeface="Arial"/>
+              </a:rPr>
+              <a:t>•  40 Backup</a:t>
+            </a:r>
+          </a:p>
+        </p:txBody>
+      </p:sp>
+    </p:spTree>
+  </p:cSld>
+  <p:clrMapOvr>
+    <a:masterClrMapping/>
+  </p:clrMapOvr>
+</p:sld>
+</file>
+
+<file path=ppt/slides/slide20.xml><?xml version="1.0" encoding="utf-8"?>
 <p:sld xmlns:a="http://schemas.openxmlformats.org/drawingml/2006/main" xmlns:p="http://schemas.openxmlformats.org/presentationml/2006/main" xmlns:r="http://schemas.openxmlformats.org/officeDocument/2006/relationships">
   <p:cSld>
     <p:spTree>
@@ -6316,7 +7361,7 @@
 </p:sld>
 </file>
 
-<file path=ppt/slides/slide2.xml><?xml version="1.0" encoding="utf-8"?>
+<file path=ppt/slides/slide21.xml><?xml version="1.0" encoding="utf-8"?>
 <p:sld xmlns:a="http://schemas.openxmlformats.org/drawingml/2006/main" xmlns:p="http://schemas.openxmlformats.org/presentationml/2006/main" xmlns:r="http://schemas.openxmlformats.org/officeDocument/2006/relationships">
   <p:cSld>
     <p:spTree>
@@ -6360,7 +7405,7 @@
                 </a:solidFill>
                 <a:latin typeface="Arial"/>
               </a:rPr>
-              <a:t>Contents</a:t>
+              <a:t>Performance side by side</a:t>
             </a:r>
           </a:p>
           <a:p>
@@ -6376,7 +7421,7 @@
                 </a:solidFill>
                 <a:latin typeface="Arial"/>
               </a:rPr>
-              <a:t>Three jobs, one bench, four ways of sensing</a:t>
+              <a:t>Every reading on the same 30 nm working surface, the response matrix measured on it: the four best readings are within 1% of each other and within 2 pm on the floor</a:t>
             </a:r>
           </a:p>
         </p:txBody>
@@ -6425,16 +7470,854 @@
           </a:p>
         </p:txBody>
       </p:sp>
+      <p:graphicFrame>
+        <p:nvGraphicFramePr>
+          <p:cNvPr id="4" name="Table 3"/>
+          <p:cNvGraphicFramePr>
+            <a:graphicFrameLocks noGrp="1"/>
+          </p:cNvGraphicFramePr>
+          <p:nvPr/>
+        </p:nvGraphicFramePr>
+        <p:xfrm>
+          <a:off x="411480" y="1298448"/>
+          <a:ext cx="11368733" cy="2520315"/>
+        </p:xfrm>
+        <a:graphic>
+          <a:graphicData uri="http://schemas.openxmlformats.org/drawingml/2006/table">
+            <a:tbl>
+              <a:tblPr firstRow="1" bandRow="1">
+                <a:tableStyleId>{5C22544A-7EE6-4342-B048-85BDC9FD1C3A}</a:tableStyleId>
+              </a:tblPr>
+              <a:tblGrid>
+                <a:gridCol w="2694811"/>
+                <a:gridCol w="3452726"/>
+                <a:gridCol w="2526385"/>
+                <a:gridCol w="2694811"/>
+              </a:tblGrid>
+              <a:tr h="280035">
+                <a:tc>
+                  <a:txBody>
+                    <a:bodyPr wrap="square"/>
+                    <a:lstStyle/>
+                    <a:p>
+                      <a:r>
+                        <a:rPr sz="1100" b="1">
+                          <a:solidFill>
+                            <a:srgbClr val="FFFFFF"/>
+                          </a:solidFill>
+                          <a:latin typeface="Arial"/>
+                        </a:rPr>
+                        <a:t>reading (frames per measurement)</a:t>
+                      </a:r>
+                    </a:p>
+                  </a:txBody>
+                  <a:tcPr marL="54864" marR="54864" marT="18288" marB="18288">
+                    <a:solidFill>
+                      <a:srgbClr val="1F4E79"/>
+                    </a:solidFill>
+                  </a:tcPr>
+                </a:tc>
+                <a:tc>
+                  <a:txBody>
+                    <a:bodyPr wrap="square"/>
+                    <a:lstStyle/>
+                    <a:p>
+                      <a:r>
+                        <a:rPr sz="1100" b="1">
+                          <a:solidFill>
+                            <a:srgbClr val="FFFFFF"/>
+                          </a:solidFill>
+                          <a:latin typeface="Arial"/>
+                        </a:rPr>
+                        <a:t>10 nm on one actuator: gain / floor / SNR</a:t>
+                      </a:r>
+                    </a:p>
+                  </a:txBody>
+                  <a:tcPr marL="54864" marR="54864" marT="18288" marB="18288">
+                    <a:solidFill>
+                      <a:srgbClr val="1F4E79"/>
+                    </a:solidFill>
+                  </a:tcPr>
+                </a:tc>
+                <a:tc>
+                  <a:txBody>
+                    <a:bodyPr wrap="square"/>
+                    <a:lstStyle/>
+                    <a:p>
+                      <a:r>
+                        <a:rPr sz="1100" b="1">
+                          <a:solidFill>
+                            <a:srgbClr val="FFFFFF"/>
+                          </a:solidFill>
+                          <a:latin typeface="Arial"/>
+                        </a:rPr>
+                        <a:t>1 nm on 47 sites: gain / floor</a:t>
+                      </a:r>
+                    </a:p>
+                  </a:txBody>
+                  <a:tcPr marL="54864" marR="54864" marT="18288" marB="18288">
+                    <a:solidFill>
+                      <a:srgbClr val="1F4E79"/>
+                    </a:solidFill>
+                  </a:tcPr>
+                </a:tc>
+                <a:tc>
+                  <a:txBody>
+                    <a:bodyPr wrap="square"/>
+                    <a:lstStyle/>
+                    <a:p>
+                      <a:r>
+                        <a:rPr sz="1100" b="1">
+                          <a:solidFill>
+                            <a:srgbClr val="FFFFFF"/>
+                          </a:solidFill>
+                          <a:latin typeface="Arial"/>
+                        </a:rPr>
+                        <a:t>dense random 10 nm: gain / error</a:t>
+                      </a:r>
+                    </a:p>
+                  </a:txBody>
+                  <a:tcPr marL="54864" marR="54864" marT="18288" marB="18288">
+                    <a:solidFill>
+                      <a:srgbClr val="1F4E79"/>
+                    </a:solidFill>
+                  </a:tcPr>
+                </a:tc>
+              </a:tr>
+              <a:tr h="280035">
+                <a:tc>
+                  <a:txBody>
+                    <a:bodyPr wrap="square"/>
+                    <a:lstStyle/>
+                    <a:p>
+                      <a:r>
+                        <a:rPr sz="1100" b="0">
+                          <a:solidFill>
+                            <a:srgbClr val="282828"/>
+                          </a:solidFill>
+                          <a:latin typeface="Arial"/>
+                        </a:rPr>
+                        <a:t>interferometer, lens rig (4)</a:t>
+                      </a:r>
+                    </a:p>
+                  </a:txBody>
+                  <a:tcPr marL="54864" marR="54864" marT="18288" marB="18288">
+                    <a:solidFill>
+                      <a:srgbClr val="FFFFFF"/>
+                    </a:solidFill>
+                  </a:tcPr>
+                </a:tc>
+                <a:tc>
+                  <a:txBody>
+                    <a:bodyPr wrap="square"/>
+                    <a:lstStyle/>
+                    <a:p>
+                      <a:r>
+                        <a:rPr sz="1100" b="0">
+                          <a:solidFill>
+                            <a:srgbClr val="282828"/>
+                          </a:solidFill>
+                          <a:latin typeface="Arial"/>
+                        </a:rPr>
+                        <a:t>0.991 / 2 pm / 6076</a:t>
+                      </a:r>
+                    </a:p>
+                  </a:txBody>
+                  <a:tcPr marL="54864" marR="54864" marT="18288" marB="18288">
+                    <a:solidFill>
+                      <a:srgbClr val="FFFFFF"/>
+                    </a:solidFill>
+                  </a:tcPr>
+                </a:tc>
+                <a:tc>
+                  <a:txBody>
+                    <a:bodyPr wrap="square"/>
+                    <a:lstStyle/>
+                    <a:p>
+                      <a:r>
+                        <a:rPr sz="1100" b="0">
+                          <a:solidFill>
+                            <a:srgbClr val="282828"/>
+                          </a:solidFill>
+                          <a:latin typeface="Arial"/>
+                        </a:rPr>
+                        <a:t>0.990 / 1 pm (52 sites)</a:t>
+                      </a:r>
+                    </a:p>
+                  </a:txBody>
+                  <a:tcPr marL="54864" marR="54864" marT="18288" marB="18288">
+                    <a:solidFill>
+                      <a:srgbClr val="FFFFFF"/>
+                    </a:solidFill>
+                  </a:tcPr>
+                </a:tc>
+                <a:tc>
+                  <a:txBody>
+                    <a:bodyPr wrap="square"/>
+                    <a:lstStyle/>
+                    <a:p>
+                      <a:r>
+                        <a:rPr sz="1100" b="0">
+                          <a:solidFill>
+                            <a:srgbClr val="282828"/>
+                          </a:solidFill>
+                          <a:latin typeface="Arial"/>
+                        </a:rPr>
+                        <a:t>0.990 / 168 pm</a:t>
+                      </a:r>
+                    </a:p>
+                  </a:txBody>
+                  <a:tcPr marL="54864" marR="54864" marT="18288" marB="18288">
+                    <a:solidFill>
+                      <a:srgbClr val="FFFFFF"/>
+                    </a:solidFill>
+                  </a:tcPr>
+                </a:tc>
+              </a:tr>
+              <a:tr h="280035">
+                <a:tc>
+                  <a:txBody>
+                    <a:bodyPr wrap="square"/>
+                    <a:lstStyle/>
+                    <a:p>
+                      <a:r>
+                        <a:rPr sz="1100" b="0">
+                          <a:solidFill>
+                            <a:srgbClr val="282828"/>
+                          </a:solidFill>
+                          <a:latin typeface="Arial"/>
+                        </a:rPr>
+                        <a:t>interferometer, mirror rig (4)</a:t>
+                      </a:r>
+                    </a:p>
+                  </a:txBody>
+                  <a:tcPr marL="54864" marR="54864" marT="18288" marB="18288">
+                    <a:solidFill>
+                      <a:srgbClr val="ECF1F6"/>
+                    </a:solidFill>
+                  </a:tcPr>
+                </a:tc>
+                <a:tc>
+                  <a:txBody>
+                    <a:bodyPr wrap="square"/>
+                    <a:lstStyle/>
+                    <a:p>
+                      <a:r>
+                        <a:rPr sz="1100" b="0">
+                          <a:solidFill>
+                            <a:srgbClr val="282828"/>
+                          </a:solidFill>
+                          <a:latin typeface="Arial"/>
+                        </a:rPr>
+                        <a:t>0.996 / 2 pm / 5301</a:t>
+                      </a:r>
+                    </a:p>
+                  </a:txBody>
+                  <a:tcPr marL="54864" marR="54864" marT="18288" marB="18288">
+                    <a:solidFill>
+                      <a:srgbClr val="ECF1F6"/>
+                    </a:solidFill>
+                  </a:tcPr>
+                </a:tc>
+                <a:tc>
+                  <a:txBody>
+                    <a:bodyPr wrap="square"/>
+                    <a:lstStyle/>
+                    <a:p>
+                      <a:r>
+                        <a:rPr sz="1100" b="0">
+                          <a:solidFill>
+                            <a:srgbClr val="282828"/>
+                          </a:solidFill>
+                          <a:latin typeface="Arial"/>
+                        </a:rPr>
+                        <a:t>0.958 / 1 pm (52 sites)</a:t>
+                      </a:r>
+                    </a:p>
+                  </a:txBody>
+                  <a:tcPr marL="54864" marR="54864" marT="18288" marB="18288">
+                    <a:solidFill>
+                      <a:srgbClr val="ECF1F6"/>
+                    </a:solidFill>
+                  </a:tcPr>
+                </a:tc>
+                <a:tc>
+                  <a:txBody>
+                    <a:bodyPr wrap="square"/>
+                    <a:lstStyle/>
+                    <a:p>
+                      <a:r>
+                        <a:rPr sz="1100" b="0">
+                          <a:solidFill>
+                            <a:srgbClr val="282828"/>
+                          </a:solidFill>
+                          <a:latin typeface="Arial"/>
+                        </a:rPr>
+                        <a:t>0.950 / 2.1 nm</a:t>
+                      </a:r>
+                    </a:p>
+                  </a:txBody>
+                  <a:tcPr marL="54864" marR="54864" marT="18288" marB="18288">
+                    <a:solidFill>
+                      <a:srgbClr val="ECF1F6"/>
+                    </a:solidFill>
+                  </a:tcPr>
+                </a:tc>
+              </a:tr>
+              <a:tr h="280035">
+                <a:tc>
+                  <a:txBody>
+                    <a:bodyPr wrap="square"/>
+                    <a:lstStyle/>
+                    <a:p>
+                      <a:r>
+                        <a:rPr sz="1100" b="0">
+                          <a:solidFill>
+                            <a:srgbClr val="282828"/>
+                          </a:solidFill>
+                          <a:latin typeface="Arial"/>
+                        </a:rPr>
+                        <a:t>Zernike, linear one frame (1)</a:t>
+                      </a:r>
+                    </a:p>
+                  </a:txBody>
+                  <a:tcPr marL="54864" marR="54864" marT="18288" marB="18288">
+                    <a:solidFill>
+                      <a:srgbClr val="FFFFFF"/>
+                    </a:solidFill>
+                  </a:tcPr>
+                </a:tc>
+                <a:tc>
+                  <a:txBody>
+                    <a:bodyPr wrap="square"/>
+                    <a:lstStyle/>
+                    <a:p>
+                      <a:r>
+                        <a:rPr sz="1100" b="0">
+                          <a:solidFill>
+                            <a:srgbClr val="282828"/>
+                          </a:solidFill>
+                          <a:latin typeface="Arial"/>
+                        </a:rPr>
+                        <a:t>1.04 / 21 pm / 492</a:t>
+                      </a:r>
+                    </a:p>
+                  </a:txBody>
+                  <a:tcPr marL="54864" marR="54864" marT="18288" marB="18288">
+                    <a:solidFill>
+                      <a:srgbClr val="FFFFFF"/>
+                    </a:solidFill>
+                  </a:tcPr>
+                </a:tc>
+                <a:tc>
+                  <a:txBody>
+                    <a:bodyPr wrap="square"/>
+                    <a:lstStyle/>
+                    <a:p>
+                      <a:r>
+                        <a:rPr sz="1100" b="0">
+                          <a:solidFill>
+                            <a:srgbClr val="282828"/>
+                          </a:solidFill>
+                          <a:latin typeface="Arial"/>
+                        </a:rPr>
+                        <a:t>1.05 / 22 pm</a:t>
+                      </a:r>
+                    </a:p>
+                  </a:txBody>
+                  <a:tcPr marL="54864" marR="54864" marT="18288" marB="18288">
+                    <a:solidFill>
+                      <a:srgbClr val="FFFFFF"/>
+                    </a:solidFill>
+                  </a:tcPr>
+                </a:tc>
+                <a:tc>
+                  <a:txBody>
+                    <a:bodyPr wrap="square"/>
+                    <a:lstStyle/>
+                    <a:p>
+                      <a:r>
+                        <a:rPr sz="1100" b="0">
+                          <a:solidFill>
+                            <a:srgbClr val="282828"/>
+                          </a:solidFill>
+                          <a:latin typeface="Arial"/>
+                        </a:rPr>
+                        <a:t>1.04 / 4.7 nm</a:t>
+                      </a:r>
+                    </a:p>
+                  </a:txBody>
+                  <a:tcPr marL="54864" marR="54864" marT="18288" marB="18288">
+                    <a:solidFill>
+                      <a:srgbClr val="FFFFFF"/>
+                    </a:solidFill>
+                  </a:tcPr>
+                </a:tc>
+              </a:tr>
+              <a:tr h="280035">
+                <a:tc>
+                  <a:txBody>
+                    <a:bodyPr wrap="square"/>
+                    <a:lstStyle/>
+                    <a:p>
+                      <a:r>
+                        <a:rPr sz="1100" b="0">
+                          <a:solidFill>
+                            <a:srgbClr val="282828"/>
+                          </a:solidFill>
+                          <a:latin typeface="Arial"/>
+                        </a:rPr>
+                        <a:t>Zernike, exact one frame (1)</a:t>
+                      </a:r>
+                    </a:p>
+                  </a:txBody>
+                  <a:tcPr marL="54864" marR="54864" marT="18288" marB="18288">
+                    <a:solidFill>
+                      <a:srgbClr val="ECF1F6"/>
+                    </a:solidFill>
+                  </a:tcPr>
+                </a:tc>
+                <a:tc>
+                  <a:txBody>
+                    <a:bodyPr wrap="square"/>
+                    <a:lstStyle/>
+                    <a:p>
+                      <a:r>
+                        <a:rPr sz="1100" b="0">
+                          <a:solidFill>
+                            <a:srgbClr val="282828"/>
+                          </a:solidFill>
+                          <a:latin typeface="Arial"/>
+                        </a:rPr>
+                        <a:t>0.78 / 74 pm</a:t>
+                      </a:r>
+                    </a:p>
+                  </a:txBody>
+                  <a:tcPr marL="54864" marR="54864" marT="18288" marB="18288">
+                    <a:solidFill>
+                      <a:srgbClr val="ECF1F6"/>
+                    </a:solidFill>
+                  </a:tcPr>
+                </a:tc>
+                <a:tc>
+                  <a:txBody>
+                    <a:bodyPr wrap="square"/>
+                    <a:lstStyle/>
+                    <a:p>
+                      <a:r>
+                        <a:rPr sz="1100" b="0">
+                          <a:solidFill>
+                            <a:srgbClr val="282828"/>
+                          </a:solidFill>
+                          <a:latin typeface="Arial"/>
+                        </a:rPr>
+                        <a:t>0.90 / 35 pm</a:t>
+                      </a:r>
+                    </a:p>
+                  </a:txBody>
+                  <a:tcPr marL="54864" marR="54864" marT="18288" marB="18288">
+                    <a:solidFill>
+                      <a:srgbClr val="ECF1F6"/>
+                    </a:solidFill>
+                  </a:tcPr>
+                </a:tc>
+                <a:tc>
+                  <a:txBody>
+                    <a:bodyPr wrap="square"/>
+                    <a:lstStyle/>
+                    <a:p>
+                      <a:r>
+                        <a:rPr sz="1100" b="0">
+                          <a:solidFill>
+                            <a:srgbClr val="282828"/>
+                          </a:solidFill>
+                          <a:latin typeface="Arial"/>
+                        </a:rPr>
+                        <a:t>0.86 / 5.2 nm</a:t>
+                      </a:r>
+                    </a:p>
+                  </a:txBody>
+                  <a:tcPr marL="54864" marR="54864" marT="18288" marB="18288">
+                    <a:solidFill>
+                      <a:srgbClr val="ECF1F6"/>
+                    </a:solidFill>
+                  </a:tcPr>
+                </a:tc>
+              </a:tr>
+              <a:tr h="280035">
+                <a:tc>
+                  <a:txBody>
+                    <a:bodyPr wrap="square"/>
+                    <a:lstStyle/>
+                    <a:p>
+                      <a:r>
+                        <a:rPr sz="1100" b="0">
+                          <a:solidFill>
+                            <a:srgbClr val="282828"/>
+                          </a:solidFill>
+                          <a:latin typeface="Arial"/>
+                        </a:rPr>
+                        <a:t>Zernike, stepped (4)</a:t>
+                      </a:r>
+                    </a:p>
+                  </a:txBody>
+                  <a:tcPr marL="54864" marR="54864" marT="18288" marB="18288">
+                    <a:solidFill>
+                      <a:srgbClr val="FFFFFF"/>
+                    </a:solidFill>
+                  </a:tcPr>
+                </a:tc>
+                <a:tc>
+                  <a:txBody>
+                    <a:bodyPr wrap="square"/>
+                    <a:lstStyle/>
+                    <a:p>
+                      <a:r>
+                        <a:rPr sz="1100" b="0">
+                          <a:solidFill>
+                            <a:srgbClr val="282828"/>
+                          </a:solidFill>
+                          <a:latin typeface="Arial"/>
+                        </a:rPr>
+                        <a:t>0.989 / 5 pm / 2160</a:t>
+                      </a:r>
+                    </a:p>
+                  </a:txBody>
+                  <a:tcPr marL="54864" marR="54864" marT="18288" marB="18288">
+                    <a:solidFill>
+                      <a:srgbClr val="FFFFFF"/>
+                    </a:solidFill>
+                  </a:tcPr>
+                </a:tc>
+                <a:tc>
+                  <a:txBody>
+                    <a:bodyPr wrap="square"/>
+                    <a:lstStyle/>
+                    <a:p>
+                      <a:r>
+                        <a:rPr sz="1100" b="0">
+                          <a:solidFill>
+                            <a:srgbClr val="282828"/>
+                          </a:solidFill>
+                          <a:latin typeface="Arial"/>
+                        </a:rPr>
+                        <a:t>0.999 / 4 pm</a:t>
+                      </a:r>
+                    </a:p>
+                  </a:txBody>
+                  <a:tcPr marL="54864" marR="54864" marT="18288" marB="18288">
+                    <a:solidFill>
+                      <a:srgbClr val="FFFFFF"/>
+                    </a:solidFill>
+                  </a:tcPr>
+                </a:tc>
+                <a:tc>
+                  <a:txBody>
+                    <a:bodyPr wrap="square"/>
+                    <a:lstStyle/>
+                    <a:p>
+                      <a:r>
+                        <a:rPr sz="1100" b="0">
+                          <a:solidFill>
+                            <a:srgbClr val="282828"/>
+                          </a:solidFill>
+                          <a:latin typeface="Arial"/>
+                        </a:rPr>
+                        <a:t>0.984 / 0.68 nm</a:t>
+                      </a:r>
+                    </a:p>
+                  </a:txBody>
+                  <a:tcPr marL="54864" marR="54864" marT="18288" marB="18288">
+                    <a:solidFill>
+                      <a:srgbClr val="FFFFFF"/>
+                    </a:solidFill>
+                  </a:tcPr>
+                </a:tc>
+              </a:tr>
+              <a:tr h="280035">
+                <a:tc>
+                  <a:txBody>
+                    <a:bodyPr wrap="square"/>
+                    <a:lstStyle/>
+                    <a:p>
+                      <a:r>
+                        <a:rPr sz="1100" b="0">
+                          <a:solidFill>
+                            <a:srgbClr val="282828"/>
+                          </a:solidFill>
+                          <a:latin typeface="Arial"/>
+                        </a:rPr>
+                        <a:t>vector Zernike (2)</a:t>
+                      </a:r>
+                    </a:p>
+                  </a:txBody>
+                  <a:tcPr marL="54864" marR="54864" marT="18288" marB="18288">
+                    <a:solidFill>
+                      <a:srgbClr val="ECF1F6"/>
+                    </a:solidFill>
+                  </a:tcPr>
+                </a:tc>
+                <a:tc>
+                  <a:txBody>
+                    <a:bodyPr wrap="square"/>
+                    <a:lstStyle/>
+                    <a:p>
+                      <a:r>
+                        <a:rPr sz="1100" b="0">
+                          <a:solidFill>
+                            <a:srgbClr val="282828"/>
+                          </a:solidFill>
+                          <a:latin typeface="Arial"/>
+                        </a:rPr>
+                        <a:t>0.9935 / 4 pm / 2830</a:t>
+                      </a:r>
+                    </a:p>
+                  </a:txBody>
+                  <a:tcPr marL="54864" marR="54864" marT="18288" marB="18288">
+                    <a:solidFill>
+                      <a:srgbClr val="ECF1F6"/>
+                    </a:solidFill>
+                  </a:tcPr>
+                </a:tc>
+                <a:tc>
+                  <a:txBody>
+                    <a:bodyPr wrap="square"/>
+                    <a:lstStyle/>
+                    <a:p>
+                      <a:r>
+                        <a:rPr sz="1100" b="0">
+                          <a:solidFill>
+                            <a:srgbClr val="282828"/>
+                          </a:solidFill>
+                          <a:latin typeface="Arial"/>
+                        </a:rPr>
+                        <a:t>0.9992 / 3 pm</a:t>
+                      </a:r>
+                    </a:p>
+                  </a:txBody>
+                  <a:tcPr marL="54864" marR="54864" marT="18288" marB="18288">
+                    <a:solidFill>
+                      <a:srgbClr val="ECF1F6"/>
+                    </a:solidFill>
+                  </a:tcPr>
+                </a:tc>
+                <a:tc>
+                  <a:txBody>
+                    <a:bodyPr wrap="square"/>
+                    <a:lstStyle/>
+                    <a:p>
+                      <a:r>
+                        <a:rPr sz="1100" b="0">
+                          <a:solidFill>
+                            <a:srgbClr val="282828"/>
+                          </a:solidFill>
+                          <a:latin typeface="Arial"/>
+                        </a:rPr>
+                        <a:t>0.9999 / 0.33 nm</a:t>
+                      </a:r>
+                    </a:p>
+                  </a:txBody>
+                  <a:tcPr marL="54864" marR="54864" marT="18288" marB="18288">
+                    <a:solidFill>
+                      <a:srgbClr val="ECF1F6"/>
+                    </a:solidFill>
+                  </a:tcPr>
+                </a:tc>
+              </a:tr>
+              <a:tr h="280035">
+                <a:tc>
+                  <a:txBody>
+                    <a:bodyPr wrap="square"/>
+                    <a:lstStyle/>
+                    <a:p>
+                      <a:r>
+                        <a:rPr sz="1100" b="0">
+                          <a:solidFill>
+                            <a:srgbClr val="282828"/>
+                          </a:solidFill>
+                          <a:latin typeface="Arial"/>
+                        </a:rPr>
+                        <a:t>stepped pinhole (6)</a:t>
+                      </a:r>
+                    </a:p>
+                  </a:txBody>
+                  <a:tcPr marL="54864" marR="54864" marT="18288" marB="18288">
+                    <a:solidFill>
+                      <a:srgbClr val="FFFFFF"/>
+                    </a:solidFill>
+                  </a:tcPr>
+                </a:tc>
+                <a:tc>
+                  <a:txBody>
+                    <a:bodyPr wrap="square"/>
+                    <a:lstStyle/>
+                    <a:p>
+                      <a:r>
+                        <a:rPr sz="1100" b="0">
+                          <a:solidFill>
+                            <a:srgbClr val="282828"/>
+                          </a:solidFill>
+                          <a:latin typeface="Arial"/>
+                        </a:rPr>
+                        <a:t>0.9935 / 4 pm / 2790</a:t>
+                      </a:r>
+                    </a:p>
+                  </a:txBody>
+                  <a:tcPr marL="54864" marR="54864" marT="18288" marB="18288">
+                    <a:solidFill>
+                      <a:srgbClr val="FFFFFF"/>
+                    </a:solidFill>
+                  </a:tcPr>
+                </a:tc>
+                <a:tc>
+                  <a:txBody>
+                    <a:bodyPr wrap="square"/>
+                    <a:lstStyle/>
+                    <a:p>
+                      <a:r>
+                        <a:rPr sz="1100" b="0">
+                          <a:solidFill>
+                            <a:srgbClr val="282828"/>
+                          </a:solidFill>
+                          <a:latin typeface="Arial"/>
+                        </a:rPr>
+                        <a:t>0.9992 / 3 pm</a:t>
+                      </a:r>
+                    </a:p>
+                  </a:txBody>
+                  <a:tcPr marL="54864" marR="54864" marT="18288" marB="18288">
+                    <a:solidFill>
+                      <a:srgbClr val="FFFFFF"/>
+                    </a:solidFill>
+                  </a:tcPr>
+                </a:tc>
+                <a:tc>
+                  <a:txBody>
+                    <a:bodyPr wrap="square"/>
+                    <a:lstStyle/>
+                    <a:p>
+                      <a:r>
+                        <a:rPr sz="1100" b="0">
+                          <a:solidFill>
+                            <a:srgbClr val="282828"/>
+                          </a:solidFill>
+                          <a:latin typeface="Arial"/>
+                        </a:rPr>
+                        <a:t>0.9985 / 338 pm</a:t>
+                      </a:r>
+                    </a:p>
+                  </a:txBody>
+                  <a:tcPr marL="54864" marR="54864" marT="18288" marB="18288">
+                    <a:solidFill>
+                      <a:srgbClr val="FFFFFF"/>
+                    </a:solidFill>
+                  </a:tcPr>
+                </a:tc>
+              </a:tr>
+              <a:tr h="280035">
+                <a:tc>
+                  <a:txBody>
+                    <a:bodyPr wrap="square"/>
+                    <a:lstStyle/>
+                    <a:p>
+                      <a:r>
+                        <a:rPr sz="1100" b="0">
+                          <a:solidFill>
+                            <a:srgbClr val="282828"/>
+                          </a:solidFill>
+                          <a:latin typeface="Arial"/>
+                        </a:rPr>
+                        <a:t>P/SRI, reference arm traced (4)</a:t>
+                      </a:r>
+                    </a:p>
+                  </a:txBody>
+                  <a:tcPr marL="54864" marR="54864" marT="18288" marB="18288">
+                    <a:solidFill>
+                      <a:srgbClr val="ECF1F6"/>
+                    </a:solidFill>
+                  </a:tcPr>
+                </a:tc>
+                <a:tc>
+                  <a:txBody>
+                    <a:bodyPr wrap="square"/>
+                    <a:lstStyle/>
+                    <a:p>
+                      <a:r>
+                        <a:rPr sz="1100" b="0">
+                          <a:solidFill>
+                            <a:srgbClr val="282828"/>
+                          </a:solidFill>
+                          <a:latin typeface="Arial"/>
+                        </a:rPr>
+                        <a:t>0.9935 / 2 pm / 4895</a:t>
+                      </a:r>
+                    </a:p>
+                  </a:txBody>
+                  <a:tcPr marL="54864" marR="54864" marT="18288" marB="18288">
+                    <a:solidFill>
+                      <a:srgbClr val="ECF1F6"/>
+                    </a:solidFill>
+                  </a:tcPr>
+                </a:tc>
+                <a:tc>
+                  <a:txBody>
+                    <a:bodyPr wrap="square"/>
+                    <a:lstStyle/>
+                    <a:p>
+                      <a:r>
+                        <a:rPr sz="1100" b="0">
+                          <a:solidFill>
+                            <a:srgbClr val="282828"/>
+                          </a:solidFill>
+                          <a:latin typeface="Arial"/>
+                        </a:rPr>
+                        <a:t>0.9924 / 1 pm</a:t>
+                      </a:r>
+                    </a:p>
+                  </a:txBody>
+                  <a:tcPr marL="54864" marR="54864" marT="18288" marB="18288">
+                    <a:solidFill>
+                      <a:srgbClr val="ECF1F6"/>
+                    </a:solidFill>
+                  </a:tcPr>
+                </a:tc>
+                <a:tc>
+                  <a:txBody>
+                    <a:bodyPr wrap="square"/>
+                    <a:lstStyle/>
+                    <a:p>
+                      <a:r>
+                        <a:rPr sz="1100" b="0">
+                          <a:solidFill>
+                            <a:srgbClr val="282828"/>
+                          </a:solidFill>
+                          <a:latin typeface="Arial"/>
+                        </a:rPr>
+                        <a:t>0.9926 / 144 pm</a:t>
+                      </a:r>
+                    </a:p>
+                  </a:txBody>
+                  <a:tcPr marL="54864" marR="54864" marT="18288" marB="18288">
+                    <a:solidFill>
+                      <a:srgbClr val="ECF1F6"/>
+                    </a:solidFill>
+                  </a:tcPr>
+                </a:tc>
+              </a:tr>
+            </a:tbl>
+          </a:graphicData>
+        </a:graphic>
+      </p:graphicFrame>
       <p:sp>
         <p:nvSpPr>
-          <p:cNvPr id="4" name="TextBox 3"/>
+          <p:cNvPr id="5" name="TextBox 4"/>
           <p:cNvSpPr txBox="1"/>
           <p:nvPr/>
         </p:nvSpPr>
         <p:spPr>
           <a:xfrm>
-            <a:off x="411480" y="1298448"/>
-            <a:ext cx="5806440" cy="274320"/>
+            <a:off x="411480" y="3965066"/>
+            <a:ext cx="11368735" cy="274320"/>
           </a:xfrm>
           <a:prstGeom prst="rect">
             <a:avLst/>
@@ -6453,13 +8336,13 @@
               </a:spcAft>
             </a:pPr>
             <a:r>
-              <a:rPr sz="1200" b="0">
+              <a:rPr sz="1500" b="0">
                 <a:solidFill>
                   <a:srgbClr val="282828"/>
                 </a:solidFill>
                 <a:latin typeface="Arial"/>
               </a:rPr>
-              <a:t>•  3 Introduction: the three jobs and how they are scored</a:t>
+              <a:t>•  The one-frame Zernike readings lose: the linear one is biased 4-5% and floors at 21 pm; the exact one-frame reading misreads the sign past the quarter-wave fold (7.8% of pixels on this surface) and diverges in a servo.</a:t>
             </a:r>
           </a:p>
           <a:p>
@@ -6469,123 +8352,27 @@
               </a:spcAft>
             </a:pPr>
             <a:r>
-              <a:rPr sz="1200" b="0">
+              <a:rPr sz="1500" b="0">
                 <a:solidFill>
                   <a:srgbClr val="282828"/>
                 </a:solidFill>
                 <a:latin typeface="Arial"/>
               </a:rPr>
-              <a:t>•  4 The bench layout</a:t>
-            </a:r>
-          </a:p>
-          <a:p>
-            <a:pPr>
-              <a:spcAft>
-                <a:spcPts val="600"/>
-              </a:spcAft>
-            </a:pPr>
-            <a:r>
-              <a:rPr sz="1200" b="0">
-                <a:solidFill>
-                  <a:srgbClr val="282828"/>
-                </a:solidFill>
-                <a:latin typeface="Arial"/>
-              </a:rPr>
-              <a:t>•  6 Parts</a:t>
-            </a:r>
-          </a:p>
-          <a:p>
-            <a:pPr>
-              <a:spcAft>
-                <a:spcPts val="600"/>
-              </a:spcAft>
-            </a:pPr>
-            <a:r>
-              <a:rPr sz="1200" b="0">
-                <a:solidFill>
-                  <a:srgbClr val="282828"/>
-                </a:solidFill>
-                <a:latin typeface="Arial"/>
-              </a:rPr>
-              <a:t>•  9 Twyman-Green interferometer</a:t>
-            </a:r>
-          </a:p>
-          <a:p>
-            <a:pPr>
-              <a:spcAft>
-                <a:spcPts val="600"/>
-              </a:spcAft>
-            </a:pPr>
-            <a:r>
-              <a:rPr sz="1200" b="0">
-                <a:solidFill>
-                  <a:srgbClr val="282828"/>
-                </a:solidFill>
-                <a:latin typeface="Arial"/>
-              </a:rPr>
-              <a:t>•  12 Zernike sensor</a:t>
-            </a:r>
-          </a:p>
-          <a:p>
-            <a:pPr>
-              <a:spcAft>
-                <a:spcPts val="600"/>
-              </a:spcAft>
-            </a:pPr>
-            <a:r>
-              <a:rPr sz="1200" b="0">
-                <a:solidFill>
-                  <a:srgbClr val="282828"/>
-                </a:solidFill>
-                <a:latin typeface="Arial"/>
-              </a:rPr>
-              <a:t>•  14 Vector Zernike sensor</a:t>
-            </a:r>
-          </a:p>
-          <a:p>
-            <a:pPr>
-              <a:spcAft>
-                <a:spcPts val="600"/>
-              </a:spcAft>
-            </a:pPr>
-            <a:r>
-              <a:rPr sz="1200" b="0">
-                <a:solidFill>
-                  <a:srgbClr val="282828"/>
-                </a:solidFill>
-                <a:latin typeface="Arial"/>
-              </a:rPr>
-              <a:t>•  17 Point-diffraction sensor</a:t>
-            </a:r>
-          </a:p>
-          <a:p>
-            <a:pPr>
-              <a:spcAft>
-                <a:spcPts val="600"/>
-              </a:spcAft>
-            </a:pPr>
-            <a:r>
-              <a:rPr sz="1200" b="0">
-                <a:solidFill>
-                  <a:srgbClr val="282828"/>
-                </a:solidFill>
-                <a:latin typeface="Arial"/>
-              </a:rPr>
-              <a:t>•  20 Performance: rows, capture, photons, servo</a:t>
+              <a:t>•  The interferometer's 52-site rows count the sites its pupil lights; the others use 47.  The interferometer's dense-pattern error, 168 pm against 0.33-0.68 nm, is its reference arm: it does not make its reference from the beam.</a:t>
             </a:r>
           </a:p>
         </p:txBody>
       </p:sp>
       <p:sp>
         <p:nvSpPr>
-          <p:cNvPr id="5" name="TextBox 4"/>
+          <p:cNvPr id="6" name="TextBox 5"/>
           <p:cNvSpPr txBox="1"/>
           <p:nvPr/>
         </p:nvSpPr>
         <p:spPr>
           <a:xfrm>
-            <a:off x="6400800" y="1298448"/>
-            <a:ext cx="5394960" cy="274320"/>
+            <a:off x="411480" y="5272659"/>
+            <a:ext cx="11368735" cy="274320"/>
           </a:xfrm>
           <a:prstGeom prst="rect">
             <a:avLst/>
@@ -6604,109 +8391,13 @@
               </a:spcAft>
             </a:pPr>
             <a:r>
-              <a:rPr sz="1200" b="0">
+              <a:rPr sz="1050" b="0">
                 <a:solidFill>
-                  <a:srgbClr val="282828"/>
+                  <a:srgbClr val="6E6E6E"/>
                 </a:solidFill>
                 <a:latin typeface="Arial"/>
               </a:rPr>
-              <a:t>•  26 Lenses versus off-axis parabolas</a:t>
-            </a:r>
-          </a:p>
-          <a:p>
-            <a:pPr>
-              <a:spcAft>
-                <a:spcPts val="600"/>
-              </a:spcAft>
-            </a:pPr>
-            <a:r>
-              <a:rPr sz="1200" b="0">
-                <a:solidFill>
-                  <a:srgbClr val="282828"/>
-                </a:solidFill>
-                <a:latin typeface="Arial"/>
-              </a:rPr>
-              <a:t>•  27 The reflective front end and its performance</a:t>
-            </a:r>
-          </a:p>
-          <a:p>
-            <a:pPr>
-              <a:spcAft>
-                <a:spcPts val="600"/>
-              </a:spcAft>
-            </a:pPr>
-            <a:r>
-              <a:rPr sz="1200" b="0">
-                <a:solidFill>
-                  <a:srgbClr val="282828"/>
-                </a:solidFill>
-                <a:latin typeface="Arial"/>
-              </a:rPr>
-              <a:t>•  29 Comparison and recommendation</a:t>
-            </a:r>
-          </a:p>
-          <a:p>
-            <a:pPr>
-              <a:spcAft>
-                <a:spcPts val="600"/>
-              </a:spcAft>
-            </a:pPr>
-            <a:r>
-              <a:rPr sz="1200" b="0">
-                <a:solidFill>
-                  <a:srgbClr val="282828"/>
-                </a:solidFill>
-                <a:latin typeface="Arial"/>
-              </a:rPr>
-              <a:t>•  32 Complex amplitude</a:t>
-            </a:r>
-          </a:p>
-          <a:p>
-            <a:pPr>
-              <a:spcAft>
-                <a:spcPts val="600"/>
-              </a:spcAft>
-            </a:pPr>
-            <a:r>
-              <a:rPr sz="1200" b="0">
-                <a:solidFill>
-                  <a:srgbClr val="282828"/>
-                </a:solidFill>
-                <a:latin typeface="Arial"/>
-              </a:rPr>
-              <a:t>•  33 Summary and future work</a:t>
-            </a:r>
-          </a:p>
-          <a:p>
-            <a:pPr>
-              <a:spcAft>
-                <a:spcPts val="600"/>
-              </a:spcAft>
-            </a:pPr>
-            <a:r>
-              <a:rPr sz="1200" b="0">
-                <a:solidFill>
-                  <a:srgbClr val="282828"/>
-                </a:solidFill>
-                <a:latin typeface="Arial"/>
-              </a:rPr>
-              <a:t>•  38 Run it yourself</a:t>
-            </a:r>
-          </a:p>
-          <a:p>
-            <a:pPr>
-              <a:spcAft>
-                <a:spcPts val="600"/>
-              </a:spcAft>
-            </a:pPr>
-            <a:r>
-              <a:rPr sz="1200" b="0">
-                <a:solidFill>
-                  <a:srgbClr val="282828"/>
-                </a:solidFill>
-                <a:latin typeface="Arial"/>
-              </a:rPr>
-              <a:t>•  39 Backup</a:t>
+              <a:t>Run tags: lens_deck, oap_deck, matbase, matbase385, v193base, pdi193fbase, pfdeck.  The interferometer rows are at 385 pixels per pupil, the rest at 193; the 385 checks read the same.  The sensor rows re-run on the 22.5° bench of record (gate22_193) hold to the digit: stepped 0.989 / 5 pm, vector 0.994 / 3, pinhole 0.994 / 3 on one actuator; 0.998 / 4, 0.998 / 3, 0.998 / 3 on 47 sites.</a:t>
             </a:r>
           </a:p>
         </p:txBody>
@@ -6719,7 +8410,7 @@
 </p:sld>
 </file>
 
-<file path=ppt/slides/slide20.xml><?xml version="1.0" encoding="utf-8"?>
+<file path=ppt/slides/slide22.xml><?xml version="1.0" encoding="utf-8"?>
 <p:sld xmlns:a="http://schemas.openxmlformats.org/drawingml/2006/main" xmlns:p="http://schemas.openxmlformats.org/presentationml/2006/main" xmlns:r="http://schemas.openxmlformats.org/officeDocument/2006/relationships">
   <p:cSld>
     <p:spTree>
@@ -6763,7 +8454,7 @@
                 </a:solidFill>
                 <a:latin typeface="Arial"/>
               </a:rPr>
-              <a:t>Performance side by side</a:t>
+              <a:t>Capture range: how far from null each reading works</a:t>
             </a:r>
           </a:p>
           <a:p>
@@ -6779,7 +8470,7 @@
                 </a:solidFill>
                 <a:latin typeface="Arial"/>
               </a:rPr>
-              <a:t>Every reading on the same 30 nm working surface, the response matrix measured on it: the four best readings are within 1% of each other and within 2 pm on the floor</a:t>
+              <a:t>With the calibration left as measured at 30 nm, the self-referenced sensors hold 10% accuracy only to 36-70 nm of surface; the externally referenced ones, and the pinhole with its shutter frame, hold to 480 nm and beyond</a:t>
             </a:r>
           </a:p>
         </p:txBody>
@@ -6838,7 +8529,7 @@
         </p:nvGraphicFramePr>
         <p:xfrm>
           <a:off x="411480" y="1298448"/>
-          <a:ext cx="11368733" cy="2520315"/>
+          <a:ext cx="5806439" cy="2708910"/>
         </p:xfrm>
         <a:graphic>
           <a:graphicData uri="http://schemas.openxmlformats.org/drawingml/2006/table">
@@ -6847,10 +8538,8 @@
                 <a:tableStyleId>{5C22544A-7EE6-4342-B048-85BDC9FD1C3A}</a:tableStyleId>
               </a:tblPr>
               <a:tblGrid>
-                <a:gridCol w="2694811"/>
-                <a:gridCol w="3452726"/>
-                <a:gridCol w="2526385"/>
-                <a:gridCol w="2694811"/>
+                <a:gridCol w="1912709"/>
+                <a:gridCol w="3893730"/>
               </a:tblGrid>
               <a:tr h="280035">
                 <a:tc>
@@ -6865,7 +8554,7 @@
                           </a:solidFill>
                           <a:latin typeface="Arial"/>
                         </a:rPr>
-                        <a:t>reading (frames per measurement)</a:t>
+                        <a:t>reading</a:t>
                       </a:r>
                     </a:p>
                   </a:txBody>
@@ -6887,51 +8576,7 @@
                           </a:solidFill>
                           <a:latin typeface="Arial"/>
                         </a:rPr>
-                        <a:t>10 nm on one actuator: gain / floor / SNR</a:t>
-                      </a:r>
-                    </a:p>
-                  </a:txBody>
-                  <a:tcPr marL="54864" marR="54864" marT="18288" marB="18288">
-                    <a:solidFill>
-                      <a:srgbClr val="1F4E79"/>
-                    </a:solidFill>
-                  </a:tcPr>
-                </a:tc>
-                <a:tc>
-                  <a:txBody>
-                    <a:bodyPr wrap="square"/>
-                    <a:lstStyle/>
-                    <a:p>
-                      <a:r>
-                        <a:rPr sz="1100" b="1">
-                          <a:solidFill>
-                            <a:srgbClr val="FFFFFF"/>
-                          </a:solidFill>
-                          <a:latin typeface="Arial"/>
-                        </a:rPr>
-                        <a:t>1 nm on 47 sites: gain / floor</a:t>
-                      </a:r>
-                    </a:p>
-                  </a:txBody>
-                  <a:tcPr marL="54864" marR="54864" marT="18288" marB="18288">
-                    <a:solidFill>
-                      <a:srgbClr val="1F4E79"/>
-                    </a:solidFill>
-                  </a:tcPr>
-                </a:tc>
-                <a:tc>
-                  <a:txBody>
-                    <a:bodyPr wrap="square"/>
-                    <a:lstStyle/>
-                    <a:p>
-                      <a:r>
-                        <a:rPr sz="1100" b="1">
-                          <a:solidFill>
-                            <a:srgbClr val="FFFFFF"/>
-                          </a:solidFill>
-                          <a:latin typeface="Arial"/>
-                        </a:rPr>
-                        <a:t>dense random 10 nm: gain / error</a:t>
+                        <a:t>range to 10%, calibration aging from 30 nm</a:t>
                       </a:r>
                     </a:p>
                   </a:txBody>
@@ -6955,73 +8600,29 @@
                           </a:solidFill>
                           <a:latin typeface="Arial"/>
                         </a:rPr>
-                        <a:t>interferometer, lens rig (4)</a:t>
-                      </a:r>
-                    </a:p>
-                  </a:txBody>
-                  <a:tcPr marL="54864" marR="54864" marT="18288" marB="18288">
-                    <a:solidFill>
-                      <a:srgbClr val="FFFFFF"/>
-                    </a:solidFill>
-                  </a:tcPr>
-                </a:tc>
-                <a:tc>
-                  <a:txBody>
-                    <a:bodyPr wrap="square"/>
-                    <a:lstStyle/>
-                    <a:p>
-                      <a:r>
-                        <a:rPr sz="1100" b="0">
-                          <a:solidFill>
-                            <a:srgbClr val="282828"/>
-                          </a:solidFill>
-                          <a:latin typeface="Arial"/>
-                        </a:rPr>
-                        <a:t>0.991 / 2 pm / 6076</a:t>
-                      </a:r>
-                    </a:p>
-                  </a:txBody>
-                  <a:tcPr marL="54864" marR="54864" marT="18288" marB="18288">
-                    <a:solidFill>
-                      <a:srgbClr val="FFFFFF"/>
-                    </a:solidFill>
-                  </a:tcPr>
-                </a:tc>
-                <a:tc>
-                  <a:txBody>
-                    <a:bodyPr wrap="square"/>
-                    <a:lstStyle/>
-                    <a:p>
-                      <a:r>
-                        <a:rPr sz="1100" b="0">
-                          <a:solidFill>
-                            <a:srgbClr val="282828"/>
-                          </a:solidFill>
-                          <a:latin typeface="Arial"/>
-                        </a:rPr>
-                        <a:t>0.990 / 1 pm (52 sites)</a:t>
-                      </a:r>
-                    </a:p>
-                  </a:txBody>
-                  <a:tcPr marL="54864" marR="54864" marT="18288" marB="18288">
-                    <a:solidFill>
-                      <a:srgbClr val="FFFFFF"/>
-                    </a:solidFill>
-                  </a:tcPr>
-                </a:tc>
-                <a:tc>
-                  <a:txBody>
-                    <a:bodyPr wrap="square"/>
-                    <a:lstStyle/>
-                    <a:p>
-                      <a:r>
-                        <a:rPr sz="1100" b="0">
-                          <a:solidFill>
-                            <a:srgbClr val="282828"/>
-                          </a:solidFill>
-                          <a:latin typeface="Arial"/>
-                        </a:rPr>
-                        <a:t>0.990 / 168 pm</a:t>
+                        <a:t>Zernike exact one frame</a:t>
+                      </a:r>
+                    </a:p>
+                  </a:txBody>
+                  <a:tcPr marL="54864" marR="54864" marT="18288" marB="18288">
+                    <a:solidFill>
+                      <a:srgbClr val="FFFFFF"/>
+                    </a:solidFill>
+                  </a:tcPr>
+                </a:tc>
+                <a:tc>
+                  <a:txBody>
+                    <a:bodyPr wrap="square"/>
+                    <a:lstStyle/>
+                    <a:p>
+                      <a:r>
+                        <a:rPr sz="1100" b="0">
+                          <a:solidFill>
+                            <a:srgbClr val="282828"/>
+                          </a:solidFill>
+                          <a:latin typeface="Arial"/>
+                        </a:rPr>
+                        <a:t>36 nm</a:t>
                       </a:r>
                     </a:p>
                   </a:txBody>
@@ -7045,7 +8646,7 @@
                           </a:solidFill>
                           <a:latin typeface="Arial"/>
                         </a:rPr>
-                        <a:t>interferometer, mirror rig (4)</a:t>
+                        <a:t>Zernike stepped</a:t>
                       </a:r>
                     </a:p>
                   </a:txBody>
@@ -7067,51 +8668,7 @@
                           </a:solidFill>
                           <a:latin typeface="Arial"/>
                         </a:rPr>
-                        <a:t>0.996 / 2 pm / 5301</a:t>
-                      </a:r>
-                    </a:p>
-                  </a:txBody>
-                  <a:tcPr marL="54864" marR="54864" marT="18288" marB="18288">
-                    <a:solidFill>
-                      <a:srgbClr val="ECF1F6"/>
-                    </a:solidFill>
-                  </a:tcPr>
-                </a:tc>
-                <a:tc>
-                  <a:txBody>
-                    <a:bodyPr wrap="square"/>
-                    <a:lstStyle/>
-                    <a:p>
-                      <a:r>
-                        <a:rPr sz="1100" b="0">
-                          <a:solidFill>
-                            <a:srgbClr val="282828"/>
-                          </a:solidFill>
-                          <a:latin typeface="Arial"/>
-                        </a:rPr>
-                        <a:t>0.958 / 1 pm (52 sites)</a:t>
-                      </a:r>
-                    </a:p>
-                  </a:txBody>
-                  <a:tcPr marL="54864" marR="54864" marT="18288" marB="18288">
-                    <a:solidFill>
-                      <a:srgbClr val="ECF1F6"/>
-                    </a:solidFill>
-                  </a:tcPr>
-                </a:tc>
-                <a:tc>
-                  <a:txBody>
-                    <a:bodyPr wrap="square"/>
-                    <a:lstStyle/>
-                    <a:p>
-                      <a:r>
-                        <a:rPr sz="1100" b="0">
-                          <a:solidFill>
-                            <a:srgbClr val="282828"/>
-                          </a:solidFill>
-                          <a:latin typeface="Arial"/>
-                        </a:rPr>
-                        <a:t>0.950 / 2.1 nm</a:t>
+                        <a:t>42 nm</a:t>
                       </a:r>
                     </a:p>
                   </a:txBody>
@@ -7135,73 +8692,29 @@
                           </a:solidFill>
                           <a:latin typeface="Arial"/>
                         </a:rPr>
-                        <a:t>Zernike, linear one frame (1)</a:t>
-                      </a:r>
-                    </a:p>
-                  </a:txBody>
-                  <a:tcPr marL="54864" marR="54864" marT="18288" marB="18288">
-                    <a:solidFill>
-                      <a:srgbClr val="FFFFFF"/>
-                    </a:solidFill>
-                  </a:tcPr>
-                </a:tc>
-                <a:tc>
-                  <a:txBody>
-                    <a:bodyPr wrap="square"/>
-                    <a:lstStyle/>
-                    <a:p>
-                      <a:r>
-                        <a:rPr sz="1100" b="0">
-                          <a:solidFill>
-                            <a:srgbClr val="282828"/>
-                          </a:solidFill>
-                          <a:latin typeface="Arial"/>
-                        </a:rPr>
-                        <a:t>1.04 / 21 pm / 492</a:t>
-                      </a:r>
-                    </a:p>
-                  </a:txBody>
-                  <a:tcPr marL="54864" marR="54864" marT="18288" marB="18288">
-                    <a:solidFill>
-                      <a:srgbClr val="FFFFFF"/>
-                    </a:solidFill>
-                  </a:tcPr>
-                </a:tc>
-                <a:tc>
-                  <a:txBody>
-                    <a:bodyPr wrap="square"/>
-                    <a:lstStyle/>
-                    <a:p>
-                      <a:r>
-                        <a:rPr sz="1100" b="0">
-                          <a:solidFill>
-                            <a:srgbClr val="282828"/>
-                          </a:solidFill>
-                          <a:latin typeface="Arial"/>
-                        </a:rPr>
-                        <a:t>1.05 / 22 pm</a:t>
-                      </a:r>
-                    </a:p>
-                  </a:txBody>
-                  <a:tcPr marL="54864" marR="54864" marT="18288" marB="18288">
-                    <a:solidFill>
-                      <a:srgbClr val="FFFFFF"/>
-                    </a:solidFill>
-                  </a:tcPr>
-                </a:tc>
-                <a:tc>
-                  <a:txBody>
-                    <a:bodyPr wrap="square"/>
-                    <a:lstStyle/>
-                    <a:p>
-                      <a:r>
-                        <a:rPr sz="1100" b="0">
-                          <a:solidFill>
-                            <a:srgbClr val="282828"/>
-                          </a:solidFill>
-                          <a:latin typeface="Arial"/>
-                        </a:rPr>
-                        <a:t>1.04 / 4.7 nm</a:t>
+                        <a:t>Zernike linear</a:t>
+                      </a:r>
+                    </a:p>
+                  </a:txBody>
+                  <a:tcPr marL="54864" marR="54864" marT="18288" marB="18288">
+                    <a:solidFill>
+                      <a:srgbClr val="FFFFFF"/>
+                    </a:solidFill>
+                  </a:tcPr>
+                </a:tc>
+                <a:tc>
+                  <a:txBody>
+                    <a:bodyPr wrap="square"/>
+                    <a:lstStyle/>
+                    <a:p>
+                      <a:r>
+                        <a:rPr sz="1100" b="0">
+                          <a:solidFill>
+                            <a:srgbClr val="282828"/>
+                          </a:solidFill>
+                          <a:latin typeface="Arial"/>
+                        </a:rPr>
+                        <a:t>44 nm</a:t>
                       </a:r>
                     </a:p>
                   </a:txBody>
@@ -7225,7 +8738,7 @@
                           </a:solidFill>
                           <a:latin typeface="Arial"/>
                         </a:rPr>
-                        <a:t>Zernike, exact one frame (1)</a:t>
+                        <a:t>pinhole, no shutter frame</a:t>
                       </a:r>
                     </a:p>
                   </a:txBody>
@@ -7247,51 +8760,7 @@
                           </a:solidFill>
                           <a:latin typeface="Arial"/>
                         </a:rPr>
-                        <a:t>0.78 / 74 pm</a:t>
-                      </a:r>
-                    </a:p>
-                  </a:txBody>
-                  <a:tcPr marL="54864" marR="54864" marT="18288" marB="18288">
-                    <a:solidFill>
-                      <a:srgbClr val="ECF1F6"/>
-                    </a:solidFill>
-                  </a:tcPr>
-                </a:tc>
-                <a:tc>
-                  <a:txBody>
-                    <a:bodyPr wrap="square"/>
-                    <a:lstStyle/>
-                    <a:p>
-                      <a:r>
-                        <a:rPr sz="1100" b="0">
-                          <a:solidFill>
-                            <a:srgbClr val="282828"/>
-                          </a:solidFill>
-                          <a:latin typeface="Arial"/>
-                        </a:rPr>
-                        <a:t>0.90 / 35 pm</a:t>
-                      </a:r>
-                    </a:p>
-                  </a:txBody>
-                  <a:tcPr marL="54864" marR="54864" marT="18288" marB="18288">
-                    <a:solidFill>
-                      <a:srgbClr val="ECF1F6"/>
-                    </a:solidFill>
-                  </a:tcPr>
-                </a:tc>
-                <a:tc>
-                  <a:txBody>
-                    <a:bodyPr wrap="square"/>
-                    <a:lstStyle/>
-                    <a:p>
-                      <a:r>
-                        <a:rPr sz="1100" b="0">
-                          <a:solidFill>
-                            <a:srgbClr val="282828"/>
-                          </a:solidFill>
-                          <a:latin typeface="Arial"/>
-                        </a:rPr>
-                        <a:t>0.86 / 5.2 nm</a:t>
+                        <a:t>62 nm</a:t>
                       </a:r>
                     </a:p>
                   </a:txBody>
@@ -7315,79 +8784,81 @@
                           </a:solidFill>
                           <a:latin typeface="Arial"/>
                         </a:rPr>
-                        <a:t>Zernike, stepped (4)</a:t>
-                      </a:r>
-                    </a:p>
-                  </a:txBody>
-                  <a:tcPr marL="54864" marR="54864" marT="18288" marB="18288">
-                    <a:solidFill>
-                      <a:srgbClr val="FFFFFF"/>
-                    </a:solidFill>
-                  </a:tcPr>
-                </a:tc>
-                <a:tc>
-                  <a:txBody>
-                    <a:bodyPr wrap="square"/>
-                    <a:lstStyle/>
-                    <a:p>
-                      <a:r>
-                        <a:rPr sz="1100" b="0">
-                          <a:solidFill>
-                            <a:srgbClr val="282828"/>
-                          </a:solidFill>
-                          <a:latin typeface="Arial"/>
-                        </a:rPr>
-                        <a:t>0.989 / 5 pm / 2160</a:t>
-                      </a:r>
-                    </a:p>
-                  </a:txBody>
-                  <a:tcPr marL="54864" marR="54864" marT="18288" marB="18288">
-                    <a:solidFill>
-                      <a:srgbClr val="FFFFFF"/>
-                    </a:solidFill>
-                  </a:tcPr>
-                </a:tc>
-                <a:tc>
-                  <a:txBody>
-                    <a:bodyPr wrap="square"/>
-                    <a:lstStyle/>
-                    <a:p>
-                      <a:r>
-                        <a:rPr sz="1100" b="0">
-                          <a:solidFill>
-                            <a:srgbClr val="282828"/>
-                          </a:solidFill>
-                          <a:latin typeface="Arial"/>
-                        </a:rPr>
-                        <a:t>0.999 / 4 pm</a:t>
-                      </a:r>
-                    </a:p>
-                  </a:txBody>
-                  <a:tcPr marL="54864" marR="54864" marT="18288" marB="18288">
-                    <a:solidFill>
-                      <a:srgbClr val="FFFFFF"/>
-                    </a:solidFill>
-                  </a:tcPr>
-                </a:tc>
-                <a:tc>
-                  <a:txBody>
-                    <a:bodyPr wrap="square"/>
-                    <a:lstStyle/>
-                    <a:p>
-                      <a:r>
-                        <a:rPr sz="1100" b="0">
-                          <a:solidFill>
-                            <a:srgbClr val="282828"/>
-                          </a:solidFill>
-                          <a:latin typeface="Arial"/>
-                        </a:rPr>
-                        <a:t>0.984 / 0.68 nm</a:t>
-                      </a:r>
-                    </a:p>
-                  </a:txBody>
-                  <a:tcPr marL="54864" marR="54864" marT="18288" marB="18288">
-                    <a:solidFill>
-                      <a:srgbClr val="FFFFFF"/>
+                        <a:t>vector Zernike</a:t>
+                      </a:r>
+                    </a:p>
+                  </a:txBody>
+                  <a:tcPr marL="54864" marR="54864" marT="18288" marB="18288">
+                    <a:solidFill>
+                      <a:srgbClr val="FFFFFF"/>
+                    </a:solidFill>
+                  </a:tcPr>
+                </a:tc>
+                <a:tc>
+                  <a:txBody>
+                    <a:bodyPr wrap="square"/>
+                    <a:lstStyle/>
+                    <a:p>
+                      <a:r>
+                        <a:rPr sz="1100" b="0">
+                          <a:solidFill>
+                            <a:srgbClr val="282828"/>
+                          </a:solidFill>
+                          <a:latin typeface="Arial"/>
+                        </a:rPr>
+                        <a:t>70 nm</a:t>
+                      </a:r>
+                    </a:p>
+                  </a:txBody>
+                  <a:tcPr marL="54864" marR="54864" marT="18288" marB="18288">
+                    <a:solidFill>
+                      <a:srgbClr val="FFFFFF"/>
+                    </a:solidFill>
+                  </a:tcPr>
+                </a:tc>
+              </a:tr>
+              <a:tr h="468630">
+                <a:tc>
+                  <a:txBody>
+                    <a:bodyPr wrap="square"/>
+                    <a:lstStyle/>
+                    <a:p>
+                      <a:r>
+                        <a:rPr sz="1100" b="0">
+                          <a:solidFill>
+                            <a:srgbClr val="282828"/>
+                          </a:solidFill>
+                          <a:latin typeface="Arial"/>
+                        </a:rPr>
+                        <a:t>pinhole with a shutter frame</a:t>
+                      </a:r>
+                    </a:p>
+                  </a:txBody>
+                  <a:tcPr marL="54864" marR="54864" marT="18288" marB="18288">
+                    <a:solidFill>
+                      <a:srgbClr val="ECF1F6"/>
+                    </a:solidFill>
+                  </a:tcPr>
+                </a:tc>
+                <a:tc>
+                  <a:txBody>
+                    <a:bodyPr wrap="square"/>
+                    <a:lstStyle/>
+                    <a:p>
+                      <a:r>
+                        <a:rPr sz="1100" b="0">
+                          <a:solidFill>
+                            <a:srgbClr val="282828"/>
+                          </a:solidFill>
+                          <a:latin typeface="Arial"/>
+                        </a:rPr>
+                        <a:t>480 nm and beyond (1.02 / 1.06 / 1.13 at 120 / 240 / 480)</a:t>
+                      </a:r>
+                    </a:p>
+                  </a:txBody>
+                  <a:tcPr marL="54864" marR="54864" marT="18288" marB="18288">
+                    <a:solidFill>
+                      <a:srgbClr val="ECF1F6"/>
                     </a:solidFill>
                   </a:tcPr>
                 </a:tc>
@@ -7405,79 +8876,35 @@
                           </a:solidFill>
                           <a:latin typeface="Arial"/>
                         </a:rPr>
-                        <a:t>vector Zernike (2)</a:t>
-                      </a:r>
-                    </a:p>
-                  </a:txBody>
-                  <a:tcPr marL="54864" marR="54864" marT="18288" marB="18288">
-                    <a:solidFill>
-                      <a:srgbClr val="ECF1F6"/>
-                    </a:solidFill>
-                  </a:tcPr>
-                </a:tc>
-                <a:tc>
-                  <a:txBody>
-                    <a:bodyPr wrap="square"/>
-                    <a:lstStyle/>
-                    <a:p>
-                      <a:r>
-                        <a:rPr sz="1100" b="0">
-                          <a:solidFill>
-                            <a:srgbClr val="282828"/>
-                          </a:solidFill>
-                          <a:latin typeface="Arial"/>
-                        </a:rPr>
-                        <a:t>0.9935 / 4 pm / 2830</a:t>
-                      </a:r>
-                    </a:p>
-                  </a:txBody>
-                  <a:tcPr marL="54864" marR="54864" marT="18288" marB="18288">
-                    <a:solidFill>
-                      <a:srgbClr val="ECF1F6"/>
-                    </a:solidFill>
-                  </a:tcPr>
-                </a:tc>
-                <a:tc>
-                  <a:txBody>
-                    <a:bodyPr wrap="square"/>
-                    <a:lstStyle/>
-                    <a:p>
-                      <a:r>
-                        <a:rPr sz="1100" b="0">
-                          <a:solidFill>
-                            <a:srgbClr val="282828"/>
-                          </a:solidFill>
-                          <a:latin typeface="Arial"/>
-                        </a:rPr>
-                        <a:t>0.9992 / 3 pm</a:t>
-                      </a:r>
-                    </a:p>
-                  </a:txBody>
-                  <a:tcPr marL="54864" marR="54864" marT="18288" marB="18288">
-                    <a:solidFill>
-                      <a:srgbClr val="ECF1F6"/>
-                    </a:solidFill>
-                  </a:tcPr>
-                </a:tc>
-                <a:tc>
-                  <a:txBody>
-                    <a:bodyPr wrap="square"/>
-                    <a:lstStyle/>
-                    <a:p>
-                      <a:r>
-                        <a:rPr sz="1100" b="0">
-                          <a:solidFill>
-                            <a:srgbClr val="282828"/>
-                          </a:solidFill>
-                          <a:latin typeface="Arial"/>
-                        </a:rPr>
-                        <a:t>0.9999 / 0.33 nm</a:t>
-                      </a:r>
-                    </a:p>
-                  </a:txBody>
-                  <a:tcPr marL="54864" marR="54864" marT="18288" marB="18288">
-                    <a:solidFill>
-                      <a:srgbClr val="ECF1F6"/>
+                        <a:t>P/SRI</a:t>
+                      </a:r>
+                    </a:p>
+                  </a:txBody>
+                  <a:tcPr marL="54864" marR="54864" marT="18288" marB="18288">
+                    <a:solidFill>
+                      <a:srgbClr val="FFFFFF"/>
+                    </a:solidFill>
+                  </a:tcPr>
+                </a:tc>
+                <a:tc>
+                  <a:txBody>
+                    <a:bodyPr wrap="square"/>
+                    <a:lstStyle/>
+                    <a:p>
+                      <a:r>
+                        <a:rPr sz="1100" b="0">
+                          <a:solidFill>
+                            <a:srgbClr val="282828"/>
+                          </a:solidFill>
+                          <a:latin typeface="Arial"/>
+                        </a:rPr>
+                        <a:t>480 nm and beyond (within 1% at 100)</a:t>
+                      </a:r>
+                    </a:p>
+                  </a:txBody>
+                  <a:tcPr marL="54864" marR="54864" marT="18288" marB="18288">
+                    <a:solidFill>
+                      <a:srgbClr val="FFFFFF"/>
                     </a:solidFill>
                   </a:tcPr>
                 </a:tc>
@@ -7495,97 +8922,7 @@
                           </a:solidFill>
                           <a:latin typeface="Arial"/>
                         </a:rPr>
-                        <a:t>stepped pinhole (6)</a:t>
-                      </a:r>
-                    </a:p>
-                  </a:txBody>
-                  <a:tcPr marL="54864" marR="54864" marT="18288" marB="18288">
-                    <a:solidFill>
-                      <a:srgbClr val="FFFFFF"/>
-                    </a:solidFill>
-                  </a:tcPr>
-                </a:tc>
-                <a:tc>
-                  <a:txBody>
-                    <a:bodyPr wrap="square"/>
-                    <a:lstStyle/>
-                    <a:p>
-                      <a:r>
-                        <a:rPr sz="1100" b="0">
-                          <a:solidFill>
-                            <a:srgbClr val="282828"/>
-                          </a:solidFill>
-                          <a:latin typeface="Arial"/>
-                        </a:rPr>
-                        <a:t>0.9935 / 4 pm / 2790</a:t>
-                      </a:r>
-                    </a:p>
-                  </a:txBody>
-                  <a:tcPr marL="54864" marR="54864" marT="18288" marB="18288">
-                    <a:solidFill>
-                      <a:srgbClr val="FFFFFF"/>
-                    </a:solidFill>
-                  </a:tcPr>
-                </a:tc>
-                <a:tc>
-                  <a:txBody>
-                    <a:bodyPr wrap="square"/>
-                    <a:lstStyle/>
-                    <a:p>
-                      <a:r>
-                        <a:rPr sz="1100" b="0">
-                          <a:solidFill>
-                            <a:srgbClr val="282828"/>
-                          </a:solidFill>
-                          <a:latin typeface="Arial"/>
-                        </a:rPr>
-                        <a:t>0.9992 / 3 pm</a:t>
-                      </a:r>
-                    </a:p>
-                  </a:txBody>
-                  <a:tcPr marL="54864" marR="54864" marT="18288" marB="18288">
-                    <a:solidFill>
-                      <a:srgbClr val="FFFFFF"/>
-                    </a:solidFill>
-                  </a:tcPr>
-                </a:tc>
-                <a:tc>
-                  <a:txBody>
-                    <a:bodyPr wrap="square"/>
-                    <a:lstStyle/>
-                    <a:p>
-                      <a:r>
-                        <a:rPr sz="1100" b="0">
-                          <a:solidFill>
-                            <a:srgbClr val="282828"/>
-                          </a:solidFill>
-                          <a:latin typeface="Arial"/>
-                        </a:rPr>
-                        <a:t>0.9985 / 338 pm</a:t>
-                      </a:r>
-                    </a:p>
-                  </a:txBody>
-                  <a:tcPr marL="54864" marR="54864" marT="18288" marB="18288">
-                    <a:solidFill>
-                      <a:srgbClr val="FFFFFF"/>
-                    </a:solidFill>
-                  </a:tcPr>
-                </a:tc>
-              </a:tr>
-              <a:tr h="280035">
-                <a:tc>
-                  <a:txBody>
-                    <a:bodyPr wrap="square"/>
-                    <a:lstStyle/>
-                    <a:p>
-                      <a:r>
-                        <a:rPr sz="1100" b="0">
-                          <a:solidFill>
-                            <a:srgbClr val="282828"/>
-                          </a:solidFill>
-                          <a:latin typeface="Arial"/>
-                        </a:rPr>
-                        <a:t>P/SRI, reference arm traced (4)</a:t>
+                        <a:t>interferometer, lens rig</a:t>
                       </a:r>
                     </a:p>
                   </a:txBody>
@@ -7607,51 +8944,7 @@
                           </a:solidFill>
                           <a:latin typeface="Arial"/>
                         </a:rPr>
-                        <a:t>0.9935 / 2 pm / 4895</a:t>
-                      </a:r>
-                    </a:p>
-                  </a:txBody>
-                  <a:tcPr marL="54864" marR="54864" marT="18288" marB="18288">
-                    <a:solidFill>
-                      <a:srgbClr val="ECF1F6"/>
-                    </a:solidFill>
-                  </a:tcPr>
-                </a:tc>
-                <a:tc>
-                  <a:txBody>
-                    <a:bodyPr wrap="square"/>
-                    <a:lstStyle/>
-                    <a:p>
-                      <a:r>
-                        <a:rPr sz="1100" b="0">
-                          <a:solidFill>
-                            <a:srgbClr val="282828"/>
-                          </a:solidFill>
-                          <a:latin typeface="Arial"/>
-                        </a:rPr>
-                        <a:t>0.9924 / 1 pm</a:t>
-                      </a:r>
-                    </a:p>
-                  </a:txBody>
-                  <a:tcPr marL="54864" marR="54864" marT="18288" marB="18288">
-                    <a:solidFill>
-                      <a:srgbClr val="ECF1F6"/>
-                    </a:solidFill>
-                  </a:tcPr>
-                </a:tc>
-                <a:tc>
-                  <a:txBody>
-                    <a:bodyPr wrap="square"/>
-                    <a:lstStyle/>
-                    <a:p>
-                      <a:r>
-                        <a:rPr sz="1100" b="0">
-                          <a:solidFill>
-                            <a:srgbClr val="282828"/>
-                          </a:solidFill>
-                          <a:latin typeface="Arial"/>
-                        </a:rPr>
-                        <a:t>0.9926 / 144 pm</a:t>
+                        <a:t>322 nm single site; 480 and beyond on the grid</a:t>
                       </a:r>
                     </a:p>
                   </a:txBody>
@@ -7674,8 +8967,8 @@
         </p:nvSpPr>
         <p:spPr>
           <a:xfrm>
-            <a:off x="411480" y="3965066"/>
-            <a:ext cx="11368735" cy="274320"/>
+            <a:off x="6400800" y="1298448"/>
+            <a:ext cx="5394960" cy="274320"/>
           </a:xfrm>
           <a:prstGeom prst="rect">
             <a:avLst/>
@@ -7694,13 +8987,13 @@
               </a:spcAft>
             </a:pPr>
             <a:r>
-              <a:rPr sz="1500" b="0">
+              <a:rPr sz="1200" b="0">
                 <a:solidFill>
                   <a:srgbClr val="282828"/>
                 </a:solidFill>
                 <a:latin typeface="Arial"/>
               </a:rPr>
-              <a:t>•  The one-frame Zernike readings lose: the linear one is biased 4-5% and floors at 21 pm; the exact one-frame reading misreads the sign past the quarter-wave fold (7.8% of pixels on this surface) and diverges in a servo.</a:t>
+              <a:t>•  Why the sensors age: their reference is made from the beam's own core, and the core changes with the surface.  Past 100 nm rms (2 rad of phase) the core collapses and the reading goes blind.</a:t>
             </a:r>
           </a:p>
           <a:p>
@@ -7710,13 +9003,29 @@
               </a:spcAft>
             </a:pPr>
             <a:r>
-              <a:rPr sz="1500" b="0">
+              <a:rPr sz="1200" b="0">
                 <a:solidFill>
                   <a:srgbClr val="282828"/>
                 </a:solidFill>
                 <a:latin typeface="Arial"/>
               </a:rPr>
-              <a:t>•  The interferometer's 52-site rows count the sites its pupil lights; the others use 47.  The interferometer's dense-pattern error, 168 pm against 0.33-0.68 nm, is its reference arm: it does not make its reference from the beam.</a:t>
+              <a:t>•  The shutter frame fixes the pinhole's version of this: measuring the reference by itself each state removes the surface dependence, for one more frame.</a:t>
+            </a:r>
+          </a:p>
+          <a:p>
+            <a:pPr>
+              <a:spcAft>
+                <a:spcPts val="600"/>
+              </a:spcAft>
+            </a:pPr>
+            <a:r>
+              <a:rPr sz="1200" b="0">
+                <a:solidFill>
+                  <a:srgbClr val="282828"/>
+                </a:solidFill>
+                <a:latin typeface="Arial"/>
+              </a:rPr>
+              <a:t>•  Re-measuring the matrix on the surface restores every reading's gain to within 5% at 60-160 nm — at a photon price (next slide).</a:t>
             </a:r>
           </a:p>
         </p:txBody>
@@ -7729,8 +9038,8 @@
         </p:nvSpPr>
         <p:spPr>
           <a:xfrm>
-            <a:off x="411480" y="5272659"/>
-            <a:ext cx="11368735" cy="274320"/>
+            <a:off x="6400800" y="3340608"/>
+            <a:ext cx="5394960" cy="274320"/>
           </a:xfrm>
           <a:prstGeom prst="rect">
             <a:avLst/>
@@ -7755,7 +9064,7 @@
                 </a:solidFill>
                 <a:latin typeface="Arial"/>
               </a:rPr>
-              <a:t>Run tags: lens_deck, oap_deck, matbase, matbase385, v193base, pdi193fbase, pfdeck.  The interferometer rows are at 385 pixels per pupil, the rest at 193; the 385 checks read the same.  The sensor rows re-run on the 22.5° bench of record (gate22_193) hold to the digit: stepped 0.989 / 5 pm, vector 0.994 / 3, pinhole 0.994 / 3 on one actuator; 0.998 / 4, 0.998 / 3, 0.998 / 3 on 47 sites.</a:t>
+              <a:t>Run tags cap385, cap385p, pdi193state, lens_deck, oap_deck; 385 pixels per pupil, 47 sites (52 for the interferometer).</a:t>
             </a:r>
           </a:p>
         </p:txBody>
@@ -7768,7 +9077,7 @@
 </p:sld>
 </file>
 
-<file path=ppt/slides/slide21.xml><?xml version="1.0" encoding="utf-8"?>
+<file path=ppt/slides/slide23.xml><?xml version="1.0" encoding="utf-8"?>
 <p:sld xmlns:a="http://schemas.openxmlformats.org/drawingml/2006/main" xmlns:p="http://schemas.openxmlformats.org/presentationml/2006/main" xmlns:r="http://schemas.openxmlformats.org/officeDocument/2006/relationships">
   <p:cSld>
     <p:spTree>
@@ -7812,7 +9121,7 @@
                 </a:solidFill>
                 <a:latin typeface="Arial"/>
               </a:rPr>
-              <a:t>Capture range: how far from null each reading works</a:t>
+              <a:t>Capture range, second half: the photon price of working off null</a:t>
             </a:r>
           </a:p>
           <a:p>
@@ -7828,7 +9137,7 @@
                 </a:solidFill>
                 <a:latin typeface="Arial"/>
               </a:rPr>
-              <a:t>With the calibration left as measured at 30 nm, the self-referenced sensors hold 10% accuracy only to 36-70 nm of surface; the externally referenced ones, and the pinhole with its shutter frame, hold to 480 nm and beyond</a:t>
+              <a:t>The matrix re-measured on the surface holds the gain; the light for 1 pm then rises 5-40× for the self-referenced sensors and not at all for the P/SRI</a:t>
             </a:r>
           </a:p>
         </p:txBody>
@@ -7887,673 +9196,6 @@
         </p:nvGraphicFramePr>
         <p:xfrm>
           <a:off x="411480" y="1298448"/>
-          <a:ext cx="5806439" cy="2708910"/>
-        </p:xfrm>
-        <a:graphic>
-          <a:graphicData uri="http://schemas.openxmlformats.org/drawingml/2006/table">
-            <a:tbl>
-              <a:tblPr firstRow="1" bandRow="1">
-                <a:tableStyleId>{5C22544A-7EE6-4342-B048-85BDC9FD1C3A}</a:tableStyleId>
-              </a:tblPr>
-              <a:tblGrid>
-                <a:gridCol w="1912709"/>
-                <a:gridCol w="3893730"/>
-              </a:tblGrid>
-              <a:tr h="280035">
-                <a:tc>
-                  <a:txBody>
-                    <a:bodyPr wrap="square"/>
-                    <a:lstStyle/>
-                    <a:p>
-                      <a:r>
-                        <a:rPr sz="1100" b="1">
-                          <a:solidFill>
-                            <a:srgbClr val="FFFFFF"/>
-                          </a:solidFill>
-                          <a:latin typeface="Arial"/>
-                        </a:rPr>
-                        <a:t>reading</a:t>
-                      </a:r>
-                    </a:p>
-                  </a:txBody>
-                  <a:tcPr marL="54864" marR="54864" marT="18288" marB="18288">
-                    <a:solidFill>
-                      <a:srgbClr val="1F4E79"/>
-                    </a:solidFill>
-                  </a:tcPr>
-                </a:tc>
-                <a:tc>
-                  <a:txBody>
-                    <a:bodyPr wrap="square"/>
-                    <a:lstStyle/>
-                    <a:p>
-                      <a:r>
-                        <a:rPr sz="1100" b="1">
-                          <a:solidFill>
-                            <a:srgbClr val="FFFFFF"/>
-                          </a:solidFill>
-                          <a:latin typeface="Arial"/>
-                        </a:rPr>
-                        <a:t>range to 10%, calibration aging from 30 nm</a:t>
-                      </a:r>
-                    </a:p>
-                  </a:txBody>
-                  <a:tcPr marL="54864" marR="54864" marT="18288" marB="18288">
-                    <a:solidFill>
-                      <a:srgbClr val="1F4E79"/>
-                    </a:solidFill>
-                  </a:tcPr>
-                </a:tc>
-              </a:tr>
-              <a:tr h="280035">
-                <a:tc>
-                  <a:txBody>
-                    <a:bodyPr wrap="square"/>
-                    <a:lstStyle/>
-                    <a:p>
-                      <a:r>
-                        <a:rPr sz="1100" b="0">
-                          <a:solidFill>
-                            <a:srgbClr val="282828"/>
-                          </a:solidFill>
-                          <a:latin typeface="Arial"/>
-                        </a:rPr>
-                        <a:t>Zernike exact one frame</a:t>
-                      </a:r>
-                    </a:p>
-                  </a:txBody>
-                  <a:tcPr marL="54864" marR="54864" marT="18288" marB="18288">
-                    <a:solidFill>
-                      <a:srgbClr val="FFFFFF"/>
-                    </a:solidFill>
-                  </a:tcPr>
-                </a:tc>
-                <a:tc>
-                  <a:txBody>
-                    <a:bodyPr wrap="square"/>
-                    <a:lstStyle/>
-                    <a:p>
-                      <a:r>
-                        <a:rPr sz="1100" b="0">
-                          <a:solidFill>
-                            <a:srgbClr val="282828"/>
-                          </a:solidFill>
-                          <a:latin typeface="Arial"/>
-                        </a:rPr>
-                        <a:t>36 nm</a:t>
-                      </a:r>
-                    </a:p>
-                  </a:txBody>
-                  <a:tcPr marL="54864" marR="54864" marT="18288" marB="18288">
-                    <a:solidFill>
-                      <a:srgbClr val="FFFFFF"/>
-                    </a:solidFill>
-                  </a:tcPr>
-                </a:tc>
-              </a:tr>
-              <a:tr h="280035">
-                <a:tc>
-                  <a:txBody>
-                    <a:bodyPr wrap="square"/>
-                    <a:lstStyle/>
-                    <a:p>
-                      <a:r>
-                        <a:rPr sz="1100" b="0">
-                          <a:solidFill>
-                            <a:srgbClr val="282828"/>
-                          </a:solidFill>
-                          <a:latin typeface="Arial"/>
-                        </a:rPr>
-                        <a:t>Zernike stepped</a:t>
-                      </a:r>
-                    </a:p>
-                  </a:txBody>
-                  <a:tcPr marL="54864" marR="54864" marT="18288" marB="18288">
-                    <a:solidFill>
-                      <a:srgbClr val="ECF1F6"/>
-                    </a:solidFill>
-                  </a:tcPr>
-                </a:tc>
-                <a:tc>
-                  <a:txBody>
-                    <a:bodyPr wrap="square"/>
-                    <a:lstStyle/>
-                    <a:p>
-                      <a:r>
-                        <a:rPr sz="1100" b="0">
-                          <a:solidFill>
-                            <a:srgbClr val="282828"/>
-                          </a:solidFill>
-                          <a:latin typeface="Arial"/>
-                        </a:rPr>
-                        <a:t>42 nm</a:t>
-                      </a:r>
-                    </a:p>
-                  </a:txBody>
-                  <a:tcPr marL="54864" marR="54864" marT="18288" marB="18288">
-                    <a:solidFill>
-                      <a:srgbClr val="ECF1F6"/>
-                    </a:solidFill>
-                  </a:tcPr>
-                </a:tc>
-              </a:tr>
-              <a:tr h="280035">
-                <a:tc>
-                  <a:txBody>
-                    <a:bodyPr wrap="square"/>
-                    <a:lstStyle/>
-                    <a:p>
-                      <a:r>
-                        <a:rPr sz="1100" b="0">
-                          <a:solidFill>
-                            <a:srgbClr val="282828"/>
-                          </a:solidFill>
-                          <a:latin typeface="Arial"/>
-                        </a:rPr>
-                        <a:t>Zernike linear</a:t>
-                      </a:r>
-                    </a:p>
-                  </a:txBody>
-                  <a:tcPr marL="54864" marR="54864" marT="18288" marB="18288">
-                    <a:solidFill>
-                      <a:srgbClr val="FFFFFF"/>
-                    </a:solidFill>
-                  </a:tcPr>
-                </a:tc>
-                <a:tc>
-                  <a:txBody>
-                    <a:bodyPr wrap="square"/>
-                    <a:lstStyle/>
-                    <a:p>
-                      <a:r>
-                        <a:rPr sz="1100" b="0">
-                          <a:solidFill>
-                            <a:srgbClr val="282828"/>
-                          </a:solidFill>
-                          <a:latin typeface="Arial"/>
-                        </a:rPr>
-                        <a:t>44 nm</a:t>
-                      </a:r>
-                    </a:p>
-                  </a:txBody>
-                  <a:tcPr marL="54864" marR="54864" marT="18288" marB="18288">
-                    <a:solidFill>
-                      <a:srgbClr val="FFFFFF"/>
-                    </a:solidFill>
-                  </a:tcPr>
-                </a:tc>
-              </a:tr>
-              <a:tr h="280035">
-                <a:tc>
-                  <a:txBody>
-                    <a:bodyPr wrap="square"/>
-                    <a:lstStyle/>
-                    <a:p>
-                      <a:r>
-                        <a:rPr sz="1100" b="0">
-                          <a:solidFill>
-                            <a:srgbClr val="282828"/>
-                          </a:solidFill>
-                          <a:latin typeface="Arial"/>
-                        </a:rPr>
-                        <a:t>pinhole, no shutter frame</a:t>
-                      </a:r>
-                    </a:p>
-                  </a:txBody>
-                  <a:tcPr marL="54864" marR="54864" marT="18288" marB="18288">
-                    <a:solidFill>
-                      <a:srgbClr val="ECF1F6"/>
-                    </a:solidFill>
-                  </a:tcPr>
-                </a:tc>
-                <a:tc>
-                  <a:txBody>
-                    <a:bodyPr wrap="square"/>
-                    <a:lstStyle/>
-                    <a:p>
-                      <a:r>
-                        <a:rPr sz="1100" b="0">
-                          <a:solidFill>
-                            <a:srgbClr val="282828"/>
-                          </a:solidFill>
-                          <a:latin typeface="Arial"/>
-                        </a:rPr>
-                        <a:t>62 nm</a:t>
-                      </a:r>
-                    </a:p>
-                  </a:txBody>
-                  <a:tcPr marL="54864" marR="54864" marT="18288" marB="18288">
-                    <a:solidFill>
-                      <a:srgbClr val="ECF1F6"/>
-                    </a:solidFill>
-                  </a:tcPr>
-                </a:tc>
-              </a:tr>
-              <a:tr h="280035">
-                <a:tc>
-                  <a:txBody>
-                    <a:bodyPr wrap="square"/>
-                    <a:lstStyle/>
-                    <a:p>
-                      <a:r>
-                        <a:rPr sz="1100" b="0">
-                          <a:solidFill>
-                            <a:srgbClr val="282828"/>
-                          </a:solidFill>
-                          <a:latin typeface="Arial"/>
-                        </a:rPr>
-                        <a:t>vector Zernike</a:t>
-                      </a:r>
-                    </a:p>
-                  </a:txBody>
-                  <a:tcPr marL="54864" marR="54864" marT="18288" marB="18288">
-                    <a:solidFill>
-                      <a:srgbClr val="FFFFFF"/>
-                    </a:solidFill>
-                  </a:tcPr>
-                </a:tc>
-                <a:tc>
-                  <a:txBody>
-                    <a:bodyPr wrap="square"/>
-                    <a:lstStyle/>
-                    <a:p>
-                      <a:r>
-                        <a:rPr sz="1100" b="0">
-                          <a:solidFill>
-                            <a:srgbClr val="282828"/>
-                          </a:solidFill>
-                          <a:latin typeface="Arial"/>
-                        </a:rPr>
-                        <a:t>70 nm</a:t>
-                      </a:r>
-                    </a:p>
-                  </a:txBody>
-                  <a:tcPr marL="54864" marR="54864" marT="18288" marB="18288">
-                    <a:solidFill>
-                      <a:srgbClr val="FFFFFF"/>
-                    </a:solidFill>
-                  </a:tcPr>
-                </a:tc>
-              </a:tr>
-              <a:tr h="468630">
-                <a:tc>
-                  <a:txBody>
-                    <a:bodyPr wrap="square"/>
-                    <a:lstStyle/>
-                    <a:p>
-                      <a:r>
-                        <a:rPr sz="1100" b="0">
-                          <a:solidFill>
-                            <a:srgbClr val="282828"/>
-                          </a:solidFill>
-                          <a:latin typeface="Arial"/>
-                        </a:rPr>
-                        <a:t>pinhole with a shutter frame</a:t>
-                      </a:r>
-                    </a:p>
-                  </a:txBody>
-                  <a:tcPr marL="54864" marR="54864" marT="18288" marB="18288">
-                    <a:solidFill>
-                      <a:srgbClr val="ECF1F6"/>
-                    </a:solidFill>
-                  </a:tcPr>
-                </a:tc>
-                <a:tc>
-                  <a:txBody>
-                    <a:bodyPr wrap="square"/>
-                    <a:lstStyle/>
-                    <a:p>
-                      <a:r>
-                        <a:rPr sz="1100" b="0">
-                          <a:solidFill>
-                            <a:srgbClr val="282828"/>
-                          </a:solidFill>
-                          <a:latin typeface="Arial"/>
-                        </a:rPr>
-                        <a:t>480 nm and beyond (1.02 / 1.06 / 1.13 at 120 / 240 / 480)</a:t>
-                      </a:r>
-                    </a:p>
-                  </a:txBody>
-                  <a:tcPr marL="54864" marR="54864" marT="18288" marB="18288">
-                    <a:solidFill>
-                      <a:srgbClr val="ECF1F6"/>
-                    </a:solidFill>
-                  </a:tcPr>
-                </a:tc>
-              </a:tr>
-              <a:tr h="280035">
-                <a:tc>
-                  <a:txBody>
-                    <a:bodyPr wrap="square"/>
-                    <a:lstStyle/>
-                    <a:p>
-                      <a:r>
-                        <a:rPr sz="1100" b="0">
-                          <a:solidFill>
-                            <a:srgbClr val="282828"/>
-                          </a:solidFill>
-                          <a:latin typeface="Arial"/>
-                        </a:rPr>
-                        <a:t>P/SRI</a:t>
-                      </a:r>
-                    </a:p>
-                  </a:txBody>
-                  <a:tcPr marL="54864" marR="54864" marT="18288" marB="18288">
-                    <a:solidFill>
-                      <a:srgbClr val="FFFFFF"/>
-                    </a:solidFill>
-                  </a:tcPr>
-                </a:tc>
-                <a:tc>
-                  <a:txBody>
-                    <a:bodyPr wrap="square"/>
-                    <a:lstStyle/>
-                    <a:p>
-                      <a:r>
-                        <a:rPr sz="1100" b="0">
-                          <a:solidFill>
-                            <a:srgbClr val="282828"/>
-                          </a:solidFill>
-                          <a:latin typeface="Arial"/>
-                        </a:rPr>
-                        <a:t>480 nm and beyond (within 1% at 100)</a:t>
-                      </a:r>
-                    </a:p>
-                  </a:txBody>
-                  <a:tcPr marL="54864" marR="54864" marT="18288" marB="18288">
-                    <a:solidFill>
-                      <a:srgbClr val="FFFFFF"/>
-                    </a:solidFill>
-                  </a:tcPr>
-                </a:tc>
-              </a:tr>
-              <a:tr h="280035">
-                <a:tc>
-                  <a:txBody>
-                    <a:bodyPr wrap="square"/>
-                    <a:lstStyle/>
-                    <a:p>
-                      <a:r>
-                        <a:rPr sz="1100" b="0">
-                          <a:solidFill>
-                            <a:srgbClr val="282828"/>
-                          </a:solidFill>
-                          <a:latin typeface="Arial"/>
-                        </a:rPr>
-                        <a:t>interferometer, lens rig</a:t>
-                      </a:r>
-                    </a:p>
-                  </a:txBody>
-                  <a:tcPr marL="54864" marR="54864" marT="18288" marB="18288">
-                    <a:solidFill>
-                      <a:srgbClr val="ECF1F6"/>
-                    </a:solidFill>
-                  </a:tcPr>
-                </a:tc>
-                <a:tc>
-                  <a:txBody>
-                    <a:bodyPr wrap="square"/>
-                    <a:lstStyle/>
-                    <a:p>
-                      <a:r>
-                        <a:rPr sz="1100" b="0">
-                          <a:solidFill>
-                            <a:srgbClr val="282828"/>
-                          </a:solidFill>
-                          <a:latin typeface="Arial"/>
-                        </a:rPr>
-                        <a:t>322 nm single site; 480 and beyond on the grid</a:t>
-                      </a:r>
-                    </a:p>
-                  </a:txBody>
-                  <a:tcPr marL="54864" marR="54864" marT="18288" marB="18288">
-                    <a:solidFill>
-                      <a:srgbClr val="ECF1F6"/>
-                    </a:solidFill>
-                  </a:tcPr>
-                </a:tc>
-              </a:tr>
-            </a:tbl>
-          </a:graphicData>
-        </a:graphic>
-      </p:graphicFrame>
-      <p:sp>
-        <p:nvSpPr>
-          <p:cNvPr id="5" name="TextBox 4"/>
-          <p:cNvSpPr txBox="1"/>
-          <p:nvPr/>
-        </p:nvSpPr>
-        <p:spPr>
-          <a:xfrm>
-            <a:off x="6400800" y="1298448"/>
-            <a:ext cx="5394960" cy="274320"/>
-          </a:xfrm>
-          <a:prstGeom prst="rect">
-            <a:avLst/>
-          </a:prstGeom>
-          <a:noFill/>
-        </p:spPr>
-        <p:txBody>
-          <a:bodyPr wrap="square">
-            <a:spAutoFit/>
-          </a:bodyPr>
-          <a:lstStyle/>
-          <a:p>
-            <a:pPr>
-              <a:spcAft>
-                <a:spcPts val="600"/>
-              </a:spcAft>
-            </a:pPr>
-            <a:r>
-              <a:rPr sz="1200" b="0">
-                <a:solidFill>
-                  <a:srgbClr val="282828"/>
-                </a:solidFill>
-                <a:latin typeface="Arial"/>
-              </a:rPr>
-              <a:t>•  Why the sensors age: their reference is made from the beam's own core, and the core changes with the surface.  Past 100 nm rms (2 rad of phase) the core collapses and the reading goes blind.</a:t>
-            </a:r>
-          </a:p>
-          <a:p>
-            <a:pPr>
-              <a:spcAft>
-                <a:spcPts val="600"/>
-              </a:spcAft>
-            </a:pPr>
-            <a:r>
-              <a:rPr sz="1200" b="0">
-                <a:solidFill>
-                  <a:srgbClr val="282828"/>
-                </a:solidFill>
-                <a:latin typeface="Arial"/>
-              </a:rPr>
-              <a:t>•  The shutter frame fixes the pinhole's version of this: measuring the reference by itself each state removes the surface dependence, for one more frame.</a:t>
-            </a:r>
-          </a:p>
-          <a:p>
-            <a:pPr>
-              <a:spcAft>
-                <a:spcPts val="600"/>
-              </a:spcAft>
-            </a:pPr>
-            <a:r>
-              <a:rPr sz="1200" b="0">
-                <a:solidFill>
-                  <a:srgbClr val="282828"/>
-                </a:solidFill>
-                <a:latin typeface="Arial"/>
-              </a:rPr>
-              <a:t>•  Re-measuring the matrix on the surface restores every reading's gain to within 5% at 60-160 nm — at a photon price (next slide).</a:t>
-            </a:r>
-          </a:p>
-        </p:txBody>
-      </p:sp>
-      <p:sp>
-        <p:nvSpPr>
-          <p:cNvPr id="6" name="TextBox 5"/>
-          <p:cNvSpPr txBox="1"/>
-          <p:nvPr/>
-        </p:nvSpPr>
-        <p:spPr>
-          <a:xfrm>
-            <a:off x="6400800" y="3340608"/>
-            <a:ext cx="5394960" cy="274320"/>
-          </a:xfrm>
-          <a:prstGeom prst="rect">
-            <a:avLst/>
-          </a:prstGeom>
-          <a:noFill/>
-        </p:spPr>
-        <p:txBody>
-          <a:bodyPr wrap="square">
-            <a:spAutoFit/>
-          </a:bodyPr>
-          <a:lstStyle/>
-          <a:p>
-            <a:pPr>
-              <a:spcAft>
-                <a:spcPts val="600"/>
-              </a:spcAft>
-            </a:pPr>
-            <a:r>
-              <a:rPr sz="1050" b="0">
-                <a:solidFill>
-                  <a:srgbClr val="6E6E6E"/>
-                </a:solidFill>
-                <a:latin typeface="Arial"/>
-              </a:rPr>
-              <a:t>Run tags cap385, cap385p, pdi193state, lens_deck, oap_deck; 385 pixels per pupil, 47 sites (52 for the interferometer).</a:t>
-            </a:r>
-          </a:p>
-        </p:txBody>
-      </p:sp>
-    </p:spTree>
-  </p:cSld>
-  <p:clrMapOvr>
-    <a:masterClrMapping/>
-  </p:clrMapOvr>
-</p:sld>
-</file>
-
-<file path=ppt/slides/slide22.xml><?xml version="1.0" encoding="utf-8"?>
-<p:sld xmlns:a="http://schemas.openxmlformats.org/drawingml/2006/main" xmlns:p="http://schemas.openxmlformats.org/presentationml/2006/main" xmlns:r="http://schemas.openxmlformats.org/officeDocument/2006/relationships">
-  <p:cSld>
-    <p:spTree>
-      <p:nvGrpSpPr>
-        <p:cNvPr id="1" name=""/>
-        <p:cNvGrpSpPr/>
-        <p:nvPr/>
-      </p:nvGrpSpPr>
-      <p:grpSpPr/>
-      <p:sp>
-        <p:nvSpPr>
-          <p:cNvPr id="2" name="TextBox 1"/>
-          <p:cNvSpPr txBox="1"/>
-          <p:nvPr/>
-        </p:nvSpPr>
-        <p:spPr>
-          <a:xfrm>
-            <a:off x="411480" y="201168"/>
-            <a:ext cx="11368735" cy="914400"/>
-          </a:xfrm>
-          <a:prstGeom prst="rect">
-            <a:avLst/>
-          </a:prstGeom>
-          <a:noFill/>
-        </p:spPr>
-        <p:txBody>
-          <a:bodyPr wrap="square">
-            <a:spAutoFit/>
-          </a:bodyPr>
-          <a:lstStyle/>
-          <a:p>
-            <a:pPr>
-              <a:spcAft>
-                <a:spcPts val="400"/>
-              </a:spcAft>
-            </a:pPr>
-            <a:r>
-              <a:rPr sz="2400" b="1">
-                <a:solidFill>
-                  <a:srgbClr val="1F4E79"/>
-                </a:solidFill>
-                <a:latin typeface="Arial"/>
-              </a:rPr>
-              <a:t>Capture range, second half: the photon price of working off null</a:t>
-            </a:r>
-          </a:p>
-          <a:p>
-            <a:pPr>
-              <a:spcAft>
-                <a:spcPts val="0"/>
-              </a:spcAft>
-            </a:pPr>
-            <a:r>
-              <a:rPr sz="1250" b="0">
-                <a:solidFill>
-                  <a:srgbClr val="6E6E6E"/>
-                </a:solidFill>
-                <a:latin typeface="Arial"/>
-              </a:rPr>
-              <a:t>The matrix re-measured on the surface holds the gain; the light for 1 pm then rises 5-40× for the self-referenced sensors and not at all for the P/SRI</a:t>
-            </a:r>
-          </a:p>
-        </p:txBody>
-      </p:sp>
-      <p:sp>
-        <p:nvSpPr>
-          <p:cNvPr id="3" name="Rectangle 2"/>
-          <p:cNvSpPr/>
-          <p:nvPr/>
-        </p:nvSpPr>
-        <p:spPr>
-          <a:xfrm>
-            <a:off x="411480" y="1133856"/>
-            <a:ext cx="11368735" cy="20320"/>
-          </a:xfrm>
-          <a:prstGeom prst="rect">
-            <a:avLst/>
-          </a:prstGeom>
-          <a:solidFill>
-            <a:srgbClr val="B8C6D4"/>
-          </a:solidFill>
-          <a:ln>
-            <a:noFill/>
-          </a:ln>
-          <a:effectLst/>
-        </p:spPr>
-        <p:style>
-          <a:lnRef idx="1">
-            <a:schemeClr val="accent1"/>
-          </a:lnRef>
-          <a:fillRef idx="3">
-            <a:schemeClr val="accent1"/>
-          </a:fillRef>
-          <a:effectRef idx="2">
-            <a:schemeClr val="accent1"/>
-          </a:effectRef>
-          <a:fontRef idx="minor">
-            <a:schemeClr val="lt1"/>
-          </a:fontRef>
-        </p:style>
-        <p:txBody>
-          <a:bodyPr rtlCol="0" anchor="ctr"/>
-          <a:lstStyle/>
-          <a:p>
-            <a:pPr algn="ctr"/>
-          </a:p>
-        </p:txBody>
-      </p:sp>
-      <p:graphicFrame>
-        <p:nvGraphicFramePr>
-          <p:cNvPr id="4" name="Table 3"/>
-          <p:cNvGraphicFramePr>
-            <a:graphicFrameLocks noGrp="1"/>
-          </p:cNvGraphicFramePr>
-          <p:nvPr/>
-        </p:nvGraphicFramePr>
-        <p:xfrm>
-          <a:off x="411480" y="1298448"/>
           <a:ext cx="11368734" cy="3463290"/>
         </p:xfrm>
         <a:graphic>
@@ -9269,7 +9911,7 @@
 </p:sld>
 </file>
 
-<file path=ppt/slides/slide23.xml><?xml version="1.0" encoding="utf-8"?>
+<file path=ppt/slides/slide24.xml><?xml version="1.0" encoding="utf-8"?>
 <p:sld xmlns:a="http://schemas.openxmlformats.org/drawingml/2006/main" xmlns:p="http://schemas.openxmlformats.org/presentationml/2006/main" xmlns:r="http://schemas.openxmlformats.org/officeDocument/2006/relationships">
   <p:cSld>
     <p:spTree>
@@ -10127,7 +10769,7 @@
 </p:sld>
 </file>
 
-<file path=ppt/slides/slide24.xml><?xml version="1.0" encoding="utf-8"?>
+<file path=ppt/slides/slide25.xml><?xml version="1.0" encoding="utf-8"?>
 <p:sld xmlns:a="http://schemas.openxmlformats.org/drawingml/2006/main" xmlns:p="http://schemas.openxmlformats.org/presentationml/2006/main" xmlns:r="http://schemas.openxmlformats.org/officeDocument/2006/relationships">
   <p:cSld>
     <p:spTree>
@@ -11719,7 +12361,7 @@
 </p:sld>
 </file>
 
-<file path=ppt/slides/slide25.xml><?xml version="1.0" encoding="utf-8"?>
+<file path=ppt/slides/slide26.xml><?xml version="1.0" encoding="utf-8"?>
 <p:sld xmlns:a="http://schemas.openxmlformats.org/drawingml/2006/main" xmlns:p="http://schemas.openxmlformats.org/presentationml/2006/main" xmlns:r="http://schemas.openxmlformats.org/officeDocument/2006/relationships">
   <p:cSld>
     <p:spTree>
@@ -12585,7 +13227,7 @@
 </p:sld>
 </file>
 
-<file path=ppt/slides/slide26.xml><?xml version="1.0" encoding="utf-8"?>
+<file path=ppt/slides/slide27.xml><?xml version="1.0" encoding="utf-8"?>
 <p:sld xmlns:a="http://schemas.openxmlformats.org/drawingml/2006/main" xmlns:p="http://schemas.openxmlformats.org/presentationml/2006/main" xmlns:r="http://schemas.openxmlformats.org/officeDocument/2006/relationships">
   <p:cSld>
     <p:spTree>
@@ -13577,7 +14219,7 @@
 </p:sld>
 </file>
 
-<file path=ppt/slides/slide27.xml><?xml version="1.0" encoding="utf-8"?>
+<file path=ppt/slides/slide28.xml><?xml version="1.0" encoding="utf-8"?>
 <p:sld xmlns:a="http://schemas.openxmlformats.org/drawingml/2006/main" xmlns:p="http://schemas.openxmlformats.org/presentationml/2006/main" xmlns:r="http://schemas.openxmlformats.org/officeDocument/2006/relationships">
   <p:cSld>
     <p:spTree>
@@ -14276,7 +14918,7 @@
 </p:sld>
 </file>
 
-<file path=ppt/slides/slide28.xml><?xml version="1.0" encoding="utf-8"?>
+<file path=ppt/slides/slide29.xml><?xml version="1.0" encoding="utf-8"?>
 <p:sld xmlns:a="http://schemas.openxmlformats.org/drawingml/2006/main" xmlns:p="http://schemas.openxmlformats.org/presentationml/2006/main" xmlns:r="http://schemas.openxmlformats.org/officeDocument/2006/relationships">
   <p:cSld>
     <p:spTree>
@@ -15315,7 +15957,7 @@
 </p:sld>
 </file>
 
-<file path=ppt/slides/slide29.xml><?xml version="1.0" encoding="utf-8"?>
+<file path=ppt/slides/slide3.xml><?xml version="1.0" encoding="utf-8"?>
 <p:sld xmlns:a="http://schemas.openxmlformats.org/drawingml/2006/main" xmlns:p="http://schemas.openxmlformats.org/presentationml/2006/main" xmlns:r="http://schemas.openxmlformats.org/officeDocument/2006/relationships">
   <p:cSld>
     <p:spTree>
@@ -15359,7 +16001,7 @@
                 </a:solidFill>
                 <a:latin typeface="Arial"/>
               </a:rPr>
-              <a:t>What can spoil each reading, priced</a:t>
+              <a:t>The three jobs, and how each is scored</a:t>
             </a:r>
           </a:p>
           <a:p>
@@ -15375,7 +16017,7 @@
                 </a:solidFill>
                 <a:latin typeface="Arial"/>
               </a:rPr>
-              <a:t>Every systematic we could model is either calibrated by the response matrix measured through the sensor, or shown small; one line per approach</a:t>
+              <a:t>Measure the mirror's surface to picometers; capture its post-launch shape, 100-200 nm of wavefront, into the servo's reach; hold it there in a servo</a:t>
             </a:r>
           </a:p>
         </p:txBody>
@@ -15424,17 +16066,104 @@
           </a:p>
         </p:txBody>
       </p:sp>
+      <p:sp>
+        <p:nvSpPr>
+          <p:cNvPr id="4" name="TextBox 3"/>
+          <p:cNvSpPr txBox="1"/>
+          <p:nvPr/>
+        </p:nvSpPr>
+        <p:spPr>
+          <a:xfrm>
+            <a:off x="411480" y="1298448"/>
+            <a:ext cx="5806440" cy="274320"/>
+          </a:xfrm>
+          <a:prstGeom prst="rect">
+            <a:avLst/>
+          </a:prstGeom>
+          <a:noFill/>
+        </p:spPr>
+        <p:txBody>
+          <a:bodyPr wrap="square">
+            <a:spAutoFit/>
+          </a:bodyPr>
+          <a:lstStyle/>
+          <a:p>
+            <a:pPr>
+              <a:spcAft>
+                <a:spcPts val="600"/>
+              </a:spcAft>
+            </a:pPr>
+            <a:r>
+              <a:rPr sz="1200" b="0">
+                <a:solidFill>
+                  <a:srgbClr val="282828"/>
+                </a:solidFill>
+                <a:latin typeface="Arial"/>
+              </a:rPr>
+              <a:t>•  The DM: 96×96 actuators on a 1 mm pitch, 96 mm across.  On orbit its surface must stay constant to well under 10 pm, measured often and held by a closed loop.  Every test runs on a random 30 nm rms working surface, not a flat: the gauge never operates at null.</a:t>
+            </a:r>
+          </a:p>
+          <a:p>
+            <a:pPr>
+              <a:spcAft>
+                <a:spcPts val="600"/>
+              </a:spcAft>
+            </a:pPr>
+            <a:r>
+              <a:rPr sz="1200" b="0">
+                <a:solidFill>
+                  <a:srgbClr val="282828"/>
+                </a:solidFill>
+                <a:latin typeface="Arial"/>
+              </a:rPr>
+              <a:t>•  Job 1, measure: read a change of 10 nm on one actuator, of 1 nm on 47 actuators, and a dense random 10 nm pattern, on the 30 nm surface with the response matrix measured on it; and keep that accuracy as the surface moves away from the calibration (capture range).</a:t>
+            </a:r>
+          </a:p>
+          <a:p>
+            <a:pPr>
+              <a:spcAft>
+                <a:spcPts val="600"/>
+              </a:spcAft>
+            </a:pPr>
+            <a:r>
+              <a:rPr sz="1200" b="0">
+                <a:solidFill>
+                  <a:srgbClr val="282828"/>
+                </a:solidFill>
+                <a:latin typeface="Arial"/>
+              </a:rPr>
+              <a:t>•  Job 2, capture: bring the largest possible starting surface, 100-200 nm of wavefront, down to the servo's floor; every phase reading wraps at ±158 nm of surface (±π at 632.8 nm, double pass), so this is a wrapping problem before it is a noise problem.</a:t>
+            </a:r>
+          </a:p>
+          <a:p>
+            <a:pPr>
+              <a:spcAft>
+                <a:spcPts val="600"/>
+              </a:spcAft>
+            </a:pPr>
+            <a:r>
+              <a:rPr sz="1200" b="0">
+                <a:solidFill>
+                  <a:srgbClr val="282828"/>
+                </a:solidFill>
+                <a:latin typeface="Arial"/>
+              </a:rPr>
+              <a:t>•  Job 3, hold: the servo at picometers on the 30 nm rms working surface, its set point: the light per cycle that holds changes about it to 3 pm rms under a 2 pm per-cycle random walk, and whether the reading leaves a fixed error.</a:t>
+            </a:r>
+          </a:p>
+        </p:txBody>
+      </p:sp>
       <p:graphicFrame>
         <p:nvGraphicFramePr>
-          <p:cNvPr id="4" name="Table 3"/>
+          <p:cNvPr id="5" name="Table 4"/>
           <p:cNvGraphicFramePr>
             <a:graphicFrameLocks noGrp="1"/>
           </p:cNvGraphicFramePr>
           <p:nvPr/>
         </p:nvGraphicFramePr>
         <p:xfrm>
-          <a:off x="411480" y="1298448"/>
-          <a:ext cx="11368733" cy="4777740"/>
+          <a:off x="6400800" y="1298448"/>
+          <a:ext cx="5394959" cy="2788920"/>
         </p:xfrm>
         <a:graphic>
           <a:graphicData uri="http://schemas.openxmlformats.org/drawingml/2006/table">
@@ -15443,25 +16172,23 @@
                 <a:tableStyleId>{5C22544A-7EE6-4342-B048-85BDC9FD1C3A}</a:tableStyleId>
               </a:tblPr>
               <a:tblGrid>
-                <a:gridCol w="1889760"/>
-                <a:gridCol w="2093273"/>
-                <a:gridCol w="4107555"/>
-                <a:gridCol w="3278145"/>
+                <a:gridCol w="844109"/>
+                <a:gridCol w="4550850"/>
               </a:tblGrid>
-              <a:tr h="280035">
-                <a:tc>
-                  <a:txBody>
-                    <a:bodyPr wrap="square"/>
-                    <a:lstStyle/>
-                    <a:p>
-                      <a:r>
-                        <a:rPr sz="1100" b="1">
+              <a:tr h="262890">
+                <a:tc>
+                  <a:txBody>
+                    <a:bodyPr wrap="square"/>
+                    <a:lstStyle/>
+                    <a:p>
+                      <a:r>
+                        <a:rPr sz="1000" b="1">
                           <a:solidFill>
                             <a:srgbClr val="FFFFFF"/>
                           </a:solidFill>
                           <a:latin typeface="Arial"/>
                         </a:rPr>
-                        <a:t>approach</a:t>
+                        <a:t>score</a:t>
                       </a:r>
                     </a:p>
                   </a:txBody>
@@ -15477,13 +16204,13 @@
                     <a:lstStyle/>
                     <a:p>
                       <a:r>
-                        <a:rPr sz="1100" b="1">
+                        <a:rPr sz="1000" b="1">
                           <a:solidFill>
                             <a:srgbClr val="FFFFFF"/>
                           </a:solidFill>
                           <a:latin typeface="Arial"/>
                         </a:rPr>
-                        <a:t>term</a:t>
+                        <a:t>meaning</a:t>
                       </a:r>
                     </a:p>
                   </a:txBody>
@@ -15493,131 +16220,43 @@
                     </a:solidFill>
                   </a:tcPr>
                 </a:tc>
-                <a:tc>
-                  <a:txBody>
-                    <a:bodyPr wrap="square"/>
-                    <a:lstStyle/>
-                    <a:p>
-                      <a:r>
-                        <a:rPr sz="1100" b="1">
-                          <a:solidFill>
-                            <a:srgbClr val="FFFFFF"/>
-                          </a:solidFill>
-                          <a:latin typeface="Arial"/>
-                        </a:rPr>
-                        <a:t>uncalibrated size</a:t>
-                      </a:r>
-                    </a:p>
-                  </a:txBody>
-                  <a:tcPr marL="54864" marR="54864" marT="18288" marB="18288">
-                    <a:solidFill>
-                      <a:srgbClr val="1F4E79"/>
-                    </a:solidFill>
-                  </a:tcPr>
-                </a:tc>
-                <a:tc>
-                  <a:txBody>
-                    <a:bodyPr wrap="square"/>
-                    <a:lstStyle/>
-                    <a:p>
-                      <a:r>
-                        <a:rPr sz="1100" b="1">
-                          <a:solidFill>
-                            <a:srgbClr val="FFFFFF"/>
-                          </a:solidFill>
-                          <a:latin typeface="Arial"/>
-                        </a:rPr>
-                        <a:t>after the matrix measured on the surface</a:t>
-                      </a:r>
-                    </a:p>
-                  </a:txBody>
-                  <a:tcPr marL="54864" marR="54864" marT="18288" marB="18288">
-                    <a:solidFill>
-                      <a:srgbClr val="1F4E79"/>
-                    </a:solidFill>
-                  </a:tcPr>
-                </a:tc>
               </a:tr>
-              <a:tr h="280035">
-                <a:tc>
-                  <a:txBody>
-                    <a:bodyPr wrap="square"/>
-                    <a:lstStyle/>
-                    <a:p>
-                      <a:r>
-                        <a:rPr sz="1100" b="0">
-                          <a:solidFill>
-                            <a:srgbClr val="282828"/>
-                          </a:solidFill>
-                          <a:latin typeface="Arial"/>
-                        </a:rPr>
-                        <a:t>interferometer</a:t>
-                      </a:r>
-                    </a:p>
-                  </a:txBody>
-                  <a:tcPr marL="54864" marR="54864" marT="18288" marB="18288">
-                    <a:solidFill>
-                      <a:srgbClr val="FFFFFF"/>
-                    </a:solidFill>
-                  </a:tcPr>
-                </a:tc>
-                <a:tc>
-                  <a:txBody>
-                    <a:bodyPr wrap="square"/>
-                    <a:lstStyle/>
-                    <a:p>
-                      <a:r>
-                        <a:rPr sz="1100" b="0">
-                          <a:solidFill>
-                            <a:srgbClr val="282828"/>
-                          </a:solidFill>
-                          <a:latin typeface="Arial"/>
-                        </a:rPr>
-                        <a:t>piezo step error 2% / 5%</a:t>
-                      </a:r>
-                    </a:p>
-                  </a:txBody>
-                  <a:tcPr marL="54864" marR="54864" marT="18288" marB="18288">
-                    <a:solidFill>
-                      <a:srgbClr val="FFFFFF"/>
-                    </a:solidFill>
-                  </a:tcPr>
-                </a:tc>
-                <a:tc>
-                  <a:txBody>
-                    <a:bodyPr wrap="square"/>
-                    <a:lstStyle/>
-                    <a:p>
-                      <a:r>
-                        <a:rPr sz="1100" b="0">
-                          <a:solidFill>
-                            <a:srgbClr val="282828"/>
-                          </a:solidFill>
-                          <a:latin typeface="Arial"/>
-                        </a:rPr>
-                        <a:t>gain 0.974 / 0.954; floor 2 → 5 / 9 pm</a:t>
-                      </a:r>
-                    </a:p>
-                  </a:txBody>
-                  <a:tcPr marL="54864" marR="54864" marT="18288" marB="18288">
-                    <a:solidFill>
-                      <a:srgbClr val="FFFFFF"/>
-                    </a:solidFill>
-                  </a:tcPr>
-                </a:tc>
-                <a:tc>
-                  <a:txBody>
-                    <a:bodyPr wrap="square"/>
-                    <a:lstStyle/>
-                    <a:p>
-                      <a:r>
-                        <a:rPr sz="1100" b="0">
-                          <a:solidFill>
-                            <a:srgbClr val="282828"/>
-                          </a:solidFill>
-                          <a:latin typeface="Arial"/>
-                        </a:rPr>
-                        <a:t>common mode in the servo: 5.4e12 vs 5.5e12</a:t>
+              <a:tr h="434340">
+                <a:tc>
+                  <a:txBody>
+                    <a:bodyPr wrap="square"/>
+                    <a:lstStyle/>
+                    <a:p>
+                      <a:r>
+                        <a:rPr sz="1000" b="0">
+                          <a:solidFill>
+                            <a:srgbClr val="282828"/>
+                          </a:solidFill>
+                          <a:latin typeface="Arial"/>
+                        </a:rPr>
+                        <a:t>gain</a:t>
+                      </a:r>
+                    </a:p>
+                  </a:txBody>
+                  <a:tcPr marL="54864" marR="54864" marT="18288" marB="18288">
+                    <a:solidFill>
+                      <a:srgbClr val="FFFFFF"/>
+                    </a:solidFill>
+                  </a:tcPr>
+                </a:tc>
+                <a:tc>
+                  <a:txBody>
+                    <a:bodyPr wrap="square"/>
+                    <a:lstStyle/>
+                    <a:p>
+                      <a:r>
+                        <a:rPr sz="1000" b="0">
+                          <a:solidFill>
+                            <a:srgbClr val="282828"/>
+                          </a:solidFill>
+                          <a:latin typeface="Arial"/>
+                        </a:rPr>
+                        <a:t>recovered change ÷ true change; 1.0 is perfect; quoted after calibration</a:t>
                       </a:r>
                     </a:p>
                   </a:txBody>
@@ -15628,20 +16267,20 @@
                   </a:tcPr>
                 </a:tc>
               </a:tr>
-              <a:tr h="468630">
-                <a:tc>
-                  <a:txBody>
-                    <a:bodyPr wrap="square"/>
-                    <a:lstStyle/>
-                    <a:p>
-                      <a:r>
-                        <a:rPr sz="1100" b="0">
-                          <a:solidFill>
-                            <a:srgbClr val="282828"/>
-                          </a:solidFill>
-                          <a:latin typeface="Arial"/>
-                        </a:rPr>
-                        <a:t>interferometer</a:t>
+              <a:tr h="262890">
+                <a:tc>
+                  <a:txBody>
+                    <a:bodyPr wrap="square"/>
+                    <a:lstStyle/>
+                    <a:p>
+                      <a:r>
+                        <a:rPr sz="1000" b="0">
+                          <a:solidFill>
+                            <a:srgbClr val="282828"/>
+                          </a:solidFill>
+                          <a:latin typeface="Arial"/>
+                        </a:rPr>
+                        <a:t>floor</a:t>
                       </a:r>
                     </a:p>
                   </a:txBody>
@@ -15657,13 +16296,13 @@
                     <a:lstStyle/>
                     <a:p>
                       <a:r>
-                        <a:rPr sz="1100" b="0">
-                          <a:solidFill>
-                            <a:srgbClr val="282828"/>
-                          </a:solidFill>
-                          <a:latin typeface="Arial"/>
-                        </a:rPr>
-                        <a:t>camera 1/f walk, 1e-3 of signal within a scan</a:t>
+                        <a:rPr sz="1000" b="0">
+                          <a:solidFill>
+                            <a:srgbClr val="282828"/>
+                          </a:solidFill>
+                          <a:latin typeface="Arial"/>
+                        </a:rPr>
+                        <a:t>rms of the actuators that were not changed, in picometers</a:t>
                       </a:r>
                     </a:p>
                   </a:txBody>
@@ -15673,19 +16312,67 @@
                     </a:solidFill>
                   </a:tcPr>
                 </a:tc>
-                <a:tc>
-                  <a:txBody>
-                    <a:bodyPr wrap="square"/>
-                    <a:lstStyle/>
-                    <a:p>
-                      <a:r>
-                        <a:rPr sz="1100" b="0">
-                          <a:solidFill>
-                            <a:srgbClr val="282828"/>
-                          </a:solidFill>
-                          <a:latin typeface="Arial"/>
-                        </a:rPr>
-                        <a:t>+13% light for 3 pm</a:t>
+              </a:tr>
+              <a:tr h="262890">
+                <a:tc>
+                  <a:txBody>
+                    <a:bodyPr wrap="square"/>
+                    <a:lstStyle/>
+                    <a:p>
+                      <a:r>
+                        <a:rPr sz="1000" b="0">
+                          <a:solidFill>
+                            <a:srgbClr val="282828"/>
+                          </a:solidFill>
+                          <a:latin typeface="Arial"/>
+                        </a:rPr>
+                        <a:t>SNR</a:t>
+                      </a:r>
+                    </a:p>
+                  </a:txBody>
+                  <a:tcPr marL="54864" marR="54864" marT="18288" marB="18288">
+                    <a:solidFill>
+                      <a:srgbClr val="FFFFFF"/>
+                    </a:solidFill>
+                  </a:tcPr>
+                </a:tc>
+                <a:tc>
+                  <a:txBody>
+                    <a:bodyPr wrap="square"/>
+                    <a:lstStyle/>
+                    <a:p>
+                      <a:r>
+                        <a:rPr sz="1000" b="0">
+                          <a:solidFill>
+                            <a:srgbClr val="282828"/>
+                          </a:solidFill>
+                          <a:latin typeface="Arial"/>
+                        </a:rPr>
+                        <a:t>recovered change ÷ floor; above 5 counts as detected</a:t>
+                      </a:r>
+                    </a:p>
+                  </a:txBody>
+                  <a:tcPr marL="54864" marR="54864" marT="18288" marB="18288">
+                    <a:solidFill>
+                      <a:srgbClr val="FFFFFF"/>
+                    </a:solidFill>
+                  </a:tcPr>
+                </a:tc>
+              </a:tr>
+              <a:tr h="434340">
+                <a:tc>
+                  <a:txBody>
+                    <a:bodyPr wrap="square"/>
+                    <a:lstStyle/>
+                    <a:p>
+                      <a:r>
+                        <a:rPr sz="1000" b="0">
+                          <a:solidFill>
+                            <a:srgbClr val="282828"/>
+                          </a:solidFill>
+                          <a:latin typeface="Arial"/>
+                        </a:rPr>
+                        <a:t>photons per measurement</a:t>
                       </a:r>
                     </a:p>
                   </a:txBody>
@@ -15701,13 +16388,13 @@
                     <a:lstStyle/>
                     <a:p>
                       <a:r>
-                        <a:rPr sz="1100" b="0">
-                          <a:solidFill>
-                            <a:srgbClr val="282828"/>
-                          </a:solidFill>
-                          <a:latin typeface="Arial"/>
-                        </a:rPr>
-                        <a:t>—</a:t>
+                        <a:rPr sz="1000" b="0">
+                          <a:solidFill>
+                            <a:srgbClr val="282828"/>
+                          </a:solidFill>
+                          <a:latin typeface="Arial"/>
+                        </a:rPr>
+                        <a:t>all frames of one measurement summed; 1e14 photons at 633 nm = 31 µJ = 0.13 s of a 1 mW laser at 25% throughput</a:t>
                       </a:r>
                     </a:p>
                   </a:txBody>
@@ -15718,86 +16405,42 @@
                   </a:tcPr>
                 </a:tc>
               </a:tr>
-              <a:tr h="468630">
-                <a:tc>
-                  <a:txBody>
-                    <a:bodyPr wrap="square"/>
-                    <a:lstStyle/>
-                    <a:p>
-                      <a:r>
-                        <a:rPr sz="1100" b="0">
-                          <a:solidFill>
-                            <a:srgbClr val="282828"/>
-                          </a:solidFill>
-                          <a:latin typeface="Arial"/>
-                        </a:rPr>
-                        <a:t>interferometer, snapshot</a:t>
-                      </a:r>
-                    </a:p>
-                  </a:txBody>
-                  <a:tcPr marL="54864" marR="54864" marT="18288" marB="18288">
-                    <a:solidFill>
-                      <a:srgbClr val="FFFFFF"/>
-                    </a:solidFill>
-                  </a:tcPr>
-                </a:tc>
-                <a:tc>
-                  <a:txBody>
-                    <a:bodyPr wrap="square"/>
-                    <a:lstStyle/>
-                    <a:p>
-                      <a:r>
-                        <a:rPr sz="1100" b="0">
-                          <a:solidFill>
-                            <a:srgbClr val="282828"/>
-                          </a:solidFill>
-                          <a:latin typeface="Arial"/>
-                        </a:rPr>
-                        <a:t>splitter diattenuation (plate); cube R_p</a:t>
-                      </a:r>
-                    </a:p>
-                  </a:txBody>
-                  <a:tcPr marL="54864" marR="54864" marT="18288" marB="18288">
-                    <a:solidFill>
-                      <a:srgbClr val="FFFFFF"/>
-                    </a:solidFill>
-                  </a:tcPr>
-                </a:tc>
-                <a:tc>
-                  <a:txBody>
-                    <a:bodyPr wrap="square"/>
-                    <a:lstStyle/>
-                    <a:p>
-                      <a:r>
-                        <a:rPr sz="1100" b="0">
-                          <a:solidFill>
-                            <a:srgbClr val="282828"/>
-                          </a:solidFill>
-                          <a:latin typeface="Arial"/>
-                        </a:rPr>
-                        <a:t>at the built 22.5°: arm rotation 1.56°, gain +0.9% (11.7% at the record's 45°); 2.1% (cube, naive stack)</a:t>
-                      </a:r>
-                    </a:p>
-                  </a:txBody>
-                  <a:tcPr marL="54864" marR="54864" marT="18288" marB="18288">
-                    <a:solidFill>
-                      <a:srgbClr val="FFFFFF"/>
-                    </a:solidFill>
-                  </a:tcPr>
-                </a:tc>
-                <a:tc>
-                  <a:txBody>
-                    <a:bodyPr wrap="square"/>
-                    <a:lstStyle/>
-                    <a:p>
-                      <a:r>
-                        <a:rPr sz="1100" b="0">
-                          <a:solidFill>
-                            <a:srgbClr val="282828"/>
-                          </a:solidFill>
-                          <a:latin typeface="Arial"/>
-                        </a:rPr>
-                        <a:t>residual after a measured matrix 1.4e-3 (lens), 5.5e-4 (mirrors); symmetric stack 0</a:t>
+              <a:tr h="434340">
+                <a:tc>
+                  <a:txBody>
+                    <a:bodyPr wrap="square"/>
+                    <a:lstStyle/>
+                    <a:p>
+                      <a:r>
+                        <a:rPr sz="1000" b="0">
+                          <a:solidFill>
+                            <a:srgbClr val="282828"/>
+                          </a:solidFill>
+                          <a:latin typeface="Arial"/>
+                        </a:rPr>
+                        <a:t>capture range to 10%</a:t>
+                      </a:r>
+                    </a:p>
+                  </a:txBody>
+                  <a:tcPr marL="54864" marR="54864" marT="18288" marB="18288">
+                    <a:solidFill>
+                      <a:srgbClr val="FFFFFF"/>
+                    </a:solidFill>
+                  </a:tcPr>
+                </a:tc>
+                <a:tc>
+                  <a:txBody>
+                    <a:bodyPr wrap="square"/>
+                    <a:lstStyle/>
+                    <a:p>
+                      <a:r>
+                        <a:rPr sz="1000" b="0">
+                          <a:solidFill>
+                            <a:srgbClr val="282828"/>
+                          </a:solidFill>
+                          <a:latin typeface="Arial"/>
+                        </a:rPr>
+                        <a:t>the largest working surface at which a 10 nm change on the 47 sites reads within 10%, the matrix left as calibrated at 30 nm</a:t>
                       </a:r>
                     </a:p>
                   </a:txBody>
@@ -15808,20 +16451,20 @@
                   </a:tcPr>
                 </a:tc>
               </a:tr>
-              <a:tr h="468630">
-                <a:tc>
-                  <a:txBody>
-                    <a:bodyPr wrap="square"/>
-                    <a:lstStyle/>
-                    <a:p>
-                      <a:r>
-                        <a:rPr sz="1100" b="0">
-                          <a:solidFill>
-                            <a:srgbClr val="282828"/>
-                          </a:solidFill>
-                          <a:latin typeface="Arial"/>
-                        </a:rPr>
-                        <a:t>Zernike</a:t>
+              <a:tr h="262890">
+                <a:tc>
+                  <a:txBody>
+                    <a:bodyPr wrap="square"/>
+                    <a:lstStyle/>
+                    <a:p>
+                      <a:r>
+                        <a:rPr sz="1000" b="0">
+                          <a:solidFill>
+                            <a:srgbClr val="282828"/>
+                          </a:solidFill>
+                          <a:latin typeface="Arial"/>
+                        </a:rPr>
+                        <a:t>capture</a:t>
                       </a:r>
                     </a:p>
                   </a:txBody>
@@ -15837,13 +16480,13 @@
                     <a:lstStyle/>
                     <a:p>
                       <a:r>
-                        <a:rPr sz="1100" b="0">
-                          <a:solidFill>
-                            <a:srgbClr val="282828"/>
-                          </a:solidFill>
-                          <a:latin typeface="Arial"/>
-                        </a:rPr>
-                        <a:t>model out of focus (the early model); sampling; color</a:t>
+                        <a:rPr sz="1000" b="0">
+                          <a:solidFill>
+                            <a:srgbClr val="282828"/>
+                          </a:solidFill>
+                          <a:latin typeface="Arial"/>
+                        </a:rPr>
+                        <a:t>the largest starting surface the servo brings to 3 pm</a:t>
                       </a:r>
                     </a:p>
                   </a:txBody>
@@ -15853,587 +16496,49 @@
                     </a:solidFill>
                   </a:tcPr>
                 </a:tc>
-                <a:tc>
-                  <a:txBody>
-                    <a:bodyPr wrap="square"/>
-                    <a:lstStyle/>
-                    <a:p>
-                      <a:r>
-                        <a:rPr sz="1100" b="0">
-                          <a:solidFill>
-                            <a:srgbClr val="282828"/>
-                          </a:solidFill>
-                          <a:latin typeface="Arial"/>
-                        </a:rPr>
-                        <a:t>floor 744 → 67 pm on correction; dimple needs 6 pixels; one etch reads five colors within 3%</a:t>
-                      </a:r>
-                    </a:p>
-                  </a:txBody>
-                  <a:tcPr marL="54864" marR="54864" marT="18288" marB="18288">
-                    <a:solidFill>
-                      <a:srgbClr val="ECF1F6"/>
-                    </a:solidFill>
-                  </a:tcPr>
-                </a:tc>
-                <a:tc>
-                  <a:txBody>
-                    <a:bodyPr wrap="square"/>
-                    <a:lstStyle/>
-                    <a:p>
-                      <a:r>
-                        <a:rPr sz="1100" b="0">
-                          <a:solidFill>
-                            <a:srgbClr val="282828"/>
-                          </a:solidFill>
-                          <a:latin typeface="Arial"/>
-                        </a:rPr>
-                        <a:t>—</a:t>
-                      </a:r>
-                    </a:p>
-                  </a:txBody>
-                  <a:tcPr marL="54864" marR="54864" marT="18288" marB="18288">
-                    <a:solidFill>
-                      <a:srgbClr val="ECF1F6"/>
-                    </a:solidFill>
-                  </a:tcPr>
-                </a:tc>
               </a:tr>
-              <a:tr h="468630">
-                <a:tc>
-                  <a:txBody>
-                    <a:bodyPr wrap="square"/>
-                    <a:lstStyle/>
-                    <a:p>
-                      <a:r>
-                        <a:rPr sz="1100" b="0">
-                          <a:solidFill>
-                            <a:srgbClr val="282828"/>
-                          </a:solidFill>
-                          <a:latin typeface="Arial"/>
-                        </a:rPr>
-                        <a:t>vector Zernike</a:t>
-                      </a:r>
-                    </a:p>
-                  </a:txBody>
-                  <a:tcPr marL="54864" marR="54864" marT="18288" marB="18288">
-                    <a:solidFill>
-                      <a:srgbClr val="FFFFFF"/>
-                    </a:solidFill>
-                  </a:tcPr>
-                </a:tc>
-                <a:tc>
-                  <a:txBody>
-                    <a:bodyPr wrap="square"/>
-                    <a:lstStyle/>
-                    <a:p>
-                      <a:r>
-                        <a:rPr sz="1100" b="0">
-                          <a:solidFill>
-                            <a:srgbClr val="282828"/>
-                          </a:solidFill>
-                          <a:latin typeface="Arial"/>
-                        </a:rPr>
-                        <a:t>metasurface retardance error 0.1 rad</a:t>
-                      </a:r>
-                    </a:p>
-                  </a:txBody>
-                  <a:tcPr marL="54864" marR="54864" marT="18288" marB="18288">
-                    <a:solidFill>
-                      <a:srgbClr val="FFFFFF"/>
-                    </a:solidFill>
-                  </a:tcPr>
-                </a:tc>
-                <a:tc>
-                  <a:txBody>
-                    <a:bodyPr wrap="square"/>
-                    <a:lstStyle/>
-                    <a:p>
-                      <a:r>
-                        <a:rPr sz="1100" b="0">
-                          <a:solidFill>
-                            <a:srgbClr val="282828"/>
-                          </a:solidFill>
-                          <a:latin typeface="Arial"/>
-                        </a:rPr>
-                        <a:t>750 pm on a 12 nm figure</a:t>
-                      </a:r>
-                    </a:p>
-                  </a:txBody>
-                  <a:tcPr marL="54864" marR="54864" marT="18288" marB="18288">
-                    <a:solidFill>
-                      <a:srgbClr val="FFFFFF"/>
-                    </a:solidFill>
-                  </a:tcPr>
-                </a:tc>
-                <a:tc>
-                  <a:txBody>
-                    <a:bodyPr wrap="square"/>
-                    <a:lstStyle/>
-                    <a:p>
-                      <a:r>
-                        <a:rPr sz="1100" b="0">
-                          <a:solidFill>
-                            <a:srgbClr val="282828"/>
-                          </a:solidFill>
-                          <a:latin typeface="Arial"/>
-                        </a:rPr>
-                        <a:t>rows 0.9934 / 4 pm, the ideal numbers</a:t>
-                      </a:r>
-                    </a:p>
-                  </a:txBody>
-                  <a:tcPr marL="54864" marR="54864" marT="18288" marB="18288">
-                    <a:solidFill>
-                      <a:srgbClr val="FFFFFF"/>
-                    </a:solidFill>
-                  </a:tcPr>
-                </a:tc>
-              </a:tr>
-              <a:tr h="468630">
-                <a:tc>
-                  <a:txBody>
-                    <a:bodyPr wrap="square"/>
-                    <a:lstStyle/>
-                    <a:p>
-                      <a:r>
-                        <a:rPr sz="1100" b="0">
-                          <a:solidFill>
-                            <a:srgbClr val="282828"/>
-                          </a:solidFill>
-                          <a:latin typeface="Arial"/>
-                        </a:rPr>
-                        <a:t>vector Zernike</a:t>
-                      </a:r>
-                    </a:p>
-                  </a:txBody>
-                  <a:tcPr marL="54864" marR="54864" marT="18288" marB="18288">
-                    <a:solidFill>
-                      <a:srgbClr val="ECF1F6"/>
-                    </a:solidFill>
-                  </a:tcPr>
-                </a:tc>
-                <a:tc>
-                  <a:txBody>
-                    <a:bodyPr wrap="square"/>
-                    <a:lstStyle/>
-                    <a:p>
-                      <a:r>
-                        <a:rPr sz="1100" b="0">
-                          <a:solidFill>
-                            <a:srgbClr val="282828"/>
-                          </a:solidFill>
-                          <a:latin typeface="Arial"/>
-                        </a:rPr>
-                        <a:t>the arm's polarization (six tilted glass faces)</a:t>
-                      </a:r>
-                    </a:p>
-                  </a:txBody>
-                  <a:tcPr marL="54864" marR="54864" marT="18288" marB="18288">
-                    <a:solidFill>
-                      <a:srgbClr val="ECF1F6"/>
-                    </a:solidFill>
-                  </a:tcPr>
-                </a:tc>
-                <a:tc>
-                  <a:txBody>
-                    <a:bodyPr wrap="square"/>
-                    <a:lstStyle/>
-                    <a:p>
-                      <a:r>
-                        <a:rPr sz="1100" b="0">
-                          <a:solidFill>
-                            <a:srgbClr val="282828"/>
-                          </a:solidFill>
-                          <a:latin typeface="Arial"/>
-                        </a:rPr>
-                        <a:t>9 pm on 12 nm; 6 nm per rad of channel phase</a:t>
-                      </a:r>
-                    </a:p>
-                  </a:txBody>
-                  <a:tcPr marL="54864" marR="54864" marT="18288" marB="18288">
-                    <a:solidFill>
-                      <a:srgbClr val="ECF1F6"/>
-                    </a:solidFill>
-                  </a:tcPr>
-                </a:tc>
-                <a:tc>
-                  <a:txBody>
-                    <a:bodyPr wrap="square"/>
-                    <a:lstStyle/>
-                    <a:p>
-                      <a:r>
-                        <a:rPr sz="1100" b="0">
-                          <a:solidFill>
-                            <a:srgbClr val="282828"/>
-                          </a:solidFill>
-                          <a:latin typeface="Arial"/>
-                        </a:rPr>
-                        <a:t>nothing to 0.1 rad; 10% gain loss at 0.3</a:t>
-                      </a:r>
-                    </a:p>
-                  </a:txBody>
-                  <a:tcPr marL="54864" marR="54864" marT="18288" marB="18288">
-                    <a:solidFill>
-                      <a:srgbClr val="ECF1F6"/>
-                    </a:solidFill>
-                  </a:tcPr>
-                </a:tc>
-              </a:tr>
-              <a:tr h="468630">
-                <a:tc>
-                  <a:txBody>
-                    <a:bodyPr wrap="square"/>
-                    <a:lstStyle/>
-                    <a:p>
-                      <a:r>
-                        <a:rPr sz="1100" b="0">
-                          <a:solidFill>
-                            <a:srgbClr val="282828"/>
-                          </a:solidFill>
-                          <a:latin typeface="Arial"/>
-                        </a:rPr>
-                        <a:t>vector Zernike</a:t>
-                      </a:r>
-                    </a:p>
-                  </a:txBody>
-                  <a:tcPr marL="54864" marR="54864" marT="18288" marB="18288">
-                    <a:solidFill>
-                      <a:srgbClr val="FFFFFF"/>
-                    </a:solidFill>
-                  </a:tcPr>
-                </a:tc>
-                <a:tc>
-                  <a:txBody>
-                    <a:bodyPr wrap="square"/>
-                    <a:lstStyle/>
-                    <a:p>
-                      <a:r>
-                        <a:rPr sz="1100" b="0">
-                          <a:solidFill>
-                            <a:srgbClr val="282828"/>
-                          </a:solidFill>
-                          <a:latin typeface="Arial"/>
-                        </a:rPr>
-                        <a:t>the analyzer: cube extinction; plate error λ/300</a:t>
-                      </a:r>
-                    </a:p>
-                  </a:txBody>
-                  <a:tcPr marL="54864" marR="54864" marT="18288" marB="18288">
-                    <a:solidFill>
-                      <a:srgbClr val="FFFFFF"/>
-                    </a:solidFill>
-                  </a:tcPr>
-                </a:tc>
-                <a:tc>
-                  <a:txBody>
-                    <a:bodyPr wrap="square"/>
-                    <a:lstStyle/>
-                    <a:p>
-                      <a:r>
-                        <a:rPr sz="1100" b="0">
-                          <a:solidFill>
-                            <a:srgbClr val="282828"/>
-                          </a:solidFill>
-                          <a:latin typeface="Arial"/>
-                        </a:rPr>
-                        <a:t>3.5 pm; 165 pm (1.4% of the figure)</a:t>
-                      </a:r>
-                    </a:p>
-                  </a:txBody>
-                  <a:tcPr marL="54864" marR="54864" marT="18288" marB="18288">
-                    <a:solidFill>
-                      <a:srgbClr val="FFFFFF"/>
-                    </a:solidFill>
-                  </a:tcPr>
-                </a:tc>
-                <a:tc>
-                  <a:txBody>
-                    <a:bodyPr wrap="square"/>
-                    <a:lstStyle/>
-                    <a:p>
-                      <a:r>
-                        <a:rPr sz="1100" b="0">
-                          <a:solidFill>
-                            <a:srgbClr val="282828"/>
-                          </a:solidFill>
-                          <a:latin typeface="Arial"/>
-                        </a:rPr>
-                        <a:t>gain within 0.7%, floors within 4 pm</a:t>
-                      </a:r>
-                    </a:p>
-                  </a:txBody>
-                  <a:tcPr marL="54864" marR="54864" marT="18288" marB="18288">
-                    <a:solidFill>
-                      <a:srgbClr val="FFFFFF"/>
-                    </a:solidFill>
-                  </a:tcPr>
-                </a:tc>
-              </a:tr>
-              <a:tr h="468630">
-                <a:tc>
-                  <a:txBody>
-                    <a:bodyPr wrap="square"/>
-                    <a:lstStyle/>
-                    <a:p>
-                      <a:r>
-                        <a:rPr sz="1100" b="0">
-                          <a:solidFill>
-                            <a:srgbClr val="282828"/>
-                          </a:solidFill>
-                          <a:latin typeface="Arial"/>
-                        </a:rPr>
-                        <a:t>pinhole</a:t>
-                      </a:r>
-                    </a:p>
-                  </a:txBody>
-                  <a:tcPr marL="54864" marR="54864" marT="18288" marB="18288">
-                    <a:solidFill>
-                      <a:srgbClr val="ECF1F6"/>
-                    </a:solidFill>
-                  </a:tcPr>
-                </a:tc>
-                <a:tc>
-                  <a:txBody>
-                    <a:bodyPr wrap="square"/>
-                    <a:lstStyle/>
-                    <a:p>
-                      <a:r>
-                        <a:rPr sz="1100" b="0">
-                          <a:solidFill>
-                            <a:srgbClr val="282828"/>
-                          </a:solidFill>
-                          <a:latin typeface="Arial"/>
-                        </a:rPr>
-                        <a:t>2% step error</a:t>
-                      </a:r>
-                    </a:p>
-                  </a:txBody>
-                  <a:tcPr marL="54864" marR="54864" marT="18288" marB="18288">
-                    <a:solidFill>
-                      <a:srgbClr val="ECF1F6"/>
-                    </a:solidFill>
-                  </a:tcPr>
-                </a:tc>
-                <a:tc>
-                  <a:txBody>
-                    <a:bodyPr wrap="square"/>
-                    <a:lstStyle/>
-                    <a:p>
-                      <a:r>
-                        <a:rPr sz="1100" b="0">
-                          <a:solidFill>
-                            <a:srgbClr val="282828"/>
-                          </a:solidFill>
-                          <a:latin typeface="Arial"/>
-                        </a:rPr>
-                        <a:t>4.9 pm with the five-frame scan (421 pm with four-step least squares)</a:t>
-                      </a:r>
-                    </a:p>
-                  </a:txBody>
-                  <a:tcPr marL="54864" marR="54864" marT="18288" marB="18288">
-                    <a:solidFill>
-                      <a:srgbClr val="ECF1F6"/>
-                    </a:solidFill>
-                  </a:tcPr>
-                </a:tc>
-                <a:tc>
-                  <a:txBody>
-                    <a:bodyPr wrap="square"/>
-                    <a:lstStyle/>
-                    <a:p>
-                      <a:r>
-                        <a:rPr sz="1100" b="0">
-                          <a:solidFill>
-                            <a:srgbClr val="282828"/>
-                          </a:solidFill>
-                          <a:latin typeface="Arial"/>
-                        </a:rPr>
-                        <a:t>differential rows error-free to the digit</a:t>
-                      </a:r>
-                    </a:p>
-                  </a:txBody>
-                  <a:tcPr marL="54864" marR="54864" marT="18288" marB="18288">
-                    <a:solidFill>
-                      <a:srgbClr val="ECF1F6"/>
-                    </a:solidFill>
-                  </a:tcPr>
-                </a:tc>
-              </a:tr>
-              <a:tr h="468630">
-                <a:tc>
-                  <a:txBody>
-                    <a:bodyPr wrap="square"/>
-                    <a:lstStyle/>
-                    <a:p>
-                      <a:r>
-                        <a:rPr sz="1100" b="0">
-                          <a:solidFill>
-                            <a:srgbClr val="282828"/>
-                          </a:solidFill>
-                          <a:latin typeface="Arial"/>
-                        </a:rPr>
-                        <a:t>pinhole, P/SRI</a:t>
-                      </a:r>
-                    </a:p>
-                  </a:txBody>
-                  <a:tcPr marL="54864" marR="54864" marT="18288" marB="18288">
-                    <a:solidFill>
-                      <a:srgbClr val="FFFFFF"/>
-                    </a:solidFill>
-                  </a:tcPr>
-                </a:tc>
-                <a:tc>
-                  <a:txBody>
-                    <a:bodyPr wrap="square"/>
-                    <a:lstStyle/>
-                    <a:p>
-                      <a:r>
-                        <a:rPr sz="1100" b="0">
-                          <a:solidFill>
-                            <a:srgbClr val="282828"/>
-                          </a:solidFill>
-                          <a:latin typeface="Arial"/>
-                        </a:rPr>
-                        <a:t>camera bias drifting within a scan</a:t>
-                      </a:r>
-                    </a:p>
-                  </a:txBody>
-                  <a:tcPr marL="54864" marR="54864" marT="18288" marB="18288">
-                    <a:solidFill>
-                      <a:srgbClr val="FFFFFF"/>
-                    </a:solidFill>
-                  </a:tcPr>
-                </a:tc>
-                <a:tc>
-                  <a:txBody>
-                    <a:bodyPr wrap="square"/>
-                    <a:lstStyle/>
-                    <a:p>
-                      <a:r>
-                        <a:rPr sz="1100" b="0">
-                          <a:solidFill>
-                            <a:srgbClr val="282828"/>
-                          </a:solidFill>
-                          <a:latin typeface="Arial"/>
-                        </a:rPr>
-                        <a:t>5.3 / 10.7 pm at 1e15 (the linear Zernike: 10.8 nm)</a:t>
-                      </a:r>
-                    </a:p>
-                  </a:txBody>
-                  <a:tcPr marL="54864" marR="54864" marT="18288" marB="18288">
-                    <a:solidFill>
-                      <a:srgbClr val="FFFFFF"/>
-                    </a:solidFill>
-                  </a:tcPr>
-                </a:tc>
-                <a:tc>
-                  <a:txBody>
-                    <a:bodyPr wrap="square"/>
-                    <a:lstStyle/>
-                    <a:p>
-                      <a:r>
-                        <a:rPr sz="1100" b="0">
-                          <a:solidFill>
-                            <a:srgbClr val="282828"/>
-                          </a:solidFill>
-                          <a:latin typeface="Arial"/>
-                        </a:rPr>
-                        <a:t>—</a:t>
-                      </a:r>
-                    </a:p>
-                  </a:txBody>
-                  <a:tcPr marL="54864" marR="54864" marT="18288" marB="18288">
-                    <a:solidFill>
-                      <a:srgbClr val="FFFFFF"/>
-                    </a:solidFill>
-                  </a:tcPr>
-                </a:tc>
-              </a:tr>
-              <a:tr h="468630">
-                <a:tc>
-                  <a:txBody>
-                    <a:bodyPr wrap="square"/>
-                    <a:lstStyle/>
-                    <a:p>
-                      <a:r>
-                        <a:rPr sz="1100" b="0">
-                          <a:solidFill>
-                            <a:srgbClr val="282828"/>
-                          </a:solidFill>
-                          <a:latin typeface="Arial"/>
-                        </a:rPr>
-                        <a:t>P/SRI</a:t>
-                      </a:r>
-                    </a:p>
-                  </a:txBody>
-                  <a:tcPr marL="54864" marR="54864" marT="18288" marB="18288">
-                    <a:solidFill>
-                      <a:srgbClr val="ECF1F6"/>
-                    </a:solidFill>
-                  </a:tcPr>
-                </a:tc>
-                <a:tc>
-                  <a:txBody>
-                    <a:bodyPr wrap="square"/>
-                    <a:lstStyle/>
-                    <a:p>
-                      <a:r>
-                        <a:rPr sz="1100" b="0">
-                          <a:solidFill>
-                            <a:srgbClr val="282828"/>
-                          </a:solidFill>
-                          <a:latin typeface="Arial"/>
-                        </a:rPr>
-                        <a:t>its own reference arm walking</a:t>
-                      </a:r>
-                    </a:p>
-                  </a:txBody>
-                  <a:tcPr marL="54864" marR="54864" marT="18288" marB="18288">
-                    <a:solidFill>
-                      <a:srgbClr val="ECF1F6"/>
-                    </a:solidFill>
-                  </a:tcPr>
-                </a:tc>
-                <a:tc>
-                  <a:txBody>
-                    <a:bodyPr wrap="square"/>
-                    <a:lstStyle/>
-                    <a:p>
-                      <a:r>
-                        <a:rPr sz="1100" b="0">
-                          <a:solidFill>
-                            <a:srgbClr val="282828"/>
-                          </a:solidFill>
-                          <a:latin typeface="Arial"/>
-                        </a:rPr>
-                        <a:t>4% more light over a hundredfold range of walk</a:t>
-                      </a:r>
-                    </a:p>
-                  </a:txBody>
-                  <a:tcPr marL="54864" marR="54864" marT="18288" marB="18288">
-                    <a:solidFill>
-                      <a:srgbClr val="ECF1F6"/>
-                    </a:solidFill>
-                  </a:tcPr>
-                </a:tc>
-                <a:tc>
-                  <a:txBody>
-                    <a:bodyPr wrap="square"/>
-                    <a:lstStyle/>
-                    <a:p>
-                      <a:r>
-                        <a:rPr sz="1100" b="0">
-                          <a:solidFill>
-                            <a:srgbClr val="282828"/>
-                          </a:solidFill>
-                          <a:latin typeface="Arial"/>
-                        </a:rPr>
-                        <a:t>a path change is piston, the mode the estimator nulls</a:t>
-                      </a:r>
-                    </a:p>
-                  </a:txBody>
-                  <a:tcPr marL="54864" marR="54864" marT="18288" marB="18288">
-                    <a:solidFill>
-                      <a:srgbClr val="ECF1F6"/>
+              <a:tr h="434340">
+                <a:tc>
+                  <a:txBody>
+                    <a:bodyPr wrap="square"/>
+                    <a:lstStyle/>
+                    <a:p>
+                      <a:r>
+                        <a:rPr sz="1000" b="0">
+                          <a:solidFill>
+                            <a:srgbClr val="282828"/>
+                          </a:solidFill>
+                          <a:latin typeface="Arial"/>
+                        </a:rPr>
+                        <a:t>hold, one number</a:t>
+                      </a:r>
+                    </a:p>
+                  </a:txBody>
+                  <a:tcPr marL="54864" marR="54864" marT="18288" marB="18288">
+                    <a:solidFill>
+                      <a:srgbClr val="FFFFFF"/>
+                    </a:solidFill>
+                  </a:tcPr>
+                </a:tc>
+                <a:tc>
+                  <a:txBody>
+                    <a:bodyPr wrap="square"/>
+                    <a:lstStyle/>
+                    <a:p>
+                      <a:r>
+                        <a:rPr sz="1000" b="0">
+                          <a:solidFill>
+                            <a:srgbClr val="282828"/>
+                          </a:solidFill>
+                          <a:latin typeface="Arial"/>
+                        </a:rPr>
+                        <a:t>photons per cycle that hold 3 pm rms in a 60-cycle loop at gain 0.5</a:t>
+                      </a:r>
+                    </a:p>
+                  </a:txBody>
+                  <a:tcPr marL="54864" marR="54864" marT="18288" marB="18288">
+                    <a:solidFill>
+                      <a:srgbClr val="FFFFFF"/>
                     </a:solidFill>
                   </a:tcPr>
                 </a:tc>
@@ -16444,14 +16549,14 @@
       </p:graphicFrame>
       <p:sp>
         <p:nvSpPr>
-          <p:cNvPr id="5" name="TextBox 4"/>
+          <p:cNvPr id="6" name="TextBox 5"/>
           <p:cNvSpPr txBox="1"/>
           <p:nvPr/>
         </p:nvSpPr>
         <p:spPr>
           <a:xfrm>
-            <a:off x="411480" y="6222492"/>
-            <a:ext cx="11368735" cy="274320"/>
+            <a:off x="6400800" y="4233672"/>
+            <a:ext cx="5394960" cy="274320"/>
           </a:xfrm>
           <a:prstGeom prst="rect">
             <a:avLst/>
@@ -16476,7 +16581,7 @@
                 </a:solidFill>
                 <a:latin typeface="Arial"/>
               </a:rPr>
-              <a:t>Nothing is left open on the vector sensor's line.  Run tags lens_deck_se2/se5, loop_lens_cam, tg_psi_dm, tg_psi_dm_v2, v2g, v3arm, an193, pdi193se_sh5, pcam193ri, rw193.</a:t>
+              <a:t>Measuring a change costs two measurements.  The 96×96 at 385 detector pixels per pupil is the flight-like sampling; most rows here are at 193 pixels, which the sampling study showed reads the same numbers.</a:t>
             </a:r>
           </a:p>
         </p:txBody>
@@ -16489,7 +16594,7 @@
 </p:sld>
 </file>
 
-<file path=ppt/slides/slide3.xml><?xml version="1.0" encoding="utf-8"?>
+<file path=ppt/slides/slide30.xml><?xml version="1.0" encoding="utf-8"?>
 <p:sld xmlns:a="http://schemas.openxmlformats.org/drawingml/2006/main" xmlns:p="http://schemas.openxmlformats.org/presentationml/2006/main" xmlns:r="http://schemas.openxmlformats.org/officeDocument/2006/relationships">
   <p:cSld>
     <p:spTree>
@@ -16533,7 +16638,7 @@
                 </a:solidFill>
                 <a:latin typeface="Arial"/>
               </a:rPr>
-              <a:t>The three jobs, and how each is scored</a:t>
+              <a:t>What can spoil each reading, priced</a:t>
             </a:r>
           </a:p>
           <a:p>
@@ -16549,7 +16654,7 @@
                 </a:solidFill>
                 <a:latin typeface="Arial"/>
               </a:rPr>
-              <a:t>Measure the mirror's surface to picometers; capture its post-launch shape, 100-200 nm of wavefront, into the servo's reach; hold it there in a servo</a:t>
+              <a:t>Every systematic we could model is either calibrated by the response matrix measured through the sensor, or shown small; one line per approach</a:t>
             </a:r>
           </a:p>
         </p:txBody>
@@ -16598,104 +16703,17 @@
           </a:p>
         </p:txBody>
       </p:sp>
-      <p:sp>
-        <p:nvSpPr>
-          <p:cNvPr id="4" name="TextBox 3"/>
-          <p:cNvSpPr txBox="1"/>
-          <p:nvPr/>
-        </p:nvSpPr>
-        <p:spPr>
-          <a:xfrm>
-            <a:off x="411480" y="1298448"/>
-            <a:ext cx="5806440" cy="274320"/>
-          </a:xfrm>
-          <a:prstGeom prst="rect">
-            <a:avLst/>
-          </a:prstGeom>
-          <a:noFill/>
-        </p:spPr>
-        <p:txBody>
-          <a:bodyPr wrap="square">
-            <a:spAutoFit/>
-          </a:bodyPr>
-          <a:lstStyle/>
-          <a:p>
-            <a:pPr>
-              <a:spcAft>
-                <a:spcPts val="600"/>
-              </a:spcAft>
-            </a:pPr>
-            <a:r>
-              <a:rPr sz="1200" b="0">
-                <a:solidFill>
-                  <a:srgbClr val="282828"/>
-                </a:solidFill>
-                <a:latin typeface="Arial"/>
-              </a:rPr>
-              <a:t>•  The DM: 96×96 actuators on a 1 mm pitch, 96 mm across.  On orbit its surface must stay constant to well under 10 pm, measured often and held by a closed loop.  Every test runs on a random 30 nm rms working surface, not a flat: the gauge never operates at null.</a:t>
-            </a:r>
-          </a:p>
-          <a:p>
-            <a:pPr>
-              <a:spcAft>
-                <a:spcPts val="600"/>
-              </a:spcAft>
-            </a:pPr>
-            <a:r>
-              <a:rPr sz="1200" b="0">
-                <a:solidFill>
-                  <a:srgbClr val="282828"/>
-                </a:solidFill>
-                <a:latin typeface="Arial"/>
-              </a:rPr>
-              <a:t>•  Job 1, measure: read a change of 10 nm on one actuator, of 1 nm on 47 actuators, and a dense random 10 nm pattern, on the 30 nm surface with the response matrix measured on it; and keep that accuracy as the surface moves away from the calibration (capture range).</a:t>
-            </a:r>
-          </a:p>
-          <a:p>
-            <a:pPr>
-              <a:spcAft>
-                <a:spcPts val="600"/>
-              </a:spcAft>
-            </a:pPr>
-            <a:r>
-              <a:rPr sz="1200" b="0">
-                <a:solidFill>
-                  <a:srgbClr val="282828"/>
-                </a:solidFill>
-                <a:latin typeface="Arial"/>
-              </a:rPr>
-              <a:t>•  Job 2, capture: bring the largest possible starting surface, 100-200 nm of wavefront, down to the servo's floor; every phase reading wraps at ±158 nm of surface (±π at 632.8 nm, double pass), so this is a wrapping problem before it is a noise problem.</a:t>
-            </a:r>
-          </a:p>
-          <a:p>
-            <a:pPr>
-              <a:spcAft>
-                <a:spcPts val="600"/>
-              </a:spcAft>
-            </a:pPr>
-            <a:r>
-              <a:rPr sz="1200" b="0">
-                <a:solidFill>
-                  <a:srgbClr val="282828"/>
-                </a:solidFill>
-                <a:latin typeface="Arial"/>
-              </a:rPr>
-              <a:t>•  Job 3, hold: the servo at picometers on the 30 nm rms working surface, its set point: the light per cycle that holds changes about it to 3 pm rms under a 2 pm per-cycle random walk, and whether the reading leaves a fixed error.</a:t>
-            </a:r>
-          </a:p>
-        </p:txBody>
-      </p:sp>
       <p:graphicFrame>
         <p:nvGraphicFramePr>
-          <p:cNvPr id="5" name="Table 4"/>
+          <p:cNvPr id="4" name="Table 3"/>
           <p:cNvGraphicFramePr>
             <a:graphicFrameLocks noGrp="1"/>
           </p:cNvGraphicFramePr>
           <p:nvPr/>
         </p:nvGraphicFramePr>
         <p:xfrm>
-          <a:off x="6400800" y="1298448"/>
-          <a:ext cx="5394959" cy="2788920"/>
+          <a:off x="411480" y="1298448"/>
+          <a:ext cx="11368733" cy="4777740"/>
         </p:xfrm>
         <a:graphic>
           <a:graphicData uri="http://schemas.openxmlformats.org/drawingml/2006/table">
@@ -16704,23 +16722,25 @@
                 <a:tableStyleId>{5C22544A-7EE6-4342-B048-85BDC9FD1C3A}</a:tableStyleId>
               </a:tblPr>
               <a:tblGrid>
-                <a:gridCol w="844109"/>
-                <a:gridCol w="4550850"/>
+                <a:gridCol w="1889760"/>
+                <a:gridCol w="2093273"/>
+                <a:gridCol w="4107555"/>
+                <a:gridCol w="3278145"/>
               </a:tblGrid>
-              <a:tr h="262890">
-                <a:tc>
-                  <a:txBody>
-                    <a:bodyPr wrap="square"/>
-                    <a:lstStyle/>
-                    <a:p>
-                      <a:r>
-                        <a:rPr sz="1000" b="1">
+              <a:tr h="280035">
+                <a:tc>
+                  <a:txBody>
+                    <a:bodyPr wrap="square"/>
+                    <a:lstStyle/>
+                    <a:p>
+                      <a:r>
+                        <a:rPr sz="1100" b="1">
                           <a:solidFill>
                             <a:srgbClr val="FFFFFF"/>
                           </a:solidFill>
                           <a:latin typeface="Arial"/>
                         </a:rPr>
-                        <a:t>score</a:t>
+                        <a:t>approach</a:t>
                       </a:r>
                     </a:p>
                   </a:txBody>
@@ -16736,13 +16756,13 @@
                     <a:lstStyle/>
                     <a:p>
                       <a:r>
-                        <a:rPr sz="1000" b="1">
+                        <a:rPr sz="1100" b="1">
                           <a:solidFill>
                             <a:srgbClr val="FFFFFF"/>
                           </a:solidFill>
                           <a:latin typeface="Arial"/>
                         </a:rPr>
-                        <a:t>meaning</a:t>
+                        <a:t>term</a:t>
                       </a:r>
                     </a:p>
                   </a:txBody>
@@ -16752,43 +16772,131 @@
                     </a:solidFill>
                   </a:tcPr>
                 </a:tc>
+                <a:tc>
+                  <a:txBody>
+                    <a:bodyPr wrap="square"/>
+                    <a:lstStyle/>
+                    <a:p>
+                      <a:r>
+                        <a:rPr sz="1100" b="1">
+                          <a:solidFill>
+                            <a:srgbClr val="FFFFFF"/>
+                          </a:solidFill>
+                          <a:latin typeface="Arial"/>
+                        </a:rPr>
+                        <a:t>uncalibrated size</a:t>
+                      </a:r>
+                    </a:p>
+                  </a:txBody>
+                  <a:tcPr marL="54864" marR="54864" marT="18288" marB="18288">
+                    <a:solidFill>
+                      <a:srgbClr val="1F4E79"/>
+                    </a:solidFill>
+                  </a:tcPr>
+                </a:tc>
+                <a:tc>
+                  <a:txBody>
+                    <a:bodyPr wrap="square"/>
+                    <a:lstStyle/>
+                    <a:p>
+                      <a:r>
+                        <a:rPr sz="1100" b="1">
+                          <a:solidFill>
+                            <a:srgbClr val="FFFFFF"/>
+                          </a:solidFill>
+                          <a:latin typeface="Arial"/>
+                        </a:rPr>
+                        <a:t>after the matrix measured on the surface</a:t>
+                      </a:r>
+                    </a:p>
+                  </a:txBody>
+                  <a:tcPr marL="54864" marR="54864" marT="18288" marB="18288">
+                    <a:solidFill>
+                      <a:srgbClr val="1F4E79"/>
+                    </a:solidFill>
+                  </a:tcPr>
+                </a:tc>
               </a:tr>
-              <a:tr h="434340">
-                <a:tc>
-                  <a:txBody>
-                    <a:bodyPr wrap="square"/>
-                    <a:lstStyle/>
-                    <a:p>
-                      <a:r>
-                        <a:rPr sz="1000" b="0">
-                          <a:solidFill>
-                            <a:srgbClr val="282828"/>
-                          </a:solidFill>
-                          <a:latin typeface="Arial"/>
-                        </a:rPr>
-                        <a:t>gain</a:t>
-                      </a:r>
-                    </a:p>
-                  </a:txBody>
-                  <a:tcPr marL="54864" marR="54864" marT="18288" marB="18288">
-                    <a:solidFill>
-                      <a:srgbClr val="FFFFFF"/>
-                    </a:solidFill>
-                  </a:tcPr>
-                </a:tc>
-                <a:tc>
-                  <a:txBody>
-                    <a:bodyPr wrap="square"/>
-                    <a:lstStyle/>
-                    <a:p>
-                      <a:r>
-                        <a:rPr sz="1000" b="0">
-                          <a:solidFill>
-                            <a:srgbClr val="282828"/>
-                          </a:solidFill>
-                          <a:latin typeface="Arial"/>
-                        </a:rPr>
-                        <a:t>recovered change ÷ true change; 1.0 is perfect; quoted after calibration</a:t>
+              <a:tr h="280035">
+                <a:tc>
+                  <a:txBody>
+                    <a:bodyPr wrap="square"/>
+                    <a:lstStyle/>
+                    <a:p>
+                      <a:r>
+                        <a:rPr sz="1100" b="0">
+                          <a:solidFill>
+                            <a:srgbClr val="282828"/>
+                          </a:solidFill>
+                          <a:latin typeface="Arial"/>
+                        </a:rPr>
+                        <a:t>interferometer</a:t>
+                      </a:r>
+                    </a:p>
+                  </a:txBody>
+                  <a:tcPr marL="54864" marR="54864" marT="18288" marB="18288">
+                    <a:solidFill>
+                      <a:srgbClr val="FFFFFF"/>
+                    </a:solidFill>
+                  </a:tcPr>
+                </a:tc>
+                <a:tc>
+                  <a:txBody>
+                    <a:bodyPr wrap="square"/>
+                    <a:lstStyle/>
+                    <a:p>
+                      <a:r>
+                        <a:rPr sz="1100" b="0">
+                          <a:solidFill>
+                            <a:srgbClr val="282828"/>
+                          </a:solidFill>
+                          <a:latin typeface="Arial"/>
+                        </a:rPr>
+                        <a:t>piezo step error 2% / 5%</a:t>
+                      </a:r>
+                    </a:p>
+                  </a:txBody>
+                  <a:tcPr marL="54864" marR="54864" marT="18288" marB="18288">
+                    <a:solidFill>
+                      <a:srgbClr val="FFFFFF"/>
+                    </a:solidFill>
+                  </a:tcPr>
+                </a:tc>
+                <a:tc>
+                  <a:txBody>
+                    <a:bodyPr wrap="square"/>
+                    <a:lstStyle/>
+                    <a:p>
+                      <a:r>
+                        <a:rPr sz="1100" b="0">
+                          <a:solidFill>
+                            <a:srgbClr val="282828"/>
+                          </a:solidFill>
+                          <a:latin typeface="Arial"/>
+                        </a:rPr>
+                        <a:t>gain 0.974 / 0.954; floor 2 → 5 / 9 pm</a:t>
+                      </a:r>
+                    </a:p>
+                  </a:txBody>
+                  <a:tcPr marL="54864" marR="54864" marT="18288" marB="18288">
+                    <a:solidFill>
+                      <a:srgbClr val="FFFFFF"/>
+                    </a:solidFill>
+                  </a:tcPr>
+                </a:tc>
+                <a:tc>
+                  <a:txBody>
+                    <a:bodyPr wrap="square"/>
+                    <a:lstStyle/>
+                    <a:p>
+                      <a:r>
+                        <a:rPr sz="1100" b="0">
+                          <a:solidFill>
+                            <a:srgbClr val="282828"/>
+                          </a:solidFill>
+                          <a:latin typeface="Arial"/>
+                        </a:rPr>
+                        <a:t>common mode in the servo: 5.4e12 vs 5.5e12</a:t>
                       </a:r>
                     </a:p>
                   </a:txBody>
@@ -16799,20 +16907,20 @@
                   </a:tcPr>
                 </a:tc>
               </a:tr>
-              <a:tr h="262890">
-                <a:tc>
-                  <a:txBody>
-                    <a:bodyPr wrap="square"/>
-                    <a:lstStyle/>
-                    <a:p>
-                      <a:r>
-                        <a:rPr sz="1000" b="0">
-                          <a:solidFill>
-                            <a:srgbClr val="282828"/>
-                          </a:solidFill>
-                          <a:latin typeface="Arial"/>
-                        </a:rPr>
-                        <a:t>floor</a:t>
+              <a:tr h="468630">
+                <a:tc>
+                  <a:txBody>
+                    <a:bodyPr wrap="square"/>
+                    <a:lstStyle/>
+                    <a:p>
+                      <a:r>
+                        <a:rPr sz="1100" b="0">
+                          <a:solidFill>
+                            <a:srgbClr val="282828"/>
+                          </a:solidFill>
+                          <a:latin typeface="Arial"/>
+                        </a:rPr>
+                        <a:t>interferometer</a:t>
                       </a:r>
                     </a:p>
                   </a:txBody>
@@ -16828,13 +16936,13 @@
                     <a:lstStyle/>
                     <a:p>
                       <a:r>
-                        <a:rPr sz="1000" b="0">
-                          <a:solidFill>
-                            <a:srgbClr val="282828"/>
-                          </a:solidFill>
-                          <a:latin typeface="Arial"/>
-                        </a:rPr>
-                        <a:t>rms of the actuators that were not changed, in picometers</a:t>
+                        <a:rPr sz="1100" b="0">
+                          <a:solidFill>
+                            <a:srgbClr val="282828"/>
+                          </a:solidFill>
+                          <a:latin typeface="Arial"/>
+                        </a:rPr>
+                        <a:t>camera 1/f walk, 1e-3 of signal within a scan</a:t>
                       </a:r>
                     </a:p>
                   </a:txBody>
@@ -16844,43 +16952,131 @@
                     </a:solidFill>
                   </a:tcPr>
                 </a:tc>
+                <a:tc>
+                  <a:txBody>
+                    <a:bodyPr wrap="square"/>
+                    <a:lstStyle/>
+                    <a:p>
+                      <a:r>
+                        <a:rPr sz="1100" b="0">
+                          <a:solidFill>
+                            <a:srgbClr val="282828"/>
+                          </a:solidFill>
+                          <a:latin typeface="Arial"/>
+                        </a:rPr>
+                        <a:t>+13% light for 3 pm</a:t>
+                      </a:r>
+                    </a:p>
+                  </a:txBody>
+                  <a:tcPr marL="54864" marR="54864" marT="18288" marB="18288">
+                    <a:solidFill>
+                      <a:srgbClr val="ECF1F6"/>
+                    </a:solidFill>
+                  </a:tcPr>
+                </a:tc>
+                <a:tc>
+                  <a:txBody>
+                    <a:bodyPr wrap="square"/>
+                    <a:lstStyle/>
+                    <a:p>
+                      <a:r>
+                        <a:rPr sz="1100" b="0">
+                          <a:solidFill>
+                            <a:srgbClr val="282828"/>
+                          </a:solidFill>
+                          <a:latin typeface="Arial"/>
+                        </a:rPr>
+                        <a:t>—</a:t>
+                      </a:r>
+                    </a:p>
+                  </a:txBody>
+                  <a:tcPr marL="54864" marR="54864" marT="18288" marB="18288">
+                    <a:solidFill>
+                      <a:srgbClr val="ECF1F6"/>
+                    </a:solidFill>
+                  </a:tcPr>
+                </a:tc>
               </a:tr>
-              <a:tr h="262890">
-                <a:tc>
-                  <a:txBody>
-                    <a:bodyPr wrap="square"/>
-                    <a:lstStyle/>
-                    <a:p>
-                      <a:r>
-                        <a:rPr sz="1000" b="0">
-                          <a:solidFill>
-                            <a:srgbClr val="282828"/>
-                          </a:solidFill>
-                          <a:latin typeface="Arial"/>
-                        </a:rPr>
-                        <a:t>SNR</a:t>
-                      </a:r>
-                    </a:p>
-                  </a:txBody>
-                  <a:tcPr marL="54864" marR="54864" marT="18288" marB="18288">
-                    <a:solidFill>
-                      <a:srgbClr val="FFFFFF"/>
-                    </a:solidFill>
-                  </a:tcPr>
-                </a:tc>
-                <a:tc>
-                  <a:txBody>
-                    <a:bodyPr wrap="square"/>
-                    <a:lstStyle/>
-                    <a:p>
-                      <a:r>
-                        <a:rPr sz="1000" b="0">
-                          <a:solidFill>
-                            <a:srgbClr val="282828"/>
-                          </a:solidFill>
-                          <a:latin typeface="Arial"/>
-                        </a:rPr>
-                        <a:t>recovered change ÷ floor; above 5 counts as detected</a:t>
+              <a:tr h="468630">
+                <a:tc>
+                  <a:txBody>
+                    <a:bodyPr wrap="square"/>
+                    <a:lstStyle/>
+                    <a:p>
+                      <a:r>
+                        <a:rPr sz="1100" b="0">
+                          <a:solidFill>
+                            <a:srgbClr val="282828"/>
+                          </a:solidFill>
+                          <a:latin typeface="Arial"/>
+                        </a:rPr>
+                        <a:t>interferometer, snapshot</a:t>
+                      </a:r>
+                    </a:p>
+                  </a:txBody>
+                  <a:tcPr marL="54864" marR="54864" marT="18288" marB="18288">
+                    <a:solidFill>
+                      <a:srgbClr val="FFFFFF"/>
+                    </a:solidFill>
+                  </a:tcPr>
+                </a:tc>
+                <a:tc>
+                  <a:txBody>
+                    <a:bodyPr wrap="square"/>
+                    <a:lstStyle/>
+                    <a:p>
+                      <a:r>
+                        <a:rPr sz="1100" b="0">
+                          <a:solidFill>
+                            <a:srgbClr val="282828"/>
+                          </a:solidFill>
+                          <a:latin typeface="Arial"/>
+                        </a:rPr>
+                        <a:t>splitter diattenuation (plate); cube R_p</a:t>
+                      </a:r>
+                    </a:p>
+                  </a:txBody>
+                  <a:tcPr marL="54864" marR="54864" marT="18288" marB="18288">
+                    <a:solidFill>
+                      <a:srgbClr val="FFFFFF"/>
+                    </a:solidFill>
+                  </a:tcPr>
+                </a:tc>
+                <a:tc>
+                  <a:txBody>
+                    <a:bodyPr wrap="square"/>
+                    <a:lstStyle/>
+                    <a:p>
+                      <a:r>
+                        <a:rPr sz="1100" b="0">
+                          <a:solidFill>
+                            <a:srgbClr val="282828"/>
+                          </a:solidFill>
+                          <a:latin typeface="Arial"/>
+                        </a:rPr>
+                        <a:t>at the built 22.5°: arm rotation 1.56°, gain +0.9% (11.7% at the record's 45°); 2.1% (cube, naive stack)</a:t>
+                      </a:r>
+                    </a:p>
+                  </a:txBody>
+                  <a:tcPr marL="54864" marR="54864" marT="18288" marB="18288">
+                    <a:solidFill>
+                      <a:srgbClr val="FFFFFF"/>
+                    </a:solidFill>
+                  </a:tcPr>
+                </a:tc>
+                <a:tc>
+                  <a:txBody>
+                    <a:bodyPr wrap="square"/>
+                    <a:lstStyle/>
+                    <a:p>
+                      <a:r>
+                        <a:rPr sz="1100" b="0">
+                          <a:solidFill>
+                            <a:srgbClr val="282828"/>
+                          </a:solidFill>
+                          <a:latin typeface="Arial"/>
+                        </a:rPr>
+                        <a:t>residual after a measured matrix 1.4e-3 (lens), 5.5e-4 (mirrors); symmetric stack 0</a:t>
                       </a:r>
                     </a:p>
                   </a:txBody>
@@ -16891,20 +17087,20 @@
                   </a:tcPr>
                 </a:tc>
               </a:tr>
-              <a:tr h="434340">
-                <a:tc>
-                  <a:txBody>
-                    <a:bodyPr wrap="square"/>
-                    <a:lstStyle/>
-                    <a:p>
-                      <a:r>
-                        <a:rPr sz="1000" b="0">
-                          <a:solidFill>
-                            <a:srgbClr val="282828"/>
-                          </a:solidFill>
-                          <a:latin typeface="Arial"/>
-                        </a:rPr>
-                        <a:t>photons per measurement</a:t>
+              <a:tr h="468630">
+                <a:tc>
+                  <a:txBody>
+                    <a:bodyPr wrap="square"/>
+                    <a:lstStyle/>
+                    <a:p>
+                      <a:r>
+                        <a:rPr sz="1100" b="0">
+                          <a:solidFill>
+                            <a:srgbClr val="282828"/>
+                          </a:solidFill>
+                          <a:latin typeface="Arial"/>
+                        </a:rPr>
+                        <a:t>Zernike</a:t>
                       </a:r>
                     </a:p>
                   </a:txBody>
@@ -16920,13 +17116,13 @@
                     <a:lstStyle/>
                     <a:p>
                       <a:r>
-                        <a:rPr sz="1000" b="0">
-                          <a:solidFill>
-                            <a:srgbClr val="282828"/>
-                          </a:solidFill>
-                          <a:latin typeface="Arial"/>
-                        </a:rPr>
-                        <a:t>all frames of one measurement summed; 1e14 photons at 633 nm = 31 µJ = 0.13 s of a 1 mW laser at 25% throughput</a:t>
+                        <a:rPr sz="1100" b="0">
+                          <a:solidFill>
+                            <a:srgbClr val="282828"/>
+                          </a:solidFill>
+                          <a:latin typeface="Arial"/>
+                        </a:rPr>
+                        <a:t>model out of focus (the early model); sampling; color</a:t>
                       </a:r>
                     </a:p>
                   </a:txBody>
@@ -16936,43 +17132,131 @@
                     </a:solidFill>
                   </a:tcPr>
                 </a:tc>
+                <a:tc>
+                  <a:txBody>
+                    <a:bodyPr wrap="square"/>
+                    <a:lstStyle/>
+                    <a:p>
+                      <a:r>
+                        <a:rPr sz="1100" b="0">
+                          <a:solidFill>
+                            <a:srgbClr val="282828"/>
+                          </a:solidFill>
+                          <a:latin typeface="Arial"/>
+                        </a:rPr>
+                        <a:t>floor 744 → 67 pm on correction; dimple needs 6 pixels; one etch reads five colors within 3%</a:t>
+                      </a:r>
+                    </a:p>
+                  </a:txBody>
+                  <a:tcPr marL="54864" marR="54864" marT="18288" marB="18288">
+                    <a:solidFill>
+                      <a:srgbClr val="ECF1F6"/>
+                    </a:solidFill>
+                  </a:tcPr>
+                </a:tc>
+                <a:tc>
+                  <a:txBody>
+                    <a:bodyPr wrap="square"/>
+                    <a:lstStyle/>
+                    <a:p>
+                      <a:r>
+                        <a:rPr sz="1100" b="0">
+                          <a:solidFill>
+                            <a:srgbClr val="282828"/>
+                          </a:solidFill>
+                          <a:latin typeface="Arial"/>
+                        </a:rPr>
+                        <a:t>—</a:t>
+                      </a:r>
+                    </a:p>
+                  </a:txBody>
+                  <a:tcPr marL="54864" marR="54864" marT="18288" marB="18288">
+                    <a:solidFill>
+                      <a:srgbClr val="ECF1F6"/>
+                    </a:solidFill>
+                  </a:tcPr>
+                </a:tc>
               </a:tr>
-              <a:tr h="434340">
-                <a:tc>
-                  <a:txBody>
-                    <a:bodyPr wrap="square"/>
-                    <a:lstStyle/>
-                    <a:p>
-                      <a:r>
-                        <a:rPr sz="1000" b="0">
-                          <a:solidFill>
-                            <a:srgbClr val="282828"/>
-                          </a:solidFill>
-                          <a:latin typeface="Arial"/>
-                        </a:rPr>
-                        <a:t>capture range to 10%</a:t>
-                      </a:r>
-                    </a:p>
-                  </a:txBody>
-                  <a:tcPr marL="54864" marR="54864" marT="18288" marB="18288">
-                    <a:solidFill>
-                      <a:srgbClr val="FFFFFF"/>
-                    </a:solidFill>
-                  </a:tcPr>
-                </a:tc>
-                <a:tc>
-                  <a:txBody>
-                    <a:bodyPr wrap="square"/>
-                    <a:lstStyle/>
-                    <a:p>
-                      <a:r>
-                        <a:rPr sz="1000" b="0">
-                          <a:solidFill>
-                            <a:srgbClr val="282828"/>
-                          </a:solidFill>
-                          <a:latin typeface="Arial"/>
-                        </a:rPr>
-                        <a:t>the largest working surface at which a 10 nm change on the 47 sites reads within 10%, the matrix left as calibrated at 30 nm</a:t>
+              <a:tr h="468630">
+                <a:tc>
+                  <a:txBody>
+                    <a:bodyPr wrap="square"/>
+                    <a:lstStyle/>
+                    <a:p>
+                      <a:r>
+                        <a:rPr sz="1100" b="0">
+                          <a:solidFill>
+                            <a:srgbClr val="282828"/>
+                          </a:solidFill>
+                          <a:latin typeface="Arial"/>
+                        </a:rPr>
+                        <a:t>vector Zernike</a:t>
+                      </a:r>
+                    </a:p>
+                  </a:txBody>
+                  <a:tcPr marL="54864" marR="54864" marT="18288" marB="18288">
+                    <a:solidFill>
+                      <a:srgbClr val="FFFFFF"/>
+                    </a:solidFill>
+                  </a:tcPr>
+                </a:tc>
+                <a:tc>
+                  <a:txBody>
+                    <a:bodyPr wrap="square"/>
+                    <a:lstStyle/>
+                    <a:p>
+                      <a:r>
+                        <a:rPr sz="1100" b="0">
+                          <a:solidFill>
+                            <a:srgbClr val="282828"/>
+                          </a:solidFill>
+                          <a:latin typeface="Arial"/>
+                        </a:rPr>
+                        <a:t>metasurface retardance error 0.1 rad</a:t>
+                      </a:r>
+                    </a:p>
+                  </a:txBody>
+                  <a:tcPr marL="54864" marR="54864" marT="18288" marB="18288">
+                    <a:solidFill>
+                      <a:srgbClr val="FFFFFF"/>
+                    </a:solidFill>
+                  </a:tcPr>
+                </a:tc>
+                <a:tc>
+                  <a:txBody>
+                    <a:bodyPr wrap="square"/>
+                    <a:lstStyle/>
+                    <a:p>
+                      <a:r>
+                        <a:rPr sz="1100" b="0">
+                          <a:solidFill>
+                            <a:srgbClr val="282828"/>
+                          </a:solidFill>
+                          <a:latin typeface="Arial"/>
+                        </a:rPr>
+                        <a:t>750 pm on a 12 nm figure</a:t>
+                      </a:r>
+                    </a:p>
+                  </a:txBody>
+                  <a:tcPr marL="54864" marR="54864" marT="18288" marB="18288">
+                    <a:solidFill>
+                      <a:srgbClr val="FFFFFF"/>
+                    </a:solidFill>
+                  </a:tcPr>
+                </a:tc>
+                <a:tc>
+                  <a:txBody>
+                    <a:bodyPr wrap="square"/>
+                    <a:lstStyle/>
+                    <a:p>
+                      <a:r>
+                        <a:rPr sz="1100" b="0">
+                          <a:solidFill>
+                            <a:srgbClr val="282828"/>
+                          </a:solidFill>
+                          <a:latin typeface="Arial"/>
+                        </a:rPr>
+                        <a:t>rows 0.9934 / 4 pm, the ideal numbers</a:t>
                       </a:r>
                     </a:p>
                   </a:txBody>
@@ -16983,20 +17267,20 @@
                   </a:tcPr>
                 </a:tc>
               </a:tr>
-              <a:tr h="262890">
-                <a:tc>
-                  <a:txBody>
-                    <a:bodyPr wrap="square"/>
-                    <a:lstStyle/>
-                    <a:p>
-                      <a:r>
-                        <a:rPr sz="1000" b="0">
-                          <a:solidFill>
-                            <a:srgbClr val="282828"/>
-                          </a:solidFill>
-                          <a:latin typeface="Arial"/>
-                        </a:rPr>
-                        <a:t>capture</a:t>
+              <a:tr h="468630">
+                <a:tc>
+                  <a:txBody>
+                    <a:bodyPr wrap="square"/>
+                    <a:lstStyle/>
+                    <a:p>
+                      <a:r>
+                        <a:rPr sz="1100" b="0">
+                          <a:solidFill>
+                            <a:srgbClr val="282828"/>
+                          </a:solidFill>
+                          <a:latin typeface="Arial"/>
+                        </a:rPr>
+                        <a:t>vector Zernike</a:t>
                       </a:r>
                     </a:p>
                   </a:txBody>
@@ -17012,13 +17296,13 @@
                     <a:lstStyle/>
                     <a:p>
                       <a:r>
-                        <a:rPr sz="1000" b="0">
-                          <a:solidFill>
-                            <a:srgbClr val="282828"/>
-                          </a:solidFill>
-                          <a:latin typeface="Arial"/>
-                        </a:rPr>
-                        <a:t>the largest starting surface the servo brings to 3 pm</a:t>
+                        <a:rPr sz="1100" b="0">
+                          <a:solidFill>
+                            <a:srgbClr val="282828"/>
+                          </a:solidFill>
+                          <a:latin typeface="Arial"/>
+                        </a:rPr>
+                        <a:t>the arm's polarization (six tilted glass faces)</a:t>
                       </a:r>
                     </a:p>
                   </a:txBody>
@@ -17028,49 +17312,407 @@
                     </a:solidFill>
                   </a:tcPr>
                 </a:tc>
+                <a:tc>
+                  <a:txBody>
+                    <a:bodyPr wrap="square"/>
+                    <a:lstStyle/>
+                    <a:p>
+                      <a:r>
+                        <a:rPr sz="1100" b="0">
+                          <a:solidFill>
+                            <a:srgbClr val="282828"/>
+                          </a:solidFill>
+                          <a:latin typeface="Arial"/>
+                        </a:rPr>
+                        <a:t>9 pm on 12 nm; 6 nm per rad of channel phase</a:t>
+                      </a:r>
+                    </a:p>
+                  </a:txBody>
+                  <a:tcPr marL="54864" marR="54864" marT="18288" marB="18288">
+                    <a:solidFill>
+                      <a:srgbClr val="ECF1F6"/>
+                    </a:solidFill>
+                  </a:tcPr>
+                </a:tc>
+                <a:tc>
+                  <a:txBody>
+                    <a:bodyPr wrap="square"/>
+                    <a:lstStyle/>
+                    <a:p>
+                      <a:r>
+                        <a:rPr sz="1100" b="0">
+                          <a:solidFill>
+                            <a:srgbClr val="282828"/>
+                          </a:solidFill>
+                          <a:latin typeface="Arial"/>
+                        </a:rPr>
+                        <a:t>nothing to 0.1 rad; 10% gain loss at 0.3</a:t>
+                      </a:r>
+                    </a:p>
+                  </a:txBody>
+                  <a:tcPr marL="54864" marR="54864" marT="18288" marB="18288">
+                    <a:solidFill>
+                      <a:srgbClr val="ECF1F6"/>
+                    </a:solidFill>
+                  </a:tcPr>
+                </a:tc>
               </a:tr>
-              <a:tr h="434340">
-                <a:tc>
-                  <a:txBody>
-                    <a:bodyPr wrap="square"/>
-                    <a:lstStyle/>
-                    <a:p>
-                      <a:r>
-                        <a:rPr sz="1000" b="0">
-                          <a:solidFill>
-                            <a:srgbClr val="282828"/>
-                          </a:solidFill>
-                          <a:latin typeface="Arial"/>
-                        </a:rPr>
-                        <a:t>hold, one number</a:t>
-                      </a:r>
-                    </a:p>
-                  </a:txBody>
-                  <a:tcPr marL="54864" marR="54864" marT="18288" marB="18288">
-                    <a:solidFill>
-                      <a:srgbClr val="FFFFFF"/>
-                    </a:solidFill>
-                  </a:tcPr>
-                </a:tc>
-                <a:tc>
-                  <a:txBody>
-                    <a:bodyPr wrap="square"/>
-                    <a:lstStyle/>
-                    <a:p>
-                      <a:r>
-                        <a:rPr sz="1000" b="0">
-                          <a:solidFill>
-                            <a:srgbClr val="282828"/>
-                          </a:solidFill>
-                          <a:latin typeface="Arial"/>
-                        </a:rPr>
-                        <a:t>photons per cycle that hold 3 pm rms in a 60-cycle loop at gain 0.5</a:t>
-                      </a:r>
-                    </a:p>
-                  </a:txBody>
-                  <a:tcPr marL="54864" marR="54864" marT="18288" marB="18288">
-                    <a:solidFill>
-                      <a:srgbClr val="FFFFFF"/>
+              <a:tr h="468630">
+                <a:tc>
+                  <a:txBody>
+                    <a:bodyPr wrap="square"/>
+                    <a:lstStyle/>
+                    <a:p>
+                      <a:r>
+                        <a:rPr sz="1100" b="0">
+                          <a:solidFill>
+                            <a:srgbClr val="282828"/>
+                          </a:solidFill>
+                          <a:latin typeface="Arial"/>
+                        </a:rPr>
+                        <a:t>vector Zernike</a:t>
+                      </a:r>
+                    </a:p>
+                  </a:txBody>
+                  <a:tcPr marL="54864" marR="54864" marT="18288" marB="18288">
+                    <a:solidFill>
+                      <a:srgbClr val="FFFFFF"/>
+                    </a:solidFill>
+                  </a:tcPr>
+                </a:tc>
+                <a:tc>
+                  <a:txBody>
+                    <a:bodyPr wrap="square"/>
+                    <a:lstStyle/>
+                    <a:p>
+                      <a:r>
+                        <a:rPr sz="1100" b="0">
+                          <a:solidFill>
+                            <a:srgbClr val="282828"/>
+                          </a:solidFill>
+                          <a:latin typeface="Arial"/>
+                        </a:rPr>
+                        <a:t>the analyzer: cube extinction; plate error λ/300</a:t>
+                      </a:r>
+                    </a:p>
+                  </a:txBody>
+                  <a:tcPr marL="54864" marR="54864" marT="18288" marB="18288">
+                    <a:solidFill>
+                      <a:srgbClr val="FFFFFF"/>
+                    </a:solidFill>
+                  </a:tcPr>
+                </a:tc>
+                <a:tc>
+                  <a:txBody>
+                    <a:bodyPr wrap="square"/>
+                    <a:lstStyle/>
+                    <a:p>
+                      <a:r>
+                        <a:rPr sz="1100" b="0">
+                          <a:solidFill>
+                            <a:srgbClr val="282828"/>
+                          </a:solidFill>
+                          <a:latin typeface="Arial"/>
+                        </a:rPr>
+                        <a:t>3.5 pm; 165 pm (1.4% of the figure)</a:t>
+                      </a:r>
+                    </a:p>
+                  </a:txBody>
+                  <a:tcPr marL="54864" marR="54864" marT="18288" marB="18288">
+                    <a:solidFill>
+                      <a:srgbClr val="FFFFFF"/>
+                    </a:solidFill>
+                  </a:tcPr>
+                </a:tc>
+                <a:tc>
+                  <a:txBody>
+                    <a:bodyPr wrap="square"/>
+                    <a:lstStyle/>
+                    <a:p>
+                      <a:r>
+                        <a:rPr sz="1100" b="0">
+                          <a:solidFill>
+                            <a:srgbClr val="282828"/>
+                          </a:solidFill>
+                          <a:latin typeface="Arial"/>
+                        </a:rPr>
+                        <a:t>gain within 0.7%, floors within 4 pm</a:t>
+                      </a:r>
+                    </a:p>
+                  </a:txBody>
+                  <a:tcPr marL="54864" marR="54864" marT="18288" marB="18288">
+                    <a:solidFill>
+                      <a:srgbClr val="FFFFFF"/>
+                    </a:solidFill>
+                  </a:tcPr>
+                </a:tc>
+              </a:tr>
+              <a:tr h="468630">
+                <a:tc>
+                  <a:txBody>
+                    <a:bodyPr wrap="square"/>
+                    <a:lstStyle/>
+                    <a:p>
+                      <a:r>
+                        <a:rPr sz="1100" b="0">
+                          <a:solidFill>
+                            <a:srgbClr val="282828"/>
+                          </a:solidFill>
+                          <a:latin typeface="Arial"/>
+                        </a:rPr>
+                        <a:t>pinhole</a:t>
+                      </a:r>
+                    </a:p>
+                  </a:txBody>
+                  <a:tcPr marL="54864" marR="54864" marT="18288" marB="18288">
+                    <a:solidFill>
+                      <a:srgbClr val="ECF1F6"/>
+                    </a:solidFill>
+                  </a:tcPr>
+                </a:tc>
+                <a:tc>
+                  <a:txBody>
+                    <a:bodyPr wrap="square"/>
+                    <a:lstStyle/>
+                    <a:p>
+                      <a:r>
+                        <a:rPr sz="1100" b="0">
+                          <a:solidFill>
+                            <a:srgbClr val="282828"/>
+                          </a:solidFill>
+                          <a:latin typeface="Arial"/>
+                        </a:rPr>
+                        <a:t>2% step error</a:t>
+                      </a:r>
+                    </a:p>
+                  </a:txBody>
+                  <a:tcPr marL="54864" marR="54864" marT="18288" marB="18288">
+                    <a:solidFill>
+                      <a:srgbClr val="ECF1F6"/>
+                    </a:solidFill>
+                  </a:tcPr>
+                </a:tc>
+                <a:tc>
+                  <a:txBody>
+                    <a:bodyPr wrap="square"/>
+                    <a:lstStyle/>
+                    <a:p>
+                      <a:r>
+                        <a:rPr sz="1100" b="0">
+                          <a:solidFill>
+                            <a:srgbClr val="282828"/>
+                          </a:solidFill>
+                          <a:latin typeface="Arial"/>
+                        </a:rPr>
+                        <a:t>4.9 pm with the five-frame scan (421 pm with four-step least squares)</a:t>
+                      </a:r>
+                    </a:p>
+                  </a:txBody>
+                  <a:tcPr marL="54864" marR="54864" marT="18288" marB="18288">
+                    <a:solidFill>
+                      <a:srgbClr val="ECF1F6"/>
+                    </a:solidFill>
+                  </a:tcPr>
+                </a:tc>
+                <a:tc>
+                  <a:txBody>
+                    <a:bodyPr wrap="square"/>
+                    <a:lstStyle/>
+                    <a:p>
+                      <a:r>
+                        <a:rPr sz="1100" b="0">
+                          <a:solidFill>
+                            <a:srgbClr val="282828"/>
+                          </a:solidFill>
+                          <a:latin typeface="Arial"/>
+                        </a:rPr>
+                        <a:t>differential rows error-free to the digit</a:t>
+                      </a:r>
+                    </a:p>
+                  </a:txBody>
+                  <a:tcPr marL="54864" marR="54864" marT="18288" marB="18288">
+                    <a:solidFill>
+                      <a:srgbClr val="ECF1F6"/>
+                    </a:solidFill>
+                  </a:tcPr>
+                </a:tc>
+              </a:tr>
+              <a:tr h="468630">
+                <a:tc>
+                  <a:txBody>
+                    <a:bodyPr wrap="square"/>
+                    <a:lstStyle/>
+                    <a:p>
+                      <a:r>
+                        <a:rPr sz="1100" b="0">
+                          <a:solidFill>
+                            <a:srgbClr val="282828"/>
+                          </a:solidFill>
+                          <a:latin typeface="Arial"/>
+                        </a:rPr>
+                        <a:t>pinhole, P/SRI</a:t>
+                      </a:r>
+                    </a:p>
+                  </a:txBody>
+                  <a:tcPr marL="54864" marR="54864" marT="18288" marB="18288">
+                    <a:solidFill>
+                      <a:srgbClr val="FFFFFF"/>
+                    </a:solidFill>
+                  </a:tcPr>
+                </a:tc>
+                <a:tc>
+                  <a:txBody>
+                    <a:bodyPr wrap="square"/>
+                    <a:lstStyle/>
+                    <a:p>
+                      <a:r>
+                        <a:rPr sz="1100" b="0">
+                          <a:solidFill>
+                            <a:srgbClr val="282828"/>
+                          </a:solidFill>
+                          <a:latin typeface="Arial"/>
+                        </a:rPr>
+                        <a:t>camera bias drifting within a scan</a:t>
+                      </a:r>
+                    </a:p>
+                  </a:txBody>
+                  <a:tcPr marL="54864" marR="54864" marT="18288" marB="18288">
+                    <a:solidFill>
+                      <a:srgbClr val="FFFFFF"/>
+                    </a:solidFill>
+                  </a:tcPr>
+                </a:tc>
+                <a:tc>
+                  <a:txBody>
+                    <a:bodyPr wrap="square"/>
+                    <a:lstStyle/>
+                    <a:p>
+                      <a:r>
+                        <a:rPr sz="1100" b="0">
+                          <a:solidFill>
+                            <a:srgbClr val="282828"/>
+                          </a:solidFill>
+                          <a:latin typeface="Arial"/>
+                        </a:rPr>
+                        <a:t>5.3 / 10.7 pm at 1e15 (the linear Zernike: 10.8 nm)</a:t>
+                      </a:r>
+                    </a:p>
+                  </a:txBody>
+                  <a:tcPr marL="54864" marR="54864" marT="18288" marB="18288">
+                    <a:solidFill>
+                      <a:srgbClr val="FFFFFF"/>
+                    </a:solidFill>
+                  </a:tcPr>
+                </a:tc>
+                <a:tc>
+                  <a:txBody>
+                    <a:bodyPr wrap="square"/>
+                    <a:lstStyle/>
+                    <a:p>
+                      <a:r>
+                        <a:rPr sz="1100" b="0">
+                          <a:solidFill>
+                            <a:srgbClr val="282828"/>
+                          </a:solidFill>
+                          <a:latin typeface="Arial"/>
+                        </a:rPr>
+                        <a:t>—</a:t>
+                      </a:r>
+                    </a:p>
+                  </a:txBody>
+                  <a:tcPr marL="54864" marR="54864" marT="18288" marB="18288">
+                    <a:solidFill>
+                      <a:srgbClr val="FFFFFF"/>
+                    </a:solidFill>
+                  </a:tcPr>
+                </a:tc>
+              </a:tr>
+              <a:tr h="468630">
+                <a:tc>
+                  <a:txBody>
+                    <a:bodyPr wrap="square"/>
+                    <a:lstStyle/>
+                    <a:p>
+                      <a:r>
+                        <a:rPr sz="1100" b="0">
+                          <a:solidFill>
+                            <a:srgbClr val="282828"/>
+                          </a:solidFill>
+                          <a:latin typeface="Arial"/>
+                        </a:rPr>
+                        <a:t>P/SRI</a:t>
+                      </a:r>
+                    </a:p>
+                  </a:txBody>
+                  <a:tcPr marL="54864" marR="54864" marT="18288" marB="18288">
+                    <a:solidFill>
+                      <a:srgbClr val="ECF1F6"/>
+                    </a:solidFill>
+                  </a:tcPr>
+                </a:tc>
+                <a:tc>
+                  <a:txBody>
+                    <a:bodyPr wrap="square"/>
+                    <a:lstStyle/>
+                    <a:p>
+                      <a:r>
+                        <a:rPr sz="1100" b="0">
+                          <a:solidFill>
+                            <a:srgbClr val="282828"/>
+                          </a:solidFill>
+                          <a:latin typeface="Arial"/>
+                        </a:rPr>
+                        <a:t>its own reference arm walking</a:t>
+                      </a:r>
+                    </a:p>
+                  </a:txBody>
+                  <a:tcPr marL="54864" marR="54864" marT="18288" marB="18288">
+                    <a:solidFill>
+                      <a:srgbClr val="ECF1F6"/>
+                    </a:solidFill>
+                  </a:tcPr>
+                </a:tc>
+                <a:tc>
+                  <a:txBody>
+                    <a:bodyPr wrap="square"/>
+                    <a:lstStyle/>
+                    <a:p>
+                      <a:r>
+                        <a:rPr sz="1100" b="0">
+                          <a:solidFill>
+                            <a:srgbClr val="282828"/>
+                          </a:solidFill>
+                          <a:latin typeface="Arial"/>
+                        </a:rPr>
+                        <a:t>4% more light over a hundredfold range of walk</a:t>
+                      </a:r>
+                    </a:p>
+                  </a:txBody>
+                  <a:tcPr marL="54864" marR="54864" marT="18288" marB="18288">
+                    <a:solidFill>
+                      <a:srgbClr val="ECF1F6"/>
+                    </a:solidFill>
+                  </a:tcPr>
+                </a:tc>
+                <a:tc>
+                  <a:txBody>
+                    <a:bodyPr wrap="square"/>
+                    <a:lstStyle/>
+                    <a:p>
+                      <a:r>
+                        <a:rPr sz="1100" b="0">
+                          <a:solidFill>
+                            <a:srgbClr val="282828"/>
+                          </a:solidFill>
+                          <a:latin typeface="Arial"/>
+                        </a:rPr>
+                        <a:t>a path change is piston, the mode the estimator nulls</a:t>
+                      </a:r>
+                    </a:p>
+                  </a:txBody>
+                  <a:tcPr marL="54864" marR="54864" marT="18288" marB="18288">
+                    <a:solidFill>
+                      <a:srgbClr val="ECF1F6"/>
                     </a:solidFill>
                   </a:tcPr>
                 </a:tc>
@@ -17081,14 +17723,14 @@
       </p:graphicFrame>
       <p:sp>
         <p:nvSpPr>
-          <p:cNvPr id="6" name="TextBox 5"/>
+          <p:cNvPr id="5" name="TextBox 4"/>
           <p:cNvSpPr txBox="1"/>
           <p:nvPr/>
         </p:nvSpPr>
         <p:spPr>
           <a:xfrm>
-            <a:off x="6400800" y="4233672"/>
-            <a:ext cx="5394960" cy="274320"/>
+            <a:off x="411480" y="6222492"/>
+            <a:ext cx="11368735" cy="274320"/>
           </a:xfrm>
           <a:prstGeom prst="rect">
             <a:avLst/>
@@ -17113,7 +17755,7 @@
                 </a:solidFill>
                 <a:latin typeface="Arial"/>
               </a:rPr>
-              <a:t>Measuring a change costs two measurements.  The 96×96 at 385 detector pixels per pupil is the flight-like sampling; most rows here are at 193 pixels, which the sampling study showed reads the same numbers.</a:t>
+              <a:t>Nothing is left open on the vector sensor's line.  Run tags lens_deck_se2/se5, loop_lens_cam, tg_psi_dm, tg_psi_dm_v2, v2g, v3arm, an193, pdi193se_sh5, pcam193ri, rw193.</a:t>
             </a:r>
           </a:p>
         </p:txBody>
@@ -17126,7 +17768,7 @@
 </p:sld>
 </file>
 
-<file path=ppt/slides/slide30.xml><?xml version="1.0" encoding="utf-8"?>
+<file path=ppt/slides/slide31.xml><?xml version="1.0" encoding="utf-8"?>
 <p:sld xmlns:a="http://schemas.openxmlformats.org/drawingml/2006/main" xmlns:p="http://schemas.openxmlformats.org/presentationml/2006/main" xmlns:r="http://schemas.openxmlformats.org/officeDocument/2006/relationships">
   <p:cSld>
     <p:spTree>
@@ -17408,7 +18050,7 @@
 </p:sld>
 </file>
 
-<file path=ppt/slides/slide31.xml><?xml version="1.0" encoding="utf-8"?>
+<file path=ppt/slides/slide32.xml><?xml version="1.0" encoding="utf-8"?>
 <p:sld xmlns:a="http://schemas.openxmlformats.org/drawingml/2006/main" xmlns:p="http://schemas.openxmlformats.org/presentationml/2006/main" xmlns:r="http://schemas.openxmlformats.org/officeDocument/2006/relationships">
   <p:cSld>
     <p:spTree>
@@ -17627,7 +18269,7 @@
 </p:sld>
 </file>
 
-<file path=ppt/slides/slide32.xml><?xml version="1.0" encoding="utf-8"?>
+<file path=ppt/slides/slide33.xml><?xml version="1.0" encoding="utf-8"?>
 <p:sld xmlns:a="http://schemas.openxmlformats.org/drawingml/2006/main" xmlns:p="http://schemas.openxmlformats.org/presentationml/2006/main" xmlns:r="http://schemas.openxmlformats.org/officeDocument/2006/relationships">
   <p:cSld>
     <p:spTree>
@@ -18273,7 +18915,7 @@
 </p:sld>
 </file>
 
-<file path=ppt/slides/slide33.xml><?xml version="1.0" encoding="utf-8"?>
+<file path=ppt/slides/slide34.xml><?xml version="1.0" encoding="utf-8"?>
 <p:sld xmlns:a="http://schemas.openxmlformats.org/drawingml/2006/main" xmlns:p="http://schemas.openxmlformats.org/presentationml/2006/main" xmlns:r="http://schemas.openxmlformats.org/officeDocument/2006/relationships">
   <p:cSld>
     <p:spTree>
@@ -18492,7 +19134,7 @@
 </p:sld>
 </file>
 
-<file path=ppt/slides/slide34.xml><?xml version="1.0" encoding="utf-8"?>
+<file path=ppt/slides/slide35.xml><?xml version="1.0" encoding="utf-8"?>
 <p:sld xmlns:a="http://schemas.openxmlformats.org/drawingml/2006/main" xmlns:p="http://schemas.openxmlformats.org/presentationml/2006/main" xmlns:r="http://schemas.openxmlformats.org/officeDocument/2006/relationships">
   <p:cSld>
     <p:spTree>
@@ -19017,7 +19659,7 @@
 </p:sld>
 </file>
 
-<file path=ppt/slides/slide35.xml><?xml version="1.0" encoding="utf-8"?>
+<file path=ppt/slides/slide36.xml><?xml version="1.0" encoding="utf-8"?>
 <p:sld xmlns:a="http://schemas.openxmlformats.org/drawingml/2006/main" xmlns:p="http://schemas.openxmlformats.org/presentationml/2006/main" xmlns:r="http://schemas.openxmlformats.org/officeDocument/2006/relationships">
   <p:cSld>
     <p:spTree>
@@ -19269,7 +19911,7 @@
 </p:sld>
 </file>
 
-<file path=ppt/slides/slide36.xml><?xml version="1.0" encoding="utf-8"?>
+<file path=ppt/slides/slide37.xml><?xml version="1.0" encoding="utf-8"?>
 <p:sld xmlns:a="http://schemas.openxmlformats.org/drawingml/2006/main" xmlns:p="http://schemas.openxmlformats.org/presentationml/2006/main" xmlns:r="http://schemas.openxmlformats.org/officeDocument/2006/relationships">
   <p:cSld>
     <p:spTree>
@@ -19528,7 +20170,7 @@
 </p:sld>
 </file>
 
-<file path=ppt/slides/slide37.xml><?xml version="1.0" encoding="utf-8"?>
+<file path=ppt/slides/slide38.xml><?xml version="1.0" encoding="utf-8"?>
 <p:sld xmlns:a="http://schemas.openxmlformats.org/drawingml/2006/main" xmlns:p="http://schemas.openxmlformats.org/presentationml/2006/main" xmlns:r="http://schemas.openxmlformats.org/officeDocument/2006/relationships">
   <p:cSld>
     <p:spTree>
@@ -20554,7 +21196,7 @@
 </p:sld>
 </file>
 
-<file path=ppt/slides/slide38.xml><?xml version="1.0" encoding="utf-8"?>
+<file path=ppt/slides/slide39.xml><?xml version="1.0" encoding="utf-8"?>
 <p:sld xmlns:a="http://schemas.openxmlformats.org/drawingml/2006/main" xmlns:p="http://schemas.openxmlformats.org/presentationml/2006/main" xmlns:r="http://schemas.openxmlformats.org/officeDocument/2006/relationships">
   <p:cSld>
     <p:spTree>
@@ -20840,550 +21482,6 @@
                 <a:latin typeface="Arial"/>
               </a:rPr>
               <a:t>Each directory's README carries the full command list and the run-tag index.</a:t>
-            </a:r>
-          </a:p>
-        </p:txBody>
-      </p:sp>
-    </p:spTree>
-  </p:cSld>
-  <p:clrMapOvr>
-    <a:masterClrMapping/>
-  </p:clrMapOvr>
-</p:sld>
-</file>
-
-<file path=ppt/slides/slide39.xml><?xml version="1.0" encoding="utf-8"?>
-<p:sld xmlns:a="http://schemas.openxmlformats.org/drawingml/2006/main" xmlns:p="http://schemas.openxmlformats.org/presentationml/2006/main" xmlns:r="http://schemas.openxmlformats.org/officeDocument/2006/relationships">
-  <p:cSld>
-    <p:spTree>
-      <p:nvGrpSpPr>
-        <p:cNvPr id="1" name=""/>
-        <p:cNvGrpSpPr/>
-        <p:nvPr/>
-      </p:nvGrpSpPr>
-      <p:grpSpPr/>
-      <p:sp>
-        <p:nvSpPr>
-          <p:cNvPr id="2" name="TextBox 1"/>
-          <p:cNvSpPr txBox="1"/>
-          <p:nvPr/>
-        </p:nvSpPr>
-        <p:spPr>
-          <a:xfrm>
-            <a:off x="411480" y="201168"/>
-            <a:ext cx="11368735" cy="914400"/>
-          </a:xfrm>
-          <a:prstGeom prst="rect">
-            <a:avLst/>
-          </a:prstGeom>
-          <a:noFill/>
-        </p:spPr>
-        <p:txBody>
-          <a:bodyPr wrap="square">
-            <a:spAutoFit/>
-          </a:bodyPr>
-          <a:lstStyle/>
-          <a:p>
-            <a:pPr>
-              <a:spcAft>
-                <a:spcPts val="400"/>
-              </a:spcAft>
-            </a:pPr>
-            <a:r>
-              <a:rPr sz="2400" b="1">
-                <a:solidFill>
-                  <a:srgbClr val="1F4E79"/>
-                </a:solidFill>
-                <a:latin typeface="Arial"/>
-              </a:rPr>
-              <a:t>Backup: the interferometer's three phase-shift forms</a:t>
-            </a:r>
-          </a:p>
-          <a:p>
-            <a:pPr>
-              <a:spcAft>
-                <a:spcPts val="0"/>
-              </a:spcAft>
-            </a:pPr>
-            <a:r>
-              <a:rPr sz="1250" b="0">
-                <a:solidFill>
-                  <a:srgbClr val="6E6E6E"/>
-                </a:solidFill>
-                <a:latin typeface="Arial"/>
-              </a:rPr>
-              <a:t>The four frames are the same in the model; the forms differ in what they get wrong</a:t>
-            </a:r>
-          </a:p>
-        </p:txBody>
-      </p:sp>
-      <p:sp>
-        <p:nvSpPr>
-          <p:cNvPr id="3" name="Rectangle 2"/>
-          <p:cNvSpPr/>
-          <p:nvPr/>
-        </p:nvSpPr>
-        <p:spPr>
-          <a:xfrm>
-            <a:off x="411480" y="1133856"/>
-            <a:ext cx="11368735" cy="20320"/>
-          </a:xfrm>
-          <a:prstGeom prst="rect">
-            <a:avLst/>
-          </a:prstGeom>
-          <a:solidFill>
-            <a:srgbClr val="B8C6D4"/>
-          </a:solidFill>
-          <a:ln>
-            <a:noFill/>
-          </a:ln>
-          <a:effectLst/>
-        </p:spPr>
-        <p:style>
-          <a:lnRef idx="1">
-            <a:schemeClr val="accent1"/>
-          </a:lnRef>
-          <a:fillRef idx="3">
-            <a:schemeClr val="accent1"/>
-          </a:fillRef>
-          <a:effectRef idx="2">
-            <a:schemeClr val="accent1"/>
-          </a:effectRef>
-          <a:fontRef idx="minor">
-            <a:schemeClr val="lt1"/>
-          </a:fontRef>
-        </p:style>
-        <p:txBody>
-          <a:bodyPr rtlCol="0" anchor="ctr"/>
-          <a:lstStyle/>
-          <a:p>
-            <a:pPr algn="ctr"/>
-          </a:p>
-        </p:txBody>
-      </p:sp>
-      <p:graphicFrame>
-        <p:nvGraphicFramePr>
-          <p:cNvPr id="4" name="Table 3"/>
-          <p:cNvGraphicFramePr>
-            <a:graphicFrameLocks noGrp="1"/>
-          </p:cNvGraphicFramePr>
-          <p:nvPr/>
-        </p:nvGraphicFramePr>
-        <p:xfrm>
-          <a:off x="411480" y="1298448"/>
-          <a:ext cx="11368734" cy="2817495"/>
-        </p:xfrm>
-        <a:graphic>
-          <a:graphicData uri="http://schemas.openxmlformats.org/drawingml/2006/table">
-            <a:tbl>
-              <a:tblPr firstRow="1" bandRow="1">
-                <a:tableStyleId>{5C22544A-7EE6-4342-B048-85BDC9FD1C3A}</a:tableStyleId>
-              </a:tblPr>
-              <a:tblGrid>
-                <a:gridCol w="1671828"/>
-                <a:gridCol w="1257454"/>
-                <a:gridCol w="1523454"/>
-                <a:gridCol w="6915998"/>
-              </a:tblGrid>
-              <a:tr h="468630">
-                <a:tc>
-                  <a:txBody>
-                    <a:bodyPr wrap="square"/>
-                    <a:lstStyle/>
-                    <a:p>
-                      <a:r>
-                        <a:rPr sz="1100" b="1">
-                          <a:solidFill>
-                            <a:srgbClr val="FFFFFF"/>
-                          </a:solidFill>
-                          <a:latin typeface="Arial"/>
-                        </a:rPr>
-                        <a:t>form</a:t>
-                      </a:r>
-                    </a:p>
-                  </a:txBody>
-                  <a:tcPr marL="54864" marR="54864" marT="18288" marB="18288">
-                    <a:solidFill>
-                      <a:srgbClr val="1F4E79"/>
-                    </a:solidFill>
-                  </a:tcPr>
-                </a:tc>
-                <a:tc>
-                  <a:txBody>
-                    <a:bodyPr wrap="square"/>
-                    <a:lstStyle/>
-                    <a:p>
-                      <a:r>
-                        <a:rPr sz="1100" b="1">
-                          <a:solidFill>
-                            <a:srgbClr val="FFFFFF"/>
-                          </a:solidFill>
-                          <a:latin typeface="Arial"/>
-                        </a:rPr>
-                        <a:t>how the four steps are made</a:t>
-                      </a:r>
-                    </a:p>
-                  </a:txBody>
-                  <a:tcPr marL="54864" marR="54864" marT="18288" marB="18288">
-                    <a:solidFill>
-                      <a:srgbClr val="1F4E79"/>
-                    </a:solidFill>
-                  </a:tcPr>
-                </a:tc>
-                <a:tc>
-                  <a:txBody>
-                    <a:bodyPr wrap="square"/>
-                    <a:lstStyle/>
-                    <a:p>
-                      <a:r>
-                        <a:rPr sz="1100" b="1">
-                          <a:solidFill>
-                            <a:srgbClr val="FFFFFF"/>
-                          </a:solidFill>
-                          <a:latin typeface="Arial"/>
-                        </a:rPr>
-                        <a:t>what it gets wrong</a:t>
-                      </a:r>
-                    </a:p>
-                  </a:txBody>
-                  <a:tcPr marL="54864" marR="54864" marT="18288" marB="18288">
-                    <a:solidFill>
-                      <a:srgbClr val="1F4E79"/>
-                    </a:solidFill>
-                  </a:tcPr>
-                </a:tc>
-                <a:tc>
-                  <a:txBody>
-                    <a:bodyPr wrap="square"/>
-                    <a:lstStyle/>
-                    <a:p>
-                      <a:r>
-                        <a:rPr sz="1100" b="1">
-                          <a:solidFill>
-                            <a:srgbClr val="FFFFFF"/>
-                          </a:solidFill>
-                          <a:latin typeface="Arial"/>
-                        </a:rPr>
-                        <a:t>priced</a:t>
-                      </a:r>
-                    </a:p>
-                  </a:txBody>
-                  <a:tcPr marL="54864" marR="54864" marT="18288" marB="18288">
-                    <a:solidFill>
-                      <a:srgbClr val="1F4E79"/>
-                    </a:solidFill>
-                  </a:tcPr>
-                </a:tc>
-              </a:tr>
-              <a:tr h="657225">
-                <a:tc>
-                  <a:txBody>
-                    <a:bodyPr wrap="square"/>
-                    <a:lstStyle/>
-                    <a:p>
-                      <a:r>
-                        <a:rPr sz="1100" b="0">
-                          <a:solidFill>
-                            <a:srgbClr val="282828"/>
-                          </a:solidFill>
-                          <a:latin typeface="Arial"/>
-                        </a:rPr>
-                        <a:t>piezo four-step</a:t>
-                      </a:r>
-                    </a:p>
-                  </a:txBody>
-                  <a:tcPr marL="54864" marR="54864" marT="18288" marB="18288">
-                    <a:solidFill>
-                      <a:srgbClr val="FFFFFF"/>
-                    </a:solidFill>
-                  </a:tcPr>
-                </a:tc>
-                <a:tc>
-                  <a:txBody>
-                    <a:bodyPr wrap="square"/>
-                    <a:lstStyle/>
-                    <a:p>
-                      <a:r>
-                        <a:rPr sz="1100" b="0">
-                          <a:solidFill>
-                            <a:srgbClr val="282828"/>
-                          </a:solidFill>
-                          <a:latin typeface="Arial"/>
-                        </a:rPr>
-                        <a:t>the reference flat stepped in time</a:t>
-                      </a:r>
-                    </a:p>
-                  </a:txBody>
-                  <a:tcPr marL="54864" marR="54864" marT="18288" marB="18288">
-                    <a:solidFill>
-                      <a:srgbClr val="FFFFFF"/>
-                    </a:solidFill>
-                  </a:tcPr>
-                </a:tc>
-                <a:tc>
-                  <a:txBody>
-                    <a:bodyPr wrap="square"/>
-                    <a:lstStyle/>
-                    <a:p>
-                      <a:r>
-                        <a:rPr sz="1100" b="0">
-                          <a:solidFill>
-                            <a:srgbClr val="282828"/>
-                          </a:solidFill>
-                          <a:latin typeface="Arial"/>
-                        </a:rPr>
-                        <a:t>step miscalibration; camera and mirror drift within a scan</a:t>
-                      </a:r>
-                    </a:p>
-                  </a:txBody>
-                  <a:tcPr marL="54864" marR="54864" marT="18288" marB="18288">
-                    <a:solidFill>
-                      <a:srgbClr val="FFFFFF"/>
-                    </a:solidFill>
-                  </a:tcPr>
-                </a:tc>
-                <a:tc>
-                  <a:txBody>
-                    <a:bodyPr wrap="square"/>
-                    <a:lstStyle/>
-                    <a:p>
-                      <a:r>
-                        <a:rPr sz="1100" b="0">
-                          <a:solidFill>
-                            <a:srgbClr val="282828"/>
-                          </a:solidFill>
-                          <a:latin typeface="Arial"/>
-                        </a:rPr>
-                        <a:t>step error 2% / 5%: gain 0.974 / 0.954, floors 5 / 9 pm; in the servo common mode (5.4e12 vs 5.5e12); camera walk 1e-3 within a scan: +13% light; mirror walk within a scan: 1.6e13 vs 1.7-2.0e13</a:t>
-                      </a:r>
-                    </a:p>
-                  </a:txBody>
-                  <a:tcPr marL="54864" marR="54864" marT="18288" marB="18288">
-                    <a:solidFill>
-                      <a:srgbClr val="FFFFFF"/>
-                    </a:solidFill>
-                  </a:tcPr>
-                </a:tc>
-              </a:tr>
-              <a:tr h="845820">
-                <a:tc>
-                  <a:txBody>
-                    <a:bodyPr wrap="square"/>
-                    <a:lstStyle/>
-                    <a:p>
-                      <a:r>
-                        <a:rPr sz="1100" b="0">
-                          <a:solidFill>
-                            <a:srgbClr val="282828"/>
-                          </a:solidFill>
-                          <a:latin typeface="Arial"/>
-                        </a:rPr>
-                        <a:t>polarization snapshot</a:t>
-                      </a:r>
-                    </a:p>
-                  </a:txBody>
-                  <a:tcPr marL="54864" marR="54864" marT="18288" marB="18288">
-                    <a:solidFill>
-                      <a:srgbClr val="ECF1F6"/>
-                    </a:solidFill>
-                  </a:tcPr>
-                </a:tc>
-                <a:tc>
-                  <a:txBody>
-                    <a:bodyPr wrap="square"/>
-                    <a:lstStyle/>
-                    <a:p>
-                      <a:r>
-                        <a:rPr sz="1100" b="0">
-                          <a:solidFill>
-                            <a:srgbClr val="282828"/>
-                          </a:solidFill>
-                          <a:latin typeface="Arial"/>
-                        </a:rPr>
-                        <a:t>four analyzer channels at once</a:t>
-                      </a:r>
-                    </a:p>
-                  </a:txBody>
-                  <a:tcPr marL="54864" marR="54864" marT="18288" marB="18288">
-                    <a:solidFill>
-                      <a:srgbClr val="ECF1F6"/>
-                    </a:solidFill>
-                  </a:tcPr>
-                </a:tc>
-                <a:tc>
-                  <a:txBody>
-                    <a:bodyPr wrap="square"/>
-                    <a:lstStyle/>
-                    <a:p>
-                      <a:r>
-                        <a:rPr sz="1100" b="0">
-                          <a:solidFill>
-                            <a:srgbClr val="282828"/>
-                          </a:solidFill>
-                          <a:latin typeface="Arial"/>
-                        </a:rPr>
-                        <a:t>polarization systematics, fixed by design; no within-scan drift</a:t>
-                      </a:r>
-                    </a:p>
-                  </a:txBody>
-                  <a:tcPr marL="54864" marR="54864" marT="18288" marB="18288">
-                    <a:solidFill>
-                      <a:srgbClr val="ECF1F6"/>
-                    </a:solidFill>
-                  </a:tcPr>
-                </a:tc>
-                <a:tc>
-                  <a:txBody>
-                    <a:bodyPr wrap="square"/>
-                    <a:lstStyle/>
-                    <a:p>
-                      <a:r>
-                        <a:rPr sz="1100" b="0">
-                          <a:solidFill>
-                            <a:srgbClr val="282828"/>
-                          </a:solidFill>
-                          <a:latin typeface="Arial"/>
-                        </a:rPr>
-                        <a:t>plate rig at the record's 45°: the splitter's diattenuation rotates the test arm 7.5°, gain +11.7% (at the built 22.5°: 1.56°, +0.9%), nulled to 1.00000 by an analyzer sweep and a 3.8° plate clock; cube rig: R_p 2.1% for a naive stack, 0 for the symmetric one, 2.27× the delivered power</a:t>
-                      </a:r>
-                    </a:p>
-                  </a:txBody>
-                  <a:tcPr marL="54864" marR="54864" marT="18288" marB="18288">
-                    <a:solidFill>
-                      <a:srgbClr val="ECF1F6"/>
-                    </a:solidFill>
-                  </a:tcPr>
-                </a:tc>
-              </a:tr>
-              <a:tr h="845820">
-                <a:tc>
-                  <a:txBody>
-                    <a:bodyPr wrap="square"/>
-                    <a:lstStyle/>
-                    <a:p>
-                      <a:r>
-                        <a:rPr sz="1100" b="0">
-                          <a:solidFill>
-                            <a:srgbClr val="282828"/>
-                          </a:solidFill>
-                          <a:latin typeface="Arial"/>
-                        </a:rPr>
-                        <a:t>hybrid</a:t>
-                      </a:r>
-                    </a:p>
-                  </a:txBody>
-                  <a:tcPr marL="54864" marR="54864" marT="18288" marB="18288">
-                    <a:solidFill>
-                      <a:srgbClr val="FFFFFF"/>
-                    </a:solidFill>
-                  </a:tcPr>
-                </a:tc>
-                <a:tc>
-                  <a:txBody>
-                    <a:bodyPr wrap="square"/>
-                    <a:lstStyle/>
-                    <a:p>
-                      <a:r>
-                        <a:rPr sz="1100" b="0">
-                          <a:solidFill>
-                            <a:srgbClr val="282828"/>
-                          </a:solidFill>
-                          <a:latin typeface="Arial"/>
-                        </a:rPr>
-                        <a:t>snapshot for the change, piezo for the absolute step</a:t>
-                      </a:r>
-                    </a:p>
-                  </a:txBody>
-                  <a:tcPr marL="54864" marR="54864" marT="18288" marB="18288">
-                    <a:solidFill>
-                      <a:srgbClr val="FFFFFF"/>
-                    </a:solidFill>
-                  </a:tcPr>
-                </a:tc>
-                <a:tc>
-                  <a:txBody>
-                    <a:bodyPr wrap="square"/>
-                    <a:lstStyle/>
-                    <a:p>
-                      <a:r>
-                        <a:rPr sz="1100" b="0">
-                          <a:solidFill>
-                            <a:srgbClr val="282828"/>
-                          </a:solidFill>
-                          <a:latin typeface="Arial"/>
-                        </a:rPr>
-                        <a:t>each half removes the other's error</a:t>
-                      </a:r>
-                    </a:p>
-                  </a:txBody>
-                  <a:tcPr marL="54864" marR="54864" marT="18288" marB="18288">
-                    <a:solidFill>
-                      <a:srgbClr val="FFFFFF"/>
-                    </a:solidFill>
-                  </a:tcPr>
-                </a:tc>
-                <a:tc>
-                  <a:txBody>
-                    <a:bodyPr wrap="square"/>
-                    <a:lstStyle/>
-                    <a:p>
-                      <a:r>
-                        <a:rPr sz="1100" b="0">
-                          <a:solidFill>
-                            <a:srgbClr val="282828"/>
-                          </a:solidFill>
-                          <a:latin typeface="Arial"/>
-                        </a:rPr>
-                        <a:t>the recommended form; its value is the absolute calibration more than drift immunity: the four-step already tolerates all three sequential terms in hold</a:t>
-                      </a:r>
-                    </a:p>
-                  </a:txBody>
-                  <a:tcPr marL="54864" marR="54864" marT="18288" marB="18288">
-                    <a:solidFill>
-                      <a:srgbClr val="FFFFFF"/>
-                    </a:solidFill>
-                  </a:tcPr>
-                </a:tc>
-              </a:tr>
-            </a:tbl>
-          </a:graphicData>
-        </a:graphic>
-      </p:graphicFrame>
-      <p:sp>
-        <p:nvSpPr>
-          <p:cNvPr id="5" name="TextBox 4"/>
-          <p:cNvSpPr txBox="1"/>
-          <p:nvPr/>
-        </p:nvSpPr>
-        <p:spPr>
-          <a:xfrm>
-            <a:off x="411480" y="4262247"/>
-            <a:ext cx="11368735" cy="274320"/>
-          </a:xfrm>
-          <a:prstGeom prst="rect">
-            <a:avLst/>
-          </a:prstGeom>
-          <a:noFill/>
-        </p:spPr>
-        <p:txBody>
-          <a:bodyPr wrap="square">
-            <a:spAutoFit/>
-          </a:bodyPr>
-          <a:lstStyle/>
-          <a:p>
-            <a:pPr>
-              <a:spcAft>
-                <a:spcPts val="600"/>
-              </a:spcAft>
-            </a:pPr>
-            <a:r>
-              <a:rPr sz="1050" b="0">
-                <a:solidFill>
-                  <a:srgbClr val="6E6E6E"/>
-                </a:solidFill>
-                <a:latin typeface="Arial"/>
-              </a:rPr>
-              <a:t>Run tags lens_deck_se2, lens_deck_se5, loop_lens_se2, loop_lens_cam, loop_lens_intra, tg_psi_dm, tg_psi_dm_v2.</a:t>
             </a:r>
           </a:p>
         </p:txBody>
@@ -21968,6 +22066,550 @@
 </file>
 
 <file path=ppt/slides/slide40.xml><?xml version="1.0" encoding="utf-8"?>
+<p:sld xmlns:a="http://schemas.openxmlformats.org/drawingml/2006/main" xmlns:p="http://schemas.openxmlformats.org/presentationml/2006/main" xmlns:r="http://schemas.openxmlformats.org/officeDocument/2006/relationships">
+  <p:cSld>
+    <p:spTree>
+      <p:nvGrpSpPr>
+        <p:cNvPr id="1" name=""/>
+        <p:cNvGrpSpPr/>
+        <p:nvPr/>
+      </p:nvGrpSpPr>
+      <p:grpSpPr/>
+      <p:sp>
+        <p:nvSpPr>
+          <p:cNvPr id="2" name="TextBox 1"/>
+          <p:cNvSpPr txBox="1"/>
+          <p:nvPr/>
+        </p:nvSpPr>
+        <p:spPr>
+          <a:xfrm>
+            <a:off x="411480" y="201168"/>
+            <a:ext cx="11368735" cy="914400"/>
+          </a:xfrm>
+          <a:prstGeom prst="rect">
+            <a:avLst/>
+          </a:prstGeom>
+          <a:noFill/>
+        </p:spPr>
+        <p:txBody>
+          <a:bodyPr wrap="square">
+            <a:spAutoFit/>
+          </a:bodyPr>
+          <a:lstStyle/>
+          <a:p>
+            <a:pPr>
+              <a:spcAft>
+                <a:spcPts val="400"/>
+              </a:spcAft>
+            </a:pPr>
+            <a:r>
+              <a:rPr sz="2400" b="1">
+                <a:solidFill>
+                  <a:srgbClr val="1F4E79"/>
+                </a:solidFill>
+                <a:latin typeface="Arial"/>
+              </a:rPr>
+              <a:t>Backup: the interferometer's three phase-shift forms</a:t>
+            </a:r>
+          </a:p>
+          <a:p>
+            <a:pPr>
+              <a:spcAft>
+                <a:spcPts val="0"/>
+              </a:spcAft>
+            </a:pPr>
+            <a:r>
+              <a:rPr sz="1250" b="0">
+                <a:solidFill>
+                  <a:srgbClr val="6E6E6E"/>
+                </a:solidFill>
+                <a:latin typeface="Arial"/>
+              </a:rPr>
+              <a:t>The four frames are the same in the model; the forms differ in what they get wrong</a:t>
+            </a:r>
+          </a:p>
+        </p:txBody>
+      </p:sp>
+      <p:sp>
+        <p:nvSpPr>
+          <p:cNvPr id="3" name="Rectangle 2"/>
+          <p:cNvSpPr/>
+          <p:nvPr/>
+        </p:nvSpPr>
+        <p:spPr>
+          <a:xfrm>
+            <a:off x="411480" y="1133856"/>
+            <a:ext cx="11368735" cy="20320"/>
+          </a:xfrm>
+          <a:prstGeom prst="rect">
+            <a:avLst/>
+          </a:prstGeom>
+          <a:solidFill>
+            <a:srgbClr val="B8C6D4"/>
+          </a:solidFill>
+          <a:ln>
+            <a:noFill/>
+          </a:ln>
+          <a:effectLst/>
+        </p:spPr>
+        <p:style>
+          <a:lnRef idx="1">
+            <a:schemeClr val="accent1"/>
+          </a:lnRef>
+          <a:fillRef idx="3">
+            <a:schemeClr val="accent1"/>
+          </a:fillRef>
+          <a:effectRef idx="2">
+            <a:schemeClr val="accent1"/>
+          </a:effectRef>
+          <a:fontRef idx="minor">
+            <a:schemeClr val="lt1"/>
+          </a:fontRef>
+        </p:style>
+        <p:txBody>
+          <a:bodyPr rtlCol="0" anchor="ctr"/>
+          <a:lstStyle/>
+          <a:p>
+            <a:pPr algn="ctr"/>
+          </a:p>
+        </p:txBody>
+      </p:sp>
+      <p:graphicFrame>
+        <p:nvGraphicFramePr>
+          <p:cNvPr id="4" name="Table 3"/>
+          <p:cNvGraphicFramePr>
+            <a:graphicFrameLocks noGrp="1"/>
+          </p:cNvGraphicFramePr>
+          <p:nvPr/>
+        </p:nvGraphicFramePr>
+        <p:xfrm>
+          <a:off x="411480" y="1298448"/>
+          <a:ext cx="11368734" cy="2817495"/>
+        </p:xfrm>
+        <a:graphic>
+          <a:graphicData uri="http://schemas.openxmlformats.org/drawingml/2006/table">
+            <a:tbl>
+              <a:tblPr firstRow="1" bandRow="1">
+                <a:tableStyleId>{5C22544A-7EE6-4342-B048-85BDC9FD1C3A}</a:tableStyleId>
+              </a:tblPr>
+              <a:tblGrid>
+                <a:gridCol w="1671828"/>
+                <a:gridCol w="1257454"/>
+                <a:gridCol w="1523454"/>
+                <a:gridCol w="6915998"/>
+              </a:tblGrid>
+              <a:tr h="468630">
+                <a:tc>
+                  <a:txBody>
+                    <a:bodyPr wrap="square"/>
+                    <a:lstStyle/>
+                    <a:p>
+                      <a:r>
+                        <a:rPr sz="1100" b="1">
+                          <a:solidFill>
+                            <a:srgbClr val="FFFFFF"/>
+                          </a:solidFill>
+                          <a:latin typeface="Arial"/>
+                        </a:rPr>
+                        <a:t>form</a:t>
+                      </a:r>
+                    </a:p>
+                  </a:txBody>
+                  <a:tcPr marL="54864" marR="54864" marT="18288" marB="18288">
+                    <a:solidFill>
+                      <a:srgbClr val="1F4E79"/>
+                    </a:solidFill>
+                  </a:tcPr>
+                </a:tc>
+                <a:tc>
+                  <a:txBody>
+                    <a:bodyPr wrap="square"/>
+                    <a:lstStyle/>
+                    <a:p>
+                      <a:r>
+                        <a:rPr sz="1100" b="1">
+                          <a:solidFill>
+                            <a:srgbClr val="FFFFFF"/>
+                          </a:solidFill>
+                          <a:latin typeface="Arial"/>
+                        </a:rPr>
+                        <a:t>how the four steps are made</a:t>
+                      </a:r>
+                    </a:p>
+                  </a:txBody>
+                  <a:tcPr marL="54864" marR="54864" marT="18288" marB="18288">
+                    <a:solidFill>
+                      <a:srgbClr val="1F4E79"/>
+                    </a:solidFill>
+                  </a:tcPr>
+                </a:tc>
+                <a:tc>
+                  <a:txBody>
+                    <a:bodyPr wrap="square"/>
+                    <a:lstStyle/>
+                    <a:p>
+                      <a:r>
+                        <a:rPr sz="1100" b="1">
+                          <a:solidFill>
+                            <a:srgbClr val="FFFFFF"/>
+                          </a:solidFill>
+                          <a:latin typeface="Arial"/>
+                        </a:rPr>
+                        <a:t>what it gets wrong</a:t>
+                      </a:r>
+                    </a:p>
+                  </a:txBody>
+                  <a:tcPr marL="54864" marR="54864" marT="18288" marB="18288">
+                    <a:solidFill>
+                      <a:srgbClr val="1F4E79"/>
+                    </a:solidFill>
+                  </a:tcPr>
+                </a:tc>
+                <a:tc>
+                  <a:txBody>
+                    <a:bodyPr wrap="square"/>
+                    <a:lstStyle/>
+                    <a:p>
+                      <a:r>
+                        <a:rPr sz="1100" b="1">
+                          <a:solidFill>
+                            <a:srgbClr val="FFFFFF"/>
+                          </a:solidFill>
+                          <a:latin typeface="Arial"/>
+                        </a:rPr>
+                        <a:t>priced</a:t>
+                      </a:r>
+                    </a:p>
+                  </a:txBody>
+                  <a:tcPr marL="54864" marR="54864" marT="18288" marB="18288">
+                    <a:solidFill>
+                      <a:srgbClr val="1F4E79"/>
+                    </a:solidFill>
+                  </a:tcPr>
+                </a:tc>
+              </a:tr>
+              <a:tr h="657225">
+                <a:tc>
+                  <a:txBody>
+                    <a:bodyPr wrap="square"/>
+                    <a:lstStyle/>
+                    <a:p>
+                      <a:r>
+                        <a:rPr sz="1100" b="0">
+                          <a:solidFill>
+                            <a:srgbClr val="282828"/>
+                          </a:solidFill>
+                          <a:latin typeface="Arial"/>
+                        </a:rPr>
+                        <a:t>piezo four-step</a:t>
+                      </a:r>
+                    </a:p>
+                  </a:txBody>
+                  <a:tcPr marL="54864" marR="54864" marT="18288" marB="18288">
+                    <a:solidFill>
+                      <a:srgbClr val="FFFFFF"/>
+                    </a:solidFill>
+                  </a:tcPr>
+                </a:tc>
+                <a:tc>
+                  <a:txBody>
+                    <a:bodyPr wrap="square"/>
+                    <a:lstStyle/>
+                    <a:p>
+                      <a:r>
+                        <a:rPr sz="1100" b="0">
+                          <a:solidFill>
+                            <a:srgbClr val="282828"/>
+                          </a:solidFill>
+                          <a:latin typeface="Arial"/>
+                        </a:rPr>
+                        <a:t>the reference flat stepped in time</a:t>
+                      </a:r>
+                    </a:p>
+                  </a:txBody>
+                  <a:tcPr marL="54864" marR="54864" marT="18288" marB="18288">
+                    <a:solidFill>
+                      <a:srgbClr val="FFFFFF"/>
+                    </a:solidFill>
+                  </a:tcPr>
+                </a:tc>
+                <a:tc>
+                  <a:txBody>
+                    <a:bodyPr wrap="square"/>
+                    <a:lstStyle/>
+                    <a:p>
+                      <a:r>
+                        <a:rPr sz="1100" b="0">
+                          <a:solidFill>
+                            <a:srgbClr val="282828"/>
+                          </a:solidFill>
+                          <a:latin typeface="Arial"/>
+                        </a:rPr>
+                        <a:t>step miscalibration; camera and mirror drift within a scan</a:t>
+                      </a:r>
+                    </a:p>
+                  </a:txBody>
+                  <a:tcPr marL="54864" marR="54864" marT="18288" marB="18288">
+                    <a:solidFill>
+                      <a:srgbClr val="FFFFFF"/>
+                    </a:solidFill>
+                  </a:tcPr>
+                </a:tc>
+                <a:tc>
+                  <a:txBody>
+                    <a:bodyPr wrap="square"/>
+                    <a:lstStyle/>
+                    <a:p>
+                      <a:r>
+                        <a:rPr sz="1100" b="0">
+                          <a:solidFill>
+                            <a:srgbClr val="282828"/>
+                          </a:solidFill>
+                          <a:latin typeface="Arial"/>
+                        </a:rPr>
+                        <a:t>step error 2% / 5%: gain 0.974 / 0.954, floors 5 / 9 pm; in the servo common mode (5.4e12 vs 5.5e12); camera walk 1e-3 within a scan: +13% light; mirror walk within a scan: 1.6e13 vs 1.7-2.0e13</a:t>
+                      </a:r>
+                    </a:p>
+                  </a:txBody>
+                  <a:tcPr marL="54864" marR="54864" marT="18288" marB="18288">
+                    <a:solidFill>
+                      <a:srgbClr val="FFFFFF"/>
+                    </a:solidFill>
+                  </a:tcPr>
+                </a:tc>
+              </a:tr>
+              <a:tr h="845820">
+                <a:tc>
+                  <a:txBody>
+                    <a:bodyPr wrap="square"/>
+                    <a:lstStyle/>
+                    <a:p>
+                      <a:r>
+                        <a:rPr sz="1100" b="0">
+                          <a:solidFill>
+                            <a:srgbClr val="282828"/>
+                          </a:solidFill>
+                          <a:latin typeface="Arial"/>
+                        </a:rPr>
+                        <a:t>polarization snapshot</a:t>
+                      </a:r>
+                    </a:p>
+                  </a:txBody>
+                  <a:tcPr marL="54864" marR="54864" marT="18288" marB="18288">
+                    <a:solidFill>
+                      <a:srgbClr val="ECF1F6"/>
+                    </a:solidFill>
+                  </a:tcPr>
+                </a:tc>
+                <a:tc>
+                  <a:txBody>
+                    <a:bodyPr wrap="square"/>
+                    <a:lstStyle/>
+                    <a:p>
+                      <a:r>
+                        <a:rPr sz="1100" b="0">
+                          <a:solidFill>
+                            <a:srgbClr val="282828"/>
+                          </a:solidFill>
+                          <a:latin typeface="Arial"/>
+                        </a:rPr>
+                        <a:t>four analyzer channels at once</a:t>
+                      </a:r>
+                    </a:p>
+                  </a:txBody>
+                  <a:tcPr marL="54864" marR="54864" marT="18288" marB="18288">
+                    <a:solidFill>
+                      <a:srgbClr val="ECF1F6"/>
+                    </a:solidFill>
+                  </a:tcPr>
+                </a:tc>
+                <a:tc>
+                  <a:txBody>
+                    <a:bodyPr wrap="square"/>
+                    <a:lstStyle/>
+                    <a:p>
+                      <a:r>
+                        <a:rPr sz="1100" b="0">
+                          <a:solidFill>
+                            <a:srgbClr val="282828"/>
+                          </a:solidFill>
+                          <a:latin typeface="Arial"/>
+                        </a:rPr>
+                        <a:t>polarization systematics, fixed by design; no within-scan drift</a:t>
+                      </a:r>
+                    </a:p>
+                  </a:txBody>
+                  <a:tcPr marL="54864" marR="54864" marT="18288" marB="18288">
+                    <a:solidFill>
+                      <a:srgbClr val="ECF1F6"/>
+                    </a:solidFill>
+                  </a:tcPr>
+                </a:tc>
+                <a:tc>
+                  <a:txBody>
+                    <a:bodyPr wrap="square"/>
+                    <a:lstStyle/>
+                    <a:p>
+                      <a:r>
+                        <a:rPr sz="1100" b="0">
+                          <a:solidFill>
+                            <a:srgbClr val="282828"/>
+                          </a:solidFill>
+                          <a:latin typeface="Arial"/>
+                        </a:rPr>
+                        <a:t>plate rig at the record's 45°: the splitter's diattenuation rotates the test arm 7.5°, gain +11.7% (at the built 22.5°: 1.56°, +0.9%), nulled to 1.00000 by an analyzer sweep and a 3.8° plate clock; cube rig: R_p 2.1% for a naive stack, 0 for the symmetric one, 2.27× the delivered power</a:t>
+                      </a:r>
+                    </a:p>
+                  </a:txBody>
+                  <a:tcPr marL="54864" marR="54864" marT="18288" marB="18288">
+                    <a:solidFill>
+                      <a:srgbClr val="ECF1F6"/>
+                    </a:solidFill>
+                  </a:tcPr>
+                </a:tc>
+              </a:tr>
+              <a:tr h="845820">
+                <a:tc>
+                  <a:txBody>
+                    <a:bodyPr wrap="square"/>
+                    <a:lstStyle/>
+                    <a:p>
+                      <a:r>
+                        <a:rPr sz="1100" b="0">
+                          <a:solidFill>
+                            <a:srgbClr val="282828"/>
+                          </a:solidFill>
+                          <a:latin typeface="Arial"/>
+                        </a:rPr>
+                        <a:t>hybrid</a:t>
+                      </a:r>
+                    </a:p>
+                  </a:txBody>
+                  <a:tcPr marL="54864" marR="54864" marT="18288" marB="18288">
+                    <a:solidFill>
+                      <a:srgbClr val="FFFFFF"/>
+                    </a:solidFill>
+                  </a:tcPr>
+                </a:tc>
+                <a:tc>
+                  <a:txBody>
+                    <a:bodyPr wrap="square"/>
+                    <a:lstStyle/>
+                    <a:p>
+                      <a:r>
+                        <a:rPr sz="1100" b="0">
+                          <a:solidFill>
+                            <a:srgbClr val="282828"/>
+                          </a:solidFill>
+                          <a:latin typeface="Arial"/>
+                        </a:rPr>
+                        <a:t>snapshot for the change, piezo for the absolute step</a:t>
+                      </a:r>
+                    </a:p>
+                  </a:txBody>
+                  <a:tcPr marL="54864" marR="54864" marT="18288" marB="18288">
+                    <a:solidFill>
+                      <a:srgbClr val="FFFFFF"/>
+                    </a:solidFill>
+                  </a:tcPr>
+                </a:tc>
+                <a:tc>
+                  <a:txBody>
+                    <a:bodyPr wrap="square"/>
+                    <a:lstStyle/>
+                    <a:p>
+                      <a:r>
+                        <a:rPr sz="1100" b="0">
+                          <a:solidFill>
+                            <a:srgbClr val="282828"/>
+                          </a:solidFill>
+                          <a:latin typeface="Arial"/>
+                        </a:rPr>
+                        <a:t>each half removes the other's error</a:t>
+                      </a:r>
+                    </a:p>
+                  </a:txBody>
+                  <a:tcPr marL="54864" marR="54864" marT="18288" marB="18288">
+                    <a:solidFill>
+                      <a:srgbClr val="FFFFFF"/>
+                    </a:solidFill>
+                  </a:tcPr>
+                </a:tc>
+                <a:tc>
+                  <a:txBody>
+                    <a:bodyPr wrap="square"/>
+                    <a:lstStyle/>
+                    <a:p>
+                      <a:r>
+                        <a:rPr sz="1100" b="0">
+                          <a:solidFill>
+                            <a:srgbClr val="282828"/>
+                          </a:solidFill>
+                          <a:latin typeface="Arial"/>
+                        </a:rPr>
+                        <a:t>the recommended form; its value is the absolute calibration more than drift immunity: the four-step already tolerates all three sequential terms in hold</a:t>
+                      </a:r>
+                    </a:p>
+                  </a:txBody>
+                  <a:tcPr marL="54864" marR="54864" marT="18288" marB="18288">
+                    <a:solidFill>
+                      <a:srgbClr val="FFFFFF"/>
+                    </a:solidFill>
+                  </a:tcPr>
+                </a:tc>
+              </a:tr>
+            </a:tbl>
+          </a:graphicData>
+        </a:graphic>
+      </p:graphicFrame>
+      <p:sp>
+        <p:nvSpPr>
+          <p:cNvPr id="5" name="TextBox 4"/>
+          <p:cNvSpPr txBox="1"/>
+          <p:nvPr/>
+        </p:nvSpPr>
+        <p:spPr>
+          <a:xfrm>
+            <a:off x="411480" y="4262247"/>
+            <a:ext cx="11368735" cy="274320"/>
+          </a:xfrm>
+          <a:prstGeom prst="rect">
+            <a:avLst/>
+          </a:prstGeom>
+          <a:noFill/>
+        </p:spPr>
+        <p:txBody>
+          <a:bodyPr wrap="square">
+            <a:spAutoFit/>
+          </a:bodyPr>
+          <a:lstStyle/>
+          <a:p>
+            <a:pPr>
+              <a:spcAft>
+                <a:spcPts val="600"/>
+              </a:spcAft>
+            </a:pPr>
+            <a:r>
+              <a:rPr sz="1050" b="0">
+                <a:solidFill>
+                  <a:srgbClr val="6E6E6E"/>
+                </a:solidFill>
+                <a:latin typeface="Arial"/>
+              </a:rPr>
+              <a:t>Run tags lens_deck_se2, lens_deck_se5, loop_lens_se2, loop_lens_cam, loop_lens_intra, tg_psi_dm, tg_psi_dm_v2.</a:t>
+            </a:r>
+          </a:p>
+        </p:txBody>
+      </p:sp>
+    </p:spTree>
+  </p:cSld>
+  <p:clrMapOvr>
+    <a:masterClrMapping/>
+  </p:clrMapOvr>
+</p:sld>
+</file>
+
+<file path=ppt/slides/slide41.xml><?xml version="1.0" encoding="utf-8"?>
 <p:sld xmlns:a="http://schemas.openxmlformats.org/drawingml/2006/main" xmlns:p="http://schemas.openxmlformats.org/presentationml/2006/main" xmlns:r="http://schemas.openxmlformats.org/officeDocument/2006/relationships">
   <p:cSld>
     <p:spTree>
@@ -22815,7 +23457,7 @@
 </p:sld>
 </file>
 
-<file path=ppt/slides/slide41.xml><?xml version="1.0" encoding="utf-8"?>
+<file path=ppt/slides/slide42.xml><?xml version="1.0" encoding="utf-8"?>
 <p:sld xmlns:a="http://schemas.openxmlformats.org/drawingml/2006/main" xmlns:p="http://schemas.openxmlformats.org/presentationml/2006/main" xmlns:r="http://schemas.openxmlformats.org/officeDocument/2006/relationships">
   <p:cSld>
     <p:spTree>
@@ -23105,7 +23747,7 @@
 </p:sld>
 </file>
 
-<file path=ppt/slides/slide42.xml><?xml version="1.0" encoding="utf-8"?>
+<file path=ppt/slides/slide43.xml><?xml version="1.0" encoding="utf-8"?>
 <p:sld xmlns:a="http://schemas.openxmlformats.org/drawingml/2006/main" xmlns:p="http://schemas.openxmlformats.org/presentationml/2006/main" xmlns:r="http://schemas.openxmlformats.org/officeDocument/2006/relationships">
   <p:cSld>
     <p:spTree>
@@ -23961,7 +24603,7 @@
 </p:sld>
 </file>
 
-<file path=ppt/slides/slide43.xml><?xml version="1.0" encoding="utf-8"?>
+<file path=ppt/slides/slide44.xml><?xml version="1.0" encoding="utf-8"?>
 <p:sld xmlns:a="http://schemas.openxmlformats.org/drawingml/2006/main" xmlns:p="http://schemas.openxmlformats.org/presentationml/2006/main" xmlns:r="http://schemas.openxmlformats.org/officeDocument/2006/relationships">
   <p:cSld>
     <p:spTree>
@@ -25022,7 +25664,7 @@
 </p:sld>
 </file>
 
-<file path=ppt/slides/slide44.xml><?xml version="1.0" encoding="utf-8"?>
+<file path=ppt/slides/slide45.xml><?xml version="1.0" encoding="utf-8"?>
 <p:sld xmlns:a="http://schemas.openxmlformats.org/drawingml/2006/main" xmlns:p="http://schemas.openxmlformats.org/presentationml/2006/main" xmlns:r="http://schemas.openxmlformats.org/officeDocument/2006/relationships">
   <p:cSld>
     <p:spTree>
@@ -25684,7 +26326,7 @@
 </p:sld>
 </file>
 
-<file path=ppt/slides/slide45.xml><?xml version="1.0" encoding="utf-8"?>
+<file path=ppt/slides/slide46.xml><?xml version="1.0" encoding="utf-8"?>
 <p:sld xmlns:a="http://schemas.openxmlformats.org/drawingml/2006/main" xmlns:p="http://schemas.openxmlformats.org/presentationml/2006/main" xmlns:r="http://schemas.openxmlformats.org/officeDocument/2006/relationships">
   <p:cSld>
     <p:spTree>
@@ -25974,7 +26616,7 @@
 </p:sld>
 </file>
 
-<file path=ppt/slides/slide46.xml><?xml version="1.0" encoding="utf-8"?>
+<file path=ppt/slides/slide47.xml><?xml version="1.0" encoding="utf-8"?>
 <p:sld xmlns:a="http://schemas.openxmlformats.org/drawingml/2006/main" xmlns:p="http://schemas.openxmlformats.org/presentationml/2006/main" xmlns:r="http://schemas.openxmlformats.org/officeDocument/2006/relationships">
   <p:cSld>
     <p:spTree>
@@ -26678,7 +27320,7 @@
 </p:sld>
 </file>
 
-<file path=ppt/slides/slide47.xml><?xml version="1.0" encoding="utf-8"?>
+<file path=ppt/slides/slide48.xml><?xml version="1.0" encoding="utf-8"?>
 <p:sld xmlns:a="http://schemas.openxmlformats.org/drawingml/2006/main" xmlns:p="http://schemas.openxmlformats.org/presentationml/2006/main" xmlns:r="http://schemas.openxmlformats.org/officeDocument/2006/relationships">
   <p:cSld>
     <p:spTree>
@@ -27672,7 +28314,7 @@
 </p:sld>
 </file>
 
-<file path=ppt/slides/slide48.xml><?xml version="1.0" encoding="utf-8"?>
+<file path=ppt/slides/slide49.xml><?xml version="1.0" encoding="utf-8"?>
 <p:sld xmlns:a="http://schemas.openxmlformats.org/drawingml/2006/main" xmlns:p="http://schemas.openxmlformats.org/presentationml/2006/main" xmlns:r="http://schemas.openxmlformats.org/officeDocument/2006/relationships">
   <p:cSld>
     <p:spTree>
@@ -27815,7 +28457,7 @@
                 </a:solidFill>
                 <a:latin typeface="Arial"/>
               </a:rPr>
-              <a:t>•  Interferometer (tg_psi_dm96_oap/runs): lens_deck, lens_deck_se2, lens_deck_se5, loop_lens, loop_lens_cam, loop_lens_intra, loop_lens_se2, descent_lens, oap_deck, loop_oap, descent_oap, oap_bareAl, oap_coat, oap_jones, zoap (the 7° rigs); lens22, lens22g, lens22h, node22t, fold1-4, loss, loss_src, loss_a2, conj, zseat, zseat2, oap22d, oapdraw3, oap22d_tail, tailA, tailB, oapifo2, oapifol2, oapdesc2, oapuw2, lensuw2, thk22, sub22, aoi_lens22, aoi_oap22, gate3_win, gate3_lens, wrapoap, wraplens, stnoap, stnlens (the 22.5° bench and the redesigned reflective rig); pdi_dm96/runs/psriclear2 (the P/SRI bench through the clearance tool).  Reports REPORT_gauge_ifo.md (CCMac) with REPORT_oap.md, REPORT_bench_realism.md and REPORT_reflective.md (TO), and README.md.</a:t>
+              <a:t>•  Interferometer (tg_psi_dm96_oap/runs): lens_deck, lens_deck_se2, lens_deck_se5, loop_lens, loop_lens_cam, loop_lens_intra, loop_lens_se2, descent_lens, oap_deck, loop_oap, descent_oap, oap_bareAl, oap_coat, oap_jones, zoap (the 7° rigs); lens22, lens22g, lens22h, node22t, fold1-4, loss, loss_src, loss_a2, conj, zseat, zseat2, oap22d, oapdraw3, oap22d_tail, tailA, tailB, oapifo2, oapifol2, oapdesc2, oapuw2, lensuw2, thk22, sub22, aoi_lens22, aoi_oap22, gate3_win, gate3_lens, wrapoap, wraplens, stnoap, stnlens, pupilq_lens, pupilq_oap (the 22.5° bench and the redesigned reflective rig); pdi_dm96/runs/psriclear2 (the P/SRI bench through the clearance tool).  Reports REPORT_gauge_ifo.md (CCMac) with REPORT_oap.md, REPORT_bench_realism.md and REPORT_reflective.md (TO), and README.md.</a:t>
             </a:r>
           </a:p>
           <a:p>

--- a/demo_session/deck_gauges_edit.pptx
+++ b/demo_session/deck_gauges_edit.pptx
@@ -57,6 +57,7 @@
     <p:sldId id="305" r:id="rId56"/>
     <p:sldId id="306" r:id="rId57"/>
     <p:sldId id="307" r:id="rId58"/>
+    <p:sldId id="308" r:id="rId59"/>
   </p:sldIdLst>
   <p:sldSz cx="12191695" cy="6858000" type="screen4x3"/>
   <p:notesSz cx="6858000" cy="9144000"/>
@@ -8445,7 +8446,7 @@
                 </a:solidFill>
                 <a:latin typeface="Arial"/>
               </a:rPr>
-              <a:t>•  42 Run it yourself</a:t>
+              <a:t>•  43 Run it yourself</a:t>
             </a:r>
           </a:p>
           <a:p>
@@ -8461,7 +8462,7 @@
                 </a:solidFill>
                 <a:latin typeface="Arial"/>
               </a:rPr>
-              <a:t>•  43 Backup</a:t>
+              <a:t>•  44 Backup</a:t>
             </a:r>
           </a:p>
         </p:txBody>
@@ -10876,7 +10877,7 @@
         </p:nvGraphicFramePr>
         <p:xfrm>
           <a:off x="411480" y="1298448"/>
-          <a:ext cx="5806439" cy="2708910"/>
+          <a:ext cx="5806439" cy="3743325"/>
         </p:xfrm>
         <a:graphic>
           <a:graphicData uri="http://schemas.openxmlformats.org/drawingml/2006/table">
@@ -10885,10 +10886,10 @@
                 <a:tableStyleId>{5C22544A-7EE6-4342-B048-85BDC9FD1C3A}</a:tableStyleId>
               </a:tblPr>
               <a:tblGrid>
-                <a:gridCol w="1912709"/>
-                <a:gridCol w="3893730"/>
+                <a:gridCol w="3279973"/>
+                <a:gridCol w="2526466"/>
               </a:tblGrid>
-              <a:tr h="280035">
+              <a:tr h="468630">
                 <a:tc>
                   <a:txBody>
                     <a:bodyPr wrap="square"/>
@@ -11210,7 +11211,7 @@
                   </a:tcPr>
                 </a:tc>
               </a:tr>
-              <a:tr h="280035">
+              <a:tr h="468630">
                 <a:tc>
                   <a:txBody>
                     <a:bodyPr wrap="square"/>
@@ -11256,7 +11257,7 @@
                   </a:tcPr>
                 </a:tc>
               </a:tr>
-              <a:tr h="280035">
+              <a:tr h="468630">
                 <a:tc>
                   <a:txBody>
                     <a:bodyPr wrap="square"/>
@@ -11298,6 +11299,52 @@
                   <a:tcPr marL="54864" marR="54864" marT="18288" marB="18288">
                     <a:solidFill>
                       <a:srgbClr val="ECF1F6"/>
+                    </a:solidFill>
+                  </a:tcPr>
+                </a:tc>
+              </a:tr>
+              <a:tr h="468630">
+                <a:tc>
+                  <a:txBody>
+                    <a:bodyPr wrap="square"/>
+                    <a:lstStyle/>
+                    <a:p>
+                      <a:r>
+                        <a:rPr sz="1100" b="0">
+                          <a:solidFill>
+                            <a:srgbClr val="282828"/>
+                          </a:solidFill>
+                          <a:latin typeface="Arial"/>
+                        </a:rPr>
+                        <a:t>the sensors on the mirror rig, 385 px (Zernike stepped / vector / pinhole)</a:t>
+                      </a:r>
+                    </a:p>
+                  </a:txBody>
+                  <a:tcPr marL="54864" marR="54864" marT="18288" marB="18288">
+                    <a:solidFill>
+                      <a:srgbClr val="FFFFFF"/>
+                    </a:solidFill>
+                  </a:tcPr>
+                </a:tc>
+                <a:tc>
+                  <a:txBody>
+                    <a:bodyPr wrap="square"/>
+                    <a:lstStyle/>
+                    <a:p>
+                      <a:r>
+                        <a:rPr sz="1100" b="0">
+                          <a:solidFill>
+                            <a:srgbClr val="282828"/>
+                          </a:solidFill>
+                          <a:latin typeface="Arial"/>
+                        </a:rPr>
+                        <a:t>36 / 59 / 52 nm: the lens rig's numbers</a:t>
+                      </a:r>
+                    </a:p>
+                  </a:txBody>
+                  <a:tcPr marL="54864" marR="54864" marT="18288" marB="18288">
+                    <a:solidFill>
+                      <a:srgbClr val="FFFFFF"/>
                     </a:solidFill>
                   </a:tcPr>
                 </a:tc>
@@ -11411,7 +11458,7 @@
                 </a:solidFill>
                 <a:latin typeface="Arial"/>
               </a:rPr>
-              <a:t>Run tags cap385, cap385p, pdi193state, lens_deck, oap_deck; 385 pixels per pupil, 47 sites (52 for the interferometer).</a:t>
+              <a:t>Run tags cap385, cap385p, pdi193state, lens_deck, oap_deck, oapsens385 (the mirror rig at 385 px, the Mac); 385 pixels per pupil, 47 sites (52 for the interferometer).</a:t>
             </a:r>
           </a:p>
         </p:txBody>
@@ -18021,7 +18068,7 @@
         </p:nvGraphicFramePr>
         <p:xfrm>
           <a:off x="411480" y="1298448"/>
-          <a:ext cx="11368735" cy="2520315"/>
+          <a:ext cx="11368734" cy="3931920"/>
         </p:xfrm>
         <a:graphic>
           <a:graphicData uri="http://schemas.openxmlformats.org/drawingml/2006/table">
@@ -18030,9 +18077,9 @@
                 <a:tableStyleId>{5C22544A-7EE6-4342-B048-85BDC9FD1C3A}</a:tableStyleId>
               </a:tblPr>
               <a:tblGrid>
-                <a:gridCol w="4350344"/>
+                <a:gridCol w="2369815"/>
                 <a:gridCol w="1889760"/>
-                <a:gridCol w="2875651"/>
+                <a:gridCol w="4856179"/>
                 <a:gridCol w="2252980"/>
               </a:tblGrid>
               <a:tr h="280035">
@@ -18115,7 +18162,7 @@
                   </a:tcPr>
                 </a:tc>
               </a:tr>
-              <a:tr h="280035">
+              <a:tr h="468630">
                 <a:tc>
                   <a:txBody>
                     <a:bodyPr wrap="square"/>
@@ -18201,6 +18248,96 @@
                   <a:tcPr marL="54864" marR="54864" marT="18288" marB="18288">
                     <a:solidFill>
                       <a:srgbClr val="FFFFFF"/>
+                    </a:solidFill>
+                  </a:tcPr>
+                </a:tc>
+              </a:tr>
+              <a:tr h="468630">
+                <a:tc>
+                  <a:txBody>
+                    <a:bodyPr wrap="square"/>
+                    <a:lstStyle/>
+                    <a:p>
+                      <a:r>
+                        <a:rPr sz="1100" b="0">
+                          <a:solidFill>
+                            <a:srgbClr val="282828"/>
+                          </a:solidFill>
+                          <a:latin typeface="Arial"/>
+                        </a:rPr>
+                        <a:t>interferometer, dense random 10 nm</a:t>
+                      </a:r>
+                    </a:p>
+                  </a:txBody>
+                  <a:tcPr marL="54864" marR="54864" marT="18288" marB="18288">
+                    <a:solidFill>
+                      <a:srgbClr val="ECF1F6"/>
+                    </a:solidFill>
+                  </a:tcPr>
+                </a:tc>
+                <a:tc>
+                  <a:txBody>
+                    <a:bodyPr wrap="square"/>
+                    <a:lstStyle/>
+                    <a:p>
+                      <a:r>
+                        <a:rPr sz="1100" b="0">
+                          <a:solidFill>
+                            <a:srgbClr val="282828"/>
+                          </a:solidFill>
+                          <a:latin typeface="Arial"/>
+                        </a:rPr>
+                        <a:t>0.749 / 4.8 nm</a:t>
+                      </a:r>
+                    </a:p>
+                  </a:txBody>
+                  <a:tcPr marL="54864" marR="54864" marT="18288" marB="18288">
+                    <a:solidFill>
+                      <a:srgbClr val="ECF1F6"/>
+                    </a:solidFill>
+                  </a:tcPr>
+                </a:tc>
+                <a:tc>
+                  <a:txBody>
+                    <a:bodyPr wrap="square"/>
+                    <a:lstStyle/>
+                    <a:p>
+                      <a:r>
+                        <a:rPr sz="1100" b="0">
+                          <a:solidFill>
+                            <a:srgbClr val="282828"/>
+                          </a:solidFill>
+                          <a:latin typeface="Arial"/>
+                        </a:rPr>
+                        <a:t>0.991 / 161 pm</a:t>
+                      </a:r>
+                    </a:p>
+                  </a:txBody>
+                  <a:tcPr marL="54864" marR="54864" marT="18288" marB="18288">
+                    <a:solidFill>
+                      <a:srgbClr val="ECF1F6"/>
+                    </a:solidFill>
+                  </a:tcPr>
+                </a:tc>
+                <a:tc>
+                  <a:txBody>
+                    <a:bodyPr wrap="square"/>
+                    <a:lstStyle/>
+                    <a:p>
+                      <a:r>
+                        <a:rPr sz="1100" b="0">
+                          <a:solidFill>
+                            <a:srgbClr val="282828"/>
+                          </a:solidFill>
+                          <a:latin typeface="Arial"/>
+                        </a:rPr>
+                        <a:t>0.989 / 168 pm</a:t>
+                      </a:r>
+                    </a:p>
+                  </a:txBody>
+                  <a:tcPr marL="54864" marR="54864" marT="18288" marB="18288">
+                    <a:solidFill>
+                      <a:srgbClr val="ECF1F6"/>
                     </a:solidFill>
                   </a:tcPr>
                 </a:tc>
@@ -18218,7 +18355,97 @@
                           </a:solidFill>
                           <a:latin typeface="Arial"/>
                         </a:rPr>
-                        <a:t>interferometer, dense random 10 nm</a:t>
+                        <a:t>mode-to-mode cross-talk</a:t>
+                      </a:r>
+                    </a:p>
+                  </a:txBody>
+                  <a:tcPr marL="54864" marR="54864" marT="18288" marB="18288">
+                    <a:solidFill>
+                      <a:srgbClr val="FFFFFF"/>
+                    </a:solidFill>
+                  </a:tcPr>
+                </a:tc>
+                <a:tc>
+                  <a:txBody>
+                    <a:bodyPr wrap="square"/>
+                    <a:lstStyle/>
+                    <a:p>
+                      <a:r>
+                        <a:rPr sz="1100" b="0">
+                          <a:solidFill>
+                            <a:srgbClr val="282828"/>
+                          </a:solidFill>
+                          <a:latin typeface="Arial"/>
+                        </a:rPr>
+                        <a:t>0.22-0.48</a:t>
+                      </a:r>
+                    </a:p>
+                  </a:txBody>
+                  <a:tcPr marL="54864" marR="54864" marT="18288" marB="18288">
+                    <a:solidFill>
+                      <a:srgbClr val="FFFFFF"/>
+                    </a:solidFill>
+                  </a:tcPr>
+                </a:tc>
+                <a:tc>
+                  <a:txBody>
+                    <a:bodyPr wrap="square"/>
+                    <a:lstStyle/>
+                    <a:p>
+                      <a:r>
+                        <a:rPr sz="1100" b="0">
+                          <a:solidFill>
+                            <a:srgbClr val="282828"/>
+                          </a:solidFill>
+                          <a:latin typeface="Arial"/>
+                        </a:rPr>
+                        <a:t>0.006-0.02</a:t>
+                      </a:r>
+                    </a:p>
+                  </a:txBody>
+                  <a:tcPr marL="54864" marR="54864" marT="18288" marB="18288">
+                    <a:solidFill>
+                      <a:srgbClr val="FFFFFF"/>
+                    </a:solidFill>
+                  </a:tcPr>
+                </a:tc>
+                <a:tc>
+                  <a:txBody>
+                    <a:bodyPr wrap="square"/>
+                    <a:lstStyle/>
+                    <a:p>
+                      <a:r>
+                        <a:rPr sz="1100" b="0">
+                          <a:solidFill>
+                            <a:srgbClr val="282828"/>
+                          </a:solidFill>
+                          <a:latin typeface="Arial"/>
+                        </a:rPr>
+                        <a:t>0.005-0.03</a:t>
+                      </a:r>
+                    </a:p>
+                  </a:txBody>
+                  <a:tcPr marL="54864" marR="54864" marT="18288" marB="18288">
+                    <a:solidFill>
+                      <a:srgbClr val="FFFFFF"/>
+                    </a:solidFill>
+                  </a:tcPr>
+                </a:tc>
+              </a:tr>
+              <a:tr h="468630">
+                <a:tc>
+                  <a:txBody>
+                    <a:bodyPr wrap="square"/>
+                    <a:lstStyle/>
+                    <a:p>
+                      <a:r>
+                        <a:rPr sz="1100" b="0">
+                          <a:solidFill>
+                            <a:srgbClr val="282828"/>
+                          </a:solidFill>
+                          <a:latin typeface="Arial"/>
+                        </a:rPr>
+                        <a:t>interferometer servo: 3 pm noise only / under the 2 pm walk</a:t>
                       </a:r>
                     </a:p>
                   </a:txBody>
@@ -18240,7 +18467,7 @@
                           </a:solidFill>
                           <a:latin typeface="Arial"/>
                         </a:rPr>
-                        <a:t>0.749 / 4.8 nm</a:t>
+                        <a:t>3.4e13 / never</a:t>
                       </a:r>
                     </a:p>
                   </a:txBody>
@@ -18262,7 +18489,7 @@
                           </a:solidFill>
                           <a:latin typeface="Arial"/>
                         </a:rPr>
-                        <a:t>0.991 / 161 pm</a:t>
+                        <a:t>5.4e12 / 1.7e13</a:t>
                       </a:r>
                     </a:p>
                   </a:txBody>
@@ -18284,13 +18511,103 @@
                           </a:solidFill>
                           <a:latin typeface="Arial"/>
                         </a:rPr>
-                        <a:t>0.989 / 168 pm</a:t>
+                        <a:t>5.5e12 / 2.0e13</a:t>
                       </a:r>
                     </a:p>
                   </a:txBody>
                   <a:tcPr marL="54864" marR="54864" marT="18288" marB="18288">
                     <a:solidFill>
                       <a:srgbClr val="ECF1F6"/>
+                    </a:solidFill>
+                  </a:tcPr>
+                </a:tc>
+              </a:tr>
+              <a:tr h="468630">
+                <a:tc>
+                  <a:txBody>
+                    <a:bodyPr wrap="square"/>
+                    <a:lstStyle/>
+                    <a:p>
+                      <a:r>
+                        <a:rPr sz="1100" b="0">
+                          <a:solidFill>
+                            <a:srgbClr val="282828"/>
+                          </a:solidFill>
+                          <a:latin typeface="Arial"/>
+                        </a:rPr>
+                        <a:t>sensors' servo under the walk: vector / pinhole / stepped</a:t>
+                      </a:r>
+                    </a:p>
+                  </a:txBody>
+                  <a:tcPr marL="54864" marR="54864" marT="18288" marB="18288">
+                    <a:solidFill>
+                      <a:srgbClr val="FFFFFF"/>
+                    </a:solidFill>
+                  </a:tcPr>
+                </a:tc>
+                <a:tc>
+                  <a:txBody>
+                    <a:bodyPr wrap="square"/>
+                    <a:lstStyle/>
+                    <a:p>
+                      <a:r>
+                        <a:rPr sz="1100" b="0">
+                          <a:solidFill>
+                            <a:srgbClr val="282828"/>
+                          </a:solidFill>
+                          <a:latin typeface="Arial"/>
+                        </a:rPr>
+                        <a:t>—</a:t>
+                      </a:r>
+                    </a:p>
+                  </a:txBody>
+                  <a:tcPr marL="54864" marR="54864" marT="18288" marB="18288">
+                    <a:solidFill>
+                      <a:srgbClr val="FFFFFF"/>
+                    </a:solidFill>
+                  </a:tcPr>
+                </a:tc>
+                <a:tc>
+                  <a:txBody>
+                    <a:bodyPr wrap="square"/>
+                    <a:lstStyle/>
+                    <a:p>
+                      <a:r>
+                        <a:rPr sz="1100" b="0">
+                          <a:solidFill>
+                            <a:srgbClr val="282828"/>
+                          </a:solidFill>
+                          <a:latin typeface="Arial"/>
+                        </a:rPr>
+                        <a:t>5.7e12 / 7.4e12 / 7.9e12</a:t>
+                      </a:r>
+                    </a:p>
+                  </a:txBody>
+                  <a:tcPr marL="54864" marR="54864" marT="18288" marB="18288">
+                    <a:solidFill>
+                      <a:srgbClr val="FFFFFF"/>
+                    </a:solidFill>
+                  </a:tcPr>
+                </a:tc>
+                <a:tc>
+                  <a:txBody>
+                    <a:bodyPr wrap="square"/>
+                    <a:lstStyle/>
+                    <a:p>
+                      <a:r>
+                        <a:rPr sz="1100" b="0">
+                          <a:solidFill>
+                            <a:srgbClr val="282828"/>
+                          </a:solidFill>
+                          <a:latin typeface="Arial"/>
+                        </a:rPr>
+                        <a:t>5.3e12 / 7.0e12 / 7.5e12</a:t>
+                      </a:r>
+                    </a:p>
+                  </a:txBody>
+                  <a:tcPr marL="54864" marR="54864" marT="18288" marB="18288">
+                    <a:solidFill>
+                      <a:srgbClr val="FFFFFF"/>
                     </a:solidFill>
                   </a:tcPr>
                 </a:tc>
@@ -18308,73 +18625,163 @@
                           </a:solidFill>
                           <a:latin typeface="Arial"/>
                         </a:rPr>
-                        <a:t>mode-to-mode cross-talk</a:t>
-                      </a:r>
-                    </a:p>
-                  </a:txBody>
-                  <a:tcPr marL="54864" marR="54864" marT="18288" marB="18288">
-                    <a:solidFill>
-                      <a:srgbClr val="FFFFFF"/>
-                    </a:solidFill>
-                  </a:tcPr>
-                </a:tc>
-                <a:tc>
-                  <a:txBody>
-                    <a:bodyPr wrap="square"/>
-                    <a:lstStyle/>
-                    <a:p>
-                      <a:r>
-                        <a:rPr sz="1100" b="0">
-                          <a:solidFill>
-                            <a:srgbClr val="282828"/>
-                          </a:solidFill>
-                          <a:latin typeface="Arial"/>
-                        </a:rPr>
-                        <a:t>0.22-0.48</a:t>
-                      </a:r>
-                    </a:p>
-                  </a:txBody>
-                  <a:tcPr marL="54864" marR="54864" marT="18288" marB="18288">
-                    <a:solidFill>
-                      <a:srgbClr val="FFFFFF"/>
-                    </a:solidFill>
-                  </a:tcPr>
-                </a:tc>
-                <a:tc>
-                  <a:txBody>
-                    <a:bodyPr wrap="square"/>
-                    <a:lstStyle/>
-                    <a:p>
-                      <a:r>
-                        <a:rPr sz="1100" b="0">
-                          <a:solidFill>
-                            <a:srgbClr val="282828"/>
-                          </a:solidFill>
-                          <a:latin typeface="Arial"/>
-                        </a:rPr>
-                        <a:t>0.006-0.02</a:t>
-                      </a:r>
-                    </a:p>
-                  </a:txBody>
-                  <a:tcPr marL="54864" marR="54864" marT="18288" marB="18288">
-                    <a:solidFill>
-                      <a:srgbClr val="FFFFFF"/>
-                    </a:solidFill>
-                  </a:tcPr>
-                </a:tc>
-                <a:tc>
-                  <a:txBody>
-                    <a:bodyPr wrap="square"/>
-                    <a:lstStyle/>
-                    <a:p>
-                      <a:r>
-                        <a:rPr sz="1100" b="0">
-                          <a:solidFill>
-                            <a:srgbClr val="282828"/>
-                          </a:solidFill>
-                          <a:latin typeface="Arial"/>
-                        </a:rPr>
-                        <a:t>0.005-0.03</a:t>
+                        <a:t>capture with unwrapping</a:t>
+                      </a:r>
+                    </a:p>
+                  </a:txBody>
+                  <a:tcPr marL="54864" marR="54864" marT="18288" marB="18288">
+                    <a:solidFill>
+                      <a:srgbClr val="ECF1F6"/>
+                    </a:solidFill>
+                  </a:tcPr>
+                </a:tc>
+                <a:tc>
+                  <a:txBody>
+                    <a:bodyPr wrap="square"/>
+                    <a:lstStyle/>
+                    <a:p>
+                      <a:r>
+                        <a:rPr sz="1100" b="0">
+                          <a:solidFill>
+                            <a:srgbClr val="282828"/>
+                          </a:solidFill>
+                          <a:latin typeface="Arial"/>
+                        </a:rPr>
+                        <a:t>stalls from 60 nm</a:t>
+                      </a:r>
+                    </a:p>
+                  </a:txBody>
+                  <a:tcPr marL="54864" marR="54864" marT="18288" marB="18288">
+                    <a:solidFill>
+                      <a:srgbClr val="ECF1F6"/>
+                    </a:solidFill>
+                  </a:tcPr>
+                </a:tc>
+                <a:tc>
+                  <a:txBody>
+                    <a:bodyPr wrap="square"/>
+                    <a:lstStyle/>
+                    <a:p>
+                      <a:r>
+                        <a:rPr sz="1100" b="0">
+                          <a:solidFill>
+                            <a:srgbClr val="282828"/>
+                          </a:solidFill>
+                          <a:latin typeface="Arial"/>
+                        </a:rPr>
+                        <a:t>3 pm from 200 nm in 19 cycles</a:t>
+                      </a:r>
+                    </a:p>
+                  </a:txBody>
+                  <a:tcPr marL="54864" marR="54864" marT="18288" marB="18288">
+                    <a:solidFill>
+                      <a:srgbClr val="ECF1F6"/>
+                    </a:solidFill>
+                  </a:tcPr>
+                </a:tc>
+                <a:tc>
+                  <a:txBody>
+                    <a:bodyPr wrap="square"/>
+                    <a:lstStyle/>
+                    <a:p>
+                      <a:r>
+                        <a:rPr sz="1100" b="0">
+                          <a:solidFill>
+                            <a:srgbClr val="282828"/>
+                          </a:solidFill>
+                          <a:latin typeface="Arial"/>
+                        </a:rPr>
+                        <a:t>3 pm from 300 nm in 43 cycles</a:t>
+                      </a:r>
+                    </a:p>
+                  </a:txBody>
+                  <a:tcPr marL="54864" marR="54864" marT="18288" marB="18288">
+                    <a:solidFill>
+                      <a:srgbClr val="ECF1F6"/>
+                    </a:solidFill>
+                  </a:tcPr>
+                </a:tc>
+              </a:tr>
+              <a:tr h="468630">
+                <a:tc>
+                  <a:txBody>
+                    <a:bodyPr wrap="square"/>
+                    <a:lstStyle/>
+                    <a:p>
+                      <a:r>
+                        <a:rPr sz="1100" b="0">
+                          <a:solidFill>
+                            <a:srgbClr val="282828"/>
+                          </a:solidFill>
+                          <a:latin typeface="Arial"/>
+                        </a:rPr>
+                        <a:t>vector Zernike, 100 nm pokes (fold gate)</a:t>
+                      </a:r>
+                    </a:p>
+                  </a:txBody>
+                  <a:tcPr marL="54864" marR="54864" marT="18288" marB="18288">
+                    <a:solidFill>
+                      <a:srgbClr val="FFFFFF"/>
+                    </a:solidFill>
+                  </a:tcPr>
+                </a:tc>
+                <a:tc>
+                  <a:txBody>
+                    <a:bodyPr wrap="square"/>
+                    <a:lstStyle/>
+                    <a:p>
+                      <a:r>
+                        <a:rPr sz="1100" b="0">
+                          <a:solidFill>
+                            <a:srgbClr val="282828"/>
+                          </a:solidFill>
+                          <a:latin typeface="Arial"/>
+                        </a:rPr>
+                        <a:t>19.6 pm, fails</a:t>
+                      </a:r>
+                    </a:p>
+                  </a:txBody>
+                  <a:tcPr marL="54864" marR="54864" marT="18288" marB="18288">
+                    <a:solidFill>
+                      <a:srgbClr val="FFFFFF"/>
+                    </a:solidFill>
+                  </a:tcPr>
+                </a:tc>
+                <a:tc>
+                  <a:txBody>
+                    <a:bodyPr wrap="square"/>
+                    <a:lstStyle/>
+                    <a:p>
+                      <a:r>
+                        <a:rPr sz="1100" b="0">
+                          <a:solidFill>
+                            <a:srgbClr val="282828"/>
+                          </a:solidFill>
+                          <a:latin typeface="Arial"/>
+                        </a:rPr>
+                        <a:t>634 pm raw; 0.054 pm calibrated: passes</a:t>
+                      </a:r>
+                    </a:p>
+                  </a:txBody>
+                  <a:tcPr marL="54864" marR="54864" marT="18288" marB="18288">
+                    <a:solidFill>
+                      <a:srgbClr val="FFFFFF"/>
+                    </a:solidFill>
+                  </a:tcPr>
+                </a:tc>
+                <a:tc>
+                  <a:txBody>
+                    <a:bodyPr wrap="square"/>
+                    <a:lstStyle/>
+                    <a:p>
+                      <a:r>
+                        <a:rPr sz="1100" b="0">
+                          <a:solidFill>
+                            <a:srgbClr val="282828"/>
+                          </a:solidFill>
+                          <a:latin typeface="Arial"/>
+                        </a:rPr>
+                        <a:t>0.05 pm</a:t>
                       </a:r>
                     </a:p>
                   </a:txBody>
@@ -18398,7 +18805,7 @@
                           </a:solidFill>
                           <a:latin typeface="Arial"/>
                         </a:rPr>
-                        <a:t>interferometer servo: 3 pm noise only / under the 2 pm walk</a:t>
+                        <a:t>stepped pinhole, 100 nm pokes</a:t>
                       </a:r>
                     </a:p>
                   </a:txBody>
@@ -18420,7 +18827,7 @@
                           </a:solidFill>
                           <a:latin typeface="Arial"/>
                         </a:rPr>
-                        <a:t>3.4e13 / never</a:t>
+                        <a:t>94 pm, fails</a:t>
                       </a:r>
                     </a:p>
                   </a:txBody>
@@ -18442,7 +18849,7 @@
                           </a:solidFill>
                           <a:latin typeface="Arial"/>
                         </a:rPr>
-                        <a:t>5.4e12 / 1.7e13</a:t>
+                        <a:t>0.27 pm: passes</a:t>
                       </a:r>
                     </a:p>
                   </a:txBody>
@@ -18464,7 +18871,7 @@
                           </a:solidFill>
                           <a:latin typeface="Arial"/>
                         </a:rPr>
-                        <a:t>5.5e12 / 2.0e13</a:t>
+                        <a:t>1.9 pm</a:t>
                       </a:r>
                     </a:p>
                   </a:txBody>
@@ -18475,20 +18882,20 @@
                   </a:tcPr>
                 </a:tc>
               </a:tr>
-              <a:tr h="280035">
-                <a:tc>
-                  <a:txBody>
-                    <a:bodyPr wrap="square"/>
-                    <a:lstStyle/>
-                    <a:p>
-                      <a:r>
-                        <a:rPr sz="1100" b="0">
-                          <a:solidFill>
-                            <a:srgbClr val="282828"/>
-                          </a:solidFill>
-                          <a:latin typeface="Arial"/>
-                        </a:rPr>
-                        <a:t>sensors' servo under the walk: vector / pinhole / stepped</a:t>
+              <a:tr h="468630">
+                <a:tc>
+                  <a:txBody>
+                    <a:bodyPr wrap="square"/>
+                    <a:lstStyle/>
+                    <a:p>
+                      <a:r>
+                        <a:rPr sz="1100" b="0">
+                          <a:solidFill>
+                            <a:srgbClr val="282828"/>
+                          </a:solidFill>
+                          <a:latin typeface="Arial"/>
+                        </a:rPr>
+                        <a:t>sensors' capture with unwrapping (vector / pinhole / stepped)</a:t>
                       </a:r>
                     </a:p>
                   </a:txBody>
@@ -18532,305 +18939,35 @@
                           </a:solidFill>
                           <a:latin typeface="Arial"/>
                         </a:rPr>
-                        <a:t>5.7e12 / 7.4e12 / 7.9e12</a:t>
-                      </a:r>
-                    </a:p>
-                  </a:txBody>
-                  <a:tcPr marL="54864" marR="54864" marT="18288" marB="18288">
-                    <a:solidFill>
-                      <a:srgbClr val="FFFFFF"/>
-                    </a:solidFill>
-                  </a:tcPr>
-                </a:tc>
-                <a:tc>
-                  <a:txBody>
-                    <a:bodyPr wrap="square"/>
-                    <a:lstStyle/>
-                    <a:p>
-                      <a:r>
-                        <a:rPr sz="1100" b="0">
-                          <a:solidFill>
-                            <a:srgbClr val="282828"/>
-                          </a:solidFill>
-                          <a:latin typeface="Arial"/>
-                        </a:rPr>
-                        <a:t>5.3e12 / 7.0e12 / 7.5e12</a:t>
-                      </a:r>
-                    </a:p>
-                  </a:txBody>
-                  <a:tcPr marL="54864" marR="54864" marT="18288" marB="18288">
-                    <a:solidFill>
-                      <a:srgbClr val="FFFFFF"/>
-                    </a:solidFill>
-                  </a:tcPr>
-                </a:tc>
-              </a:tr>
-              <a:tr h="280035">
-                <a:tc>
-                  <a:txBody>
-                    <a:bodyPr wrap="square"/>
-                    <a:lstStyle/>
-                    <a:p>
-                      <a:r>
-                        <a:rPr sz="1100" b="0">
-                          <a:solidFill>
-                            <a:srgbClr val="282828"/>
-                          </a:solidFill>
-                          <a:latin typeface="Arial"/>
-                        </a:rPr>
-                        <a:t>capture with unwrapping</a:t>
-                      </a:r>
-                    </a:p>
-                  </a:txBody>
-                  <a:tcPr marL="54864" marR="54864" marT="18288" marB="18288">
-                    <a:solidFill>
-                      <a:srgbClr val="ECF1F6"/>
-                    </a:solidFill>
-                  </a:tcPr>
-                </a:tc>
-                <a:tc>
-                  <a:txBody>
-                    <a:bodyPr wrap="square"/>
-                    <a:lstStyle/>
-                    <a:p>
-                      <a:r>
-                        <a:rPr sz="1100" b="0">
-                          <a:solidFill>
-                            <a:srgbClr val="282828"/>
-                          </a:solidFill>
-                          <a:latin typeface="Arial"/>
-                        </a:rPr>
-                        <a:t>stalls from 60 nm</a:t>
-                      </a:r>
-                    </a:p>
-                  </a:txBody>
-                  <a:tcPr marL="54864" marR="54864" marT="18288" marB="18288">
-                    <a:solidFill>
-                      <a:srgbClr val="ECF1F6"/>
-                    </a:solidFill>
-                  </a:tcPr>
-                </a:tc>
-                <a:tc>
-                  <a:txBody>
-                    <a:bodyPr wrap="square"/>
-                    <a:lstStyle/>
-                    <a:p>
-                      <a:r>
-                        <a:rPr sz="1100" b="0">
-                          <a:solidFill>
-                            <a:srgbClr val="282828"/>
-                          </a:solidFill>
-                          <a:latin typeface="Arial"/>
-                        </a:rPr>
-                        <a:t>3 pm from 200 nm in 19 cycles</a:t>
-                      </a:r>
-                    </a:p>
-                  </a:txBody>
-                  <a:tcPr marL="54864" marR="54864" marT="18288" marB="18288">
-                    <a:solidFill>
-                      <a:srgbClr val="ECF1F6"/>
-                    </a:solidFill>
-                  </a:tcPr>
-                </a:tc>
-                <a:tc>
-                  <a:txBody>
-                    <a:bodyPr wrap="square"/>
-                    <a:lstStyle/>
-                    <a:p>
-                      <a:r>
-                        <a:rPr sz="1100" b="0">
-                          <a:solidFill>
-                            <a:srgbClr val="282828"/>
-                          </a:solidFill>
-                          <a:latin typeface="Arial"/>
-                        </a:rPr>
-                        <a:t>3 pm from 300 nm in 43 cycles</a:t>
-                      </a:r>
-                    </a:p>
-                  </a:txBody>
-                  <a:tcPr marL="54864" marR="54864" marT="18288" marB="18288">
-                    <a:solidFill>
-                      <a:srgbClr val="ECF1F6"/>
-                    </a:solidFill>
-                  </a:tcPr>
-                </a:tc>
-              </a:tr>
-              <a:tr h="280035">
-                <a:tc>
-                  <a:txBody>
-                    <a:bodyPr wrap="square"/>
-                    <a:lstStyle/>
-                    <a:p>
-                      <a:r>
-                        <a:rPr sz="1100" b="0">
-                          <a:solidFill>
-                            <a:srgbClr val="282828"/>
-                          </a:solidFill>
-                          <a:latin typeface="Arial"/>
-                        </a:rPr>
-                        <a:t>vector Zernike, 100 nm pokes (fold gate)</a:t>
-                      </a:r>
-                    </a:p>
-                  </a:txBody>
-                  <a:tcPr marL="54864" marR="54864" marT="18288" marB="18288">
-                    <a:solidFill>
-                      <a:srgbClr val="FFFFFF"/>
-                    </a:solidFill>
-                  </a:tcPr>
-                </a:tc>
-                <a:tc>
-                  <a:txBody>
-                    <a:bodyPr wrap="square"/>
-                    <a:lstStyle/>
-                    <a:p>
-                      <a:r>
-                        <a:rPr sz="1100" b="0">
-                          <a:solidFill>
-                            <a:srgbClr val="282828"/>
-                          </a:solidFill>
-                          <a:latin typeface="Arial"/>
-                        </a:rPr>
-                        <a:t>19.6 pm, fails</a:t>
-                      </a:r>
-                    </a:p>
-                  </a:txBody>
-                  <a:tcPr marL="54864" marR="54864" marT="18288" marB="18288">
-                    <a:solidFill>
-                      <a:srgbClr val="FFFFFF"/>
-                    </a:solidFill>
-                  </a:tcPr>
-                </a:tc>
-                <a:tc>
-                  <a:txBody>
-                    <a:bodyPr wrap="square"/>
-                    <a:lstStyle/>
-                    <a:p>
-                      <a:r>
-                        <a:rPr sz="1100" b="0">
-                          <a:solidFill>
-                            <a:srgbClr val="282828"/>
-                          </a:solidFill>
-                          <a:latin typeface="Arial"/>
-                        </a:rPr>
-                        <a:t>634 pm raw; 0.054 pm calibrated: passes</a:t>
-                      </a:r>
-                    </a:p>
-                  </a:txBody>
-                  <a:tcPr marL="54864" marR="54864" marT="18288" marB="18288">
-                    <a:solidFill>
-                      <a:srgbClr val="FFFFFF"/>
-                    </a:solidFill>
-                  </a:tcPr>
-                </a:tc>
-                <a:tc>
-                  <a:txBody>
-                    <a:bodyPr wrap="square"/>
-                    <a:lstStyle/>
-                    <a:p>
-                      <a:r>
-                        <a:rPr sz="1100" b="0">
-                          <a:solidFill>
-                            <a:srgbClr val="282828"/>
-                          </a:solidFill>
-                          <a:latin typeface="Arial"/>
-                        </a:rPr>
-                        <a:t>0.05 pm</a:t>
-                      </a:r>
-                    </a:p>
-                  </a:txBody>
-                  <a:tcPr marL="54864" marR="54864" marT="18288" marB="18288">
-                    <a:solidFill>
-                      <a:srgbClr val="FFFFFF"/>
-                    </a:solidFill>
-                  </a:tcPr>
-                </a:tc>
-              </a:tr>
-              <a:tr h="280035">
-                <a:tc>
-                  <a:txBody>
-                    <a:bodyPr wrap="square"/>
-                    <a:lstStyle/>
-                    <a:p>
-                      <a:r>
-                        <a:rPr sz="1100" b="0">
-                          <a:solidFill>
-                            <a:srgbClr val="282828"/>
-                          </a:solidFill>
-                          <a:latin typeface="Arial"/>
-                        </a:rPr>
-                        <a:t>stepped pinhole, 100 nm pokes</a:t>
-                      </a:r>
-                    </a:p>
-                  </a:txBody>
-                  <a:tcPr marL="54864" marR="54864" marT="18288" marB="18288">
-                    <a:solidFill>
-                      <a:srgbClr val="ECF1F6"/>
-                    </a:solidFill>
-                  </a:tcPr>
-                </a:tc>
-                <a:tc>
-                  <a:txBody>
-                    <a:bodyPr wrap="square"/>
-                    <a:lstStyle/>
-                    <a:p>
-                      <a:r>
-                        <a:rPr sz="1100" b="0">
-                          <a:solidFill>
-                            <a:srgbClr val="282828"/>
-                          </a:solidFill>
-                          <a:latin typeface="Arial"/>
-                        </a:rPr>
-                        <a:t>94 pm, fails</a:t>
-                      </a:r>
-                    </a:p>
-                  </a:txBody>
-                  <a:tcPr marL="54864" marR="54864" marT="18288" marB="18288">
-                    <a:solidFill>
-                      <a:srgbClr val="ECF1F6"/>
-                    </a:solidFill>
-                  </a:tcPr>
-                </a:tc>
-                <a:tc>
-                  <a:txBody>
-                    <a:bodyPr wrap="square"/>
-                    <a:lstStyle/>
-                    <a:p>
-                      <a:r>
-                        <a:rPr sz="1100" b="0">
-                          <a:solidFill>
-                            <a:srgbClr val="282828"/>
-                          </a:solidFill>
-                          <a:latin typeface="Arial"/>
-                        </a:rPr>
-                        <a:t>0.27 pm: passes</a:t>
-                      </a:r>
-                    </a:p>
-                  </a:txBody>
-                  <a:tcPr marL="54864" marR="54864" marT="18288" marB="18288">
-                    <a:solidFill>
-                      <a:srgbClr val="ECF1F6"/>
-                    </a:solidFill>
-                  </a:tcPr>
-                </a:tc>
-                <a:tc>
-                  <a:txBody>
-                    <a:bodyPr wrap="square"/>
-                    <a:lstStyle/>
-                    <a:p>
-                      <a:r>
-                        <a:rPr sz="1100" b="0">
-                          <a:solidFill>
-                            <a:srgbClr val="282828"/>
-                          </a:solidFill>
-                          <a:latin typeface="Arial"/>
-                        </a:rPr>
-                        <a:t>1.9 pm</a:t>
-                      </a:r>
-                    </a:p>
-                  </a:txBody>
-                  <a:tcPr marL="54864" marR="54864" marT="18288" marB="18288">
-                    <a:solidFill>
-                      <a:srgbClr val="ECF1F6"/>
+                        <a:t>3 pm from 60 nm in 21 / 19 cycles; from 100 nm both diverge; the stepped reading never (its one-frame estimate past the fold)</a:t>
+                      </a:r>
+                    </a:p>
+                  </a:txBody>
+                  <a:tcPr marL="54864" marR="54864" marT="18288" marB="18288">
+                    <a:solidFill>
+                      <a:srgbClr val="FFFFFF"/>
+                    </a:solidFill>
+                  </a:tcPr>
+                </a:tc>
+                <a:tc>
+                  <a:txBody>
+                    <a:bodyPr wrap="square"/>
+                    <a:lstStyle/>
+                    <a:p>
+                      <a:r>
+                        <a:rPr sz="1100" b="0">
+                          <a:solidFill>
+                            <a:srgbClr val="282828"/>
+                          </a:solidFill>
+                          <a:latin typeface="Arial"/>
+                        </a:rPr>
+                        <a:t>—</a:t>
+                      </a:r>
+                    </a:p>
+                  </a:txBody>
+                  <a:tcPr marL="54864" marR="54864" marT="18288" marB="18288">
+                    <a:solidFill>
+                      <a:srgbClr val="FFFFFF"/>
                     </a:solidFill>
                   </a:tcPr>
                 </a:tc>
@@ -18847,7 +18984,7 @@
         </p:nvSpPr>
         <p:spPr>
           <a:xfrm>
-            <a:off x="411480" y="3965066"/>
+            <a:off x="411480" y="5376672"/>
             <a:ext cx="11368735" cy="274320"/>
           </a:xfrm>
           <a:prstGeom prst="rect">
@@ -18902,7 +19039,7 @@
         </p:nvSpPr>
         <p:spPr>
           <a:xfrm>
-            <a:off x="411480" y="6015608"/>
+            <a:off x="411480" y="7427214"/>
             <a:ext cx="11368735" cy="274320"/>
           </a:xfrm>
           <a:prstGeom prst="rect">
@@ -18928,7 +19065,7 @@
                 </a:solidFill>
                 <a:latin typeface="Arial"/>
               </a:rPr>
-              <a:t>Run tags oapifo2, oapifol2, oapdesc2, oapsens22, vqw22, vmap22, oapuw2, lensuw2, oaploop22; tg_psi_dm96_oap/REPORT_reflective.md (TO, 2026-09-16).</a:t>
+              <a:t>Run tags oapifo2, oapifol2, oapdesc2, oapsens22, vqw22, vmap22, oapuw2, lensuw2, oaploop22, oapcap22 and oapsens385 (the Mac, 2026-09-16); tg_psi_dm96_oap/REPORT_reflective.md (TO, 2026-09-16).</a:t>
             </a:r>
           </a:p>
         </p:txBody>
@@ -23132,7 +23269,7 @@
                 </a:solidFill>
                 <a:latin typeface="Arial"/>
               </a:rPr>
-              <a:t>How every configuration was analyzed</a:t>
+              <a:t>Next: the interferometer redone on the improved bench</a:t>
             </a:r>
           </a:p>
           <a:p>
@@ -23148,7 +23285,7 @@
                 </a:solidFill>
                 <a:latin typeface="Arial"/>
               </a:rPr>
-              <a:t>One repeatable path, ten steps, the same for all four approaches: a new sensor is a new reading class in the shared runner plus its gate, then steps 4 to 10 unchanged</a:t>
+              <a:t>Three defects of the modeled bench were found and fixed on 2026-09-17: the record's numbers describe a bench we will not build, so they are being redone on the one we will</a:t>
             </a:r>
           </a:p>
         </p:txBody>
@@ -23197,885 +23334,102 @@
           </a:p>
         </p:txBody>
       </p:sp>
-      <p:graphicFrame>
-        <p:nvGraphicFramePr>
-          <p:cNvPr id="4" name="Table 3"/>
-          <p:cNvGraphicFramePr>
-            <a:graphicFrameLocks noGrp="1"/>
-          </p:cNvGraphicFramePr>
-          <p:nvPr/>
-        </p:nvGraphicFramePr>
-        <p:xfrm>
-          <a:off x="411480" y="1298448"/>
-          <a:ext cx="5806439" cy="3188970"/>
-        </p:xfrm>
-        <a:graphic>
-          <a:graphicData uri="http://schemas.openxmlformats.org/drawingml/2006/table">
-            <a:tbl>
-              <a:tblPr firstRow="1" bandRow="1">
-                <a:tableStyleId>{5C22544A-7EE6-4342-B048-85BDC9FD1C3A}</a:tableStyleId>
-              </a:tblPr>
-              <a:tblGrid>
-                <a:gridCol w="436880"/>
-                <a:gridCol w="2963389"/>
-                <a:gridCol w="2406170"/>
-              </a:tblGrid>
-              <a:tr h="280035">
-                <a:tc>
-                  <a:txBody>
-                    <a:bodyPr wrap="square"/>
-                    <a:lstStyle/>
-                    <a:p>
-                      <a:r>
-                        <a:rPr sz="1100" b="1">
-                          <a:solidFill>
-                            <a:srgbClr val="FFFFFF"/>
-                          </a:solidFill>
-                          <a:latin typeface="Arial"/>
-                        </a:rPr>
-                        <a:t>step</a:t>
-                      </a:r>
-                    </a:p>
-                  </a:txBody>
-                  <a:tcPr marL="54864" marR="54864" marT="18288" marB="18288">
-                    <a:solidFill>
-                      <a:srgbClr val="1F4E79"/>
-                    </a:solidFill>
-                  </a:tcPr>
-                </a:tc>
-                <a:tc>
-                  <a:txBody>
-                    <a:bodyPr wrap="square"/>
-                    <a:lstStyle/>
-                    <a:p>
-                      <a:r>
-                        <a:rPr sz="1100" b="1">
-                          <a:solidFill>
-                            <a:srgbClr val="FFFFFF"/>
-                          </a:solidFill>
-                          <a:latin typeface="Arial"/>
-                        </a:rPr>
-                        <a:t>what</a:t>
-                      </a:r>
-                    </a:p>
-                  </a:txBody>
-                  <a:tcPr marL="54864" marR="54864" marT="18288" marB="18288">
-                    <a:solidFill>
-                      <a:srgbClr val="1F4E79"/>
-                    </a:solidFill>
-                  </a:tcPr>
-                </a:tc>
-                <a:tc>
-                  <a:txBody>
-                    <a:bodyPr wrap="square"/>
-                    <a:lstStyle/>
-                    <a:p>
-                      <a:r>
-                        <a:rPr sz="1100" b="1">
-                          <a:solidFill>
-                            <a:srgbClr val="FFFFFF"/>
-                          </a:solidFill>
-                          <a:latin typeface="Arial"/>
-                        </a:rPr>
-                        <a:t>gate or output</a:t>
-                      </a:r>
-                    </a:p>
-                  </a:txBody>
-                  <a:tcPr marL="54864" marR="54864" marT="18288" marB="18288">
-                    <a:solidFill>
-                      <a:srgbClr val="1F4E79"/>
-                    </a:solidFill>
-                  </a:tcPr>
-                </a:tc>
-              </a:tr>
-              <a:tr h="468630">
-                <a:tc>
-                  <a:txBody>
-                    <a:bodyPr wrap="square"/>
-                    <a:lstStyle/>
-                    <a:p>
-                      <a:r>
-                        <a:rPr sz="1100" b="0">
-                          <a:solidFill>
-                            <a:srgbClr val="282828"/>
-                          </a:solidFill>
-                          <a:latin typeface="Arial"/>
-                        </a:rPr>
-                        <a:t>1</a:t>
-                      </a:r>
-                    </a:p>
-                  </a:txBody>
-                  <a:tcPr marL="54864" marR="54864" marT="18288" marB="18288">
-                    <a:solidFill>
-                      <a:srgbClr val="FFFFFF"/>
-                    </a:solidFill>
-                  </a:tcPr>
-                </a:tc>
-                <a:tc>
-                  <a:txBody>
-                    <a:bodyPr wrap="square"/>
-                    <a:lstStyle/>
-                    <a:p>
-                      <a:r>
-                        <a:rPr sz="1100" b="0">
-                          <a:solidFill>
-                            <a:srgbClr val="282828"/>
-                          </a:solidFill>
-                          <a:latin typeface="Arial"/>
-                        </a:rPr>
-                        <a:t>one parameter sheet and one runner per approach; batch wrappers</a:t>
-                      </a:r>
-                    </a:p>
-                  </a:txBody>
-                  <a:tcPr marL="54864" marR="54864" marT="18288" marB="18288">
-                    <a:solidFill>
-                      <a:srgbClr val="FFFFFF"/>
-                    </a:solidFill>
-                  </a:tcPr>
-                </a:tc>
-                <a:tc>
-                  <a:txBody>
-                    <a:bodyPr wrap="square"/>
-                    <a:lstStyle/>
-                    <a:p>
-                      <a:r>
-                        <a:rPr sz="1100" b="0">
-                          <a:solidFill>
-                            <a:srgbClr val="282828"/>
-                          </a:solidFill>
-                          <a:latin typeface="Arial"/>
-                        </a:rPr>
-                        <a:t>every number has a run tag</a:t>
-                      </a:r>
-                    </a:p>
-                  </a:txBody>
-                  <a:tcPr marL="54864" marR="54864" marT="18288" marB="18288">
-                    <a:solidFill>
-                      <a:srgbClr val="FFFFFF"/>
-                    </a:solidFill>
-                  </a:tcPr>
-                </a:tc>
-              </a:tr>
-              <a:tr h="657225">
-                <a:tc>
-                  <a:txBody>
-                    <a:bodyPr wrap="square"/>
-                    <a:lstStyle/>
-                    <a:p>
-                      <a:r>
-                        <a:rPr sz="1100" b="0">
-                          <a:solidFill>
-                            <a:srgbClr val="282828"/>
-                          </a:solidFill>
-                          <a:latin typeface="Arial"/>
-                        </a:rPr>
-                        <a:t>2</a:t>
-                      </a:r>
-                    </a:p>
-                  </a:txBody>
-                  <a:tcPr marL="54864" marR="54864" marT="18288" marB="18288">
-                    <a:solidFill>
-                      <a:srgbClr val="ECF1F6"/>
-                    </a:solidFill>
-                  </a:tcPr>
-                </a:tc>
-                <a:tc>
-                  <a:txBody>
-                    <a:bodyPr wrap="square"/>
-                    <a:lstStyle/>
-                    <a:p>
-                      <a:r>
-                        <a:rPr sz="1100" b="0">
-                          <a:solidFill>
-                            <a:srgbClr val="282828"/>
-                          </a:solidFill>
-                          <a:latin typeface="Arial"/>
-                        </a:rPr>
-                        <a:t>build the bench from the sheet, trace it; clearance of end bodies and node parts; detector-leg focus; sampling budget</a:t>
-                      </a:r>
-                    </a:p>
-                  </a:txBody>
-                  <a:tcPr marL="54864" marR="54864" marT="18288" marB="18288">
-                    <a:solidFill>
-                      <a:srgbClr val="ECF1F6"/>
-                    </a:solidFill>
-                  </a:tcPr>
-                </a:tc>
-                <a:tc>
-                  <a:txBody>
-                    <a:bodyPr wrap="square"/>
-                    <a:lstStyle/>
-                    <a:p>
-                      <a:r>
-                        <a:rPr sz="1100" b="0">
-                          <a:solidFill>
-                            <a:srgbClr val="282828"/>
-                          </a:solidFill>
-                          <a:latin typeface="Arial"/>
-                        </a:rPr>
-                        <a:t>every part clears by 25 mm; 6 pixels across the mask feature</a:t>
-                      </a:r>
-                    </a:p>
-                  </a:txBody>
-                  <a:tcPr marL="54864" marR="54864" marT="18288" marB="18288">
-                    <a:solidFill>
-                      <a:srgbClr val="ECF1F6"/>
-                    </a:solidFill>
-                  </a:tcPr>
-                </a:tc>
-              </a:tr>
-              <a:tr h="657225">
-                <a:tc>
-                  <a:txBody>
-                    <a:bodyPr wrap="square"/>
-                    <a:lstStyle/>
-                    <a:p>
-                      <a:r>
-                        <a:rPr sz="1100" b="0">
-                          <a:solidFill>
-                            <a:srgbClr val="282828"/>
-                          </a:solidFill>
-                          <a:latin typeface="Arial"/>
-                        </a:rPr>
-                        <a:t>3</a:t>
-                      </a:r>
-                    </a:p>
-                  </a:txBody>
-                  <a:tcPr marL="54864" marR="54864" marT="18288" marB="18288">
-                    <a:solidFill>
-                      <a:srgbClr val="FFFFFF"/>
-                    </a:solidFill>
-                  </a:tcPr>
-                </a:tc>
-                <a:tc>
-                  <a:txBody>
-                    <a:bodyPr wrap="square"/>
-                    <a:lstStyle/>
-                    <a:p>
-                      <a:r>
-                        <a:rPr sz="1100" b="0">
-                          <a:solidFill>
-                            <a:srgbClr val="282828"/>
-                          </a:solidFill>
-                          <a:latin typeface="Arial"/>
-                        </a:rPr>
-                        <a:t>model gates before any number</a:t>
-                      </a:r>
-                    </a:p>
-                  </a:txBody>
-                  <a:tcPr marL="54864" marR="54864" marT="18288" marB="18288">
-                    <a:solidFill>
-                      <a:srgbClr val="FFFFFF"/>
-                    </a:solidFill>
-                  </a:tcPr>
-                </a:tc>
-                <a:tc>
-                  <a:txBody>
-                    <a:bodyPr wrap="square"/>
-                    <a:lstStyle/>
-                    <a:p>
-                      <a:r>
-                        <a:rPr sz="1100" b="0">
-                          <a:solidFill>
-                            <a:srgbClr val="282828"/>
-                          </a:solidFill>
-                          <a:latin typeface="Arial"/>
-                        </a:rPr>
-                        <a:t>mask round trip, reference-wave surrogate, working-state amplitude, the reading on 100 nm pokes</a:t>
-                      </a:r>
-                    </a:p>
-                  </a:txBody>
-                  <a:tcPr marL="54864" marR="54864" marT="18288" marB="18288">
-                    <a:solidFill>
-                      <a:srgbClr val="FFFFFF"/>
-                    </a:solidFill>
-                  </a:tcPr>
-                </a:tc>
-              </a:tr>
-              <a:tr h="657225">
-                <a:tc>
-                  <a:txBody>
-                    <a:bodyPr wrap="square"/>
-                    <a:lstStyle/>
-                    <a:p>
-                      <a:r>
-                        <a:rPr sz="1100" b="0">
-                          <a:solidFill>
-                            <a:srgbClr val="282828"/>
-                          </a:solidFill>
-                          <a:latin typeface="Arial"/>
-                        </a:rPr>
-                        <a:t>4</a:t>
-                      </a:r>
-                    </a:p>
-                  </a:txBody>
-                  <a:tcPr marL="54864" marR="54864" marT="18288" marB="18288">
-                    <a:solidFill>
-                      <a:srgbClr val="ECF1F6"/>
-                    </a:solidFill>
-                  </a:tcPr>
-                </a:tc>
-                <a:tc>
-                  <a:txBody>
-                    <a:bodyPr wrap="square"/>
-                    <a:lstStyle/>
-                    <a:p>
-                      <a:r>
-                        <a:rPr sz="1100" b="0">
-                          <a:solidFill>
-                            <a:srgbClr val="282828"/>
-                          </a:solidFill>
-                          <a:latin typeface="Arial"/>
-                        </a:rPr>
-                        <a:t>calibration: the response matrix measured through the sensor, on the 30 nm working surface</a:t>
-                      </a:r>
-                    </a:p>
-                  </a:txBody>
-                  <a:tcPr marL="54864" marR="54864" marT="18288" marB="18288">
-                    <a:solidFill>
-                      <a:srgbClr val="ECF1F6"/>
-                    </a:solidFill>
-                  </a:tcPr>
-                </a:tc>
-                <a:tc>
-                  <a:txBody>
-                    <a:bodyPr wrap="square"/>
-                    <a:lstStyle/>
-                    <a:p>
-                      <a:r>
-                        <a:rPr sz="1100" b="0">
-                          <a:solidFill>
-                            <a:srgbClr val="282828"/>
-                          </a:solidFill>
-                          <a:latin typeface="Arial"/>
-                        </a:rPr>
-                        <a:t>piston null carried; stencil-site fit</a:t>
-                      </a:r>
-                    </a:p>
-                  </a:txBody>
-                  <a:tcPr marL="54864" marR="54864" marT="18288" marB="18288">
-                    <a:solidFill>
-                      <a:srgbClr val="ECF1F6"/>
-                    </a:solidFill>
-                  </a:tcPr>
-                </a:tc>
-              </a:tr>
-              <a:tr h="468630">
-                <a:tc>
-                  <a:txBody>
-                    <a:bodyPr wrap="square"/>
-                    <a:lstStyle/>
-                    <a:p>
-                      <a:r>
-                        <a:rPr sz="1100" b="0">
-                          <a:solidFill>
-                            <a:srgbClr val="282828"/>
-                          </a:solidFill>
-                          <a:latin typeface="Arial"/>
-                        </a:rPr>
-                        <a:t>5</a:t>
-                      </a:r>
-                    </a:p>
-                  </a:txBody>
-                  <a:tcPr marL="54864" marR="54864" marT="18288" marB="18288">
-                    <a:solidFill>
-                      <a:srgbClr val="FFFFFF"/>
-                    </a:solidFill>
-                  </a:tcPr>
-                </a:tc>
-                <a:tc>
-                  <a:txBody>
-                    <a:bodyPr wrap="square"/>
-                    <a:lstStyle/>
-                    <a:p>
-                      <a:r>
-                        <a:rPr sz="1100" b="0">
-                          <a:solidFill>
-                            <a:srgbClr val="282828"/>
-                          </a:solidFill>
-                          <a:latin typeface="Arial"/>
-                        </a:rPr>
-                        <a:t>rows on the working surface: 10 nm on one actuator; 1 nm on 47 sites; dense 10 nm</a:t>
-                      </a:r>
-                    </a:p>
-                  </a:txBody>
-                  <a:tcPr marL="54864" marR="54864" marT="18288" marB="18288">
-                    <a:solidFill>
-                      <a:srgbClr val="FFFFFF"/>
-                    </a:solidFill>
-                  </a:tcPr>
-                </a:tc>
-                <a:tc>
-                  <a:txBody>
-                    <a:bodyPr wrap="square"/>
-                    <a:lstStyle/>
-                    <a:p>
-                      <a:r>
-                        <a:rPr sz="1100" b="0">
-                          <a:solidFill>
-                            <a:srgbClr val="282828"/>
-                          </a:solidFill>
-                          <a:latin typeface="Arial"/>
-                        </a:rPr>
-                        <a:t>gain, floor, SNR</a:t>
-                      </a:r>
-                    </a:p>
-                  </a:txBody>
-                  <a:tcPr marL="54864" marR="54864" marT="18288" marB="18288">
-                    <a:solidFill>
-                      <a:srgbClr val="FFFFFF"/>
-                    </a:solidFill>
-                  </a:tcPr>
-                </a:tc>
-              </a:tr>
-            </a:tbl>
-          </a:graphicData>
-        </a:graphic>
-      </p:graphicFrame>
-      <p:graphicFrame>
-        <p:nvGraphicFramePr>
-          <p:cNvPr id="5" name="Table 4"/>
-          <p:cNvGraphicFramePr>
-            <a:graphicFrameLocks noGrp="1"/>
-          </p:cNvGraphicFramePr>
-          <p:nvPr/>
-        </p:nvGraphicFramePr>
-        <p:xfrm>
-          <a:off x="6400800" y="1298448"/>
-          <a:ext cx="5394959" cy="2777490"/>
-        </p:xfrm>
-        <a:graphic>
-          <a:graphicData uri="http://schemas.openxmlformats.org/drawingml/2006/table">
-            <a:tbl>
-              <a:tblPr firstRow="1" bandRow="1">
-                <a:tableStyleId>{5C22544A-7EE6-4342-B048-85BDC9FD1C3A}</a:tableStyleId>
-              </a:tblPr>
-              <a:tblGrid>
-                <a:gridCol w="410464"/>
-                <a:gridCol w="3846730"/>
-                <a:gridCol w="1137765"/>
-              </a:tblGrid>
-              <a:tr h="262890">
-                <a:tc>
-                  <a:txBody>
-                    <a:bodyPr wrap="square"/>
-                    <a:lstStyle/>
-                    <a:p>
-                      <a:r>
-                        <a:rPr sz="1000" b="1">
-                          <a:solidFill>
-                            <a:srgbClr val="FFFFFF"/>
-                          </a:solidFill>
-                          <a:latin typeface="Arial"/>
-                        </a:rPr>
-                        <a:t>step</a:t>
-                      </a:r>
-                    </a:p>
-                  </a:txBody>
-                  <a:tcPr marL="54864" marR="54864" marT="18288" marB="18288">
-                    <a:solidFill>
-                      <a:srgbClr val="1F4E79"/>
-                    </a:solidFill>
-                  </a:tcPr>
-                </a:tc>
-                <a:tc>
-                  <a:txBody>
-                    <a:bodyPr wrap="square"/>
-                    <a:lstStyle/>
-                    <a:p>
-                      <a:r>
-                        <a:rPr sz="1000" b="1">
-                          <a:solidFill>
-                            <a:srgbClr val="FFFFFF"/>
-                          </a:solidFill>
-                          <a:latin typeface="Arial"/>
-                        </a:rPr>
-                        <a:t>what</a:t>
-                      </a:r>
-                    </a:p>
-                  </a:txBody>
-                  <a:tcPr marL="54864" marR="54864" marT="18288" marB="18288">
-                    <a:solidFill>
-                      <a:srgbClr val="1F4E79"/>
-                    </a:solidFill>
-                  </a:tcPr>
-                </a:tc>
-                <a:tc>
-                  <a:txBody>
-                    <a:bodyPr wrap="square"/>
-                    <a:lstStyle/>
-                    <a:p>
-                      <a:r>
-                        <a:rPr sz="1000" b="1">
-                          <a:solidFill>
-                            <a:srgbClr val="FFFFFF"/>
-                          </a:solidFill>
-                          <a:latin typeface="Arial"/>
-                        </a:rPr>
-                        <a:t>gate or output</a:t>
-                      </a:r>
-                    </a:p>
-                  </a:txBody>
-                  <a:tcPr marL="54864" marR="54864" marT="18288" marB="18288">
-                    <a:solidFill>
-                      <a:srgbClr val="1F4E79"/>
-                    </a:solidFill>
-                  </a:tcPr>
-                </a:tc>
-              </a:tr>
-              <a:tr h="434340">
-                <a:tc>
-                  <a:txBody>
-                    <a:bodyPr wrap="square"/>
-                    <a:lstStyle/>
-                    <a:p>
-                      <a:r>
-                        <a:rPr sz="1000" b="0">
-                          <a:solidFill>
-                            <a:srgbClr val="282828"/>
-                          </a:solidFill>
-                          <a:latin typeface="Arial"/>
-                        </a:rPr>
-                        <a:t>6</a:t>
-                      </a:r>
-                    </a:p>
-                  </a:txBody>
-                  <a:tcPr marL="54864" marR="54864" marT="18288" marB="18288">
-                    <a:solidFill>
-                      <a:srgbClr val="FFFFFF"/>
-                    </a:solidFill>
-                  </a:tcPr>
-                </a:tc>
-                <a:tc>
-                  <a:txBody>
-                    <a:bodyPr wrap="square"/>
-                    <a:lstStyle/>
-                    <a:p>
-                      <a:r>
-                        <a:rPr sz="1000" b="0">
-                          <a:solidFill>
-                            <a:srgbClr val="282828"/>
-                          </a:solidFill>
-                          <a:latin typeface="Arial"/>
-                        </a:rPr>
-                        <a:t>capture range: the aging ladder to 10%; the matrix re-measured at 60 to 160 nm with its photon cost</a:t>
-                      </a:r>
-                    </a:p>
-                  </a:txBody>
-                  <a:tcPr marL="54864" marR="54864" marT="18288" marB="18288">
-                    <a:solidFill>
-                      <a:srgbClr val="FFFFFF"/>
-                    </a:solidFill>
-                  </a:tcPr>
-                </a:tc>
-                <a:tc>
-                  <a:txBody>
-                    <a:bodyPr wrap="square"/>
-                    <a:lstStyle/>
-                    <a:p>
-                      <a:r>
-                        <a:rPr sz="1000" b="0">
-                          <a:solidFill>
-                            <a:srgbClr val="282828"/>
-                          </a:solidFill>
-                          <a:latin typeface="Arial"/>
-                        </a:rPr>
-                        <a:t>range in nm; photons per rung</a:t>
-                      </a:r>
-                    </a:p>
-                  </a:txBody>
-                  <a:tcPr marL="54864" marR="54864" marT="18288" marB="18288">
-                    <a:solidFill>
-                      <a:srgbClr val="FFFFFF"/>
-                    </a:solidFill>
-                  </a:tcPr>
-                </a:tc>
-              </a:tr>
-              <a:tr h="434340">
-                <a:tc>
-                  <a:txBody>
-                    <a:bodyPr wrap="square"/>
-                    <a:lstStyle/>
-                    <a:p>
-                      <a:r>
-                        <a:rPr sz="1000" b="0">
-                          <a:solidFill>
-                            <a:srgbClr val="282828"/>
-                          </a:solidFill>
-                          <a:latin typeface="Arial"/>
-                        </a:rPr>
-                        <a:t>7</a:t>
-                      </a:r>
-                    </a:p>
-                  </a:txBody>
-                  <a:tcPr marL="54864" marR="54864" marT="18288" marB="18288">
-                    <a:solidFill>
-                      <a:srgbClr val="ECF1F6"/>
-                    </a:solidFill>
-                  </a:tcPr>
-                </a:tc>
-                <a:tc>
-                  <a:txBody>
-                    <a:bodyPr wrap="square"/>
-                    <a:lstStyle/>
-                    <a:p>
-                      <a:r>
-                        <a:rPr sz="1000" b="0">
-                          <a:solidFill>
-                            <a:srgbClr val="282828"/>
-                          </a:solidFill>
-                          <a:latin typeface="Arial"/>
-                        </a:rPr>
-                        <a:t>photons: noise fit over 1e8 to 1e14 per measurement, flat and on-surface matrix</a:t>
-                      </a:r>
-                    </a:p>
-                  </a:txBody>
-                  <a:tcPr marL="54864" marR="54864" marT="18288" marB="18288">
-                    <a:solidFill>
-                      <a:srgbClr val="ECF1F6"/>
-                    </a:solidFill>
-                  </a:tcPr>
-                </a:tc>
-                <a:tc>
-                  <a:txBody>
-                    <a:bodyPr wrap="square"/>
-                    <a:lstStyle/>
-                    <a:p>
-                      <a:r>
-                        <a:rPr sz="1000" b="0">
-                          <a:solidFill>
-                            <a:srgbClr val="282828"/>
-                          </a:solidFill>
-                          <a:latin typeface="Arial"/>
-                        </a:rPr>
-                        <a:t>photons for 1 pm</a:t>
-                      </a:r>
-                    </a:p>
-                  </a:txBody>
-                  <a:tcPr marL="54864" marR="54864" marT="18288" marB="18288">
-                    <a:solidFill>
-                      <a:srgbClr val="ECF1F6"/>
-                    </a:solidFill>
-                  </a:tcPr>
-                </a:tc>
-              </a:tr>
-              <a:tr h="605790">
-                <a:tc>
-                  <a:txBody>
-                    <a:bodyPr wrap="square"/>
-                    <a:lstStyle/>
-                    <a:p>
-                      <a:r>
-                        <a:rPr sz="1000" b="0">
-                          <a:solidFill>
-                            <a:srgbClr val="282828"/>
-                          </a:solidFill>
-                          <a:latin typeface="Arial"/>
-                        </a:rPr>
-                        <a:t>8</a:t>
-                      </a:r>
-                    </a:p>
-                  </a:txBody>
-                  <a:tcPr marL="54864" marR="54864" marT="18288" marB="18288">
-                    <a:solidFill>
-                      <a:srgbClr val="FFFFFF"/>
-                    </a:solidFill>
-                  </a:tcPr>
-                </a:tc>
-                <a:tc>
-                  <a:txBody>
-                    <a:bodyPr wrap="square"/>
-                    <a:lstStyle/>
-                    <a:p>
-                      <a:r>
-                        <a:rPr sz="1000" b="0">
-                          <a:solidFill>
-                            <a:srgbClr val="282828"/>
-                          </a:solidFill>
-                          <a:latin typeface="Arial"/>
-                        </a:rPr>
-                        <a:t>closed loop in the shared loop code: noise, walk, ramp; noiseless step; within-scan drift</a:t>
-                      </a:r>
-                    </a:p>
-                  </a:txBody>
-                  <a:tcPr marL="54864" marR="54864" marT="18288" marB="18288">
-                    <a:solidFill>
-                      <a:srgbClr val="FFFFFF"/>
-                    </a:solidFill>
-                  </a:tcPr>
-                </a:tc>
-                <a:tc>
-                  <a:txBody>
-                    <a:bodyPr wrap="square"/>
-                    <a:lstStyle/>
-                    <a:p>
-                      <a:r>
-                        <a:rPr sz="1000" b="0">
-                          <a:solidFill>
-                            <a:srgbClr val="282828"/>
-                          </a:solidFill>
-                          <a:latin typeface="Arial"/>
-                        </a:rPr>
-                        <a:t>photons per cycle for 3 pm; fixed error</a:t>
-                      </a:r>
-                    </a:p>
-                  </a:txBody>
-                  <a:tcPr marL="54864" marR="54864" marT="18288" marB="18288">
-                    <a:solidFill>
-                      <a:srgbClr val="FFFFFF"/>
-                    </a:solidFill>
-                  </a:tcPr>
-                </a:tc>
-              </a:tr>
-              <a:tr h="434340">
-                <a:tc>
-                  <a:txBody>
-                    <a:bodyPr wrap="square"/>
-                    <a:lstStyle/>
-                    <a:p>
-                      <a:r>
-                        <a:rPr sz="1000" b="0">
-                          <a:solidFill>
-                            <a:srgbClr val="282828"/>
-                          </a:solidFill>
-                          <a:latin typeface="Arial"/>
-                        </a:rPr>
-                        <a:t>9</a:t>
-                      </a:r>
-                    </a:p>
-                  </a:txBody>
-                  <a:tcPr marL="54864" marR="54864" marT="18288" marB="18288">
-                    <a:solidFill>
-                      <a:srgbClr val="ECF1F6"/>
-                    </a:solidFill>
-                  </a:tcPr>
-                </a:tc>
-                <a:tc>
-                  <a:txBody>
-                    <a:bodyPr wrap="square"/>
-                    <a:lstStyle/>
-                    <a:p>
-                      <a:r>
-                        <a:rPr sz="1000" b="0">
-                          <a:solidFill>
-                            <a:srgbClr val="282828"/>
-                          </a:solidFill>
-                          <a:latin typeface="Arial"/>
-                        </a:rPr>
-                        <a:t>descent: the start ladder with unwrapping and recalibration on and off</a:t>
-                      </a:r>
-                    </a:p>
-                  </a:txBody>
-                  <a:tcPr marL="54864" marR="54864" marT="18288" marB="18288">
-                    <a:solidFill>
-                      <a:srgbClr val="ECF1F6"/>
-                    </a:solidFill>
-                  </a:tcPr>
-                </a:tc>
-                <a:tc>
-                  <a:txBody>
-                    <a:bodyPr wrap="square"/>
-                    <a:lstStyle/>
-                    <a:p>
-                      <a:r>
-                        <a:rPr sz="1000" b="0">
-                          <a:solidFill>
-                            <a:srgbClr val="282828"/>
-                          </a:solidFill>
-                          <a:latin typeface="Arial"/>
-                        </a:rPr>
-                        <a:t>largest start brought to 3 pm</a:t>
-                      </a:r>
-                    </a:p>
-                  </a:txBody>
-                  <a:tcPr marL="54864" marR="54864" marT="18288" marB="18288">
-                    <a:solidFill>
-                      <a:srgbClr val="ECF1F6"/>
-                    </a:solidFill>
-                  </a:tcPr>
-                </a:tc>
-              </a:tr>
-              <a:tr h="605790">
-                <a:tc>
-                  <a:txBody>
-                    <a:bodyPr wrap="square"/>
-                    <a:lstStyle/>
-                    <a:p>
-                      <a:r>
-                        <a:rPr sz="1000" b="0">
-                          <a:solidFill>
-                            <a:srgbClr val="282828"/>
-                          </a:solidFill>
-                          <a:latin typeface="Arial"/>
-                        </a:rPr>
-                        <a:t>10</a:t>
-                      </a:r>
-                    </a:p>
-                  </a:txBody>
-                  <a:tcPr marL="54864" marR="54864" marT="18288" marB="18288">
-                    <a:solidFill>
-                      <a:srgbClr val="FFFFFF"/>
-                    </a:solidFill>
-                  </a:tcPr>
-                </a:tc>
-                <a:tc>
-                  <a:txBody>
-                    <a:bodyPr wrap="square"/>
-                    <a:lstStyle/>
-                    <a:p>
-                      <a:r>
-                        <a:rPr sz="1000" b="0">
-                          <a:solidFill>
-                            <a:srgbClr val="282828"/>
-                          </a:solidFill>
-                          <a:latin typeface="Arial"/>
-                        </a:rPr>
-                        <a:t>systematics one at a time, uncalibrated and through the matrix; layout drawn from the emitted deck; parts from the sheet; report numbers first</a:t>
-                      </a:r>
-                    </a:p>
-                  </a:txBody>
-                  <a:tcPr marL="54864" marR="54864" marT="18288" marB="18288">
-                    <a:solidFill>
-                      <a:srgbClr val="FFFFFF"/>
-                    </a:solidFill>
-                  </a:tcPr>
-                </a:tc>
-                <a:tc>
-                  <a:txBody>
-                    <a:bodyPr wrap="square"/>
-                    <a:lstStyle/>
-                    <a:p>
-                      <a:r>
-                        <a:rPr sz="1000" b="0">
-                          <a:solidFill>
-                            <a:srgbClr val="282828"/>
-                          </a:solidFill>
-                          <a:latin typeface="Arial"/>
-                        </a:rPr>
-                        <a:t>one line per term on the systematics slide</a:t>
-                      </a:r>
-                    </a:p>
-                  </a:txBody>
-                  <a:tcPr marL="54864" marR="54864" marT="18288" marB="18288">
-                    <a:solidFill>
-                      <a:srgbClr val="FFFFFF"/>
-                    </a:solidFill>
-                  </a:tcPr>
-                </a:tc>
-              </a:tr>
-            </a:tbl>
-          </a:graphicData>
-        </a:graphic>
-      </p:graphicFrame>
       <p:sp>
         <p:nvSpPr>
-          <p:cNvPr id="6" name="TextBox 5"/>
+          <p:cNvPr id="4" name="TextBox 3"/>
           <p:cNvSpPr txBox="1"/>
           <p:nvPr/>
         </p:nvSpPr>
         <p:spPr>
           <a:xfrm>
-            <a:off x="6400800" y="4222242"/>
+            <a:off x="411480" y="1298448"/>
+            <a:ext cx="5806440" cy="274320"/>
+          </a:xfrm>
+          <a:prstGeom prst="rect">
+            <a:avLst/>
+          </a:prstGeom>
+          <a:noFill/>
+        </p:spPr>
+        <p:txBody>
+          <a:bodyPr wrap="square">
+            <a:spAutoFit/>
+          </a:bodyPr>
+          <a:lstStyle/>
+          <a:p>
+            <a:pPr>
+              <a:spcAft>
+                <a:spcPts val="600"/>
+              </a:spcAft>
+            </a:pPr>
+            <a:r>
+              <a:rPr sz="1200" b="0">
+                <a:solidFill>
+                  <a:srgbClr val="282828"/>
+                </a:solidFill>
+                <a:latin typeface="Arial"/>
+              </a:rPr>
+              <a:t>•  The beam is the DM now: the record's beam was the source cone, 77 mm on lenses and 82 on mirrors on a 96 mm mirror, the outer actuator rings unlit; the baffle is opened and the aperture sits on the DM.</a:t>
+            </a:r>
+          </a:p>
+          <a:p>
+            <a:pPr>
+              <a:spcAft>
+                <a:spcPts val="600"/>
+              </a:spcAft>
+            </a:pPr>
+            <a:r>
+              <a:rPr sz="1200" b="0">
+                <a:solidFill>
+                  <a:srgbClr val="282828"/>
+                </a:solidFill>
+                <a:latin typeface="Arial"/>
+              </a:rPr>
+              <a:t>•  The lens rig is collimated for real: the record's source sits 14 mm inside its collimator's focus (41 waves of curvature across the beam); the source moves to the focus and both lens figures are re-solved.</a:t>
+            </a:r>
+          </a:p>
+          <a:p>
+            <a:pPr>
+              <a:spcAft>
+                <a:spcPts val="600"/>
+              </a:spcAft>
+            </a:pPr>
+            <a:r>
+              <a:rPr sz="1200" b="0">
+                <a:solidFill>
+                  <a:srgbClr val="282828"/>
+                </a:solidFill>
+                <a:latin typeface="Arial"/>
+              </a:rPr>
+              <a:t>•  The detector leg keeps its pupil image: the field lens stays at the seed station, its figure and the camera trim tuned on the interferometer's own reading (the recovered surface), not on the flat-mirror null; the camera at the image surface's mean.</a:t>
+            </a:r>
+          </a:p>
+          <a:p>
+            <a:pPr>
+              <a:spcAft>
+                <a:spcPts val="600"/>
+              </a:spcAft>
+            </a:pPr>
+            <a:r>
+              <a:rPr sz="1200" b="0">
+                <a:solidFill>
+                  <a:srgbClr val="282828"/>
+                </a:solidFill>
+                <a:latin typeface="Arial"/>
+              </a:rPr>
+              <a:t>•  Substrates in every deck (previous slides), a larger-pixel camera priced.</a:t>
+            </a:r>
+          </a:p>
+        </p:txBody>
+      </p:sp>
+      <p:sp>
+        <p:nvSpPr>
+          <p:cNvPr id="5" name="TextBox 4"/>
+          <p:cNvSpPr txBox="1"/>
+          <p:nvPr/>
+        </p:nvSpPr>
+        <p:spPr>
+          <a:xfrm>
+            <a:off x="6400800" y="1298448"/>
             <a:ext cx="5394960" cy="274320"/>
           </a:xfrm>
           <a:prstGeom prst="rect">
@@ -24095,13 +23449,100 @@
               </a:spcAft>
             </a:pPr>
             <a:r>
+              <a:rPr sz="1200" b="0">
+                <a:solidFill>
+                  <a:srgbClr val="282828"/>
+                </a:solidFill>
+                <a:latin typeface="Arial"/>
+              </a:rPr>
+              <a:t>•  Redone on both rigs, the Mac carrying the mirror rig: rows on the 30 nm surface, station figures, pupil image, capture ladders and their photon price, photons for 1 pm, servo, descent, window placement, alignment sensitivities, the plates and the polarization at the built angle, the vector pair; each gated against the record.</a:t>
+            </a:r>
+          </a:p>
+          <a:p>
+            <a:pPr>
+              <a:spcAft>
+                <a:spcPts val="600"/>
+              </a:spcAft>
+            </a:pPr>
+            <a:r>
+              <a:rPr sz="1200" b="0">
+                <a:solidFill>
+                  <a:srgbClr val="282828"/>
+                </a:solidFill>
+                <a:latin typeface="Arial"/>
+              </a:rPr>
+              <a:t>•  The engine's own plane-to-plane propagation of the detector leg (the coronagraph model's reference surfaces, every leg propagated) validated leg by leg on the collimated bench, then set beside the zone-PSF model on the pupil slides; once it holds it is the full physical model for the sensors' legs too.</a:t>
+            </a:r>
+          </a:p>
+          <a:p>
+            <a:pPr>
+              <a:spcAft>
+                <a:spcPts val="600"/>
+              </a:spcAft>
+            </a:pPr>
+            <a:r>
+              <a:rPr sz="1200" b="0">
+                <a:solidFill>
+                  <a:srgbClr val="282828"/>
+                </a:solidFill>
+                <a:latin typeface="Arial"/>
+              </a:rPr>
+              <a:t>•  The coronagraph field servo resumes after this (its prescription step corrected twice; the next steps unchanged).</a:t>
+            </a:r>
+          </a:p>
+          <a:p>
+            <a:pPr>
+              <a:spcAft>
+                <a:spcPts val="600"/>
+              </a:spcAft>
+            </a:pPr>
+            <a:r>
+              <a:rPr sz="1200" b="0">
+                <a:solidFill>
+                  <a:srgbClr val="282828"/>
+                </a:solidFill>
+                <a:latin typeface="Arial"/>
+              </a:rPr>
+              <a:t>•  Expected movement: the lens rig's rows and station figure improve; the pupil image grows to 9.8 mm; all 96×96 actuators in the lit set; the mirror rig's rows move only with the beam.</a:t>
+            </a:r>
+          </a:p>
+        </p:txBody>
+      </p:sp>
+      <p:sp>
+        <p:nvSpPr>
+          <p:cNvPr id="6" name="TextBox 5"/>
+          <p:cNvSpPr txBox="1"/>
+          <p:nvPr/>
+        </p:nvSpPr>
+        <p:spPr>
+          <a:xfrm>
+            <a:off x="6400800" y="4867656"/>
+            <a:ext cx="5394960" cy="274320"/>
+          </a:xfrm>
+          <a:prstGeom prst="rect">
+            <a:avLst/>
+          </a:prstGeom>
+          <a:noFill/>
+        </p:spPr>
+        <p:txBody>
+          <a:bodyPr wrap="square">
+            <a:spAutoFit/>
+          </a:bodyPr>
+          <a:lstStyle/>
+          <a:p>
+            <a:pPr>
+              <a:spcAft>
+                <a:spcPts val="600"/>
+              </a:spcAft>
+            </a:pPr>
+            <a:r>
               <a:rPr sz="1050" b="0">
                 <a:solidFill>
                   <a:srgbClr val="6E6E6E"/>
                 </a:solidFill>
                 <a:latin typeface="Arial"/>
               </a:rPr>
-              <a:t>The scoring library (the loop, the unwrapper, the arm and analyzer maps, the clearance check) is shared by the three lanes; nothing is copied between them.  The path is recorded as reference memory so the next configuration follows it in a day.</a:t>
+              <a:t>The interim report of 2026-09-18 carries the current record, labeled; the redo lands in its next revision.  Plan: BRIEF_to_tg_redo.md (packages A0, A, B, C); tools tg96_pupilsim, tg96_pupil_options, tg96_pupil_s2s.</a:t>
             </a:r>
           </a:p>
         </p:txBody>
@@ -24158,7 +23599,7 @@
                 </a:solidFill>
                 <a:latin typeface="Arial"/>
               </a:rPr>
-              <a:t>Run it yourself</a:t>
+              <a:t>How every configuration was analyzed</a:t>
             </a:r>
           </a:p>
           <a:p>
@@ -24174,7 +23615,7 @@
                 </a:solidFill>
                 <a:latin typeface="Arial"/>
               </a:rPr>
-              <a:t>One parameter sheet and one runner per approach, shared code underneath; every number here is reproduced by the commands below</a:t>
+              <a:t>One repeatable path, ten steps, the same for all four approaches: a new sensor is a new reading class in the shared runner plus its gate, then steps 4 to 10 unchanged</a:t>
             </a:r>
           </a:p>
         </p:txBody>
@@ -24223,102 +23664,885 @@
           </a:p>
         </p:txBody>
       </p:sp>
+      <p:graphicFrame>
+        <p:nvGraphicFramePr>
+          <p:cNvPr id="4" name="Table 3"/>
+          <p:cNvGraphicFramePr>
+            <a:graphicFrameLocks noGrp="1"/>
+          </p:cNvGraphicFramePr>
+          <p:nvPr/>
+        </p:nvGraphicFramePr>
+        <p:xfrm>
+          <a:off x="411480" y="1298448"/>
+          <a:ext cx="5806439" cy="3188970"/>
+        </p:xfrm>
+        <a:graphic>
+          <a:graphicData uri="http://schemas.openxmlformats.org/drawingml/2006/table">
+            <a:tbl>
+              <a:tblPr firstRow="1" bandRow="1">
+                <a:tableStyleId>{5C22544A-7EE6-4342-B048-85BDC9FD1C3A}</a:tableStyleId>
+              </a:tblPr>
+              <a:tblGrid>
+                <a:gridCol w="436880"/>
+                <a:gridCol w="2963389"/>
+                <a:gridCol w="2406170"/>
+              </a:tblGrid>
+              <a:tr h="280035">
+                <a:tc>
+                  <a:txBody>
+                    <a:bodyPr wrap="square"/>
+                    <a:lstStyle/>
+                    <a:p>
+                      <a:r>
+                        <a:rPr sz="1100" b="1">
+                          <a:solidFill>
+                            <a:srgbClr val="FFFFFF"/>
+                          </a:solidFill>
+                          <a:latin typeface="Arial"/>
+                        </a:rPr>
+                        <a:t>step</a:t>
+                      </a:r>
+                    </a:p>
+                  </a:txBody>
+                  <a:tcPr marL="54864" marR="54864" marT="18288" marB="18288">
+                    <a:solidFill>
+                      <a:srgbClr val="1F4E79"/>
+                    </a:solidFill>
+                  </a:tcPr>
+                </a:tc>
+                <a:tc>
+                  <a:txBody>
+                    <a:bodyPr wrap="square"/>
+                    <a:lstStyle/>
+                    <a:p>
+                      <a:r>
+                        <a:rPr sz="1100" b="1">
+                          <a:solidFill>
+                            <a:srgbClr val="FFFFFF"/>
+                          </a:solidFill>
+                          <a:latin typeface="Arial"/>
+                        </a:rPr>
+                        <a:t>what</a:t>
+                      </a:r>
+                    </a:p>
+                  </a:txBody>
+                  <a:tcPr marL="54864" marR="54864" marT="18288" marB="18288">
+                    <a:solidFill>
+                      <a:srgbClr val="1F4E79"/>
+                    </a:solidFill>
+                  </a:tcPr>
+                </a:tc>
+                <a:tc>
+                  <a:txBody>
+                    <a:bodyPr wrap="square"/>
+                    <a:lstStyle/>
+                    <a:p>
+                      <a:r>
+                        <a:rPr sz="1100" b="1">
+                          <a:solidFill>
+                            <a:srgbClr val="FFFFFF"/>
+                          </a:solidFill>
+                          <a:latin typeface="Arial"/>
+                        </a:rPr>
+                        <a:t>gate or output</a:t>
+                      </a:r>
+                    </a:p>
+                  </a:txBody>
+                  <a:tcPr marL="54864" marR="54864" marT="18288" marB="18288">
+                    <a:solidFill>
+                      <a:srgbClr val="1F4E79"/>
+                    </a:solidFill>
+                  </a:tcPr>
+                </a:tc>
+              </a:tr>
+              <a:tr h="468630">
+                <a:tc>
+                  <a:txBody>
+                    <a:bodyPr wrap="square"/>
+                    <a:lstStyle/>
+                    <a:p>
+                      <a:r>
+                        <a:rPr sz="1100" b="0">
+                          <a:solidFill>
+                            <a:srgbClr val="282828"/>
+                          </a:solidFill>
+                          <a:latin typeface="Arial"/>
+                        </a:rPr>
+                        <a:t>1</a:t>
+                      </a:r>
+                    </a:p>
+                  </a:txBody>
+                  <a:tcPr marL="54864" marR="54864" marT="18288" marB="18288">
+                    <a:solidFill>
+                      <a:srgbClr val="FFFFFF"/>
+                    </a:solidFill>
+                  </a:tcPr>
+                </a:tc>
+                <a:tc>
+                  <a:txBody>
+                    <a:bodyPr wrap="square"/>
+                    <a:lstStyle/>
+                    <a:p>
+                      <a:r>
+                        <a:rPr sz="1100" b="0">
+                          <a:solidFill>
+                            <a:srgbClr val="282828"/>
+                          </a:solidFill>
+                          <a:latin typeface="Arial"/>
+                        </a:rPr>
+                        <a:t>one parameter sheet and one runner per approach; batch wrappers</a:t>
+                      </a:r>
+                    </a:p>
+                  </a:txBody>
+                  <a:tcPr marL="54864" marR="54864" marT="18288" marB="18288">
+                    <a:solidFill>
+                      <a:srgbClr val="FFFFFF"/>
+                    </a:solidFill>
+                  </a:tcPr>
+                </a:tc>
+                <a:tc>
+                  <a:txBody>
+                    <a:bodyPr wrap="square"/>
+                    <a:lstStyle/>
+                    <a:p>
+                      <a:r>
+                        <a:rPr sz="1100" b="0">
+                          <a:solidFill>
+                            <a:srgbClr val="282828"/>
+                          </a:solidFill>
+                          <a:latin typeface="Arial"/>
+                        </a:rPr>
+                        <a:t>every number has a run tag</a:t>
+                      </a:r>
+                    </a:p>
+                  </a:txBody>
+                  <a:tcPr marL="54864" marR="54864" marT="18288" marB="18288">
+                    <a:solidFill>
+                      <a:srgbClr val="FFFFFF"/>
+                    </a:solidFill>
+                  </a:tcPr>
+                </a:tc>
+              </a:tr>
+              <a:tr h="657225">
+                <a:tc>
+                  <a:txBody>
+                    <a:bodyPr wrap="square"/>
+                    <a:lstStyle/>
+                    <a:p>
+                      <a:r>
+                        <a:rPr sz="1100" b="0">
+                          <a:solidFill>
+                            <a:srgbClr val="282828"/>
+                          </a:solidFill>
+                          <a:latin typeface="Arial"/>
+                        </a:rPr>
+                        <a:t>2</a:t>
+                      </a:r>
+                    </a:p>
+                  </a:txBody>
+                  <a:tcPr marL="54864" marR="54864" marT="18288" marB="18288">
+                    <a:solidFill>
+                      <a:srgbClr val="ECF1F6"/>
+                    </a:solidFill>
+                  </a:tcPr>
+                </a:tc>
+                <a:tc>
+                  <a:txBody>
+                    <a:bodyPr wrap="square"/>
+                    <a:lstStyle/>
+                    <a:p>
+                      <a:r>
+                        <a:rPr sz="1100" b="0">
+                          <a:solidFill>
+                            <a:srgbClr val="282828"/>
+                          </a:solidFill>
+                          <a:latin typeface="Arial"/>
+                        </a:rPr>
+                        <a:t>build the bench from the sheet, trace it; clearance of end bodies and node parts; detector-leg focus; sampling budget</a:t>
+                      </a:r>
+                    </a:p>
+                  </a:txBody>
+                  <a:tcPr marL="54864" marR="54864" marT="18288" marB="18288">
+                    <a:solidFill>
+                      <a:srgbClr val="ECF1F6"/>
+                    </a:solidFill>
+                  </a:tcPr>
+                </a:tc>
+                <a:tc>
+                  <a:txBody>
+                    <a:bodyPr wrap="square"/>
+                    <a:lstStyle/>
+                    <a:p>
+                      <a:r>
+                        <a:rPr sz="1100" b="0">
+                          <a:solidFill>
+                            <a:srgbClr val="282828"/>
+                          </a:solidFill>
+                          <a:latin typeface="Arial"/>
+                        </a:rPr>
+                        <a:t>every part clears by 25 mm; 6 pixels across the mask feature</a:t>
+                      </a:r>
+                    </a:p>
+                  </a:txBody>
+                  <a:tcPr marL="54864" marR="54864" marT="18288" marB="18288">
+                    <a:solidFill>
+                      <a:srgbClr val="ECF1F6"/>
+                    </a:solidFill>
+                  </a:tcPr>
+                </a:tc>
+              </a:tr>
+              <a:tr h="657225">
+                <a:tc>
+                  <a:txBody>
+                    <a:bodyPr wrap="square"/>
+                    <a:lstStyle/>
+                    <a:p>
+                      <a:r>
+                        <a:rPr sz="1100" b="0">
+                          <a:solidFill>
+                            <a:srgbClr val="282828"/>
+                          </a:solidFill>
+                          <a:latin typeface="Arial"/>
+                        </a:rPr>
+                        <a:t>3</a:t>
+                      </a:r>
+                    </a:p>
+                  </a:txBody>
+                  <a:tcPr marL="54864" marR="54864" marT="18288" marB="18288">
+                    <a:solidFill>
+                      <a:srgbClr val="FFFFFF"/>
+                    </a:solidFill>
+                  </a:tcPr>
+                </a:tc>
+                <a:tc>
+                  <a:txBody>
+                    <a:bodyPr wrap="square"/>
+                    <a:lstStyle/>
+                    <a:p>
+                      <a:r>
+                        <a:rPr sz="1100" b="0">
+                          <a:solidFill>
+                            <a:srgbClr val="282828"/>
+                          </a:solidFill>
+                          <a:latin typeface="Arial"/>
+                        </a:rPr>
+                        <a:t>model gates before any number</a:t>
+                      </a:r>
+                    </a:p>
+                  </a:txBody>
+                  <a:tcPr marL="54864" marR="54864" marT="18288" marB="18288">
+                    <a:solidFill>
+                      <a:srgbClr val="FFFFFF"/>
+                    </a:solidFill>
+                  </a:tcPr>
+                </a:tc>
+                <a:tc>
+                  <a:txBody>
+                    <a:bodyPr wrap="square"/>
+                    <a:lstStyle/>
+                    <a:p>
+                      <a:r>
+                        <a:rPr sz="1100" b="0">
+                          <a:solidFill>
+                            <a:srgbClr val="282828"/>
+                          </a:solidFill>
+                          <a:latin typeface="Arial"/>
+                        </a:rPr>
+                        <a:t>mask round trip, reference-wave surrogate, working-state amplitude, the reading on 100 nm pokes</a:t>
+                      </a:r>
+                    </a:p>
+                  </a:txBody>
+                  <a:tcPr marL="54864" marR="54864" marT="18288" marB="18288">
+                    <a:solidFill>
+                      <a:srgbClr val="FFFFFF"/>
+                    </a:solidFill>
+                  </a:tcPr>
+                </a:tc>
+              </a:tr>
+              <a:tr h="657225">
+                <a:tc>
+                  <a:txBody>
+                    <a:bodyPr wrap="square"/>
+                    <a:lstStyle/>
+                    <a:p>
+                      <a:r>
+                        <a:rPr sz="1100" b="0">
+                          <a:solidFill>
+                            <a:srgbClr val="282828"/>
+                          </a:solidFill>
+                          <a:latin typeface="Arial"/>
+                        </a:rPr>
+                        <a:t>4</a:t>
+                      </a:r>
+                    </a:p>
+                  </a:txBody>
+                  <a:tcPr marL="54864" marR="54864" marT="18288" marB="18288">
+                    <a:solidFill>
+                      <a:srgbClr val="ECF1F6"/>
+                    </a:solidFill>
+                  </a:tcPr>
+                </a:tc>
+                <a:tc>
+                  <a:txBody>
+                    <a:bodyPr wrap="square"/>
+                    <a:lstStyle/>
+                    <a:p>
+                      <a:r>
+                        <a:rPr sz="1100" b="0">
+                          <a:solidFill>
+                            <a:srgbClr val="282828"/>
+                          </a:solidFill>
+                          <a:latin typeface="Arial"/>
+                        </a:rPr>
+                        <a:t>calibration: the response matrix measured through the sensor, on the 30 nm working surface</a:t>
+                      </a:r>
+                    </a:p>
+                  </a:txBody>
+                  <a:tcPr marL="54864" marR="54864" marT="18288" marB="18288">
+                    <a:solidFill>
+                      <a:srgbClr val="ECF1F6"/>
+                    </a:solidFill>
+                  </a:tcPr>
+                </a:tc>
+                <a:tc>
+                  <a:txBody>
+                    <a:bodyPr wrap="square"/>
+                    <a:lstStyle/>
+                    <a:p>
+                      <a:r>
+                        <a:rPr sz="1100" b="0">
+                          <a:solidFill>
+                            <a:srgbClr val="282828"/>
+                          </a:solidFill>
+                          <a:latin typeface="Arial"/>
+                        </a:rPr>
+                        <a:t>piston null carried; stencil-site fit</a:t>
+                      </a:r>
+                    </a:p>
+                  </a:txBody>
+                  <a:tcPr marL="54864" marR="54864" marT="18288" marB="18288">
+                    <a:solidFill>
+                      <a:srgbClr val="ECF1F6"/>
+                    </a:solidFill>
+                  </a:tcPr>
+                </a:tc>
+              </a:tr>
+              <a:tr h="468630">
+                <a:tc>
+                  <a:txBody>
+                    <a:bodyPr wrap="square"/>
+                    <a:lstStyle/>
+                    <a:p>
+                      <a:r>
+                        <a:rPr sz="1100" b="0">
+                          <a:solidFill>
+                            <a:srgbClr val="282828"/>
+                          </a:solidFill>
+                          <a:latin typeface="Arial"/>
+                        </a:rPr>
+                        <a:t>5</a:t>
+                      </a:r>
+                    </a:p>
+                  </a:txBody>
+                  <a:tcPr marL="54864" marR="54864" marT="18288" marB="18288">
+                    <a:solidFill>
+                      <a:srgbClr val="FFFFFF"/>
+                    </a:solidFill>
+                  </a:tcPr>
+                </a:tc>
+                <a:tc>
+                  <a:txBody>
+                    <a:bodyPr wrap="square"/>
+                    <a:lstStyle/>
+                    <a:p>
+                      <a:r>
+                        <a:rPr sz="1100" b="0">
+                          <a:solidFill>
+                            <a:srgbClr val="282828"/>
+                          </a:solidFill>
+                          <a:latin typeface="Arial"/>
+                        </a:rPr>
+                        <a:t>rows on the working surface: 10 nm on one actuator; 1 nm on 47 sites; dense 10 nm</a:t>
+                      </a:r>
+                    </a:p>
+                  </a:txBody>
+                  <a:tcPr marL="54864" marR="54864" marT="18288" marB="18288">
+                    <a:solidFill>
+                      <a:srgbClr val="FFFFFF"/>
+                    </a:solidFill>
+                  </a:tcPr>
+                </a:tc>
+                <a:tc>
+                  <a:txBody>
+                    <a:bodyPr wrap="square"/>
+                    <a:lstStyle/>
+                    <a:p>
+                      <a:r>
+                        <a:rPr sz="1100" b="0">
+                          <a:solidFill>
+                            <a:srgbClr val="282828"/>
+                          </a:solidFill>
+                          <a:latin typeface="Arial"/>
+                        </a:rPr>
+                        <a:t>gain, floor, SNR</a:t>
+                      </a:r>
+                    </a:p>
+                  </a:txBody>
+                  <a:tcPr marL="54864" marR="54864" marT="18288" marB="18288">
+                    <a:solidFill>
+                      <a:srgbClr val="FFFFFF"/>
+                    </a:solidFill>
+                  </a:tcPr>
+                </a:tc>
+              </a:tr>
+            </a:tbl>
+          </a:graphicData>
+        </a:graphic>
+      </p:graphicFrame>
+      <p:graphicFrame>
+        <p:nvGraphicFramePr>
+          <p:cNvPr id="5" name="Table 4"/>
+          <p:cNvGraphicFramePr>
+            <a:graphicFrameLocks noGrp="1"/>
+          </p:cNvGraphicFramePr>
+          <p:nvPr/>
+        </p:nvGraphicFramePr>
+        <p:xfrm>
+          <a:off x="6400800" y="1298448"/>
+          <a:ext cx="5394959" cy="2777490"/>
+        </p:xfrm>
+        <a:graphic>
+          <a:graphicData uri="http://schemas.openxmlformats.org/drawingml/2006/table">
+            <a:tbl>
+              <a:tblPr firstRow="1" bandRow="1">
+                <a:tableStyleId>{5C22544A-7EE6-4342-B048-85BDC9FD1C3A}</a:tableStyleId>
+              </a:tblPr>
+              <a:tblGrid>
+                <a:gridCol w="410464"/>
+                <a:gridCol w="3846730"/>
+                <a:gridCol w="1137765"/>
+              </a:tblGrid>
+              <a:tr h="262890">
+                <a:tc>
+                  <a:txBody>
+                    <a:bodyPr wrap="square"/>
+                    <a:lstStyle/>
+                    <a:p>
+                      <a:r>
+                        <a:rPr sz="1000" b="1">
+                          <a:solidFill>
+                            <a:srgbClr val="FFFFFF"/>
+                          </a:solidFill>
+                          <a:latin typeface="Arial"/>
+                        </a:rPr>
+                        <a:t>step</a:t>
+                      </a:r>
+                    </a:p>
+                  </a:txBody>
+                  <a:tcPr marL="54864" marR="54864" marT="18288" marB="18288">
+                    <a:solidFill>
+                      <a:srgbClr val="1F4E79"/>
+                    </a:solidFill>
+                  </a:tcPr>
+                </a:tc>
+                <a:tc>
+                  <a:txBody>
+                    <a:bodyPr wrap="square"/>
+                    <a:lstStyle/>
+                    <a:p>
+                      <a:r>
+                        <a:rPr sz="1000" b="1">
+                          <a:solidFill>
+                            <a:srgbClr val="FFFFFF"/>
+                          </a:solidFill>
+                          <a:latin typeface="Arial"/>
+                        </a:rPr>
+                        <a:t>what</a:t>
+                      </a:r>
+                    </a:p>
+                  </a:txBody>
+                  <a:tcPr marL="54864" marR="54864" marT="18288" marB="18288">
+                    <a:solidFill>
+                      <a:srgbClr val="1F4E79"/>
+                    </a:solidFill>
+                  </a:tcPr>
+                </a:tc>
+                <a:tc>
+                  <a:txBody>
+                    <a:bodyPr wrap="square"/>
+                    <a:lstStyle/>
+                    <a:p>
+                      <a:r>
+                        <a:rPr sz="1000" b="1">
+                          <a:solidFill>
+                            <a:srgbClr val="FFFFFF"/>
+                          </a:solidFill>
+                          <a:latin typeface="Arial"/>
+                        </a:rPr>
+                        <a:t>gate or output</a:t>
+                      </a:r>
+                    </a:p>
+                  </a:txBody>
+                  <a:tcPr marL="54864" marR="54864" marT="18288" marB="18288">
+                    <a:solidFill>
+                      <a:srgbClr val="1F4E79"/>
+                    </a:solidFill>
+                  </a:tcPr>
+                </a:tc>
+              </a:tr>
+              <a:tr h="434340">
+                <a:tc>
+                  <a:txBody>
+                    <a:bodyPr wrap="square"/>
+                    <a:lstStyle/>
+                    <a:p>
+                      <a:r>
+                        <a:rPr sz="1000" b="0">
+                          <a:solidFill>
+                            <a:srgbClr val="282828"/>
+                          </a:solidFill>
+                          <a:latin typeface="Arial"/>
+                        </a:rPr>
+                        <a:t>6</a:t>
+                      </a:r>
+                    </a:p>
+                  </a:txBody>
+                  <a:tcPr marL="54864" marR="54864" marT="18288" marB="18288">
+                    <a:solidFill>
+                      <a:srgbClr val="FFFFFF"/>
+                    </a:solidFill>
+                  </a:tcPr>
+                </a:tc>
+                <a:tc>
+                  <a:txBody>
+                    <a:bodyPr wrap="square"/>
+                    <a:lstStyle/>
+                    <a:p>
+                      <a:r>
+                        <a:rPr sz="1000" b="0">
+                          <a:solidFill>
+                            <a:srgbClr val="282828"/>
+                          </a:solidFill>
+                          <a:latin typeface="Arial"/>
+                        </a:rPr>
+                        <a:t>capture range: the aging ladder to 10%; the matrix re-measured at 60 to 160 nm with its photon cost</a:t>
+                      </a:r>
+                    </a:p>
+                  </a:txBody>
+                  <a:tcPr marL="54864" marR="54864" marT="18288" marB="18288">
+                    <a:solidFill>
+                      <a:srgbClr val="FFFFFF"/>
+                    </a:solidFill>
+                  </a:tcPr>
+                </a:tc>
+                <a:tc>
+                  <a:txBody>
+                    <a:bodyPr wrap="square"/>
+                    <a:lstStyle/>
+                    <a:p>
+                      <a:r>
+                        <a:rPr sz="1000" b="0">
+                          <a:solidFill>
+                            <a:srgbClr val="282828"/>
+                          </a:solidFill>
+                          <a:latin typeface="Arial"/>
+                        </a:rPr>
+                        <a:t>range in nm; photons per rung</a:t>
+                      </a:r>
+                    </a:p>
+                  </a:txBody>
+                  <a:tcPr marL="54864" marR="54864" marT="18288" marB="18288">
+                    <a:solidFill>
+                      <a:srgbClr val="FFFFFF"/>
+                    </a:solidFill>
+                  </a:tcPr>
+                </a:tc>
+              </a:tr>
+              <a:tr h="434340">
+                <a:tc>
+                  <a:txBody>
+                    <a:bodyPr wrap="square"/>
+                    <a:lstStyle/>
+                    <a:p>
+                      <a:r>
+                        <a:rPr sz="1000" b="0">
+                          <a:solidFill>
+                            <a:srgbClr val="282828"/>
+                          </a:solidFill>
+                          <a:latin typeface="Arial"/>
+                        </a:rPr>
+                        <a:t>7</a:t>
+                      </a:r>
+                    </a:p>
+                  </a:txBody>
+                  <a:tcPr marL="54864" marR="54864" marT="18288" marB="18288">
+                    <a:solidFill>
+                      <a:srgbClr val="ECF1F6"/>
+                    </a:solidFill>
+                  </a:tcPr>
+                </a:tc>
+                <a:tc>
+                  <a:txBody>
+                    <a:bodyPr wrap="square"/>
+                    <a:lstStyle/>
+                    <a:p>
+                      <a:r>
+                        <a:rPr sz="1000" b="0">
+                          <a:solidFill>
+                            <a:srgbClr val="282828"/>
+                          </a:solidFill>
+                          <a:latin typeface="Arial"/>
+                        </a:rPr>
+                        <a:t>photons: noise fit over 1e8 to 1e14 per measurement, flat and on-surface matrix</a:t>
+                      </a:r>
+                    </a:p>
+                  </a:txBody>
+                  <a:tcPr marL="54864" marR="54864" marT="18288" marB="18288">
+                    <a:solidFill>
+                      <a:srgbClr val="ECF1F6"/>
+                    </a:solidFill>
+                  </a:tcPr>
+                </a:tc>
+                <a:tc>
+                  <a:txBody>
+                    <a:bodyPr wrap="square"/>
+                    <a:lstStyle/>
+                    <a:p>
+                      <a:r>
+                        <a:rPr sz="1000" b="0">
+                          <a:solidFill>
+                            <a:srgbClr val="282828"/>
+                          </a:solidFill>
+                          <a:latin typeface="Arial"/>
+                        </a:rPr>
+                        <a:t>photons for 1 pm</a:t>
+                      </a:r>
+                    </a:p>
+                  </a:txBody>
+                  <a:tcPr marL="54864" marR="54864" marT="18288" marB="18288">
+                    <a:solidFill>
+                      <a:srgbClr val="ECF1F6"/>
+                    </a:solidFill>
+                  </a:tcPr>
+                </a:tc>
+              </a:tr>
+              <a:tr h="605790">
+                <a:tc>
+                  <a:txBody>
+                    <a:bodyPr wrap="square"/>
+                    <a:lstStyle/>
+                    <a:p>
+                      <a:r>
+                        <a:rPr sz="1000" b="0">
+                          <a:solidFill>
+                            <a:srgbClr val="282828"/>
+                          </a:solidFill>
+                          <a:latin typeface="Arial"/>
+                        </a:rPr>
+                        <a:t>8</a:t>
+                      </a:r>
+                    </a:p>
+                  </a:txBody>
+                  <a:tcPr marL="54864" marR="54864" marT="18288" marB="18288">
+                    <a:solidFill>
+                      <a:srgbClr val="FFFFFF"/>
+                    </a:solidFill>
+                  </a:tcPr>
+                </a:tc>
+                <a:tc>
+                  <a:txBody>
+                    <a:bodyPr wrap="square"/>
+                    <a:lstStyle/>
+                    <a:p>
+                      <a:r>
+                        <a:rPr sz="1000" b="0">
+                          <a:solidFill>
+                            <a:srgbClr val="282828"/>
+                          </a:solidFill>
+                          <a:latin typeface="Arial"/>
+                        </a:rPr>
+                        <a:t>closed loop in the shared loop code: noise, walk, ramp; noiseless step; within-scan drift</a:t>
+                      </a:r>
+                    </a:p>
+                  </a:txBody>
+                  <a:tcPr marL="54864" marR="54864" marT="18288" marB="18288">
+                    <a:solidFill>
+                      <a:srgbClr val="FFFFFF"/>
+                    </a:solidFill>
+                  </a:tcPr>
+                </a:tc>
+                <a:tc>
+                  <a:txBody>
+                    <a:bodyPr wrap="square"/>
+                    <a:lstStyle/>
+                    <a:p>
+                      <a:r>
+                        <a:rPr sz="1000" b="0">
+                          <a:solidFill>
+                            <a:srgbClr val="282828"/>
+                          </a:solidFill>
+                          <a:latin typeface="Arial"/>
+                        </a:rPr>
+                        <a:t>photons per cycle for 3 pm; fixed error</a:t>
+                      </a:r>
+                    </a:p>
+                  </a:txBody>
+                  <a:tcPr marL="54864" marR="54864" marT="18288" marB="18288">
+                    <a:solidFill>
+                      <a:srgbClr val="FFFFFF"/>
+                    </a:solidFill>
+                  </a:tcPr>
+                </a:tc>
+              </a:tr>
+              <a:tr h="434340">
+                <a:tc>
+                  <a:txBody>
+                    <a:bodyPr wrap="square"/>
+                    <a:lstStyle/>
+                    <a:p>
+                      <a:r>
+                        <a:rPr sz="1000" b="0">
+                          <a:solidFill>
+                            <a:srgbClr val="282828"/>
+                          </a:solidFill>
+                          <a:latin typeface="Arial"/>
+                        </a:rPr>
+                        <a:t>9</a:t>
+                      </a:r>
+                    </a:p>
+                  </a:txBody>
+                  <a:tcPr marL="54864" marR="54864" marT="18288" marB="18288">
+                    <a:solidFill>
+                      <a:srgbClr val="ECF1F6"/>
+                    </a:solidFill>
+                  </a:tcPr>
+                </a:tc>
+                <a:tc>
+                  <a:txBody>
+                    <a:bodyPr wrap="square"/>
+                    <a:lstStyle/>
+                    <a:p>
+                      <a:r>
+                        <a:rPr sz="1000" b="0">
+                          <a:solidFill>
+                            <a:srgbClr val="282828"/>
+                          </a:solidFill>
+                          <a:latin typeface="Arial"/>
+                        </a:rPr>
+                        <a:t>descent: the start ladder with unwrapping and recalibration on and off</a:t>
+                      </a:r>
+                    </a:p>
+                  </a:txBody>
+                  <a:tcPr marL="54864" marR="54864" marT="18288" marB="18288">
+                    <a:solidFill>
+                      <a:srgbClr val="ECF1F6"/>
+                    </a:solidFill>
+                  </a:tcPr>
+                </a:tc>
+                <a:tc>
+                  <a:txBody>
+                    <a:bodyPr wrap="square"/>
+                    <a:lstStyle/>
+                    <a:p>
+                      <a:r>
+                        <a:rPr sz="1000" b="0">
+                          <a:solidFill>
+                            <a:srgbClr val="282828"/>
+                          </a:solidFill>
+                          <a:latin typeface="Arial"/>
+                        </a:rPr>
+                        <a:t>largest start brought to 3 pm</a:t>
+                      </a:r>
+                    </a:p>
+                  </a:txBody>
+                  <a:tcPr marL="54864" marR="54864" marT="18288" marB="18288">
+                    <a:solidFill>
+                      <a:srgbClr val="ECF1F6"/>
+                    </a:solidFill>
+                  </a:tcPr>
+                </a:tc>
+              </a:tr>
+              <a:tr h="605790">
+                <a:tc>
+                  <a:txBody>
+                    <a:bodyPr wrap="square"/>
+                    <a:lstStyle/>
+                    <a:p>
+                      <a:r>
+                        <a:rPr sz="1000" b="0">
+                          <a:solidFill>
+                            <a:srgbClr val="282828"/>
+                          </a:solidFill>
+                          <a:latin typeface="Arial"/>
+                        </a:rPr>
+                        <a:t>10</a:t>
+                      </a:r>
+                    </a:p>
+                  </a:txBody>
+                  <a:tcPr marL="54864" marR="54864" marT="18288" marB="18288">
+                    <a:solidFill>
+                      <a:srgbClr val="FFFFFF"/>
+                    </a:solidFill>
+                  </a:tcPr>
+                </a:tc>
+                <a:tc>
+                  <a:txBody>
+                    <a:bodyPr wrap="square"/>
+                    <a:lstStyle/>
+                    <a:p>
+                      <a:r>
+                        <a:rPr sz="1000" b="0">
+                          <a:solidFill>
+                            <a:srgbClr val="282828"/>
+                          </a:solidFill>
+                          <a:latin typeface="Arial"/>
+                        </a:rPr>
+                        <a:t>systematics one at a time, uncalibrated and through the matrix; layout drawn from the emitted deck; parts from the sheet; report numbers first</a:t>
+                      </a:r>
+                    </a:p>
+                  </a:txBody>
+                  <a:tcPr marL="54864" marR="54864" marT="18288" marB="18288">
+                    <a:solidFill>
+                      <a:srgbClr val="FFFFFF"/>
+                    </a:solidFill>
+                  </a:tcPr>
+                </a:tc>
+                <a:tc>
+                  <a:txBody>
+                    <a:bodyPr wrap="square"/>
+                    <a:lstStyle/>
+                    <a:p>
+                      <a:r>
+                        <a:rPr sz="1000" b="0">
+                          <a:solidFill>
+                            <a:srgbClr val="282828"/>
+                          </a:solidFill>
+                          <a:latin typeface="Arial"/>
+                        </a:rPr>
+                        <a:t>one line per term on the systematics slide</a:t>
+                      </a:r>
+                    </a:p>
+                  </a:txBody>
+                  <a:tcPr marL="54864" marR="54864" marT="18288" marB="18288">
+                    <a:solidFill>
+                      <a:srgbClr val="FFFFFF"/>
+                    </a:solidFill>
+                  </a:tcPr>
+                </a:tc>
+              </a:tr>
+            </a:tbl>
+          </a:graphicData>
+        </a:graphic>
+      </p:graphicFrame>
       <p:sp>
         <p:nvSpPr>
-          <p:cNvPr id="4" name="TextBox 3"/>
+          <p:cNvPr id="6" name="TextBox 5"/>
           <p:cNvSpPr txBox="1"/>
           <p:nvPr/>
         </p:nvSpPr>
         <p:spPr>
           <a:xfrm>
-            <a:off x="411480" y="1298448"/>
-            <a:ext cx="5806440" cy="274320"/>
-          </a:xfrm>
-          <a:prstGeom prst="rect">
-            <a:avLst/>
-          </a:prstGeom>
-          <a:noFill/>
-        </p:spPr>
-        <p:txBody>
-          <a:bodyPr wrap="square">
-            <a:spAutoFit/>
-          </a:bodyPr>
-          <a:lstStyle/>
-          <a:p>
-            <a:pPr>
-              <a:spcAft>
-                <a:spcPts val="600"/>
-              </a:spcAft>
-            </a:pPr>
-            <a:r>
-              <a:rPr sz="1200" b="0">
-                <a:solidFill>
-                  <a:srgbClr val="282828"/>
-                </a:solidFill>
-                <a:latin typeface="Arial"/>
-              </a:rPr>
-              <a:t>•  Interferometer (tg_psi_dm96_oap): tg96_run for the lens rig; tg96_run('bench.optics','oap','tag','oap') for the mirror rig; ./tg96_batch.sh lens_deck "'stages',{'bench','deck'},'battery.noise',true"; ./tg96_batch.sh loop_lens "'stages',{'bench','loop','figs'}".</a:t>
-            </a:r>
-          </a:p>
-          <a:p>
-            <a:pPr>
-              <a:spcAft>
-                <a:spcPts val="600"/>
-              </a:spcAft>
-            </a:pPr>
-            <a:r>
-              <a:rPr sz="1200" b="0">
-                <a:solidFill>
-                  <a:srgbClr val="282828"/>
-                </a:solidFill>
-                <a:latin typeface="Arial"/>
-              </a:rPr>
-              <a:t>•  Pupil image (tg_psi_dm96_oap): tg96_pupilq('rig','lens'), tg96_pupilsim('rig','oap'); both tools, both rigs: ./tg96_pupil_batch.sh both (knobs: P.pupil in tg96_params).</a:t>
-            </a:r>
-          </a:p>
-          <a:p>
-            <a:pPr>
-              <a:spcAft>
-                <a:spcPts val="600"/>
-              </a:spcAft>
-            </a:pPr>
-            <a:r>
-              <a:rPr sz="1200" b="0">
-                <a:solidFill>
-                  <a:srgbClr val="282828"/>
-                </a:solidFill>
-                <a:latin typeface="Arial"/>
-              </a:rPr>
-              <a:t>•  Zernike sensors (zwfs_dm96): out = zwfs_run; (bench + battery + figures); zwfs_run('tag','ng385','NGRID',385); zwfs_run('MODEL',2048,'NGRID',385,'param_file','macos_param_2048.txt'); ./zwfs_batch.sh loop193 "'stages',{'bench','loop','figs'}".</a:t>
-            </a:r>
-          </a:p>
-          <a:p>
-            <a:pPr>
-              <a:spcAft>
-                <a:spcPts val="600"/>
-              </a:spcAft>
-            </a:pPr>
-            <a:r>
-              <a:rPr sz="1200" b="0">
-                <a:solidFill>
-                  <a:srgbClr val="282828"/>
-                </a:solidFill>
-                <a:latin typeface="Arial"/>
-              </a:rPr>
-              <a:t>•  Point-diffraction (pdi_dm96): P = pdi_params; out = pdi_run(P);; pdi_run('pdi.DIA_LAMD',1.0,'stages',{'bench','battery','figs'}); ./pdi_batch.sh TAG "pdi_params, 'stages',{'bench','loop','figs'}".</a:t>
-            </a:r>
-          </a:p>
-        </p:txBody>
-      </p:sp>
-      <p:sp>
-        <p:nvSpPr>
-          <p:cNvPr id="5" name="TextBox 4"/>
-          <p:cNvSpPr txBox="1"/>
-          <p:nvPr/>
-        </p:nvSpPr>
-        <p:spPr>
-          <a:xfrm>
-            <a:off x="6400800" y="1298448"/>
+            <a:off x="6400800" y="4222242"/>
             <a:ext cx="5394960" cy="274320"/>
           </a:xfrm>
           <a:prstGeom prst="rect">
@@ -24338,84 +24562,13 @@
               </a:spcAft>
             </a:pPr>
             <a:r>
-              <a:rPr sz="1200" b="0">
-                <a:solidFill>
-                  <a:srgbClr val="282828"/>
-                </a:solidFill>
-                <a:latin typeface="Arial"/>
-              </a:rPr>
-              <a:t>•  The other gauges on the mirror rig: zwfs_run('bench.optics','oap','bench.coat_oap','bareAl','readings',{'L','S','V','P','PF'},'stages',{'bench','battery','noise','loop'},'mask.v_arm','engine').</a:t>
-            </a:r>
-          </a:p>
-          <a:p>
-            <a:pPr>
-              <a:spcAft>
-                <a:spcPts val="600"/>
-              </a:spcAft>
-            </a:pPr>
-            <a:r>
-              <a:rPr sz="1200" b="0">
-                <a:solidFill>
-                  <a:srgbClr val="282828"/>
-                </a:solidFill>
-                <a:latin typeface="Arial"/>
-              </a:rPr>
-              <a:t>•  Where: MACOS_resources/mmacos/templates/40_benches/{tg_psi_dm96_oap, zwfs_dm96, pdi_dm96}, the shared scoring library dm_gauge_lib, branch dev-candidate.  A model-1024 run needs about 11 GB; the batch wrappers run one at a time.</a:t>
-            </a:r>
-          </a:p>
-          <a:p>
-            <a:pPr>
-              <a:spcAft>
-                <a:spcPts val="600"/>
-              </a:spcAft>
-            </a:pPr>
-            <a:r>
-              <a:rPr sz="1200" b="0">
-                <a:solidFill>
-                  <a:srgbClr val="282828"/>
-                </a:solidFill>
-                <a:latin typeface="Arial"/>
-              </a:rPr>
-              <a:t>•  Gates: every stage asserts its own gates (the mask round trip, the reference-wave surrogate, the fold, the pinhole, the analyzer); tDmgLoop 15/15; the mmacos fast suite 481/0.</a:t>
-            </a:r>
-          </a:p>
-        </p:txBody>
-      </p:sp>
-      <p:sp>
-        <p:nvSpPr>
-          <p:cNvPr id="6" name="TextBox 5"/>
-          <p:cNvSpPr txBox="1"/>
-          <p:nvPr/>
-        </p:nvSpPr>
-        <p:spPr>
-          <a:xfrm>
-            <a:off x="6400800" y="3736848"/>
-            <a:ext cx="5394960" cy="274320"/>
-          </a:xfrm>
-          <a:prstGeom prst="rect">
-            <a:avLst/>
-          </a:prstGeom>
-          <a:noFill/>
-        </p:spPr>
-        <p:txBody>
-          <a:bodyPr wrap="square">
-            <a:spAutoFit/>
-          </a:bodyPr>
-          <a:lstStyle/>
-          <a:p>
-            <a:pPr>
-              <a:spcAft>
-                <a:spcPts val="600"/>
-              </a:spcAft>
-            </a:pPr>
-            <a:r>
               <a:rPr sz="1050" b="0">
                 <a:solidFill>
                   <a:srgbClr val="6E6E6E"/>
                 </a:solidFill>
                 <a:latin typeface="Arial"/>
               </a:rPr>
-              <a:t>Each directory's README carries the full command list and the run-tag index.</a:t>
+              <a:t>The scoring library (the loop, the unwrapper, the arm and analyzer maps, the clearance check) is shared by the three lanes; nothing is copied between them.  The path is recorded as reference memory so the next configuration follows it in a day.</a:t>
             </a:r>
           </a:p>
         </p:txBody>
@@ -24472,7 +24625,7 @@
                 </a:solidFill>
                 <a:latin typeface="Arial"/>
               </a:rPr>
-              <a:t>Backup: the interferometer's three phase-shift forms</a:t>
+              <a:t>Run it yourself</a:t>
             </a:r>
           </a:p>
           <a:p>
@@ -24488,7 +24641,7 @@
                 </a:solidFill>
                 <a:latin typeface="Arial"/>
               </a:rPr>
-              <a:t>The four frames are the same in the model; the forms differ in what they get wrong</a:t>
+              <a:t>One parameter sheet and one runner per approach, shared code underneath; every number here is reproduced by the commands below</a:t>
             </a:r>
           </a:p>
         </p:txBody>
@@ -24537,6 +24690,320 @@
           </a:p>
         </p:txBody>
       </p:sp>
+      <p:sp>
+        <p:nvSpPr>
+          <p:cNvPr id="4" name="TextBox 3"/>
+          <p:cNvSpPr txBox="1"/>
+          <p:nvPr/>
+        </p:nvSpPr>
+        <p:spPr>
+          <a:xfrm>
+            <a:off x="411480" y="1298448"/>
+            <a:ext cx="5806440" cy="274320"/>
+          </a:xfrm>
+          <a:prstGeom prst="rect">
+            <a:avLst/>
+          </a:prstGeom>
+          <a:noFill/>
+        </p:spPr>
+        <p:txBody>
+          <a:bodyPr wrap="square">
+            <a:spAutoFit/>
+          </a:bodyPr>
+          <a:lstStyle/>
+          <a:p>
+            <a:pPr>
+              <a:spcAft>
+                <a:spcPts val="600"/>
+              </a:spcAft>
+            </a:pPr>
+            <a:r>
+              <a:rPr sz="1200" b="0">
+                <a:solidFill>
+                  <a:srgbClr val="282828"/>
+                </a:solidFill>
+                <a:latin typeface="Arial"/>
+              </a:rPr>
+              <a:t>•  Interferometer (tg_psi_dm96_oap): tg96_run for the lens rig; tg96_run('bench.optics','oap','tag','oap') for the mirror rig; ./tg96_batch.sh lens_deck "'stages',{'bench','deck'},'battery.noise',true"; ./tg96_batch.sh loop_lens "'stages',{'bench','loop','figs'}".</a:t>
+            </a:r>
+          </a:p>
+          <a:p>
+            <a:pPr>
+              <a:spcAft>
+                <a:spcPts val="600"/>
+              </a:spcAft>
+            </a:pPr>
+            <a:r>
+              <a:rPr sz="1200" b="0">
+                <a:solidFill>
+                  <a:srgbClr val="282828"/>
+                </a:solidFill>
+                <a:latin typeface="Arial"/>
+              </a:rPr>
+              <a:t>•  Pupil image (tg_psi_dm96_oap): tg96_pupilq('rig','lens'), tg96_pupilsim('rig','oap'); both tools, both rigs: ./tg96_pupil_batch.sh both (knobs: P.pupil in tg96_params).</a:t>
+            </a:r>
+          </a:p>
+          <a:p>
+            <a:pPr>
+              <a:spcAft>
+                <a:spcPts val="600"/>
+              </a:spcAft>
+            </a:pPr>
+            <a:r>
+              <a:rPr sz="1200" b="0">
+                <a:solidFill>
+                  <a:srgbClr val="282828"/>
+                </a:solidFill>
+                <a:latin typeface="Arial"/>
+              </a:rPr>
+              <a:t>•  Zernike sensors (zwfs_dm96): out = zwfs_run; (bench + battery + figures); zwfs_run('tag','ng385','NGRID',385); zwfs_run('MODEL',2048,'NGRID',385,'param_file','macos_param_2048.txt'); ./zwfs_batch.sh loop193 "'stages',{'bench','loop','figs'}".</a:t>
+            </a:r>
+          </a:p>
+          <a:p>
+            <a:pPr>
+              <a:spcAft>
+                <a:spcPts val="600"/>
+              </a:spcAft>
+            </a:pPr>
+            <a:r>
+              <a:rPr sz="1200" b="0">
+                <a:solidFill>
+                  <a:srgbClr val="282828"/>
+                </a:solidFill>
+                <a:latin typeface="Arial"/>
+              </a:rPr>
+              <a:t>•  Point-diffraction (pdi_dm96): P = pdi_params; out = pdi_run(P);; pdi_run('pdi.DIA_LAMD',1.0,'stages',{'bench','battery','figs'}); ./pdi_batch.sh TAG "pdi_params, 'stages',{'bench','loop','figs'}".</a:t>
+            </a:r>
+          </a:p>
+        </p:txBody>
+      </p:sp>
+      <p:sp>
+        <p:nvSpPr>
+          <p:cNvPr id="5" name="TextBox 4"/>
+          <p:cNvSpPr txBox="1"/>
+          <p:nvPr/>
+        </p:nvSpPr>
+        <p:spPr>
+          <a:xfrm>
+            <a:off x="6400800" y="1298448"/>
+            <a:ext cx="5394960" cy="274320"/>
+          </a:xfrm>
+          <a:prstGeom prst="rect">
+            <a:avLst/>
+          </a:prstGeom>
+          <a:noFill/>
+        </p:spPr>
+        <p:txBody>
+          <a:bodyPr wrap="square">
+            <a:spAutoFit/>
+          </a:bodyPr>
+          <a:lstStyle/>
+          <a:p>
+            <a:pPr>
+              <a:spcAft>
+                <a:spcPts val="600"/>
+              </a:spcAft>
+            </a:pPr>
+            <a:r>
+              <a:rPr sz="1200" b="0">
+                <a:solidFill>
+                  <a:srgbClr val="282828"/>
+                </a:solidFill>
+                <a:latin typeface="Arial"/>
+              </a:rPr>
+              <a:t>•  The other gauges on the mirror rig: zwfs_run('bench.optics','oap','bench.coat_oap','bareAl','readings',{'L','S','V','P','PF'},'stages',{'bench','battery','noise','loop'},'mask.v_arm','engine').</a:t>
+            </a:r>
+          </a:p>
+          <a:p>
+            <a:pPr>
+              <a:spcAft>
+                <a:spcPts val="600"/>
+              </a:spcAft>
+            </a:pPr>
+            <a:r>
+              <a:rPr sz="1200" b="0">
+                <a:solidFill>
+                  <a:srgbClr val="282828"/>
+                </a:solidFill>
+                <a:latin typeface="Arial"/>
+              </a:rPr>
+              <a:t>•  Where: MACOS_resources/mmacos/templates/40_benches/{tg_psi_dm96_oap, zwfs_dm96, pdi_dm96}, the shared scoring library dm_gauge_lib, branch dev-candidate.  A model-1024 run needs about 11 GB; the batch wrappers run one at a time.</a:t>
+            </a:r>
+          </a:p>
+          <a:p>
+            <a:pPr>
+              <a:spcAft>
+                <a:spcPts val="600"/>
+              </a:spcAft>
+            </a:pPr>
+            <a:r>
+              <a:rPr sz="1200" b="0">
+                <a:solidFill>
+                  <a:srgbClr val="282828"/>
+                </a:solidFill>
+                <a:latin typeface="Arial"/>
+              </a:rPr>
+              <a:t>•  Gates: every stage asserts its own gates (the mask round trip, the reference-wave surrogate, the fold, the pinhole, the analyzer); tDmgLoop 15/15; the mmacos fast suite 481/0.</a:t>
+            </a:r>
+          </a:p>
+        </p:txBody>
+      </p:sp>
+      <p:sp>
+        <p:nvSpPr>
+          <p:cNvPr id="6" name="TextBox 5"/>
+          <p:cNvSpPr txBox="1"/>
+          <p:nvPr/>
+        </p:nvSpPr>
+        <p:spPr>
+          <a:xfrm>
+            <a:off x="6400800" y="3736848"/>
+            <a:ext cx="5394960" cy="274320"/>
+          </a:xfrm>
+          <a:prstGeom prst="rect">
+            <a:avLst/>
+          </a:prstGeom>
+          <a:noFill/>
+        </p:spPr>
+        <p:txBody>
+          <a:bodyPr wrap="square">
+            <a:spAutoFit/>
+          </a:bodyPr>
+          <a:lstStyle/>
+          <a:p>
+            <a:pPr>
+              <a:spcAft>
+                <a:spcPts val="600"/>
+              </a:spcAft>
+            </a:pPr>
+            <a:r>
+              <a:rPr sz="1050" b="0">
+                <a:solidFill>
+                  <a:srgbClr val="6E6E6E"/>
+                </a:solidFill>
+                <a:latin typeface="Arial"/>
+              </a:rPr>
+              <a:t>Each directory's README carries the full command list and the run-tag index.</a:t>
+            </a:r>
+          </a:p>
+        </p:txBody>
+      </p:sp>
+    </p:spTree>
+  </p:cSld>
+  <p:clrMapOvr>
+    <a:masterClrMapping/>
+  </p:clrMapOvr>
+</p:sld>
+</file>
+
+<file path=ppt/slides/slide44.xml><?xml version="1.0" encoding="utf-8"?>
+<p:sld xmlns:a="http://schemas.openxmlformats.org/drawingml/2006/main" xmlns:p="http://schemas.openxmlformats.org/presentationml/2006/main" xmlns:r="http://schemas.openxmlformats.org/officeDocument/2006/relationships">
+  <p:cSld>
+    <p:spTree>
+      <p:nvGrpSpPr>
+        <p:cNvPr id="1" name=""/>
+        <p:cNvGrpSpPr/>
+        <p:nvPr/>
+      </p:nvGrpSpPr>
+      <p:grpSpPr/>
+      <p:sp>
+        <p:nvSpPr>
+          <p:cNvPr id="2" name="TextBox 1"/>
+          <p:cNvSpPr txBox="1"/>
+          <p:nvPr/>
+        </p:nvSpPr>
+        <p:spPr>
+          <a:xfrm>
+            <a:off x="411480" y="201168"/>
+            <a:ext cx="11368735" cy="914400"/>
+          </a:xfrm>
+          <a:prstGeom prst="rect">
+            <a:avLst/>
+          </a:prstGeom>
+          <a:noFill/>
+        </p:spPr>
+        <p:txBody>
+          <a:bodyPr wrap="square">
+            <a:spAutoFit/>
+          </a:bodyPr>
+          <a:lstStyle/>
+          <a:p>
+            <a:pPr>
+              <a:spcAft>
+                <a:spcPts val="400"/>
+              </a:spcAft>
+            </a:pPr>
+            <a:r>
+              <a:rPr sz="2400" b="1">
+                <a:solidFill>
+                  <a:srgbClr val="1F4E79"/>
+                </a:solidFill>
+                <a:latin typeface="Arial"/>
+              </a:rPr>
+              <a:t>Backup: the interferometer's three phase-shift forms</a:t>
+            </a:r>
+          </a:p>
+          <a:p>
+            <a:pPr>
+              <a:spcAft>
+                <a:spcPts val="0"/>
+              </a:spcAft>
+            </a:pPr>
+            <a:r>
+              <a:rPr sz="1250" b="0">
+                <a:solidFill>
+                  <a:srgbClr val="6E6E6E"/>
+                </a:solidFill>
+                <a:latin typeface="Arial"/>
+              </a:rPr>
+              <a:t>The four frames are the same in the model; the forms differ in what they get wrong</a:t>
+            </a:r>
+          </a:p>
+        </p:txBody>
+      </p:sp>
+      <p:sp>
+        <p:nvSpPr>
+          <p:cNvPr id="3" name="Rectangle 2"/>
+          <p:cNvSpPr/>
+          <p:nvPr/>
+        </p:nvSpPr>
+        <p:spPr>
+          <a:xfrm>
+            <a:off x="411480" y="1133856"/>
+            <a:ext cx="11368735" cy="20320"/>
+          </a:xfrm>
+          <a:prstGeom prst="rect">
+            <a:avLst/>
+          </a:prstGeom>
+          <a:solidFill>
+            <a:srgbClr val="B8C6D4"/>
+          </a:solidFill>
+          <a:ln>
+            <a:noFill/>
+          </a:ln>
+          <a:effectLst/>
+        </p:spPr>
+        <p:style>
+          <a:lnRef idx="1">
+            <a:schemeClr val="accent1"/>
+          </a:lnRef>
+          <a:fillRef idx="3">
+            <a:schemeClr val="accent1"/>
+          </a:fillRef>
+          <a:effectRef idx="2">
+            <a:schemeClr val="accent1"/>
+          </a:effectRef>
+          <a:fontRef idx="minor">
+            <a:schemeClr val="lt1"/>
+          </a:fontRef>
+        </p:style>
+        <p:txBody>
+          <a:bodyPr rtlCol="0" anchor="ctr"/>
+          <a:lstStyle/>
+          <a:p>
+            <a:pPr algn="ctr"/>
+          </a:p>
+        </p:txBody>
+      </p:sp>
       <p:graphicFrame>
         <p:nvGraphicFramePr>
           <p:cNvPr id="4" name="Table 3"/>
@@ -24972,7 +25439,7 @@
 </p:sld>
 </file>
 
-<file path=ppt/slides/slide44.xml><?xml version="1.0" encoding="utf-8"?>
+<file path=ppt/slides/slide45.xml><?xml version="1.0" encoding="utf-8"?>
 <p:sld xmlns:a="http://schemas.openxmlformats.org/drawingml/2006/main" xmlns:p="http://schemas.openxmlformats.org/presentationml/2006/main" xmlns:r="http://schemas.openxmlformats.org/officeDocument/2006/relationships">
   <p:cSld>
     <p:spTree>
@@ -25820,7 +26287,7 @@
 </p:sld>
 </file>
 
-<file path=ppt/slides/slide45.xml><?xml version="1.0" encoding="utf-8"?>
+<file path=ppt/slides/slide46.xml><?xml version="1.0" encoding="utf-8"?>
 <p:sld xmlns:a="http://schemas.openxmlformats.org/drawingml/2006/main" xmlns:p="http://schemas.openxmlformats.org/presentationml/2006/main" xmlns:r="http://schemas.openxmlformats.org/officeDocument/2006/relationships">
   <p:cSld>
     <p:spTree>
@@ -26110,7 +26577,7 @@
 </p:sld>
 </file>
 
-<file path=ppt/slides/slide46.xml><?xml version="1.0" encoding="utf-8"?>
+<file path=ppt/slides/slide47.xml><?xml version="1.0" encoding="utf-8"?>
 <p:sld xmlns:a="http://schemas.openxmlformats.org/drawingml/2006/main" xmlns:p="http://schemas.openxmlformats.org/presentationml/2006/main" xmlns:r="http://schemas.openxmlformats.org/officeDocument/2006/relationships">
   <p:cSld>
     <p:spTree>
@@ -26966,7 +27433,7 @@
 </p:sld>
 </file>
 
-<file path=ppt/slides/slide47.xml><?xml version="1.0" encoding="utf-8"?>
+<file path=ppt/slides/slide48.xml><?xml version="1.0" encoding="utf-8"?>
 <p:sld xmlns:a="http://schemas.openxmlformats.org/drawingml/2006/main" xmlns:p="http://schemas.openxmlformats.org/presentationml/2006/main" xmlns:r="http://schemas.openxmlformats.org/officeDocument/2006/relationships">
   <p:cSld>
     <p:spTree>
@@ -28027,7 +28494,7 @@
 </p:sld>
 </file>
 
-<file path=ppt/slides/slide48.xml><?xml version="1.0" encoding="utf-8"?>
+<file path=ppt/slides/slide49.xml><?xml version="1.0" encoding="utf-8"?>
 <p:sld xmlns:a="http://schemas.openxmlformats.org/drawingml/2006/main" xmlns:p="http://schemas.openxmlformats.org/presentationml/2006/main" xmlns:r="http://schemas.openxmlformats.org/officeDocument/2006/relationships">
   <p:cSld>
     <p:spTree>
@@ -28689,7 +29156,974 @@
 </p:sld>
 </file>
 
-<file path=ppt/slides/slide49.xml><?xml version="1.0" encoding="utf-8"?>
+<file path=ppt/slides/slide5.xml><?xml version="1.0" encoding="utf-8"?>
+<p:sld xmlns:a="http://schemas.openxmlformats.org/drawingml/2006/main" xmlns:p="http://schemas.openxmlformats.org/presentationml/2006/main" xmlns:r="http://schemas.openxmlformats.org/officeDocument/2006/relationships">
+  <p:cSld>
+    <p:spTree>
+      <p:nvGrpSpPr>
+        <p:cNvPr id="1" name=""/>
+        <p:cNvGrpSpPr/>
+        <p:nvPr/>
+      </p:nvGrpSpPr>
+      <p:grpSpPr/>
+      <p:sp>
+        <p:nvSpPr>
+          <p:cNvPr id="2" name="TextBox 1"/>
+          <p:cNvSpPr txBox="1"/>
+          <p:nvPr/>
+        </p:nvSpPr>
+        <p:spPr>
+          <a:xfrm>
+            <a:off x="411480" y="201168"/>
+            <a:ext cx="11368735" cy="914400"/>
+          </a:xfrm>
+          <a:prstGeom prst="rect">
+            <a:avLst/>
+          </a:prstGeom>
+          <a:noFill/>
+        </p:spPr>
+        <p:txBody>
+          <a:bodyPr wrap="square">
+            <a:spAutoFit/>
+          </a:bodyPr>
+          <a:lstStyle/>
+          <a:p>
+            <a:pPr>
+              <a:spcAft>
+                <a:spcPts val="400"/>
+              </a:spcAft>
+            </a:pPr>
+            <a:r>
+              <a:rPr sz="2400" b="1">
+                <a:solidFill>
+                  <a:srgbClr val="1F4E79"/>
+                </a:solidFill>
+                <a:latin typeface="Arial"/>
+              </a:rPr>
+              <a:t>The splitter angle: three options</a:t>
+            </a:r>
+          </a:p>
+          <a:p>
+            <a:pPr>
+              <a:spcAft>
+                <a:spcPts val="0"/>
+              </a:spcAft>
+            </a:pPr>
+            <a:r>
+              <a:rPr sz="1250" b="0">
+                <a:solidFill>
+                  <a:srgbClr val="6E6E6E"/>
+                </a:solidFill>
+                <a:latin typeface="Arial"/>
+              </a:rPr>
+              <a:t>The record's 7° cannot be built; 22.5° clears every part and is the choice; 30° adds margin at the price of a wider bench and more plate polarization</a:t>
+            </a:r>
+          </a:p>
+        </p:txBody>
+      </p:sp>
+      <p:sp>
+        <p:nvSpPr>
+          <p:cNvPr id="3" name="Rectangle 2"/>
+          <p:cNvSpPr/>
+          <p:nvPr/>
+        </p:nvSpPr>
+        <p:spPr>
+          <a:xfrm>
+            <a:off x="411480" y="1133856"/>
+            <a:ext cx="11368735" cy="20320"/>
+          </a:xfrm>
+          <a:prstGeom prst="rect">
+            <a:avLst/>
+          </a:prstGeom>
+          <a:solidFill>
+            <a:srgbClr val="B8C6D4"/>
+          </a:solidFill>
+          <a:ln>
+            <a:noFill/>
+          </a:ln>
+          <a:effectLst/>
+        </p:spPr>
+        <p:style>
+          <a:lnRef idx="1">
+            <a:schemeClr val="accent1"/>
+          </a:lnRef>
+          <a:fillRef idx="3">
+            <a:schemeClr val="accent1"/>
+          </a:fillRef>
+          <a:effectRef idx="2">
+            <a:schemeClr val="accent1"/>
+          </a:effectRef>
+          <a:fontRef idx="minor">
+            <a:schemeClr val="lt1"/>
+          </a:fontRef>
+        </p:style>
+        <p:txBody>
+          <a:bodyPr rtlCol="0" anchor="ctr"/>
+          <a:lstStyle/>
+          <a:p>
+            <a:pPr algn="ctr"/>
+          </a:p>
+        </p:txBody>
+      </p:sp>
+      <p:pic>
+        <p:nvPicPr>
+          <p:cNvPr id="4" name="Picture 3" descr="bench_three_nodes.png"/>
+          <p:cNvPicPr>
+            <a:picLocks noChangeAspect="1"/>
+          </p:cNvPicPr>
+          <p:nvPr/>
+        </p:nvPicPr>
+        <p:blipFill>
+          <a:blip r:embed="rId2"/>
+          <a:stretch>
+            <a:fillRect/>
+          </a:stretch>
+        </p:blipFill>
+        <p:spPr>
+          <a:xfrm>
+            <a:off x="2242989" y="1298448"/>
+            <a:ext cx="7705716" cy="1434592"/>
+          </a:xfrm>
+          <a:prstGeom prst="rect">
+            <a:avLst/>
+          </a:prstGeom>
+        </p:spPr>
+      </p:pic>
+      <p:sp>
+        <p:nvSpPr>
+          <p:cNvPr id="5" name="TextBox 4"/>
+          <p:cNvSpPr txBox="1"/>
+          <p:nvPr/>
+        </p:nvSpPr>
+        <p:spPr>
+          <a:xfrm>
+            <a:off x="411480" y="2751328"/>
+            <a:ext cx="11368735" cy="394208"/>
+          </a:xfrm>
+          <a:prstGeom prst="rect">
+            <a:avLst/>
+          </a:prstGeom>
+          <a:noFill/>
+        </p:spPr>
+        <p:txBody>
+          <a:bodyPr wrap="square">
+            <a:spAutoFit/>
+          </a:bodyPr>
+          <a:lstStyle/>
+          <a:p>
+            <a:pPr algn="ctr">
+              <a:spcAft>
+                <a:spcPts val="0"/>
+              </a:spcAft>
+            </a:pPr>
+            <a:r>
+              <a:rPr sz="1000" b="0">
+                <a:solidFill>
+                  <a:srgbClr val="6E6E6E"/>
+                </a:solidFill>
+                <a:latin typeface="Arial"/>
+              </a:rPr>
+              <a:t>The node at 7° (left, the record: eight parts in another beam), 22.5° (middle, the choice: every part clears, the compensator by 16 mm) and 30° (right: the compensator by 57 mm); the output plate and analyzer moved to 160 mm behind the splitter in the last two.  The three panels are the tool's own node drawings, placed side by side.</a:t>
+            </a:r>
+          </a:p>
+        </p:txBody>
+      </p:sp>
+      <p:graphicFrame>
+        <p:nvGraphicFramePr>
+          <p:cNvPr id="6" name="Table 5"/>
+          <p:cNvGraphicFramePr>
+            <a:graphicFrameLocks noGrp="1"/>
+          </p:cNvGraphicFramePr>
+          <p:nvPr/>
+        </p:nvGraphicFramePr>
+        <p:xfrm>
+          <a:off x="411480" y="3182112"/>
+          <a:ext cx="11368734" cy="3183255"/>
+        </p:xfrm>
+        <a:graphic>
+          <a:graphicData uri="http://schemas.openxmlformats.org/drawingml/2006/table">
+            <a:tbl>
+              <a:tblPr firstRow="1" bandRow="1">
+                <a:tableStyleId>{5C22544A-7EE6-4342-B048-85BDC9FD1C3A}</a:tableStyleId>
+              </a:tblPr>
+              <a:tblGrid>
+                <a:gridCol w="3410620"/>
+                <a:gridCol w="2273747"/>
+                <a:gridCol w="3284301"/>
+                <a:gridCol w="2400066"/>
+              </a:tblGrid>
+              <a:tr h="280035">
+                <a:tc>
+                  <a:txBody>
+                    <a:bodyPr wrap="square"/>
+                    <a:lstStyle/>
+                    <a:p>
+                      <a:r>
+                        <a:rPr sz="1100" b="1">
+                          <a:solidFill>
+                            <a:srgbClr val="FFFFFF"/>
+                          </a:solidFill>
+                          <a:latin typeface="Arial"/>
+                        </a:rPr>
+                        <a:t>impact</a:t>
+                      </a:r>
+                    </a:p>
+                  </a:txBody>
+                  <a:tcPr marL="54864" marR="54864" marT="18288" marB="18288">
+                    <a:solidFill>
+                      <a:srgbClr val="1F4E79"/>
+                    </a:solidFill>
+                  </a:tcPr>
+                </a:tc>
+                <a:tc>
+                  <a:txBody>
+                    <a:bodyPr wrap="square"/>
+                    <a:lstStyle/>
+                    <a:p>
+                      <a:r>
+                        <a:rPr sz="1100" b="1">
+                          <a:solidFill>
+                            <a:srgbClr val="FFFFFF"/>
+                          </a:solidFill>
+                          <a:latin typeface="Arial"/>
+                        </a:rPr>
+                        <a:t>7° (record)</a:t>
+                      </a:r>
+                    </a:p>
+                  </a:txBody>
+                  <a:tcPr marL="54864" marR="54864" marT="18288" marB="18288">
+                    <a:solidFill>
+                      <a:srgbClr val="1F4E79"/>
+                    </a:solidFill>
+                  </a:tcPr>
+                </a:tc>
+                <a:tc>
+                  <a:txBody>
+                    <a:bodyPr wrap="square"/>
+                    <a:lstStyle/>
+                    <a:p>
+                      <a:r>
+                        <a:rPr sz="1100" b="1">
+                          <a:solidFill>
+                            <a:srgbClr val="FFFFFF"/>
+                          </a:solidFill>
+                          <a:latin typeface="Arial"/>
+                        </a:rPr>
+                        <a:t>22.5° (choice)</a:t>
+                      </a:r>
+                    </a:p>
+                  </a:txBody>
+                  <a:tcPr marL="54864" marR="54864" marT="18288" marB="18288">
+                    <a:solidFill>
+                      <a:srgbClr val="1F4E79"/>
+                    </a:solidFill>
+                  </a:tcPr>
+                </a:tc>
+                <a:tc>
+                  <a:txBody>
+                    <a:bodyPr wrap="square"/>
+                    <a:lstStyle/>
+                    <a:p>
+                      <a:r>
+                        <a:rPr sz="1100" b="1">
+                          <a:solidFill>
+                            <a:srgbClr val="FFFFFF"/>
+                          </a:solidFill>
+                          <a:latin typeface="Arial"/>
+                        </a:rPr>
+                        <a:t>30°</a:t>
+                      </a:r>
+                    </a:p>
+                  </a:txBody>
+                  <a:tcPr marL="54864" marR="54864" marT="18288" marB="18288">
+                    <a:solidFill>
+                      <a:srgbClr val="1F4E79"/>
+                    </a:solidFill>
+                  </a:tcPr>
+                </a:tc>
+              </a:tr>
+              <a:tr h="468630">
+                <a:tc>
+                  <a:txBody>
+                    <a:bodyPr wrap="square"/>
+                    <a:lstStyle/>
+                    <a:p>
+                      <a:r>
+                        <a:rPr sz="1100" b="0">
+                          <a:solidFill>
+                            <a:srgbClr val="282828"/>
+                          </a:solidFill>
+                          <a:latin typeface="Arial"/>
+                        </a:rPr>
+                        <a:t>node clearance, worst part</a:t>
+                      </a:r>
+                    </a:p>
+                  </a:txBody>
+                  <a:tcPr marL="54864" marR="54864" marT="18288" marB="18288">
+                    <a:solidFill>
+                      <a:srgbClr val="FFFFFF"/>
+                    </a:solidFill>
+                  </a:tcPr>
+                </a:tc>
+                <a:tc>
+                  <a:txBody>
+                    <a:bodyPr wrap="square"/>
+                    <a:lstStyle/>
+                    <a:p>
+                      <a:r>
+                        <a:rPr sz="1100" b="0">
+                          <a:solidFill>
+                            <a:srgbClr val="282828"/>
+                          </a:solidFill>
+                          <a:latin typeface="Arial"/>
+                        </a:rPr>
+                        <a:t>−109 mm: not buildable</a:t>
+                      </a:r>
+                    </a:p>
+                  </a:txBody>
+                  <a:tcPr marL="54864" marR="54864" marT="18288" marB="18288">
+                    <a:solidFill>
+                      <a:srgbClr val="FFFFFF"/>
+                    </a:solidFill>
+                  </a:tcPr>
+                </a:tc>
+                <a:tc>
+                  <a:txBody>
+                    <a:bodyPr wrap="square"/>
+                    <a:lstStyle/>
+                    <a:p>
+                      <a:r>
+                        <a:rPr sz="1100" b="0">
+                          <a:solidFill>
+                            <a:srgbClr val="282828"/>
+                          </a:solidFill>
+                          <a:latin typeface="Arial"/>
+                        </a:rPr>
+                        <a:t>compensator +16 mm; output optics +55 / +65; L2 +100</a:t>
+                      </a:r>
+                    </a:p>
+                  </a:txBody>
+                  <a:tcPr marL="54864" marR="54864" marT="18288" marB="18288">
+                    <a:solidFill>
+                      <a:srgbClr val="FFFFFF"/>
+                    </a:solidFill>
+                  </a:tcPr>
+                </a:tc>
+                <a:tc>
+                  <a:txBody>
+                    <a:bodyPr wrap="square"/>
+                    <a:lstStyle/>
+                    <a:p>
+                      <a:r>
+                        <a:rPr sz="1100" b="0">
+                          <a:solidFill>
+                            <a:srgbClr val="282828"/>
+                          </a:solidFill>
+                          <a:latin typeface="Arial"/>
+                        </a:rPr>
+                        <a:t>compensator +57; the rest +178 or more</a:t>
+                      </a:r>
+                    </a:p>
+                  </a:txBody>
+                  <a:tcPr marL="54864" marR="54864" marT="18288" marB="18288">
+                    <a:solidFill>
+                      <a:srgbClr val="FFFFFF"/>
+                    </a:solidFill>
+                  </a:tcPr>
+                </a:tc>
+              </a:tr>
+              <a:tr h="468630">
+                <a:tc>
+                  <a:txBody>
+                    <a:bodyPr wrap="square"/>
+                    <a:lstStyle/>
+                    <a:p>
+                      <a:r>
+                        <a:rPr sz="1100" b="0">
+                          <a:solidFill>
+                            <a:srgbClr val="282828"/>
+                          </a:solidFill>
+                          <a:latin typeface="Arial"/>
+                        </a:rPr>
+                        <a:t>bench shape</a:t>
+                      </a:r>
+                    </a:p>
+                  </a:txBody>
+                  <a:tcPr marL="54864" marR="54864" marT="18288" marB="18288">
+                    <a:solidFill>
+                      <a:srgbClr val="ECF1F6"/>
+                    </a:solidFill>
+                  </a:tcPr>
+                </a:tc>
+                <a:tc>
+                  <a:txBody>
+                    <a:bodyPr wrap="square"/>
+                    <a:lstStyle/>
+                    <a:p>
+                      <a:r>
+                        <a:rPr sz="1100" b="0">
+                          <a:solidFill>
+                            <a:srgbClr val="282828"/>
+                          </a:solidFill>
+                          <a:latin typeface="Arial"/>
+                        </a:rPr>
+                        <a:t>all four legs within 14° of one line</a:t>
+                      </a:r>
+                    </a:p>
+                  </a:txBody>
+                  <a:tcPr marL="54864" marR="54864" marT="18288" marB="18288">
+                    <a:solidFill>
+                      <a:srgbClr val="ECF1F6"/>
+                    </a:solidFill>
+                  </a:tcPr>
+                </a:tc>
+                <a:tc>
+                  <a:txBody>
+                    <a:bodyPr wrap="square"/>
+                    <a:lstStyle/>
+                    <a:p>
+                      <a:r>
+                        <a:rPr sz="1100" b="0">
+                          <a:solidFill>
+                            <a:srgbClr val="282828"/>
+                          </a:solidFill>
+                          <a:latin typeface="Arial"/>
+                        </a:rPr>
+                        <a:t>mirror leg at 45° to the source leg</a:t>
+                      </a:r>
+                    </a:p>
+                  </a:txBody>
+                  <a:tcPr marL="54864" marR="54864" marT="18288" marB="18288">
+                    <a:solidFill>
+                      <a:srgbClr val="ECF1F6"/>
+                    </a:solidFill>
+                  </a:tcPr>
+                </a:tc>
+                <a:tc>
+                  <a:txBody>
+                    <a:bodyPr wrap="square"/>
+                    <a:lstStyle/>
+                    <a:p>
+                      <a:r>
+                        <a:rPr sz="1100" b="0">
+                          <a:solidFill>
+                            <a:srgbClr val="282828"/>
+                          </a:solidFill>
+                          <a:latin typeface="Arial"/>
+                        </a:rPr>
+                        <a:t>mirror leg at 60°</a:t>
+                      </a:r>
+                    </a:p>
+                  </a:txBody>
+                  <a:tcPr marL="54864" marR="54864" marT="18288" marB="18288">
+                    <a:solidFill>
+                      <a:srgbClr val="ECF1F6"/>
+                    </a:solidFill>
+                  </a:tcPr>
+                </a:tc>
+              </a:tr>
+              <a:tr h="468630">
+                <a:tc>
+                  <a:txBody>
+                    <a:bodyPr wrap="square"/>
+                    <a:lstStyle/>
+                    <a:p>
+                      <a:r>
+                        <a:rPr sz="1100" b="0">
+                          <a:solidFill>
+                            <a:srgbClr val="282828"/>
+                          </a:solidFill>
+                          <a:latin typeface="Arial"/>
+                        </a:rPr>
+                        <a:t>plate's polarization (mean diattenuation, uniform)</a:t>
+                      </a:r>
+                    </a:p>
+                  </a:txBody>
+                  <a:tcPr marL="54864" marR="54864" marT="18288" marB="18288">
+                    <a:solidFill>
+                      <a:srgbClr val="FFFFFF"/>
+                    </a:solidFill>
+                  </a:tcPr>
+                </a:tc>
+                <a:tc>
+                  <a:txBody>
+                    <a:bodyPr wrap="square"/>
+                    <a:lstStyle/>
+                    <a:p>
+                      <a:r>
+                        <a:rPr sz="1100" b="0">
+                          <a:solidFill>
+                            <a:srgbClr val="282828"/>
+                          </a:solidFill>
+                          <a:latin typeface="Arial"/>
+                        </a:rPr>
+                        <a:t>0.5%</a:t>
+                      </a:r>
+                    </a:p>
+                  </a:txBody>
+                  <a:tcPr marL="54864" marR="54864" marT="18288" marB="18288">
+                    <a:solidFill>
+                      <a:srgbClr val="FFFFFF"/>
+                    </a:solidFill>
+                  </a:tcPr>
+                </a:tc>
+                <a:tc>
+                  <a:txBody>
+                    <a:bodyPr wrap="square"/>
+                    <a:lstStyle/>
+                    <a:p>
+                      <a:r>
+                        <a:rPr sz="1100" b="0">
+                          <a:solidFill>
+                            <a:srgbClr val="282828"/>
+                          </a:solidFill>
+                          <a:latin typeface="Arial"/>
+                        </a:rPr>
+                        <a:t>5.5%</a:t>
+                      </a:r>
+                    </a:p>
+                  </a:txBody>
+                  <a:tcPr marL="54864" marR="54864" marT="18288" marB="18288">
+                    <a:solidFill>
+                      <a:srgbClr val="FFFFFF"/>
+                    </a:solidFill>
+                  </a:tcPr>
+                </a:tc>
+                <a:tc>
+                  <a:txBody>
+                    <a:bodyPr wrap="square"/>
+                    <a:lstStyle/>
+                    <a:p>
+                      <a:r>
+                        <a:rPr sz="1100" b="0">
+                          <a:solidFill>
+                            <a:srgbClr val="282828"/>
+                          </a:solidFill>
+                          <a:latin typeface="Arial"/>
+                        </a:rPr>
+                        <a:t>10%</a:t>
+                      </a:r>
+                    </a:p>
+                  </a:txBody>
+                  <a:tcPr marL="54864" marR="54864" marT="18288" marB="18288">
+                    <a:solidFill>
+                      <a:srgbClr val="FFFFFF"/>
+                    </a:solidFill>
+                  </a:tcPr>
+                </a:tc>
+              </a:tr>
+              <a:tr h="468630">
+                <a:tc>
+                  <a:txBody>
+                    <a:bodyPr wrap="square"/>
+                    <a:lstStyle/>
+                    <a:p>
+                      <a:r>
+                        <a:rPr sz="1100" b="0">
+                          <a:solidFill>
+                            <a:srgbClr val="282828"/>
+                          </a:solidFill>
+                          <a:latin typeface="Arial"/>
+                        </a:rPr>
+                        <a:t>pupil-varying part (the lenses; what the sensors feel)</a:t>
+                      </a:r>
+                    </a:p>
+                  </a:txBody>
+                  <a:tcPr marL="54864" marR="54864" marT="18288" marB="18288">
+                    <a:solidFill>
+                      <a:srgbClr val="ECF1F6"/>
+                    </a:solidFill>
+                  </a:tcPr>
+                </a:tc>
+                <a:tc>
+                  <a:txBody>
+                    <a:bodyPr wrap="square"/>
+                    <a:lstStyle/>
+                    <a:p>
+                      <a:r>
+                        <a:rPr sz="1100" b="0">
+                          <a:solidFill>
+                            <a:srgbClr val="282828"/>
+                          </a:solidFill>
+                          <a:latin typeface="Arial"/>
+                        </a:rPr>
+                        <a:t>1.1e-3 rms</a:t>
+                      </a:r>
+                    </a:p>
+                  </a:txBody>
+                  <a:tcPr marL="54864" marR="54864" marT="18288" marB="18288">
+                    <a:solidFill>
+                      <a:srgbClr val="ECF1F6"/>
+                    </a:solidFill>
+                  </a:tcPr>
+                </a:tc>
+                <a:tc>
+                  <a:txBody>
+                    <a:bodyPr wrap="square"/>
+                    <a:lstStyle/>
+                    <a:p>
+                      <a:r>
+                        <a:rPr sz="1100" b="0">
+                          <a:solidFill>
+                            <a:srgbClr val="282828"/>
+                          </a:solidFill>
+                          <a:latin typeface="Arial"/>
+                        </a:rPr>
+                        <a:t>1.1e-3 rms</a:t>
+                      </a:r>
+                    </a:p>
+                  </a:txBody>
+                  <a:tcPr marL="54864" marR="54864" marT="18288" marB="18288">
+                    <a:solidFill>
+                      <a:srgbClr val="ECF1F6"/>
+                    </a:solidFill>
+                  </a:tcPr>
+                </a:tc>
+                <a:tc>
+                  <a:txBody>
+                    <a:bodyPr wrap="square"/>
+                    <a:lstStyle/>
+                    <a:p>
+                      <a:r>
+                        <a:rPr sz="1100" b="0">
+                          <a:solidFill>
+                            <a:srgbClr val="282828"/>
+                          </a:solidFill>
+                          <a:latin typeface="Arial"/>
+                        </a:rPr>
+                        <a:t>1.1e-3 rms</a:t>
+                      </a:r>
+                    </a:p>
+                  </a:txBody>
+                  <a:tcPr marL="54864" marR="54864" marT="18288" marB="18288">
+                    <a:solidFill>
+                      <a:srgbClr val="ECF1F6"/>
+                    </a:solidFill>
+                  </a:tcPr>
+                </a:tc>
+              </a:tr>
+              <a:tr h="468630">
+                <a:tc>
+                  <a:txBody>
+                    <a:bodyPr wrap="square"/>
+                    <a:lstStyle/>
+                    <a:p>
+                      <a:r>
+                        <a:rPr sz="1100" b="0">
+                          <a:solidFill>
+                            <a:srgbClr val="282828"/>
+                          </a:solidFill>
+                          <a:latin typeface="Arial"/>
+                        </a:rPr>
+                        <a:t>vector sensor, channel phase difference / 100 nm pokes</a:t>
+                      </a:r>
+                    </a:p>
+                  </a:txBody>
+                  <a:tcPr marL="54864" marR="54864" marT="18288" marB="18288">
+                    <a:solidFill>
+                      <a:srgbClr val="FFFFFF"/>
+                    </a:solidFill>
+                  </a:tcPr>
+                </a:tc>
+                <a:tc>
+                  <a:txBody>
+                    <a:bodyPr wrap="square"/>
+                    <a:lstStyle/>
+                    <a:p>
+                      <a:r>
+                        <a:rPr sz="1100" b="0">
+                          <a:solidFill>
+                            <a:srgbClr val="282828"/>
+                          </a:solidFill>
+                          <a:latin typeface="Arial"/>
+                        </a:rPr>
+                        <a:t>1.63 mrad / 9.0 pm</a:t>
+                      </a:r>
+                    </a:p>
+                  </a:txBody>
+                  <a:tcPr marL="54864" marR="54864" marT="18288" marB="18288">
+                    <a:solidFill>
+                      <a:srgbClr val="FFFFFF"/>
+                    </a:solidFill>
+                  </a:tcPr>
+                </a:tc>
+                <a:tc>
+                  <a:txBody>
+                    <a:bodyPr wrap="square"/>
+                    <a:lstStyle/>
+                    <a:p>
+                      <a:r>
+                        <a:rPr sz="1100" b="0">
+                          <a:solidFill>
+                            <a:srgbClr val="282828"/>
+                          </a:solidFill>
+                          <a:latin typeface="Arial"/>
+                        </a:rPr>
+                        <a:t>1.66 mrad / 8.8 pm</a:t>
+                      </a:r>
+                    </a:p>
+                  </a:txBody>
+                  <a:tcPr marL="54864" marR="54864" marT="18288" marB="18288">
+                    <a:solidFill>
+                      <a:srgbClr val="FFFFFF"/>
+                    </a:solidFill>
+                  </a:tcPr>
+                </a:tc>
+                <a:tc>
+                  <a:txBody>
+                    <a:bodyPr wrap="square"/>
+                    <a:lstStyle/>
+                    <a:p>
+                      <a:r>
+                        <a:rPr sz="1100" b="0">
+                          <a:solidFill>
+                            <a:srgbClr val="282828"/>
+                          </a:solidFill>
+                          <a:latin typeface="Arial"/>
+                        </a:rPr>
+                        <a:t>1.69 mrad / 9.1 pm</a:t>
+                      </a:r>
+                    </a:p>
+                  </a:txBody>
+                  <a:tcPr marL="54864" marR="54864" marT="18288" marB="18288">
+                    <a:solidFill>
+                      <a:srgbClr val="FFFFFF"/>
+                    </a:solidFill>
+                  </a:tcPr>
+                </a:tc>
+              </a:tr>
+              <a:tr h="280035">
+                <a:tc>
+                  <a:txBody>
+                    <a:bodyPr wrap="square"/>
+                    <a:lstStyle/>
+                    <a:p>
+                      <a:r>
+                        <a:rPr sz="1100" b="0">
+                          <a:solidFill>
+                            <a:srgbClr val="282828"/>
+                          </a:solidFill>
+                          <a:latin typeface="Arial"/>
+                        </a:rPr>
+                        <a:t>transmitted beam shift in the 2.6 mm plate</a:t>
+                      </a:r>
+                    </a:p>
+                  </a:txBody>
+                  <a:tcPr marL="54864" marR="54864" marT="18288" marB="18288">
+                    <a:solidFill>
+                      <a:srgbClr val="ECF1F6"/>
+                    </a:solidFill>
+                  </a:tcPr>
+                </a:tc>
+                <a:tc>
+                  <a:txBody>
+                    <a:bodyPr wrap="square"/>
+                    <a:lstStyle/>
+                    <a:p>
+                      <a:r>
+                        <a:rPr sz="1100" b="0">
+                          <a:solidFill>
+                            <a:srgbClr val="282828"/>
+                          </a:solidFill>
+                          <a:latin typeface="Arial"/>
+                        </a:rPr>
+                        <a:t>0.1 mm</a:t>
+                      </a:r>
+                    </a:p>
+                  </a:txBody>
+                  <a:tcPr marL="54864" marR="54864" marT="18288" marB="18288">
+                    <a:solidFill>
+                      <a:srgbClr val="ECF1F6"/>
+                    </a:solidFill>
+                  </a:tcPr>
+                </a:tc>
+                <a:tc>
+                  <a:txBody>
+                    <a:bodyPr wrap="square"/>
+                    <a:lstStyle/>
+                    <a:p>
+                      <a:r>
+                        <a:rPr sz="1100" b="0">
+                          <a:solidFill>
+                            <a:srgbClr val="282828"/>
+                          </a:solidFill>
+                          <a:latin typeface="Arial"/>
+                        </a:rPr>
+                        <a:t>0.36 mm (1.4 at 10 mm)</a:t>
+                      </a:r>
+                    </a:p>
+                  </a:txBody>
+                  <a:tcPr marL="54864" marR="54864" marT="18288" marB="18288">
+                    <a:solidFill>
+                      <a:srgbClr val="ECF1F6"/>
+                    </a:solidFill>
+                  </a:tcPr>
+                </a:tc>
+                <a:tc>
+                  <a:txBody>
+                    <a:bodyPr wrap="square"/>
+                    <a:lstStyle/>
+                    <a:p>
+                      <a:r>
+                        <a:rPr sz="1100" b="0">
+                          <a:solidFill>
+                            <a:srgbClr val="282828"/>
+                          </a:solidFill>
+                          <a:latin typeface="Arial"/>
+                        </a:rPr>
+                        <a:t>0.50 mm</a:t>
+                      </a:r>
+                    </a:p>
+                  </a:txBody>
+                  <a:tcPr marL="54864" marR="54864" marT="18288" marB="18288">
+                    <a:solidFill>
+                      <a:srgbClr val="ECF1F6"/>
+                    </a:solidFill>
+                  </a:tcPr>
+                </a:tc>
+              </a:tr>
+              <a:tr h="280035">
+                <a:tc>
+                  <a:txBody>
+                    <a:bodyPr wrap="square"/>
+                    <a:lstStyle/>
+                    <a:p>
+                      <a:r>
+                        <a:rPr sz="1100" b="0">
+                          <a:solidFill>
+                            <a:srgbClr val="282828"/>
+                          </a:solidFill>
+                          <a:latin typeface="Arial"/>
+                        </a:rPr>
+                        <a:t>interferometer snapshot form</a:t>
+                      </a:r>
+                    </a:p>
+                  </a:txBody>
+                  <a:tcPr marL="54864" marR="54864" marT="18288" marB="18288">
+                    <a:solidFill>
+                      <a:srgbClr val="FFFFFF"/>
+                    </a:solidFill>
+                  </a:tcPr>
+                </a:tc>
+                <a:tc>
+                  <a:txBody>
+                    <a:bodyPr wrap="square"/>
+                    <a:lstStyle/>
+                    <a:p>
+                      <a:r>
+                        <a:rPr sz="1100" b="0">
+                          <a:solidFill>
+                            <a:srgbClr val="282828"/>
+                          </a:solidFill>
+                          <a:latin typeface="Arial"/>
+                        </a:rPr>
+                        <a:t>the small-angle case</a:t>
+                      </a:r>
+                    </a:p>
+                  </a:txBody>
+                  <a:tcPr marL="54864" marR="54864" marT="18288" marB="18288">
+                    <a:solidFill>
+                      <a:srgbClr val="FFFFFF"/>
+                    </a:solidFill>
+                  </a:tcPr>
+                </a:tc>
+                <a:tc>
+                  <a:txBody>
+                    <a:bodyPr wrap="square"/>
+                    <a:lstStyle/>
+                    <a:p>
+                      <a:r>
+                        <a:rPr sz="1100" b="0">
+                          <a:solidFill>
+                            <a:srgbClr val="282828"/>
+                          </a:solidFill>
+                          <a:latin typeface="Arial"/>
+                        </a:rPr>
+                        <a:t>its plate systematics re-run at this angle</a:t>
+                      </a:r>
+                    </a:p>
+                  </a:txBody>
+                  <a:tcPr marL="54864" marR="54864" marT="18288" marB="18288">
+                    <a:solidFill>
+                      <a:srgbClr val="FFFFFF"/>
+                    </a:solidFill>
+                  </a:tcPr>
+                </a:tc>
+                <a:tc>
+                  <a:txBody>
+                    <a:bodyPr wrap="square"/>
+                    <a:lstStyle/>
+                    <a:p>
+                      <a:r>
+                        <a:rPr sz="1100" b="0">
+                          <a:solidFill>
+                            <a:srgbClr val="282828"/>
+                          </a:solidFill>
+                          <a:latin typeface="Arial"/>
+                        </a:rPr>
+                        <a:t>larger</a:t>
+                      </a:r>
+                    </a:p>
+                  </a:txBody>
+                  <a:tcPr marL="54864" marR="54864" marT="18288" marB="18288">
+                    <a:solidFill>
+                      <a:srgbClr val="FFFFFF"/>
+                    </a:solidFill>
+                  </a:tcPr>
+                </a:tc>
+              </a:tr>
+            </a:tbl>
+          </a:graphicData>
+        </a:graphic>
+      </p:graphicFrame>
+      <p:sp>
+        <p:nvSpPr>
+          <p:cNvPr id="7" name="TextBox 6"/>
+          <p:cNvSpPr txBox="1"/>
+          <p:nvPr/>
+        </p:nvSpPr>
+        <p:spPr>
+          <a:xfrm>
+            <a:off x="411480" y="6511671"/>
+            <a:ext cx="11368735" cy="274320"/>
+          </a:xfrm>
+          <a:prstGeom prst="rect">
+            <a:avLst/>
+          </a:prstGeom>
+          <a:noFill/>
+        </p:spPr>
+        <p:txBody>
+          <a:bodyPr wrap="square">
+            <a:spAutoFit/>
+          </a:bodyPr>
+          <a:lstStyle/>
+          <a:p>
+            <a:pPr>
+              <a:spcAft>
+                <a:spcPts val="600"/>
+              </a:spcAft>
+            </a:pPr>
+            <a:r>
+              <a:rPr sz="1050" b="0">
+                <a:solidFill>
+                  <a:srgbClr val="6E6E6E"/>
+                </a:solidFill>
+                <a:latin typeface="Arial"/>
+              </a:rPr>
+              <a:t>The sensors reproduce their rows at every angle; the interferometer's snapshot form is the one thing the angle changes, through the plate's polarization, and the cube form is built for 45°.  Run tags bs22_dev, bs30_dev; the panels at 7° and 30° are on the backup clearance slide.</a:t>
+            </a:r>
+          </a:p>
+        </p:txBody>
+      </p:sp>
+    </p:spTree>
+  </p:cSld>
+  <p:clrMapOvr>
+    <a:masterClrMapping/>
+  </p:clrMapOvr>
+</p:sld>
+</file>
+
+<file path=ppt/slides/slide50.xml><?xml version="1.0" encoding="utf-8"?>
 <p:sld xmlns:a="http://schemas.openxmlformats.org/drawingml/2006/main" xmlns:p="http://schemas.openxmlformats.org/presentationml/2006/main" xmlns:r="http://schemas.openxmlformats.org/officeDocument/2006/relationships">
   <p:cSld>
     <p:spTree>
@@ -28979,974 +30413,7 @@
 </p:sld>
 </file>
 
-<file path=ppt/slides/slide5.xml><?xml version="1.0" encoding="utf-8"?>
-<p:sld xmlns:a="http://schemas.openxmlformats.org/drawingml/2006/main" xmlns:p="http://schemas.openxmlformats.org/presentationml/2006/main" xmlns:r="http://schemas.openxmlformats.org/officeDocument/2006/relationships">
-  <p:cSld>
-    <p:spTree>
-      <p:nvGrpSpPr>
-        <p:cNvPr id="1" name=""/>
-        <p:cNvGrpSpPr/>
-        <p:nvPr/>
-      </p:nvGrpSpPr>
-      <p:grpSpPr/>
-      <p:sp>
-        <p:nvSpPr>
-          <p:cNvPr id="2" name="TextBox 1"/>
-          <p:cNvSpPr txBox="1"/>
-          <p:nvPr/>
-        </p:nvSpPr>
-        <p:spPr>
-          <a:xfrm>
-            <a:off x="411480" y="201168"/>
-            <a:ext cx="11368735" cy="914400"/>
-          </a:xfrm>
-          <a:prstGeom prst="rect">
-            <a:avLst/>
-          </a:prstGeom>
-          <a:noFill/>
-        </p:spPr>
-        <p:txBody>
-          <a:bodyPr wrap="square">
-            <a:spAutoFit/>
-          </a:bodyPr>
-          <a:lstStyle/>
-          <a:p>
-            <a:pPr>
-              <a:spcAft>
-                <a:spcPts val="400"/>
-              </a:spcAft>
-            </a:pPr>
-            <a:r>
-              <a:rPr sz="2400" b="1">
-                <a:solidFill>
-                  <a:srgbClr val="1F4E79"/>
-                </a:solidFill>
-                <a:latin typeface="Arial"/>
-              </a:rPr>
-              <a:t>The splitter angle: three options</a:t>
-            </a:r>
-          </a:p>
-          <a:p>
-            <a:pPr>
-              <a:spcAft>
-                <a:spcPts val="0"/>
-              </a:spcAft>
-            </a:pPr>
-            <a:r>
-              <a:rPr sz="1250" b="0">
-                <a:solidFill>
-                  <a:srgbClr val="6E6E6E"/>
-                </a:solidFill>
-                <a:latin typeface="Arial"/>
-              </a:rPr>
-              <a:t>The record's 7° cannot be built; 22.5° clears every part and is the choice; 30° adds margin at the price of a wider bench and more plate polarization</a:t>
-            </a:r>
-          </a:p>
-        </p:txBody>
-      </p:sp>
-      <p:sp>
-        <p:nvSpPr>
-          <p:cNvPr id="3" name="Rectangle 2"/>
-          <p:cNvSpPr/>
-          <p:nvPr/>
-        </p:nvSpPr>
-        <p:spPr>
-          <a:xfrm>
-            <a:off x="411480" y="1133856"/>
-            <a:ext cx="11368735" cy="20320"/>
-          </a:xfrm>
-          <a:prstGeom prst="rect">
-            <a:avLst/>
-          </a:prstGeom>
-          <a:solidFill>
-            <a:srgbClr val="B8C6D4"/>
-          </a:solidFill>
-          <a:ln>
-            <a:noFill/>
-          </a:ln>
-          <a:effectLst/>
-        </p:spPr>
-        <p:style>
-          <a:lnRef idx="1">
-            <a:schemeClr val="accent1"/>
-          </a:lnRef>
-          <a:fillRef idx="3">
-            <a:schemeClr val="accent1"/>
-          </a:fillRef>
-          <a:effectRef idx="2">
-            <a:schemeClr val="accent1"/>
-          </a:effectRef>
-          <a:fontRef idx="minor">
-            <a:schemeClr val="lt1"/>
-          </a:fontRef>
-        </p:style>
-        <p:txBody>
-          <a:bodyPr rtlCol="0" anchor="ctr"/>
-          <a:lstStyle/>
-          <a:p>
-            <a:pPr algn="ctr"/>
-          </a:p>
-        </p:txBody>
-      </p:sp>
-      <p:pic>
-        <p:nvPicPr>
-          <p:cNvPr id="4" name="Picture 3" descr="bench_three_nodes.png"/>
-          <p:cNvPicPr>
-            <a:picLocks noChangeAspect="1"/>
-          </p:cNvPicPr>
-          <p:nvPr/>
-        </p:nvPicPr>
-        <p:blipFill>
-          <a:blip r:embed="rId2"/>
-          <a:stretch>
-            <a:fillRect/>
-          </a:stretch>
-        </p:blipFill>
-        <p:spPr>
-          <a:xfrm>
-            <a:off x="2242989" y="1298448"/>
-            <a:ext cx="7705716" cy="1434592"/>
-          </a:xfrm>
-          <a:prstGeom prst="rect">
-            <a:avLst/>
-          </a:prstGeom>
-        </p:spPr>
-      </p:pic>
-      <p:sp>
-        <p:nvSpPr>
-          <p:cNvPr id="5" name="TextBox 4"/>
-          <p:cNvSpPr txBox="1"/>
-          <p:nvPr/>
-        </p:nvSpPr>
-        <p:spPr>
-          <a:xfrm>
-            <a:off x="411480" y="2751328"/>
-            <a:ext cx="11368735" cy="394208"/>
-          </a:xfrm>
-          <a:prstGeom prst="rect">
-            <a:avLst/>
-          </a:prstGeom>
-          <a:noFill/>
-        </p:spPr>
-        <p:txBody>
-          <a:bodyPr wrap="square">
-            <a:spAutoFit/>
-          </a:bodyPr>
-          <a:lstStyle/>
-          <a:p>
-            <a:pPr algn="ctr">
-              <a:spcAft>
-                <a:spcPts val="0"/>
-              </a:spcAft>
-            </a:pPr>
-            <a:r>
-              <a:rPr sz="1000" b="0">
-                <a:solidFill>
-                  <a:srgbClr val="6E6E6E"/>
-                </a:solidFill>
-                <a:latin typeface="Arial"/>
-              </a:rPr>
-              <a:t>The node at 7° (left, the record: eight parts in another beam), 22.5° (middle, the choice: every part clears, the compensator by 16 mm) and 30° (right: the compensator by 57 mm); the output plate and analyzer moved to 160 mm behind the splitter in the last two.  The three panels are the tool's own node drawings, placed side by side.</a:t>
-            </a:r>
-          </a:p>
-        </p:txBody>
-      </p:sp>
-      <p:graphicFrame>
-        <p:nvGraphicFramePr>
-          <p:cNvPr id="6" name="Table 5"/>
-          <p:cNvGraphicFramePr>
-            <a:graphicFrameLocks noGrp="1"/>
-          </p:cNvGraphicFramePr>
-          <p:nvPr/>
-        </p:nvGraphicFramePr>
-        <p:xfrm>
-          <a:off x="411480" y="3182112"/>
-          <a:ext cx="11368734" cy="3183255"/>
-        </p:xfrm>
-        <a:graphic>
-          <a:graphicData uri="http://schemas.openxmlformats.org/drawingml/2006/table">
-            <a:tbl>
-              <a:tblPr firstRow="1" bandRow="1">
-                <a:tableStyleId>{5C22544A-7EE6-4342-B048-85BDC9FD1C3A}</a:tableStyleId>
-              </a:tblPr>
-              <a:tblGrid>
-                <a:gridCol w="3410620"/>
-                <a:gridCol w="2273747"/>
-                <a:gridCol w="3284301"/>
-                <a:gridCol w="2400066"/>
-              </a:tblGrid>
-              <a:tr h="280035">
-                <a:tc>
-                  <a:txBody>
-                    <a:bodyPr wrap="square"/>
-                    <a:lstStyle/>
-                    <a:p>
-                      <a:r>
-                        <a:rPr sz="1100" b="1">
-                          <a:solidFill>
-                            <a:srgbClr val="FFFFFF"/>
-                          </a:solidFill>
-                          <a:latin typeface="Arial"/>
-                        </a:rPr>
-                        <a:t>impact</a:t>
-                      </a:r>
-                    </a:p>
-                  </a:txBody>
-                  <a:tcPr marL="54864" marR="54864" marT="18288" marB="18288">
-                    <a:solidFill>
-                      <a:srgbClr val="1F4E79"/>
-                    </a:solidFill>
-                  </a:tcPr>
-                </a:tc>
-                <a:tc>
-                  <a:txBody>
-                    <a:bodyPr wrap="square"/>
-                    <a:lstStyle/>
-                    <a:p>
-                      <a:r>
-                        <a:rPr sz="1100" b="1">
-                          <a:solidFill>
-                            <a:srgbClr val="FFFFFF"/>
-                          </a:solidFill>
-                          <a:latin typeface="Arial"/>
-                        </a:rPr>
-                        <a:t>7° (record)</a:t>
-                      </a:r>
-                    </a:p>
-                  </a:txBody>
-                  <a:tcPr marL="54864" marR="54864" marT="18288" marB="18288">
-                    <a:solidFill>
-                      <a:srgbClr val="1F4E79"/>
-                    </a:solidFill>
-                  </a:tcPr>
-                </a:tc>
-                <a:tc>
-                  <a:txBody>
-                    <a:bodyPr wrap="square"/>
-                    <a:lstStyle/>
-                    <a:p>
-                      <a:r>
-                        <a:rPr sz="1100" b="1">
-                          <a:solidFill>
-                            <a:srgbClr val="FFFFFF"/>
-                          </a:solidFill>
-                          <a:latin typeface="Arial"/>
-                        </a:rPr>
-                        <a:t>22.5° (choice)</a:t>
-                      </a:r>
-                    </a:p>
-                  </a:txBody>
-                  <a:tcPr marL="54864" marR="54864" marT="18288" marB="18288">
-                    <a:solidFill>
-                      <a:srgbClr val="1F4E79"/>
-                    </a:solidFill>
-                  </a:tcPr>
-                </a:tc>
-                <a:tc>
-                  <a:txBody>
-                    <a:bodyPr wrap="square"/>
-                    <a:lstStyle/>
-                    <a:p>
-                      <a:r>
-                        <a:rPr sz="1100" b="1">
-                          <a:solidFill>
-                            <a:srgbClr val="FFFFFF"/>
-                          </a:solidFill>
-                          <a:latin typeface="Arial"/>
-                        </a:rPr>
-                        <a:t>30°</a:t>
-                      </a:r>
-                    </a:p>
-                  </a:txBody>
-                  <a:tcPr marL="54864" marR="54864" marT="18288" marB="18288">
-                    <a:solidFill>
-                      <a:srgbClr val="1F4E79"/>
-                    </a:solidFill>
-                  </a:tcPr>
-                </a:tc>
-              </a:tr>
-              <a:tr h="468630">
-                <a:tc>
-                  <a:txBody>
-                    <a:bodyPr wrap="square"/>
-                    <a:lstStyle/>
-                    <a:p>
-                      <a:r>
-                        <a:rPr sz="1100" b="0">
-                          <a:solidFill>
-                            <a:srgbClr val="282828"/>
-                          </a:solidFill>
-                          <a:latin typeface="Arial"/>
-                        </a:rPr>
-                        <a:t>node clearance, worst part</a:t>
-                      </a:r>
-                    </a:p>
-                  </a:txBody>
-                  <a:tcPr marL="54864" marR="54864" marT="18288" marB="18288">
-                    <a:solidFill>
-                      <a:srgbClr val="FFFFFF"/>
-                    </a:solidFill>
-                  </a:tcPr>
-                </a:tc>
-                <a:tc>
-                  <a:txBody>
-                    <a:bodyPr wrap="square"/>
-                    <a:lstStyle/>
-                    <a:p>
-                      <a:r>
-                        <a:rPr sz="1100" b="0">
-                          <a:solidFill>
-                            <a:srgbClr val="282828"/>
-                          </a:solidFill>
-                          <a:latin typeface="Arial"/>
-                        </a:rPr>
-                        <a:t>−109 mm: not buildable</a:t>
-                      </a:r>
-                    </a:p>
-                  </a:txBody>
-                  <a:tcPr marL="54864" marR="54864" marT="18288" marB="18288">
-                    <a:solidFill>
-                      <a:srgbClr val="FFFFFF"/>
-                    </a:solidFill>
-                  </a:tcPr>
-                </a:tc>
-                <a:tc>
-                  <a:txBody>
-                    <a:bodyPr wrap="square"/>
-                    <a:lstStyle/>
-                    <a:p>
-                      <a:r>
-                        <a:rPr sz="1100" b="0">
-                          <a:solidFill>
-                            <a:srgbClr val="282828"/>
-                          </a:solidFill>
-                          <a:latin typeface="Arial"/>
-                        </a:rPr>
-                        <a:t>compensator +16 mm; output optics +55 / +65; L2 +100</a:t>
-                      </a:r>
-                    </a:p>
-                  </a:txBody>
-                  <a:tcPr marL="54864" marR="54864" marT="18288" marB="18288">
-                    <a:solidFill>
-                      <a:srgbClr val="FFFFFF"/>
-                    </a:solidFill>
-                  </a:tcPr>
-                </a:tc>
-                <a:tc>
-                  <a:txBody>
-                    <a:bodyPr wrap="square"/>
-                    <a:lstStyle/>
-                    <a:p>
-                      <a:r>
-                        <a:rPr sz="1100" b="0">
-                          <a:solidFill>
-                            <a:srgbClr val="282828"/>
-                          </a:solidFill>
-                          <a:latin typeface="Arial"/>
-                        </a:rPr>
-                        <a:t>compensator +57; the rest +178 or more</a:t>
-                      </a:r>
-                    </a:p>
-                  </a:txBody>
-                  <a:tcPr marL="54864" marR="54864" marT="18288" marB="18288">
-                    <a:solidFill>
-                      <a:srgbClr val="FFFFFF"/>
-                    </a:solidFill>
-                  </a:tcPr>
-                </a:tc>
-              </a:tr>
-              <a:tr h="468630">
-                <a:tc>
-                  <a:txBody>
-                    <a:bodyPr wrap="square"/>
-                    <a:lstStyle/>
-                    <a:p>
-                      <a:r>
-                        <a:rPr sz="1100" b="0">
-                          <a:solidFill>
-                            <a:srgbClr val="282828"/>
-                          </a:solidFill>
-                          <a:latin typeface="Arial"/>
-                        </a:rPr>
-                        <a:t>bench shape</a:t>
-                      </a:r>
-                    </a:p>
-                  </a:txBody>
-                  <a:tcPr marL="54864" marR="54864" marT="18288" marB="18288">
-                    <a:solidFill>
-                      <a:srgbClr val="ECF1F6"/>
-                    </a:solidFill>
-                  </a:tcPr>
-                </a:tc>
-                <a:tc>
-                  <a:txBody>
-                    <a:bodyPr wrap="square"/>
-                    <a:lstStyle/>
-                    <a:p>
-                      <a:r>
-                        <a:rPr sz="1100" b="0">
-                          <a:solidFill>
-                            <a:srgbClr val="282828"/>
-                          </a:solidFill>
-                          <a:latin typeface="Arial"/>
-                        </a:rPr>
-                        <a:t>all four legs within 14° of one line</a:t>
-                      </a:r>
-                    </a:p>
-                  </a:txBody>
-                  <a:tcPr marL="54864" marR="54864" marT="18288" marB="18288">
-                    <a:solidFill>
-                      <a:srgbClr val="ECF1F6"/>
-                    </a:solidFill>
-                  </a:tcPr>
-                </a:tc>
-                <a:tc>
-                  <a:txBody>
-                    <a:bodyPr wrap="square"/>
-                    <a:lstStyle/>
-                    <a:p>
-                      <a:r>
-                        <a:rPr sz="1100" b="0">
-                          <a:solidFill>
-                            <a:srgbClr val="282828"/>
-                          </a:solidFill>
-                          <a:latin typeface="Arial"/>
-                        </a:rPr>
-                        <a:t>mirror leg at 45° to the source leg</a:t>
-                      </a:r>
-                    </a:p>
-                  </a:txBody>
-                  <a:tcPr marL="54864" marR="54864" marT="18288" marB="18288">
-                    <a:solidFill>
-                      <a:srgbClr val="ECF1F6"/>
-                    </a:solidFill>
-                  </a:tcPr>
-                </a:tc>
-                <a:tc>
-                  <a:txBody>
-                    <a:bodyPr wrap="square"/>
-                    <a:lstStyle/>
-                    <a:p>
-                      <a:r>
-                        <a:rPr sz="1100" b="0">
-                          <a:solidFill>
-                            <a:srgbClr val="282828"/>
-                          </a:solidFill>
-                          <a:latin typeface="Arial"/>
-                        </a:rPr>
-                        <a:t>mirror leg at 60°</a:t>
-                      </a:r>
-                    </a:p>
-                  </a:txBody>
-                  <a:tcPr marL="54864" marR="54864" marT="18288" marB="18288">
-                    <a:solidFill>
-                      <a:srgbClr val="ECF1F6"/>
-                    </a:solidFill>
-                  </a:tcPr>
-                </a:tc>
-              </a:tr>
-              <a:tr h="468630">
-                <a:tc>
-                  <a:txBody>
-                    <a:bodyPr wrap="square"/>
-                    <a:lstStyle/>
-                    <a:p>
-                      <a:r>
-                        <a:rPr sz="1100" b="0">
-                          <a:solidFill>
-                            <a:srgbClr val="282828"/>
-                          </a:solidFill>
-                          <a:latin typeface="Arial"/>
-                        </a:rPr>
-                        <a:t>plate's polarization (mean diattenuation, uniform)</a:t>
-                      </a:r>
-                    </a:p>
-                  </a:txBody>
-                  <a:tcPr marL="54864" marR="54864" marT="18288" marB="18288">
-                    <a:solidFill>
-                      <a:srgbClr val="FFFFFF"/>
-                    </a:solidFill>
-                  </a:tcPr>
-                </a:tc>
-                <a:tc>
-                  <a:txBody>
-                    <a:bodyPr wrap="square"/>
-                    <a:lstStyle/>
-                    <a:p>
-                      <a:r>
-                        <a:rPr sz="1100" b="0">
-                          <a:solidFill>
-                            <a:srgbClr val="282828"/>
-                          </a:solidFill>
-                          <a:latin typeface="Arial"/>
-                        </a:rPr>
-                        <a:t>0.5%</a:t>
-                      </a:r>
-                    </a:p>
-                  </a:txBody>
-                  <a:tcPr marL="54864" marR="54864" marT="18288" marB="18288">
-                    <a:solidFill>
-                      <a:srgbClr val="FFFFFF"/>
-                    </a:solidFill>
-                  </a:tcPr>
-                </a:tc>
-                <a:tc>
-                  <a:txBody>
-                    <a:bodyPr wrap="square"/>
-                    <a:lstStyle/>
-                    <a:p>
-                      <a:r>
-                        <a:rPr sz="1100" b="0">
-                          <a:solidFill>
-                            <a:srgbClr val="282828"/>
-                          </a:solidFill>
-                          <a:latin typeface="Arial"/>
-                        </a:rPr>
-                        <a:t>5.5%</a:t>
-                      </a:r>
-                    </a:p>
-                  </a:txBody>
-                  <a:tcPr marL="54864" marR="54864" marT="18288" marB="18288">
-                    <a:solidFill>
-                      <a:srgbClr val="FFFFFF"/>
-                    </a:solidFill>
-                  </a:tcPr>
-                </a:tc>
-                <a:tc>
-                  <a:txBody>
-                    <a:bodyPr wrap="square"/>
-                    <a:lstStyle/>
-                    <a:p>
-                      <a:r>
-                        <a:rPr sz="1100" b="0">
-                          <a:solidFill>
-                            <a:srgbClr val="282828"/>
-                          </a:solidFill>
-                          <a:latin typeface="Arial"/>
-                        </a:rPr>
-                        <a:t>10%</a:t>
-                      </a:r>
-                    </a:p>
-                  </a:txBody>
-                  <a:tcPr marL="54864" marR="54864" marT="18288" marB="18288">
-                    <a:solidFill>
-                      <a:srgbClr val="FFFFFF"/>
-                    </a:solidFill>
-                  </a:tcPr>
-                </a:tc>
-              </a:tr>
-              <a:tr h="468630">
-                <a:tc>
-                  <a:txBody>
-                    <a:bodyPr wrap="square"/>
-                    <a:lstStyle/>
-                    <a:p>
-                      <a:r>
-                        <a:rPr sz="1100" b="0">
-                          <a:solidFill>
-                            <a:srgbClr val="282828"/>
-                          </a:solidFill>
-                          <a:latin typeface="Arial"/>
-                        </a:rPr>
-                        <a:t>pupil-varying part (the lenses; what the sensors feel)</a:t>
-                      </a:r>
-                    </a:p>
-                  </a:txBody>
-                  <a:tcPr marL="54864" marR="54864" marT="18288" marB="18288">
-                    <a:solidFill>
-                      <a:srgbClr val="ECF1F6"/>
-                    </a:solidFill>
-                  </a:tcPr>
-                </a:tc>
-                <a:tc>
-                  <a:txBody>
-                    <a:bodyPr wrap="square"/>
-                    <a:lstStyle/>
-                    <a:p>
-                      <a:r>
-                        <a:rPr sz="1100" b="0">
-                          <a:solidFill>
-                            <a:srgbClr val="282828"/>
-                          </a:solidFill>
-                          <a:latin typeface="Arial"/>
-                        </a:rPr>
-                        <a:t>1.1e-3 rms</a:t>
-                      </a:r>
-                    </a:p>
-                  </a:txBody>
-                  <a:tcPr marL="54864" marR="54864" marT="18288" marB="18288">
-                    <a:solidFill>
-                      <a:srgbClr val="ECF1F6"/>
-                    </a:solidFill>
-                  </a:tcPr>
-                </a:tc>
-                <a:tc>
-                  <a:txBody>
-                    <a:bodyPr wrap="square"/>
-                    <a:lstStyle/>
-                    <a:p>
-                      <a:r>
-                        <a:rPr sz="1100" b="0">
-                          <a:solidFill>
-                            <a:srgbClr val="282828"/>
-                          </a:solidFill>
-                          <a:latin typeface="Arial"/>
-                        </a:rPr>
-                        <a:t>1.1e-3 rms</a:t>
-                      </a:r>
-                    </a:p>
-                  </a:txBody>
-                  <a:tcPr marL="54864" marR="54864" marT="18288" marB="18288">
-                    <a:solidFill>
-                      <a:srgbClr val="ECF1F6"/>
-                    </a:solidFill>
-                  </a:tcPr>
-                </a:tc>
-                <a:tc>
-                  <a:txBody>
-                    <a:bodyPr wrap="square"/>
-                    <a:lstStyle/>
-                    <a:p>
-                      <a:r>
-                        <a:rPr sz="1100" b="0">
-                          <a:solidFill>
-                            <a:srgbClr val="282828"/>
-                          </a:solidFill>
-                          <a:latin typeface="Arial"/>
-                        </a:rPr>
-                        <a:t>1.1e-3 rms</a:t>
-                      </a:r>
-                    </a:p>
-                  </a:txBody>
-                  <a:tcPr marL="54864" marR="54864" marT="18288" marB="18288">
-                    <a:solidFill>
-                      <a:srgbClr val="ECF1F6"/>
-                    </a:solidFill>
-                  </a:tcPr>
-                </a:tc>
-              </a:tr>
-              <a:tr h="468630">
-                <a:tc>
-                  <a:txBody>
-                    <a:bodyPr wrap="square"/>
-                    <a:lstStyle/>
-                    <a:p>
-                      <a:r>
-                        <a:rPr sz="1100" b="0">
-                          <a:solidFill>
-                            <a:srgbClr val="282828"/>
-                          </a:solidFill>
-                          <a:latin typeface="Arial"/>
-                        </a:rPr>
-                        <a:t>vector sensor, channel phase difference / 100 nm pokes</a:t>
-                      </a:r>
-                    </a:p>
-                  </a:txBody>
-                  <a:tcPr marL="54864" marR="54864" marT="18288" marB="18288">
-                    <a:solidFill>
-                      <a:srgbClr val="FFFFFF"/>
-                    </a:solidFill>
-                  </a:tcPr>
-                </a:tc>
-                <a:tc>
-                  <a:txBody>
-                    <a:bodyPr wrap="square"/>
-                    <a:lstStyle/>
-                    <a:p>
-                      <a:r>
-                        <a:rPr sz="1100" b="0">
-                          <a:solidFill>
-                            <a:srgbClr val="282828"/>
-                          </a:solidFill>
-                          <a:latin typeface="Arial"/>
-                        </a:rPr>
-                        <a:t>1.63 mrad / 9.0 pm</a:t>
-                      </a:r>
-                    </a:p>
-                  </a:txBody>
-                  <a:tcPr marL="54864" marR="54864" marT="18288" marB="18288">
-                    <a:solidFill>
-                      <a:srgbClr val="FFFFFF"/>
-                    </a:solidFill>
-                  </a:tcPr>
-                </a:tc>
-                <a:tc>
-                  <a:txBody>
-                    <a:bodyPr wrap="square"/>
-                    <a:lstStyle/>
-                    <a:p>
-                      <a:r>
-                        <a:rPr sz="1100" b="0">
-                          <a:solidFill>
-                            <a:srgbClr val="282828"/>
-                          </a:solidFill>
-                          <a:latin typeface="Arial"/>
-                        </a:rPr>
-                        <a:t>1.66 mrad / 8.8 pm</a:t>
-                      </a:r>
-                    </a:p>
-                  </a:txBody>
-                  <a:tcPr marL="54864" marR="54864" marT="18288" marB="18288">
-                    <a:solidFill>
-                      <a:srgbClr val="FFFFFF"/>
-                    </a:solidFill>
-                  </a:tcPr>
-                </a:tc>
-                <a:tc>
-                  <a:txBody>
-                    <a:bodyPr wrap="square"/>
-                    <a:lstStyle/>
-                    <a:p>
-                      <a:r>
-                        <a:rPr sz="1100" b="0">
-                          <a:solidFill>
-                            <a:srgbClr val="282828"/>
-                          </a:solidFill>
-                          <a:latin typeface="Arial"/>
-                        </a:rPr>
-                        <a:t>1.69 mrad / 9.1 pm</a:t>
-                      </a:r>
-                    </a:p>
-                  </a:txBody>
-                  <a:tcPr marL="54864" marR="54864" marT="18288" marB="18288">
-                    <a:solidFill>
-                      <a:srgbClr val="FFFFFF"/>
-                    </a:solidFill>
-                  </a:tcPr>
-                </a:tc>
-              </a:tr>
-              <a:tr h="280035">
-                <a:tc>
-                  <a:txBody>
-                    <a:bodyPr wrap="square"/>
-                    <a:lstStyle/>
-                    <a:p>
-                      <a:r>
-                        <a:rPr sz="1100" b="0">
-                          <a:solidFill>
-                            <a:srgbClr val="282828"/>
-                          </a:solidFill>
-                          <a:latin typeface="Arial"/>
-                        </a:rPr>
-                        <a:t>transmitted beam shift in the 2.6 mm plate</a:t>
-                      </a:r>
-                    </a:p>
-                  </a:txBody>
-                  <a:tcPr marL="54864" marR="54864" marT="18288" marB="18288">
-                    <a:solidFill>
-                      <a:srgbClr val="ECF1F6"/>
-                    </a:solidFill>
-                  </a:tcPr>
-                </a:tc>
-                <a:tc>
-                  <a:txBody>
-                    <a:bodyPr wrap="square"/>
-                    <a:lstStyle/>
-                    <a:p>
-                      <a:r>
-                        <a:rPr sz="1100" b="0">
-                          <a:solidFill>
-                            <a:srgbClr val="282828"/>
-                          </a:solidFill>
-                          <a:latin typeface="Arial"/>
-                        </a:rPr>
-                        <a:t>0.1 mm</a:t>
-                      </a:r>
-                    </a:p>
-                  </a:txBody>
-                  <a:tcPr marL="54864" marR="54864" marT="18288" marB="18288">
-                    <a:solidFill>
-                      <a:srgbClr val="ECF1F6"/>
-                    </a:solidFill>
-                  </a:tcPr>
-                </a:tc>
-                <a:tc>
-                  <a:txBody>
-                    <a:bodyPr wrap="square"/>
-                    <a:lstStyle/>
-                    <a:p>
-                      <a:r>
-                        <a:rPr sz="1100" b="0">
-                          <a:solidFill>
-                            <a:srgbClr val="282828"/>
-                          </a:solidFill>
-                          <a:latin typeface="Arial"/>
-                        </a:rPr>
-                        <a:t>0.36 mm (1.4 at 10 mm)</a:t>
-                      </a:r>
-                    </a:p>
-                  </a:txBody>
-                  <a:tcPr marL="54864" marR="54864" marT="18288" marB="18288">
-                    <a:solidFill>
-                      <a:srgbClr val="ECF1F6"/>
-                    </a:solidFill>
-                  </a:tcPr>
-                </a:tc>
-                <a:tc>
-                  <a:txBody>
-                    <a:bodyPr wrap="square"/>
-                    <a:lstStyle/>
-                    <a:p>
-                      <a:r>
-                        <a:rPr sz="1100" b="0">
-                          <a:solidFill>
-                            <a:srgbClr val="282828"/>
-                          </a:solidFill>
-                          <a:latin typeface="Arial"/>
-                        </a:rPr>
-                        <a:t>0.50 mm</a:t>
-                      </a:r>
-                    </a:p>
-                  </a:txBody>
-                  <a:tcPr marL="54864" marR="54864" marT="18288" marB="18288">
-                    <a:solidFill>
-                      <a:srgbClr val="ECF1F6"/>
-                    </a:solidFill>
-                  </a:tcPr>
-                </a:tc>
-              </a:tr>
-              <a:tr h="280035">
-                <a:tc>
-                  <a:txBody>
-                    <a:bodyPr wrap="square"/>
-                    <a:lstStyle/>
-                    <a:p>
-                      <a:r>
-                        <a:rPr sz="1100" b="0">
-                          <a:solidFill>
-                            <a:srgbClr val="282828"/>
-                          </a:solidFill>
-                          <a:latin typeface="Arial"/>
-                        </a:rPr>
-                        <a:t>interferometer snapshot form</a:t>
-                      </a:r>
-                    </a:p>
-                  </a:txBody>
-                  <a:tcPr marL="54864" marR="54864" marT="18288" marB="18288">
-                    <a:solidFill>
-                      <a:srgbClr val="FFFFFF"/>
-                    </a:solidFill>
-                  </a:tcPr>
-                </a:tc>
-                <a:tc>
-                  <a:txBody>
-                    <a:bodyPr wrap="square"/>
-                    <a:lstStyle/>
-                    <a:p>
-                      <a:r>
-                        <a:rPr sz="1100" b="0">
-                          <a:solidFill>
-                            <a:srgbClr val="282828"/>
-                          </a:solidFill>
-                          <a:latin typeface="Arial"/>
-                        </a:rPr>
-                        <a:t>the small-angle case</a:t>
-                      </a:r>
-                    </a:p>
-                  </a:txBody>
-                  <a:tcPr marL="54864" marR="54864" marT="18288" marB="18288">
-                    <a:solidFill>
-                      <a:srgbClr val="FFFFFF"/>
-                    </a:solidFill>
-                  </a:tcPr>
-                </a:tc>
-                <a:tc>
-                  <a:txBody>
-                    <a:bodyPr wrap="square"/>
-                    <a:lstStyle/>
-                    <a:p>
-                      <a:r>
-                        <a:rPr sz="1100" b="0">
-                          <a:solidFill>
-                            <a:srgbClr val="282828"/>
-                          </a:solidFill>
-                          <a:latin typeface="Arial"/>
-                        </a:rPr>
-                        <a:t>its plate systematics re-run at this angle</a:t>
-                      </a:r>
-                    </a:p>
-                  </a:txBody>
-                  <a:tcPr marL="54864" marR="54864" marT="18288" marB="18288">
-                    <a:solidFill>
-                      <a:srgbClr val="FFFFFF"/>
-                    </a:solidFill>
-                  </a:tcPr>
-                </a:tc>
-                <a:tc>
-                  <a:txBody>
-                    <a:bodyPr wrap="square"/>
-                    <a:lstStyle/>
-                    <a:p>
-                      <a:r>
-                        <a:rPr sz="1100" b="0">
-                          <a:solidFill>
-                            <a:srgbClr val="282828"/>
-                          </a:solidFill>
-                          <a:latin typeface="Arial"/>
-                        </a:rPr>
-                        <a:t>larger</a:t>
-                      </a:r>
-                    </a:p>
-                  </a:txBody>
-                  <a:tcPr marL="54864" marR="54864" marT="18288" marB="18288">
-                    <a:solidFill>
-                      <a:srgbClr val="FFFFFF"/>
-                    </a:solidFill>
-                  </a:tcPr>
-                </a:tc>
-              </a:tr>
-            </a:tbl>
-          </a:graphicData>
-        </a:graphic>
-      </p:graphicFrame>
-      <p:sp>
-        <p:nvSpPr>
-          <p:cNvPr id="7" name="TextBox 6"/>
-          <p:cNvSpPr txBox="1"/>
-          <p:nvPr/>
-        </p:nvSpPr>
-        <p:spPr>
-          <a:xfrm>
-            <a:off x="411480" y="6511671"/>
-            <a:ext cx="11368735" cy="274320"/>
-          </a:xfrm>
-          <a:prstGeom prst="rect">
-            <a:avLst/>
-          </a:prstGeom>
-          <a:noFill/>
-        </p:spPr>
-        <p:txBody>
-          <a:bodyPr wrap="square">
-            <a:spAutoFit/>
-          </a:bodyPr>
-          <a:lstStyle/>
-          <a:p>
-            <a:pPr>
-              <a:spcAft>
-                <a:spcPts val="600"/>
-              </a:spcAft>
-            </a:pPr>
-            <a:r>
-              <a:rPr sz="1050" b="0">
-                <a:solidFill>
-                  <a:srgbClr val="6E6E6E"/>
-                </a:solidFill>
-                <a:latin typeface="Arial"/>
-              </a:rPr>
-              <a:t>The sensors reproduce their rows at every angle; the interferometer's snapshot form is the one thing the angle changes, through the plate's polarization, and the cube form is built for 45°.  Run tags bs22_dev, bs30_dev; the panels at 7° and 30° are on the backup clearance slide.</a:t>
-            </a:r>
-          </a:p>
-        </p:txBody>
-      </p:sp>
-    </p:spTree>
-  </p:cSld>
-  <p:clrMapOvr>
-    <a:masterClrMapping/>
-  </p:clrMapOvr>
-</p:sld>
-</file>
-
-<file path=ppt/slides/slide50.xml><?xml version="1.0" encoding="utf-8"?>
+<file path=ppt/slides/slide51.xml><?xml version="1.0" encoding="utf-8"?>
 <p:sld xmlns:a="http://schemas.openxmlformats.org/drawingml/2006/main" xmlns:p="http://schemas.openxmlformats.org/presentationml/2006/main" xmlns:r="http://schemas.openxmlformats.org/officeDocument/2006/relationships">
   <p:cSld>
     <p:spTree>
@@ -30650,7 +31117,7 @@
 </p:sld>
 </file>
 
-<file path=ppt/slides/slide51.xml><?xml version="1.0" encoding="utf-8"?>
+<file path=ppt/slides/slide52.xml><?xml version="1.0" encoding="utf-8"?>
 <p:sld xmlns:a="http://schemas.openxmlformats.org/drawingml/2006/main" xmlns:p="http://schemas.openxmlformats.org/presentationml/2006/main" xmlns:r="http://schemas.openxmlformats.org/officeDocument/2006/relationships">
   <p:cSld>
     <p:spTree>
@@ -31644,7 +32111,7 @@
 </p:sld>
 </file>
 
-<file path=ppt/slides/slide52.xml><?xml version="1.0" encoding="utf-8"?>
+<file path=ppt/slides/slide53.xml><?xml version="1.0" encoding="utf-8"?>
 <p:sld xmlns:a="http://schemas.openxmlformats.org/drawingml/2006/main" xmlns:p="http://schemas.openxmlformats.org/presentationml/2006/main" xmlns:r="http://schemas.openxmlformats.org/officeDocument/2006/relationships">
   <p:cSld>
     <p:spTree>
@@ -31963,7 +32430,7 @@
                 </a:solidFill>
                 <a:latin typeface="Arial"/>
               </a:rPr>
-              <a:t>The front end and the detector leg, from the parameter sheet; thicknesses are the scaled model's and are being made real</a:t>
+              <a:t>The front end and the detector leg, from the parameter sheet; the substrates are now decided (10 mm splitter and compensator, 2 mm fused-silica plates under every polarizing element, a 2 mm mask plate, 4 mm lens edges) and go into every deck from here</a:t>
             </a:r>
           </a:p>
         </p:txBody>
@@ -32022,7 +32489,7 @@
         </p:nvGraphicFramePr>
         <p:xfrm>
           <a:off x="411480" y="1298448"/>
-          <a:ext cx="11368734" cy="8549640"/>
+          <a:ext cx="11368734" cy="7229475"/>
         </p:xfrm>
         <a:graphic>
           <a:graphicData uri="http://schemas.openxmlformats.org/drawingml/2006/table">
@@ -32032,10 +32499,10 @@
               </a:tblPr>
               <a:tblGrid>
                 <a:gridCol w="1962404"/>
-                <a:gridCol w="5700809"/>
+                <a:gridCol w="5148308"/>
                 <a:gridCol w="2180336"/>
                 <a:gridCol w="509524"/>
-                <a:gridCol w="1015661"/>
+                <a:gridCol w="1568162"/>
               </a:tblGrid>
               <a:tr h="280035">
                 <a:tc>
@@ -32149,7 +32616,7 @@
                   </a:tcPr>
                 </a:tc>
               </a:tr>
-              <a:tr h="845820">
+              <a:tr h="657225">
                 <a:tc>
                   <a:txBody>
                     <a:bodyPr wrap="square"/>
@@ -32485,7 +32952,7 @@
                   </a:tcPr>
                 </a:tc>
               </a:tr>
-              <a:tr h="845820">
+              <a:tr h="657225">
                 <a:tc>
                   <a:txBody>
                     <a:bodyPr wrap="square"/>
@@ -32597,7 +33064,7 @@
                   </a:tcPr>
                 </a:tc>
               </a:tr>
-              <a:tr h="845820">
+              <a:tr h="657225">
                 <a:tc>
                   <a:txBody>
                     <a:bodyPr wrap="square"/>
@@ -32709,7 +33176,7 @@
                   </a:tcPr>
                 </a:tc>
               </a:tr>
-              <a:tr h="845820">
+              <a:tr h="657225">
                 <a:tc>
                   <a:txBody>
                     <a:bodyPr wrap="square"/>
@@ -32817,6 +33284,118 @@
                   <a:tcPr marL="54864" marR="54864" marT="18288" marB="18288">
                     <a:solidFill>
                       <a:srgbClr val="ECF1F6"/>
+                    </a:solidFill>
+                  </a:tcPr>
+                </a:tc>
+              </a:tr>
+              <a:tr h="657225">
+                <a:tc>
+                  <a:txBody>
+                    <a:bodyPr wrap="square"/>
+                    <a:lstStyle/>
+                    <a:p>
+                      <a:r>
+                        <a:rPr sz="1100" b="0">
+                          <a:solidFill>
+                            <a:srgbClr val="282828"/>
+                          </a:solidFill>
+                          <a:latin typeface="Arial"/>
+                        </a:rPr>
+                        <a:t>mask seat</a:t>
+                      </a:r>
+                    </a:p>
+                  </a:txBody>
+                  <a:tcPr marL="54864" marR="54864" marT="18288" marB="18288">
+                    <a:solidFill>
+                      <a:srgbClr val="FFFFFF"/>
+                    </a:solidFill>
+                  </a:tcPr>
+                </a:tc>
+                <a:tc>
+                  <a:txBody>
+                    <a:bodyPr wrap="square"/>
+                    <a:lstStyle/>
+                    <a:p>
+                      <a:r>
+                        <a:rPr sz="1100" b="0">
+                          <a:solidFill>
+                            <a:srgbClr val="282828"/>
+                          </a:solidFill>
+                          <a:latin typeface="Arial"/>
+                        </a:rPr>
+                        <a:t>translation stage at the internal focus</a:t>
+                      </a:r>
+                    </a:p>
+                  </a:txBody>
+                  <a:tcPr marL="54864" marR="54864" marT="18288" marB="18288">
+                    <a:solidFill>
+                      <a:srgbClr val="FFFFFF"/>
+                    </a:solidFill>
+                  </a:tcPr>
+                </a:tc>
+                <a:tc>
+                  <a:txBody>
+                    <a:bodyPr wrap="square"/>
+                    <a:lstStyle/>
+                    <a:p>
+                      <a:r>
+                        <a:rPr sz="1100" b="0">
+                          <a:solidFill>
+                            <a:srgbClr val="282828"/>
+                          </a:solidFill>
+                          <a:latin typeface="Arial"/>
+                        </a:rPr>
+                        <a:t>—</a:t>
+                      </a:r>
+                    </a:p>
+                  </a:txBody>
+                  <a:tcPr marL="54864" marR="54864" marT="18288" marB="18288">
+                    <a:solidFill>
+                      <a:srgbClr val="FFFFFF"/>
+                    </a:solidFill>
+                  </a:tcPr>
+                </a:tc>
+                <a:tc>
+                  <a:txBody>
+                    <a:bodyPr wrap="square"/>
+                    <a:lstStyle/>
+                    <a:p>
+                      <a:r>
+                        <a:rPr sz="1100" b="0">
+                          <a:solidFill>
+                            <a:srgbClr val="282828"/>
+                          </a:solidFill>
+                          <a:latin typeface="Arial"/>
+                        </a:rPr>
+                        <a:t>1</a:t>
+                      </a:r>
+                    </a:p>
+                  </a:txBody>
+                  <a:tcPr marL="54864" marR="54864" marT="18288" marB="18288">
+                    <a:solidFill>
+                      <a:srgbClr val="FFFFFF"/>
+                    </a:solidFill>
+                  </a:tcPr>
+                </a:tc>
+                <a:tc>
+                  <a:txBody>
+                    <a:bodyPr wrap="square"/>
+                    <a:lstStyle/>
+                    <a:p>
+                      <a:r>
+                        <a:rPr sz="1100" b="0">
+                          <a:solidFill>
+                            <a:srgbClr val="282828"/>
+                          </a:solidFill>
+                          <a:latin typeface="Arial"/>
+                        </a:rPr>
+                        <a:t>selects the sensor: clear window, dimple, metasurface, pinhole</a:t>
+                      </a:r>
+                    </a:p>
+                  </a:txBody>
+                  <a:tcPr marL="54864" marR="54864" marT="18288" marB="18288">
+                    <a:solidFill>
+                      <a:srgbClr val="FFFFFF"/>
                     </a:solidFill>
                   </a:tcPr>
                 </a:tc>
@@ -32834,57 +33413,57 @@
                           </a:solidFill>
                           <a:latin typeface="Arial"/>
                         </a:rPr>
-                        <a:t>mask seat</a:t>
-                      </a:r>
-                    </a:p>
-                  </a:txBody>
-                  <a:tcPr marL="54864" marR="54864" marT="18288" marB="18288">
-                    <a:solidFill>
-                      <a:srgbClr val="FFFFFF"/>
-                    </a:solidFill>
-                  </a:tcPr>
-                </a:tc>
-                <a:tc>
-                  <a:txBody>
-                    <a:bodyPr wrap="square"/>
-                    <a:lstStyle/>
-                    <a:p>
-                      <a:r>
-                        <a:rPr sz="1100" b="0">
-                          <a:solidFill>
-                            <a:srgbClr val="282828"/>
-                          </a:solidFill>
-                          <a:latin typeface="Arial"/>
-                        </a:rPr>
-                        <a:t>translation stage at the internal focus</a:t>
-                      </a:r>
-                    </a:p>
-                  </a:txBody>
-                  <a:tcPr marL="54864" marR="54864" marT="18288" marB="18288">
-                    <a:solidFill>
-                      <a:srgbClr val="FFFFFF"/>
-                    </a:solidFill>
-                  </a:tcPr>
-                </a:tc>
-                <a:tc>
-                  <a:txBody>
-                    <a:bodyPr wrap="square"/>
-                    <a:lstStyle/>
-                    <a:p>
-                      <a:r>
-                        <a:rPr sz="1100" b="0">
-                          <a:solidFill>
-                            <a:srgbClr val="282828"/>
-                          </a:solidFill>
-                          <a:latin typeface="Arial"/>
-                        </a:rPr>
-                        <a:t>—</a:t>
-                      </a:r>
-                    </a:p>
-                  </a:txBody>
-                  <a:tcPr marL="54864" marR="54864" marT="18288" marB="18288">
-                    <a:solidFill>
-                      <a:srgbClr val="FFFFFF"/>
+                        <a:t>field lens</a:t>
+                      </a:r>
+                    </a:p>
+                  </a:txBody>
+                  <a:tcPr marL="54864" marR="54864" marT="18288" marB="18288">
+                    <a:solidFill>
+                      <a:srgbClr val="ECF1F6"/>
+                    </a:solidFill>
+                  </a:tcPr>
+                </a:tc>
+                <a:tc>
+                  <a:txBody>
+                    <a:bodyPr wrap="square"/>
+                    <a:lstStyle/>
+                    <a:p>
+                      <a:r>
+                        <a:rPr sz="1100" b="0">
+                          <a:solidFill>
+                            <a:srgbClr val="282828"/>
+                          </a:solidFill>
+                          <a:latin typeface="Arial"/>
+                        </a:rPr>
+                        <a:t>f 43 mm, 21 mm, at the seed station 10.8 mm past the focus (the null-tuned station 39.8 mm back bowled the pupil image; slide 15)</a:t>
+                      </a:r>
+                    </a:p>
+                  </a:txBody>
+                  <a:tcPr marL="54864" marR="54864" marT="18288" marB="18288">
+                    <a:solidFill>
+                      <a:srgbClr val="ECF1F6"/>
+                    </a:solidFill>
+                  </a:tcPr>
+                </a:tc>
+                <a:tc>
+                  <a:txBody>
+                    <a:bodyPr wrap="square"/>
+                    <a:lstStyle/>
+                    <a:p>
+                      <a:r>
+                        <a:rPr sz="1100" b="0">
+                          <a:solidFill>
+                            <a:srgbClr val="282828"/>
+                          </a:solidFill>
+                          <a:latin typeface="Arial"/>
+                        </a:rPr>
+                        <a:t>AR</a:t>
+                      </a:r>
+                    </a:p>
+                  </a:txBody>
+                  <a:tcPr marL="54864" marR="54864" marT="18288" marB="18288">
+                    <a:solidFill>
+                      <a:srgbClr val="ECF1F6"/>
                     </a:solidFill>
                   </a:tcPr>
                 </a:tc>
@@ -32906,52 +33485,6 @@
                   </a:txBody>
                   <a:tcPr marL="54864" marR="54864" marT="18288" marB="18288">
                     <a:solidFill>
-                      <a:srgbClr val="FFFFFF"/>
-                    </a:solidFill>
-                  </a:tcPr>
-                </a:tc>
-                <a:tc>
-                  <a:txBody>
-                    <a:bodyPr wrap="square"/>
-                    <a:lstStyle/>
-                    <a:p>
-                      <a:r>
-                        <a:rPr sz="1100" b="0">
-                          <a:solidFill>
-                            <a:srgbClr val="282828"/>
-                          </a:solidFill>
-                          <a:latin typeface="Arial"/>
-                        </a:rPr>
-                        <a:t>selects the sensor: clear window, dimple, metasurface, pinhole</a:t>
-                      </a:r>
-                    </a:p>
-                  </a:txBody>
-                  <a:tcPr marL="54864" marR="54864" marT="18288" marB="18288">
-                    <a:solidFill>
-                      <a:srgbClr val="FFFFFF"/>
-                    </a:solidFill>
-                  </a:tcPr>
-                </a:tc>
-              </a:tr>
-              <a:tr h="1034415">
-                <a:tc>
-                  <a:txBody>
-                    <a:bodyPr wrap="square"/>
-                    <a:lstStyle/>
-                    <a:p>
-                      <a:r>
-                        <a:rPr sz="1100" b="0">
-                          <a:solidFill>
-                            <a:srgbClr val="282828"/>
-                          </a:solidFill>
-                          <a:latin typeface="Arial"/>
-                        </a:rPr>
-                        <a:t>field lens</a:t>
-                      </a:r>
-                    </a:p>
-                  </a:txBody>
-                  <a:tcPr marL="54864" marR="54864" marT="18288" marB="18288">
-                    <a:solidFill>
                       <a:srgbClr val="ECF1F6"/>
                     </a:solidFill>
                   </a:tcPr>
@@ -32968,73 +33501,7 @@
                           </a:solidFill>
                           <a:latin typeface="Arial"/>
                         </a:rPr>
-                        <a:t>f 43 mm, 21 mm</a:t>
-                      </a:r>
-                    </a:p>
-                  </a:txBody>
-                  <a:tcPr marL="54864" marR="54864" marT="18288" marB="18288">
-                    <a:solidFill>
-                      <a:srgbClr val="ECF1F6"/>
-                    </a:solidFill>
-                  </a:tcPr>
-                </a:tc>
-                <a:tc>
-                  <a:txBody>
-                    <a:bodyPr wrap="square"/>
-                    <a:lstStyle/>
-                    <a:p>
-                      <a:r>
-                        <a:rPr sz="1100" b="0">
-                          <a:solidFill>
-                            <a:srgbClr val="282828"/>
-                          </a:solidFill>
-                          <a:latin typeface="Arial"/>
-                        </a:rPr>
-                        <a:t>AR</a:t>
-                      </a:r>
-                    </a:p>
-                  </a:txBody>
-                  <a:tcPr marL="54864" marR="54864" marT="18288" marB="18288">
-                    <a:solidFill>
-                      <a:srgbClr val="ECF1F6"/>
-                    </a:solidFill>
-                  </a:tcPr>
-                </a:tc>
-                <a:tc>
-                  <a:txBody>
-                    <a:bodyPr wrap="square"/>
-                    <a:lstStyle/>
-                    <a:p>
-                      <a:r>
-                        <a:rPr sz="1100" b="0">
-                          <a:solidFill>
-                            <a:srgbClr val="282828"/>
-                          </a:solidFill>
-                          <a:latin typeface="Arial"/>
-                        </a:rPr>
-                        <a:t>1</a:t>
-                      </a:r>
-                    </a:p>
-                  </a:txBody>
-                  <a:tcPr marL="54864" marR="54864" marT="18288" marB="18288">
-                    <a:solidFill>
-                      <a:srgbClr val="ECF1F6"/>
-                    </a:solidFill>
-                  </a:tcPr>
-                </a:tc>
-                <a:tc>
-                  <a:txBody>
-                    <a:bodyPr wrap="square"/>
-                    <a:lstStyle/>
-                    <a:p>
-                      <a:r>
-                        <a:rPr sz="1100" b="0">
-                          <a:solidFill>
-                            <a:srgbClr val="282828"/>
-                          </a:solidFill>
-                          <a:latin typeface="Arial"/>
-                        </a:rPr>
-                        <a:t>reimages the pupil (7.5-7.8 mm as traced) 32 mm behind it</a:t>
+                        <a:t>reimages the DM, 9.8 mm across on the full 96 mm beam (7.8 mm on the record's 77 mm beam), 38 mm behind it</a:t>
                       </a:r>
                     </a:p>
                   </a:txBody>
@@ -33080,7 +33547,7 @@
                           </a:solidFill>
                           <a:latin typeface="Arial"/>
                         </a:rPr>
-                        <a:t>sCMOS 2048×2048, 6.5 µm (13.3 mm): 1155 raw pixels across the 7.5 mm pupil image, binned 3 to 385 or 6 to the modeled 193</a:t>
+                        <a:t>sCMOS 2048×2048, 6.5 µm: 1500 raw pixels across the 9.8 mm pupil image, binned 4 to 377 (26 µm); or a 24 µm-pixel camera unbinned (408 across); both to be priced by the runner</a:t>
                       </a:r>
                     </a:p>
                   </a:txBody>
@@ -33157,7 +33624,7 @@
                   </a:tcPr>
                 </a:tc>
               </a:tr>
-              <a:tr h="657225">
+              <a:tr h="468630">
                 <a:tc>
                   <a:txBody>
                     <a:bodyPr wrap="square"/>
@@ -33281,7 +33748,7 @@
         </p:nvSpPr>
         <p:spPr>
           <a:xfrm>
-            <a:off x="411480" y="9994392"/>
+            <a:off x="411480" y="8674227"/>
             <a:ext cx="11368735" cy="274320"/>
           </a:xfrm>
           <a:prstGeom prst="rect">

--- a/demo_session/deck_gauges_edit.pptx
+++ b/demo_session/deck_gauges_edit.pptx
@@ -32489,7 +32489,7 @@
         </p:nvGraphicFramePr>
         <p:xfrm>
           <a:off x="411480" y="1298448"/>
-          <a:ext cx="11368734" cy="7229475"/>
+          <a:ext cx="11368735" cy="5532120"/>
         </p:xfrm>
         <a:graphic>
           <a:graphicData uri="http://schemas.openxmlformats.org/drawingml/2006/table">
@@ -32499,10 +32499,10 @@
               </a:tblPr>
               <a:tblGrid>
                 <a:gridCol w="1962404"/>
-                <a:gridCol w="5148308"/>
+                <a:gridCol w="4818338"/>
                 <a:gridCol w="2180336"/>
                 <a:gridCol w="509524"/>
-                <a:gridCol w="1568162"/>
+                <a:gridCol w="1898133"/>
               </a:tblGrid>
               <a:tr h="280035">
                 <a:tc>
@@ -32616,7 +32616,7 @@
                   </a:tcPr>
                 </a:tc>
               </a:tr>
-              <a:tr h="657225">
+              <a:tr h="468630">
                 <a:tc>
                   <a:txBody>
                     <a:bodyPr wrap="square"/>
@@ -32840,7 +32840,7 @@
                   </a:tcPr>
                 </a:tc>
               </a:tr>
-              <a:tr h="1034415">
+              <a:tr h="657225">
                 <a:tc>
                   <a:txBody>
                     <a:bodyPr wrap="square"/>
@@ -32875,7 +32875,7 @@
                           </a:solidFill>
                           <a:latin typeface="Arial"/>
                         </a:rPr>
-                        <a:t>103 mm, 22.5° incidence, 50/50; 10 mm thick (modeled): shifts the transmitted beam 1.39 mm, which the compensator cannot undo; the interferometer's flat null rises from 0.13 to 20 nm and its reading is attenuated 13%, a cost in floor and SNR, not gain (differential rows 1.00-1.01, single actuator 0.989; capture unchanged); the sensors do not move</a:t>
+                        <a:t>103 mm, 22.5° incidence, 50/50; 10 mm thick: shifts the transmitted beam 1.39 mm, the flat null 0.13 → 20 nm, the reading attenuated 13% (floor, not gain; rows hold)</a:t>
                       </a:r>
                     </a:p>
                   </a:txBody>
@@ -32948,6 +32948,342 @@
                   <a:tcPr marL="54864" marR="54864" marT="18288" marB="18288">
                     <a:solidFill>
                       <a:srgbClr val="FFFFFF"/>
+                    </a:solidFill>
+                  </a:tcPr>
+                </a:tc>
+              </a:tr>
+              <a:tr h="468630">
+                <a:tc>
+                  <a:txBody>
+                    <a:bodyPr wrap="square"/>
+                    <a:lstStyle/>
+                    <a:p>
+                      <a:r>
+                        <a:rPr sz="1100" b="0">
+                          <a:solidFill>
+                            <a:srgbClr val="282828"/>
+                          </a:solidFill>
+                          <a:latin typeface="Arial"/>
+                        </a:rPr>
+                        <a:t>compensator plate</a:t>
+                      </a:r>
+                    </a:p>
+                  </a:txBody>
+                  <a:tcPr marL="54864" marR="54864" marT="18288" marB="18288">
+                    <a:solidFill>
+                      <a:srgbClr val="ECF1F6"/>
+                    </a:solidFill>
+                  </a:tcPr>
+                </a:tc>
+                <a:tc>
+                  <a:txBody>
+                    <a:bodyPr wrap="square"/>
+                    <a:lstStyle/>
+                    <a:p>
+                      <a:r>
+                        <a:rPr sz="1100" b="0">
+                          <a:solidFill>
+                            <a:srgbClr val="282828"/>
+                          </a:solidFill>
+                          <a:latin typeface="Arial"/>
+                        </a:rPr>
+                        <a:t>103 mm, matched to the splitter, in the mirror leg</a:t>
+                      </a:r>
+                    </a:p>
+                  </a:txBody>
+                  <a:tcPr marL="54864" marR="54864" marT="18288" marB="18288">
+                    <a:solidFill>
+                      <a:srgbClr val="ECF1F6"/>
+                    </a:solidFill>
+                  </a:tcPr>
+                </a:tc>
+                <a:tc>
+                  <a:txBody>
+                    <a:bodyPr wrap="square"/>
+                    <a:lstStyle/>
+                    <a:p>
+                      <a:r>
+                        <a:rPr sz="1100" b="0">
+                          <a:solidFill>
+                            <a:srgbClr val="282828"/>
+                          </a:solidFill>
+                          <a:latin typeface="Arial"/>
+                        </a:rPr>
+                        <a:t>AR</a:t>
+                      </a:r>
+                    </a:p>
+                  </a:txBody>
+                  <a:tcPr marL="54864" marR="54864" marT="18288" marB="18288">
+                    <a:solidFill>
+                      <a:srgbClr val="ECF1F6"/>
+                    </a:solidFill>
+                  </a:tcPr>
+                </a:tc>
+                <a:tc>
+                  <a:txBody>
+                    <a:bodyPr wrap="square"/>
+                    <a:lstStyle/>
+                    <a:p>
+                      <a:r>
+                        <a:rPr sz="1100" b="0">
+                          <a:solidFill>
+                            <a:srgbClr val="282828"/>
+                          </a:solidFill>
+                          <a:latin typeface="Arial"/>
+                        </a:rPr>
+                        <a:t>1</a:t>
+                      </a:r>
+                    </a:p>
+                  </a:txBody>
+                  <a:tcPr marL="54864" marR="54864" marT="18288" marB="18288">
+                    <a:solidFill>
+                      <a:srgbClr val="ECF1F6"/>
+                    </a:solidFill>
+                  </a:tcPr>
+                </a:tc>
+                <a:tc>
+                  <a:txBody>
+                    <a:bodyPr wrap="square"/>
+                    <a:lstStyle/>
+                    <a:p>
+                      <a:r>
+                        <a:rPr sz="1100" b="0">
+                          <a:solidFill>
+                            <a:srgbClr val="282828"/>
+                          </a:solidFill>
+                          <a:latin typeface="Arial"/>
+                        </a:rPr>
+                        <a:t>balances the glass path through the splitter</a:t>
+                      </a:r>
+                    </a:p>
+                  </a:txBody>
+                  <a:tcPr marL="54864" marR="54864" marT="18288" marB="18288">
+                    <a:solidFill>
+                      <a:srgbClr val="ECF1F6"/>
+                    </a:solidFill>
+                  </a:tcPr>
+                </a:tc>
+              </a:tr>
+              <a:tr h="468630">
+                <a:tc>
+                  <a:txBody>
+                    <a:bodyPr wrap="square"/>
+                    <a:lstStyle/>
+                    <a:p>
+                      <a:r>
+                        <a:rPr sz="1100" b="0">
+                          <a:solidFill>
+                            <a:srgbClr val="282828"/>
+                          </a:solidFill>
+                          <a:latin typeface="Arial"/>
+                        </a:rPr>
+                        <a:t>deformable mirror</a:t>
+                      </a:r>
+                    </a:p>
+                  </a:txBody>
+                  <a:tcPr marL="54864" marR="54864" marT="18288" marB="18288">
+                    <a:solidFill>
+                      <a:srgbClr val="FFFFFF"/>
+                    </a:solidFill>
+                  </a:tcPr>
+                </a:tc>
+                <a:tc>
+                  <a:txBody>
+                    <a:bodyPr wrap="square"/>
+                    <a:lstStyle/>
+                    <a:p>
+                      <a:r>
+                        <a:rPr sz="1100" b="0">
+                          <a:solidFill>
+                            <a:srgbClr val="282828"/>
+                          </a:solidFill>
+                          <a:latin typeface="Arial"/>
+                        </a:rPr>
+                        <a:t>96×96, 1 mm pitch, 96 mm, 700 mm leg</a:t>
+                      </a:r>
+                    </a:p>
+                  </a:txBody>
+                  <a:tcPr marL="54864" marR="54864" marT="18288" marB="18288">
+                    <a:solidFill>
+                      <a:srgbClr val="FFFFFF"/>
+                    </a:solidFill>
+                  </a:tcPr>
+                </a:tc>
+                <a:tc>
+                  <a:txBody>
+                    <a:bodyPr wrap="square"/>
+                    <a:lstStyle/>
+                    <a:p>
+                      <a:r>
+                        <a:rPr sz="1100" b="0">
+                          <a:solidFill>
+                            <a:srgbClr val="282828"/>
+                          </a:solidFill>
+                          <a:latin typeface="Arial"/>
+                        </a:rPr>
+                        <a:t>protected aluminum</a:t>
+                      </a:r>
+                    </a:p>
+                  </a:txBody>
+                  <a:tcPr marL="54864" marR="54864" marT="18288" marB="18288">
+                    <a:solidFill>
+                      <a:srgbClr val="FFFFFF"/>
+                    </a:solidFill>
+                  </a:tcPr>
+                </a:tc>
+                <a:tc>
+                  <a:txBody>
+                    <a:bodyPr wrap="square"/>
+                    <a:lstStyle/>
+                    <a:p>
+                      <a:r>
+                        <a:rPr sz="1100" b="0">
+                          <a:solidFill>
+                            <a:srgbClr val="282828"/>
+                          </a:solidFill>
+                          <a:latin typeface="Arial"/>
+                        </a:rPr>
+                        <a:t>1</a:t>
+                      </a:r>
+                    </a:p>
+                  </a:txBody>
+                  <a:tcPr marL="54864" marR="54864" marT="18288" marB="18288">
+                    <a:solidFill>
+                      <a:srgbClr val="FFFFFF"/>
+                    </a:solidFill>
+                  </a:tcPr>
+                </a:tc>
+                <a:tc>
+                  <a:txBody>
+                    <a:bodyPr wrap="square"/>
+                    <a:lstStyle/>
+                    <a:p>
+                      <a:r>
+                        <a:rPr sz="1100" b="0">
+                          <a:solidFill>
+                            <a:srgbClr val="282828"/>
+                          </a:solidFill>
+                          <a:latin typeface="Arial"/>
+                        </a:rPr>
+                        <a:t>the test object; its surface is the measurand</a:t>
+                      </a:r>
+                    </a:p>
+                  </a:txBody>
+                  <a:tcPr marL="54864" marR="54864" marT="18288" marB="18288">
+                    <a:solidFill>
+                      <a:srgbClr val="FFFFFF"/>
+                    </a:solidFill>
+                  </a:tcPr>
+                </a:tc>
+              </a:tr>
+              <a:tr h="468630">
+                <a:tc>
+                  <a:txBody>
+                    <a:bodyPr wrap="square"/>
+                    <a:lstStyle/>
+                    <a:p>
+                      <a:r>
+                        <a:rPr sz="1100" b="0">
+                          <a:solidFill>
+                            <a:srgbClr val="282828"/>
+                          </a:solidFill>
+                          <a:latin typeface="Arial"/>
+                        </a:rPr>
+                        <a:t>focuser L2</a:t>
+                      </a:r>
+                    </a:p>
+                  </a:txBody>
+                  <a:tcPr marL="54864" marR="54864" marT="18288" marB="18288">
+                    <a:solidFill>
+                      <a:srgbClr val="ECF1F6"/>
+                    </a:solidFill>
+                  </a:tcPr>
+                </a:tc>
+                <a:tc>
+                  <a:txBody>
+                    <a:bodyPr wrap="square"/>
+                    <a:lstStyle/>
+                    <a:p>
+                      <a:r>
+                        <a:rPr sz="1100" b="0">
+                          <a:solidFill>
+                            <a:srgbClr val="282828"/>
+                          </a:solidFill>
+                          <a:latin typeface="Arial"/>
+                        </a:rPr>
+                        <a:t>f 429 mm, 103 mm, plano-convex conic; modeled 8 mm center</a:t>
+                      </a:r>
+                    </a:p>
+                  </a:txBody>
+                  <a:tcPr marL="54864" marR="54864" marT="18288" marB="18288">
+                    <a:solidFill>
+                      <a:srgbClr val="ECF1F6"/>
+                    </a:solidFill>
+                  </a:tcPr>
+                </a:tc>
+                <a:tc>
+                  <a:txBody>
+                    <a:bodyPr wrap="square"/>
+                    <a:lstStyle/>
+                    <a:p>
+                      <a:r>
+                        <a:rPr sz="1100" b="0">
+                          <a:solidFill>
+                            <a:srgbClr val="282828"/>
+                          </a:solidFill>
+                          <a:latin typeface="Arial"/>
+                        </a:rPr>
+                        <a:t>AR</a:t>
+                      </a:r>
+                    </a:p>
+                  </a:txBody>
+                  <a:tcPr marL="54864" marR="54864" marT="18288" marB="18288">
+                    <a:solidFill>
+                      <a:srgbClr val="ECF1F6"/>
+                    </a:solidFill>
+                  </a:tcPr>
+                </a:tc>
+                <a:tc>
+                  <a:txBody>
+                    <a:bodyPr wrap="square"/>
+                    <a:lstStyle/>
+                    <a:p>
+                      <a:r>
+                        <a:rPr sz="1100" b="0">
+                          <a:solidFill>
+                            <a:srgbClr val="282828"/>
+                          </a:solidFill>
+                          <a:latin typeface="Arial"/>
+                        </a:rPr>
+                        <a:t>1</a:t>
+                      </a:r>
+                    </a:p>
+                  </a:txBody>
+                  <a:tcPr marL="54864" marR="54864" marT="18288" marB="18288">
+                    <a:solidFill>
+                      <a:srgbClr val="ECF1F6"/>
+                    </a:solidFill>
+                  </a:tcPr>
+                </a:tc>
+                <a:tc>
+                  <a:txBody>
+                    <a:bodyPr wrap="square"/>
+                    <a:lstStyle/>
+                    <a:p>
+                      <a:r>
+                        <a:rPr sz="1100" b="0">
+                          <a:solidFill>
+                            <a:srgbClr val="282828"/>
+                          </a:solidFill>
+                          <a:latin typeface="Arial"/>
+                        </a:rPr>
+                        <a:t>the internal focus at F/4.2 where the masks sit</a:t>
+                      </a:r>
+                    </a:p>
+                  </a:txBody>
+                  <a:tcPr marL="54864" marR="54864" marT="18288" marB="18288">
+                    <a:solidFill>
+                      <a:srgbClr val="ECF1F6"/>
                     </a:solidFill>
                   </a:tcPr>
                 </a:tc>
@@ -32965,57 +33301,57 @@
                           </a:solidFill>
                           <a:latin typeface="Arial"/>
                         </a:rPr>
-                        <a:t>compensator plate</a:t>
-                      </a:r>
-                    </a:p>
-                  </a:txBody>
-                  <a:tcPr marL="54864" marR="54864" marT="18288" marB="18288">
-                    <a:solidFill>
-                      <a:srgbClr val="ECF1F6"/>
-                    </a:solidFill>
-                  </a:tcPr>
-                </a:tc>
-                <a:tc>
-                  <a:txBody>
-                    <a:bodyPr wrap="square"/>
-                    <a:lstStyle/>
-                    <a:p>
-                      <a:r>
-                        <a:rPr sz="1100" b="0">
-                          <a:solidFill>
-                            <a:srgbClr val="282828"/>
-                          </a:solidFill>
-                          <a:latin typeface="Arial"/>
-                        </a:rPr>
-                        <a:t>103 mm, matched to the splitter, in the mirror leg</a:t>
-                      </a:r>
-                    </a:p>
-                  </a:txBody>
-                  <a:tcPr marL="54864" marR="54864" marT="18288" marB="18288">
-                    <a:solidFill>
-                      <a:srgbClr val="ECF1F6"/>
-                    </a:solidFill>
-                  </a:tcPr>
-                </a:tc>
-                <a:tc>
-                  <a:txBody>
-                    <a:bodyPr wrap="square"/>
-                    <a:lstStyle/>
-                    <a:p>
-                      <a:r>
-                        <a:rPr sz="1100" b="0">
-                          <a:solidFill>
-                            <a:srgbClr val="282828"/>
-                          </a:solidFill>
-                          <a:latin typeface="Arial"/>
-                        </a:rPr>
-                        <a:t>AR</a:t>
-                      </a:r>
-                    </a:p>
-                  </a:txBody>
-                  <a:tcPr marL="54864" marR="54864" marT="18288" marB="18288">
-                    <a:solidFill>
-                      <a:srgbClr val="ECF1F6"/>
+                        <a:t>mask seat</a:t>
+                      </a:r>
+                    </a:p>
+                  </a:txBody>
+                  <a:tcPr marL="54864" marR="54864" marT="18288" marB="18288">
+                    <a:solidFill>
+                      <a:srgbClr val="FFFFFF"/>
+                    </a:solidFill>
+                  </a:tcPr>
+                </a:tc>
+                <a:tc>
+                  <a:txBody>
+                    <a:bodyPr wrap="square"/>
+                    <a:lstStyle/>
+                    <a:p>
+                      <a:r>
+                        <a:rPr sz="1100" b="0">
+                          <a:solidFill>
+                            <a:srgbClr val="282828"/>
+                          </a:solidFill>
+                          <a:latin typeface="Arial"/>
+                        </a:rPr>
+                        <a:t>translation stage at the internal focus</a:t>
+                      </a:r>
+                    </a:p>
+                  </a:txBody>
+                  <a:tcPr marL="54864" marR="54864" marT="18288" marB="18288">
+                    <a:solidFill>
+                      <a:srgbClr val="FFFFFF"/>
+                    </a:solidFill>
+                  </a:tcPr>
+                </a:tc>
+                <a:tc>
+                  <a:txBody>
+                    <a:bodyPr wrap="square"/>
+                    <a:lstStyle/>
+                    <a:p>
+                      <a:r>
+                        <a:rPr sz="1100" b="0">
+                          <a:solidFill>
+                            <a:srgbClr val="282828"/>
+                          </a:solidFill>
+                          <a:latin typeface="Arial"/>
+                        </a:rPr>
+                        <a:t>—</a:t>
+                      </a:r>
+                    </a:p>
+                  </a:txBody>
+                  <a:tcPr marL="54864" marR="54864" marT="18288" marB="18288">
+                    <a:solidFill>
+                      <a:srgbClr val="FFFFFF"/>
                     </a:solidFill>
                   </a:tcPr>
                 </a:tc>
@@ -33037,29 +33373,29 @@
                   </a:txBody>
                   <a:tcPr marL="54864" marR="54864" marT="18288" marB="18288">
                     <a:solidFill>
-                      <a:srgbClr val="ECF1F6"/>
-                    </a:solidFill>
-                  </a:tcPr>
-                </a:tc>
-                <a:tc>
-                  <a:txBody>
-                    <a:bodyPr wrap="square"/>
-                    <a:lstStyle/>
-                    <a:p>
-                      <a:r>
-                        <a:rPr sz="1100" b="0">
-                          <a:solidFill>
-                            <a:srgbClr val="282828"/>
-                          </a:solidFill>
-                          <a:latin typeface="Arial"/>
-                        </a:rPr>
-                        <a:t>balances the glass path through the splitter</a:t>
-                      </a:r>
-                    </a:p>
-                  </a:txBody>
-                  <a:tcPr marL="54864" marR="54864" marT="18288" marB="18288">
-                    <a:solidFill>
-                      <a:srgbClr val="ECF1F6"/>
+                      <a:srgbClr val="FFFFFF"/>
+                    </a:solidFill>
+                  </a:tcPr>
+                </a:tc>
+                <a:tc>
+                  <a:txBody>
+                    <a:bodyPr wrap="square"/>
+                    <a:lstStyle/>
+                    <a:p>
+                      <a:r>
+                        <a:rPr sz="1100" b="0">
+                          <a:solidFill>
+                            <a:srgbClr val="282828"/>
+                          </a:solidFill>
+                          <a:latin typeface="Arial"/>
+                        </a:rPr>
+                        <a:t>selects the sensor: clear window, dimple, metasurface, pinhole</a:t>
+                      </a:r>
+                    </a:p>
+                  </a:txBody>
+                  <a:tcPr marL="54864" marR="54864" marT="18288" marB="18288">
+                    <a:solidFill>
+                      <a:srgbClr val="FFFFFF"/>
                     </a:solidFill>
                   </a:tcPr>
                 </a:tc>
@@ -33077,57 +33413,57 @@
                           </a:solidFill>
                           <a:latin typeface="Arial"/>
                         </a:rPr>
-                        <a:t>deformable mirror</a:t>
-                      </a:r>
-                    </a:p>
-                  </a:txBody>
-                  <a:tcPr marL="54864" marR="54864" marT="18288" marB="18288">
-                    <a:solidFill>
-                      <a:srgbClr val="FFFFFF"/>
-                    </a:solidFill>
-                  </a:tcPr>
-                </a:tc>
-                <a:tc>
-                  <a:txBody>
-                    <a:bodyPr wrap="square"/>
-                    <a:lstStyle/>
-                    <a:p>
-                      <a:r>
-                        <a:rPr sz="1100" b="0">
-                          <a:solidFill>
-                            <a:srgbClr val="282828"/>
-                          </a:solidFill>
-                          <a:latin typeface="Arial"/>
-                        </a:rPr>
-                        <a:t>96×96, 1 mm pitch, 96 mm, 700 mm leg</a:t>
-                      </a:r>
-                    </a:p>
-                  </a:txBody>
-                  <a:tcPr marL="54864" marR="54864" marT="18288" marB="18288">
-                    <a:solidFill>
-                      <a:srgbClr val="FFFFFF"/>
-                    </a:solidFill>
-                  </a:tcPr>
-                </a:tc>
-                <a:tc>
-                  <a:txBody>
-                    <a:bodyPr wrap="square"/>
-                    <a:lstStyle/>
-                    <a:p>
-                      <a:r>
-                        <a:rPr sz="1100" b="0">
-                          <a:solidFill>
-                            <a:srgbClr val="282828"/>
-                          </a:solidFill>
-                          <a:latin typeface="Arial"/>
-                        </a:rPr>
-                        <a:t>protected aluminum</a:t>
-                      </a:r>
-                    </a:p>
-                  </a:txBody>
-                  <a:tcPr marL="54864" marR="54864" marT="18288" marB="18288">
-                    <a:solidFill>
-                      <a:srgbClr val="FFFFFF"/>
+                        <a:t>field lens</a:t>
+                      </a:r>
+                    </a:p>
+                  </a:txBody>
+                  <a:tcPr marL="54864" marR="54864" marT="18288" marB="18288">
+                    <a:solidFill>
+                      <a:srgbClr val="ECF1F6"/>
+                    </a:solidFill>
+                  </a:tcPr>
+                </a:tc>
+                <a:tc>
+                  <a:txBody>
+                    <a:bodyPr wrap="square"/>
+                    <a:lstStyle/>
+                    <a:p>
+                      <a:r>
+                        <a:rPr sz="1100" b="0">
+                          <a:solidFill>
+                            <a:srgbClr val="282828"/>
+                          </a:solidFill>
+                          <a:latin typeface="Arial"/>
+                        </a:rPr>
+                        <a:t>f 43 mm, 21 mm; at the seed station 10.8 mm past the focus (slide 15)</a:t>
+                      </a:r>
+                    </a:p>
+                  </a:txBody>
+                  <a:tcPr marL="54864" marR="54864" marT="18288" marB="18288">
+                    <a:solidFill>
+                      <a:srgbClr val="ECF1F6"/>
+                    </a:solidFill>
+                  </a:tcPr>
+                </a:tc>
+                <a:tc>
+                  <a:txBody>
+                    <a:bodyPr wrap="square"/>
+                    <a:lstStyle/>
+                    <a:p>
+                      <a:r>
+                        <a:rPr sz="1100" b="0">
+                          <a:solidFill>
+                            <a:srgbClr val="282828"/>
+                          </a:solidFill>
+                          <a:latin typeface="Arial"/>
+                        </a:rPr>
+                        <a:t>AR</a:t>
+                      </a:r>
+                    </a:p>
+                  </a:txBody>
+                  <a:tcPr marL="54864" marR="54864" marT="18288" marB="18288">
+                    <a:solidFill>
+                      <a:srgbClr val="ECF1F6"/>
                     </a:solidFill>
                   </a:tcPr>
                 </a:tc>
@@ -33149,370 +33485,34 @@
                   </a:txBody>
                   <a:tcPr marL="54864" marR="54864" marT="18288" marB="18288">
                     <a:solidFill>
-                      <a:srgbClr val="FFFFFF"/>
-                    </a:solidFill>
-                  </a:tcPr>
-                </a:tc>
-                <a:tc>
-                  <a:txBody>
-                    <a:bodyPr wrap="square"/>
-                    <a:lstStyle/>
-                    <a:p>
-                      <a:r>
-                        <a:rPr sz="1100" b="0">
-                          <a:solidFill>
-                            <a:srgbClr val="282828"/>
-                          </a:solidFill>
-                          <a:latin typeface="Arial"/>
-                        </a:rPr>
-                        <a:t>the test object; its surface is the measurand</a:t>
-                      </a:r>
-                    </a:p>
-                  </a:txBody>
-                  <a:tcPr marL="54864" marR="54864" marT="18288" marB="18288">
-                    <a:solidFill>
-                      <a:srgbClr val="FFFFFF"/>
+                      <a:srgbClr val="ECF1F6"/>
+                    </a:solidFill>
+                  </a:tcPr>
+                </a:tc>
+                <a:tc>
+                  <a:txBody>
+                    <a:bodyPr wrap="square"/>
+                    <a:lstStyle/>
+                    <a:p>
+                      <a:r>
+                        <a:rPr sz="1100" b="0">
+                          <a:solidFill>
+                            <a:srgbClr val="282828"/>
+                          </a:solidFill>
+                          <a:latin typeface="Arial"/>
+                        </a:rPr>
+                        <a:t>reimages the DM: 9.8 mm across on the 96 mm beam, 38 mm behind it</a:t>
+                      </a:r>
+                    </a:p>
+                  </a:txBody>
+                  <a:tcPr marL="54864" marR="54864" marT="18288" marB="18288">
+                    <a:solidFill>
+                      <a:srgbClr val="ECF1F6"/>
                     </a:solidFill>
                   </a:tcPr>
                 </a:tc>
               </a:tr>
-              <a:tr h="657225">
-                <a:tc>
-                  <a:txBody>
-                    <a:bodyPr wrap="square"/>
-                    <a:lstStyle/>
-                    <a:p>
-                      <a:r>
-                        <a:rPr sz="1100" b="0">
-                          <a:solidFill>
-                            <a:srgbClr val="282828"/>
-                          </a:solidFill>
-                          <a:latin typeface="Arial"/>
-                        </a:rPr>
-                        <a:t>focuser L2</a:t>
-                      </a:r>
-                    </a:p>
-                  </a:txBody>
-                  <a:tcPr marL="54864" marR="54864" marT="18288" marB="18288">
-                    <a:solidFill>
-                      <a:srgbClr val="ECF1F6"/>
-                    </a:solidFill>
-                  </a:tcPr>
-                </a:tc>
-                <a:tc>
-                  <a:txBody>
-                    <a:bodyPr wrap="square"/>
-                    <a:lstStyle/>
-                    <a:p>
-                      <a:r>
-                        <a:rPr sz="1100" b="0">
-                          <a:solidFill>
-                            <a:srgbClr val="282828"/>
-                          </a:solidFill>
-                          <a:latin typeface="Arial"/>
-                        </a:rPr>
-                        <a:t>f 429 mm, 103 mm, plano-convex conic; modeled 8 mm center</a:t>
-                      </a:r>
-                    </a:p>
-                  </a:txBody>
-                  <a:tcPr marL="54864" marR="54864" marT="18288" marB="18288">
-                    <a:solidFill>
-                      <a:srgbClr val="ECF1F6"/>
-                    </a:solidFill>
-                  </a:tcPr>
-                </a:tc>
-                <a:tc>
-                  <a:txBody>
-                    <a:bodyPr wrap="square"/>
-                    <a:lstStyle/>
-                    <a:p>
-                      <a:r>
-                        <a:rPr sz="1100" b="0">
-                          <a:solidFill>
-                            <a:srgbClr val="282828"/>
-                          </a:solidFill>
-                          <a:latin typeface="Arial"/>
-                        </a:rPr>
-                        <a:t>AR</a:t>
-                      </a:r>
-                    </a:p>
-                  </a:txBody>
-                  <a:tcPr marL="54864" marR="54864" marT="18288" marB="18288">
-                    <a:solidFill>
-                      <a:srgbClr val="ECF1F6"/>
-                    </a:solidFill>
-                  </a:tcPr>
-                </a:tc>
-                <a:tc>
-                  <a:txBody>
-                    <a:bodyPr wrap="square"/>
-                    <a:lstStyle/>
-                    <a:p>
-                      <a:r>
-                        <a:rPr sz="1100" b="0">
-                          <a:solidFill>
-                            <a:srgbClr val="282828"/>
-                          </a:solidFill>
-                          <a:latin typeface="Arial"/>
-                        </a:rPr>
-                        <a:t>1</a:t>
-                      </a:r>
-                    </a:p>
-                  </a:txBody>
-                  <a:tcPr marL="54864" marR="54864" marT="18288" marB="18288">
-                    <a:solidFill>
-                      <a:srgbClr val="ECF1F6"/>
-                    </a:solidFill>
-                  </a:tcPr>
-                </a:tc>
-                <a:tc>
-                  <a:txBody>
-                    <a:bodyPr wrap="square"/>
-                    <a:lstStyle/>
-                    <a:p>
-                      <a:r>
-                        <a:rPr sz="1100" b="0">
-                          <a:solidFill>
-                            <a:srgbClr val="282828"/>
-                          </a:solidFill>
-                          <a:latin typeface="Arial"/>
-                        </a:rPr>
-                        <a:t>the internal focus at F/4.2 where the masks sit</a:t>
-                      </a:r>
-                    </a:p>
-                  </a:txBody>
-                  <a:tcPr marL="54864" marR="54864" marT="18288" marB="18288">
-                    <a:solidFill>
-                      <a:srgbClr val="ECF1F6"/>
-                    </a:solidFill>
-                  </a:tcPr>
-                </a:tc>
-              </a:tr>
-              <a:tr h="657225">
-                <a:tc>
-                  <a:txBody>
-                    <a:bodyPr wrap="square"/>
-                    <a:lstStyle/>
-                    <a:p>
-                      <a:r>
-                        <a:rPr sz="1100" b="0">
-                          <a:solidFill>
-                            <a:srgbClr val="282828"/>
-                          </a:solidFill>
-                          <a:latin typeface="Arial"/>
-                        </a:rPr>
-                        <a:t>mask seat</a:t>
-                      </a:r>
-                    </a:p>
-                  </a:txBody>
-                  <a:tcPr marL="54864" marR="54864" marT="18288" marB="18288">
-                    <a:solidFill>
-                      <a:srgbClr val="FFFFFF"/>
-                    </a:solidFill>
-                  </a:tcPr>
-                </a:tc>
-                <a:tc>
-                  <a:txBody>
-                    <a:bodyPr wrap="square"/>
-                    <a:lstStyle/>
-                    <a:p>
-                      <a:r>
-                        <a:rPr sz="1100" b="0">
-                          <a:solidFill>
-                            <a:srgbClr val="282828"/>
-                          </a:solidFill>
-                          <a:latin typeface="Arial"/>
-                        </a:rPr>
-                        <a:t>translation stage at the internal focus</a:t>
-                      </a:r>
-                    </a:p>
-                  </a:txBody>
-                  <a:tcPr marL="54864" marR="54864" marT="18288" marB="18288">
-                    <a:solidFill>
-                      <a:srgbClr val="FFFFFF"/>
-                    </a:solidFill>
-                  </a:tcPr>
-                </a:tc>
-                <a:tc>
-                  <a:txBody>
-                    <a:bodyPr wrap="square"/>
-                    <a:lstStyle/>
-                    <a:p>
-                      <a:r>
-                        <a:rPr sz="1100" b="0">
-                          <a:solidFill>
-                            <a:srgbClr val="282828"/>
-                          </a:solidFill>
-                          <a:latin typeface="Arial"/>
-                        </a:rPr>
-                        <a:t>—</a:t>
-                      </a:r>
-                    </a:p>
-                  </a:txBody>
-                  <a:tcPr marL="54864" marR="54864" marT="18288" marB="18288">
-                    <a:solidFill>
-                      <a:srgbClr val="FFFFFF"/>
-                    </a:solidFill>
-                  </a:tcPr>
-                </a:tc>
-                <a:tc>
-                  <a:txBody>
-                    <a:bodyPr wrap="square"/>
-                    <a:lstStyle/>
-                    <a:p>
-                      <a:r>
-                        <a:rPr sz="1100" b="0">
-                          <a:solidFill>
-                            <a:srgbClr val="282828"/>
-                          </a:solidFill>
-                          <a:latin typeface="Arial"/>
-                        </a:rPr>
-                        <a:t>1</a:t>
-                      </a:r>
-                    </a:p>
-                  </a:txBody>
-                  <a:tcPr marL="54864" marR="54864" marT="18288" marB="18288">
-                    <a:solidFill>
-                      <a:srgbClr val="FFFFFF"/>
-                    </a:solidFill>
-                  </a:tcPr>
-                </a:tc>
-                <a:tc>
-                  <a:txBody>
-                    <a:bodyPr wrap="square"/>
-                    <a:lstStyle/>
-                    <a:p>
-                      <a:r>
-                        <a:rPr sz="1100" b="0">
-                          <a:solidFill>
-                            <a:srgbClr val="282828"/>
-                          </a:solidFill>
-                          <a:latin typeface="Arial"/>
-                        </a:rPr>
-                        <a:t>selects the sensor: clear window, dimple, metasurface, pinhole</a:t>
-                      </a:r>
-                    </a:p>
-                  </a:txBody>
-                  <a:tcPr marL="54864" marR="54864" marT="18288" marB="18288">
-                    <a:solidFill>
-                      <a:srgbClr val="FFFFFF"/>
-                    </a:solidFill>
-                  </a:tcPr>
-                </a:tc>
-              </a:tr>
-              <a:tr h="1034415">
-                <a:tc>
-                  <a:txBody>
-                    <a:bodyPr wrap="square"/>
-                    <a:lstStyle/>
-                    <a:p>
-                      <a:r>
-                        <a:rPr sz="1100" b="0">
-                          <a:solidFill>
-                            <a:srgbClr val="282828"/>
-                          </a:solidFill>
-                          <a:latin typeface="Arial"/>
-                        </a:rPr>
-                        <a:t>field lens</a:t>
-                      </a:r>
-                    </a:p>
-                  </a:txBody>
-                  <a:tcPr marL="54864" marR="54864" marT="18288" marB="18288">
-                    <a:solidFill>
-                      <a:srgbClr val="ECF1F6"/>
-                    </a:solidFill>
-                  </a:tcPr>
-                </a:tc>
-                <a:tc>
-                  <a:txBody>
-                    <a:bodyPr wrap="square"/>
-                    <a:lstStyle/>
-                    <a:p>
-                      <a:r>
-                        <a:rPr sz="1100" b="0">
-                          <a:solidFill>
-                            <a:srgbClr val="282828"/>
-                          </a:solidFill>
-                          <a:latin typeface="Arial"/>
-                        </a:rPr>
-                        <a:t>f 43 mm, 21 mm, at the seed station 10.8 mm past the focus (the null-tuned station 39.8 mm back bowled the pupil image; slide 15)</a:t>
-                      </a:r>
-                    </a:p>
-                  </a:txBody>
-                  <a:tcPr marL="54864" marR="54864" marT="18288" marB="18288">
-                    <a:solidFill>
-                      <a:srgbClr val="ECF1F6"/>
-                    </a:solidFill>
-                  </a:tcPr>
-                </a:tc>
-                <a:tc>
-                  <a:txBody>
-                    <a:bodyPr wrap="square"/>
-                    <a:lstStyle/>
-                    <a:p>
-                      <a:r>
-                        <a:rPr sz="1100" b="0">
-                          <a:solidFill>
-                            <a:srgbClr val="282828"/>
-                          </a:solidFill>
-                          <a:latin typeface="Arial"/>
-                        </a:rPr>
-                        <a:t>AR</a:t>
-                      </a:r>
-                    </a:p>
-                  </a:txBody>
-                  <a:tcPr marL="54864" marR="54864" marT="18288" marB="18288">
-                    <a:solidFill>
-                      <a:srgbClr val="ECF1F6"/>
-                    </a:solidFill>
-                  </a:tcPr>
-                </a:tc>
-                <a:tc>
-                  <a:txBody>
-                    <a:bodyPr wrap="square"/>
-                    <a:lstStyle/>
-                    <a:p>
-                      <a:r>
-                        <a:rPr sz="1100" b="0">
-                          <a:solidFill>
-                            <a:srgbClr val="282828"/>
-                          </a:solidFill>
-                          <a:latin typeface="Arial"/>
-                        </a:rPr>
-                        <a:t>1</a:t>
-                      </a:r>
-                    </a:p>
-                  </a:txBody>
-                  <a:tcPr marL="54864" marR="54864" marT="18288" marB="18288">
-                    <a:solidFill>
-                      <a:srgbClr val="ECF1F6"/>
-                    </a:solidFill>
-                  </a:tcPr>
-                </a:tc>
-                <a:tc>
-                  <a:txBody>
-                    <a:bodyPr wrap="square"/>
-                    <a:lstStyle/>
-                    <a:p>
-                      <a:r>
-                        <a:rPr sz="1100" b="0">
-                          <a:solidFill>
-                            <a:srgbClr val="282828"/>
-                          </a:solidFill>
-                          <a:latin typeface="Arial"/>
-                        </a:rPr>
-                        <a:t>reimages the DM, 9.8 mm across on the full 96 mm beam (7.8 mm on the record's 77 mm beam), 38 mm behind it</a:t>
-                      </a:r>
-                    </a:p>
-                  </a:txBody>
-                  <a:tcPr marL="54864" marR="54864" marT="18288" marB="18288">
-                    <a:solidFill>
-                      <a:srgbClr val="ECF1F6"/>
-                    </a:solidFill>
-                  </a:tcPr>
-                </a:tc>
-              </a:tr>
-              <a:tr h="657225">
+              <a:tr h="468630">
                 <a:tc>
                   <a:txBody>
                     <a:bodyPr wrap="square"/>
@@ -33547,7 +33547,7 @@
                           </a:solidFill>
                           <a:latin typeface="Arial"/>
                         </a:rPr>
-                        <a:t>sCMOS 2048×2048, 6.5 µm: 1500 raw pixels across the 9.8 mm pupil image, binned 4 to 377 (26 µm); or a 24 µm-pixel camera unbinned (408 across); both to be priced by the runner</a:t>
+                        <a:t>sCMOS 2048×2048, 6.5 µm, binned 4 to 377 px across the 9.8 mm image; or a 24 µm-pixel camera unbinned (408)</a:t>
                       </a:r>
                     </a:p>
                   </a:txBody>
@@ -33748,7 +33748,7 @@
         </p:nvSpPr>
         <p:spPr>
           <a:xfrm>
-            <a:off x="411480" y="8674227"/>
+            <a:off x="411480" y="6976872"/>
             <a:ext cx="11368735" cy="274320"/>
           </a:xfrm>
           <a:prstGeom prst="rect">

--- a/demo_session/deck_gauges_edit.pptx
+++ b/demo_session/deck_gauges_edit.pptx
@@ -58,6 +58,7 @@
     <p:sldId id="306" r:id="rId57"/>
     <p:sldId id="307" r:id="rId58"/>
     <p:sldId id="308" r:id="rId59"/>
+    <p:sldId id="309" r:id="rId60"/>
   </p:sldIdLst>
   <p:sldSz cx="12191695" cy="6858000" type="screen4x3"/>
   <p:notesSz cx="6858000" cy="9144000"/>
@@ -25483,6 +25484,785 @@
                 </a:solidFill>
                 <a:latin typeface="Arial"/>
               </a:rPr>
+              <a:t>Backup: the substrates in, the full beam, the seed tail (Mac cycle 3a, 2026-09-17)</a:t>
+            </a:r>
+          </a:p>
+          <a:p>
+            <a:pPr>
+              <a:spcAft>
+                <a:spcPts val="0"/>
+              </a:spcAft>
+            </a:pPr>
+            <a:r>
+              <a:rPr sz="1250" b="0">
+                <a:solidFill>
+                  <a:srgbClr val="6E6E6E"/>
+                </a:solidFill>
+                <a:latin typeface="Arial"/>
+              </a:rPr>
+              <a:t>On the bench as it will be built but before the collimator fix, the mirror rig reads; the lens rig's flat null grows to 92 nm on the record's misfed collimator and the multi-site row breaks, which is the redo's package A in one number</a:t>
+            </a:r>
+          </a:p>
+        </p:txBody>
+      </p:sp>
+      <p:sp>
+        <p:nvSpPr>
+          <p:cNvPr id="3" name="Rectangle 2"/>
+          <p:cNvSpPr/>
+          <p:nvPr/>
+        </p:nvSpPr>
+        <p:spPr>
+          <a:xfrm>
+            <a:off x="411480" y="1133856"/>
+            <a:ext cx="11368735" cy="20320"/>
+          </a:xfrm>
+          <a:prstGeom prst="rect">
+            <a:avLst/>
+          </a:prstGeom>
+          <a:solidFill>
+            <a:srgbClr val="B8C6D4"/>
+          </a:solidFill>
+          <a:ln>
+            <a:noFill/>
+          </a:ln>
+          <a:effectLst/>
+        </p:spPr>
+        <p:style>
+          <a:lnRef idx="1">
+            <a:schemeClr val="accent1"/>
+          </a:lnRef>
+          <a:fillRef idx="3">
+            <a:schemeClr val="accent1"/>
+          </a:fillRef>
+          <a:effectRef idx="2">
+            <a:schemeClr val="accent1"/>
+          </a:effectRef>
+          <a:fontRef idx="minor">
+            <a:schemeClr val="lt1"/>
+          </a:fontRef>
+        </p:style>
+        <p:txBody>
+          <a:bodyPr rtlCol="0" anchor="ctr"/>
+          <a:lstStyle/>
+          <a:p>
+            <a:pPr algn="ctr"/>
+          </a:p>
+        </p:txBody>
+      </p:sp>
+      <p:graphicFrame>
+        <p:nvGraphicFramePr>
+          <p:cNvPr id="4" name="Table 3"/>
+          <p:cNvGraphicFramePr>
+            <a:graphicFrameLocks noGrp="1"/>
+          </p:cNvGraphicFramePr>
+          <p:nvPr/>
+        </p:nvGraphicFramePr>
+        <p:xfrm>
+          <a:off x="411480" y="1298448"/>
+          <a:ext cx="11368733" cy="2057400"/>
+        </p:xfrm>
+        <a:graphic>
+          <a:graphicData uri="http://schemas.openxmlformats.org/drawingml/2006/table">
+            <a:tbl>
+              <a:tblPr firstRow="1" bandRow="1">
+                <a:tableStyleId>{5C22544A-7EE6-4342-B048-85BDC9FD1C3A}</a:tableStyleId>
+              </a:tblPr>
+              <a:tblGrid>
+                <a:gridCol w="3100564"/>
+                <a:gridCol w="2735791"/>
+                <a:gridCol w="2188633"/>
+                <a:gridCol w="3343745"/>
+              </a:tblGrid>
+              <a:tr h="468630">
+                <a:tc>
+                  <a:txBody>
+                    <a:bodyPr wrap="square"/>
+                    <a:lstStyle/>
+                    <a:p>
+                      <a:r>
+                        <a:rPr sz="1100" b="1">
+                          <a:solidFill>
+                            <a:srgbClr val="FFFFFF"/>
+                          </a:solidFill>
+                          <a:latin typeface="Arial"/>
+                        </a:rPr>
+                        <a:t>rows on the 30 nm surface, matrix on it (four-step)</a:t>
+                      </a:r>
+                    </a:p>
+                  </a:txBody>
+                  <a:tcPr marL="54864" marR="54864" marT="18288" marB="18288">
+                    <a:solidFill>
+                      <a:srgbClr val="1F4E79"/>
+                    </a:solidFill>
+                  </a:tcPr>
+                </a:tc>
+                <a:tc>
+                  <a:txBody>
+                    <a:bodyPr wrap="square"/>
+                    <a:lstStyle/>
+                    <a:p>
+                      <a:r>
+                        <a:rPr sz="1100" b="1">
+                          <a:solidFill>
+                            <a:srgbClr val="FFFFFF"/>
+                          </a:solidFill>
+                          <a:latin typeface="Arial"/>
+                        </a:rPr>
+                        <a:t>lens rig, seed tail, substrates in</a:t>
+                      </a:r>
+                    </a:p>
+                  </a:txBody>
+                  <a:tcPr marL="54864" marR="54864" marT="18288" marB="18288">
+                    <a:solidFill>
+                      <a:srgbClr val="1F4E79"/>
+                    </a:solidFill>
+                  </a:tcPr>
+                </a:tc>
+                <a:tc>
+                  <a:txBody>
+                    <a:bodyPr wrap="square"/>
+                    <a:lstStyle/>
+                    <a:p>
+                      <a:r>
+                        <a:rPr sz="1100" b="1">
+                          <a:solidFill>
+                            <a:srgbClr val="FFFFFF"/>
+                          </a:solidFill>
+                          <a:latin typeface="Arial"/>
+                        </a:rPr>
+                        <a:t>mirror rig, seed tail, substrates in</a:t>
+                      </a:r>
+                    </a:p>
+                  </a:txBody>
+                  <a:tcPr marL="54864" marR="54864" marT="18288" marB="18288">
+                    <a:solidFill>
+                      <a:srgbClr val="1F4E79"/>
+                    </a:solidFill>
+                  </a:tcPr>
+                </a:tc>
+                <a:tc>
+                  <a:txBody>
+                    <a:bodyPr wrap="square"/>
+                    <a:lstStyle/>
+                    <a:p>
+                      <a:r>
+                        <a:rPr sz="1100" b="1">
+                          <a:solidFill>
+                            <a:srgbClr val="FFFFFF"/>
+                          </a:solidFill>
+                          <a:latin typeface="Arial"/>
+                        </a:rPr>
+                        <a:t>the record (tuned tail, no substrates, 77 / 82 mm beam)</a:t>
+                      </a:r>
+                    </a:p>
+                  </a:txBody>
+                  <a:tcPr marL="54864" marR="54864" marT="18288" marB="18288">
+                    <a:solidFill>
+                      <a:srgbClr val="1F4E79"/>
+                    </a:solidFill>
+                  </a:tcPr>
+                </a:tc>
+              </a:tr>
+              <a:tr h="280035">
+                <a:tc>
+                  <a:txBody>
+                    <a:bodyPr wrap="square"/>
+                    <a:lstStyle/>
+                    <a:p>
+                      <a:r>
+                        <a:rPr sz="1100" b="0">
+                          <a:solidFill>
+                            <a:srgbClr val="282828"/>
+                          </a:solidFill>
+                          <a:latin typeface="Arial"/>
+                        </a:rPr>
+                        <a:t>flat-mirror null</a:t>
+                      </a:r>
+                    </a:p>
+                  </a:txBody>
+                  <a:tcPr marL="54864" marR="54864" marT="18288" marB="18288">
+                    <a:solidFill>
+                      <a:srgbClr val="FFFFFF"/>
+                    </a:solidFill>
+                  </a:tcPr>
+                </a:tc>
+                <a:tc>
+                  <a:txBody>
+                    <a:bodyPr wrap="square"/>
+                    <a:lstStyle/>
+                    <a:p>
+                      <a:r>
+                        <a:rPr sz="1100" b="0">
+                          <a:solidFill>
+                            <a:srgbClr val="282828"/>
+                          </a:solidFill>
+                          <a:latin typeface="Arial"/>
+                        </a:rPr>
+                        <a:t>92.4 nm rms</a:t>
+                      </a:r>
+                    </a:p>
+                  </a:txBody>
+                  <a:tcPr marL="54864" marR="54864" marT="18288" marB="18288">
+                    <a:solidFill>
+                      <a:srgbClr val="FFFFFF"/>
+                    </a:solidFill>
+                  </a:tcPr>
+                </a:tc>
+                <a:tc>
+                  <a:txBody>
+                    <a:bodyPr wrap="square"/>
+                    <a:lstStyle/>
+                    <a:p>
+                      <a:r>
+                        <a:rPr sz="1100" b="0">
+                          <a:solidFill>
+                            <a:srgbClr val="282828"/>
+                          </a:solidFill>
+                          <a:latin typeface="Arial"/>
+                        </a:rPr>
+                        <a:t>26.3 nm</a:t>
+                      </a:r>
+                    </a:p>
+                  </a:txBody>
+                  <a:tcPr marL="54864" marR="54864" marT="18288" marB="18288">
+                    <a:solidFill>
+                      <a:srgbClr val="FFFFFF"/>
+                    </a:solidFill>
+                  </a:tcPr>
+                </a:tc>
+                <a:tc>
+                  <a:txBody>
+                    <a:bodyPr wrap="square"/>
+                    <a:lstStyle/>
+                    <a:p>
+                      <a:r>
+                        <a:rPr sz="1100" b="0">
+                          <a:solidFill>
+                            <a:srgbClr val="282828"/>
+                          </a:solidFill>
+                          <a:latin typeface="Arial"/>
+                        </a:rPr>
+                        <a:t>0.13 nm lens / 0.03 mirrors</a:t>
+                      </a:r>
+                    </a:p>
+                  </a:txBody>
+                  <a:tcPr marL="54864" marR="54864" marT="18288" marB="18288">
+                    <a:solidFill>
+                      <a:srgbClr val="FFFFFF"/>
+                    </a:solidFill>
+                  </a:tcPr>
+                </a:tc>
+              </a:tr>
+              <a:tr h="280035">
+                <a:tc>
+                  <a:txBody>
+                    <a:bodyPr wrap="square"/>
+                    <a:lstStyle/>
+                    <a:p>
+                      <a:r>
+                        <a:rPr sz="1100" b="0">
+                          <a:solidFill>
+                            <a:srgbClr val="282828"/>
+                          </a:solidFill>
+                          <a:latin typeface="Arial"/>
+                        </a:rPr>
+                        <a:t>10 nm on one actuator: gain / error / SNR</a:t>
+                      </a:r>
+                    </a:p>
+                  </a:txBody>
+                  <a:tcPr marL="54864" marR="54864" marT="18288" marB="18288">
+                    <a:solidFill>
+                      <a:srgbClr val="ECF1F6"/>
+                    </a:solidFill>
+                  </a:tcPr>
+                </a:tc>
+                <a:tc>
+                  <a:txBody>
+                    <a:bodyPr wrap="square"/>
+                    <a:lstStyle/>
+                    <a:p>
+                      <a:r>
+                        <a:rPr sz="1100" b="0">
+                          <a:solidFill>
+                            <a:srgbClr val="282828"/>
+                          </a:solidFill>
+                          <a:latin typeface="Arial"/>
+                        </a:rPr>
+                        <a:t>1.003 / 1 pm / 10645</a:t>
+                      </a:r>
+                    </a:p>
+                  </a:txBody>
+                  <a:tcPr marL="54864" marR="54864" marT="18288" marB="18288">
+                    <a:solidFill>
+                      <a:srgbClr val="ECF1F6"/>
+                    </a:solidFill>
+                  </a:tcPr>
+                </a:tc>
+                <a:tc>
+                  <a:txBody>
+                    <a:bodyPr wrap="square"/>
+                    <a:lstStyle/>
+                    <a:p>
+                      <a:r>
+                        <a:rPr sz="1100" b="0">
+                          <a:solidFill>
+                            <a:srgbClr val="282828"/>
+                          </a:solidFill>
+                          <a:latin typeface="Arial"/>
+                        </a:rPr>
+                        <a:t>0.986 / 2.2 pm / 6472</a:t>
+                      </a:r>
+                    </a:p>
+                  </a:txBody>
+                  <a:tcPr marL="54864" marR="54864" marT="18288" marB="18288">
+                    <a:solidFill>
+                      <a:srgbClr val="ECF1F6"/>
+                    </a:solidFill>
+                  </a:tcPr>
+                </a:tc>
+                <a:tc>
+                  <a:txBody>
+                    <a:bodyPr wrap="square"/>
+                    <a:lstStyle/>
+                    <a:p>
+                      <a:r>
+                        <a:rPr sz="1100" b="0">
+                          <a:solidFill>
+                            <a:srgbClr val="282828"/>
+                          </a:solidFill>
+                          <a:latin typeface="Arial"/>
+                        </a:rPr>
+                        <a:t>0.992 / 2.2 pm (lens), 0.992 / 2.4 (mirrors)</a:t>
+                      </a:r>
+                    </a:p>
+                  </a:txBody>
+                  <a:tcPr marL="54864" marR="54864" marT="18288" marB="18288">
+                    <a:solidFill>
+                      <a:srgbClr val="ECF1F6"/>
+                    </a:solidFill>
+                  </a:tcPr>
+                </a:tc>
+              </a:tr>
+              <a:tr h="280035">
+                <a:tc>
+                  <a:txBody>
+                    <a:bodyPr wrap="square"/>
+                    <a:lstStyle/>
+                    <a:p>
+                      <a:r>
+                        <a:rPr sz="1100" b="0">
+                          <a:solidFill>
+                            <a:srgbClr val="282828"/>
+                          </a:solidFill>
+                          <a:latin typeface="Arial"/>
+                        </a:rPr>
+                        <a:t>1 nm on a 112-site grid</a:t>
+                      </a:r>
+                    </a:p>
+                  </a:txBody>
+                  <a:tcPr marL="54864" marR="54864" marT="18288" marB="18288">
+                    <a:solidFill>
+                      <a:srgbClr val="FFFFFF"/>
+                    </a:solidFill>
+                  </a:tcPr>
+                </a:tc>
+                <a:tc>
+                  <a:txBody>
+                    <a:bodyPr wrap="square"/>
+                    <a:lstStyle/>
+                    <a:p>
+                      <a:r>
+                        <a:rPr sz="1100" b="0">
+                          <a:solidFill>
+                            <a:srgbClr val="282828"/>
+                          </a:solidFill>
+                          <a:latin typeface="Arial"/>
+                        </a:rPr>
+                        <a:t>0.754 / 61.5 pm / 135</a:t>
+                      </a:r>
+                    </a:p>
+                  </a:txBody>
+                  <a:tcPr marL="54864" marR="54864" marT="18288" marB="18288">
+                    <a:solidFill>
+                      <a:srgbClr val="FFFFFF"/>
+                    </a:solidFill>
+                  </a:tcPr>
+                </a:tc>
+                <a:tc>
+                  <a:txBody>
+                    <a:bodyPr wrap="square"/>
+                    <a:lstStyle/>
+                    <a:p>
+                      <a:r>
+                        <a:rPr sz="1100" b="0">
+                          <a:solidFill>
+                            <a:srgbClr val="282828"/>
+                          </a:solidFill>
+                          <a:latin typeface="Arial"/>
+                        </a:rPr>
+                        <a:t>0.981 / 4.5 pm / 309</a:t>
+                      </a:r>
+                    </a:p>
+                  </a:txBody>
+                  <a:tcPr marL="54864" marR="54864" marT="18288" marB="18288">
+                    <a:solidFill>
+                      <a:srgbClr val="FFFFFF"/>
+                    </a:solidFill>
+                  </a:tcPr>
+                </a:tc>
+                <a:tc>
+                  <a:txBody>
+                    <a:bodyPr wrap="square"/>
+                    <a:lstStyle/>
+                    <a:p>
+                      <a:r>
+                        <a:rPr sz="1100" b="0">
+                          <a:solidFill>
+                            <a:srgbClr val="282828"/>
+                          </a:solidFill>
+                          <a:latin typeface="Arial"/>
+                        </a:rPr>
+                        <a:t>0.999 / 4 pm</a:t>
+                      </a:r>
+                    </a:p>
+                  </a:txBody>
+                  <a:tcPr marL="54864" marR="54864" marT="18288" marB="18288">
+                    <a:solidFill>
+                      <a:srgbClr val="FFFFFF"/>
+                    </a:solidFill>
+                  </a:tcPr>
+                </a:tc>
+              </a:tr>
+              <a:tr h="468630">
+                <a:tc>
+                  <a:txBody>
+                    <a:bodyPr wrap="square"/>
+                    <a:lstStyle/>
+                    <a:p>
+                      <a:r>
+                        <a:rPr sz="1100" b="0">
+                          <a:solidFill>
+                            <a:srgbClr val="282828"/>
+                          </a:solidFill>
+                          <a:latin typeface="Arial"/>
+                        </a:rPr>
+                        <a:t>capture to 10%, single site / grid</a:t>
+                      </a:r>
+                    </a:p>
+                  </a:txBody>
+                  <a:tcPr marL="54864" marR="54864" marT="18288" marB="18288">
+                    <a:solidFill>
+                      <a:srgbClr val="ECF1F6"/>
+                    </a:solidFill>
+                  </a:tcPr>
+                </a:tc>
+                <a:tc>
+                  <a:txBody>
+                    <a:bodyPr wrap="square"/>
+                    <a:lstStyle/>
+                    <a:p>
+                      <a:r>
+                        <a:rPr sz="1100" b="0">
+                          <a:solidFill>
+                            <a:srgbClr val="282828"/>
+                          </a:solidFill>
+                          <a:latin typeface="Arial"/>
+                        </a:rPr>
+                        <a:t>480 nm and beyond / outside at the first rung</a:t>
+                      </a:r>
+                    </a:p>
+                  </a:txBody>
+                  <a:tcPr marL="54864" marR="54864" marT="18288" marB="18288">
+                    <a:solidFill>
+                      <a:srgbClr val="ECF1F6"/>
+                    </a:solidFill>
+                  </a:tcPr>
+                </a:tc>
+                <a:tc>
+                  <a:txBody>
+                    <a:bodyPr wrap="square"/>
+                    <a:lstStyle/>
+                    <a:p>
+                      <a:r>
+                        <a:rPr sz="1100" b="0">
+                          <a:solidFill>
+                            <a:srgbClr val="282828"/>
+                          </a:solidFill>
+                          <a:latin typeface="Arial"/>
+                        </a:rPr>
+                        <a:t>480 and beyond / 480 and beyond</a:t>
+                      </a:r>
+                    </a:p>
+                  </a:txBody>
+                  <a:tcPr marL="54864" marR="54864" marT="18288" marB="18288">
+                    <a:solidFill>
+                      <a:srgbClr val="ECF1F6"/>
+                    </a:solidFill>
+                  </a:tcPr>
+                </a:tc>
+                <a:tc>
+                  <a:txBody>
+                    <a:bodyPr wrap="square"/>
+                    <a:lstStyle/>
+                    <a:p>
+                      <a:r>
+                        <a:rPr sz="1100" b="0">
+                          <a:solidFill>
+                            <a:srgbClr val="282828"/>
+                          </a:solidFill>
+                          <a:latin typeface="Arial"/>
+                        </a:rPr>
+                        <a:t>322 / 480 and beyond</a:t>
+                      </a:r>
+                    </a:p>
+                  </a:txBody>
+                  <a:tcPr marL="54864" marR="54864" marT="18288" marB="18288">
+                    <a:solidFill>
+                      <a:srgbClr val="ECF1F6"/>
+                    </a:solidFill>
+                  </a:tcPr>
+                </a:tc>
+              </a:tr>
+              <a:tr h="280035">
+                <a:tc>
+                  <a:txBody>
+                    <a:bodyPr wrap="square"/>
+                    <a:lstStyle/>
+                    <a:p>
+                      <a:r>
+                        <a:rPr sz="1100" b="0">
+                          <a:solidFill>
+                            <a:srgbClr val="282828"/>
+                          </a:solidFill>
+                          <a:latin typeface="Arial"/>
+                        </a:rPr>
+                        <a:t>pupil image on the 96 mm beam</a:t>
+                      </a:r>
+                    </a:p>
+                  </a:txBody>
+                  <a:tcPr marL="54864" marR="54864" marT="18288" marB="18288">
+                    <a:solidFill>
+                      <a:srgbClr val="FFFFFF"/>
+                    </a:solidFill>
+                  </a:tcPr>
+                </a:tc>
+                <a:tc>
+                  <a:txBody>
+                    <a:bodyPr wrap="square"/>
+                    <a:lstStyle/>
+                    <a:p>
+                      <a:r>
+                        <a:rPr sz="1100" b="0">
+                          <a:solidFill>
+                            <a:srgbClr val="282828"/>
+                          </a:solidFill>
+                          <a:latin typeface="Arial"/>
+                        </a:rPr>
+                        <a:t>9.5 mm (341 px)</a:t>
+                      </a:r>
+                    </a:p>
+                  </a:txBody>
+                  <a:tcPr marL="54864" marR="54864" marT="18288" marB="18288">
+                    <a:solidFill>
+                      <a:srgbClr val="FFFFFF"/>
+                    </a:solidFill>
+                  </a:tcPr>
+                </a:tc>
+                <a:tc>
+                  <a:txBody>
+                    <a:bodyPr wrap="square"/>
+                    <a:lstStyle/>
+                    <a:p>
+                      <a:r>
+                        <a:rPr sz="1100" b="0">
+                          <a:solidFill>
+                            <a:srgbClr val="282828"/>
+                          </a:solidFill>
+                          <a:latin typeface="Arial"/>
+                        </a:rPr>
+                        <a:t>11.1 mm (384 px)</a:t>
+                      </a:r>
+                    </a:p>
+                  </a:txBody>
+                  <a:tcPr marL="54864" marR="54864" marT="18288" marB="18288">
+                    <a:solidFill>
+                      <a:srgbClr val="FFFFFF"/>
+                    </a:solidFill>
+                  </a:tcPr>
+                </a:tc>
+                <a:tc>
+                  <a:txBody>
+                    <a:bodyPr wrap="square"/>
+                    <a:lstStyle/>
+                    <a:p>
+                      <a:r>
+                        <a:rPr sz="1100" b="0">
+                          <a:solidFill>
+                            <a:srgbClr val="282828"/>
+                          </a:solidFill>
+                          <a:latin typeface="Arial"/>
+                        </a:rPr>
+                        <a:t>7.8 / 8.0 mm</a:t>
+                      </a:r>
+                    </a:p>
+                  </a:txBody>
+                  <a:tcPr marL="54864" marR="54864" marT="18288" marB="18288">
+                    <a:solidFill>
+                      <a:srgbClr val="FFFFFF"/>
+                    </a:solidFill>
+                  </a:tcPr>
+                </a:tc>
+              </a:tr>
+            </a:tbl>
+          </a:graphicData>
+        </a:graphic>
+      </p:graphicFrame>
+      <p:sp>
+        <p:nvSpPr>
+          <p:cNvPr id="5" name="TextBox 4"/>
+          <p:cNvSpPr txBox="1"/>
+          <p:nvPr/>
+        </p:nvSpPr>
+        <p:spPr>
+          <a:xfrm>
+            <a:off x="411480" y="3502152"/>
+            <a:ext cx="11368735" cy="274320"/>
+          </a:xfrm>
+          <a:prstGeom prst="rect">
+            <a:avLst/>
+          </a:prstGeom>
+          <a:noFill/>
+        </p:spPr>
+        <p:txBody>
+          <a:bodyPr wrap="square">
+            <a:spAutoFit/>
+          </a:bodyPr>
+          <a:lstStyle/>
+          <a:p>
+            <a:pPr>
+              <a:spcAft>
+                <a:spcPts val="600"/>
+              </a:spcAft>
+            </a:pPr>
+            <a:r>
+              <a:rPr sz="1500" b="0">
+                <a:solidFill>
+                  <a:srgbClr val="282828"/>
+                </a:solidFill>
+                <a:latin typeface="Arial"/>
+              </a:rPr>
+              <a:t>•  Read it as the redo's justification: with the 10 mm plates and the 2 mm windows in, the seed tail's null on the lens rig's misfed collimator reaches 92 nm, a third of a wave of wavefront, and the 112-site row at 1 nm falls to 0.75 through the fold, while one actuator still reads to 1 pm.  Package A (the collimator at its focus, the tail tuned on the reading) is what restores it; the mirror rig, already fed at its focus, holds its rows at 0.98 to 0.99 with a 26 nm fixed-pattern null the reference frame removes.</a:t>
+            </a:r>
+          </a:p>
+          <a:p>
+            <a:pPr>
+              <a:spcAft>
+                <a:spcPts val="600"/>
+              </a:spcAft>
+            </a:pPr>
+            <a:r>
+              <a:rPr sz="1500" b="0">
+                <a:solidFill>
+                  <a:srgbClr val="282828"/>
+                </a:solidFill>
+                <a:latin typeface="Arial"/>
+              </a:rPr>
+              <a:t>•  One clearance line moved: with the thicker plates and the larger beam the compensator sits 16 mm from the source beam against the 25 mm rule; it moves down the DM leg in the redo.</a:t>
+            </a:r>
+          </a:p>
+        </p:txBody>
+      </p:sp>
+      <p:sp>
+        <p:nvSpPr>
+          <p:cNvPr id="6" name="TextBox 5"/>
+          <p:cNvSpPr txBox="1"/>
+          <p:nvPr/>
+        </p:nvSpPr>
+        <p:spPr>
+          <a:xfrm>
+            <a:off x="411480" y="5552694"/>
+            <a:ext cx="11368735" cy="274320"/>
+          </a:xfrm>
+          <a:prstGeom prst="rect">
+            <a:avLst/>
+          </a:prstGeom>
+          <a:noFill/>
+        </p:spPr>
+        <p:txBody>
+          <a:bodyPr wrap="square">
+            <a:spAutoFit/>
+          </a:bodyPr>
+          <a:lstStyle/>
+          <a:p>
+            <a:pPr>
+              <a:spcAft>
+                <a:spcPts val="600"/>
+              </a:spcAft>
+            </a:pPr>
+            <a:r>
+              <a:rPr sz="1050" b="0">
+                <a:solidFill>
+                  <a:srgbClr val="6E6E6E"/>
+                </a:solidFill>
+                <a:latin typeface="Arial"/>
+              </a:rPr>
+              <a:t>Run tags sub96_lens, sub96_oap (the Mac, RUNBOOK_mac_cycle3a); the pupil stage and the sensors at 385 on these decks follow.</a:t>
+            </a:r>
+          </a:p>
+        </p:txBody>
+      </p:sp>
+    </p:spTree>
+  </p:cSld>
+  <p:clrMapOvr>
+    <a:masterClrMapping/>
+  </p:clrMapOvr>
+</p:sld>
+</file>
+
+<file path=ppt/slides/slide46.xml><?xml version="1.0" encoding="utf-8"?>
+<p:sld xmlns:a="http://schemas.openxmlformats.org/drawingml/2006/main" xmlns:p="http://schemas.openxmlformats.org/presentationml/2006/main" xmlns:r="http://schemas.openxmlformats.org/officeDocument/2006/relationships">
+  <p:cSld>
+    <p:spTree>
+      <p:nvGrpSpPr>
+        <p:cNvPr id="1" name=""/>
+        <p:cNvGrpSpPr/>
+        <p:nvPr/>
+      </p:nvGrpSpPr>
+      <p:grpSpPr/>
+      <p:sp>
+        <p:nvSpPr>
+          <p:cNvPr id="2" name="TextBox 1"/>
+          <p:cNvSpPr txBox="1"/>
+          <p:nvPr/>
+        </p:nvSpPr>
+        <p:spPr>
+          <a:xfrm>
+            <a:off x="411480" y="201168"/>
+            <a:ext cx="11368735" cy="914400"/>
+          </a:xfrm>
+          <a:prstGeom prst="rect">
+            <a:avLst/>
+          </a:prstGeom>
+          <a:noFill/>
+        </p:spPr>
+        <p:txBody>
+          <a:bodyPr wrap="square">
+            <a:spAutoFit/>
+          </a:bodyPr>
+          <a:lstStyle/>
+          <a:p>
+            <a:pPr>
+              <a:spcAft>
+                <a:spcPts val="400"/>
+              </a:spcAft>
+            </a:pPr>
+            <a:r>
+              <a:rPr sz="2400" b="1">
+                <a:solidFill>
+                  <a:srgbClr val="1F4E79"/>
+                </a:solidFill>
+                <a:latin typeface="Arial"/>
+              </a:rPr>
               <a:t>Backup: the interferometer on the mirror rig</a:t>
             </a:r>
           </a:p>
@@ -26287,7 +27067,7 @@
 </p:sld>
 </file>
 
-<file path=ppt/slides/slide46.xml><?xml version="1.0" encoding="utf-8"?>
+<file path=ppt/slides/slide47.xml><?xml version="1.0" encoding="utf-8"?>
 <p:sld xmlns:a="http://schemas.openxmlformats.org/drawingml/2006/main" xmlns:p="http://schemas.openxmlformats.org/presentationml/2006/main" xmlns:r="http://schemas.openxmlformats.org/officeDocument/2006/relationships">
   <p:cSld>
     <p:spTree>
@@ -26577,7 +27357,7 @@
 </p:sld>
 </file>
 
-<file path=ppt/slides/slide47.xml><?xml version="1.0" encoding="utf-8"?>
+<file path=ppt/slides/slide48.xml><?xml version="1.0" encoding="utf-8"?>
 <p:sld xmlns:a="http://schemas.openxmlformats.org/drawingml/2006/main" xmlns:p="http://schemas.openxmlformats.org/presentationml/2006/main" xmlns:r="http://schemas.openxmlformats.org/officeDocument/2006/relationships">
   <p:cSld>
     <p:spTree>
@@ -27433,7 +28213,7 @@
 </p:sld>
 </file>
 
-<file path=ppt/slides/slide48.xml><?xml version="1.0" encoding="utf-8"?>
+<file path=ppt/slides/slide49.xml><?xml version="1.0" encoding="utf-8"?>
 <p:sld xmlns:a="http://schemas.openxmlformats.org/drawingml/2006/main" xmlns:p="http://schemas.openxmlformats.org/presentationml/2006/main" xmlns:r="http://schemas.openxmlformats.org/officeDocument/2006/relationships">
   <p:cSld>
     <p:spTree>
@@ -28482,668 +29262,6 @@
                 <a:latin typeface="Arial"/>
               </a:rPr>
               <a:t>Run tags intra193_0, intra193, pcam193, pcam193r, pcam193ri, rw193_1e3/1e2/1e1, loop_lens_intra, loop_lens_cam.</a:t>
-            </a:r>
-          </a:p>
-        </p:txBody>
-      </p:sp>
-    </p:spTree>
-  </p:cSld>
-  <p:clrMapOvr>
-    <a:masterClrMapping/>
-  </p:clrMapOvr>
-</p:sld>
-</file>
-
-<file path=ppt/slides/slide49.xml><?xml version="1.0" encoding="utf-8"?>
-<p:sld xmlns:a="http://schemas.openxmlformats.org/drawingml/2006/main" xmlns:p="http://schemas.openxmlformats.org/presentationml/2006/main" xmlns:r="http://schemas.openxmlformats.org/officeDocument/2006/relationships">
-  <p:cSld>
-    <p:spTree>
-      <p:nvGrpSpPr>
-        <p:cNvPr id="1" name=""/>
-        <p:cNvGrpSpPr/>
-        <p:nvPr/>
-      </p:nvGrpSpPr>
-      <p:grpSpPr/>
-      <p:sp>
-        <p:nvSpPr>
-          <p:cNvPr id="2" name="TextBox 1"/>
-          <p:cNvSpPr txBox="1"/>
-          <p:nvPr/>
-        </p:nvSpPr>
-        <p:spPr>
-          <a:xfrm>
-            <a:off x="411480" y="201168"/>
-            <a:ext cx="11368735" cy="914400"/>
-          </a:xfrm>
-          <a:prstGeom prst="rect">
-            <a:avLst/>
-          </a:prstGeom>
-          <a:noFill/>
-        </p:spPr>
-        <p:txBody>
-          <a:bodyPr wrap="square">
-            <a:spAutoFit/>
-          </a:bodyPr>
-          <a:lstStyle/>
-          <a:p>
-            <a:pPr>
-              <a:spcAft>
-                <a:spcPts val="400"/>
-              </a:spcAft>
-            </a:pPr>
-            <a:r>
-              <a:rPr sz="2400" b="1">
-                <a:solidFill>
-                  <a:srgbClr val="1F4E79"/>
-                </a:solidFill>
-                <a:latin typeface="Arial"/>
-              </a:rPr>
-              <a:t>Backup: the vector sensor's polarization terms</a:t>
-            </a:r>
-          </a:p>
-          <a:p>
-            <a:pPr>
-              <a:spcAft>
-                <a:spcPts val="0"/>
-              </a:spcAft>
-            </a:pPr>
-            <a:r>
-              <a:rPr sz="1250" b="0">
-                <a:solidFill>
-                  <a:srgbClr val="6E6E6E"/>
-                </a:solidFill>
-                <a:latin typeface="Arial"/>
-              </a:rPr>
-              <a:t>The metasurface's retardance error, the arm's polarization aberration, and the analyzer, each from the engine's polarized traces of this bench</a:t>
-            </a:r>
-          </a:p>
-        </p:txBody>
-      </p:sp>
-      <p:sp>
-        <p:nvSpPr>
-          <p:cNvPr id="3" name="Rectangle 2"/>
-          <p:cNvSpPr/>
-          <p:nvPr/>
-        </p:nvSpPr>
-        <p:spPr>
-          <a:xfrm>
-            <a:off x="411480" y="1133856"/>
-            <a:ext cx="11368735" cy="20320"/>
-          </a:xfrm>
-          <a:prstGeom prst="rect">
-            <a:avLst/>
-          </a:prstGeom>
-          <a:solidFill>
-            <a:srgbClr val="B8C6D4"/>
-          </a:solidFill>
-          <a:ln>
-            <a:noFill/>
-          </a:ln>
-          <a:effectLst/>
-        </p:spPr>
-        <p:style>
-          <a:lnRef idx="1">
-            <a:schemeClr val="accent1"/>
-          </a:lnRef>
-          <a:fillRef idx="3">
-            <a:schemeClr val="accent1"/>
-          </a:fillRef>
-          <a:effectRef idx="2">
-            <a:schemeClr val="accent1"/>
-          </a:effectRef>
-          <a:fontRef idx="minor">
-            <a:schemeClr val="lt1"/>
-          </a:fontRef>
-        </p:style>
-        <p:txBody>
-          <a:bodyPr rtlCol="0" anchor="ctr"/>
-          <a:lstStyle/>
-          <a:p>
-            <a:pPr algn="ctr"/>
-          </a:p>
-        </p:txBody>
-      </p:sp>
-      <p:graphicFrame>
-        <p:nvGraphicFramePr>
-          <p:cNvPr id="4" name="Table 3"/>
-          <p:cNvGraphicFramePr>
-            <a:graphicFrameLocks noGrp="1"/>
-          </p:cNvGraphicFramePr>
-          <p:nvPr/>
-        </p:nvGraphicFramePr>
-        <p:xfrm>
-          <a:off x="411480" y="1298448"/>
-          <a:ext cx="5806439" cy="3377565"/>
-        </p:xfrm>
-        <a:graphic>
-          <a:graphicData uri="http://schemas.openxmlformats.org/drawingml/2006/table">
-            <a:tbl>
-              <a:tblPr firstRow="1" bandRow="1">
-                <a:tableStyleId>{5C22544A-7EE6-4342-B048-85BDC9FD1C3A}</a:tableStyleId>
-              </a:tblPr>
-              <a:tblGrid>
-                <a:gridCol w="1924420"/>
-                <a:gridCol w="1824881"/>
-                <a:gridCol w="2057138"/>
-              </a:tblGrid>
-              <a:tr h="468630">
-                <a:tc>
-                  <a:txBody>
-                    <a:bodyPr wrap="square"/>
-                    <a:lstStyle/>
-                    <a:p>
-                      <a:r>
-                        <a:rPr sz="1100" b="1">
-                          <a:solidFill>
-                            <a:srgbClr val="FFFFFF"/>
-                          </a:solidFill>
-                          <a:latin typeface="Arial"/>
-                        </a:rPr>
-                        <a:t>term</a:t>
-                      </a:r>
-                    </a:p>
-                  </a:txBody>
-                  <a:tcPr marL="54864" marR="54864" marT="18288" marB="18288">
-                    <a:solidFill>
-                      <a:srgbClr val="1F4E79"/>
-                    </a:solidFill>
-                  </a:tcPr>
-                </a:tc>
-                <a:tc>
-                  <a:txBody>
-                    <a:bodyPr wrap="square"/>
-                    <a:lstStyle/>
-                    <a:p>
-                      <a:r>
-                        <a:rPr sz="1100" b="1">
-                          <a:solidFill>
-                            <a:srgbClr val="FFFFFF"/>
-                          </a:solidFill>
-                          <a:latin typeface="Arial"/>
-                        </a:rPr>
-                        <a:t>uncalibrated, on 100 nm pokes (12 nm rms)</a:t>
-                      </a:r>
-                    </a:p>
-                  </a:txBody>
-                  <a:tcPr marL="54864" marR="54864" marT="18288" marB="18288">
-                    <a:solidFill>
-                      <a:srgbClr val="1F4E79"/>
-                    </a:solidFill>
-                  </a:tcPr>
-                </a:tc>
-                <a:tc>
-                  <a:txBody>
-                    <a:bodyPr wrap="square"/>
-                    <a:lstStyle/>
-                    <a:p>
-                      <a:r>
-                        <a:rPr sz="1100" b="1">
-                          <a:solidFill>
-                            <a:srgbClr val="FFFFFF"/>
-                          </a:solidFill>
-                          <a:latin typeface="Arial"/>
-                        </a:rPr>
-                        <a:t>through the matrix measured on the surface</a:t>
-                      </a:r>
-                    </a:p>
-                  </a:txBody>
-                  <a:tcPr marL="54864" marR="54864" marT="18288" marB="18288">
-                    <a:solidFill>
-                      <a:srgbClr val="1F4E79"/>
-                    </a:solidFill>
-                  </a:tcPr>
-                </a:tc>
-              </a:tr>
-              <a:tr h="657225">
-                <a:tc>
-                  <a:txBody>
-                    <a:bodyPr wrap="square"/>
-                    <a:lstStyle/>
-                    <a:p>
-                      <a:r>
-                        <a:rPr sz="1100" b="0">
-                          <a:solidFill>
-                            <a:srgbClr val="282828"/>
-                          </a:solidFill>
-                          <a:latin typeface="Arial"/>
-                        </a:rPr>
-                        <a:t>metasurface retardance error 0.02 / 0.05 / 0.10 / 0.20 rad</a:t>
-                      </a:r>
-                    </a:p>
-                  </a:txBody>
-                  <a:tcPr marL="54864" marR="54864" marT="18288" marB="18288">
-                    <a:solidFill>
-                      <a:srgbClr val="FFFFFF"/>
-                    </a:solidFill>
-                  </a:tcPr>
-                </a:tc>
-                <a:tc>
-                  <a:txBody>
-                    <a:bodyPr wrap="square"/>
-                    <a:lstStyle/>
-                    <a:p>
-                      <a:r>
-                        <a:rPr sz="1100" b="0">
-                          <a:solidFill>
-                            <a:srgbClr val="282828"/>
-                          </a:solidFill>
-                          <a:latin typeface="Arial"/>
-                        </a:rPr>
-                        <a:t>153 / 380 / 750 / 1461 pm</a:t>
-                      </a:r>
-                    </a:p>
-                  </a:txBody>
-                  <a:tcPr marL="54864" marR="54864" marT="18288" marB="18288">
-                    <a:solidFill>
-                      <a:srgbClr val="FFFFFF"/>
-                    </a:solidFill>
-                  </a:tcPr>
-                </a:tc>
-                <a:tc>
-                  <a:txBody>
-                    <a:bodyPr wrap="square"/>
-                    <a:lstStyle/>
-                    <a:p>
-                      <a:r>
-                        <a:rPr sz="1100" b="0">
-                          <a:solidFill>
-                            <a:srgbClr val="282828"/>
-                          </a:solidFill>
-                          <a:latin typeface="Arial"/>
-                        </a:rPr>
-                        <a:t>0.9934 / 4 pm at 0.10 and 0.20: the ideal rows</a:t>
-                      </a:r>
-                    </a:p>
-                  </a:txBody>
-                  <a:tcPr marL="54864" marR="54864" marT="18288" marB="18288">
-                    <a:solidFill>
-                      <a:srgbClr val="FFFFFF"/>
-                    </a:solidFill>
-                  </a:tcPr>
-                </a:tc>
-              </a:tr>
-              <a:tr h="657225">
-                <a:tc>
-                  <a:txBody>
-                    <a:bodyPr wrap="square"/>
-                    <a:lstStyle/>
-                    <a:p>
-                      <a:r>
-                        <a:rPr sz="1100" b="0">
-                          <a:solidFill>
-                            <a:srgbClr val="282828"/>
-                          </a:solidFill>
-                          <a:latin typeface="Arial"/>
-                        </a:rPr>
-                        <a:t>the arm, laser at 45° / 0° / 90° to the fold plane</a:t>
-                      </a:r>
-                    </a:p>
-                  </a:txBody>
-                  <a:tcPr marL="54864" marR="54864" marT="18288" marB="18288">
-                    <a:solidFill>
-                      <a:srgbClr val="ECF1F6"/>
-                    </a:solidFill>
-                  </a:tcPr>
-                </a:tc>
-                <a:tc>
-                  <a:txBody>
-                    <a:bodyPr wrap="square"/>
-                    <a:lstStyle/>
-                    <a:p>
-                      <a:r>
-                        <a:rPr sz="1100" b="0">
-                          <a:solidFill>
-                            <a:srgbClr val="282828"/>
-                          </a:solidFill>
-                          <a:latin typeface="Arial"/>
-                        </a:rPr>
-                        <a:t>9.0 / 17.2 / 11.2 pm (ideal 0.05)</a:t>
-                      </a:r>
-                    </a:p>
-                  </a:txBody>
-                  <a:tcPr marL="54864" marR="54864" marT="18288" marB="18288">
-                    <a:solidFill>
-                      <a:srgbClr val="ECF1F6"/>
-                    </a:solidFill>
-                  </a:tcPr>
-                </a:tc>
-                <a:tc>
-                  <a:txBody>
-                    <a:bodyPr wrap="square"/>
-                    <a:lstStyle/>
-                    <a:p>
-                      <a:r>
-                        <a:rPr sz="1100" b="0">
-                          <a:solidFill>
-                            <a:srgbClr val="282828"/>
-                          </a:solidFill>
-                          <a:latin typeface="Arial"/>
-                        </a:rPr>
-                        <a:t>nothing through 0.1 rad of channel phase; 10% gain loss at 0.3</a:t>
-                      </a:r>
-                    </a:p>
-                  </a:txBody>
-                  <a:tcPr marL="54864" marR="54864" marT="18288" marB="18288">
-                    <a:solidFill>
-                      <a:srgbClr val="ECF1F6"/>
-                    </a:solidFill>
-                  </a:tcPr>
-                </a:tc>
-              </a:tr>
-              <a:tr h="657225">
-                <a:tc>
-                  <a:txBody>
-                    <a:bodyPr wrap="square"/>
-                    <a:lstStyle/>
-                    <a:p>
-                      <a:r>
-                        <a:rPr sz="1100" b="0">
-                          <a:solidFill>
-                            <a:srgbClr val="282828"/>
-                          </a:solidFill>
-                          <a:latin typeface="Arial"/>
-                        </a:rPr>
-                        <a:t>the arm, design scan: 6 nm per rad of channel phase</a:t>
-                      </a:r>
-                    </a:p>
-                  </a:txBody>
-                  <a:tcPr marL="54864" marR="54864" marT="18288" marB="18288">
-                    <a:solidFill>
-                      <a:srgbClr val="FFFFFF"/>
-                    </a:solidFill>
-                  </a:tcPr>
-                </a:tc>
-                <a:tc>
-                  <a:txBody>
-                    <a:bodyPr wrap="square"/>
-                    <a:lstStyle/>
-                    <a:p>
-                      <a:r>
-                        <a:rPr sz="1100" b="0">
-                          <a:solidFill>
-                            <a:srgbClr val="282828"/>
-                          </a:solidFill>
-                          <a:latin typeface="Arial"/>
-                        </a:rPr>
-                        <a:t>59 / 178 / 597 / 1877 pm at 0.01 / 0.03 / 0.1 / 0.3 rad</a:t>
-                      </a:r>
-                    </a:p>
-                  </a:txBody>
-                  <a:tcPr marL="54864" marR="54864" marT="18288" marB="18288">
-                    <a:solidFill>
-                      <a:srgbClr val="FFFFFF"/>
-                    </a:solidFill>
-                  </a:tcPr>
-                </a:tc>
-                <a:tc>
-                  <a:txBody>
-                    <a:bodyPr wrap="square"/>
-                    <a:lstStyle/>
-                    <a:p>
-                      <a:r>
-                        <a:rPr sz="1100" b="0">
-                          <a:solidFill>
-                            <a:srgbClr val="282828"/>
-                          </a:solidFill>
-                          <a:latin typeface="Arial"/>
-                        </a:rPr>
-                        <a:t>—</a:t>
-                      </a:r>
-                    </a:p>
-                  </a:txBody>
-                  <a:tcPr marL="54864" marR="54864" marT="18288" marB="18288">
-                    <a:solidFill>
-                      <a:srgbClr val="FFFFFF"/>
-                    </a:solidFill>
-                  </a:tcPr>
-                </a:tc>
-              </a:tr>
-              <a:tr h="468630">
-                <a:tc>
-                  <a:txBody>
-                    <a:bodyPr wrap="square"/>
-                    <a:lstStyle/>
-                    <a:p>
-                      <a:r>
-                        <a:rPr sz="1100" b="0">
-                          <a:solidFill>
-                            <a:srgbClr val="282828"/>
-                          </a:solidFill>
-                          <a:latin typeface="Arial"/>
-                        </a:rPr>
-                        <a:t>analyzer: cube extinction alone</a:t>
-                      </a:r>
-                    </a:p>
-                  </a:txBody>
-                  <a:tcPr marL="54864" marR="54864" marT="18288" marB="18288">
-                    <a:solidFill>
-                      <a:srgbClr val="ECF1F6"/>
-                    </a:solidFill>
-                  </a:tcPr>
-                </a:tc>
-                <a:tc>
-                  <a:txBody>
-                    <a:bodyPr wrap="square"/>
-                    <a:lstStyle/>
-                    <a:p>
-                      <a:r>
-                        <a:rPr sz="1100" b="0">
-                          <a:solidFill>
-                            <a:srgbClr val="282828"/>
-                          </a:solidFill>
-                          <a:latin typeface="Arial"/>
-                        </a:rPr>
-                        <a:t>3.5 pm</a:t>
-                      </a:r>
-                    </a:p>
-                  </a:txBody>
-                  <a:tcPr marL="54864" marR="54864" marT="18288" marB="18288">
-                    <a:solidFill>
-                      <a:srgbClr val="ECF1F6"/>
-                    </a:solidFill>
-                  </a:tcPr>
-                </a:tc>
-                <a:tc>
-                  <a:txBody>
-                    <a:bodyPr wrap="square"/>
-                    <a:lstStyle/>
-                    <a:p>
-                      <a:r>
-                        <a:rPr sz="1100" b="0">
-                          <a:solidFill>
-                            <a:srgbClr val="282828"/>
-                          </a:solidFill>
-                          <a:latin typeface="Arial"/>
-                        </a:rPr>
-                        <a:t>0.9934 / 4 pm</a:t>
-                      </a:r>
-                    </a:p>
-                  </a:txBody>
-                  <a:tcPr marL="54864" marR="54864" marT="18288" marB="18288">
-                    <a:solidFill>
-                      <a:srgbClr val="ECF1F6"/>
-                    </a:solidFill>
-                  </a:tcPr>
-                </a:tc>
-              </a:tr>
-              <a:tr h="468630">
-                <a:tc>
-                  <a:txBody>
-                    <a:bodyPr wrap="square"/>
-                    <a:lstStyle/>
-                    <a:p>
-                      <a:r>
-                        <a:rPr sz="1100" b="0">
-                          <a:solidFill>
-                            <a:srgbClr val="282828"/>
-                          </a:solidFill>
-                          <a:latin typeface="Arial"/>
-                        </a:rPr>
-                        <a:t>analyzer: plate λ/300; 1° azimuth; λ/100</a:t>
-                      </a:r>
-                    </a:p>
-                  </a:txBody>
-                  <a:tcPr marL="54864" marR="54864" marT="18288" marB="18288">
-                    <a:solidFill>
-                      <a:srgbClr val="FFFFFF"/>
-                    </a:solidFill>
-                  </a:tcPr>
-                </a:tc>
-                <a:tc>
-                  <a:txBody>
-                    <a:bodyPr wrap="square"/>
-                    <a:lstStyle/>
-                    <a:p>
-                      <a:r>
-                        <a:rPr sz="1100" b="0">
-                          <a:solidFill>
-                            <a:srgbClr val="282828"/>
-                          </a:solidFill>
-                          <a:latin typeface="Arial"/>
-                        </a:rPr>
-                        <a:t>165; 263; 496 pm</a:t>
-                      </a:r>
-                    </a:p>
-                  </a:txBody>
-                  <a:tcPr marL="54864" marR="54864" marT="18288" marB="18288">
-                    <a:solidFill>
-                      <a:srgbClr val="FFFFFF"/>
-                    </a:solidFill>
-                  </a:tcPr>
-                </a:tc>
-                <a:tc>
-                  <a:txBody>
-                    <a:bodyPr wrap="square"/>
-                    <a:lstStyle/>
-                    <a:p>
-                      <a:r>
-                        <a:rPr sz="1100" b="0">
-                          <a:solidFill>
-                            <a:srgbClr val="282828"/>
-                          </a:solidFill>
-                          <a:latin typeface="Arial"/>
-                        </a:rPr>
-                        <a:t>0.9932 / 4; 0.9932 / 4; 0.9928 / 4 pm</a:t>
-                      </a:r>
-                    </a:p>
-                  </a:txBody>
-                  <a:tcPr marL="54864" marR="54864" marT="18288" marB="18288">
-                    <a:solidFill>
-                      <a:srgbClr val="FFFFFF"/>
-                    </a:solidFill>
-                  </a:tcPr>
-                </a:tc>
-              </a:tr>
-            </a:tbl>
-          </a:graphicData>
-        </a:graphic>
-      </p:graphicFrame>
-      <p:sp>
-        <p:nvSpPr>
-          <p:cNvPr id="5" name="TextBox 4"/>
-          <p:cNvSpPr txBox="1"/>
-          <p:nvPr/>
-        </p:nvSpPr>
-        <p:spPr>
-          <a:xfrm>
-            <a:off x="6400800" y="1298448"/>
-            <a:ext cx="5394960" cy="274320"/>
-          </a:xfrm>
-          <a:prstGeom prst="rect">
-            <a:avLst/>
-          </a:prstGeom>
-          <a:noFill/>
-        </p:spPr>
-        <p:txBody>
-          <a:bodyPr wrap="square">
-            <a:spAutoFit/>
-          </a:bodyPr>
-          <a:lstStyle/>
-          <a:p>
-            <a:pPr>
-              <a:spcAft>
-                <a:spcPts val="600"/>
-              </a:spcAft>
-            </a:pPr>
-            <a:r>
-              <a:rPr sz="1200" b="0">
-                <a:solidFill>
-                  <a:srgbClr val="282828"/>
-                </a:solidFill>
-                <a:latin typeface="Arial"/>
-              </a:rPr>
-              <a:t>•  The arm: six 7° glass faces give 5e-3 diattenuation and 0.9 mrad retardance; because the Jones matrix is real, the two circular channels differ in phase only, 1.6 mrad rms at the worst laser angle and 2e-5 along the fold plane's axis.  Rule: specify pupil-varying diattenuation, put the laser on the eigenaxis.</a:t>
-            </a:r>
-          </a:p>
-          <a:p>
-            <a:pPr>
-              <a:spcAft>
-                <a:spcPts val="600"/>
-              </a:spcAft>
-            </a:pPr>
-            <a:r>
-              <a:rPr sz="1200" b="0">
-                <a:solidFill>
-                  <a:srgbClr val="282828"/>
-                </a:solidFill>
-                <a:latin typeface="Arial"/>
-              </a:rPr>
-              <a:t>•  The analyzer: a plate retardance error δ couples the two images with amplitude δ/2, an azimuth error θ with amplitude θ, engine-exact, opposite signs in the two ports; the cube's finite extinction adds 4-6e-4 incoherently.  Spec a zero-order plate at λ/300, azimuth to 1°.</a:t>
-            </a:r>
-          </a:p>
-          <a:p>
-            <a:pPr>
-              <a:spcAft>
-                <a:spcPts val="600"/>
-              </a:spcAft>
-            </a:pPr>
-            <a:r>
-              <a:rPr sz="1200" b="0">
-                <a:solidFill>
-                  <a:srgbClr val="282828"/>
-                </a:solidFill>
-                <a:latin typeface="Arial"/>
-              </a:rPr>
-              <a:t>•  A three-number fit on the flat's two images recovers the metasurface's constants to five digits (0.048 pm).</a:t>
-            </a:r>
-          </a:p>
-        </p:txBody>
-      </p:sp>
-      <p:sp>
-        <p:nvSpPr>
-          <p:cNvPr id="6" name="TextBox 5"/>
-          <p:cNvSpPr txBox="1"/>
-          <p:nvPr/>
-        </p:nvSpPr>
-        <p:spPr>
-          <a:xfrm>
-            <a:off x="6400800" y="3934967"/>
-            <a:ext cx="5394960" cy="274320"/>
-          </a:xfrm>
-          <a:prstGeom prst="rect">
-            <a:avLst/>
-          </a:prstGeom>
-          <a:noFill/>
-        </p:spPr>
-        <p:txBody>
-          <a:bodyPr wrap="square">
-            <a:spAutoFit/>
-          </a:bodyPr>
-          <a:lstStyle/>
-          <a:p>
-            <a:pPr>
-              <a:spcAft>
-                <a:spcPts val="600"/>
-              </a:spcAft>
-            </a:pPr>
-            <a:r>
-              <a:rPr sz="1050" b="0">
-                <a:solidFill>
-                  <a:srgbClr val="6E6E6E"/>
-                </a:solidFill>
-                <a:latin typeface="Arial"/>
-              </a:rPr>
-              <a:t>Run tags v2g, v2loop, v3arm, v3s, v3loop, an193_cube/q300/q100/az1; zwfs_dm96 README V2-V4.</a:t>
             </a:r>
           </a:p>
         </p:txBody>
@@ -30167,6 +30285,668 @@
                 </a:solidFill>
                 <a:latin typeface="Arial"/>
               </a:rPr>
+              <a:t>Backup: the vector sensor's polarization terms</a:t>
+            </a:r>
+          </a:p>
+          <a:p>
+            <a:pPr>
+              <a:spcAft>
+                <a:spcPts val="0"/>
+              </a:spcAft>
+            </a:pPr>
+            <a:r>
+              <a:rPr sz="1250" b="0">
+                <a:solidFill>
+                  <a:srgbClr val="6E6E6E"/>
+                </a:solidFill>
+                <a:latin typeface="Arial"/>
+              </a:rPr>
+              <a:t>The metasurface's retardance error, the arm's polarization aberration, and the analyzer, each from the engine's polarized traces of this bench</a:t>
+            </a:r>
+          </a:p>
+        </p:txBody>
+      </p:sp>
+      <p:sp>
+        <p:nvSpPr>
+          <p:cNvPr id="3" name="Rectangle 2"/>
+          <p:cNvSpPr/>
+          <p:nvPr/>
+        </p:nvSpPr>
+        <p:spPr>
+          <a:xfrm>
+            <a:off x="411480" y="1133856"/>
+            <a:ext cx="11368735" cy="20320"/>
+          </a:xfrm>
+          <a:prstGeom prst="rect">
+            <a:avLst/>
+          </a:prstGeom>
+          <a:solidFill>
+            <a:srgbClr val="B8C6D4"/>
+          </a:solidFill>
+          <a:ln>
+            <a:noFill/>
+          </a:ln>
+          <a:effectLst/>
+        </p:spPr>
+        <p:style>
+          <a:lnRef idx="1">
+            <a:schemeClr val="accent1"/>
+          </a:lnRef>
+          <a:fillRef idx="3">
+            <a:schemeClr val="accent1"/>
+          </a:fillRef>
+          <a:effectRef idx="2">
+            <a:schemeClr val="accent1"/>
+          </a:effectRef>
+          <a:fontRef idx="minor">
+            <a:schemeClr val="lt1"/>
+          </a:fontRef>
+        </p:style>
+        <p:txBody>
+          <a:bodyPr rtlCol="0" anchor="ctr"/>
+          <a:lstStyle/>
+          <a:p>
+            <a:pPr algn="ctr"/>
+          </a:p>
+        </p:txBody>
+      </p:sp>
+      <p:graphicFrame>
+        <p:nvGraphicFramePr>
+          <p:cNvPr id="4" name="Table 3"/>
+          <p:cNvGraphicFramePr>
+            <a:graphicFrameLocks noGrp="1"/>
+          </p:cNvGraphicFramePr>
+          <p:nvPr/>
+        </p:nvGraphicFramePr>
+        <p:xfrm>
+          <a:off x="411480" y="1298448"/>
+          <a:ext cx="5806439" cy="3377565"/>
+        </p:xfrm>
+        <a:graphic>
+          <a:graphicData uri="http://schemas.openxmlformats.org/drawingml/2006/table">
+            <a:tbl>
+              <a:tblPr firstRow="1" bandRow="1">
+                <a:tableStyleId>{5C22544A-7EE6-4342-B048-85BDC9FD1C3A}</a:tableStyleId>
+              </a:tblPr>
+              <a:tblGrid>
+                <a:gridCol w="1924420"/>
+                <a:gridCol w="1824881"/>
+                <a:gridCol w="2057138"/>
+              </a:tblGrid>
+              <a:tr h="468630">
+                <a:tc>
+                  <a:txBody>
+                    <a:bodyPr wrap="square"/>
+                    <a:lstStyle/>
+                    <a:p>
+                      <a:r>
+                        <a:rPr sz="1100" b="1">
+                          <a:solidFill>
+                            <a:srgbClr val="FFFFFF"/>
+                          </a:solidFill>
+                          <a:latin typeface="Arial"/>
+                        </a:rPr>
+                        <a:t>term</a:t>
+                      </a:r>
+                    </a:p>
+                  </a:txBody>
+                  <a:tcPr marL="54864" marR="54864" marT="18288" marB="18288">
+                    <a:solidFill>
+                      <a:srgbClr val="1F4E79"/>
+                    </a:solidFill>
+                  </a:tcPr>
+                </a:tc>
+                <a:tc>
+                  <a:txBody>
+                    <a:bodyPr wrap="square"/>
+                    <a:lstStyle/>
+                    <a:p>
+                      <a:r>
+                        <a:rPr sz="1100" b="1">
+                          <a:solidFill>
+                            <a:srgbClr val="FFFFFF"/>
+                          </a:solidFill>
+                          <a:latin typeface="Arial"/>
+                        </a:rPr>
+                        <a:t>uncalibrated, on 100 nm pokes (12 nm rms)</a:t>
+                      </a:r>
+                    </a:p>
+                  </a:txBody>
+                  <a:tcPr marL="54864" marR="54864" marT="18288" marB="18288">
+                    <a:solidFill>
+                      <a:srgbClr val="1F4E79"/>
+                    </a:solidFill>
+                  </a:tcPr>
+                </a:tc>
+                <a:tc>
+                  <a:txBody>
+                    <a:bodyPr wrap="square"/>
+                    <a:lstStyle/>
+                    <a:p>
+                      <a:r>
+                        <a:rPr sz="1100" b="1">
+                          <a:solidFill>
+                            <a:srgbClr val="FFFFFF"/>
+                          </a:solidFill>
+                          <a:latin typeface="Arial"/>
+                        </a:rPr>
+                        <a:t>through the matrix measured on the surface</a:t>
+                      </a:r>
+                    </a:p>
+                  </a:txBody>
+                  <a:tcPr marL="54864" marR="54864" marT="18288" marB="18288">
+                    <a:solidFill>
+                      <a:srgbClr val="1F4E79"/>
+                    </a:solidFill>
+                  </a:tcPr>
+                </a:tc>
+              </a:tr>
+              <a:tr h="657225">
+                <a:tc>
+                  <a:txBody>
+                    <a:bodyPr wrap="square"/>
+                    <a:lstStyle/>
+                    <a:p>
+                      <a:r>
+                        <a:rPr sz="1100" b="0">
+                          <a:solidFill>
+                            <a:srgbClr val="282828"/>
+                          </a:solidFill>
+                          <a:latin typeface="Arial"/>
+                        </a:rPr>
+                        <a:t>metasurface retardance error 0.02 / 0.05 / 0.10 / 0.20 rad</a:t>
+                      </a:r>
+                    </a:p>
+                  </a:txBody>
+                  <a:tcPr marL="54864" marR="54864" marT="18288" marB="18288">
+                    <a:solidFill>
+                      <a:srgbClr val="FFFFFF"/>
+                    </a:solidFill>
+                  </a:tcPr>
+                </a:tc>
+                <a:tc>
+                  <a:txBody>
+                    <a:bodyPr wrap="square"/>
+                    <a:lstStyle/>
+                    <a:p>
+                      <a:r>
+                        <a:rPr sz="1100" b="0">
+                          <a:solidFill>
+                            <a:srgbClr val="282828"/>
+                          </a:solidFill>
+                          <a:latin typeface="Arial"/>
+                        </a:rPr>
+                        <a:t>153 / 380 / 750 / 1461 pm</a:t>
+                      </a:r>
+                    </a:p>
+                  </a:txBody>
+                  <a:tcPr marL="54864" marR="54864" marT="18288" marB="18288">
+                    <a:solidFill>
+                      <a:srgbClr val="FFFFFF"/>
+                    </a:solidFill>
+                  </a:tcPr>
+                </a:tc>
+                <a:tc>
+                  <a:txBody>
+                    <a:bodyPr wrap="square"/>
+                    <a:lstStyle/>
+                    <a:p>
+                      <a:r>
+                        <a:rPr sz="1100" b="0">
+                          <a:solidFill>
+                            <a:srgbClr val="282828"/>
+                          </a:solidFill>
+                          <a:latin typeface="Arial"/>
+                        </a:rPr>
+                        <a:t>0.9934 / 4 pm at 0.10 and 0.20: the ideal rows</a:t>
+                      </a:r>
+                    </a:p>
+                  </a:txBody>
+                  <a:tcPr marL="54864" marR="54864" marT="18288" marB="18288">
+                    <a:solidFill>
+                      <a:srgbClr val="FFFFFF"/>
+                    </a:solidFill>
+                  </a:tcPr>
+                </a:tc>
+              </a:tr>
+              <a:tr h="657225">
+                <a:tc>
+                  <a:txBody>
+                    <a:bodyPr wrap="square"/>
+                    <a:lstStyle/>
+                    <a:p>
+                      <a:r>
+                        <a:rPr sz="1100" b="0">
+                          <a:solidFill>
+                            <a:srgbClr val="282828"/>
+                          </a:solidFill>
+                          <a:latin typeface="Arial"/>
+                        </a:rPr>
+                        <a:t>the arm, laser at 45° / 0° / 90° to the fold plane</a:t>
+                      </a:r>
+                    </a:p>
+                  </a:txBody>
+                  <a:tcPr marL="54864" marR="54864" marT="18288" marB="18288">
+                    <a:solidFill>
+                      <a:srgbClr val="ECF1F6"/>
+                    </a:solidFill>
+                  </a:tcPr>
+                </a:tc>
+                <a:tc>
+                  <a:txBody>
+                    <a:bodyPr wrap="square"/>
+                    <a:lstStyle/>
+                    <a:p>
+                      <a:r>
+                        <a:rPr sz="1100" b="0">
+                          <a:solidFill>
+                            <a:srgbClr val="282828"/>
+                          </a:solidFill>
+                          <a:latin typeface="Arial"/>
+                        </a:rPr>
+                        <a:t>9.0 / 17.2 / 11.2 pm (ideal 0.05)</a:t>
+                      </a:r>
+                    </a:p>
+                  </a:txBody>
+                  <a:tcPr marL="54864" marR="54864" marT="18288" marB="18288">
+                    <a:solidFill>
+                      <a:srgbClr val="ECF1F6"/>
+                    </a:solidFill>
+                  </a:tcPr>
+                </a:tc>
+                <a:tc>
+                  <a:txBody>
+                    <a:bodyPr wrap="square"/>
+                    <a:lstStyle/>
+                    <a:p>
+                      <a:r>
+                        <a:rPr sz="1100" b="0">
+                          <a:solidFill>
+                            <a:srgbClr val="282828"/>
+                          </a:solidFill>
+                          <a:latin typeface="Arial"/>
+                        </a:rPr>
+                        <a:t>nothing through 0.1 rad of channel phase; 10% gain loss at 0.3</a:t>
+                      </a:r>
+                    </a:p>
+                  </a:txBody>
+                  <a:tcPr marL="54864" marR="54864" marT="18288" marB="18288">
+                    <a:solidFill>
+                      <a:srgbClr val="ECF1F6"/>
+                    </a:solidFill>
+                  </a:tcPr>
+                </a:tc>
+              </a:tr>
+              <a:tr h="657225">
+                <a:tc>
+                  <a:txBody>
+                    <a:bodyPr wrap="square"/>
+                    <a:lstStyle/>
+                    <a:p>
+                      <a:r>
+                        <a:rPr sz="1100" b="0">
+                          <a:solidFill>
+                            <a:srgbClr val="282828"/>
+                          </a:solidFill>
+                          <a:latin typeface="Arial"/>
+                        </a:rPr>
+                        <a:t>the arm, design scan: 6 nm per rad of channel phase</a:t>
+                      </a:r>
+                    </a:p>
+                  </a:txBody>
+                  <a:tcPr marL="54864" marR="54864" marT="18288" marB="18288">
+                    <a:solidFill>
+                      <a:srgbClr val="FFFFFF"/>
+                    </a:solidFill>
+                  </a:tcPr>
+                </a:tc>
+                <a:tc>
+                  <a:txBody>
+                    <a:bodyPr wrap="square"/>
+                    <a:lstStyle/>
+                    <a:p>
+                      <a:r>
+                        <a:rPr sz="1100" b="0">
+                          <a:solidFill>
+                            <a:srgbClr val="282828"/>
+                          </a:solidFill>
+                          <a:latin typeface="Arial"/>
+                        </a:rPr>
+                        <a:t>59 / 178 / 597 / 1877 pm at 0.01 / 0.03 / 0.1 / 0.3 rad</a:t>
+                      </a:r>
+                    </a:p>
+                  </a:txBody>
+                  <a:tcPr marL="54864" marR="54864" marT="18288" marB="18288">
+                    <a:solidFill>
+                      <a:srgbClr val="FFFFFF"/>
+                    </a:solidFill>
+                  </a:tcPr>
+                </a:tc>
+                <a:tc>
+                  <a:txBody>
+                    <a:bodyPr wrap="square"/>
+                    <a:lstStyle/>
+                    <a:p>
+                      <a:r>
+                        <a:rPr sz="1100" b="0">
+                          <a:solidFill>
+                            <a:srgbClr val="282828"/>
+                          </a:solidFill>
+                          <a:latin typeface="Arial"/>
+                        </a:rPr>
+                        <a:t>—</a:t>
+                      </a:r>
+                    </a:p>
+                  </a:txBody>
+                  <a:tcPr marL="54864" marR="54864" marT="18288" marB="18288">
+                    <a:solidFill>
+                      <a:srgbClr val="FFFFFF"/>
+                    </a:solidFill>
+                  </a:tcPr>
+                </a:tc>
+              </a:tr>
+              <a:tr h="468630">
+                <a:tc>
+                  <a:txBody>
+                    <a:bodyPr wrap="square"/>
+                    <a:lstStyle/>
+                    <a:p>
+                      <a:r>
+                        <a:rPr sz="1100" b="0">
+                          <a:solidFill>
+                            <a:srgbClr val="282828"/>
+                          </a:solidFill>
+                          <a:latin typeface="Arial"/>
+                        </a:rPr>
+                        <a:t>analyzer: cube extinction alone</a:t>
+                      </a:r>
+                    </a:p>
+                  </a:txBody>
+                  <a:tcPr marL="54864" marR="54864" marT="18288" marB="18288">
+                    <a:solidFill>
+                      <a:srgbClr val="ECF1F6"/>
+                    </a:solidFill>
+                  </a:tcPr>
+                </a:tc>
+                <a:tc>
+                  <a:txBody>
+                    <a:bodyPr wrap="square"/>
+                    <a:lstStyle/>
+                    <a:p>
+                      <a:r>
+                        <a:rPr sz="1100" b="0">
+                          <a:solidFill>
+                            <a:srgbClr val="282828"/>
+                          </a:solidFill>
+                          <a:latin typeface="Arial"/>
+                        </a:rPr>
+                        <a:t>3.5 pm</a:t>
+                      </a:r>
+                    </a:p>
+                  </a:txBody>
+                  <a:tcPr marL="54864" marR="54864" marT="18288" marB="18288">
+                    <a:solidFill>
+                      <a:srgbClr val="ECF1F6"/>
+                    </a:solidFill>
+                  </a:tcPr>
+                </a:tc>
+                <a:tc>
+                  <a:txBody>
+                    <a:bodyPr wrap="square"/>
+                    <a:lstStyle/>
+                    <a:p>
+                      <a:r>
+                        <a:rPr sz="1100" b="0">
+                          <a:solidFill>
+                            <a:srgbClr val="282828"/>
+                          </a:solidFill>
+                          <a:latin typeface="Arial"/>
+                        </a:rPr>
+                        <a:t>0.9934 / 4 pm</a:t>
+                      </a:r>
+                    </a:p>
+                  </a:txBody>
+                  <a:tcPr marL="54864" marR="54864" marT="18288" marB="18288">
+                    <a:solidFill>
+                      <a:srgbClr val="ECF1F6"/>
+                    </a:solidFill>
+                  </a:tcPr>
+                </a:tc>
+              </a:tr>
+              <a:tr h="468630">
+                <a:tc>
+                  <a:txBody>
+                    <a:bodyPr wrap="square"/>
+                    <a:lstStyle/>
+                    <a:p>
+                      <a:r>
+                        <a:rPr sz="1100" b="0">
+                          <a:solidFill>
+                            <a:srgbClr val="282828"/>
+                          </a:solidFill>
+                          <a:latin typeface="Arial"/>
+                        </a:rPr>
+                        <a:t>analyzer: plate λ/300; 1° azimuth; λ/100</a:t>
+                      </a:r>
+                    </a:p>
+                  </a:txBody>
+                  <a:tcPr marL="54864" marR="54864" marT="18288" marB="18288">
+                    <a:solidFill>
+                      <a:srgbClr val="FFFFFF"/>
+                    </a:solidFill>
+                  </a:tcPr>
+                </a:tc>
+                <a:tc>
+                  <a:txBody>
+                    <a:bodyPr wrap="square"/>
+                    <a:lstStyle/>
+                    <a:p>
+                      <a:r>
+                        <a:rPr sz="1100" b="0">
+                          <a:solidFill>
+                            <a:srgbClr val="282828"/>
+                          </a:solidFill>
+                          <a:latin typeface="Arial"/>
+                        </a:rPr>
+                        <a:t>165; 263; 496 pm</a:t>
+                      </a:r>
+                    </a:p>
+                  </a:txBody>
+                  <a:tcPr marL="54864" marR="54864" marT="18288" marB="18288">
+                    <a:solidFill>
+                      <a:srgbClr val="FFFFFF"/>
+                    </a:solidFill>
+                  </a:tcPr>
+                </a:tc>
+                <a:tc>
+                  <a:txBody>
+                    <a:bodyPr wrap="square"/>
+                    <a:lstStyle/>
+                    <a:p>
+                      <a:r>
+                        <a:rPr sz="1100" b="0">
+                          <a:solidFill>
+                            <a:srgbClr val="282828"/>
+                          </a:solidFill>
+                          <a:latin typeface="Arial"/>
+                        </a:rPr>
+                        <a:t>0.9932 / 4; 0.9932 / 4; 0.9928 / 4 pm</a:t>
+                      </a:r>
+                    </a:p>
+                  </a:txBody>
+                  <a:tcPr marL="54864" marR="54864" marT="18288" marB="18288">
+                    <a:solidFill>
+                      <a:srgbClr val="FFFFFF"/>
+                    </a:solidFill>
+                  </a:tcPr>
+                </a:tc>
+              </a:tr>
+            </a:tbl>
+          </a:graphicData>
+        </a:graphic>
+      </p:graphicFrame>
+      <p:sp>
+        <p:nvSpPr>
+          <p:cNvPr id="5" name="TextBox 4"/>
+          <p:cNvSpPr txBox="1"/>
+          <p:nvPr/>
+        </p:nvSpPr>
+        <p:spPr>
+          <a:xfrm>
+            <a:off x="6400800" y="1298448"/>
+            <a:ext cx="5394960" cy="274320"/>
+          </a:xfrm>
+          <a:prstGeom prst="rect">
+            <a:avLst/>
+          </a:prstGeom>
+          <a:noFill/>
+        </p:spPr>
+        <p:txBody>
+          <a:bodyPr wrap="square">
+            <a:spAutoFit/>
+          </a:bodyPr>
+          <a:lstStyle/>
+          <a:p>
+            <a:pPr>
+              <a:spcAft>
+                <a:spcPts val="600"/>
+              </a:spcAft>
+            </a:pPr>
+            <a:r>
+              <a:rPr sz="1200" b="0">
+                <a:solidFill>
+                  <a:srgbClr val="282828"/>
+                </a:solidFill>
+                <a:latin typeface="Arial"/>
+              </a:rPr>
+              <a:t>•  The arm: six 7° glass faces give 5e-3 diattenuation and 0.9 mrad retardance; because the Jones matrix is real, the two circular channels differ in phase only, 1.6 mrad rms at the worst laser angle and 2e-5 along the fold plane's axis.  Rule: specify pupil-varying diattenuation, put the laser on the eigenaxis.</a:t>
+            </a:r>
+          </a:p>
+          <a:p>
+            <a:pPr>
+              <a:spcAft>
+                <a:spcPts val="600"/>
+              </a:spcAft>
+            </a:pPr>
+            <a:r>
+              <a:rPr sz="1200" b="0">
+                <a:solidFill>
+                  <a:srgbClr val="282828"/>
+                </a:solidFill>
+                <a:latin typeface="Arial"/>
+              </a:rPr>
+              <a:t>•  The analyzer: a plate retardance error δ couples the two images with amplitude δ/2, an azimuth error θ with amplitude θ, engine-exact, opposite signs in the two ports; the cube's finite extinction adds 4-6e-4 incoherently.  Spec a zero-order plate at λ/300, azimuth to 1°.</a:t>
+            </a:r>
+          </a:p>
+          <a:p>
+            <a:pPr>
+              <a:spcAft>
+                <a:spcPts val="600"/>
+              </a:spcAft>
+            </a:pPr>
+            <a:r>
+              <a:rPr sz="1200" b="0">
+                <a:solidFill>
+                  <a:srgbClr val="282828"/>
+                </a:solidFill>
+                <a:latin typeface="Arial"/>
+              </a:rPr>
+              <a:t>•  A three-number fit on the flat's two images recovers the metasurface's constants to five digits (0.048 pm).</a:t>
+            </a:r>
+          </a:p>
+        </p:txBody>
+      </p:sp>
+      <p:sp>
+        <p:nvSpPr>
+          <p:cNvPr id="6" name="TextBox 5"/>
+          <p:cNvSpPr txBox="1"/>
+          <p:nvPr/>
+        </p:nvSpPr>
+        <p:spPr>
+          <a:xfrm>
+            <a:off x="6400800" y="3934967"/>
+            <a:ext cx="5394960" cy="274320"/>
+          </a:xfrm>
+          <a:prstGeom prst="rect">
+            <a:avLst/>
+          </a:prstGeom>
+          <a:noFill/>
+        </p:spPr>
+        <p:txBody>
+          <a:bodyPr wrap="square">
+            <a:spAutoFit/>
+          </a:bodyPr>
+          <a:lstStyle/>
+          <a:p>
+            <a:pPr>
+              <a:spcAft>
+                <a:spcPts val="600"/>
+              </a:spcAft>
+            </a:pPr>
+            <a:r>
+              <a:rPr sz="1050" b="0">
+                <a:solidFill>
+                  <a:srgbClr val="6E6E6E"/>
+                </a:solidFill>
+                <a:latin typeface="Arial"/>
+              </a:rPr>
+              <a:t>Run tags v2g, v2loop, v3arm, v3s, v3loop, an193_cube/q300/q100/az1; zwfs_dm96 README V2-V4.</a:t>
+            </a:r>
+          </a:p>
+        </p:txBody>
+      </p:sp>
+    </p:spTree>
+  </p:cSld>
+  <p:clrMapOvr>
+    <a:masterClrMapping/>
+  </p:clrMapOvr>
+</p:sld>
+</file>
+
+<file path=ppt/slides/slide51.xml><?xml version="1.0" encoding="utf-8"?>
+<p:sld xmlns:a="http://schemas.openxmlformats.org/drawingml/2006/main" xmlns:p="http://schemas.openxmlformats.org/presentationml/2006/main" xmlns:r="http://schemas.openxmlformats.org/officeDocument/2006/relationships">
+  <p:cSld>
+    <p:spTree>
+      <p:nvGrpSpPr>
+        <p:cNvPr id="1" name=""/>
+        <p:cNvGrpSpPr/>
+        <p:nvPr/>
+      </p:nvGrpSpPr>
+      <p:grpSpPr/>
+      <p:sp>
+        <p:nvSpPr>
+          <p:cNvPr id="2" name="TextBox 1"/>
+          <p:cNvSpPr txBox="1"/>
+          <p:nvPr/>
+        </p:nvSpPr>
+        <p:spPr>
+          <a:xfrm>
+            <a:off x="411480" y="201168"/>
+            <a:ext cx="11368735" cy="914400"/>
+          </a:xfrm>
+          <a:prstGeom prst="rect">
+            <a:avLst/>
+          </a:prstGeom>
+          <a:noFill/>
+        </p:spPr>
+        <p:txBody>
+          <a:bodyPr wrap="square">
+            <a:spAutoFit/>
+          </a:bodyPr>
+          <a:lstStyle/>
+          <a:p>
+            <a:pPr>
+              <a:spcAft>
+                <a:spcPts val="400"/>
+              </a:spcAft>
+            </a:pPr>
+            <a:r>
+              <a:rPr sz="2400" b="1">
+                <a:solidFill>
+                  <a:srgbClr val="1F4E79"/>
+                </a:solidFill>
+                <a:latin typeface="Arial"/>
+              </a:rPr>
               <a:t>Backup: the sensor model, sampling and color</a:t>
             </a:r>
           </a:p>
@@ -30413,7 +31193,7 @@
 </p:sld>
 </file>
 
-<file path=ppt/slides/slide51.xml><?xml version="1.0" encoding="utf-8"?>
+<file path=ppt/slides/slide52.xml><?xml version="1.0" encoding="utf-8"?>
 <p:sld xmlns:a="http://schemas.openxmlformats.org/drawingml/2006/main" xmlns:p="http://schemas.openxmlformats.org/presentationml/2006/main" xmlns:r="http://schemas.openxmlformats.org/officeDocument/2006/relationships">
   <p:cSld>
     <p:spTree>
@@ -31117,7 +31897,7 @@
 </p:sld>
 </file>
 
-<file path=ppt/slides/slide52.xml><?xml version="1.0" encoding="utf-8"?>
+<file path=ppt/slides/slide53.xml><?xml version="1.0" encoding="utf-8"?>
 <p:sld xmlns:a="http://schemas.openxmlformats.org/drawingml/2006/main" xmlns:p="http://schemas.openxmlformats.org/presentationml/2006/main" xmlns:r="http://schemas.openxmlformats.org/officeDocument/2006/relationships">
   <p:cSld>
     <p:spTree>
@@ -32111,7 +32891,7 @@
 </p:sld>
 </file>
 
-<file path=ppt/slides/slide53.xml><?xml version="1.0" encoding="utf-8"?>
+<file path=ppt/slides/slide54.xml><?xml version="1.0" encoding="utf-8"?>
 <p:sld xmlns:a="http://schemas.openxmlformats.org/drawingml/2006/main" xmlns:p="http://schemas.openxmlformats.org/presentationml/2006/main" xmlns:r="http://schemas.openxmlformats.org/officeDocument/2006/relationships">
   <p:cSld>
     <p:spTree>

--- a/demo_session/deck_gauges_edit.pptx
+++ b/demo_session/deck_gauges_edit.pptx
@@ -25559,7 +25559,7 @@
         </p:nvGraphicFramePr>
         <p:xfrm>
           <a:off x="411480" y="1298448"/>
-          <a:ext cx="11368733" cy="2057400"/>
+          <a:ext cx="11368733" cy="3651885"/>
         </p:xfrm>
         <a:graphic>
           <a:graphicData uri="http://schemas.openxmlformats.org/drawingml/2006/table">
@@ -25568,10 +25568,10 @@
                 <a:tableStyleId>{5C22544A-7EE6-4342-B048-85BDC9FD1C3A}</a:tableStyleId>
               </a:tblPr>
               <a:tblGrid>
-                <a:gridCol w="3100564"/>
-                <a:gridCol w="2735791"/>
-                <a:gridCol w="2188633"/>
-                <a:gridCol w="3343745"/>
+                <a:gridCol w="4599850"/>
+                <a:gridCol w="1682871"/>
+                <a:gridCol w="3029169"/>
+                <a:gridCol w="2056843"/>
               </a:tblGrid>
               <a:tr h="468630">
                 <a:tc>
@@ -25753,7 +25753,7 @@
                   </a:tcPr>
                 </a:tc>
               </a:tr>
-              <a:tr h="280035">
+              <a:tr h="468630">
                 <a:tc>
                   <a:txBody>
                     <a:bodyPr wrap="square"/>
@@ -26109,6 +26109,276 @@
                   <a:tcPr marL="54864" marR="54864" marT="18288" marB="18288">
                     <a:solidFill>
                       <a:srgbClr val="FFFFFF"/>
+                    </a:solidFill>
+                  </a:tcPr>
+                </a:tc>
+              </a:tr>
+              <a:tr h="468630">
+                <a:tc>
+                  <a:txBody>
+                    <a:bodyPr wrap="square"/>
+                    <a:lstStyle/>
+                    <a:p>
+                      <a:r>
+                        <a:rPr sz="1100" b="0">
+                          <a:solidFill>
+                            <a:srgbClr val="282828"/>
+                          </a:solidFill>
+                          <a:latin typeface="Arial"/>
+                        </a:rPr>
+                        <a:t>pupil imaging on these decks (tg96_pupilsim): image surface vs the camera / Nyquist gain / distortion / 30 nm surface error</a:t>
+                      </a:r>
+                    </a:p>
+                  </a:txBody>
+                  <a:tcPr marL="54864" marR="54864" marT="18288" marB="18288">
+                    <a:solidFill>
+                      <a:srgbClr val="ECF1F6"/>
+                    </a:solidFill>
+                  </a:tcPr>
+                </a:tc>
+                <a:tc>
+                  <a:txBody>
+                    <a:bodyPr wrap="square"/>
+                    <a:lstStyle/>
+                    <a:p>
+                      <a:r>
+                        <a:rPr sz="1100" b="0">
+                          <a:solidFill>
+                            <a:srgbClr val="282828"/>
+                          </a:solidFill>
+                          <a:latin typeface="Arial"/>
+                        </a:rPr>
+                        <a:t>within ±0.3 mm / 0.9999 / 0.008 mm / 0.08 nm</a:t>
+                      </a:r>
+                    </a:p>
+                  </a:txBody>
+                  <a:tcPr marL="54864" marR="54864" marT="18288" marB="18288">
+                    <a:solidFill>
+                      <a:srgbClr val="ECF1F6"/>
+                    </a:solidFill>
+                  </a:tcPr>
+                </a:tc>
+                <a:tc>
+                  <a:txBody>
+                    <a:bodyPr wrap="square"/>
+                    <a:lstStyle/>
+                    <a:p>
+                      <a:r>
+                        <a:rPr sz="1100" b="0">
+                          <a:solidFill>
+                            <a:srgbClr val="282828"/>
+                          </a:solidFill>
+                          <a:latin typeface="Arial"/>
+                        </a:rPr>
+                        <a:t>within −0.6 to +0.4 mm / 0.9996 / 0.72 mm (the parabola pair's mapping) / 0.10 nm</a:t>
+                      </a:r>
+                    </a:p>
+                  </a:txBody>
+                  <a:tcPr marL="54864" marR="54864" marT="18288" marB="18288">
+                    <a:solidFill>
+                      <a:srgbClr val="ECF1F6"/>
+                    </a:solidFill>
+                  </a:tcPr>
+                </a:tc>
+                <a:tc>
+                  <a:txBody>
+                    <a:bodyPr wrap="square"/>
+                    <a:lstStyle/>
+                    <a:p>
+                      <a:r>
+                        <a:rPr sz="1100" b="0">
+                          <a:solidFill>
+                            <a:srgbClr val="282828"/>
+                          </a:solidFill>
+                          <a:latin typeface="Arial"/>
+                        </a:rPr>
+                        <a:t>tuned tail: 2.6 to 6 mm / 0.954 / 0.27 mm / 1.2 nm</a:t>
+                      </a:r>
+                    </a:p>
+                  </a:txBody>
+                  <a:tcPr marL="54864" marR="54864" marT="18288" marB="18288">
+                    <a:solidFill>
+                      <a:srgbClr val="ECF1F6"/>
+                    </a:solidFill>
+                  </a:tcPr>
+                </a:tc>
+              </a:tr>
+              <a:tr h="468630">
+                <a:tc>
+                  <a:txBody>
+                    <a:bodyPr wrap="square"/>
+                    <a:lstStyle/>
+                    <a:p>
+                      <a:r>
+                        <a:rPr sz="1100" b="0">
+                          <a:solidFill>
+                            <a:srgbClr val="282828"/>
+                          </a:solidFill>
+                          <a:latin typeface="Arial"/>
+                        </a:rPr>
+                        <a:t>the sensors on the mirror rig at 385 px, substrates in: stepped-Zernike rows, single / grid</a:t>
+                      </a:r>
+                    </a:p>
+                  </a:txBody>
+                  <a:tcPr marL="54864" marR="54864" marT="18288" marB="18288">
+                    <a:solidFill>
+                      <a:srgbClr val="FFFFFF"/>
+                    </a:solidFill>
+                  </a:tcPr>
+                </a:tc>
+                <a:tc>
+                  <a:txBody>
+                    <a:bodyPr wrap="square"/>
+                    <a:lstStyle/>
+                    <a:p>
+                      <a:r>
+                        <a:rPr sz="1100" b="0">
+                          <a:solidFill>
+                            <a:srgbClr val="282828"/>
+                          </a:solidFill>
+                          <a:latin typeface="Arial"/>
+                        </a:rPr>
+                        <a:t>—</a:t>
+                      </a:r>
+                    </a:p>
+                  </a:txBody>
+                  <a:tcPr marL="54864" marR="54864" marT="18288" marB="18288">
+                    <a:solidFill>
+                      <a:srgbClr val="FFFFFF"/>
+                    </a:solidFill>
+                  </a:tcPr>
+                </a:tc>
+                <a:tc>
+                  <a:txBody>
+                    <a:bodyPr wrap="square"/>
+                    <a:lstStyle/>
+                    <a:p>
+                      <a:r>
+                        <a:rPr sz="1100" b="0">
+                          <a:solidFill>
+                            <a:srgbClr val="282828"/>
+                          </a:solidFill>
+                          <a:latin typeface="Arial"/>
+                        </a:rPr>
+                        <a:t>0.993 / 5 pm; 0.995 / 4 pm</a:t>
+                      </a:r>
+                    </a:p>
+                  </a:txBody>
+                  <a:tcPr marL="54864" marR="54864" marT="18288" marB="18288">
+                    <a:solidFill>
+                      <a:srgbClr val="FFFFFF"/>
+                    </a:solidFill>
+                  </a:tcPr>
+                </a:tc>
+                <a:tc>
+                  <a:txBody>
+                    <a:bodyPr wrap="square"/>
+                    <a:lstStyle/>
+                    <a:p>
+                      <a:r>
+                        <a:rPr sz="1100" b="0">
+                          <a:solidFill>
+                            <a:srgbClr val="282828"/>
+                          </a:solidFill>
+                          <a:latin typeface="Arial"/>
+                        </a:rPr>
+                        <a:t>0.991 / 4; 0.999 / 4 (no substrates)</a:t>
+                      </a:r>
+                    </a:p>
+                  </a:txBody>
+                  <a:tcPr marL="54864" marR="54864" marT="18288" marB="18288">
+                    <a:solidFill>
+                      <a:srgbClr val="FFFFFF"/>
+                    </a:solidFill>
+                  </a:tcPr>
+                </a:tc>
+              </a:tr>
+              <a:tr h="468630">
+                <a:tc>
+                  <a:txBody>
+                    <a:bodyPr wrap="square"/>
+                    <a:lstStyle/>
+                    <a:p>
+                      <a:r>
+                        <a:rPr sz="1100" b="0">
+                          <a:solidFill>
+                            <a:srgbClr val="282828"/>
+                          </a:solidFill>
+                          <a:latin typeface="Arial"/>
+                        </a:rPr>
+                        <a:t>the sensors' capture to 10%: stepped / vector / pinhole</a:t>
+                      </a:r>
+                    </a:p>
+                  </a:txBody>
+                  <a:tcPr marL="54864" marR="54864" marT="18288" marB="18288">
+                    <a:solidFill>
+                      <a:srgbClr val="ECF1F6"/>
+                    </a:solidFill>
+                  </a:tcPr>
+                </a:tc>
+                <a:tc>
+                  <a:txBody>
+                    <a:bodyPr wrap="square"/>
+                    <a:lstStyle/>
+                    <a:p>
+                      <a:r>
+                        <a:rPr sz="1100" b="0">
+                          <a:solidFill>
+                            <a:srgbClr val="282828"/>
+                          </a:solidFill>
+                          <a:latin typeface="Arial"/>
+                        </a:rPr>
+                        <a:t>—</a:t>
+                      </a:r>
+                    </a:p>
+                  </a:txBody>
+                  <a:tcPr marL="54864" marR="54864" marT="18288" marB="18288">
+                    <a:solidFill>
+                      <a:srgbClr val="ECF1F6"/>
+                    </a:solidFill>
+                  </a:tcPr>
+                </a:tc>
+                <a:tc>
+                  <a:txBody>
+                    <a:bodyPr wrap="square"/>
+                    <a:lstStyle/>
+                    <a:p>
+                      <a:r>
+                        <a:rPr sz="1100" b="0">
+                          <a:solidFill>
+                            <a:srgbClr val="282828"/>
+                          </a:solidFill>
+                          <a:latin typeface="Arial"/>
+                        </a:rPr>
+                        <a:t>35 / 51 / 42 nm</a:t>
+                      </a:r>
+                    </a:p>
+                  </a:txBody>
+                  <a:tcPr marL="54864" marR="54864" marT="18288" marB="18288">
+                    <a:solidFill>
+                      <a:srgbClr val="ECF1F6"/>
+                    </a:solidFill>
+                  </a:tcPr>
+                </a:tc>
+                <a:tc>
+                  <a:txBody>
+                    <a:bodyPr wrap="square"/>
+                    <a:lstStyle/>
+                    <a:p>
+                      <a:r>
+                        <a:rPr sz="1100" b="0">
+                          <a:solidFill>
+                            <a:srgbClr val="282828"/>
+                          </a:solidFill>
+                          <a:latin typeface="Arial"/>
+                        </a:rPr>
+                        <a:t>36 / 59 / 52 nm (no substrates)</a:t>
+                      </a:r>
+                    </a:p>
+                  </a:txBody>
+                  <a:tcPr marL="54864" marR="54864" marT="18288" marB="18288">
+                    <a:solidFill>
+                      <a:srgbClr val="ECF1F6"/>
                     </a:solidFill>
                   </a:tcPr>
                 </a:tc>
@@ -26125,7 +26395,7 @@
         </p:nvSpPr>
         <p:spPr>
           <a:xfrm>
-            <a:off x="411480" y="3502152"/>
+            <a:off x="411480" y="5096637"/>
             <a:ext cx="11368735" cy="274320"/>
           </a:xfrm>
           <a:prstGeom prst="rect">
@@ -26167,6 +26437,22 @@
                 </a:solidFill>
                 <a:latin typeface="Arial"/>
               </a:rPr>
+              <a:t>•  The pupil image is not what limits either rig: on the seed tail with the substrates in, the DM images within a third of a millimeter of the camera on lenses (0.9999 at the actuator Nyquist, 0.08 nm on the working surface) and within 0.6 mm on mirrors; the lens rig's 92 nm null is the plate's spherical aberration and the misfed collimator, not the imaging.  The mask plate costs the sensors a little capture (vector 59 to 51 nm, pinhole 52 to 42) and no gain.</a:t>
+            </a:r>
+          </a:p>
+          <a:p>
+            <a:pPr>
+              <a:spcAft>
+                <a:spcPts val="600"/>
+              </a:spcAft>
+            </a:pPr>
+            <a:r>
+              <a:rPr sz="1500" b="0">
+                <a:solidFill>
+                  <a:srgbClr val="282828"/>
+                </a:solidFill>
+                <a:latin typeface="Arial"/>
+              </a:rPr>
               <a:t>•  One clearance line moved: with the thicker plates and the larger beam the compensator sits 16 mm from the source beam against the 25 mm rule; it moves down the DM leg in the redo.</a:t>
             </a:r>
           </a:p>
@@ -26180,7 +26466,7 @@
         </p:nvSpPr>
         <p:spPr>
           <a:xfrm>
-            <a:off x="411480" y="5552694"/>
+            <a:off x="411480" y="8277987"/>
             <a:ext cx="11368735" cy="274320"/>
           </a:xfrm>
           <a:prstGeom prst="rect">
@@ -26206,7 +26492,7 @@
                 </a:solidFill>
                 <a:latin typeface="Arial"/>
               </a:rPr>
-              <a:t>Run tags sub96_lens, sub96_oap (the Mac, RUNBOOK_mac_cycle3a); the pupil stage and the sensors at 385 on these decks follow.</a:t>
+              <a:t>Run tags sub96_lens, sub96_oap, pupilsim_sub96_lens, pupilsim_sub96_oap, sub96_oapsens (the Mac, RUNBOOK_mac_cycle3a, 2026-09-17).</a:t>
             </a:r>
           </a:p>
         </p:txBody>

--- a/demo_session/deck_gauges_edit.pptx
+++ b/demo_session/deck_gauges_edit.pptx
@@ -23504,7 +23504,7 @@
                 </a:solidFill>
                 <a:latin typeface="Arial"/>
               </a:rPr>
-              <a:t>•  Expected movement: the lens rig's rows and station figure improve; the pupil image grows to 9.8 mm; all 96×96 actuators in the lit set; the mirror rig's rows move only with the beam.</a:t>
+              <a:t>•  Package A passed on both rigs (TO, 2026-09-17 13:30): collimated, re-tuned on the reading, re-emitted.  Nyquist gain 1.0000 (lens) / 0.9994 (mirrors) worst; the 30 nm surface recovered to 42 pm (lens, 29× the record's tuned tail) and 92 pm (mirrors); single pokes 0.9998 peak; the lens rig's amplitude cross-talk 0.005 (was a third); certified at twice the sampling the tunes ran at.  Distortion is a mapping, not a gate.</a:t>
             </a:r>
           </a:p>
         </p:txBody>
@@ -23517,7 +23517,7 @@
         </p:nvSpPr>
         <p:spPr>
           <a:xfrm>
-            <a:off x="6400800" y="4867656"/>
+            <a:off x="6400800" y="5462015"/>
             <a:ext cx="5394960" cy="274320"/>
           </a:xfrm>
           <a:prstGeom prst="rect">
@@ -23543,7 +23543,7 @@
                 </a:solidFill>
                 <a:latin typeface="Arial"/>
               </a:rPr>
-              <a:t>The interim report of 2026-09-18 carries the current record, labeled; the redo lands in its next revision.  Plan: BRIEF_to_tg_redo.md (packages A0, A, B, C); tools tg96_pupilsim, tg96_pupil_options, tg96_pupil_s2s.</a:t>
+              <a:t>The interim report of 2026-09-18 carries the current record, labeled; the redo lands in its next revision.  Package B (the engine's plane-to-plane chain) and C (the runs) follow; the Mac carries C's mirror side.  Plan: BRIEF_to_tg_redo.md (packages A0, A, B, C); tools tg96_pupilsim, tg96_pupil_options, tg96_pupil_s2s.</a:t>
             </a:r>
           </a:p>
         </p:txBody>

--- a/demo_session/deck_gauges_edit.pptx
+++ b/demo_session/deck_gauges_edit.pptx
@@ -25559,7 +25559,7 @@
         </p:nvGraphicFramePr>
         <p:xfrm>
           <a:off x="411480" y="1298448"/>
-          <a:ext cx="11368733" cy="3651885"/>
+          <a:ext cx="11368733" cy="4972050"/>
         </p:xfrm>
         <a:graphic>
           <a:graphicData uri="http://schemas.openxmlformats.org/drawingml/2006/table">
@@ -25568,11 +25568,147 @@
                 <a:tableStyleId>{5C22544A-7EE6-4342-B048-85BDC9FD1C3A}</a:tableStyleId>
               </a:tblPr>
               <a:tblGrid>
-                <a:gridCol w="4599850"/>
-                <a:gridCol w="1682871"/>
-                <a:gridCol w="3029169"/>
-                <a:gridCol w="2056843"/>
+                <a:gridCol w="3217820"/>
+                <a:gridCol w="1177251"/>
+                <a:gridCol w="2119052"/>
+                <a:gridCol w="1308056"/>
+                <a:gridCol w="2107692"/>
+                <a:gridCol w="1438862"/>
               </a:tblGrid>
+              <a:tr h="657225">
+                <a:tc>
+                  <a:txBody>
+                    <a:bodyPr wrap="square"/>
+                    <a:lstStyle/>
+                    <a:p>
+                      <a:r>
+                        <a:rPr sz="1100" b="1">
+                          <a:solidFill>
+                            <a:srgbClr val="FFFFFF"/>
+                          </a:solidFill>
+                          <a:latin typeface="Arial"/>
+                        </a:rPr>
+                        <a:t>rows on the 30 nm surface, matrix on it (four-step)</a:t>
+                      </a:r>
+                    </a:p>
+                  </a:txBody>
+                  <a:tcPr marL="54864" marR="54864" marT="18288" marB="18288">
+                    <a:solidFill>
+                      <a:srgbClr val="1F4E79"/>
+                    </a:solidFill>
+                  </a:tcPr>
+                </a:tc>
+                <a:tc>
+                  <a:txBody>
+                    <a:bodyPr wrap="square"/>
+                    <a:lstStyle/>
+                    <a:p>
+                      <a:r>
+                        <a:rPr sz="1100" b="1">
+                          <a:solidFill>
+                            <a:srgbClr val="FFFFFF"/>
+                          </a:solidFill>
+                          <a:latin typeface="Arial"/>
+                        </a:rPr>
+                        <a:t>lens rig, seed tail, substrates in (cycle 3a)</a:t>
+                      </a:r>
+                    </a:p>
+                  </a:txBody>
+                  <a:tcPr marL="54864" marR="54864" marT="18288" marB="18288">
+                    <a:solidFill>
+                      <a:srgbClr val="1F4E79"/>
+                    </a:solidFill>
+                  </a:tcPr>
+                </a:tc>
+                <a:tc>
+                  <a:txBody>
+                    <a:bodyPr wrap="square"/>
+                    <a:lstStyle/>
+                    <a:p>
+                      <a:r>
+                        <a:rPr sz="1100" b="1">
+                          <a:solidFill>
+                            <a:srgbClr val="FFFFFF"/>
+                          </a:solidFill>
+                          <a:latin typeface="Arial"/>
+                        </a:rPr>
+                        <a:t>lens rig, redo bench (cycle 3b)</a:t>
+                      </a:r>
+                    </a:p>
+                  </a:txBody>
+                  <a:tcPr marL="54864" marR="54864" marT="18288" marB="18288">
+                    <a:solidFill>
+                      <a:srgbClr val="1F4E79"/>
+                    </a:solidFill>
+                  </a:tcPr>
+                </a:tc>
+                <a:tc>
+                  <a:txBody>
+                    <a:bodyPr wrap="square"/>
+                    <a:lstStyle/>
+                    <a:p>
+                      <a:r>
+                        <a:rPr sz="1100" b="1">
+                          <a:solidFill>
+                            <a:srgbClr val="FFFFFF"/>
+                          </a:solidFill>
+                          <a:latin typeface="Arial"/>
+                        </a:rPr>
+                        <a:t>mirror rig, seed tail, substrates in (3a)</a:t>
+                      </a:r>
+                    </a:p>
+                  </a:txBody>
+                  <a:tcPr marL="54864" marR="54864" marT="18288" marB="18288">
+                    <a:solidFill>
+                      <a:srgbClr val="1F4E79"/>
+                    </a:solidFill>
+                  </a:tcPr>
+                </a:tc>
+                <a:tc>
+                  <a:txBody>
+                    <a:bodyPr wrap="square"/>
+                    <a:lstStyle/>
+                    <a:p>
+                      <a:r>
+                        <a:rPr sz="1100" b="1">
+                          <a:solidFill>
+                            <a:srgbClr val="FFFFFF"/>
+                          </a:solidFill>
+                          <a:latin typeface="Arial"/>
+                        </a:rPr>
+                        <a:t>mirror rig, redo bench (3b)</a:t>
+                      </a:r>
+                    </a:p>
+                  </a:txBody>
+                  <a:tcPr marL="54864" marR="54864" marT="18288" marB="18288">
+                    <a:solidFill>
+                      <a:srgbClr val="1F4E79"/>
+                    </a:solidFill>
+                  </a:tcPr>
+                </a:tc>
+                <a:tc>
+                  <a:txBody>
+                    <a:bodyPr wrap="square"/>
+                    <a:lstStyle/>
+                    <a:p>
+                      <a:r>
+                        <a:rPr sz="1100" b="1">
+                          <a:solidFill>
+                            <a:srgbClr val="FFFFFF"/>
+                          </a:solidFill>
+                          <a:latin typeface="Arial"/>
+                        </a:rPr>
+                        <a:t>the record (tuned tail, no substrates, 77 / 82 mm beam)</a:t>
+                      </a:r>
+                    </a:p>
+                  </a:txBody>
+                  <a:tcPr marL="54864" marR="54864" marT="18288" marB="18288">
+                    <a:solidFill>
+                      <a:srgbClr val="1F4E79"/>
+                    </a:solidFill>
+                  </a:tcPr>
+                </a:tc>
+              </a:tr>
               <a:tr h="468630">
                 <a:tc>
                   <a:txBody>
@@ -25580,85 +25716,531 @@
                     <a:lstStyle/>
                     <a:p>
                       <a:r>
-                        <a:rPr sz="1100" b="1">
-                          <a:solidFill>
-                            <a:srgbClr val="FFFFFF"/>
-                          </a:solidFill>
-                          <a:latin typeface="Arial"/>
-                        </a:rPr>
-                        <a:t>rows on the 30 nm surface, matrix on it (four-step)</a:t>
-                      </a:r>
-                    </a:p>
-                  </a:txBody>
-                  <a:tcPr marL="54864" marR="54864" marT="18288" marB="18288">
-                    <a:solidFill>
-                      <a:srgbClr val="1F4E79"/>
-                    </a:solidFill>
-                  </a:tcPr>
-                </a:tc>
-                <a:tc>
-                  <a:txBody>
-                    <a:bodyPr wrap="square"/>
-                    <a:lstStyle/>
-                    <a:p>
-                      <a:r>
-                        <a:rPr sz="1100" b="1">
-                          <a:solidFill>
-                            <a:srgbClr val="FFFFFF"/>
-                          </a:solidFill>
-                          <a:latin typeface="Arial"/>
-                        </a:rPr>
-                        <a:t>lens rig, seed tail, substrates in</a:t>
-                      </a:r>
-                    </a:p>
-                  </a:txBody>
-                  <a:tcPr marL="54864" marR="54864" marT="18288" marB="18288">
-                    <a:solidFill>
-                      <a:srgbClr val="1F4E79"/>
-                    </a:solidFill>
-                  </a:tcPr>
-                </a:tc>
-                <a:tc>
-                  <a:txBody>
-                    <a:bodyPr wrap="square"/>
-                    <a:lstStyle/>
-                    <a:p>
-                      <a:r>
-                        <a:rPr sz="1100" b="1">
-                          <a:solidFill>
-                            <a:srgbClr val="FFFFFF"/>
-                          </a:solidFill>
-                          <a:latin typeface="Arial"/>
-                        </a:rPr>
-                        <a:t>mirror rig, seed tail, substrates in</a:t>
-                      </a:r>
-                    </a:p>
-                  </a:txBody>
-                  <a:tcPr marL="54864" marR="54864" marT="18288" marB="18288">
-                    <a:solidFill>
-                      <a:srgbClr val="1F4E79"/>
-                    </a:solidFill>
-                  </a:tcPr>
-                </a:tc>
-                <a:tc>
-                  <a:txBody>
-                    <a:bodyPr wrap="square"/>
-                    <a:lstStyle/>
-                    <a:p>
-                      <a:r>
-                        <a:rPr sz="1100" b="1">
-                          <a:solidFill>
-                            <a:srgbClr val="FFFFFF"/>
-                          </a:solidFill>
-                          <a:latin typeface="Arial"/>
-                        </a:rPr>
-                        <a:t>the record (tuned tail, no substrates, 77 / 82 mm beam)</a:t>
-                      </a:r>
-                    </a:p>
-                  </a:txBody>
-                  <a:tcPr marL="54864" marR="54864" marT="18288" marB="18288">
-                    <a:solidFill>
-                      <a:srgbClr val="1F4E79"/>
+                        <a:rPr sz="1100" b="0">
+                          <a:solidFill>
+                            <a:srgbClr val="282828"/>
+                          </a:solidFill>
+                          <a:latin typeface="Arial"/>
+                        </a:rPr>
+                        <a:t>flat-mirror null</a:t>
+                      </a:r>
+                    </a:p>
+                  </a:txBody>
+                  <a:tcPr marL="54864" marR="54864" marT="18288" marB="18288">
+                    <a:solidFill>
+                      <a:srgbClr val="FFFFFF"/>
+                    </a:solidFill>
+                  </a:tcPr>
+                </a:tc>
+                <a:tc>
+                  <a:txBody>
+                    <a:bodyPr wrap="square"/>
+                    <a:lstStyle/>
+                    <a:p>
+                      <a:r>
+                        <a:rPr sz="1100" b="0">
+                          <a:solidFill>
+                            <a:srgbClr val="282828"/>
+                          </a:solidFill>
+                          <a:latin typeface="Arial"/>
+                        </a:rPr>
+                        <a:t>92.4 nm rms</a:t>
+                      </a:r>
+                    </a:p>
+                  </a:txBody>
+                  <a:tcPr marL="54864" marR="54864" marT="18288" marB="18288">
+                    <a:solidFill>
+                      <a:srgbClr val="FFFFFF"/>
+                    </a:solidFill>
+                  </a:tcPr>
+                </a:tc>
+                <a:tc>
+                  <a:txBody>
+                    <a:bodyPr wrap="square"/>
+                    <a:lstStyle/>
+                    <a:p>
+                      <a:r>
+                        <a:rPr sz="1100" b="0">
+                          <a:solidFill>
+                            <a:srgbClr val="282828"/>
+                          </a:solidFill>
+                          <a:latin typeface="Arial"/>
+                        </a:rPr>
+                        <a:t>59.3 nm</a:t>
+                      </a:r>
+                    </a:p>
+                  </a:txBody>
+                  <a:tcPr marL="54864" marR="54864" marT="18288" marB="18288">
+                    <a:solidFill>
+                      <a:srgbClr val="FFFFFF"/>
+                    </a:solidFill>
+                  </a:tcPr>
+                </a:tc>
+                <a:tc>
+                  <a:txBody>
+                    <a:bodyPr wrap="square"/>
+                    <a:lstStyle/>
+                    <a:p>
+                      <a:r>
+                        <a:rPr sz="1100" b="0">
+                          <a:solidFill>
+                            <a:srgbClr val="282828"/>
+                          </a:solidFill>
+                          <a:latin typeface="Arial"/>
+                        </a:rPr>
+                        <a:t>26.3 nm</a:t>
+                      </a:r>
+                    </a:p>
+                  </a:txBody>
+                  <a:tcPr marL="54864" marR="54864" marT="18288" marB="18288">
+                    <a:solidFill>
+                      <a:srgbClr val="FFFFFF"/>
+                    </a:solidFill>
+                  </a:tcPr>
+                </a:tc>
+                <a:tc>
+                  <a:txBody>
+                    <a:bodyPr wrap="square"/>
+                    <a:lstStyle/>
+                    <a:p>
+                      <a:r>
+                        <a:rPr sz="1100" b="0">
+                          <a:solidFill>
+                            <a:srgbClr val="282828"/>
+                          </a:solidFill>
+                          <a:latin typeface="Arial"/>
+                        </a:rPr>
+                        <a:t>26.5 nm</a:t>
+                      </a:r>
+                    </a:p>
+                  </a:txBody>
+                  <a:tcPr marL="54864" marR="54864" marT="18288" marB="18288">
+                    <a:solidFill>
+                      <a:srgbClr val="FFFFFF"/>
+                    </a:solidFill>
+                  </a:tcPr>
+                </a:tc>
+                <a:tc>
+                  <a:txBody>
+                    <a:bodyPr wrap="square"/>
+                    <a:lstStyle/>
+                    <a:p>
+                      <a:r>
+                        <a:rPr sz="1100" b="0">
+                          <a:solidFill>
+                            <a:srgbClr val="282828"/>
+                          </a:solidFill>
+                          <a:latin typeface="Arial"/>
+                        </a:rPr>
+                        <a:t>0.13 nm lens / 0.03 mirrors</a:t>
+                      </a:r>
+                    </a:p>
+                  </a:txBody>
+                  <a:tcPr marL="54864" marR="54864" marT="18288" marB="18288">
+                    <a:solidFill>
+                      <a:srgbClr val="FFFFFF"/>
+                    </a:solidFill>
+                  </a:tcPr>
+                </a:tc>
+              </a:tr>
+              <a:tr h="657225">
+                <a:tc>
+                  <a:txBody>
+                    <a:bodyPr wrap="square"/>
+                    <a:lstStyle/>
+                    <a:p>
+                      <a:r>
+                        <a:rPr sz="1100" b="0">
+                          <a:solidFill>
+                            <a:srgbClr val="282828"/>
+                          </a:solidFill>
+                          <a:latin typeface="Arial"/>
+                        </a:rPr>
+                        <a:t>10 nm on one actuator: gain / error / SNR</a:t>
+                      </a:r>
+                    </a:p>
+                  </a:txBody>
+                  <a:tcPr marL="54864" marR="54864" marT="18288" marB="18288">
+                    <a:solidFill>
+                      <a:srgbClr val="ECF1F6"/>
+                    </a:solidFill>
+                  </a:tcPr>
+                </a:tc>
+                <a:tc>
+                  <a:txBody>
+                    <a:bodyPr wrap="square"/>
+                    <a:lstStyle/>
+                    <a:p>
+                      <a:r>
+                        <a:rPr sz="1100" b="0">
+                          <a:solidFill>
+                            <a:srgbClr val="282828"/>
+                          </a:solidFill>
+                          <a:latin typeface="Arial"/>
+                        </a:rPr>
+                        <a:t>1.003 / 1 pm / 10645</a:t>
+                      </a:r>
+                    </a:p>
+                  </a:txBody>
+                  <a:tcPr marL="54864" marR="54864" marT="18288" marB="18288">
+                    <a:solidFill>
+                      <a:srgbClr val="ECF1F6"/>
+                    </a:solidFill>
+                  </a:tcPr>
+                </a:tc>
+                <a:tc>
+                  <a:txBody>
+                    <a:bodyPr wrap="square"/>
+                    <a:lstStyle/>
+                    <a:p>
+                      <a:r>
+                        <a:rPr sz="1100" b="0">
+                          <a:solidFill>
+                            <a:srgbClr val="282828"/>
+                          </a:solidFill>
+                          <a:latin typeface="Arial"/>
+                        </a:rPr>
+                        <a:t>1.004 / 1.4 pm / 7741</a:t>
+                      </a:r>
+                    </a:p>
+                  </a:txBody>
+                  <a:tcPr marL="54864" marR="54864" marT="18288" marB="18288">
+                    <a:solidFill>
+                      <a:srgbClr val="ECF1F6"/>
+                    </a:solidFill>
+                  </a:tcPr>
+                </a:tc>
+                <a:tc>
+                  <a:txBody>
+                    <a:bodyPr wrap="square"/>
+                    <a:lstStyle/>
+                    <a:p>
+                      <a:r>
+                        <a:rPr sz="1100" b="0">
+                          <a:solidFill>
+                            <a:srgbClr val="282828"/>
+                          </a:solidFill>
+                          <a:latin typeface="Arial"/>
+                        </a:rPr>
+                        <a:t>0.986 / 2.2 pm / 6472</a:t>
+                      </a:r>
+                    </a:p>
+                  </a:txBody>
+                  <a:tcPr marL="54864" marR="54864" marT="18288" marB="18288">
+                    <a:solidFill>
+                      <a:srgbClr val="ECF1F6"/>
+                    </a:solidFill>
+                  </a:tcPr>
+                </a:tc>
+                <a:tc>
+                  <a:txBody>
+                    <a:bodyPr wrap="square"/>
+                    <a:lstStyle/>
+                    <a:p>
+                      <a:r>
+                        <a:rPr sz="1100" b="0">
+                          <a:solidFill>
+                            <a:srgbClr val="282828"/>
+                          </a:solidFill>
+                          <a:latin typeface="Arial"/>
+                        </a:rPr>
+                        <a:t>0.986 / 2.3 pm / 6044</a:t>
+                      </a:r>
+                    </a:p>
+                  </a:txBody>
+                  <a:tcPr marL="54864" marR="54864" marT="18288" marB="18288">
+                    <a:solidFill>
+                      <a:srgbClr val="ECF1F6"/>
+                    </a:solidFill>
+                  </a:tcPr>
+                </a:tc>
+                <a:tc>
+                  <a:txBody>
+                    <a:bodyPr wrap="square"/>
+                    <a:lstStyle/>
+                    <a:p>
+                      <a:r>
+                        <a:rPr sz="1100" b="0">
+                          <a:solidFill>
+                            <a:srgbClr val="282828"/>
+                          </a:solidFill>
+                          <a:latin typeface="Arial"/>
+                        </a:rPr>
+                        <a:t>0.992 / 2.2 pm (lens), 0.992 / 2.4 (mirrors)</a:t>
+                      </a:r>
+                    </a:p>
+                  </a:txBody>
+                  <a:tcPr marL="54864" marR="54864" marT="18288" marB="18288">
+                    <a:solidFill>
+                      <a:srgbClr val="ECF1F6"/>
+                    </a:solidFill>
+                  </a:tcPr>
+                </a:tc>
+              </a:tr>
+              <a:tr h="468630">
+                <a:tc>
+                  <a:txBody>
+                    <a:bodyPr wrap="square"/>
+                    <a:lstStyle/>
+                    <a:p>
+                      <a:r>
+                        <a:rPr sz="1100" b="0">
+                          <a:solidFill>
+                            <a:srgbClr val="282828"/>
+                          </a:solidFill>
+                          <a:latin typeface="Arial"/>
+                        </a:rPr>
+                        <a:t>1 nm on the grid (112-120 sites)</a:t>
+                      </a:r>
+                    </a:p>
+                  </a:txBody>
+                  <a:tcPr marL="54864" marR="54864" marT="18288" marB="18288">
+                    <a:solidFill>
+                      <a:srgbClr val="FFFFFF"/>
+                    </a:solidFill>
+                  </a:tcPr>
+                </a:tc>
+                <a:tc>
+                  <a:txBody>
+                    <a:bodyPr wrap="square"/>
+                    <a:lstStyle/>
+                    <a:p>
+                      <a:r>
+                        <a:rPr sz="1100" b="0">
+                          <a:solidFill>
+                            <a:srgbClr val="282828"/>
+                          </a:solidFill>
+                          <a:latin typeface="Arial"/>
+                        </a:rPr>
+                        <a:t>0.754 / 61.5 pm / 135</a:t>
+                      </a:r>
+                    </a:p>
+                  </a:txBody>
+                  <a:tcPr marL="54864" marR="54864" marT="18288" marB="18288">
+                    <a:solidFill>
+                      <a:srgbClr val="FFFFFF"/>
+                    </a:solidFill>
+                  </a:tcPr>
+                </a:tc>
+                <a:tc>
+                  <a:txBody>
+                    <a:bodyPr wrap="square"/>
+                    <a:lstStyle/>
+                    <a:p>
+                      <a:r>
+                        <a:rPr sz="1100" b="0">
+                          <a:solidFill>
+                            <a:srgbClr val="282828"/>
+                          </a:solidFill>
+                          <a:latin typeface="Arial"/>
+                        </a:rPr>
+                        <a:t>0.993 / 10 pm / 246</a:t>
+                      </a:r>
+                    </a:p>
+                  </a:txBody>
+                  <a:tcPr marL="54864" marR="54864" marT="18288" marB="18288">
+                    <a:solidFill>
+                      <a:srgbClr val="FFFFFF"/>
+                    </a:solidFill>
+                  </a:tcPr>
+                </a:tc>
+                <a:tc>
+                  <a:txBody>
+                    <a:bodyPr wrap="square"/>
+                    <a:lstStyle/>
+                    <a:p>
+                      <a:r>
+                        <a:rPr sz="1100" b="0">
+                          <a:solidFill>
+                            <a:srgbClr val="282828"/>
+                          </a:solidFill>
+                          <a:latin typeface="Arial"/>
+                        </a:rPr>
+                        <a:t>0.981 / 4.5 pm / 309</a:t>
+                      </a:r>
+                    </a:p>
+                  </a:txBody>
+                  <a:tcPr marL="54864" marR="54864" marT="18288" marB="18288">
+                    <a:solidFill>
+                      <a:srgbClr val="FFFFFF"/>
+                    </a:solidFill>
+                  </a:tcPr>
+                </a:tc>
+                <a:tc>
+                  <a:txBody>
+                    <a:bodyPr wrap="square"/>
+                    <a:lstStyle/>
+                    <a:p>
+                      <a:r>
+                        <a:rPr sz="1100" b="0">
+                          <a:solidFill>
+                            <a:srgbClr val="282828"/>
+                          </a:solidFill>
+                          <a:latin typeface="Arial"/>
+                        </a:rPr>
+                        <a:t>0.981 / 4.4 pm / 310</a:t>
+                      </a:r>
+                    </a:p>
+                  </a:txBody>
+                  <a:tcPr marL="54864" marR="54864" marT="18288" marB="18288">
+                    <a:solidFill>
+                      <a:srgbClr val="FFFFFF"/>
+                    </a:solidFill>
+                  </a:tcPr>
+                </a:tc>
+                <a:tc>
+                  <a:txBody>
+                    <a:bodyPr wrap="square"/>
+                    <a:lstStyle/>
+                    <a:p>
+                      <a:r>
+                        <a:rPr sz="1100" b="0">
+                          <a:solidFill>
+                            <a:srgbClr val="282828"/>
+                          </a:solidFill>
+                          <a:latin typeface="Arial"/>
+                        </a:rPr>
+                        <a:t>0.999 / 4 pm</a:t>
+                      </a:r>
+                    </a:p>
+                  </a:txBody>
+                  <a:tcPr marL="54864" marR="54864" marT="18288" marB="18288">
+                    <a:solidFill>
+                      <a:srgbClr val="FFFFFF"/>
+                    </a:solidFill>
+                  </a:tcPr>
+                </a:tc>
+              </a:tr>
+              <a:tr h="657225">
+                <a:tc>
+                  <a:txBody>
+                    <a:bodyPr wrap="square"/>
+                    <a:lstStyle/>
+                    <a:p>
+                      <a:r>
+                        <a:rPr sz="1100" b="0">
+                          <a:solidFill>
+                            <a:srgbClr val="282828"/>
+                          </a:solidFill>
+                          <a:latin typeface="Arial"/>
+                        </a:rPr>
+                        <a:t>capture to 10%, single site / grid</a:t>
+                      </a:r>
+                    </a:p>
+                  </a:txBody>
+                  <a:tcPr marL="54864" marR="54864" marT="18288" marB="18288">
+                    <a:solidFill>
+                      <a:srgbClr val="ECF1F6"/>
+                    </a:solidFill>
+                  </a:tcPr>
+                </a:tc>
+                <a:tc>
+                  <a:txBody>
+                    <a:bodyPr wrap="square"/>
+                    <a:lstStyle/>
+                    <a:p>
+                      <a:r>
+                        <a:rPr sz="1100" b="0">
+                          <a:solidFill>
+                            <a:srgbClr val="282828"/>
+                          </a:solidFill>
+                          <a:latin typeface="Arial"/>
+                        </a:rPr>
+                        <a:t>480 nm and beyond / outside at the first rung</a:t>
+                      </a:r>
+                    </a:p>
+                  </a:txBody>
+                  <a:tcPr marL="54864" marR="54864" marT="18288" marB="18288">
+                    <a:solidFill>
+                      <a:srgbClr val="ECF1F6"/>
+                    </a:solidFill>
+                  </a:tcPr>
+                </a:tc>
+                <a:tc>
+                  <a:txBody>
+                    <a:bodyPr wrap="square"/>
+                    <a:lstStyle/>
+                    <a:p>
+                      <a:r>
+                        <a:rPr sz="1100" b="0">
+                          <a:solidFill>
+                            <a:srgbClr val="282828"/>
+                          </a:solidFill>
+                          <a:latin typeface="Arial"/>
+                        </a:rPr>
+                        <a:t>480+ / 480+</a:t>
+                      </a:r>
+                    </a:p>
+                  </a:txBody>
+                  <a:tcPr marL="54864" marR="54864" marT="18288" marB="18288">
+                    <a:solidFill>
+                      <a:srgbClr val="ECF1F6"/>
+                    </a:solidFill>
+                  </a:tcPr>
+                </a:tc>
+                <a:tc>
+                  <a:txBody>
+                    <a:bodyPr wrap="square"/>
+                    <a:lstStyle/>
+                    <a:p>
+                      <a:r>
+                        <a:rPr sz="1100" b="0">
+                          <a:solidFill>
+                            <a:srgbClr val="282828"/>
+                          </a:solidFill>
+                          <a:latin typeface="Arial"/>
+                        </a:rPr>
+                        <a:t>480+ / 480+</a:t>
+                      </a:r>
+                    </a:p>
+                  </a:txBody>
+                  <a:tcPr marL="54864" marR="54864" marT="18288" marB="18288">
+                    <a:solidFill>
+                      <a:srgbClr val="ECF1F6"/>
+                    </a:solidFill>
+                  </a:tcPr>
+                </a:tc>
+                <a:tc>
+                  <a:txBody>
+                    <a:bodyPr wrap="square"/>
+                    <a:lstStyle/>
+                    <a:p>
+                      <a:r>
+                        <a:rPr sz="1100" b="0">
+                          <a:solidFill>
+                            <a:srgbClr val="282828"/>
+                          </a:solidFill>
+                          <a:latin typeface="Arial"/>
+                        </a:rPr>
+                        <a:t>480+ / 480+</a:t>
+                      </a:r>
+                    </a:p>
+                  </a:txBody>
+                  <a:tcPr marL="54864" marR="54864" marT="18288" marB="18288">
+                    <a:solidFill>
+                      <a:srgbClr val="ECF1F6"/>
+                    </a:solidFill>
+                  </a:tcPr>
+                </a:tc>
+                <a:tc>
+                  <a:txBody>
+                    <a:bodyPr wrap="square"/>
+                    <a:lstStyle/>
+                    <a:p>
+                      <a:r>
+                        <a:rPr sz="1100" b="0">
+                          <a:solidFill>
+                            <a:srgbClr val="282828"/>
+                          </a:solidFill>
+                          <a:latin typeface="Arial"/>
+                        </a:rPr>
+                        <a:t>322 / 480 and beyond</a:t>
+                      </a:r>
+                    </a:p>
+                  </a:txBody>
+                  <a:tcPr marL="54864" marR="54864" marT="18288" marB="18288">
+                    <a:solidFill>
+                      <a:srgbClr val="ECF1F6"/>
                     </a:solidFill>
                   </a:tcPr>
                 </a:tc>
@@ -25676,75 +26258,347 @@
                           </a:solidFill>
                           <a:latin typeface="Arial"/>
                         </a:rPr>
-                        <a:t>flat-mirror null</a:t>
-                      </a:r>
-                    </a:p>
-                  </a:txBody>
-                  <a:tcPr marL="54864" marR="54864" marT="18288" marB="18288">
-                    <a:solidFill>
-                      <a:srgbClr val="FFFFFF"/>
-                    </a:solidFill>
-                  </a:tcPr>
-                </a:tc>
-                <a:tc>
-                  <a:txBody>
-                    <a:bodyPr wrap="square"/>
-                    <a:lstStyle/>
-                    <a:p>
-                      <a:r>
-                        <a:rPr sz="1100" b="0">
-                          <a:solidFill>
-                            <a:srgbClr val="282828"/>
-                          </a:solidFill>
-                          <a:latin typeface="Arial"/>
-                        </a:rPr>
-                        <a:t>92.4 nm rms</a:t>
-                      </a:r>
-                    </a:p>
-                  </a:txBody>
-                  <a:tcPr marL="54864" marR="54864" marT="18288" marB="18288">
-                    <a:solidFill>
-                      <a:srgbClr val="FFFFFF"/>
-                    </a:solidFill>
-                  </a:tcPr>
-                </a:tc>
-                <a:tc>
-                  <a:txBody>
-                    <a:bodyPr wrap="square"/>
-                    <a:lstStyle/>
-                    <a:p>
-                      <a:r>
-                        <a:rPr sz="1100" b="0">
-                          <a:solidFill>
-                            <a:srgbClr val="282828"/>
-                          </a:solidFill>
-                          <a:latin typeface="Arial"/>
-                        </a:rPr>
-                        <a:t>26.3 nm</a:t>
-                      </a:r>
-                    </a:p>
-                  </a:txBody>
-                  <a:tcPr marL="54864" marR="54864" marT="18288" marB="18288">
-                    <a:solidFill>
-                      <a:srgbClr val="FFFFFF"/>
-                    </a:solidFill>
-                  </a:tcPr>
-                </a:tc>
-                <a:tc>
-                  <a:txBody>
-                    <a:bodyPr wrap="square"/>
-                    <a:lstStyle/>
-                    <a:p>
-                      <a:r>
-                        <a:rPr sz="1100" b="0">
-                          <a:solidFill>
-                            <a:srgbClr val="282828"/>
-                          </a:solidFill>
-                          <a:latin typeface="Arial"/>
-                        </a:rPr>
-                        <a:t>0.13 nm lens / 0.03 mirrors</a:t>
-                      </a:r>
-                    </a:p>
+                        <a:t>pupil image on the 96 mm beam</a:t>
+                      </a:r>
+                    </a:p>
+                  </a:txBody>
+                  <a:tcPr marL="54864" marR="54864" marT="18288" marB="18288">
+                    <a:solidFill>
+                      <a:srgbClr val="FFFFFF"/>
+                    </a:solidFill>
+                  </a:tcPr>
+                </a:tc>
+                <a:tc>
+                  <a:txBody>
+                    <a:bodyPr wrap="square"/>
+                    <a:lstStyle/>
+                    <a:p>
+                      <a:r>
+                        <a:rPr sz="1100" b="0">
+                          <a:solidFill>
+                            <a:srgbClr val="282828"/>
+                          </a:solidFill>
+                          <a:latin typeface="Arial"/>
+                        </a:rPr>
+                        <a:t>9.5 mm (341 px)</a:t>
+                      </a:r>
+                    </a:p>
+                  </a:txBody>
+                  <a:tcPr marL="54864" marR="54864" marT="18288" marB="18288">
+                    <a:solidFill>
+                      <a:srgbClr val="FFFFFF"/>
+                    </a:solidFill>
+                  </a:tcPr>
+                </a:tc>
+                <a:tc>
+                  <a:txBody>
+                    <a:bodyPr wrap="square"/>
+                    <a:lstStyle/>
+                    <a:p>
+                      <a:r>
+                        <a:rPr sz="1100" b="0">
+                          <a:solidFill>
+                            <a:srgbClr val="282828"/>
+                          </a:solidFill>
+                          <a:latin typeface="Arial"/>
+                        </a:rPr>
+                        <a:t>11.3 mm (384 px)</a:t>
+                      </a:r>
+                    </a:p>
+                  </a:txBody>
+                  <a:tcPr marL="54864" marR="54864" marT="18288" marB="18288">
+                    <a:solidFill>
+                      <a:srgbClr val="FFFFFF"/>
+                    </a:solidFill>
+                  </a:tcPr>
+                </a:tc>
+                <a:tc>
+                  <a:txBody>
+                    <a:bodyPr wrap="square"/>
+                    <a:lstStyle/>
+                    <a:p>
+                      <a:r>
+                        <a:rPr sz="1100" b="0">
+                          <a:solidFill>
+                            <a:srgbClr val="282828"/>
+                          </a:solidFill>
+                          <a:latin typeface="Arial"/>
+                        </a:rPr>
+                        <a:t>11.1 mm (384 px)</a:t>
+                      </a:r>
+                    </a:p>
+                  </a:txBody>
+                  <a:tcPr marL="54864" marR="54864" marT="18288" marB="18288">
+                    <a:solidFill>
+                      <a:srgbClr val="FFFFFF"/>
+                    </a:solidFill>
+                  </a:tcPr>
+                </a:tc>
+                <a:tc>
+                  <a:txBody>
+                    <a:bodyPr wrap="square"/>
+                    <a:lstStyle/>
+                    <a:p>
+                      <a:r>
+                        <a:rPr sz="1100" b="0">
+                          <a:solidFill>
+                            <a:srgbClr val="282828"/>
+                          </a:solidFill>
+                          <a:latin typeface="Arial"/>
+                        </a:rPr>
+                        <a:t>11.1 mm</a:t>
+                      </a:r>
+                    </a:p>
+                  </a:txBody>
+                  <a:tcPr marL="54864" marR="54864" marT="18288" marB="18288">
+                    <a:solidFill>
+                      <a:srgbClr val="FFFFFF"/>
+                    </a:solidFill>
+                  </a:tcPr>
+                </a:tc>
+                <a:tc>
+                  <a:txBody>
+                    <a:bodyPr wrap="square"/>
+                    <a:lstStyle/>
+                    <a:p>
+                      <a:r>
+                        <a:rPr sz="1100" b="0">
+                          <a:solidFill>
+                            <a:srgbClr val="282828"/>
+                          </a:solidFill>
+                          <a:latin typeface="Arial"/>
+                        </a:rPr>
+                        <a:t>7.8 / 8.0 mm</a:t>
+                      </a:r>
+                    </a:p>
+                  </a:txBody>
+                  <a:tcPr marL="54864" marR="54864" marT="18288" marB="18288">
+                    <a:solidFill>
+                      <a:srgbClr val="FFFFFF"/>
+                    </a:solidFill>
+                  </a:tcPr>
+                </a:tc>
+              </a:tr>
+              <a:tr h="657225">
+                <a:tc>
+                  <a:txBody>
+                    <a:bodyPr wrap="square"/>
+                    <a:lstStyle/>
+                    <a:p>
+                      <a:r>
+                        <a:rPr sz="1100" b="0">
+                          <a:solidFill>
+                            <a:srgbClr val="282828"/>
+                          </a:solidFill>
+                          <a:latin typeface="Arial"/>
+                        </a:rPr>
+                        <a:t>pupil imaging on these decks (tg96_pupilsim): image surface vs the camera / Nyquist gain / distortion / 30 nm surface error</a:t>
+                      </a:r>
+                    </a:p>
+                  </a:txBody>
+                  <a:tcPr marL="54864" marR="54864" marT="18288" marB="18288">
+                    <a:solidFill>
+                      <a:srgbClr val="ECF1F6"/>
+                    </a:solidFill>
+                  </a:tcPr>
+                </a:tc>
+                <a:tc>
+                  <a:txBody>
+                    <a:bodyPr wrap="square"/>
+                    <a:lstStyle/>
+                    <a:p>
+                      <a:r>
+                        <a:rPr sz="1100" b="0">
+                          <a:solidFill>
+                            <a:srgbClr val="282828"/>
+                          </a:solidFill>
+                          <a:latin typeface="Arial"/>
+                        </a:rPr>
+                        <a:t>within ±0.3 mm / 0.9999 / 0.008 mm / 0.08 nm</a:t>
+                      </a:r>
+                    </a:p>
+                  </a:txBody>
+                  <a:tcPr marL="54864" marR="54864" marT="18288" marB="18288">
+                    <a:solidFill>
+                      <a:srgbClr val="ECF1F6"/>
+                    </a:solidFill>
+                  </a:tcPr>
+                </a:tc>
+                <a:tc>
+                  <a:txBody>
+                    <a:bodyPr wrap="square"/>
+                    <a:lstStyle/>
+                    <a:p>
+                      <a:r>
+                        <a:rPr sz="1100" b="0">
+                          <a:solidFill>
+                            <a:srgbClr val="282828"/>
+                          </a:solidFill>
+                          <a:latin typeface="Arial"/>
+                        </a:rPr>
+                        <a:t>within −0.6 to +0.4 mm / 0.9996 / 0.72 mm (the parabola pair's mapping) / 0.10 nm</a:t>
+                      </a:r>
+                    </a:p>
+                  </a:txBody>
+                  <a:tcPr marL="54864" marR="54864" marT="18288" marB="18288">
+                    <a:solidFill>
+                      <a:srgbClr val="ECF1F6"/>
+                    </a:solidFill>
+                  </a:tcPr>
+                </a:tc>
+                <a:tc>
+                  <a:txBody>
+                    <a:bodyPr wrap="square"/>
+                    <a:lstStyle/>
+                    <a:p>
+                      <a:r>
+                        <a:rPr sz="1100" b="0">
+                          <a:solidFill>
+                            <a:srgbClr val="282828"/>
+                          </a:solidFill>
+                          <a:latin typeface="Arial"/>
+                        </a:rPr>
+                        <a:t>tuned tail: 2.6 to 6 mm / 0.954 / 0.27 mm / 1.2 nm</a:t>
+                      </a:r>
+                    </a:p>
+                  </a:txBody>
+                  <a:tcPr marL="54864" marR="54864" marT="18288" marB="18288">
+                    <a:solidFill>
+                      <a:srgbClr val="ECF1F6"/>
+                    </a:solidFill>
+                  </a:tcPr>
+                </a:tc>
+                <a:tc>
+                  <a:txBody>
+                    <a:bodyPr wrap="square"/>
+                    <a:lstStyle/>
+                    <a:p/>
+                  </a:txBody>
+                  <a:tcPr marL="54864" marR="54864" marT="18288" marB="18288">
+                    <a:solidFill>
+                      <a:srgbClr val="ECF1F6"/>
+                    </a:solidFill>
+                  </a:tcPr>
+                </a:tc>
+                <a:tc>
+                  <a:txBody>
+                    <a:bodyPr wrap="square"/>
+                    <a:lstStyle/>
+                    <a:p/>
+                  </a:txBody>
+                  <a:tcPr marL="54864" marR="54864" marT="18288" marB="18288">
+                    <a:solidFill>
+                      <a:srgbClr val="ECF1F6"/>
+                    </a:solidFill>
+                  </a:tcPr>
+                </a:tc>
+              </a:tr>
+              <a:tr h="657225">
+                <a:tc>
+                  <a:txBody>
+                    <a:bodyPr wrap="square"/>
+                    <a:lstStyle/>
+                    <a:p>
+                      <a:r>
+                        <a:rPr sz="1100" b="0">
+                          <a:solidFill>
+                            <a:srgbClr val="282828"/>
+                          </a:solidFill>
+                          <a:latin typeface="Arial"/>
+                        </a:rPr>
+                        <a:t>the sensors on the mirror rig at 385 px, substrates in: stepped-Zernike rows, single / grid</a:t>
+                      </a:r>
+                    </a:p>
+                  </a:txBody>
+                  <a:tcPr marL="54864" marR="54864" marT="18288" marB="18288">
+                    <a:solidFill>
+                      <a:srgbClr val="FFFFFF"/>
+                    </a:solidFill>
+                  </a:tcPr>
+                </a:tc>
+                <a:tc>
+                  <a:txBody>
+                    <a:bodyPr wrap="square"/>
+                    <a:lstStyle/>
+                    <a:p>
+                      <a:r>
+                        <a:rPr sz="1100" b="0">
+                          <a:solidFill>
+                            <a:srgbClr val="282828"/>
+                          </a:solidFill>
+                          <a:latin typeface="Arial"/>
+                        </a:rPr>
+                        <a:t>—</a:t>
+                      </a:r>
+                    </a:p>
+                  </a:txBody>
+                  <a:tcPr marL="54864" marR="54864" marT="18288" marB="18288">
+                    <a:solidFill>
+                      <a:srgbClr val="FFFFFF"/>
+                    </a:solidFill>
+                  </a:tcPr>
+                </a:tc>
+                <a:tc>
+                  <a:txBody>
+                    <a:bodyPr wrap="square"/>
+                    <a:lstStyle/>
+                    <a:p>
+                      <a:r>
+                        <a:rPr sz="1100" b="0">
+                          <a:solidFill>
+                            <a:srgbClr val="282828"/>
+                          </a:solidFill>
+                          <a:latin typeface="Arial"/>
+                        </a:rPr>
+                        <a:t>0.993 / 5 pm; 0.995 / 4 pm</a:t>
+                      </a:r>
+                    </a:p>
+                  </a:txBody>
+                  <a:tcPr marL="54864" marR="54864" marT="18288" marB="18288">
+                    <a:solidFill>
+                      <a:srgbClr val="FFFFFF"/>
+                    </a:solidFill>
+                  </a:tcPr>
+                </a:tc>
+                <a:tc>
+                  <a:txBody>
+                    <a:bodyPr wrap="square"/>
+                    <a:lstStyle/>
+                    <a:p>
+                      <a:r>
+                        <a:rPr sz="1100" b="0">
+                          <a:solidFill>
+                            <a:srgbClr val="282828"/>
+                          </a:solidFill>
+                          <a:latin typeface="Arial"/>
+                        </a:rPr>
+                        <a:t>0.991 / 4; 0.999 / 4 (no substrates)</a:t>
+                      </a:r>
+                    </a:p>
+                  </a:txBody>
+                  <a:tcPr marL="54864" marR="54864" marT="18288" marB="18288">
+                    <a:solidFill>
+                      <a:srgbClr val="FFFFFF"/>
+                    </a:solidFill>
+                  </a:tcPr>
+                </a:tc>
+                <a:tc>
+                  <a:txBody>
+                    <a:bodyPr wrap="square"/>
+                    <a:lstStyle/>
+                    <a:p/>
+                  </a:txBody>
+                  <a:tcPr marL="54864" marR="54864" marT="18288" marB="18288">
+                    <a:solidFill>
+                      <a:srgbClr val="FFFFFF"/>
+                    </a:solidFill>
+                  </a:tcPr>
+                </a:tc>
+                <a:tc>
+                  <a:txBody>
+                    <a:bodyPr wrap="square"/>
+                    <a:lstStyle/>
+                    <a:p/>
                   </a:txBody>
                   <a:tcPr marL="54864" marR="54864" marT="18288" marB="18288">
                     <a:solidFill>
@@ -25766,7 +26620,7 @@
                           </a:solidFill>
                           <a:latin typeface="Arial"/>
                         </a:rPr>
-                        <a:t>10 nm on one actuator: gain / error / SNR</a:t>
+                        <a:t>the sensors' capture to 10%: stepped / vector / pinhole</a:t>
                       </a:r>
                     </a:p>
                   </a:txBody>
@@ -25788,7 +26642,7 @@
                           </a:solidFill>
                           <a:latin typeface="Arial"/>
                         </a:rPr>
-                        <a:t>1.003 / 1 pm / 10645</a:t>
+                        <a:t>—</a:t>
                       </a:r>
                     </a:p>
                   </a:txBody>
@@ -25810,7 +26664,7 @@
                           </a:solidFill>
                           <a:latin typeface="Arial"/>
                         </a:rPr>
-                        <a:t>0.986 / 2.2 pm / 6472</a:t>
+                        <a:t>35 / 51 / 42 nm</a:t>
                       </a:r>
                     </a:p>
                   </a:txBody>
@@ -25832,7 +26686,7 @@
                           </a:solidFill>
                           <a:latin typeface="Arial"/>
                         </a:rPr>
-                        <a:t>0.992 / 2.2 pm (lens), 0.992 / 2.4 (mirrors)</a:t>
+                        <a:t>36 / 59 / 52 nm (no substrates)</a:t>
                       </a:r>
                     </a:p>
                   </a:txBody>
@@ -25842,113 +26696,11 @@
                     </a:solidFill>
                   </a:tcPr>
                 </a:tc>
-              </a:tr>
-              <a:tr h="280035">
-                <a:tc>
-                  <a:txBody>
-                    <a:bodyPr wrap="square"/>
-                    <a:lstStyle/>
-                    <a:p>
-                      <a:r>
-                        <a:rPr sz="1100" b="0">
-                          <a:solidFill>
-                            <a:srgbClr val="282828"/>
-                          </a:solidFill>
-                          <a:latin typeface="Arial"/>
-                        </a:rPr>
-                        <a:t>1 nm on a 112-site grid</a:t>
-                      </a:r>
-                    </a:p>
-                  </a:txBody>
-                  <a:tcPr marL="54864" marR="54864" marT="18288" marB="18288">
-                    <a:solidFill>
-                      <a:srgbClr val="FFFFFF"/>
-                    </a:solidFill>
-                  </a:tcPr>
-                </a:tc>
-                <a:tc>
-                  <a:txBody>
-                    <a:bodyPr wrap="square"/>
-                    <a:lstStyle/>
-                    <a:p>
-                      <a:r>
-                        <a:rPr sz="1100" b="0">
-                          <a:solidFill>
-                            <a:srgbClr val="282828"/>
-                          </a:solidFill>
-                          <a:latin typeface="Arial"/>
-                        </a:rPr>
-                        <a:t>0.754 / 61.5 pm / 135</a:t>
-                      </a:r>
-                    </a:p>
-                  </a:txBody>
-                  <a:tcPr marL="54864" marR="54864" marT="18288" marB="18288">
-                    <a:solidFill>
-                      <a:srgbClr val="FFFFFF"/>
-                    </a:solidFill>
-                  </a:tcPr>
-                </a:tc>
-                <a:tc>
-                  <a:txBody>
-                    <a:bodyPr wrap="square"/>
-                    <a:lstStyle/>
-                    <a:p>
-                      <a:r>
-                        <a:rPr sz="1100" b="0">
-                          <a:solidFill>
-                            <a:srgbClr val="282828"/>
-                          </a:solidFill>
-                          <a:latin typeface="Arial"/>
-                        </a:rPr>
-                        <a:t>0.981 / 4.5 pm / 309</a:t>
-                      </a:r>
-                    </a:p>
-                  </a:txBody>
-                  <a:tcPr marL="54864" marR="54864" marT="18288" marB="18288">
-                    <a:solidFill>
-                      <a:srgbClr val="FFFFFF"/>
-                    </a:solidFill>
-                  </a:tcPr>
-                </a:tc>
-                <a:tc>
-                  <a:txBody>
-                    <a:bodyPr wrap="square"/>
-                    <a:lstStyle/>
-                    <a:p>
-                      <a:r>
-                        <a:rPr sz="1100" b="0">
-                          <a:solidFill>
-                            <a:srgbClr val="282828"/>
-                          </a:solidFill>
-                          <a:latin typeface="Arial"/>
-                        </a:rPr>
-                        <a:t>0.999 / 4 pm</a:t>
-                      </a:r>
-                    </a:p>
-                  </a:txBody>
-                  <a:tcPr marL="54864" marR="54864" marT="18288" marB="18288">
-                    <a:solidFill>
-                      <a:srgbClr val="FFFFFF"/>
-                    </a:solidFill>
-                  </a:tcPr>
-                </a:tc>
-              </a:tr>
-              <a:tr h="468630">
-                <a:tc>
-                  <a:txBody>
-                    <a:bodyPr wrap="square"/>
-                    <a:lstStyle/>
-                    <a:p>
-                      <a:r>
-                        <a:rPr sz="1100" b="0">
-                          <a:solidFill>
-                            <a:srgbClr val="282828"/>
-                          </a:solidFill>
-                          <a:latin typeface="Arial"/>
-                        </a:rPr>
-                        <a:t>capture to 10%, single site / grid</a:t>
-                      </a:r>
-                    </a:p>
+                <a:tc>
+                  <a:txBody>
+                    <a:bodyPr wrap="square"/>
+                    <a:lstStyle/>
+                    <a:p/>
                   </a:txBody>
                   <a:tcPr marL="54864" marR="54864" marT="18288" marB="18288">
                     <a:solidFill>
@@ -25960,421 +26712,7 @@
                   <a:txBody>
                     <a:bodyPr wrap="square"/>
                     <a:lstStyle/>
-                    <a:p>
-                      <a:r>
-                        <a:rPr sz="1100" b="0">
-                          <a:solidFill>
-                            <a:srgbClr val="282828"/>
-                          </a:solidFill>
-                          <a:latin typeface="Arial"/>
-                        </a:rPr>
-                        <a:t>480 nm and beyond / outside at the first rung</a:t>
-                      </a:r>
-                    </a:p>
-                  </a:txBody>
-                  <a:tcPr marL="54864" marR="54864" marT="18288" marB="18288">
-                    <a:solidFill>
-                      <a:srgbClr val="ECF1F6"/>
-                    </a:solidFill>
-                  </a:tcPr>
-                </a:tc>
-                <a:tc>
-                  <a:txBody>
-                    <a:bodyPr wrap="square"/>
-                    <a:lstStyle/>
-                    <a:p>
-                      <a:r>
-                        <a:rPr sz="1100" b="0">
-                          <a:solidFill>
-                            <a:srgbClr val="282828"/>
-                          </a:solidFill>
-                          <a:latin typeface="Arial"/>
-                        </a:rPr>
-                        <a:t>480 and beyond / 480 and beyond</a:t>
-                      </a:r>
-                    </a:p>
-                  </a:txBody>
-                  <a:tcPr marL="54864" marR="54864" marT="18288" marB="18288">
-                    <a:solidFill>
-                      <a:srgbClr val="ECF1F6"/>
-                    </a:solidFill>
-                  </a:tcPr>
-                </a:tc>
-                <a:tc>
-                  <a:txBody>
-                    <a:bodyPr wrap="square"/>
-                    <a:lstStyle/>
-                    <a:p>
-                      <a:r>
-                        <a:rPr sz="1100" b="0">
-                          <a:solidFill>
-                            <a:srgbClr val="282828"/>
-                          </a:solidFill>
-                          <a:latin typeface="Arial"/>
-                        </a:rPr>
-                        <a:t>322 / 480 and beyond</a:t>
-                      </a:r>
-                    </a:p>
-                  </a:txBody>
-                  <a:tcPr marL="54864" marR="54864" marT="18288" marB="18288">
-                    <a:solidFill>
-                      <a:srgbClr val="ECF1F6"/>
-                    </a:solidFill>
-                  </a:tcPr>
-                </a:tc>
-              </a:tr>
-              <a:tr h="280035">
-                <a:tc>
-                  <a:txBody>
-                    <a:bodyPr wrap="square"/>
-                    <a:lstStyle/>
-                    <a:p>
-                      <a:r>
-                        <a:rPr sz="1100" b="0">
-                          <a:solidFill>
-                            <a:srgbClr val="282828"/>
-                          </a:solidFill>
-                          <a:latin typeface="Arial"/>
-                        </a:rPr>
-                        <a:t>pupil image on the 96 mm beam</a:t>
-                      </a:r>
-                    </a:p>
-                  </a:txBody>
-                  <a:tcPr marL="54864" marR="54864" marT="18288" marB="18288">
-                    <a:solidFill>
-                      <a:srgbClr val="FFFFFF"/>
-                    </a:solidFill>
-                  </a:tcPr>
-                </a:tc>
-                <a:tc>
-                  <a:txBody>
-                    <a:bodyPr wrap="square"/>
-                    <a:lstStyle/>
-                    <a:p>
-                      <a:r>
-                        <a:rPr sz="1100" b="0">
-                          <a:solidFill>
-                            <a:srgbClr val="282828"/>
-                          </a:solidFill>
-                          <a:latin typeface="Arial"/>
-                        </a:rPr>
-                        <a:t>9.5 mm (341 px)</a:t>
-                      </a:r>
-                    </a:p>
-                  </a:txBody>
-                  <a:tcPr marL="54864" marR="54864" marT="18288" marB="18288">
-                    <a:solidFill>
-                      <a:srgbClr val="FFFFFF"/>
-                    </a:solidFill>
-                  </a:tcPr>
-                </a:tc>
-                <a:tc>
-                  <a:txBody>
-                    <a:bodyPr wrap="square"/>
-                    <a:lstStyle/>
-                    <a:p>
-                      <a:r>
-                        <a:rPr sz="1100" b="0">
-                          <a:solidFill>
-                            <a:srgbClr val="282828"/>
-                          </a:solidFill>
-                          <a:latin typeface="Arial"/>
-                        </a:rPr>
-                        <a:t>11.1 mm (384 px)</a:t>
-                      </a:r>
-                    </a:p>
-                  </a:txBody>
-                  <a:tcPr marL="54864" marR="54864" marT="18288" marB="18288">
-                    <a:solidFill>
-                      <a:srgbClr val="FFFFFF"/>
-                    </a:solidFill>
-                  </a:tcPr>
-                </a:tc>
-                <a:tc>
-                  <a:txBody>
-                    <a:bodyPr wrap="square"/>
-                    <a:lstStyle/>
-                    <a:p>
-                      <a:r>
-                        <a:rPr sz="1100" b="0">
-                          <a:solidFill>
-                            <a:srgbClr val="282828"/>
-                          </a:solidFill>
-                          <a:latin typeface="Arial"/>
-                        </a:rPr>
-                        <a:t>7.8 / 8.0 mm</a:t>
-                      </a:r>
-                    </a:p>
-                  </a:txBody>
-                  <a:tcPr marL="54864" marR="54864" marT="18288" marB="18288">
-                    <a:solidFill>
-                      <a:srgbClr val="FFFFFF"/>
-                    </a:solidFill>
-                  </a:tcPr>
-                </a:tc>
-              </a:tr>
-              <a:tr h="468630">
-                <a:tc>
-                  <a:txBody>
-                    <a:bodyPr wrap="square"/>
-                    <a:lstStyle/>
-                    <a:p>
-                      <a:r>
-                        <a:rPr sz="1100" b="0">
-                          <a:solidFill>
-                            <a:srgbClr val="282828"/>
-                          </a:solidFill>
-                          <a:latin typeface="Arial"/>
-                        </a:rPr>
-                        <a:t>pupil imaging on these decks (tg96_pupilsim): image surface vs the camera / Nyquist gain / distortion / 30 nm surface error</a:t>
-                      </a:r>
-                    </a:p>
-                  </a:txBody>
-                  <a:tcPr marL="54864" marR="54864" marT="18288" marB="18288">
-                    <a:solidFill>
-                      <a:srgbClr val="ECF1F6"/>
-                    </a:solidFill>
-                  </a:tcPr>
-                </a:tc>
-                <a:tc>
-                  <a:txBody>
-                    <a:bodyPr wrap="square"/>
-                    <a:lstStyle/>
-                    <a:p>
-                      <a:r>
-                        <a:rPr sz="1100" b="0">
-                          <a:solidFill>
-                            <a:srgbClr val="282828"/>
-                          </a:solidFill>
-                          <a:latin typeface="Arial"/>
-                        </a:rPr>
-                        <a:t>within ±0.3 mm / 0.9999 / 0.008 mm / 0.08 nm</a:t>
-                      </a:r>
-                    </a:p>
-                  </a:txBody>
-                  <a:tcPr marL="54864" marR="54864" marT="18288" marB="18288">
-                    <a:solidFill>
-                      <a:srgbClr val="ECF1F6"/>
-                    </a:solidFill>
-                  </a:tcPr>
-                </a:tc>
-                <a:tc>
-                  <a:txBody>
-                    <a:bodyPr wrap="square"/>
-                    <a:lstStyle/>
-                    <a:p>
-                      <a:r>
-                        <a:rPr sz="1100" b="0">
-                          <a:solidFill>
-                            <a:srgbClr val="282828"/>
-                          </a:solidFill>
-                          <a:latin typeface="Arial"/>
-                        </a:rPr>
-                        <a:t>within −0.6 to +0.4 mm / 0.9996 / 0.72 mm (the parabola pair's mapping) / 0.10 nm</a:t>
-                      </a:r>
-                    </a:p>
-                  </a:txBody>
-                  <a:tcPr marL="54864" marR="54864" marT="18288" marB="18288">
-                    <a:solidFill>
-                      <a:srgbClr val="ECF1F6"/>
-                    </a:solidFill>
-                  </a:tcPr>
-                </a:tc>
-                <a:tc>
-                  <a:txBody>
-                    <a:bodyPr wrap="square"/>
-                    <a:lstStyle/>
-                    <a:p>
-                      <a:r>
-                        <a:rPr sz="1100" b="0">
-                          <a:solidFill>
-                            <a:srgbClr val="282828"/>
-                          </a:solidFill>
-                          <a:latin typeface="Arial"/>
-                        </a:rPr>
-                        <a:t>tuned tail: 2.6 to 6 mm / 0.954 / 0.27 mm / 1.2 nm</a:t>
-                      </a:r>
-                    </a:p>
-                  </a:txBody>
-                  <a:tcPr marL="54864" marR="54864" marT="18288" marB="18288">
-                    <a:solidFill>
-                      <a:srgbClr val="ECF1F6"/>
-                    </a:solidFill>
-                  </a:tcPr>
-                </a:tc>
-              </a:tr>
-              <a:tr h="468630">
-                <a:tc>
-                  <a:txBody>
-                    <a:bodyPr wrap="square"/>
-                    <a:lstStyle/>
-                    <a:p>
-                      <a:r>
-                        <a:rPr sz="1100" b="0">
-                          <a:solidFill>
-                            <a:srgbClr val="282828"/>
-                          </a:solidFill>
-                          <a:latin typeface="Arial"/>
-                        </a:rPr>
-                        <a:t>the sensors on the mirror rig at 385 px, substrates in: stepped-Zernike rows, single / grid</a:t>
-                      </a:r>
-                    </a:p>
-                  </a:txBody>
-                  <a:tcPr marL="54864" marR="54864" marT="18288" marB="18288">
-                    <a:solidFill>
-                      <a:srgbClr val="FFFFFF"/>
-                    </a:solidFill>
-                  </a:tcPr>
-                </a:tc>
-                <a:tc>
-                  <a:txBody>
-                    <a:bodyPr wrap="square"/>
-                    <a:lstStyle/>
-                    <a:p>
-                      <a:r>
-                        <a:rPr sz="1100" b="0">
-                          <a:solidFill>
-                            <a:srgbClr val="282828"/>
-                          </a:solidFill>
-                          <a:latin typeface="Arial"/>
-                        </a:rPr>
-                        <a:t>—</a:t>
-                      </a:r>
-                    </a:p>
-                  </a:txBody>
-                  <a:tcPr marL="54864" marR="54864" marT="18288" marB="18288">
-                    <a:solidFill>
-                      <a:srgbClr val="FFFFFF"/>
-                    </a:solidFill>
-                  </a:tcPr>
-                </a:tc>
-                <a:tc>
-                  <a:txBody>
-                    <a:bodyPr wrap="square"/>
-                    <a:lstStyle/>
-                    <a:p>
-                      <a:r>
-                        <a:rPr sz="1100" b="0">
-                          <a:solidFill>
-                            <a:srgbClr val="282828"/>
-                          </a:solidFill>
-                          <a:latin typeface="Arial"/>
-                        </a:rPr>
-                        <a:t>0.993 / 5 pm; 0.995 / 4 pm</a:t>
-                      </a:r>
-                    </a:p>
-                  </a:txBody>
-                  <a:tcPr marL="54864" marR="54864" marT="18288" marB="18288">
-                    <a:solidFill>
-                      <a:srgbClr val="FFFFFF"/>
-                    </a:solidFill>
-                  </a:tcPr>
-                </a:tc>
-                <a:tc>
-                  <a:txBody>
-                    <a:bodyPr wrap="square"/>
-                    <a:lstStyle/>
-                    <a:p>
-                      <a:r>
-                        <a:rPr sz="1100" b="0">
-                          <a:solidFill>
-                            <a:srgbClr val="282828"/>
-                          </a:solidFill>
-                          <a:latin typeface="Arial"/>
-                        </a:rPr>
-                        <a:t>0.991 / 4; 0.999 / 4 (no substrates)</a:t>
-                      </a:r>
-                    </a:p>
-                  </a:txBody>
-                  <a:tcPr marL="54864" marR="54864" marT="18288" marB="18288">
-                    <a:solidFill>
-                      <a:srgbClr val="FFFFFF"/>
-                    </a:solidFill>
-                  </a:tcPr>
-                </a:tc>
-              </a:tr>
-              <a:tr h="468630">
-                <a:tc>
-                  <a:txBody>
-                    <a:bodyPr wrap="square"/>
-                    <a:lstStyle/>
-                    <a:p>
-                      <a:r>
-                        <a:rPr sz="1100" b="0">
-                          <a:solidFill>
-                            <a:srgbClr val="282828"/>
-                          </a:solidFill>
-                          <a:latin typeface="Arial"/>
-                        </a:rPr>
-                        <a:t>the sensors' capture to 10%: stepped / vector / pinhole</a:t>
-                      </a:r>
-                    </a:p>
-                  </a:txBody>
-                  <a:tcPr marL="54864" marR="54864" marT="18288" marB="18288">
-                    <a:solidFill>
-                      <a:srgbClr val="ECF1F6"/>
-                    </a:solidFill>
-                  </a:tcPr>
-                </a:tc>
-                <a:tc>
-                  <a:txBody>
-                    <a:bodyPr wrap="square"/>
-                    <a:lstStyle/>
-                    <a:p>
-                      <a:r>
-                        <a:rPr sz="1100" b="0">
-                          <a:solidFill>
-                            <a:srgbClr val="282828"/>
-                          </a:solidFill>
-                          <a:latin typeface="Arial"/>
-                        </a:rPr>
-                        <a:t>—</a:t>
-                      </a:r>
-                    </a:p>
-                  </a:txBody>
-                  <a:tcPr marL="54864" marR="54864" marT="18288" marB="18288">
-                    <a:solidFill>
-                      <a:srgbClr val="ECF1F6"/>
-                    </a:solidFill>
-                  </a:tcPr>
-                </a:tc>
-                <a:tc>
-                  <a:txBody>
-                    <a:bodyPr wrap="square"/>
-                    <a:lstStyle/>
-                    <a:p>
-                      <a:r>
-                        <a:rPr sz="1100" b="0">
-                          <a:solidFill>
-                            <a:srgbClr val="282828"/>
-                          </a:solidFill>
-                          <a:latin typeface="Arial"/>
-                        </a:rPr>
-                        <a:t>35 / 51 / 42 nm</a:t>
-                      </a:r>
-                    </a:p>
-                  </a:txBody>
-                  <a:tcPr marL="54864" marR="54864" marT="18288" marB="18288">
-                    <a:solidFill>
-                      <a:srgbClr val="ECF1F6"/>
-                    </a:solidFill>
-                  </a:tcPr>
-                </a:tc>
-                <a:tc>
-                  <a:txBody>
-                    <a:bodyPr wrap="square"/>
-                    <a:lstStyle/>
-                    <a:p>
-                      <a:r>
-                        <a:rPr sz="1100" b="0">
-                          <a:solidFill>
-                            <a:srgbClr val="282828"/>
-                          </a:solidFill>
-                          <a:latin typeface="Arial"/>
-                        </a:rPr>
-                        <a:t>36 / 59 / 52 nm (no substrates)</a:t>
-                      </a:r>
-                    </a:p>
+                    <a:p/>
                   </a:txBody>
                   <a:tcPr marL="54864" marR="54864" marT="18288" marB="18288">
                     <a:solidFill>
@@ -26395,7 +26733,7 @@
         </p:nvSpPr>
         <p:spPr>
           <a:xfrm>
-            <a:off x="411480" y="5096637"/>
+            <a:off x="411480" y="6416802"/>
             <a:ext cx="11368735" cy="274320"/>
           </a:xfrm>
           <a:prstGeom prst="rect">
@@ -26437,6 +26775,22 @@
                 </a:solidFill>
                 <a:latin typeface="Arial"/>
               </a:rPr>
+              <a:t>•  The redo bench restores the lens rig's grid row (0.754 to 0.993) and leaves a 59 nm null; the mirror rig is unchanged by design.  The null that remains on both rigs is the mask plate's spherical aberration in the F/4.2 beam (a 2 mm plate: about 0.1 wave rms), a fixed pattern the reference frame removes and the reading-tuned tail does not chase; TO's null decomposition prices it.</a:t>
+            </a:r>
+          </a:p>
+          <a:p>
+            <a:pPr>
+              <a:spcAft>
+                <a:spcPts val="600"/>
+              </a:spcAft>
+            </a:pPr>
+            <a:r>
+              <a:rPr sz="1500" b="0">
+                <a:solidFill>
+                  <a:srgbClr val="282828"/>
+                </a:solidFill>
+                <a:latin typeface="Arial"/>
+              </a:rPr>
               <a:t>•  The pupil image is not what limits either rig: on the seed tail with the substrates in, the DM images within a third of a millimeter of the camera on lenses (0.9999 at the actuator Nyquist, 0.08 nm on the working surface) and within 0.6 mm on mirrors; the lens rig's 92 nm null is the plate's spherical aberration and the misfed collimator, not the imaging.  The mask plate costs the sensors a little capture (vector 59 to 51 nm, pinhole 52 to 42) and no gain.</a:t>
             </a:r>
           </a:p>
@@ -26466,7 +26820,7 @@
         </p:nvSpPr>
         <p:spPr>
           <a:xfrm>
-            <a:off x="411480" y="8277987"/>
+            <a:off x="411480" y="10728960"/>
             <a:ext cx="11368735" cy="274320"/>
           </a:xfrm>
           <a:prstGeom prst="rect">
@@ -26492,7 +26846,7 @@
                 </a:solidFill>
                 <a:latin typeface="Arial"/>
               </a:rPr>
-              <a:t>Run tags sub96_lens, sub96_oap, pupilsim_sub96_lens, pupilsim_sub96_oap, sub96_oapsens (the Mac, RUNBOOK_mac_cycle3a, 2026-09-17).</a:t>
+              <a:t>Run tags sub96_lens, sub96_oap, pupilsim_sub96_lens, pupilsim_sub96_oap, sub96_oapsens (cycle 3a); redo96_lens, redo96_oap (cycle 3b); the Mac, 2026-09-17.</a:t>
             </a:r>
           </a:p>
         </p:txBody>

--- a/demo_session/deck_gauges_edit.pptx
+++ b/demo_session/deck_gauges_edit.pptx
@@ -25559,7 +25559,7 @@
         </p:nvGraphicFramePr>
         <p:xfrm>
           <a:off x="411480" y="1298448"/>
-          <a:ext cx="11368733" cy="4972050"/>
+          <a:ext cx="11368732" cy="4972050"/>
         </p:xfrm>
         <a:graphic>
           <a:graphicData uri="http://schemas.openxmlformats.org/drawingml/2006/table">
@@ -25568,12 +25568,12 @@
                 <a:tableStyleId>{5C22544A-7EE6-4342-B048-85BDC9FD1C3A}</a:tableStyleId>
               </a:tblPr>
               <a:tblGrid>
-                <a:gridCol w="3217820"/>
-                <a:gridCol w="1177251"/>
-                <a:gridCol w="2119052"/>
-                <a:gridCol w="1308056"/>
-                <a:gridCol w="2107692"/>
-                <a:gridCol w="1438862"/>
+                <a:gridCol w="3345345"/>
+                <a:gridCol w="1223906"/>
+                <a:gridCol w="1740667"/>
+                <a:gridCol w="2203032"/>
+                <a:gridCol w="1359896"/>
+                <a:gridCol w="1495886"/>
               </a:tblGrid>
               <a:tr h="657225">
                 <a:tc>
@@ -26436,6 +26436,28 @@
                           </a:solidFill>
                           <a:latin typeface="Arial"/>
                         </a:rPr>
+                        <a:t>flat to 0.001 mm / 1.0000 / 0.04 mm / 0.04 nm (TO's gate record)</a:t>
+                      </a:r>
+                    </a:p>
+                  </a:txBody>
+                  <a:tcPr marL="54864" marR="54864" marT="18288" marB="18288">
+                    <a:solidFill>
+                      <a:srgbClr val="ECF1F6"/>
+                    </a:solidFill>
+                  </a:tcPr>
+                </a:tc>
+                <a:tc>
+                  <a:txBody>
+                    <a:bodyPr wrap="square"/>
+                    <a:lstStyle/>
+                    <a:p>
+                      <a:r>
+                        <a:rPr sz="1100" b="0">
+                          <a:solidFill>
+                            <a:srgbClr val="282828"/>
+                          </a:solidFill>
+                          <a:latin typeface="Arial"/>
+                        </a:rPr>
                         <a:t>within −0.6 to +0.4 mm / 0.9996 / 0.72 mm (the parabola pair's mapping) / 0.10 nm</a:t>
                       </a:r>
                     </a:p>
@@ -26458,33 +26480,31 @@
                           </a:solidFill>
                           <a:latin typeface="Arial"/>
                         </a:rPr>
+                        <a:t>tilt 0.43, defocus −0.45 / 0.9994 / 0.72 / 0.09 nm</a:t>
+                      </a:r>
+                    </a:p>
+                  </a:txBody>
+                  <a:tcPr marL="54864" marR="54864" marT="18288" marB="18288">
+                    <a:solidFill>
+                      <a:srgbClr val="ECF1F6"/>
+                    </a:solidFill>
+                  </a:tcPr>
+                </a:tc>
+                <a:tc>
+                  <a:txBody>
+                    <a:bodyPr wrap="square"/>
+                    <a:lstStyle/>
+                    <a:p>
+                      <a:r>
+                        <a:rPr sz="1100" b="0">
+                          <a:solidFill>
+                            <a:srgbClr val="282828"/>
+                          </a:solidFill>
+                          <a:latin typeface="Arial"/>
+                        </a:rPr>
                         <a:t>tuned tail: 2.6 to 6 mm / 0.954 / 0.27 mm / 1.2 nm</a:t>
                       </a:r>
                     </a:p>
-                  </a:txBody>
-                  <a:tcPr marL="54864" marR="54864" marT="18288" marB="18288">
-                    <a:solidFill>
-                      <a:srgbClr val="ECF1F6"/>
-                    </a:solidFill>
-                  </a:tcPr>
-                </a:tc>
-                <a:tc>
-                  <a:txBody>
-                    <a:bodyPr wrap="square"/>
-                    <a:lstStyle/>
-                    <a:p/>
-                  </a:txBody>
-                  <a:tcPr marL="54864" marR="54864" marT="18288" marB="18288">
-                    <a:solidFill>
-                      <a:srgbClr val="ECF1F6"/>
-                    </a:solidFill>
-                  </a:tcPr>
-                </a:tc>
-                <a:tc>
-                  <a:txBody>
-                    <a:bodyPr wrap="square"/>
-                    <a:lstStyle/>
-                    <a:p/>
                   </a:txBody>
                   <a:tcPr marL="54864" marR="54864" marT="18288" marB="18288">
                     <a:solidFill>
@@ -26550,6 +26570,28 @@
                           </a:solidFill>
                           <a:latin typeface="Arial"/>
                         </a:rPr>
+                        <a:t>—</a:t>
+                      </a:r>
+                    </a:p>
+                  </a:txBody>
+                  <a:tcPr marL="54864" marR="54864" marT="18288" marB="18288">
+                    <a:solidFill>
+                      <a:srgbClr val="FFFFFF"/>
+                    </a:solidFill>
+                  </a:tcPr>
+                </a:tc>
+                <a:tc>
+                  <a:txBody>
+                    <a:bodyPr wrap="square"/>
+                    <a:lstStyle/>
+                    <a:p>
+                      <a:r>
+                        <a:rPr sz="1100" b="0">
+                          <a:solidFill>
+                            <a:srgbClr val="282828"/>
+                          </a:solidFill>
+                          <a:latin typeface="Arial"/>
+                        </a:rPr>
                         <a:t>0.993 / 5 pm; 0.995 / 4 pm</a:t>
                       </a:r>
                     </a:p>
@@ -26572,33 +26614,31 @@
                           </a:solidFill>
                           <a:latin typeface="Arial"/>
                         </a:rPr>
+                        <a:t>identical (the sensor bench is the same)</a:t>
+                      </a:r>
+                    </a:p>
+                  </a:txBody>
+                  <a:tcPr marL="54864" marR="54864" marT="18288" marB="18288">
+                    <a:solidFill>
+                      <a:srgbClr val="FFFFFF"/>
+                    </a:solidFill>
+                  </a:tcPr>
+                </a:tc>
+                <a:tc>
+                  <a:txBody>
+                    <a:bodyPr wrap="square"/>
+                    <a:lstStyle/>
+                    <a:p>
+                      <a:r>
+                        <a:rPr sz="1100" b="0">
+                          <a:solidFill>
+                            <a:srgbClr val="282828"/>
+                          </a:solidFill>
+                          <a:latin typeface="Arial"/>
+                        </a:rPr>
                         <a:t>0.991 / 4; 0.999 / 4 (no substrates)</a:t>
                       </a:r>
                     </a:p>
-                  </a:txBody>
-                  <a:tcPr marL="54864" marR="54864" marT="18288" marB="18288">
-                    <a:solidFill>
-                      <a:srgbClr val="FFFFFF"/>
-                    </a:solidFill>
-                  </a:tcPr>
-                </a:tc>
-                <a:tc>
-                  <a:txBody>
-                    <a:bodyPr wrap="square"/>
-                    <a:lstStyle/>
-                    <a:p/>
-                  </a:txBody>
-                  <a:tcPr marL="54864" marR="54864" marT="18288" marB="18288">
-                    <a:solidFill>
-                      <a:srgbClr val="FFFFFF"/>
-                    </a:solidFill>
-                  </a:tcPr>
-                </a:tc>
-                <a:tc>
-                  <a:txBody>
-                    <a:bodyPr wrap="square"/>
-                    <a:lstStyle/>
-                    <a:p/>
                   </a:txBody>
                   <a:tcPr marL="54864" marR="54864" marT="18288" marB="18288">
                     <a:solidFill>
@@ -26664,6 +26704,28 @@
                           </a:solidFill>
                           <a:latin typeface="Arial"/>
                         </a:rPr>
+                        <a:t>—</a:t>
+                      </a:r>
+                    </a:p>
+                  </a:txBody>
+                  <a:tcPr marL="54864" marR="54864" marT="18288" marB="18288">
+                    <a:solidFill>
+                      <a:srgbClr val="ECF1F6"/>
+                    </a:solidFill>
+                  </a:tcPr>
+                </a:tc>
+                <a:tc>
+                  <a:txBody>
+                    <a:bodyPr wrap="square"/>
+                    <a:lstStyle/>
+                    <a:p>
+                      <a:r>
+                        <a:rPr sz="1100" b="0">
+                          <a:solidFill>
+                            <a:srgbClr val="282828"/>
+                          </a:solidFill>
+                          <a:latin typeface="Arial"/>
+                        </a:rPr>
                         <a:t>35 / 51 / 42 nm</a:t>
                       </a:r>
                     </a:p>
@@ -26686,33 +26748,31 @@
                           </a:solidFill>
                           <a:latin typeface="Arial"/>
                         </a:rPr>
+                        <a:t>identical</a:t>
+                      </a:r>
+                    </a:p>
+                  </a:txBody>
+                  <a:tcPr marL="54864" marR="54864" marT="18288" marB="18288">
+                    <a:solidFill>
+                      <a:srgbClr val="ECF1F6"/>
+                    </a:solidFill>
+                  </a:tcPr>
+                </a:tc>
+                <a:tc>
+                  <a:txBody>
+                    <a:bodyPr wrap="square"/>
+                    <a:lstStyle/>
+                    <a:p>
+                      <a:r>
+                        <a:rPr sz="1100" b="0">
+                          <a:solidFill>
+                            <a:srgbClr val="282828"/>
+                          </a:solidFill>
+                          <a:latin typeface="Arial"/>
+                        </a:rPr>
                         <a:t>36 / 59 / 52 nm (no substrates)</a:t>
                       </a:r>
                     </a:p>
-                  </a:txBody>
-                  <a:tcPr marL="54864" marR="54864" marT="18288" marB="18288">
-                    <a:solidFill>
-                      <a:srgbClr val="ECF1F6"/>
-                    </a:solidFill>
-                  </a:tcPr>
-                </a:tc>
-                <a:tc>
-                  <a:txBody>
-                    <a:bodyPr wrap="square"/>
-                    <a:lstStyle/>
-                    <a:p/>
-                  </a:txBody>
-                  <a:tcPr marL="54864" marR="54864" marT="18288" marB="18288">
-                    <a:solidFill>
-                      <a:srgbClr val="ECF1F6"/>
-                    </a:solidFill>
-                  </a:tcPr>
-                </a:tc>
-                <a:tc>
-                  <a:txBody>
-                    <a:bodyPr wrap="square"/>
-                    <a:lstStyle/>
-                    <a:p/>
                   </a:txBody>
                   <a:tcPr marL="54864" marR="54864" marT="18288" marB="18288">
                     <a:solidFill>
@@ -26846,7 +26906,7 @@
                 </a:solidFill>
                 <a:latin typeface="Arial"/>
               </a:rPr>
-              <a:t>Run tags sub96_lens, sub96_oap, pupilsim_sub96_lens, pupilsim_sub96_oap, sub96_oapsens (cycle 3a); redo96_lens, redo96_oap (cycle 3b); the Mac, 2026-09-17.</a:t>
+              <a:t>Run tags sub96_lens, sub96_oap, pupilsim_sub96_lens, pupilsim_sub96_oap, sub96_oapsens (cycle 3a); redo96_lens, redo96_oap (cycle 3b); redo96_oapsens (3b); the Mac, 2026-09-17.</a:t>
             </a:r>
           </a:p>
         </p:txBody>

--- a/demo_session/deck_gauges_edit.pptx
+++ b/demo_session/deck_gauges_edit.pptx
@@ -60,6 +60,7 @@
     <p:sldId id="308" r:id="rId59"/>
     <p:sldId id="309" r:id="rId60"/>
     <p:sldId id="310" r:id="rId61"/>
+    <p:sldId id="311" r:id="rId62"/>
   </p:sldIdLst>
   <p:sldSz cx="12191695" cy="6858000" type="screen4x3"/>
   <p:notesSz cx="6858000" cy="9144000"/>
@@ -19487,7 +19488,7 @@
         </p:nvSpPr>
         <p:spPr>
           <a:xfrm>
-            <a:off x="411480" y="5376672"/>
+            <a:off x="374904" y="5212080"/>
             <a:ext cx="11368735" cy="274320"/>
           </a:xfrm>
           <a:prstGeom prst="rect">
@@ -19542,7 +19543,7 @@
         </p:nvSpPr>
         <p:spPr>
           <a:xfrm>
-            <a:off x="411480" y="7080504"/>
+            <a:off x="411480" y="6327648"/>
             <a:ext cx="11368735" cy="274320"/>
           </a:xfrm>
           <a:prstGeom prst="rect">
@@ -26002,7 +26003,7 @@
                 </a:solidFill>
                 <a:latin typeface="Arial"/>
               </a:rPr>
-              <a:t>Backup: the substrates in, the full beam, the seed tail (Mac cycle 3a, 2026-09-17)</a:t>
+              <a:t>Backup: the substrates in, the full beam, the seed tail (Mac cycle 3a-3b, 2026-09-17): the interferometer's rows</a:t>
             </a:r>
           </a:p>
           <a:p>
@@ -26077,7 +26078,918 @@
         </p:nvGraphicFramePr>
         <p:xfrm>
           <a:off x="411480" y="1298448"/>
-          <a:ext cx="11368732" cy="4972050"/>
+          <a:ext cx="11368733" cy="2531745"/>
+        </p:xfrm>
+        <a:graphic>
+          <a:graphicData uri="http://schemas.openxmlformats.org/drawingml/2006/table">
+            <a:tbl>
+              <a:tblPr firstRow="1" bandRow="1">
+                <a:tableStyleId>{5C22544A-7EE6-4342-B048-85BDC9FD1C3A}</a:tableStyleId>
+              </a:tblPr>
+              <a:tblGrid>
+                <a:gridCol w="1822924"/>
+                <a:gridCol w="1608462"/>
+                <a:gridCol w="2398268"/>
+                <a:gridCol w="1465488"/>
+                <a:gridCol w="2107692"/>
+                <a:gridCol w="1965899"/>
+              </a:tblGrid>
+              <a:tr h="657225">
+                <a:tc>
+                  <a:txBody>
+                    <a:bodyPr wrap="square"/>
+                    <a:lstStyle/>
+                    <a:p>
+                      <a:r>
+                        <a:rPr sz="1100" b="1">
+                          <a:solidFill>
+                            <a:srgbClr val="FFFFFF"/>
+                          </a:solidFill>
+                          <a:latin typeface="Arial"/>
+                        </a:rPr>
+                        <a:t>rows on the 30 nm surface, matrix on it (four-step)</a:t>
+                      </a:r>
+                    </a:p>
+                  </a:txBody>
+                  <a:tcPr marL="54864" marR="54864" marT="18288" marB="18288">
+                    <a:solidFill>
+                      <a:srgbClr val="1F4E79"/>
+                    </a:solidFill>
+                  </a:tcPr>
+                </a:tc>
+                <a:tc>
+                  <a:txBody>
+                    <a:bodyPr wrap="square"/>
+                    <a:lstStyle/>
+                    <a:p>
+                      <a:r>
+                        <a:rPr sz="1100" b="1">
+                          <a:solidFill>
+                            <a:srgbClr val="FFFFFF"/>
+                          </a:solidFill>
+                          <a:latin typeface="Arial"/>
+                        </a:rPr>
+                        <a:t>lens rig, seed tail, substrates in (cycle 3a)</a:t>
+                      </a:r>
+                    </a:p>
+                  </a:txBody>
+                  <a:tcPr marL="54864" marR="54864" marT="18288" marB="18288">
+                    <a:solidFill>
+                      <a:srgbClr val="1F4E79"/>
+                    </a:solidFill>
+                  </a:tcPr>
+                </a:tc>
+                <a:tc>
+                  <a:txBody>
+                    <a:bodyPr wrap="square"/>
+                    <a:lstStyle/>
+                    <a:p>
+                      <a:r>
+                        <a:rPr sz="1100" b="1">
+                          <a:solidFill>
+                            <a:srgbClr val="FFFFFF"/>
+                          </a:solidFill>
+                          <a:latin typeface="Arial"/>
+                        </a:rPr>
+                        <a:t>lens rig, redo bench (cycle 3b)</a:t>
+                      </a:r>
+                    </a:p>
+                  </a:txBody>
+                  <a:tcPr marL="54864" marR="54864" marT="18288" marB="18288">
+                    <a:solidFill>
+                      <a:srgbClr val="1F4E79"/>
+                    </a:solidFill>
+                  </a:tcPr>
+                </a:tc>
+                <a:tc>
+                  <a:txBody>
+                    <a:bodyPr wrap="square"/>
+                    <a:lstStyle/>
+                    <a:p>
+                      <a:r>
+                        <a:rPr sz="1100" b="1">
+                          <a:solidFill>
+                            <a:srgbClr val="FFFFFF"/>
+                          </a:solidFill>
+                          <a:latin typeface="Arial"/>
+                        </a:rPr>
+                        <a:t>mirror rig, seed tail, substrates in (3a)</a:t>
+                      </a:r>
+                    </a:p>
+                  </a:txBody>
+                  <a:tcPr marL="54864" marR="54864" marT="18288" marB="18288">
+                    <a:solidFill>
+                      <a:srgbClr val="1F4E79"/>
+                    </a:solidFill>
+                  </a:tcPr>
+                </a:tc>
+                <a:tc>
+                  <a:txBody>
+                    <a:bodyPr wrap="square"/>
+                    <a:lstStyle/>
+                    <a:p>
+                      <a:r>
+                        <a:rPr sz="1100" b="1">
+                          <a:solidFill>
+                            <a:srgbClr val="FFFFFF"/>
+                          </a:solidFill>
+                          <a:latin typeface="Arial"/>
+                        </a:rPr>
+                        <a:t>mirror rig, redo bench (3b)</a:t>
+                      </a:r>
+                    </a:p>
+                  </a:txBody>
+                  <a:tcPr marL="54864" marR="54864" marT="18288" marB="18288">
+                    <a:solidFill>
+                      <a:srgbClr val="1F4E79"/>
+                    </a:solidFill>
+                  </a:tcPr>
+                </a:tc>
+                <a:tc>
+                  <a:txBody>
+                    <a:bodyPr wrap="square"/>
+                    <a:lstStyle/>
+                    <a:p>
+                      <a:r>
+                        <a:rPr sz="1100" b="1">
+                          <a:solidFill>
+                            <a:srgbClr val="FFFFFF"/>
+                          </a:solidFill>
+                          <a:latin typeface="Arial"/>
+                        </a:rPr>
+                        <a:t>the record (tuned tail, no substrates, 77 / 82 mm beam)</a:t>
+                      </a:r>
+                    </a:p>
+                  </a:txBody>
+                  <a:tcPr marL="54864" marR="54864" marT="18288" marB="18288">
+                    <a:solidFill>
+                      <a:srgbClr val="1F4E79"/>
+                    </a:solidFill>
+                  </a:tcPr>
+                </a:tc>
+              </a:tr>
+              <a:tr h="280035">
+                <a:tc>
+                  <a:txBody>
+                    <a:bodyPr wrap="square"/>
+                    <a:lstStyle/>
+                    <a:p>
+                      <a:r>
+                        <a:rPr sz="1100" b="0">
+                          <a:solidFill>
+                            <a:srgbClr val="282828"/>
+                          </a:solidFill>
+                          <a:latin typeface="Arial"/>
+                        </a:rPr>
+                        <a:t>flat-mirror null</a:t>
+                      </a:r>
+                    </a:p>
+                  </a:txBody>
+                  <a:tcPr marL="54864" marR="54864" marT="18288" marB="18288">
+                    <a:solidFill>
+                      <a:srgbClr val="FFFFFF"/>
+                    </a:solidFill>
+                  </a:tcPr>
+                </a:tc>
+                <a:tc>
+                  <a:txBody>
+                    <a:bodyPr wrap="square"/>
+                    <a:lstStyle/>
+                    <a:p>
+                      <a:r>
+                        <a:rPr sz="1100" b="0">
+                          <a:solidFill>
+                            <a:srgbClr val="282828"/>
+                          </a:solidFill>
+                          <a:latin typeface="Arial"/>
+                        </a:rPr>
+                        <a:t>92.4 nm rms</a:t>
+                      </a:r>
+                    </a:p>
+                  </a:txBody>
+                  <a:tcPr marL="54864" marR="54864" marT="18288" marB="18288">
+                    <a:solidFill>
+                      <a:srgbClr val="FFFFFF"/>
+                    </a:solidFill>
+                  </a:tcPr>
+                </a:tc>
+                <a:tc>
+                  <a:txBody>
+                    <a:bodyPr wrap="square"/>
+                    <a:lstStyle/>
+                    <a:p>
+                      <a:r>
+                        <a:rPr sz="1100" b="0">
+                          <a:solidFill>
+                            <a:srgbClr val="282828"/>
+                          </a:solidFill>
+                          <a:latin typeface="Arial"/>
+                        </a:rPr>
+                        <a:t>59.3 nm</a:t>
+                      </a:r>
+                    </a:p>
+                  </a:txBody>
+                  <a:tcPr marL="54864" marR="54864" marT="18288" marB="18288">
+                    <a:solidFill>
+                      <a:srgbClr val="FFFFFF"/>
+                    </a:solidFill>
+                  </a:tcPr>
+                </a:tc>
+                <a:tc>
+                  <a:txBody>
+                    <a:bodyPr wrap="square"/>
+                    <a:lstStyle/>
+                    <a:p>
+                      <a:r>
+                        <a:rPr sz="1100" b="0">
+                          <a:solidFill>
+                            <a:srgbClr val="282828"/>
+                          </a:solidFill>
+                          <a:latin typeface="Arial"/>
+                        </a:rPr>
+                        <a:t>26.3 nm</a:t>
+                      </a:r>
+                    </a:p>
+                  </a:txBody>
+                  <a:tcPr marL="54864" marR="54864" marT="18288" marB="18288">
+                    <a:solidFill>
+                      <a:srgbClr val="FFFFFF"/>
+                    </a:solidFill>
+                  </a:tcPr>
+                </a:tc>
+                <a:tc>
+                  <a:txBody>
+                    <a:bodyPr wrap="square"/>
+                    <a:lstStyle/>
+                    <a:p>
+                      <a:r>
+                        <a:rPr sz="1100" b="0">
+                          <a:solidFill>
+                            <a:srgbClr val="282828"/>
+                          </a:solidFill>
+                          <a:latin typeface="Arial"/>
+                        </a:rPr>
+                        <a:t>26.5 nm</a:t>
+                      </a:r>
+                    </a:p>
+                  </a:txBody>
+                  <a:tcPr marL="54864" marR="54864" marT="18288" marB="18288">
+                    <a:solidFill>
+                      <a:srgbClr val="FFFFFF"/>
+                    </a:solidFill>
+                  </a:tcPr>
+                </a:tc>
+                <a:tc>
+                  <a:txBody>
+                    <a:bodyPr wrap="square"/>
+                    <a:lstStyle/>
+                    <a:p>
+                      <a:r>
+                        <a:rPr sz="1100" b="0">
+                          <a:solidFill>
+                            <a:srgbClr val="282828"/>
+                          </a:solidFill>
+                          <a:latin typeface="Arial"/>
+                        </a:rPr>
+                        <a:t>0.13 nm lens / 0.03 mirrors</a:t>
+                      </a:r>
+                    </a:p>
+                  </a:txBody>
+                  <a:tcPr marL="54864" marR="54864" marT="18288" marB="18288">
+                    <a:solidFill>
+                      <a:srgbClr val="FFFFFF"/>
+                    </a:solidFill>
+                  </a:tcPr>
+                </a:tc>
+              </a:tr>
+              <a:tr h="468630">
+                <a:tc>
+                  <a:txBody>
+                    <a:bodyPr wrap="square"/>
+                    <a:lstStyle/>
+                    <a:p>
+                      <a:r>
+                        <a:rPr sz="1100" b="0">
+                          <a:solidFill>
+                            <a:srgbClr val="282828"/>
+                          </a:solidFill>
+                          <a:latin typeface="Arial"/>
+                        </a:rPr>
+                        <a:t>10 nm on one actuator: gain / error / SNR</a:t>
+                      </a:r>
+                    </a:p>
+                  </a:txBody>
+                  <a:tcPr marL="54864" marR="54864" marT="18288" marB="18288">
+                    <a:solidFill>
+                      <a:srgbClr val="ECF1F6"/>
+                    </a:solidFill>
+                  </a:tcPr>
+                </a:tc>
+                <a:tc>
+                  <a:txBody>
+                    <a:bodyPr wrap="square"/>
+                    <a:lstStyle/>
+                    <a:p>
+                      <a:r>
+                        <a:rPr sz="1100" b="0">
+                          <a:solidFill>
+                            <a:srgbClr val="282828"/>
+                          </a:solidFill>
+                          <a:latin typeface="Arial"/>
+                        </a:rPr>
+                        <a:t>1.003 / 1 pm / 10645</a:t>
+                      </a:r>
+                    </a:p>
+                  </a:txBody>
+                  <a:tcPr marL="54864" marR="54864" marT="18288" marB="18288">
+                    <a:solidFill>
+                      <a:srgbClr val="ECF1F6"/>
+                    </a:solidFill>
+                  </a:tcPr>
+                </a:tc>
+                <a:tc>
+                  <a:txBody>
+                    <a:bodyPr wrap="square"/>
+                    <a:lstStyle/>
+                    <a:p>
+                      <a:r>
+                        <a:rPr sz="1100" b="0">
+                          <a:solidFill>
+                            <a:srgbClr val="282828"/>
+                          </a:solidFill>
+                          <a:latin typeface="Arial"/>
+                        </a:rPr>
+                        <a:t>1.004 / 1.4 pm / 7741</a:t>
+                      </a:r>
+                    </a:p>
+                  </a:txBody>
+                  <a:tcPr marL="54864" marR="54864" marT="18288" marB="18288">
+                    <a:solidFill>
+                      <a:srgbClr val="ECF1F6"/>
+                    </a:solidFill>
+                  </a:tcPr>
+                </a:tc>
+                <a:tc>
+                  <a:txBody>
+                    <a:bodyPr wrap="square"/>
+                    <a:lstStyle/>
+                    <a:p>
+                      <a:r>
+                        <a:rPr sz="1100" b="0">
+                          <a:solidFill>
+                            <a:srgbClr val="282828"/>
+                          </a:solidFill>
+                          <a:latin typeface="Arial"/>
+                        </a:rPr>
+                        <a:t>0.986 / 2.2 pm / 6472</a:t>
+                      </a:r>
+                    </a:p>
+                  </a:txBody>
+                  <a:tcPr marL="54864" marR="54864" marT="18288" marB="18288">
+                    <a:solidFill>
+                      <a:srgbClr val="ECF1F6"/>
+                    </a:solidFill>
+                  </a:tcPr>
+                </a:tc>
+                <a:tc>
+                  <a:txBody>
+                    <a:bodyPr wrap="square"/>
+                    <a:lstStyle/>
+                    <a:p>
+                      <a:r>
+                        <a:rPr sz="1100" b="0">
+                          <a:solidFill>
+                            <a:srgbClr val="282828"/>
+                          </a:solidFill>
+                          <a:latin typeface="Arial"/>
+                        </a:rPr>
+                        <a:t>0.986 / 2.3 pm / 6044</a:t>
+                      </a:r>
+                    </a:p>
+                  </a:txBody>
+                  <a:tcPr marL="54864" marR="54864" marT="18288" marB="18288">
+                    <a:solidFill>
+                      <a:srgbClr val="ECF1F6"/>
+                    </a:solidFill>
+                  </a:tcPr>
+                </a:tc>
+                <a:tc>
+                  <a:txBody>
+                    <a:bodyPr wrap="square"/>
+                    <a:lstStyle/>
+                    <a:p>
+                      <a:r>
+                        <a:rPr sz="1100" b="0">
+                          <a:solidFill>
+                            <a:srgbClr val="282828"/>
+                          </a:solidFill>
+                          <a:latin typeface="Arial"/>
+                        </a:rPr>
+                        <a:t>0.992 / 2.2 pm (lens), 0.992 / 2.4 (mirrors)</a:t>
+                      </a:r>
+                    </a:p>
+                  </a:txBody>
+                  <a:tcPr marL="54864" marR="54864" marT="18288" marB="18288">
+                    <a:solidFill>
+                      <a:srgbClr val="ECF1F6"/>
+                    </a:solidFill>
+                  </a:tcPr>
+                </a:tc>
+              </a:tr>
+              <a:tr h="468630">
+                <a:tc>
+                  <a:txBody>
+                    <a:bodyPr wrap="square"/>
+                    <a:lstStyle/>
+                    <a:p>
+                      <a:r>
+                        <a:rPr sz="1100" b="0">
+                          <a:solidFill>
+                            <a:srgbClr val="282828"/>
+                          </a:solidFill>
+                          <a:latin typeface="Arial"/>
+                        </a:rPr>
+                        <a:t>1 nm on the grid (112-120 sites)</a:t>
+                      </a:r>
+                    </a:p>
+                  </a:txBody>
+                  <a:tcPr marL="54864" marR="54864" marT="18288" marB="18288">
+                    <a:solidFill>
+                      <a:srgbClr val="FFFFFF"/>
+                    </a:solidFill>
+                  </a:tcPr>
+                </a:tc>
+                <a:tc>
+                  <a:txBody>
+                    <a:bodyPr wrap="square"/>
+                    <a:lstStyle/>
+                    <a:p>
+                      <a:r>
+                        <a:rPr sz="1100" b="0">
+                          <a:solidFill>
+                            <a:srgbClr val="282828"/>
+                          </a:solidFill>
+                          <a:latin typeface="Arial"/>
+                        </a:rPr>
+                        <a:t>0.754 / 61.5 pm / 135</a:t>
+                      </a:r>
+                    </a:p>
+                  </a:txBody>
+                  <a:tcPr marL="54864" marR="54864" marT="18288" marB="18288">
+                    <a:solidFill>
+                      <a:srgbClr val="FFFFFF"/>
+                    </a:solidFill>
+                  </a:tcPr>
+                </a:tc>
+                <a:tc>
+                  <a:txBody>
+                    <a:bodyPr wrap="square"/>
+                    <a:lstStyle/>
+                    <a:p>
+                      <a:r>
+                        <a:rPr sz="1100" b="0">
+                          <a:solidFill>
+                            <a:srgbClr val="282828"/>
+                          </a:solidFill>
+                          <a:latin typeface="Arial"/>
+                        </a:rPr>
+                        <a:t>0.993 / 10 pm / 246</a:t>
+                      </a:r>
+                    </a:p>
+                  </a:txBody>
+                  <a:tcPr marL="54864" marR="54864" marT="18288" marB="18288">
+                    <a:solidFill>
+                      <a:srgbClr val="FFFFFF"/>
+                    </a:solidFill>
+                  </a:tcPr>
+                </a:tc>
+                <a:tc>
+                  <a:txBody>
+                    <a:bodyPr wrap="square"/>
+                    <a:lstStyle/>
+                    <a:p>
+                      <a:r>
+                        <a:rPr sz="1100" b="0">
+                          <a:solidFill>
+                            <a:srgbClr val="282828"/>
+                          </a:solidFill>
+                          <a:latin typeface="Arial"/>
+                        </a:rPr>
+                        <a:t>0.981 / 4.5 pm / 309</a:t>
+                      </a:r>
+                    </a:p>
+                  </a:txBody>
+                  <a:tcPr marL="54864" marR="54864" marT="18288" marB="18288">
+                    <a:solidFill>
+                      <a:srgbClr val="FFFFFF"/>
+                    </a:solidFill>
+                  </a:tcPr>
+                </a:tc>
+                <a:tc>
+                  <a:txBody>
+                    <a:bodyPr wrap="square"/>
+                    <a:lstStyle/>
+                    <a:p>
+                      <a:r>
+                        <a:rPr sz="1100" b="0">
+                          <a:solidFill>
+                            <a:srgbClr val="282828"/>
+                          </a:solidFill>
+                          <a:latin typeface="Arial"/>
+                        </a:rPr>
+                        <a:t>0.981 / 4.4 pm / 310</a:t>
+                      </a:r>
+                    </a:p>
+                  </a:txBody>
+                  <a:tcPr marL="54864" marR="54864" marT="18288" marB="18288">
+                    <a:solidFill>
+                      <a:srgbClr val="FFFFFF"/>
+                    </a:solidFill>
+                  </a:tcPr>
+                </a:tc>
+                <a:tc>
+                  <a:txBody>
+                    <a:bodyPr wrap="square"/>
+                    <a:lstStyle/>
+                    <a:p>
+                      <a:r>
+                        <a:rPr sz="1100" b="0">
+                          <a:solidFill>
+                            <a:srgbClr val="282828"/>
+                          </a:solidFill>
+                          <a:latin typeface="Arial"/>
+                        </a:rPr>
+                        <a:t>0.999 / 4 pm</a:t>
+                      </a:r>
+                    </a:p>
+                  </a:txBody>
+                  <a:tcPr marL="54864" marR="54864" marT="18288" marB="18288">
+                    <a:solidFill>
+                      <a:srgbClr val="FFFFFF"/>
+                    </a:solidFill>
+                  </a:tcPr>
+                </a:tc>
+              </a:tr>
+              <a:tr h="657225">
+                <a:tc>
+                  <a:txBody>
+                    <a:bodyPr wrap="square"/>
+                    <a:lstStyle/>
+                    <a:p>
+                      <a:r>
+                        <a:rPr sz="1100" b="0">
+                          <a:solidFill>
+                            <a:srgbClr val="282828"/>
+                          </a:solidFill>
+                          <a:latin typeface="Arial"/>
+                        </a:rPr>
+                        <a:t>capture to 10%, single site / grid</a:t>
+                      </a:r>
+                    </a:p>
+                  </a:txBody>
+                  <a:tcPr marL="54864" marR="54864" marT="18288" marB="18288">
+                    <a:solidFill>
+                      <a:srgbClr val="ECF1F6"/>
+                    </a:solidFill>
+                  </a:tcPr>
+                </a:tc>
+                <a:tc>
+                  <a:txBody>
+                    <a:bodyPr wrap="square"/>
+                    <a:lstStyle/>
+                    <a:p>
+                      <a:r>
+                        <a:rPr sz="1100" b="0">
+                          <a:solidFill>
+                            <a:srgbClr val="282828"/>
+                          </a:solidFill>
+                          <a:latin typeface="Arial"/>
+                        </a:rPr>
+                        <a:t>480 nm and beyond / outside at the first rung</a:t>
+                      </a:r>
+                    </a:p>
+                  </a:txBody>
+                  <a:tcPr marL="54864" marR="54864" marT="18288" marB="18288">
+                    <a:solidFill>
+                      <a:srgbClr val="ECF1F6"/>
+                    </a:solidFill>
+                  </a:tcPr>
+                </a:tc>
+                <a:tc>
+                  <a:txBody>
+                    <a:bodyPr wrap="square"/>
+                    <a:lstStyle/>
+                    <a:p>
+                      <a:r>
+                        <a:rPr sz="1100" b="0">
+                          <a:solidFill>
+                            <a:srgbClr val="282828"/>
+                          </a:solidFill>
+                          <a:latin typeface="Arial"/>
+                        </a:rPr>
+                        <a:t>480+ / 480+</a:t>
+                      </a:r>
+                    </a:p>
+                  </a:txBody>
+                  <a:tcPr marL="54864" marR="54864" marT="18288" marB="18288">
+                    <a:solidFill>
+                      <a:srgbClr val="ECF1F6"/>
+                    </a:solidFill>
+                  </a:tcPr>
+                </a:tc>
+                <a:tc>
+                  <a:txBody>
+                    <a:bodyPr wrap="square"/>
+                    <a:lstStyle/>
+                    <a:p>
+                      <a:r>
+                        <a:rPr sz="1100" b="0">
+                          <a:solidFill>
+                            <a:srgbClr val="282828"/>
+                          </a:solidFill>
+                          <a:latin typeface="Arial"/>
+                        </a:rPr>
+                        <a:t>480+ / 480+</a:t>
+                      </a:r>
+                    </a:p>
+                  </a:txBody>
+                  <a:tcPr marL="54864" marR="54864" marT="18288" marB="18288">
+                    <a:solidFill>
+                      <a:srgbClr val="ECF1F6"/>
+                    </a:solidFill>
+                  </a:tcPr>
+                </a:tc>
+                <a:tc>
+                  <a:txBody>
+                    <a:bodyPr wrap="square"/>
+                    <a:lstStyle/>
+                    <a:p>
+                      <a:r>
+                        <a:rPr sz="1100" b="0">
+                          <a:solidFill>
+                            <a:srgbClr val="282828"/>
+                          </a:solidFill>
+                          <a:latin typeface="Arial"/>
+                        </a:rPr>
+                        <a:t>480+ / 480+</a:t>
+                      </a:r>
+                    </a:p>
+                  </a:txBody>
+                  <a:tcPr marL="54864" marR="54864" marT="18288" marB="18288">
+                    <a:solidFill>
+                      <a:srgbClr val="ECF1F6"/>
+                    </a:solidFill>
+                  </a:tcPr>
+                </a:tc>
+                <a:tc>
+                  <a:txBody>
+                    <a:bodyPr wrap="square"/>
+                    <a:lstStyle/>
+                    <a:p>
+                      <a:r>
+                        <a:rPr sz="1100" b="0">
+                          <a:solidFill>
+                            <a:srgbClr val="282828"/>
+                          </a:solidFill>
+                          <a:latin typeface="Arial"/>
+                        </a:rPr>
+                        <a:t>322 / 480 and beyond</a:t>
+                      </a:r>
+                    </a:p>
+                  </a:txBody>
+                  <a:tcPr marL="54864" marR="54864" marT="18288" marB="18288">
+                    <a:solidFill>
+                      <a:srgbClr val="ECF1F6"/>
+                    </a:solidFill>
+                  </a:tcPr>
+                </a:tc>
+              </a:tr>
+            </a:tbl>
+          </a:graphicData>
+        </a:graphic>
+      </p:graphicFrame>
+      <p:sp>
+        <p:nvSpPr>
+          <p:cNvPr id="5" name="TextBox 4"/>
+          <p:cNvSpPr txBox="1"/>
+          <p:nvPr/>
+        </p:nvSpPr>
+        <p:spPr>
+          <a:xfrm>
+            <a:off x="411480" y="3976497"/>
+            <a:ext cx="11368735" cy="274320"/>
+          </a:xfrm>
+          <a:prstGeom prst="rect">
+            <a:avLst/>
+          </a:prstGeom>
+          <a:noFill/>
+        </p:spPr>
+        <p:txBody>
+          <a:bodyPr wrap="square">
+            <a:spAutoFit/>
+          </a:bodyPr>
+          <a:lstStyle/>
+          <a:p>
+            <a:pPr>
+              <a:spcAft>
+                <a:spcPts val="600"/>
+              </a:spcAft>
+            </a:pPr>
+            <a:r>
+              <a:rPr sz="1500" b="0">
+                <a:solidFill>
+                  <a:srgbClr val="282828"/>
+                </a:solidFill>
+                <a:latin typeface="Arial"/>
+              </a:rPr>
+              <a:t>•  Read it as the redo's justification: with the 10 mm plates and the 2 mm windows in, the seed tail's null on the lens rig's misfed collimator reaches 92 nm, a third of a wave of wavefront, and the 112-site row at 1 nm falls to 0.75 through the fold, while one actuator still reads to 1 pm.  Package A (the collimator at its focus, the tail tuned on the reading) is what restores it; the mirror rig, already fed at its focus, holds its rows at 0.98 to 0.99 with a 26 nm fixed-pattern null the reference frame removes.</a:t>
+            </a:r>
+          </a:p>
+          <a:p>
+            <a:pPr>
+              <a:spcAft>
+                <a:spcPts val="600"/>
+              </a:spcAft>
+            </a:pPr>
+            <a:r>
+              <a:rPr sz="1500" b="0">
+                <a:solidFill>
+                  <a:srgbClr val="282828"/>
+                </a:solidFill>
+                <a:latin typeface="Arial"/>
+              </a:rPr>
+              <a:t>•  The redo bench restores the lens rig's grid row (0.754 to 0.993) and leaves a 59 nm null; the mirror rig is unchanged by design.  The null that remains on both rigs is the mask plate's spherical aberration in the F/4.2 beam (a 2 mm plate: about 0.1 wave rms), a fixed pattern the reference frame removes and the reading-tuned tail does not chase; TO's null decomposition prices it.</a:t>
+            </a:r>
+          </a:p>
+        </p:txBody>
+      </p:sp>
+      <p:sp>
+        <p:nvSpPr>
+          <p:cNvPr id="6" name="TextBox 5"/>
+          <p:cNvSpPr txBox="1"/>
+          <p:nvPr/>
+        </p:nvSpPr>
+        <p:spPr>
+          <a:xfrm>
+            <a:off x="411480" y="6522339"/>
+            <a:ext cx="11368735" cy="274320"/>
+          </a:xfrm>
+          <a:prstGeom prst="rect">
+            <a:avLst/>
+          </a:prstGeom>
+          <a:noFill/>
+        </p:spPr>
+        <p:txBody>
+          <a:bodyPr wrap="square">
+            <a:spAutoFit/>
+          </a:bodyPr>
+          <a:lstStyle/>
+          <a:p>
+            <a:pPr>
+              <a:spcAft>
+                <a:spcPts val="600"/>
+              </a:spcAft>
+            </a:pPr>
+            <a:r>
+              <a:rPr sz="1050" b="0">
+                <a:solidFill>
+                  <a:srgbClr val="6E6E6E"/>
+                </a:solidFill>
+                <a:latin typeface="Arial"/>
+              </a:rPr>
+              <a:t>Run tags sub96_lens, sub96_oap (cycle 3a); redo96_lens, redo96_oap (cycle 3b); the Mac, 2026-09-17.  The pupil image and the sensors on these same decks are on the next slide.</a:t>
+            </a:r>
+          </a:p>
+        </p:txBody>
+      </p:sp>
+    </p:spTree>
+  </p:cSld>
+  <p:clrMapOvr>
+    <a:masterClrMapping/>
+  </p:clrMapOvr>
+</p:sld>
+</file>
+
+<file path=ppt/slides/slide47.xml><?xml version="1.0" encoding="utf-8"?>
+<p:sld xmlns:a="http://schemas.openxmlformats.org/drawingml/2006/main" xmlns:p="http://schemas.openxmlformats.org/presentationml/2006/main" xmlns:r="http://schemas.openxmlformats.org/officeDocument/2006/relationships">
+  <p:cSld>
+    <p:spTree>
+      <p:nvGrpSpPr>
+        <p:cNvPr id="1" name=""/>
+        <p:cNvGrpSpPr/>
+        <p:nvPr/>
+      </p:nvGrpSpPr>
+      <p:grpSpPr/>
+      <p:sp>
+        <p:nvSpPr>
+          <p:cNvPr id="2" name="TextBox 1"/>
+          <p:cNvSpPr txBox="1"/>
+          <p:nvPr/>
+        </p:nvSpPr>
+        <p:spPr>
+          <a:xfrm>
+            <a:off x="411480" y="201168"/>
+            <a:ext cx="11368735" cy="914400"/>
+          </a:xfrm>
+          <a:prstGeom prst="rect">
+            <a:avLst/>
+          </a:prstGeom>
+          <a:noFill/>
+        </p:spPr>
+        <p:txBody>
+          <a:bodyPr wrap="square">
+            <a:spAutoFit/>
+          </a:bodyPr>
+          <a:lstStyle/>
+          <a:p>
+            <a:pPr>
+              <a:spcAft>
+                <a:spcPts val="400"/>
+              </a:spcAft>
+            </a:pPr>
+            <a:r>
+              <a:rPr sz="2400" b="1">
+                <a:solidFill>
+                  <a:srgbClr val="1F4E79"/>
+                </a:solidFill>
+                <a:latin typeface="Arial"/>
+              </a:rPr>
+              <a:t>Backup: the same decks — the pupil image and the sensors</a:t>
+            </a:r>
+          </a:p>
+          <a:p>
+            <a:pPr>
+              <a:spcAft>
+                <a:spcPts val="0"/>
+              </a:spcAft>
+            </a:pPr>
+            <a:r>
+              <a:rPr sz="1250" b="0">
+                <a:solidFill>
+                  <a:srgbClr val="6E6E6E"/>
+                </a:solidFill>
+                <a:latin typeface="Arial"/>
+              </a:rPr>
+              <a:t>The imaging is not what limits either rig on the seed tail with the substrates in, and the mask plate costs the sensors a little capture and no gain</a:t>
+            </a:r>
+          </a:p>
+        </p:txBody>
+      </p:sp>
+      <p:sp>
+        <p:nvSpPr>
+          <p:cNvPr id="3" name="Rectangle 2"/>
+          <p:cNvSpPr/>
+          <p:nvPr/>
+        </p:nvSpPr>
+        <p:spPr>
+          <a:xfrm>
+            <a:off x="411480" y="1133856"/>
+            <a:ext cx="11368735" cy="20320"/>
+          </a:xfrm>
+          <a:prstGeom prst="rect">
+            <a:avLst/>
+          </a:prstGeom>
+          <a:solidFill>
+            <a:srgbClr val="B8C6D4"/>
+          </a:solidFill>
+          <a:ln>
+            <a:noFill/>
+          </a:ln>
+          <a:effectLst/>
+        </p:spPr>
+        <p:style>
+          <a:lnRef idx="1">
+            <a:schemeClr val="accent1"/>
+          </a:lnRef>
+          <a:fillRef idx="3">
+            <a:schemeClr val="accent1"/>
+          </a:fillRef>
+          <a:effectRef idx="2">
+            <a:schemeClr val="accent1"/>
+          </a:effectRef>
+          <a:fontRef idx="minor">
+            <a:schemeClr val="lt1"/>
+          </a:fontRef>
+        </p:style>
+        <p:txBody>
+          <a:bodyPr rtlCol="0" anchor="ctr"/>
+          <a:lstStyle/>
+          <a:p>
+            <a:pPr algn="ctr"/>
+          </a:p>
+        </p:txBody>
+      </p:sp>
+      <p:graphicFrame>
+        <p:nvGraphicFramePr>
+          <p:cNvPr id="4" name="Table 3"/>
+          <p:cNvGraphicFramePr>
+            <a:graphicFrameLocks noGrp="1"/>
+          </p:cNvGraphicFramePr>
+          <p:nvPr/>
+        </p:nvGraphicFramePr>
+        <p:xfrm>
+          <a:off x="411480" y="1298448"/>
+          <a:ext cx="11368732" cy="2720340"/>
         </p:xfrm>
         <a:graphic>
           <a:graphicData uri="http://schemas.openxmlformats.org/drawingml/2006/table">
@@ -26227,542 +27139,6 @@
                   </a:tcPr>
                 </a:tc>
               </a:tr>
-              <a:tr h="468630">
-                <a:tc>
-                  <a:txBody>
-                    <a:bodyPr wrap="square"/>
-                    <a:lstStyle/>
-                    <a:p>
-                      <a:r>
-                        <a:rPr sz="1100" b="0">
-                          <a:solidFill>
-                            <a:srgbClr val="282828"/>
-                          </a:solidFill>
-                          <a:latin typeface="Arial"/>
-                        </a:rPr>
-                        <a:t>flat-mirror null</a:t>
-                      </a:r>
-                    </a:p>
-                  </a:txBody>
-                  <a:tcPr marL="54864" marR="54864" marT="18288" marB="18288">
-                    <a:solidFill>
-                      <a:srgbClr val="FFFFFF"/>
-                    </a:solidFill>
-                  </a:tcPr>
-                </a:tc>
-                <a:tc>
-                  <a:txBody>
-                    <a:bodyPr wrap="square"/>
-                    <a:lstStyle/>
-                    <a:p>
-                      <a:r>
-                        <a:rPr sz="1100" b="0">
-                          <a:solidFill>
-                            <a:srgbClr val="282828"/>
-                          </a:solidFill>
-                          <a:latin typeface="Arial"/>
-                        </a:rPr>
-                        <a:t>92.4 nm rms</a:t>
-                      </a:r>
-                    </a:p>
-                  </a:txBody>
-                  <a:tcPr marL="54864" marR="54864" marT="18288" marB="18288">
-                    <a:solidFill>
-                      <a:srgbClr val="FFFFFF"/>
-                    </a:solidFill>
-                  </a:tcPr>
-                </a:tc>
-                <a:tc>
-                  <a:txBody>
-                    <a:bodyPr wrap="square"/>
-                    <a:lstStyle/>
-                    <a:p>
-                      <a:r>
-                        <a:rPr sz="1100" b="0">
-                          <a:solidFill>
-                            <a:srgbClr val="282828"/>
-                          </a:solidFill>
-                          <a:latin typeface="Arial"/>
-                        </a:rPr>
-                        <a:t>59.3 nm</a:t>
-                      </a:r>
-                    </a:p>
-                  </a:txBody>
-                  <a:tcPr marL="54864" marR="54864" marT="18288" marB="18288">
-                    <a:solidFill>
-                      <a:srgbClr val="FFFFFF"/>
-                    </a:solidFill>
-                  </a:tcPr>
-                </a:tc>
-                <a:tc>
-                  <a:txBody>
-                    <a:bodyPr wrap="square"/>
-                    <a:lstStyle/>
-                    <a:p>
-                      <a:r>
-                        <a:rPr sz="1100" b="0">
-                          <a:solidFill>
-                            <a:srgbClr val="282828"/>
-                          </a:solidFill>
-                          <a:latin typeface="Arial"/>
-                        </a:rPr>
-                        <a:t>26.3 nm</a:t>
-                      </a:r>
-                    </a:p>
-                  </a:txBody>
-                  <a:tcPr marL="54864" marR="54864" marT="18288" marB="18288">
-                    <a:solidFill>
-                      <a:srgbClr val="FFFFFF"/>
-                    </a:solidFill>
-                  </a:tcPr>
-                </a:tc>
-                <a:tc>
-                  <a:txBody>
-                    <a:bodyPr wrap="square"/>
-                    <a:lstStyle/>
-                    <a:p>
-                      <a:r>
-                        <a:rPr sz="1100" b="0">
-                          <a:solidFill>
-                            <a:srgbClr val="282828"/>
-                          </a:solidFill>
-                          <a:latin typeface="Arial"/>
-                        </a:rPr>
-                        <a:t>26.5 nm</a:t>
-                      </a:r>
-                    </a:p>
-                  </a:txBody>
-                  <a:tcPr marL="54864" marR="54864" marT="18288" marB="18288">
-                    <a:solidFill>
-                      <a:srgbClr val="FFFFFF"/>
-                    </a:solidFill>
-                  </a:tcPr>
-                </a:tc>
-                <a:tc>
-                  <a:txBody>
-                    <a:bodyPr wrap="square"/>
-                    <a:lstStyle/>
-                    <a:p>
-                      <a:r>
-                        <a:rPr sz="1100" b="0">
-                          <a:solidFill>
-                            <a:srgbClr val="282828"/>
-                          </a:solidFill>
-                          <a:latin typeface="Arial"/>
-                        </a:rPr>
-                        <a:t>0.13 nm lens / 0.03 mirrors</a:t>
-                      </a:r>
-                    </a:p>
-                  </a:txBody>
-                  <a:tcPr marL="54864" marR="54864" marT="18288" marB="18288">
-                    <a:solidFill>
-                      <a:srgbClr val="FFFFFF"/>
-                    </a:solidFill>
-                  </a:tcPr>
-                </a:tc>
-              </a:tr>
-              <a:tr h="657225">
-                <a:tc>
-                  <a:txBody>
-                    <a:bodyPr wrap="square"/>
-                    <a:lstStyle/>
-                    <a:p>
-                      <a:r>
-                        <a:rPr sz="1100" b="0">
-                          <a:solidFill>
-                            <a:srgbClr val="282828"/>
-                          </a:solidFill>
-                          <a:latin typeface="Arial"/>
-                        </a:rPr>
-                        <a:t>10 nm on one actuator: gain / error / SNR</a:t>
-                      </a:r>
-                    </a:p>
-                  </a:txBody>
-                  <a:tcPr marL="54864" marR="54864" marT="18288" marB="18288">
-                    <a:solidFill>
-                      <a:srgbClr val="ECF1F6"/>
-                    </a:solidFill>
-                  </a:tcPr>
-                </a:tc>
-                <a:tc>
-                  <a:txBody>
-                    <a:bodyPr wrap="square"/>
-                    <a:lstStyle/>
-                    <a:p>
-                      <a:r>
-                        <a:rPr sz="1100" b="0">
-                          <a:solidFill>
-                            <a:srgbClr val="282828"/>
-                          </a:solidFill>
-                          <a:latin typeface="Arial"/>
-                        </a:rPr>
-                        <a:t>1.003 / 1 pm / 10645</a:t>
-                      </a:r>
-                    </a:p>
-                  </a:txBody>
-                  <a:tcPr marL="54864" marR="54864" marT="18288" marB="18288">
-                    <a:solidFill>
-                      <a:srgbClr val="ECF1F6"/>
-                    </a:solidFill>
-                  </a:tcPr>
-                </a:tc>
-                <a:tc>
-                  <a:txBody>
-                    <a:bodyPr wrap="square"/>
-                    <a:lstStyle/>
-                    <a:p>
-                      <a:r>
-                        <a:rPr sz="1100" b="0">
-                          <a:solidFill>
-                            <a:srgbClr val="282828"/>
-                          </a:solidFill>
-                          <a:latin typeface="Arial"/>
-                        </a:rPr>
-                        <a:t>1.004 / 1.4 pm / 7741</a:t>
-                      </a:r>
-                    </a:p>
-                  </a:txBody>
-                  <a:tcPr marL="54864" marR="54864" marT="18288" marB="18288">
-                    <a:solidFill>
-                      <a:srgbClr val="ECF1F6"/>
-                    </a:solidFill>
-                  </a:tcPr>
-                </a:tc>
-                <a:tc>
-                  <a:txBody>
-                    <a:bodyPr wrap="square"/>
-                    <a:lstStyle/>
-                    <a:p>
-                      <a:r>
-                        <a:rPr sz="1100" b="0">
-                          <a:solidFill>
-                            <a:srgbClr val="282828"/>
-                          </a:solidFill>
-                          <a:latin typeface="Arial"/>
-                        </a:rPr>
-                        <a:t>0.986 / 2.2 pm / 6472</a:t>
-                      </a:r>
-                    </a:p>
-                  </a:txBody>
-                  <a:tcPr marL="54864" marR="54864" marT="18288" marB="18288">
-                    <a:solidFill>
-                      <a:srgbClr val="ECF1F6"/>
-                    </a:solidFill>
-                  </a:tcPr>
-                </a:tc>
-                <a:tc>
-                  <a:txBody>
-                    <a:bodyPr wrap="square"/>
-                    <a:lstStyle/>
-                    <a:p>
-                      <a:r>
-                        <a:rPr sz="1100" b="0">
-                          <a:solidFill>
-                            <a:srgbClr val="282828"/>
-                          </a:solidFill>
-                          <a:latin typeface="Arial"/>
-                        </a:rPr>
-                        <a:t>0.986 / 2.3 pm / 6044</a:t>
-                      </a:r>
-                    </a:p>
-                  </a:txBody>
-                  <a:tcPr marL="54864" marR="54864" marT="18288" marB="18288">
-                    <a:solidFill>
-                      <a:srgbClr val="ECF1F6"/>
-                    </a:solidFill>
-                  </a:tcPr>
-                </a:tc>
-                <a:tc>
-                  <a:txBody>
-                    <a:bodyPr wrap="square"/>
-                    <a:lstStyle/>
-                    <a:p>
-                      <a:r>
-                        <a:rPr sz="1100" b="0">
-                          <a:solidFill>
-                            <a:srgbClr val="282828"/>
-                          </a:solidFill>
-                          <a:latin typeface="Arial"/>
-                        </a:rPr>
-                        <a:t>0.992 / 2.2 pm (lens), 0.992 / 2.4 (mirrors)</a:t>
-                      </a:r>
-                    </a:p>
-                  </a:txBody>
-                  <a:tcPr marL="54864" marR="54864" marT="18288" marB="18288">
-                    <a:solidFill>
-                      <a:srgbClr val="ECF1F6"/>
-                    </a:solidFill>
-                  </a:tcPr>
-                </a:tc>
-              </a:tr>
-              <a:tr h="468630">
-                <a:tc>
-                  <a:txBody>
-                    <a:bodyPr wrap="square"/>
-                    <a:lstStyle/>
-                    <a:p>
-                      <a:r>
-                        <a:rPr sz="1100" b="0">
-                          <a:solidFill>
-                            <a:srgbClr val="282828"/>
-                          </a:solidFill>
-                          <a:latin typeface="Arial"/>
-                        </a:rPr>
-                        <a:t>1 nm on the grid (112-120 sites)</a:t>
-                      </a:r>
-                    </a:p>
-                  </a:txBody>
-                  <a:tcPr marL="54864" marR="54864" marT="18288" marB="18288">
-                    <a:solidFill>
-                      <a:srgbClr val="FFFFFF"/>
-                    </a:solidFill>
-                  </a:tcPr>
-                </a:tc>
-                <a:tc>
-                  <a:txBody>
-                    <a:bodyPr wrap="square"/>
-                    <a:lstStyle/>
-                    <a:p>
-                      <a:r>
-                        <a:rPr sz="1100" b="0">
-                          <a:solidFill>
-                            <a:srgbClr val="282828"/>
-                          </a:solidFill>
-                          <a:latin typeface="Arial"/>
-                        </a:rPr>
-                        <a:t>0.754 / 61.5 pm / 135</a:t>
-                      </a:r>
-                    </a:p>
-                  </a:txBody>
-                  <a:tcPr marL="54864" marR="54864" marT="18288" marB="18288">
-                    <a:solidFill>
-                      <a:srgbClr val="FFFFFF"/>
-                    </a:solidFill>
-                  </a:tcPr>
-                </a:tc>
-                <a:tc>
-                  <a:txBody>
-                    <a:bodyPr wrap="square"/>
-                    <a:lstStyle/>
-                    <a:p>
-                      <a:r>
-                        <a:rPr sz="1100" b="0">
-                          <a:solidFill>
-                            <a:srgbClr val="282828"/>
-                          </a:solidFill>
-                          <a:latin typeface="Arial"/>
-                        </a:rPr>
-                        <a:t>0.993 / 10 pm / 246</a:t>
-                      </a:r>
-                    </a:p>
-                  </a:txBody>
-                  <a:tcPr marL="54864" marR="54864" marT="18288" marB="18288">
-                    <a:solidFill>
-                      <a:srgbClr val="FFFFFF"/>
-                    </a:solidFill>
-                  </a:tcPr>
-                </a:tc>
-                <a:tc>
-                  <a:txBody>
-                    <a:bodyPr wrap="square"/>
-                    <a:lstStyle/>
-                    <a:p>
-                      <a:r>
-                        <a:rPr sz="1100" b="0">
-                          <a:solidFill>
-                            <a:srgbClr val="282828"/>
-                          </a:solidFill>
-                          <a:latin typeface="Arial"/>
-                        </a:rPr>
-                        <a:t>0.981 / 4.5 pm / 309</a:t>
-                      </a:r>
-                    </a:p>
-                  </a:txBody>
-                  <a:tcPr marL="54864" marR="54864" marT="18288" marB="18288">
-                    <a:solidFill>
-                      <a:srgbClr val="FFFFFF"/>
-                    </a:solidFill>
-                  </a:tcPr>
-                </a:tc>
-                <a:tc>
-                  <a:txBody>
-                    <a:bodyPr wrap="square"/>
-                    <a:lstStyle/>
-                    <a:p>
-                      <a:r>
-                        <a:rPr sz="1100" b="0">
-                          <a:solidFill>
-                            <a:srgbClr val="282828"/>
-                          </a:solidFill>
-                          <a:latin typeface="Arial"/>
-                        </a:rPr>
-                        <a:t>0.981 / 4.4 pm / 310</a:t>
-                      </a:r>
-                    </a:p>
-                  </a:txBody>
-                  <a:tcPr marL="54864" marR="54864" marT="18288" marB="18288">
-                    <a:solidFill>
-                      <a:srgbClr val="FFFFFF"/>
-                    </a:solidFill>
-                  </a:tcPr>
-                </a:tc>
-                <a:tc>
-                  <a:txBody>
-                    <a:bodyPr wrap="square"/>
-                    <a:lstStyle/>
-                    <a:p>
-                      <a:r>
-                        <a:rPr sz="1100" b="0">
-                          <a:solidFill>
-                            <a:srgbClr val="282828"/>
-                          </a:solidFill>
-                          <a:latin typeface="Arial"/>
-                        </a:rPr>
-                        <a:t>0.999 / 4 pm</a:t>
-                      </a:r>
-                    </a:p>
-                  </a:txBody>
-                  <a:tcPr marL="54864" marR="54864" marT="18288" marB="18288">
-                    <a:solidFill>
-                      <a:srgbClr val="FFFFFF"/>
-                    </a:solidFill>
-                  </a:tcPr>
-                </a:tc>
-              </a:tr>
-              <a:tr h="657225">
-                <a:tc>
-                  <a:txBody>
-                    <a:bodyPr wrap="square"/>
-                    <a:lstStyle/>
-                    <a:p>
-                      <a:r>
-                        <a:rPr sz="1100" b="0">
-                          <a:solidFill>
-                            <a:srgbClr val="282828"/>
-                          </a:solidFill>
-                          <a:latin typeface="Arial"/>
-                        </a:rPr>
-                        <a:t>capture to 10%, single site / grid</a:t>
-                      </a:r>
-                    </a:p>
-                  </a:txBody>
-                  <a:tcPr marL="54864" marR="54864" marT="18288" marB="18288">
-                    <a:solidFill>
-                      <a:srgbClr val="ECF1F6"/>
-                    </a:solidFill>
-                  </a:tcPr>
-                </a:tc>
-                <a:tc>
-                  <a:txBody>
-                    <a:bodyPr wrap="square"/>
-                    <a:lstStyle/>
-                    <a:p>
-                      <a:r>
-                        <a:rPr sz="1100" b="0">
-                          <a:solidFill>
-                            <a:srgbClr val="282828"/>
-                          </a:solidFill>
-                          <a:latin typeface="Arial"/>
-                        </a:rPr>
-                        <a:t>480 nm and beyond / outside at the first rung</a:t>
-                      </a:r>
-                    </a:p>
-                  </a:txBody>
-                  <a:tcPr marL="54864" marR="54864" marT="18288" marB="18288">
-                    <a:solidFill>
-                      <a:srgbClr val="ECF1F6"/>
-                    </a:solidFill>
-                  </a:tcPr>
-                </a:tc>
-                <a:tc>
-                  <a:txBody>
-                    <a:bodyPr wrap="square"/>
-                    <a:lstStyle/>
-                    <a:p>
-                      <a:r>
-                        <a:rPr sz="1100" b="0">
-                          <a:solidFill>
-                            <a:srgbClr val="282828"/>
-                          </a:solidFill>
-                          <a:latin typeface="Arial"/>
-                        </a:rPr>
-                        <a:t>480+ / 480+</a:t>
-                      </a:r>
-                    </a:p>
-                  </a:txBody>
-                  <a:tcPr marL="54864" marR="54864" marT="18288" marB="18288">
-                    <a:solidFill>
-                      <a:srgbClr val="ECF1F6"/>
-                    </a:solidFill>
-                  </a:tcPr>
-                </a:tc>
-                <a:tc>
-                  <a:txBody>
-                    <a:bodyPr wrap="square"/>
-                    <a:lstStyle/>
-                    <a:p>
-                      <a:r>
-                        <a:rPr sz="1100" b="0">
-                          <a:solidFill>
-                            <a:srgbClr val="282828"/>
-                          </a:solidFill>
-                          <a:latin typeface="Arial"/>
-                        </a:rPr>
-                        <a:t>480+ / 480+</a:t>
-                      </a:r>
-                    </a:p>
-                  </a:txBody>
-                  <a:tcPr marL="54864" marR="54864" marT="18288" marB="18288">
-                    <a:solidFill>
-                      <a:srgbClr val="ECF1F6"/>
-                    </a:solidFill>
-                  </a:tcPr>
-                </a:tc>
-                <a:tc>
-                  <a:txBody>
-                    <a:bodyPr wrap="square"/>
-                    <a:lstStyle/>
-                    <a:p>
-                      <a:r>
-                        <a:rPr sz="1100" b="0">
-                          <a:solidFill>
-                            <a:srgbClr val="282828"/>
-                          </a:solidFill>
-                          <a:latin typeface="Arial"/>
-                        </a:rPr>
-                        <a:t>480+ / 480+</a:t>
-                      </a:r>
-                    </a:p>
-                  </a:txBody>
-                  <a:tcPr marL="54864" marR="54864" marT="18288" marB="18288">
-                    <a:solidFill>
-                      <a:srgbClr val="ECF1F6"/>
-                    </a:solidFill>
-                  </a:tcPr>
-                </a:tc>
-                <a:tc>
-                  <a:txBody>
-                    <a:bodyPr wrap="square"/>
-                    <a:lstStyle/>
-                    <a:p>
-                      <a:r>
-                        <a:rPr sz="1100" b="0">
-                          <a:solidFill>
-                            <a:srgbClr val="282828"/>
-                          </a:solidFill>
-                          <a:latin typeface="Arial"/>
-                        </a:rPr>
-                        <a:t>322 / 480 and beyond</a:t>
-                      </a:r>
-                    </a:p>
-                  </a:txBody>
-                  <a:tcPr marL="54864" marR="54864" marT="18288" marB="18288">
-                    <a:solidFill>
-                      <a:srgbClr val="ECF1F6"/>
-                    </a:solidFill>
-                  </a:tcPr>
-                </a:tc>
-              </a:tr>
               <a:tr h="280035">
                 <a:tc>
                   <a:txBody>
@@ -27311,7 +27687,7 @@
         </p:nvSpPr>
         <p:spPr>
           <a:xfrm>
-            <a:off x="411480" y="6416802"/>
+            <a:off x="411480" y="4165091"/>
             <a:ext cx="11368735" cy="274320"/>
           </a:xfrm>
           <a:prstGeom prst="rect">
@@ -27324,38 +27700,6 @@
             <a:spAutoFit/>
           </a:bodyPr>
           <a:lstStyle/>
-          <a:p>
-            <a:pPr>
-              <a:spcAft>
-                <a:spcPts val="600"/>
-              </a:spcAft>
-            </a:pPr>
-            <a:r>
-              <a:rPr sz="1500" b="0">
-                <a:solidFill>
-                  <a:srgbClr val="282828"/>
-                </a:solidFill>
-                <a:latin typeface="Arial"/>
-              </a:rPr>
-              <a:t>•  Read it as the redo's justification: with the 10 mm plates and the 2 mm windows in, the seed tail's null on the lens rig's misfed collimator reaches 92 nm, a third of a wave of wavefront, and the 112-site row at 1 nm falls to 0.75 through the fold, while one actuator still reads to 1 pm.  Package A (the collimator at its focus, the tail tuned on the reading) is what restores it; the mirror rig, already fed at its focus, holds its rows at 0.98 to 0.99 with a 26 nm fixed-pattern null the reference frame removes.</a:t>
-            </a:r>
-          </a:p>
-          <a:p>
-            <a:pPr>
-              <a:spcAft>
-                <a:spcPts val="600"/>
-              </a:spcAft>
-            </a:pPr>
-            <a:r>
-              <a:rPr sz="1500" b="0">
-                <a:solidFill>
-                  <a:srgbClr val="282828"/>
-                </a:solidFill>
-                <a:latin typeface="Arial"/>
-              </a:rPr>
-              <a:t>•  The redo bench restores the lens rig's grid row (0.754 to 0.993) and leaves a 59 nm null; the mirror rig is unchanged by design.  The null that remains on both rigs is the mask plate's spherical aberration in the F/4.2 beam (a 2 mm plate: about 0.1 wave rms), a fixed pattern the reference frame removes and the reading-tuned tail does not chase; TO's null decomposition prices it.</a:t>
-            </a:r>
-          </a:p>
           <a:p>
             <a:pPr>
               <a:spcAft>
@@ -27398,7 +27742,7 @@
         </p:nvSpPr>
         <p:spPr>
           <a:xfrm>
-            <a:off x="411480" y="10728960"/>
+            <a:off x="411480" y="5967984"/>
             <a:ext cx="11368735" cy="274320"/>
           </a:xfrm>
           <a:prstGeom prst="rect">
@@ -27424,7 +27768,7 @@
                 </a:solidFill>
                 <a:latin typeface="Arial"/>
               </a:rPr>
-              <a:t>Run tags sub96_lens, sub96_oap, pupilsim_sub96_lens, pupilsim_sub96_oap, sub96_oapsens (cycle 3a); redo96_lens, redo96_oap (cycle 3b); redo96_oapsens (3b); the Mac, 2026-09-17.</a:t>
+              <a:t>Run tags pupilsim_sub96_lens, pupilsim_sub96_oap, sub96_oapsens (cycle 3a); redo96_oapsens (3b); the Mac, 2026-09-17.  The interferometer's rows on these decks are on the previous slide.</a:t>
             </a:r>
           </a:p>
         </p:txBody>
@@ -27437,7 +27781,7 @@
 </p:sld>
 </file>
 
-<file path=ppt/slides/slide47.xml><?xml version="1.0" encoding="utf-8"?>
+<file path=ppt/slides/slide48.xml><?xml version="1.0" encoding="utf-8"?>
 <p:sld xmlns:a="http://schemas.openxmlformats.org/drawingml/2006/main" xmlns:p="http://schemas.openxmlformats.org/presentationml/2006/main" xmlns:r="http://schemas.openxmlformats.org/officeDocument/2006/relationships">
   <p:cSld>
     <p:spTree>
@@ -28285,7 +28629,7 @@
 </p:sld>
 </file>
 
-<file path=ppt/slides/slide48.xml><?xml version="1.0" encoding="utf-8"?>
+<file path=ppt/slides/slide49.xml><?xml version="1.0" encoding="utf-8"?>
 <p:sld xmlns:a="http://schemas.openxmlformats.org/drawingml/2006/main" xmlns:p="http://schemas.openxmlformats.org/presentationml/2006/main" xmlns:r="http://schemas.openxmlformats.org/officeDocument/2006/relationships">
   <p:cSld>
     <p:spTree>
@@ -28575,862 +28919,6 @@
 </p:sld>
 </file>
 
-<file path=ppt/slides/slide49.xml><?xml version="1.0" encoding="utf-8"?>
-<p:sld xmlns:a="http://schemas.openxmlformats.org/drawingml/2006/main" xmlns:p="http://schemas.openxmlformats.org/presentationml/2006/main" xmlns:r="http://schemas.openxmlformats.org/officeDocument/2006/relationships">
-  <p:cSld>
-    <p:spTree>
-      <p:nvGrpSpPr>
-        <p:cNvPr id="1" name=""/>
-        <p:cNvGrpSpPr/>
-        <p:nvPr/>
-      </p:nvGrpSpPr>
-      <p:grpSpPr/>
-      <p:sp>
-        <p:nvSpPr>
-          <p:cNvPr id="2" name="TextBox 1"/>
-          <p:cNvSpPr txBox="1"/>
-          <p:nvPr/>
-        </p:nvSpPr>
-        <p:spPr>
-          <a:xfrm>
-            <a:off x="411480" y="201168"/>
-            <a:ext cx="11368735" cy="914400"/>
-          </a:xfrm>
-          <a:prstGeom prst="rect">
-            <a:avLst/>
-          </a:prstGeom>
-          <a:noFill/>
-        </p:spPr>
-        <p:txBody>
-          <a:bodyPr wrap="square">
-            <a:spAutoFit/>
-          </a:bodyPr>
-          <a:lstStyle/>
-          <a:p>
-            <a:pPr>
-              <a:spcAft>
-                <a:spcPts val="400"/>
-              </a:spcAft>
-            </a:pPr>
-            <a:r>
-              <a:rPr sz="2400" b="1">
-                <a:solidFill>
-                  <a:srgbClr val="1F4E79"/>
-                </a:solidFill>
-                <a:latin typeface="Arial"/>
-              </a:rPr>
-              <a:t>Backup: the point-diffraction trades</a:t>
-            </a:r>
-          </a:p>
-          <a:p>
-            <a:pPr>
-              <a:spcAft>
-                <a:spcPts val="0"/>
-              </a:spcAft>
-            </a:pPr>
-            <a:r>
-              <a:rPr sz="1250" b="0">
-                <a:solidFill>
-                  <a:srgbClr val="6E6E6E"/>
-                </a:solidFill>
-                <a:latin typeface="Arial"/>
-              </a:rPr>
-              <a:t>The pinhole diameter of record is 2.0 λF/D; the P/SRI's traced reference arm moves with the state by 0.05% of the figure and costs twice the light</a:t>
-            </a:r>
-          </a:p>
-        </p:txBody>
-      </p:sp>
-      <p:sp>
-        <p:nvSpPr>
-          <p:cNvPr id="3" name="Rectangle 2"/>
-          <p:cNvSpPr/>
-          <p:nvPr/>
-        </p:nvSpPr>
-        <p:spPr>
-          <a:xfrm>
-            <a:off x="411480" y="1133856"/>
-            <a:ext cx="11368735" cy="20320"/>
-          </a:xfrm>
-          <a:prstGeom prst="rect">
-            <a:avLst/>
-          </a:prstGeom>
-          <a:solidFill>
-            <a:srgbClr val="B8C6D4"/>
-          </a:solidFill>
-          <a:ln>
-            <a:noFill/>
-          </a:ln>
-          <a:effectLst/>
-        </p:spPr>
-        <p:style>
-          <a:lnRef idx="1">
-            <a:schemeClr val="accent1"/>
-          </a:lnRef>
-          <a:fillRef idx="3">
-            <a:schemeClr val="accent1"/>
-          </a:fillRef>
-          <a:effectRef idx="2">
-            <a:schemeClr val="accent1"/>
-          </a:effectRef>
-          <a:fontRef idx="minor">
-            <a:schemeClr val="lt1"/>
-          </a:fontRef>
-        </p:style>
-        <p:txBody>
-          <a:bodyPr rtlCol="0" anchor="ctr"/>
-          <a:lstStyle/>
-          <a:p>
-            <a:pPr algn="ctr"/>
-          </a:p>
-        </p:txBody>
-      </p:sp>
-      <p:graphicFrame>
-        <p:nvGraphicFramePr>
-          <p:cNvPr id="4" name="Table 3"/>
-          <p:cNvGraphicFramePr>
-            <a:graphicFrameLocks noGrp="1"/>
-          </p:cNvGraphicFramePr>
-          <p:nvPr/>
-        </p:nvGraphicFramePr>
-        <p:xfrm>
-          <a:off x="411480" y="1298448"/>
-          <a:ext cx="5806438" cy="3274695"/>
-        </p:xfrm>
-        <a:graphic>
-          <a:graphicData uri="http://schemas.openxmlformats.org/drawingml/2006/table">
-            <a:tbl>
-              <a:tblPr firstRow="1" bandRow="1">
-                <a:tableStyleId>{5C22544A-7EE6-4342-B048-85BDC9FD1C3A}</a:tableStyleId>
-              </a:tblPr>
-              <a:tblGrid>
-                <a:gridCol w="2152949"/>
-                <a:gridCol w="1043854"/>
-                <a:gridCol w="2609635"/>
-              </a:tblGrid>
-              <a:tr h="468630">
-                <a:tc>
-                  <a:txBody>
-                    <a:bodyPr wrap="square"/>
-                    <a:lstStyle/>
-                    <a:p/>
-                  </a:txBody>
-                  <a:tcPr marL="54864" marR="54864" marT="18288" marB="18288">
-                    <a:solidFill>
-                      <a:srgbClr val="1F4E79"/>
-                    </a:solidFill>
-                  </a:tcPr>
-                </a:tc>
-                <a:tc>
-                  <a:txBody>
-                    <a:bodyPr wrap="square"/>
-                    <a:lstStyle/>
-                    <a:p>
-                      <a:r>
-                        <a:rPr sz="1100" b="1">
-                          <a:solidFill>
-                            <a:srgbClr val="FFFFFF"/>
-                          </a:solidFill>
-                          <a:latin typeface="Arial"/>
-                        </a:rPr>
-                        <a:t>2.0 λF/D pinhole</a:t>
-                      </a:r>
-                    </a:p>
-                  </a:txBody>
-                  <a:tcPr marL="54864" marR="54864" marT="18288" marB="18288">
-                    <a:solidFill>
-                      <a:srgbClr val="1F4E79"/>
-                    </a:solidFill>
-                  </a:tcPr>
-                </a:tc>
-                <a:tc>
-                  <a:txBody>
-                    <a:bodyPr wrap="square"/>
-                    <a:lstStyle/>
-                    <a:p>
-                      <a:r>
-                        <a:rPr sz="1100" b="1">
-                          <a:solidFill>
-                            <a:srgbClr val="FFFFFF"/>
-                          </a:solidFill>
-                          <a:latin typeface="Arial"/>
-                        </a:rPr>
-                        <a:t>1.0 λF/D pinhole</a:t>
-                      </a:r>
-                    </a:p>
-                  </a:txBody>
-                  <a:tcPr marL="54864" marR="54864" marT="18288" marB="18288">
-                    <a:solidFill>
-                      <a:srgbClr val="1F4E79"/>
-                    </a:solidFill>
-                  </a:tcPr>
-                </a:tc>
-              </a:tr>
-              <a:tr h="280035">
-                <a:tc>
-                  <a:txBody>
-                    <a:bodyPr wrap="square"/>
-                    <a:lstStyle/>
-                    <a:p>
-                      <a:r>
-                        <a:rPr sz="1100" b="0">
-                          <a:solidFill>
-                            <a:srgbClr val="282828"/>
-                          </a:solidFill>
-                          <a:latin typeface="Arial"/>
-                        </a:rPr>
-                        <a:t>diameter</a:t>
-                      </a:r>
-                    </a:p>
-                  </a:txBody>
-                  <a:tcPr marL="54864" marR="54864" marT="18288" marB="18288">
-                    <a:solidFill>
-                      <a:srgbClr val="FFFFFF"/>
-                    </a:solidFill>
-                  </a:tcPr>
-                </a:tc>
-                <a:tc>
-                  <a:txBody>
-                    <a:bodyPr wrap="square"/>
-                    <a:lstStyle/>
-                    <a:p>
-                      <a:r>
-                        <a:rPr sz="1100" b="0">
-                          <a:solidFill>
-                            <a:srgbClr val="282828"/>
-                          </a:solidFill>
-                          <a:latin typeface="Arial"/>
-                        </a:rPr>
-                        <a:t>5.27 µm</a:t>
-                      </a:r>
-                    </a:p>
-                  </a:txBody>
-                  <a:tcPr marL="54864" marR="54864" marT="18288" marB="18288">
-                    <a:solidFill>
-                      <a:srgbClr val="FFFFFF"/>
-                    </a:solidFill>
-                  </a:tcPr>
-                </a:tc>
-                <a:tc>
-                  <a:txBody>
-                    <a:bodyPr wrap="square"/>
-                    <a:lstStyle/>
-                    <a:p>
-                      <a:r>
-                        <a:rPr sz="1100" b="0">
-                          <a:solidFill>
-                            <a:srgbClr val="282828"/>
-                          </a:solidFill>
-                          <a:latin typeface="Arial"/>
-                        </a:rPr>
-                        <a:t>2.64 µm</a:t>
-                      </a:r>
-                    </a:p>
-                  </a:txBody>
-                  <a:tcPr marL="54864" marR="54864" marT="18288" marB="18288">
-                    <a:solidFill>
-                      <a:srgbClr val="FFFFFF"/>
-                    </a:solidFill>
-                  </a:tcPr>
-                </a:tc>
-              </a:tr>
-              <a:tr h="468630">
-                <a:tc>
-                  <a:txBody>
-                    <a:bodyPr wrap="square"/>
-                    <a:lstStyle/>
-                    <a:p>
-                      <a:r>
-                        <a:rPr sz="1100" b="0">
-                          <a:solidFill>
-                            <a:srgbClr val="282828"/>
-                          </a:solidFill>
-                          <a:latin typeface="Arial"/>
-                        </a:rPr>
-                        <a:t>surround transmission (amplitude)</a:t>
-                      </a:r>
-                    </a:p>
-                  </a:txBody>
-                  <a:tcPr marL="54864" marR="54864" marT="18288" marB="18288">
-                    <a:solidFill>
-                      <a:srgbClr val="ECF1F6"/>
-                    </a:solidFill>
-                  </a:tcPr>
-                </a:tc>
-                <a:tc>
-                  <a:txBody>
-                    <a:bodyPr wrap="square"/>
-                    <a:lstStyle/>
-                    <a:p>
-                      <a:r>
-                        <a:rPr sz="1100" b="0">
-                          <a:solidFill>
-                            <a:srgbClr val="282828"/>
-                          </a:solidFill>
-                          <a:latin typeface="Arial"/>
-                        </a:rPr>
-                        <a:t>0.72</a:t>
-                      </a:r>
-                    </a:p>
-                  </a:txBody>
-                  <a:tcPr marL="54864" marR="54864" marT="18288" marB="18288">
-                    <a:solidFill>
-                      <a:srgbClr val="ECF1F6"/>
-                    </a:solidFill>
-                  </a:tcPr>
-                </a:tc>
-                <a:tc>
-                  <a:txBody>
-                    <a:bodyPr wrap="square"/>
-                    <a:lstStyle/>
-                    <a:p>
-                      <a:r>
-                        <a:rPr sz="1100" b="0">
-                          <a:solidFill>
-                            <a:srgbClr val="282828"/>
-                          </a:solidFill>
-                          <a:latin typeface="Arial"/>
-                        </a:rPr>
-                        <a:t>0.28</a:t>
-                      </a:r>
-                    </a:p>
-                  </a:txBody>
-                  <a:tcPr marL="54864" marR="54864" marT="18288" marB="18288">
-                    <a:solidFill>
-                      <a:srgbClr val="ECF1F6"/>
-                    </a:solidFill>
-                  </a:tcPr>
-                </a:tc>
-              </a:tr>
-              <a:tr h="280035">
-                <a:tc>
-                  <a:txBody>
-                    <a:bodyPr wrap="square"/>
-                    <a:lstStyle/>
-                    <a:p>
-                      <a:r>
-                        <a:rPr sz="1100" b="0">
-                          <a:solidFill>
-                            <a:srgbClr val="282828"/>
-                          </a:solidFill>
-                          <a:latin typeface="Arial"/>
-                        </a:rPr>
-                        <a:t>throughput</a:t>
-                      </a:r>
-                    </a:p>
-                  </a:txBody>
-                  <a:tcPr marL="54864" marR="54864" marT="18288" marB="18288">
-                    <a:solidFill>
-                      <a:srgbClr val="FFFFFF"/>
-                    </a:solidFill>
-                  </a:tcPr>
-                </a:tc>
-                <a:tc>
-                  <a:txBody>
-                    <a:bodyPr wrap="square"/>
-                    <a:lstStyle/>
-                    <a:p>
-                      <a:r>
-                        <a:rPr sz="1100" b="0">
-                          <a:solidFill>
-                            <a:srgbClr val="282828"/>
-                          </a:solidFill>
-                          <a:latin typeface="Arial"/>
-                        </a:rPr>
-                        <a:t>0.82</a:t>
-                      </a:r>
-                    </a:p>
-                  </a:txBody>
-                  <a:tcPr marL="54864" marR="54864" marT="18288" marB="18288">
-                    <a:solidFill>
-                      <a:srgbClr val="FFFFFF"/>
-                    </a:solidFill>
-                  </a:tcPr>
-                </a:tc>
-                <a:tc>
-                  <a:txBody>
-                    <a:bodyPr wrap="square"/>
-                    <a:lstStyle/>
-                    <a:p>
-                      <a:r>
-                        <a:rPr sz="1100" b="0">
-                          <a:solidFill>
-                            <a:srgbClr val="282828"/>
-                          </a:solidFill>
-                          <a:latin typeface="Arial"/>
-                        </a:rPr>
-                        <a:t>0.29</a:t>
-                      </a:r>
-                    </a:p>
-                  </a:txBody>
-                  <a:tcPr marL="54864" marR="54864" marT="18288" marB="18288">
-                    <a:solidFill>
-                      <a:srgbClr val="FFFFFF"/>
-                    </a:solidFill>
-                  </a:tcPr>
-                </a:tc>
-              </a:tr>
-              <a:tr h="468630">
-                <a:tc>
-                  <a:txBody>
-                    <a:bodyPr wrap="square"/>
-                    <a:lstStyle/>
-                    <a:p>
-                      <a:r>
-                        <a:rPr sz="1100" b="0">
-                          <a:solidFill>
-                            <a:srgbClr val="282828"/>
-                          </a:solidFill>
-                          <a:latin typeface="Arial"/>
-                        </a:rPr>
-                        <a:t>pixels across at the mask</a:t>
-                      </a:r>
-                    </a:p>
-                  </a:txBody>
-                  <a:tcPr marL="54864" marR="54864" marT="18288" marB="18288">
-                    <a:solidFill>
-                      <a:srgbClr val="ECF1F6"/>
-                    </a:solidFill>
-                  </a:tcPr>
-                </a:tc>
-                <a:tc>
-                  <a:txBody>
-                    <a:bodyPr wrap="square"/>
-                    <a:lstStyle/>
-                    <a:p>
-                      <a:r>
-                        <a:rPr sz="1100" b="0">
-                          <a:solidFill>
-                            <a:srgbClr val="282828"/>
-                          </a:solidFill>
-                          <a:latin typeface="Arial"/>
-                        </a:rPr>
-                        <a:t>7.9</a:t>
-                      </a:r>
-                    </a:p>
-                  </a:txBody>
-                  <a:tcPr marL="54864" marR="54864" marT="18288" marB="18288">
-                    <a:solidFill>
-                      <a:srgbClr val="ECF1F6"/>
-                    </a:solidFill>
-                  </a:tcPr>
-                </a:tc>
-                <a:tc>
-                  <a:txBody>
-                    <a:bodyPr wrap="square"/>
-                    <a:lstStyle/>
-                    <a:p>
-                      <a:r>
-                        <a:rPr sz="1100" b="0">
-                          <a:solidFill>
-                            <a:srgbClr val="282828"/>
-                          </a:solidFill>
-                          <a:latin typeface="Arial"/>
-                        </a:rPr>
-                        <a:t>4.0 (below the 6 the sampling rule asks)</a:t>
-                      </a:r>
-                    </a:p>
-                  </a:txBody>
-                  <a:tcPr marL="54864" marR="54864" marT="18288" marB="18288">
-                    <a:solidFill>
-                      <a:srgbClr val="ECF1F6"/>
-                    </a:solidFill>
-                  </a:tcPr>
-                </a:tc>
-              </a:tr>
-              <a:tr h="280035">
-                <a:tc>
-                  <a:txBody>
-                    <a:bodyPr wrap="square"/>
-                    <a:lstStyle/>
-                    <a:p>
-                      <a:r>
-                        <a:rPr sz="1100" b="0">
-                          <a:solidFill>
-                            <a:srgbClr val="282828"/>
-                          </a:solidFill>
-                          <a:latin typeface="Arial"/>
-                        </a:rPr>
-                        <a:t>10 nm on one actuator</a:t>
-                      </a:r>
-                    </a:p>
-                  </a:txBody>
-                  <a:tcPr marL="54864" marR="54864" marT="18288" marB="18288">
-                    <a:solidFill>
-                      <a:srgbClr val="FFFFFF"/>
-                    </a:solidFill>
-                  </a:tcPr>
-                </a:tc>
-                <a:tc>
-                  <a:txBody>
-                    <a:bodyPr wrap="square"/>
-                    <a:lstStyle/>
-                    <a:p>
-                      <a:r>
-                        <a:rPr sz="1100" b="0">
-                          <a:solidFill>
-                            <a:srgbClr val="282828"/>
-                          </a:solidFill>
-                          <a:latin typeface="Arial"/>
-                        </a:rPr>
-                        <a:t>0.9935 / 4 pm</a:t>
-                      </a:r>
-                    </a:p>
-                  </a:txBody>
-                  <a:tcPr marL="54864" marR="54864" marT="18288" marB="18288">
-                    <a:solidFill>
-                      <a:srgbClr val="FFFFFF"/>
-                    </a:solidFill>
-                  </a:tcPr>
-                </a:tc>
-                <a:tc>
-                  <a:txBody>
-                    <a:bodyPr wrap="square"/>
-                    <a:lstStyle/>
-                    <a:p>
-                      <a:r>
-                        <a:rPr sz="1100" b="0">
-                          <a:solidFill>
-                            <a:srgbClr val="282828"/>
-                          </a:solidFill>
-                          <a:latin typeface="Arial"/>
-                        </a:rPr>
-                        <a:t>0.9937 / 4 pm</a:t>
-                      </a:r>
-                    </a:p>
-                  </a:txBody>
-                  <a:tcPr marL="54864" marR="54864" marT="18288" marB="18288">
-                    <a:solidFill>
-                      <a:srgbClr val="FFFFFF"/>
-                    </a:solidFill>
-                  </a:tcPr>
-                </a:tc>
-              </a:tr>
-              <a:tr h="280035">
-                <a:tc>
-                  <a:txBody>
-                    <a:bodyPr wrap="square"/>
-                    <a:lstStyle/>
-                    <a:p>
-                      <a:r>
-                        <a:rPr sz="1100" b="0">
-                          <a:solidFill>
-                            <a:srgbClr val="282828"/>
-                          </a:solidFill>
-                          <a:latin typeface="Arial"/>
-                        </a:rPr>
-                        <a:t>capture range, no shutter</a:t>
-                      </a:r>
-                    </a:p>
-                  </a:txBody>
-                  <a:tcPr marL="54864" marR="54864" marT="18288" marB="18288">
-                    <a:solidFill>
-                      <a:srgbClr val="ECF1F6"/>
-                    </a:solidFill>
-                  </a:tcPr>
-                </a:tc>
-                <a:tc>
-                  <a:txBody>
-                    <a:bodyPr wrap="square"/>
-                    <a:lstStyle/>
-                    <a:p>
-                      <a:r>
-                        <a:rPr sz="1100" b="0">
-                          <a:solidFill>
-                            <a:srgbClr val="282828"/>
-                          </a:solidFill>
-                          <a:latin typeface="Arial"/>
-                        </a:rPr>
-                        <a:t>62 nm</a:t>
-                      </a:r>
-                    </a:p>
-                  </a:txBody>
-                  <a:tcPr marL="54864" marR="54864" marT="18288" marB="18288">
-                    <a:solidFill>
-                      <a:srgbClr val="ECF1F6"/>
-                    </a:solidFill>
-                  </a:tcPr>
-                </a:tc>
-                <a:tc>
-                  <a:txBody>
-                    <a:bodyPr wrap="square"/>
-                    <a:lstStyle/>
-                    <a:p>
-                      <a:r>
-                        <a:rPr sz="1100" b="0">
-                          <a:solidFill>
-                            <a:srgbClr val="282828"/>
-                          </a:solidFill>
-                          <a:latin typeface="Arial"/>
-                        </a:rPr>
-                        <a:t>120 nm and beyond</a:t>
-                      </a:r>
-                    </a:p>
-                  </a:txBody>
-                  <a:tcPr marL="54864" marR="54864" marT="18288" marB="18288">
-                    <a:solidFill>
-                      <a:srgbClr val="ECF1F6"/>
-                    </a:solidFill>
-                  </a:tcPr>
-                </a:tc>
-              </a:tr>
-              <a:tr h="468630">
-                <a:tc>
-                  <a:txBody>
-                    <a:bodyPr wrap="square"/>
-                    <a:lstStyle/>
-                    <a:p>
-                      <a:r>
-                        <a:rPr sz="1100" b="0">
-                          <a:solidFill>
-                            <a:srgbClr val="282828"/>
-                          </a:solidFill>
-                          <a:latin typeface="Arial"/>
-                        </a:rPr>
-                        <a:t>photons for 1 pm on the surface</a:t>
-                      </a:r>
-                    </a:p>
-                  </a:txBody>
-                  <a:tcPr marL="54864" marR="54864" marT="18288" marB="18288">
-                    <a:solidFill>
-                      <a:srgbClr val="FFFFFF"/>
-                    </a:solidFill>
-                  </a:tcPr>
-                </a:tc>
-                <a:tc>
-                  <a:txBody>
-                    <a:bodyPr wrap="square"/>
-                    <a:lstStyle/>
-                    <a:p>
-                      <a:r>
-                        <a:rPr sz="1100" b="0">
-                          <a:solidFill>
-                            <a:srgbClr val="282828"/>
-                          </a:solidFill>
-                          <a:latin typeface="Arial"/>
-                        </a:rPr>
-                        <a:t>9.8e13</a:t>
-                      </a:r>
-                    </a:p>
-                  </a:txBody>
-                  <a:tcPr marL="54864" marR="54864" marT="18288" marB="18288">
-                    <a:solidFill>
-                      <a:srgbClr val="FFFFFF"/>
-                    </a:solidFill>
-                  </a:tcPr>
-                </a:tc>
-                <a:tc>
-                  <a:txBody>
-                    <a:bodyPr wrap="square"/>
-                    <a:lstStyle/>
-                    <a:p>
-                      <a:r>
-                        <a:rPr sz="1100" b="0">
-                          <a:solidFill>
-                            <a:srgbClr val="282828"/>
-                          </a:solidFill>
-                          <a:latin typeface="Arial"/>
-                        </a:rPr>
-                        <a:t>2.1e14</a:t>
-                      </a:r>
-                    </a:p>
-                  </a:txBody>
-                  <a:tcPr marL="54864" marR="54864" marT="18288" marB="18288">
-                    <a:solidFill>
-                      <a:srgbClr val="FFFFFF"/>
-                    </a:solidFill>
-                  </a:tcPr>
-                </a:tc>
-              </a:tr>
-              <a:tr h="280035">
-                <a:tc>
-                  <a:txBody>
-                    <a:bodyPr wrap="square"/>
-                    <a:lstStyle/>
-                    <a:p>
-                      <a:r>
-                        <a:rPr sz="1100" b="0">
-                          <a:solidFill>
-                            <a:srgbClr val="282828"/>
-                          </a:solidFill>
-                          <a:latin typeface="Arial"/>
-                        </a:rPr>
-                        <a:t>3 pm under the walk</a:t>
-                      </a:r>
-                    </a:p>
-                  </a:txBody>
-                  <a:tcPr marL="54864" marR="54864" marT="18288" marB="18288">
-                    <a:solidFill>
-                      <a:srgbClr val="ECF1F6"/>
-                    </a:solidFill>
-                  </a:tcPr>
-                </a:tc>
-                <a:tc>
-                  <a:txBody>
-                    <a:bodyPr wrap="square"/>
-                    <a:lstStyle/>
-                    <a:p>
-                      <a:r>
-                        <a:rPr sz="1100" b="0">
-                          <a:solidFill>
-                            <a:srgbClr val="282828"/>
-                          </a:solidFill>
-                          <a:latin typeface="Arial"/>
-                        </a:rPr>
-                        <a:t>below 1e13</a:t>
-                      </a:r>
-                    </a:p>
-                  </a:txBody>
-                  <a:tcPr marL="54864" marR="54864" marT="18288" marB="18288">
-                    <a:solidFill>
-                      <a:srgbClr val="ECF1F6"/>
-                    </a:solidFill>
-                  </a:tcPr>
-                </a:tc>
-                <a:tc>
-                  <a:txBody>
-                    <a:bodyPr wrap="square"/>
-                    <a:lstStyle/>
-                    <a:p>
-                      <a:r>
-                        <a:rPr sz="1100" b="0">
-                          <a:solidFill>
-                            <a:srgbClr val="282828"/>
-                          </a:solidFill>
-                          <a:latin typeface="Arial"/>
-                        </a:rPr>
-                        <a:t>3.6e13</a:t>
-                      </a:r>
-                    </a:p>
-                  </a:txBody>
-                  <a:tcPr marL="54864" marR="54864" marT="18288" marB="18288">
-                    <a:solidFill>
-                      <a:srgbClr val="ECF1F6"/>
-                    </a:solidFill>
-                  </a:tcPr>
-                </a:tc>
-              </a:tr>
-            </a:tbl>
-          </a:graphicData>
-        </a:graphic>
-      </p:graphicFrame>
-      <p:sp>
-        <p:nvSpPr>
-          <p:cNvPr id="5" name="TextBox 4"/>
-          <p:cNvSpPr txBox="1"/>
-          <p:nvPr/>
-        </p:nvSpPr>
-        <p:spPr>
-          <a:xfrm>
-            <a:off x="6400800" y="1298448"/>
-            <a:ext cx="5394960" cy="274320"/>
-          </a:xfrm>
-          <a:prstGeom prst="rect">
-            <a:avLst/>
-          </a:prstGeom>
-          <a:noFill/>
-        </p:spPr>
-        <p:txBody>
-          <a:bodyPr wrap="square">
-            <a:spAutoFit/>
-          </a:bodyPr>
-          <a:lstStyle/>
-          <a:p>
-            <a:pPr>
-              <a:spcAft>
-                <a:spcPts val="600"/>
-              </a:spcAft>
-            </a:pPr>
-            <a:r>
-              <a:rPr sz="1200" b="0">
-                <a:solidFill>
-                  <a:srgbClr val="282828"/>
-                </a:solidFill>
-                <a:latin typeface="Arial"/>
-              </a:rPr>
-              <a:t>•  The range the small pinhole buys, the shutter frame gives free at the large one's throughput: 1.02 / 1.06 / 1.13 at 120 / 240 / 480 nm.</a:t>
-            </a:r>
-          </a:p>
-          <a:p>
-            <a:pPr>
-              <a:spcAft>
-                <a:spcPts val="600"/>
-              </a:spcAft>
-            </a:pPr>
-            <a:r>
-              <a:rPr sz="1200" b="0">
-                <a:solidFill>
-                  <a:srgbClr val="282828"/>
-                </a:solidFill>
-                <a:latin typeface="Arial"/>
-              </a:rPr>
-              <a:t>•  The P/SRI (pickoff plate 60/40, a 300 mm F/2.9 reference lens, a 3.7 µm pinhole feeding a single-mode waveguide with a thermo-optic phase shifter, a mirrored second lens, folds, a 21.9 mm compensator, a 50/50 recombiner): balanced to zero path difference in the trace.  Its reference moving with the state costs 5.9 pm absolute on a 13 nm figure and 12% on the dense floor; frozen, 0.000.</a:t>
-            </a:r>
-          </a:p>
-          <a:p>
-            <a:pPr>
-              <a:spcAft>
-                <a:spcPts val="600"/>
-              </a:spcAft>
-            </a:pPr>
-            <a:r>
-              <a:rPr sz="1200" b="0">
-                <a:solidFill>
-                  <a:srgbClr val="282828"/>
-                </a:solidFill>
-                <a:latin typeface="Arial"/>
-              </a:rPr>
-              <a:t>•  Five frames beat four: a 2% step error reads 4.9 pm (pinhole) and 2.2 pm (P/SRI) with the Schwider-Hariharan scan against 421 and 251 pm with four-step least squares.</a:t>
-            </a:r>
-          </a:p>
-        </p:txBody>
-      </p:sp>
-      <p:sp>
-        <p:nvSpPr>
-          <p:cNvPr id="6" name="TextBox 5"/>
-          <p:cNvSpPr txBox="1"/>
-          <p:nvPr/>
-        </p:nvSpPr>
-        <p:spPr>
-          <a:xfrm>
-            <a:off x="6400800" y="3934968"/>
-            <a:ext cx="5394960" cy="274320"/>
-          </a:xfrm>
-          <a:prstGeom prst="rect">
-            <a:avLst/>
-          </a:prstGeom>
-          <a:noFill/>
-        </p:spPr>
-        <p:txBody>
-          <a:bodyPr wrap="square">
-            <a:spAutoFit/>
-          </a:bodyPr>
-          <a:lstStyle/>
-          <a:p>
-            <a:pPr>
-              <a:spcAft>
-                <a:spcPts val="600"/>
-              </a:spcAft>
-            </a:pPr>
-            <a:r>
-              <a:rPr sz="1050" b="0">
-                <a:solidFill>
-                  <a:srgbClr val="6E6E6E"/>
-                </a:solidFill>
-                <a:latin typeface="Arial"/>
-              </a:rPr>
-              <a:t>Run tags pin20_1024, pin10_2048, pin20_loop, pin10_loop, pfdeck, pfdeck_frz, pdi193se_sh5, pdi193se_ls; layouts psri_layout.png and psri_render.png in pdi_dm96.</a:t>
-            </a:r>
-          </a:p>
-        </p:txBody>
-      </p:sp>
-    </p:spTree>
-  </p:cSld>
-  <p:clrMapOvr>
-    <a:masterClrMapping/>
-  </p:clrMapOvr>
-</p:sld>
-</file>
-
 <file path=ppt/slides/slide5.xml><?xml version="1.0" encoding="utf-8"?>
 <p:sld xmlns:a="http://schemas.openxmlformats.org/drawingml/2006/main" xmlns:p="http://schemas.openxmlformats.org/presentationml/2006/main" xmlns:r="http://schemas.openxmlformats.org/officeDocument/2006/relationships">
   <p:cSld>
@@ -30442,7 +29930,7 @@
                 </a:solidFill>
                 <a:latin typeface="Arial"/>
               </a:rPr>
-              <a:t>Backup: drift within a measurement</a:t>
+              <a:t>Backup: the point-diffraction trades</a:t>
             </a:r>
           </a:p>
           <a:p>
@@ -30458,7 +29946,7 @@
                 </a:solidFill>
                 <a:latin typeface="Arial"/>
               </a:rPr>
-              <a:t>A mirror that drifts during a stepped scan helps the stepped readings; a camera that drifts during the scan hurts them; the simultaneous readings see neither</a:t>
+              <a:t>The pinhole diameter of record is 2.0 λF/D; the P/SRI's traced reference arm moves with the state by 0.05% of the figure and costs twice the light</a:t>
             </a:r>
           </a:p>
         </p:txBody>
@@ -30517,7 +30005,7 @@
         </p:nvGraphicFramePr>
         <p:xfrm>
           <a:off x="411480" y="1298448"/>
-          <a:ext cx="5806437" cy="1680210"/>
+          <a:ext cx="5806438" cy="3274695"/>
         </p:xfrm>
         <a:graphic>
           <a:graphicData uri="http://schemas.openxmlformats.org/drawingml/2006/table">
@@ -30526,14 +30014,23 @@
                 <a:tableStyleId>{5C22544A-7EE6-4342-B048-85BDC9FD1C3A}</a:tableStyleId>
               </a:tblPr>
               <a:tblGrid>
-                <a:gridCol w="3208822"/>
-                <a:gridCol w="534803"/>
-                <a:gridCol w="534803"/>
-                <a:gridCol w="458403"/>
-                <a:gridCol w="534803"/>
-                <a:gridCol w="534803"/>
+                <a:gridCol w="2152949"/>
+                <a:gridCol w="1043854"/>
+                <a:gridCol w="2609635"/>
               </a:tblGrid>
-              <a:tr h="280035">
+              <a:tr h="468630">
+                <a:tc>
+                  <a:txBody>
+                    <a:bodyPr wrap="square"/>
+                    <a:lstStyle/>
+                    <a:p/>
+                  </a:txBody>
+                  <a:tcPr marL="54864" marR="54864" marT="18288" marB="18288">
+                    <a:solidFill>
+                      <a:srgbClr val="1F4E79"/>
+                    </a:solidFill>
+                  </a:tcPr>
+                </a:tc>
                 <a:tc>
                   <a:txBody>
                     <a:bodyPr wrap="square"/>
@@ -30546,7 +30043,7 @@
                           </a:solidFill>
                           <a:latin typeface="Arial"/>
                         </a:rPr>
-                        <a:t>hold error at 1e15 photons per cycle</a:t>
+                        <a:t>2.0 λF/D pinhole</a:t>
                       </a:r>
                     </a:p>
                   </a:txBody>
@@ -30568,95 +30065,7 @@
                           </a:solidFill>
                           <a:latin typeface="Arial"/>
                         </a:rPr>
-                        <a:t>linear</a:t>
-                      </a:r>
-                    </a:p>
-                  </a:txBody>
-                  <a:tcPr marL="54864" marR="54864" marT="18288" marB="18288">
-                    <a:solidFill>
-                      <a:srgbClr val="1F4E79"/>
-                    </a:solidFill>
-                  </a:tcPr>
-                </a:tc>
-                <a:tc>
-                  <a:txBody>
-                    <a:bodyPr wrap="square"/>
-                    <a:lstStyle/>
-                    <a:p>
-                      <a:r>
-                        <a:rPr sz="1100" b="1">
-                          <a:solidFill>
-                            <a:srgbClr val="FFFFFF"/>
-                          </a:solidFill>
-                          <a:latin typeface="Arial"/>
-                        </a:rPr>
-                        <a:t>stepped</a:t>
-                      </a:r>
-                    </a:p>
-                  </a:txBody>
-                  <a:tcPr marL="54864" marR="54864" marT="18288" marB="18288">
-                    <a:solidFill>
-                      <a:srgbClr val="1F4E79"/>
-                    </a:solidFill>
-                  </a:tcPr>
-                </a:tc>
-                <a:tc>
-                  <a:txBody>
-                    <a:bodyPr wrap="square"/>
-                    <a:lstStyle/>
-                    <a:p>
-                      <a:r>
-                        <a:rPr sz="1100" b="1">
-                          <a:solidFill>
-                            <a:srgbClr val="FFFFFF"/>
-                          </a:solidFill>
-                          <a:latin typeface="Arial"/>
-                        </a:rPr>
-                        <a:t>vector</a:t>
-                      </a:r>
-                    </a:p>
-                  </a:txBody>
-                  <a:tcPr marL="54864" marR="54864" marT="18288" marB="18288">
-                    <a:solidFill>
-                      <a:srgbClr val="1F4E79"/>
-                    </a:solidFill>
-                  </a:tcPr>
-                </a:tc>
-                <a:tc>
-                  <a:txBody>
-                    <a:bodyPr wrap="square"/>
-                    <a:lstStyle/>
-                    <a:p>
-                      <a:r>
-                        <a:rPr sz="1100" b="1">
-                          <a:solidFill>
-                            <a:srgbClr val="FFFFFF"/>
-                          </a:solidFill>
-                          <a:latin typeface="Arial"/>
-                        </a:rPr>
-                        <a:t>pinhole</a:t>
-                      </a:r>
-                    </a:p>
-                  </a:txBody>
-                  <a:tcPr marL="54864" marR="54864" marT="18288" marB="18288">
-                    <a:solidFill>
-                      <a:srgbClr val="1F4E79"/>
-                    </a:solidFill>
-                  </a:tcPr>
-                </a:tc>
-                <a:tc>
-                  <a:txBody>
-                    <a:bodyPr wrap="square"/>
-                    <a:lstStyle/>
-                    <a:p>
-                      <a:r>
-                        <a:rPr sz="1100" b="1">
-                          <a:solidFill>
-                            <a:srgbClr val="FFFFFF"/>
-                          </a:solidFill>
-                          <a:latin typeface="Arial"/>
-                        </a:rPr>
-                        <a:t>P/SRI</a:t>
+                        <a:t>1.0 λF/D pinhole</a:t>
                       </a:r>
                     </a:p>
                   </a:txBody>
@@ -30680,123 +30089,125 @@
                           </a:solidFill>
                           <a:latin typeface="Arial"/>
                         </a:rPr>
-                        <a:t>2 pm walk, mirror still during a scan</a:t>
-                      </a:r>
-                    </a:p>
-                  </a:txBody>
-                  <a:tcPr marL="54864" marR="54864" marT="18288" marB="18288">
-                    <a:solidFill>
-                      <a:srgbClr val="FFFFFF"/>
-                    </a:solidFill>
-                  </a:tcPr>
-                </a:tc>
-                <a:tc>
-                  <a:txBody>
-                    <a:bodyPr wrap="square"/>
-                    <a:lstStyle/>
-                    <a:p>
-                      <a:r>
-                        <a:rPr sz="1100" b="0">
-                          <a:solidFill>
-                            <a:srgbClr val="282828"/>
-                          </a:solidFill>
-                          <a:latin typeface="Arial"/>
-                        </a:rPr>
-                        <a:t>2.38</a:t>
-                      </a:r>
-                    </a:p>
-                  </a:txBody>
-                  <a:tcPr marL="54864" marR="54864" marT="18288" marB="18288">
-                    <a:solidFill>
-                      <a:srgbClr val="FFFFFF"/>
-                    </a:solidFill>
-                  </a:tcPr>
-                </a:tc>
-                <a:tc>
-                  <a:txBody>
-                    <a:bodyPr wrap="square"/>
-                    <a:lstStyle/>
-                    <a:p>
-                      <a:r>
-                        <a:rPr sz="1100" b="0">
-                          <a:solidFill>
-                            <a:srgbClr val="282828"/>
-                          </a:solidFill>
-                          <a:latin typeface="Arial"/>
-                        </a:rPr>
-                        <a:t>2.32</a:t>
-                      </a:r>
-                    </a:p>
-                  </a:txBody>
-                  <a:tcPr marL="54864" marR="54864" marT="18288" marB="18288">
-                    <a:solidFill>
-                      <a:srgbClr val="FFFFFF"/>
-                    </a:solidFill>
-                  </a:tcPr>
-                </a:tc>
-                <a:tc>
-                  <a:txBody>
-                    <a:bodyPr wrap="square"/>
-                    <a:lstStyle/>
-                    <a:p>
-                      <a:r>
-                        <a:rPr sz="1100" b="0">
-                          <a:solidFill>
-                            <a:srgbClr val="282828"/>
-                          </a:solidFill>
-                          <a:latin typeface="Arial"/>
-                        </a:rPr>
-                        <a:t>2.32</a:t>
-                      </a:r>
-                    </a:p>
-                  </a:txBody>
-                  <a:tcPr marL="54864" marR="54864" marT="18288" marB="18288">
-                    <a:solidFill>
-                      <a:srgbClr val="FFFFFF"/>
-                    </a:solidFill>
-                  </a:tcPr>
-                </a:tc>
-                <a:tc>
-                  <a:txBody>
-                    <a:bodyPr wrap="square"/>
-                    <a:lstStyle/>
-                    <a:p>
-                      <a:r>
-                        <a:rPr sz="1100" b="0">
-                          <a:solidFill>
-                            <a:srgbClr val="282828"/>
-                          </a:solidFill>
-                          <a:latin typeface="Arial"/>
-                        </a:rPr>
-                        <a:t>2.32</a:t>
-                      </a:r>
-                    </a:p>
-                  </a:txBody>
-                  <a:tcPr marL="54864" marR="54864" marT="18288" marB="18288">
-                    <a:solidFill>
-                      <a:srgbClr val="FFFFFF"/>
-                    </a:solidFill>
-                  </a:tcPr>
-                </a:tc>
-                <a:tc>
-                  <a:txBody>
-                    <a:bodyPr wrap="square"/>
-                    <a:lstStyle/>
-                    <a:p>
-                      <a:r>
-                        <a:rPr sz="1100" b="0">
-                          <a:solidFill>
-                            <a:srgbClr val="282828"/>
-                          </a:solidFill>
-                          <a:latin typeface="Arial"/>
-                        </a:rPr>
-                        <a:t>2.33 pm</a:t>
-                      </a:r>
-                    </a:p>
-                  </a:txBody>
-                  <a:tcPr marL="54864" marR="54864" marT="18288" marB="18288">
-                    <a:solidFill>
-                      <a:srgbClr val="FFFFFF"/>
+                        <a:t>diameter</a:t>
+                      </a:r>
+                    </a:p>
+                  </a:txBody>
+                  <a:tcPr marL="54864" marR="54864" marT="18288" marB="18288">
+                    <a:solidFill>
+                      <a:srgbClr val="FFFFFF"/>
+                    </a:solidFill>
+                  </a:tcPr>
+                </a:tc>
+                <a:tc>
+                  <a:txBody>
+                    <a:bodyPr wrap="square"/>
+                    <a:lstStyle/>
+                    <a:p>
+                      <a:r>
+                        <a:rPr sz="1100" b="0">
+                          <a:solidFill>
+                            <a:srgbClr val="282828"/>
+                          </a:solidFill>
+                          <a:latin typeface="Arial"/>
+                        </a:rPr>
+                        <a:t>5.27 µm</a:t>
+                      </a:r>
+                    </a:p>
+                  </a:txBody>
+                  <a:tcPr marL="54864" marR="54864" marT="18288" marB="18288">
+                    <a:solidFill>
+                      <a:srgbClr val="FFFFFF"/>
+                    </a:solidFill>
+                  </a:tcPr>
+                </a:tc>
+                <a:tc>
+                  <a:txBody>
+                    <a:bodyPr wrap="square"/>
+                    <a:lstStyle/>
+                    <a:p>
+                      <a:r>
+                        <a:rPr sz="1100" b="0">
+                          <a:solidFill>
+                            <a:srgbClr val="282828"/>
+                          </a:solidFill>
+                          <a:latin typeface="Arial"/>
+                        </a:rPr>
+                        <a:t>2.64 µm</a:t>
+                      </a:r>
+                    </a:p>
+                  </a:txBody>
+                  <a:tcPr marL="54864" marR="54864" marT="18288" marB="18288">
+                    <a:solidFill>
+                      <a:srgbClr val="FFFFFF"/>
+                    </a:solidFill>
+                  </a:tcPr>
+                </a:tc>
+              </a:tr>
+              <a:tr h="468630">
+                <a:tc>
+                  <a:txBody>
+                    <a:bodyPr wrap="square"/>
+                    <a:lstStyle/>
+                    <a:p>
+                      <a:r>
+                        <a:rPr sz="1100" b="0">
+                          <a:solidFill>
+                            <a:srgbClr val="282828"/>
+                          </a:solidFill>
+                          <a:latin typeface="Arial"/>
+                        </a:rPr>
+                        <a:t>surround transmission (amplitude)</a:t>
+                      </a:r>
+                    </a:p>
+                  </a:txBody>
+                  <a:tcPr marL="54864" marR="54864" marT="18288" marB="18288">
+                    <a:solidFill>
+                      <a:srgbClr val="ECF1F6"/>
+                    </a:solidFill>
+                  </a:tcPr>
+                </a:tc>
+                <a:tc>
+                  <a:txBody>
+                    <a:bodyPr wrap="square"/>
+                    <a:lstStyle/>
+                    <a:p>
+                      <a:r>
+                        <a:rPr sz="1100" b="0">
+                          <a:solidFill>
+                            <a:srgbClr val="282828"/>
+                          </a:solidFill>
+                          <a:latin typeface="Arial"/>
+                        </a:rPr>
+                        <a:t>0.72</a:t>
+                      </a:r>
+                    </a:p>
+                  </a:txBody>
+                  <a:tcPr marL="54864" marR="54864" marT="18288" marB="18288">
+                    <a:solidFill>
+                      <a:srgbClr val="ECF1F6"/>
+                    </a:solidFill>
+                  </a:tcPr>
+                </a:tc>
+                <a:tc>
+                  <a:txBody>
+                    <a:bodyPr wrap="square"/>
+                    <a:lstStyle/>
+                    <a:p>
+                      <a:r>
+                        <a:rPr sz="1100" b="0">
+                          <a:solidFill>
+                            <a:srgbClr val="282828"/>
+                          </a:solidFill>
+                          <a:latin typeface="Arial"/>
+                        </a:rPr>
+                        <a:t>0.28</a:t>
+                      </a:r>
+                    </a:p>
+                  </a:txBody>
+                  <a:tcPr marL="54864" marR="54864" marT="18288" marB="18288">
+                    <a:solidFill>
+                      <a:srgbClr val="ECF1F6"/>
                     </a:solidFill>
                   </a:tcPr>
                 </a:tc>
@@ -30814,7 +30225,75 @@
                           </a:solidFill>
                           <a:latin typeface="Arial"/>
                         </a:rPr>
-                        <a:t>2 pm walk, mirror drifting across the scan</a:t>
+                        <a:t>throughput</a:t>
+                      </a:r>
+                    </a:p>
+                  </a:txBody>
+                  <a:tcPr marL="54864" marR="54864" marT="18288" marB="18288">
+                    <a:solidFill>
+                      <a:srgbClr val="FFFFFF"/>
+                    </a:solidFill>
+                  </a:tcPr>
+                </a:tc>
+                <a:tc>
+                  <a:txBody>
+                    <a:bodyPr wrap="square"/>
+                    <a:lstStyle/>
+                    <a:p>
+                      <a:r>
+                        <a:rPr sz="1100" b="0">
+                          <a:solidFill>
+                            <a:srgbClr val="282828"/>
+                          </a:solidFill>
+                          <a:latin typeface="Arial"/>
+                        </a:rPr>
+                        <a:t>0.82</a:t>
+                      </a:r>
+                    </a:p>
+                  </a:txBody>
+                  <a:tcPr marL="54864" marR="54864" marT="18288" marB="18288">
+                    <a:solidFill>
+                      <a:srgbClr val="FFFFFF"/>
+                    </a:solidFill>
+                  </a:tcPr>
+                </a:tc>
+                <a:tc>
+                  <a:txBody>
+                    <a:bodyPr wrap="square"/>
+                    <a:lstStyle/>
+                    <a:p>
+                      <a:r>
+                        <a:rPr sz="1100" b="0">
+                          <a:solidFill>
+                            <a:srgbClr val="282828"/>
+                          </a:solidFill>
+                          <a:latin typeface="Arial"/>
+                        </a:rPr>
+                        <a:t>0.29</a:t>
+                      </a:r>
+                    </a:p>
+                  </a:txBody>
+                  <a:tcPr marL="54864" marR="54864" marT="18288" marB="18288">
+                    <a:solidFill>
+                      <a:srgbClr val="FFFFFF"/>
+                    </a:solidFill>
+                  </a:tcPr>
+                </a:tc>
+              </a:tr>
+              <a:tr h="468630">
+                <a:tc>
+                  <a:txBody>
+                    <a:bodyPr wrap="square"/>
+                    <a:lstStyle/>
+                    <a:p>
+                      <a:r>
+                        <a:rPr sz="1100" b="0">
+                          <a:solidFill>
+                            <a:srgbClr val="282828"/>
+                          </a:solidFill>
+                          <a:latin typeface="Arial"/>
+                        </a:rPr>
+                        <a:t>pixels across at the mask</a:t>
                       </a:r>
                     </a:p>
                   </a:txBody>
@@ -30836,7 +30315,7 @@
                           </a:solidFill>
                           <a:latin typeface="Arial"/>
                         </a:rPr>
-                        <a:t>2.38</a:t>
+                        <a:t>7.9</a:t>
                       </a:r>
                     </a:p>
                   </a:txBody>
@@ -30858,73 +30337,7 @@
                           </a:solidFill>
                           <a:latin typeface="Arial"/>
                         </a:rPr>
-                        <a:t>1.57</a:t>
-                      </a:r>
-                    </a:p>
-                  </a:txBody>
-                  <a:tcPr marL="54864" marR="54864" marT="18288" marB="18288">
-                    <a:solidFill>
-                      <a:srgbClr val="ECF1F6"/>
-                    </a:solidFill>
-                  </a:tcPr>
-                </a:tc>
-                <a:tc>
-                  <a:txBody>
-                    <a:bodyPr wrap="square"/>
-                    <a:lstStyle/>
-                    <a:p>
-                      <a:r>
-                        <a:rPr sz="1100" b="0">
-                          <a:solidFill>
-                            <a:srgbClr val="282828"/>
-                          </a:solidFill>
-                          <a:latin typeface="Arial"/>
-                        </a:rPr>
-                        <a:t>2.32</a:t>
-                      </a:r>
-                    </a:p>
-                  </a:txBody>
-                  <a:tcPr marL="54864" marR="54864" marT="18288" marB="18288">
-                    <a:solidFill>
-                      <a:srgbClr val="ECF1F6"/>
-                    </a:solidFill>
-                  </a:tcPr>
-                </a:tc>
-                <a:tc>
-                  <a:txBody>
-                    <a:bodyPr wrap="square"/>
-                    <a:lstStyle/>
-                    <a:p>
-                      <a:r>
-                        <a:rPr sz="1100" b="0">
-                          <a:solidFill>
-                            <a:srgbClr val="282828"/>
-                          </a:solidFill>
-                          <a:latin typeface="Arial"/>
-                        </a:rPr>
-                        <a:t>1.58</a:t>
-                      </a:r>
-                    </a:p>
-                  </a:txBody>
-                  <a:tcPr marL="54864" marR="54864" marT="18288" marB="18288">
-                    <a:solidFill>
-                      <a:srgbClr val="ECF1F6"/>
-                    </a:solidFill>
-                  </a:tcPr>
-                </a:tc>
-                <a:tc>
-                  <a:txBody>
-                    <a:bodyPr wrap="square"/>
-                    <a:lstStyle/>
-                    <a:p>
-                      <a:r>
-                        <a:rPr sz="1100" b="0">
-                          <a:solidFill>
-                            <a:srgbClr val="282828"/>
-                          </a:solidFill>
-                          <a:latin typeface="Arial"/>
-                        </a:rPr>
-                        <a:t>1.71 pm</a:t>
+                        <a:t>4.0 (below the 6 the sampling rule asks)</a:t>
                       </a:r>
                     </a:p>
                   </a:txBody>
@@ -30948,117 +30361,51 @@
                           </a:solidFill>
                           <a:latin typeface="Arial"/>
                         </a:rPr>
-                        <a:t>5 pm ramp, mirror still</a:t>
-                      </a:r>
-                    </a:p>
-                  </a:txBody>
-                  <a:tcPr marL="54864" marR="54864" marT="18288" marB="18288">
-                    <a:solidFill>
-                      <a:srgbClr val="FFFFFF"/>
-                    </a:solidFill>
-                  </a:tcPr>
-                </a:tc>
-                <a:tc>
-                  <a:txBody>
-                    <a:bodyPr wrap="square"/>
-                    <a:lstStyle/>
-                    <a:p>
-                      <a:r>
-                        <a:rPr sz="1100" b="0">
-                          <a:solidFill>
-                            <a:srgbClr val="282828"/>
-                          </a:solidFill>
-                          <a:latin typeface="Arial"/>
-                        </a:rPr>
-                        <a:t>27.6</a:t>
-                      </a:r>
-                    </a:p>
-                  </a:txBody>
-                  <a:tcPr marL="54864" marR="54864" marT="18288" marB="18288">
-                    <a:solidFill>
-                      <a:srgbClr val="FFFFFF"/>
-                    </a:solidFill>
-                  </a:tcPr>
-                </a:tc>
-                <a:tc>
-                  <a:txBody>
-                    <a:bodyPr wrap="square"/>
-                    <a:lstStyle/>
-                    <a:p>
-                      <a:r>
-                        <a:rPr sz="1100" b="0">
-                          <a:solidFill>
-                            <a:srgbClr val="282828"/>
-                          </a:solidFill>
-                          <a:latin typeface="Arial"/>
-                        </a:rPr>
-                        <a:t>10.05</a:t>
-                      </a:r>
-                    </a:p>
-                  </a:txBody>
-                  <a:tcPr marL="54864" marR="54864" marT="18288" marB="18288">
-                    <a:solidFill>
-                      <a:srgbClr val="FFFFFF"/>
-                    </a:solidFill>
-                  </a:tcPr>
-                </a:tc>
-                <a:tc>
-                  <a:txBody>
-                    <a:bodyPr wrap="square"/>
-                    <a:lstStyle/>
-                    <a:p>
-                      <a:r>
-                        <a:rPr sz="1100" b="0">
-                          <a:solidFill>
-                            <a:srgbClr val="282828"/>
-                          </a:solidFill>
-                          <a:latin typeface="Arial"/>
-                        </a:rPr>
-                        <a:t>9.87</a:t>
-                      </a:r>
-                    </a:p>
-                  </a:txBody>
-                  <a:tcPr marL="54864" marR="54864" marT="18288" marB="18288">
-                    <a:solidFill>
-                      <a:srgbClr val="FFFFFF"/>
-                    </a:solidFill>
-                  </a:tcPr>
-                </a:tc>
-                <a:tc>
-                  <a:txBody>
-                    <a:bodyPr wrap="square"/>
-                    <a:lstStyle/>
-                    <a:p>
-                      <a:r>
-                        <a:rPr sz="1100" b="0">
-                          <a:solidFill>
-                            <a:srgbClr val="282828"/>
-                          </a:solidFill>
-                          <a:latin typeface="Arial"/>
-                        </a:rPr>
-                        <a:t>9.86</a:t>
-                      </a:r>
-                    </a:p>
-                  </a:txBody>
-                  <a:tcPr marL="54864" marR="54864" marT="18288" marB="18288">
-                    <a:solidFill>
-                      <a:srgbClr val="FFFFFF"/>
-                    </a:solidFill>
-                  </a:tcPr>
-                </a:tc>
-                <a:tc>
-                  <a:txBody>
-                    <a:bodyPr wrap="square"/>
-                    <a:lstStyle/>
-                    <a:p>
-                      <a:r>
-                        <a:rPr sz="1100" b="0">
-                          <a:solidFill>
-                            <a:srgbClr val="282828"/>
-                          </a:solidFill>
-                          <a:latin typeface="Arial"/>
-                        </a:rPr>
-                        <a:t>9.88 pm</a:t>
+                        <a:t>10 nm on one actuator</a:t>
+                      </a:r>
+                    </a:p>
+                  </a:txBody>
+                  <a:tcPr marL="54864" marR="54864" marT="18288" marB="18288">
+                    <a:solidFill>
+                      <a:srgbClr val="FFFFFF"/>
+                    </a:solidFill>
+                  </a:tcPr>
+                </a:tc>
+                <a:tc>
+                  <a:txBody>
+                    <a:bodyPr wrap="square"/>
+                    <a:lstStyle/>
+                    <a:p>
+                      <a:r>
+                        <a:rPr sz="1100" b="0">
+                          <a:solidFill>
+                            <a:srgbClr val="282828"/>
+                          </a:solidFill>
+                          <a:latin typeface="Arial"/>
+                        </a:rPr>
+                        <a:t>0.9935 / 4 pm</a:t>
+                      </a:r>
+                    </a:p>
+                  </a:txBody>
+                  <a:tcPr marL="54864" marR="54864" marT="18288" marB="18288">
+                    <a:solidFill>
+                      <a:srgbClr val="FFFFFF"/>
+                    </a:solidFill>
+                  </a:tcPr>
+                </a:tc>
+                <a:tc>
+                  <a:txBody>
+                    <a:bodyPr wrap="square"/>
+                    <a:lstStyle/>
+                    <a:p>
+                      <a:r>
+                        <a:rPr sz="1100" b="0">
+                          <a:solidFill>
+                            <a:srgbClr val="282828"/>
+                          </a:solidFill>
+                          <a:latin typeface="Arial"/>
+                        </a:rPr>
+                        <a:t>0.9937 / 4 pm</a:t>
                       </a:r>
                     </a:p>
                   </a:txBody>
@@ -31082,7 +30429,7 @@
                           </a:solidFill>
                           <a:latin typeface="Arial"/>
                         </a:rPr>
-                        <a:t>5 pm ramp, drifting across the scan</a:t>
+                        <a:t>capture range, no shutter</a:t>
                       </a:r>
                     </a:p>
                   </a:txBody>
@@ -31104,7 +30451,7 @@
                           </a:solidFill>
                           <a:latin typeface="Arial"/>
                         </a:rPr>
-                        <a:t>27.6</a:t>
+                        <a:t>62 nm</a:t>
                       </a:r>
                     </a:p>
                   </a:txBody>
@@ -31126,7 +30473,7 @@
                           </a:solidFill>
                           <a:latin typeface="Arial"/>
                         </a:rPr>
-                        <a:t>7.16</a:t>
+                        <a:t>120 nm and beyond</a:t>
                       </a:r>
                     </a:p>
                   </a:txBody>
@@ -31136,69 +30483,71 @@
                     </a:solidFill>
                   </a:tcPr>
                 </a:tc>
-                <a:tc>
-                  <a:txBody>
-                    <a:bodyPr wrap="square"/>
-                    <a:lstStyle/>
-                    <a:p>
-                      <a:r>
-                        <a:rPr sz="1100" b="0">
-                          <a:solidFill>
-                            <a:srgbClr val="282828"/>
-                          </a:solidFill>
-                          <a:latin typeface="Arial"/>
-                        </a:rPr>
-                        <a:t>9.87</a:t>
-                      </a:r>
-                    </a:p>
-                  </a:txBody>
-                  <a:tcPr marL="54864" marR="54864" marT="18288" marB="18288">
-                    <a:solidFill>
-                      <a:srgbClr val="ECF1F6"/>
-                    </a:solidFill>
-                  </a:tcPr>
-                </a:tc>
-                <a:tc>
-                  <a:txBody>
-                    <a:bodyPr wrap="square"/>
-                    <a:lstStyle/>
-                    <a:p>
-                      <a:r>
-                        <a:rPr sz="1100" b="0">
-                          <a:solidFill>
-                            <a:srgbClr val="282828"/>
-                          </a:solidFill>
-                          <a:latin typeface="Arial"/>
-                        </a:rPr>
-                        <a:t>6.70</a:t>
-                      </a:r>
-                    </a:p>
-                  </a:txBody>
-                  <a:tcPr marL="54864" marR="54864" marT="18288" marB="18288">
-                    <a:solidFill>
-                      <a:srgbClr val="ECF1F6"/>
-                    </a:solidFill>
-                  </a:tcPr>
-                </a:tc>
-                <a:tc>
-                  <a:txBody>
-                    <a:bodyPr wrap="square"/>
-                    <a:lstStyle/>
-                    <a:p>
-                      <a:r>
-                        <a:rPr sz="1100" b="0">
-                          <a:solidFill>
-                            <a:srgbClr val="282828"/>
-                          </a:solidFill>
-                          <a:latin typeface="Arial"/>
-                        </a:rPr>
-                        <a:t>7.30 pm</a:t>
-                      </a:r>
-                    </a:p>
-                  </a:txBody>
-                  <a:tcPr marL="54864" marR="54864" marT="18288" marB="18288">
-                    <a:solidFill>
-                      <a:srgbClr val="ECF1F6"/>
+              </a:tr>
+              <a:tr h="468630">
+                <a:tc>
+                  <a:txBody>
+                    <a:bodyPr wrap="square"/>
+                    <a:lstStyle/>
+                    <a:p>
+                      <a:r>
+                        <a:rPr sz="1100" b="0">
+                          <a:solidFill>
+                            <a:srgbClr val="282828"/>
+                          </a:solidFill>
+                          <a:latin typeface="Arial"/>
+                        </a:rPr>
+                        <a:t>photons for 1 pm on the surface</a:t>
+                      </a:r>
+                    </a:p>
+                  </a:txBody>
+                  <a:tcPr marL="54864" marR="54864" marT="18288" marB="18288">
+                    <a:solidFill>
+                      <a:srgbClr val="FFFFFF"/>
+                    </a:solidFill>
+                  </a:tcPr>
+                </a:tc>
+                <a:tc>
+                  <a:txBody>
+                    <a:bodyPr wrap="square"/>
+                    <a:lstStyle/>
+                    <a:p>
+                      <a:r>
+                        <a:rPr sz="1100" b="0">
+                          <a:solidFill>
+                            <a:srgbClr val="282828"/>
+                          </a:solidFill>
+                          <a:latin typeface="Arial"/>
+                        </a:rPr>
+                        <a:t>9.8e13</a:t>
+                      </a:r>
+                    </a:p>
+                  </a:txBody>
+                  <a:tcPr marL="54864" marR="54864" marT="18288" marB="18288">
+                    <a:solidFill>
+                      <a:srgbClr val="FFFFFF"/>
+                    </a:solidFill>
+                  </a:tcPr>
+                </a:tc>
+                <a:tc>
+                  <a:txBody>
+                    <a:bodyPr wrap="square"/>
+                    <a:lstStyle/>
+                    <a:p>
+                      <a:r>
+                        <a:rPr sz="1100" b="0">
+                          <a:solidFill>
+                            <a:srgbClr val="282828"/>
+                          </a:solidFill>
+                          <a:latin typeface="Arial"/>
+                        </a:rPr>
+                        <a:t>2.1e14</a:t>
+                      </a:r>
+                    </a:p>
+                  </a:txBody>
+                  <a:tcPr marL="54864" marR="54864" marT="18288" marB="18288">
+                    <a:solidFill>
+                      <a:srgbClr val="FFFFFF"/>
                     </a:solidFill>
                   </a:tcPr>
                 </a:tc>
@@ -31216,123 +30565,57 @@
                           </a:solidFill>
                           <a:latin typeface="Arial"/>
                         </a:rPr>
-                        <a:t>camera scale drifting 1e-3 across the scan</a:t>
-                      </a:r>
-                    </a:p>
-                  </a:txBody>
-                  <a:tcPr marL="54864" marR="54864" marT="18288" marB="18288">
-                    <a:solidFill>
-                      <a:srgbClr val="FFFFFF"/>
-                    </a:solidFill>
-                  </a:tcPr>
-                </a:tc>
-                <a:tc>
-                  <a:txBody>
-                    <a:bodyPr wrap="square"/>
-                    <a:lstStyle/>
-                    <a:p>
-                      <a:r>
-                        <a:rPr sz="1100" b="0">
-                          <a:solidFill>
-                            <a:srgbClr val="282828"/>
-                          </a:solidFill>
-                          <a:latin typeface="Arial"/>
-                        </a:rPr>
-                        <a:t>10.8 nm</a:t>
-                      </a:r>
-                    </a:p>
-                  </a:txBody>
-                  <a:tcPr marL="54864" marR="54864" marT="18288" marB="18288">
-                    <a:solidFill>
-                      <a:srgbClr val="FFFFFF"/>
-                    </a:solidFill>
-                  </a:tcPr>
-                </a:tc>
-                <a:tc>
-                  <a:txBody>
-                    <a:bodyPr wrap="square"/>
-                    <a:lstStyle/>
-                    <a:p>
-                      <a:r>
-                        <a:rPr sz="1100" b="0">
-                          <a:solidFill>
-                            <a:srgbClr val="282828"/>
-                          </a:solidFill>
-                          <a:latin typeface="Arial"/>
-                        </a:rPr>
-                        <a:t>5.4</a:t>
-                      </a:r>
-                    </a:p>
-                  </a:txBody>
-                  <a:tcPr marL="54864" marR="54864" marT="18288" marB="18288">
-                    <a:solidFill>
-                      <a:srgbClr val="FFFFFF"/>
-                    </a:solidFill>
-                  </a:tcPr>
-                </a:tc>
-                <a:tc>
-                  <a:txBody>
-                    <a:bodyPr wrap="square"/>
-                    <a:lstStyle/>
-                    <a:p>
-                      <a:r>
-                        <a:rPr sz="1100" b="0">
-                          <a:solidFill>
-                            <a:srgbClr val="282828"/>
-                          </a:solidFill>
-                          <a:latin typeface="Arial"/>
-                        </a:rPr>
-                        <a:t>89 pm</a:t>
-                      </a:r>
-                    </a:p>
-                  </a:txBody>
-                  <a:tcPr marL="54864" marR="54864" marT="18288" marB="18288">
-                    <a:solidFill>
-                      <a:srgbClr val="FFFFFF"/>
-                    </a:solidFill>
-                  </a:tcPr>
-                </a:tc>
-                <a:tc>
-                  <a:txBody>
-                    <a:bodyPr wrap="square"/>
-                    <a:lstStyle/>
-                    <a:p>
-                      <a:r>
-                        <a:rPr sz="1100" b="0">
-                          <a:solidFill>
-                            <a:srgbClr val="282828"/>
-                          </a:solidFill>
-                          <a:latin typeface="Arial"/>
-                        </a:rPr>
-                        <a:t>5.3</a:t>
-                      </a:r>
-                    </a:p>
-                  </a:txBody>
-                  <a:tcPr marL="54864" marR="54864" marT="18288" marB="18288">
-                    <a:solidFill>
-                      <a:srgbClr val="FFFFFF"/>
-                    </a:solidFill>
-                  </a:tcPr>
-                </a:tc>
-                <a:tc>
-                  <a:txBody>
-                    <a:bodyPr wrap="square"/>
-                    <a:lstStyle/>
-                    <a:p>
-                      <a:r>
-                        <a:rPr sz="1100" b="0">
-                          <a:solidFill>
-                            <a:srgbClr val="282828"/>
-                          </a:solidFill>
-                          <a:latin typeface="Arial"/>
-                        </a:rPr>
-                        <a:t>10.7 pm</a:t>
-                      </a:r>
-                    </a:p>
-                  </a:txBody>
-                  <a:tcPr marL="54864" marR="54864" marT="18288" marB="18288">
-                    <a:solidFill>
-                      <a:srgbClr val="FFFFFF"/>
+                        <a:t>3 pm under the walk</a:t>
+                      </a:r>
+                    </a:p>
+                  </a:txBody>
+                  <a:tcPr marL="54864" marR="54864" marT="18288" marB="18288">
+                    <a:solidFill>
+                      <a:srgbClr val="ECF1F6"/>
+                    </a:solidFill>
+                  </a:tcPr>
+                </a:tc>
+                <a:tc>
+                  <a:txBody>
+                    <a:bodyPr wrap="square"/>
+                    <a:lstStyle/>
+                    <a:p>
+                      <a:r>
+                        <a:rPr sz="1100" b="0">
+                          <a:solidFill>
+                            <a:srgbClr val="282828"/>
+                          </a:solidFill>
+                          <a:latin typeface="Arial"/>
+                        </a:rPr>
+                        <a:t>below 1e13</a:t>
+                      </a:r>
+                    </a:p>
+                  </a:txBody>
+                  <a:tcPr marL="54864" marR="54864" marT="18288" marB="18288">
+                    <a:solidFill>
+                      <a:srgbClr val="ECF1F6"/>
+                    </a:solidFill>
+                  </a:tcPr>
+                </a:tc>
+                <a:tc>
+                  <a:txBody>
+                    <a:bodyPr wrap="square"/>
+                    <a:lstStyle/>
+                    <a:p>
+                      <a:r>
+                        <a:rPr sz="1100" b="0">
+                          <a:solidFill>
+                            <a:srgbClr val="282828"/>
+                          </a:solidFill>
+                          <a:latin typeface="Arial"/>
+                        </a:rPr>
+                        <a:t>3.6e13</a:t>
+                      </a:r>
+                    </a:p>
+                  </a:txBody>
+                  <a:tcPr marL="54864" marR="54864" marT="18288" marB="18288">
+                    <a:solidFill>
+                      <a:srgbClr val="ECF1F6"/>
                     </a:solidFill>
                   </a:tcPr>
                 </a:tc>
@@ -31375,7 +30658,7 @@
                 </a:solidFill>
                 <a:latin typeface="Arial"/>
               </a:rPr>
-              <a:t>•  Why the mirror's drift helps: a scan reads the surface at its midpoint, a free half-step of prediction; 26-32% less hold error for the stepped readings.  The camera's drift is an additive bias, the opposite sign.</a:t>
+              <a:t>•  The range the small pinhole buys, the shutter frame gives free at the large one's throughput: 1.02 / 1.06 / 1.13 at 120 / 240 / 480 nm.</a:t>
             </a:r>
           </a:p>
           <a:p>
@@ -31391,7 +30674,7 @@
                 </a:solidFill>
                 <a:latin typeface="Arial"/>
               </a:rPr>
-              <a:t>•  The P/SRI's reference arm walking (a random path walk of 1e-3 to 1e-1 rad per cycle) costs 4% in light over that hundredfold range: a path change is piston, the one mode the actuator estimator nulls.  Not benign for absolute field work; a tilting reference is outside the model.</a:t>
+              <a:t>•  The P/SRI (pickoff plate 60/40, a 300 mm F/2.9 reference lens, a 3.7 µm pinhole feeding a single-mode waveguide with a thermo-optic phase shifter, a mirrored second lens, folds, a 21.9 mm compensator, a 50/50 recombiner): balanced to zero path difference in the trace.  Its reference moving with the state costs 5.9 pm absolute on a 13 nm figure and 12% on the dense floor; frozen, 0.000.</a:t>
             </a:r>
           </a:p>
           <a:p>
@@ -31407,7 +30690,7 @@
                 </a:solidFill>
                 <a:latin typeface="Arial"/>
               </a:rPr>
-              <a:t>•  The paper's camera number (0.13 electrons per pixel per cycle) is invisible to every reading: an electron is 1e-4 of a lit pixel's shot noise at 1e13 photons.</a:t>
+              <a:t>•  Five frames beat four: a 2% step error reads 4.9 pm (pinhole) and 2.2 pm (P/SRI) with the Schwider-Hariharan scan against 421 and 251 pm with four-step least squares.</a:t>
             </a:r>
           </a:p>
         </p:txBody>
@@ -31446,7 +30729,7 @@
                 </a:solidFill>
                 <a:latin typeface="Arial"/>
               </a:rPr>
-              <a:t>Run tags intra193_0, intra193, pcam193, pcam193r, pcam193ri, rw193_1e3/1e2/1e1, loop_lens_intra, loop_lens_cam.</a:t>
+              <a:t>Run tags pin20_1024, pin10_2048, pin20_loop, pin10_loop, pfdeck, pfdeck_frz, pdi193se_sh5, pdi193se_ls; layouts psri_layout.png and psri_render.png in pdi_dm96.</a:t>
             </a:r>
           </a:p>
         </p:txBody>
@@ -31503,7 +30786,7 @@
                 </a:solidFill>
                 <a:latin typeface="Arial"/>
               </a:rPr>
-              <a:t>Backup: the vector sensor's polarization terms</a:t>
+              <a:t>Backup: drift within a measurement</a:t>
             </a:r>
           </a:p>
           <a:p>
@@ -31519,7 +30802,7 @@
                 </a:solidFill>
                 <a:latin typeface="Arial"/>
               </a:rPr>
-              <a:t>The metasurface's retardance error, the arm's polarization aberration, and the analyzer, each from the engine's polarized traces of this bench</a:t>
+              <a:t>A mirror that drifts during a stepped scan helps the stepped readings; a camera that drifts during the scan hurts them; the simultaneous readings see neither</a:t>
             </a:r>
           </a:p>
         </p:txBody>
@@ -31578,7 +30861,7 @@
         </p:nvGraphicFramePr>
         <p:xfrm>
           <a:off x="411480" y="1298448"/>
-          <a:ext cx="5806439" cy="3377565"/>
+          <a:ext cx="5806437" cy="1680210"/>
         </p:xfrm>
         <a:graphic>
           <a:graphicData uri="http://schemas.openxmlformats.org/drawingml/2006/table">
@@ -31587,11 +30870,14 @@
                 <a:tableStyleId>{5C22544A-7EE6-4342-B048-85BDC9FD1C3A}</a:tableStyleId>
               </a:tblPr>
               <a:tblGrid>
-                <a:gridCol w="1924420"/>
-                <a:gridCol w="1824881"/>
-                <a:gridCol w="2057138"/>
+                <a:gridCol w="3208822"/>
+                <a:gridCol w="534803"/>
+                <a:gridCol w="534803"/>
+                <a:gridCol w="458403"/>
+                <a:gridCol w="534803"/>
+                <a:gridCol w="534803"/>
               </a:tblGrid>
-              <a:tr h="468630">
+              <a:tr h="280035">
                 <a:tc>
                   <a:txBody>
                     <a:bodyPr wrap="square"/>
@@ -31604,7 +30890,7 @@
                           </a:solidFill>
                           <a:latin typeface="Arial"/>
                         </a:rPr>
-                        <a:t>term</a:t>
+                        <a:t>hold error at 1e15 photons per cycle</a:t>
                       </a:r>
                     </a:p>
                   </a:txBody>
@@ -31626,7 +30912,7 @@
                           </a:solidFill>
                           <a:latin typeface="Arial"/>
                         </a:rPr>
-                        <a:t>uncalibrated, on 100 nm pokes (12 nm rms)</a:t>
+                        <a:t>linear</a:t>
                       </a:r>
                     </a:p>
                   </a:txBody>
@@ -31648,7 +30934,7 @@
                           </a:solidFill>
                           <a:latin typeface="Arial"/>
                         </a:rPr>
-                        <a:t>through the matrix measured on the surface</a:t>
+                        <a:t>stepped</a:t>
                       </a:r>
                     </a:p>
                   </a:txBody>
@@ -31658,65 +30944,197 @@
                     </a:solidFill>
                   </a:tcPr>
                 </a:tc>
+                <a:tc>
+                  <a:txBody>
+                    <a:bodyPr wrap="square"/>
+                    <a:lstStyle/>
+                    <a:p>
+                      <a:r>
+                        <a:rPr sz="1100" b="1">
+                          <a:solidFill>
+                            <a:srgbClr val="FFFFFF"/>
+                          </a:solidFill>
+                          <a:latin typeface="Arial"/>
+                        </a:rPr>
+                        <a:t>vector</a:t>
+                      </a:r>
+                    </a:p>
+                  </a:txBody>
+                  <a:tcPr marL="54864" marR="54864" marT="18288" marB="18288">
+                    <a:solidFill>
+                      <a:srgbClr val="1F4E79"/>
+                    </a:solidFill>
+                  </a:tcPr>
+                </a:tc>
+                <a:tc>
+                  <a:txBody>
+                    <a:bodyPr wrap="square"/>
+                    <a:lstStyle/>
+                    <a:p>
+                      <a:r>
+                        <a:rPr sz="1100" b="1">
+                          <a:solidFill>
+                            <a:srgbClr val="FFFFFF"/>
+                          </a:solidFill>
+                          <a:latin typeface="Arial"/>
+                        </a:rPr>
+                        <a:t>pinhole</a:t>
+                      </a:r>
+                    </a:p>
+                  </a:txBody>
+                  <a:tcPr marL="54864" marR="54864" marT="18288" marB="18288">
+                    <a:solidFill>
+                      <a:srgbClr val="1F4E79"/>
+                    </a:solidFill>
+                  </a:tcPr>
+                </a:tc>
+                <a:tc>
+                  <a:txBody>
+                    <a:bodyPr wrap="square"/>
+                    <a:lstStyle/>
+                    <a:p>
+                      <a:r>
+                        <a:rPr sz="1100" b="1">
+                          <a:solidFill>
+                            <a:srgbClr val="FFFFFF"/>
+                          </a:solidFill>
+                          <a:latin typeface="Arial"/>
+                        </a:rPr>
+                        <a:t>P/SRI</a:t>
+                      </a:r>
+                    </a:p>
+                  </a:txBody>
+                  <a:tcPr marL="54864" marR="54864" marT="18288" marB="18288">
+                    <a:solidFill>
+                      <a:srgbClr val="1F4E79"/>
+                    </a:solidFill>
+                  </a:tcPr>
+                </a:tc>
               </a:tr>
-              <a:tr h="657225">
-                <a:tc>
-                  <a:txBody>
-                    <a:bodyPr wrap="square"/>
-                    <a:lstStyle/>
-                    <a:p>
-                      <a:r>
-                        <a:rPr sz="1100" b="0">
-                          <a:solidFill>
-                            <a:srgbClr val="282828"/>
-                          </a:solidFill>
-                          <a:latin typeface="Arial"/>
-                        </a:rPr>
-                        <a:t>metasurface retardance error 0.02 / 0.05 / 0.10 / 0.20 rad</a:t>
-                      </a:r>
-                    </a:p>
-                  </a:txBody>
-                  <a:tcPr marL="54864" marR="54864" marT="18288" marB="18288">
-                    <a:solidFill>
-                      <a:srgbClr val="FFFFFF"/>
-                    </a:solidFill>
-                  </a:tcPr>
-                </a:tc>
-                <a:tc>
-                  <a:txBody>
-                    <a:bodyPr wrap="square"/>
-                    <a:lstStyle/>
-                    <a:p>
-                      <a:r>
-                        <a:rPr sz="1100" b="0">
-                          <a:solidFill>
-                            <a:srgbClr val="282828"/>
-                          </a:solidFill>
-                          <a:latin typeface="Arial"/>
-                        </a:rPr>
-                        <a:t>153 / 380 / 750 / 1461 pm</a:t>
-                      </a:r>
-                    </a:p>
-                  </a:txBody>
-                  <a:tcPr marL="54864" marR="54864" marT="18288" marB="18288">
-                    <a:solidFill>
-                      <a:srgbClr val="FFFFFF"/>
-                    </a:solidFill>
-                  </a:tcPr>
-                </a:tc>
-                <a:tc>
-                  <a:txBody>
-                    <a:bodyPr wrap="square"/>
-                    <a:lstStyle/>
-                    <a:p>
-                      <a:r>
-                        <a:rPr sz="1100" b="0">
-                          <a:solidFill>
-                            <a:srgbClr val="282828"/>
-                          </a:solidFill>
-                          <a:latin typeface="Arial"/>
-                        </a:rPr>
-                        <a:t>0.9934 / 4 pm at 0.10 and 0.20: the ideal rows</a:t>
+              <a:tr h="280035">
+                <a:tc>
+                  <a:txBody>
+                    <a:bodyPr wrap="square"/>
+                    <a:lstStyle/>
+                    <a:p>
+                      <a:r>
+                        <a:rPr sz="1100" b="0">
+                          <a:solidFill>
+                            <a:srgbClr val="282828"/>
+                          </a:solidFill>
+                          <a:latin typeface="Arial"/>
+                        </a:rPr>
+                        <a:t>2 pm walk, mirror still during a scan</a:t>
+                      </a:r>
+                    </a:p>
+                  </a:txBody>
+                  <a:tcPr marL="54864" marR="54864" marT="18288" marB="18288">
+                    <a:solidFill>
+                      <a:srgbClr val="FFFFFF"/>
+                    </a:solidFill>
+                  </a:tcPr>
+                </a:tc>
+                <a:tc>
+                  <a:txBody>
+                    <a:bodyPr wrap="square"/>
+                    <a:lstStyle/>
+                    <a:p>
+                      <a:r>
+                        <a:rPr sz="1100" b="0">
+                          <a:solidFill>
+                            <a:srgbClr val="282828"/>
+                          </a:solidFill>
+                          <a:latin typeface="Arial"/>
+                        </a:rPr>
+                        <a:t>2.38</a:t>
+                      </a:r>
+                    </a:p>
+                  </a:txBody>
+                  <a:tcPr marL="54864" marR="54864" marT="18288" marB="18288">
+                    <a:solidFill>
+                      <a:srgbClr val="FFFFFF"/>
+                    </a:solidFill>
+                  </a:tcPr>
+                </a:tc>
+                <a:tc>
+                  <a:txBody>
+                    <a:bodyPr wrap="square"/>
+                    <a:lstStyle/>
+                    <a:p>
+                      <a:r>
+                        <a:rPr sz="1100" b="0">
+                          <a:solidFill>
+                            <a:srgbClr val="282828"/>
+                          </a:solidFill>
+                          <a:latin typeface="Arial"/>
+                        </a:rPr>
+                        <a:t>2.32</a:t>
+                      </a:r>
+                    </a:p>
+                  </a:txBody>
+                  <a:tcPr marL="54864" marR="54864" marT="18288" marB="18288">
+                    <a:solidFill>
+                      <a:srgbClr val="FFFFFF"/>
+                    </a:solidFill>
+                  </a:tcPr>
+                </a:tc>
+                <a:tc>
+                  <a:txBody>
+                    <a:bodyPr wrap="square"/>
+                    <a:lstStyle/>
+                    <a:p>
+                      <a:r>
+                        <a:rPr sz="1100" b="0">
+                          <a:solidFill>
+                            <a:srgbClr val="282828"/>
+                          </a:solidFill>
+                          <a:latin typeface="Arial"/>
+                        </a:rPr>
+                        <a:t>2.32</a:t>
+                      </a:r>
+                    </a:p>
+                  </a:txBody>
+                  <a:tcPr marL="54864" marR="54864" marT="18288" marB="18288">
+                    <a:solidFill>
+                      <a:srgbClr val="FFFFFF"/>
+                    </a:solidFill>
+                  </a:tcPr>
+                </a:tc>
+                <a:tc>
+                  <a:txBody>
+                    <a:bodyPr wrap="square"/>
+                    <a:lstStyle/>
+                    <a:p>
+                      <a:r>
+                        <a:rPr sz="1100" b="0">
+                          <a:solidFill>
+                            <a:srgbClr val="282828"/>
+                          </a:solidFill>
+                          <a:latin typeface="Arial"/>
+                        </a:rPr>
+                        <a:t>2.32</a:t>
+                      </a:r>
+                    </a:p>
+                  </a:txBody>
+                  <a:tcPr marL="54864" marR="54864" marT="18288" marB="18288">
+                    <a:solidFill>
+                      <a:srgbClr val="FFFFFF"/>
+                    </a:solidFill>
+                  </a:tcPr>
+                </a:tc>
+                <a:tc>
+                  <a:txBody>
+                    <a:bodyPr wrap="square"/>
+                    <a:lstStyle/>
+                    <a:p>
+                      <a:r>
+                        <a:rPr sz="1100" b="0">
+                          <a:solidFill>
+                            <a:srgbClr val="282828"/>
+                          </a:solidFill>
+                          <a:latin typeface="Arial"/>
+                        </a:rPr>
+                        <a:t>2.33 pm</a:t>
                       </a:r>
                     </a:p>
                   </a:txBody>
@@ -31727,20 +31145,20 @@
                   </a:tcPr>
                 </a:tc>
               </a:tr>
-              <a:tr h="657225">
-                <a:tc>
-                  <a:txBody>
-                    <a:bodyPr wrap="square"/>
-                    <a:lstStyle/>
-                    <a:p>
-                      <a:r>
-                        <a:rPr sz="1100" b="0">
-                          <a:solidFill>
-                            <a:srgbClr val="282828"/>
-                          </a:solidFill>
-                          <a:latin typeface="Arial"/>
-                        </a:rPr>
-                        <a:t>the arm, laser at 45° / 0° / 90° to the fold plane</a:t>
+              <a:tr h="280035">
+                <a:tc>
+                  <a:txBody>
+                    <a:bodyPr wrap="square"/>
+                    <a:lstStyle/>
+                    <a:p>
+                      <a:r>
+                        <a:rPr sz="1100" b="0">
+                          <a:solidFill>
+                            <a:srgbClr val="282828"/>
+                          </a:solidFill>
+                          <a:latin typeface="Arial"/>
+                        </a:rPr>
+                        <a:t>2 pm walk, mirror drifting across the scan</a:t>
                       </a:r>
                     </a:p>
                   </a:txBody>
@@ -31762,7 +31180,7 @@
                           </a:solidFill>
                           <a:latin typeface="Arial"/>
                         </a:rPr>
-                        <a:t>9.0 / 17.2 / 11.2 pm (ideal 0.05)</a:t>
+                        <a:t>2.38</a:t>
                       </a:r>
                     </a:p>
                   </a:txBody>
@@ -31784,7 +31202,7 @@
                           </a:solidFill>
                           <a:latin typeface="Arial"/>
                         </a:rPr>
-                        <a:t>nothing through 0.1 rad of channel phase; 10% gain loss at 0.3</a:t>
+                        <a:t>1.57</a:t>
                       </a:r>
                     </a:p>
                   </a:txBody>
@@ -31794,65 +31212,197 @@
                     </a:solidFill>
                   </a:tcPr>
                 </a:tc>
+                <a:tc>
+                  <a:txBody>
+                    <a:bodyPr wrap="square"/>
+                    <a:lstStyle/>
+                    <a:p>
+                      <a:r>
+                        <a:rPr sz="1100" b="0">
+                          <a:solidFill>
+                            <a:srgbClr val="282828"/>
+                          </a:solidFill>
+                          <a:latin typeface="Arial"/>
+                        </a:rPr>
+                        <a:t>2.32</a:t>
+                      </a:r>
+                    </a:p>
+                  </a:txBody>
+                  <a:tcPr marL="54864" marR="54864" marT="18288" marB="18288">
+                    <a:solidFill>
+                      <a:srgbClr val="ECF1F6"/>
+                    </a:solidFill>
+                  </a:tcPr>
+                </a:tc>
+                <a:tc>
+                  <a:txBody>
+                    <a:bodyPr wrap="square"/>
+                    <a:lstStyle/>
+                    <a:p>
+                      <a:r>
+                        <a:rPr sz="1100" b="0">
+                          <a:solidFill>
+                            <a:srgbClr val="282828"/>
+                          </a:solidFill>
+                          <a:latin typeface="Arial"/>
+                        </a:rPr>
+                        <a:t>1.58</a:t>
+                      </a:r>
+                    </a:p>
+                  </a:txBody>
+                  <a:tcPr marL="54864" marR="54864" marT="18288" marB="18288">
+                    <a:solidFill>
+                      <a:srgbClr val="ECF1F6"/>
+                    </a:solidFill>
+                  </a:tcPr>
+                </a:tc>
+                <a:tc>
+                  <a:txBody>
+                    <a:bodyPr wrap="square"/>
+                    <a:lstStyle/>
+                    <a:p>
+                      <a:r>
+                        <a:rPr sz="1100" b="0">
+                          <a:solidFill>
+                            <a:srgbClr val="282828"/>
+                          </a:solidFill>
+                          <a:latin typeface="Arial"/>
+                        </a:rPr>
+                        <a:t>1.71 pm</a:t>
+                      </a:r>
+                    </a:p>
+                  </a:txBody>
+                  <a:tcPr marL="54864" marR="54864" marT="18288" marB="18288">
+                    <a:solidFill>
+                      <a:srgbClr val="ECF1F6"/>
+                    </a:solidFill>
+                  </a:tcPr>
+                </a:tc>
               </a:tr>
-              <a:tr h="657225">
-                <a:tc>
-                  <a:txBody>
-                    <a:bodyPr wrap="square"/>
-                    <a:lstStyle/>
-                    <a:p>
-                      <a:r>
-                        <a:rPr sz="1100" b="0">
-                          <a:solidFill>
-                            <a:srgbClr val="282828"/>
-                          </a:solidFill>
-                          <a:latin typeface="Arial"/>
-                        </a:rPr>
-                        <a:t>the arm, design scan: 6 nm per rad of channel phase</a:t>
-                      </a:r>
-                    </a:p>
-                  </a:txBody>
-                  <a:tcPr marL="54864" marR="54864" marT="18288" marB="18288">
-                    <a:solidFill>
-                      <a:srgbClr val="FFFFFF"/>
-                    </a:solidFill>
-                  </a:tcPr>
-                </a:tc>
-                <a:tc>
-                  <a:txBody>
-                    <a:bodyPr wrap="square"/>
-                    <a:lstStyle/>
-                    <a:p>
-                      <a:r>
-                        <a:rPr sz="1100" b="0">
-                          <a:solidFill>
-                            <a:srgbClr val="282828"/>
-                          </a:solidFill>
-                          <a:latin typeface="Arial"/>
-                        </a:rPr>
-                        <a:t>59 / 178 / 597 / 1877 pm at 0.01 / 0.03 / 0.1 / 0.3 rad</a:t>
-                      </a:r>
-                    </a:p>
-                  </a:txBody>
-                  <a:tcPr marL="54864" marR="54864" marT="18288" marB="18288">
-                    <a:solidFill>
-                      <a:srgbClr val="FFFFFF"/>
-                    </a:solidFill>
-                  </a:tcPr>
-                </a:tc>
-                <a:tc>
-                  <a:txBody>
-                    <a:bodyPr wrap="square"/>
-                    <a:lstStyle/>
-                    <a:p>
-                      <a:r>
-                        <a:rPr sz="1100" b="0">
-                          <a:solidFill>
-                            <a:srgbClr val="282828"/>
-                          </a:solidFill>
-                          <a:latin typeface="Arial"/>
-                        </a:rPr>
-                        <a:t>—</a:t>
+              <a:tr h="280035">
+                <a:tc>
+                  <a:txBody>
+                    <a:bodyPr wrap="square"/>
+                    <a:lstStyle/>
+                    <a:p>
+                      <a:r>
+                        <a:rPr sz="1100" b="0">
+                          <a:solidFill>
+                            <a:srgbClr val="282828"/>
+                          </a:solidFill>
+                          <a:latin typeface="Arial"/>
+                        </a:rPr>
+                        <a:t>5 pm ramp, mirror still</a:t>
+                      </a:r>
+                    </a:p>
+                  </a:txBody>
+                  <a:tcPr marL="54864" marR="54864" marT="18288" marB="18288">
+                    <a:solidFill>
+                      <a:srgbClr val="FFFFFF"/>
+                    </a:solidFill>
+                  </a:tcPr>
+                </a:tc>
+                <a:tc>
+                  <a:txBody>
+                    <a:bodyPr wrap="square"/>
+                    <a:lstStyle/>
+                    <a:p>
+                      <a:r>
+                        <a:rPr sz="1100" b="0">
+                          <a:solidFill>
+                            <a:srgbClr val="282828"/>
+                          </a:solidFill>
+                          <a:latin typeface="Arial"/>
+                        </a:rPr>
+                        <a:t>27.6</a:t>
+                      </a:r>
+                    </a:p>
+                  </a:txBody>
+                  <a:tcPr marL="54864" marR="54864" marT="18288" marB="18288">
+                    <a:solidFill>
+                      <a:srgbClr val="FFFFFF"/>
+                    </a:solidFill>
+                  </a:tcPr>
+                </a:tc>
+                <a:tc>
+                  <a:txBody>
+                    <a:bodyPr wrap="square"/>
+                    <a:lstStyle/>
+                    <a:p>
+                      <a:r>
+                        <a:rPr sz="1100" b="0">
+                          <a:solidFill>
+                            <a:srgbClr val="282828"/>
+                          </a:solidFill>
+                          <a:latin typeface="Arial"/>
+                        </a:rPr>
+                        <a:t>10.05</a:t>
+                      </a:r>
+                    </a:p>
+                  </a:txBody>
+                  <a:tcPr marL="54864" marR="54864" marT="18288" marB="18288">
+                    <a:solidFill>
+                      <a:srgbClr val="FFFFFF"/>
+                    </a:solidFill>
+                  </a:tcPr>
+                </a:tc>
+                <a:tc>
+                  <a:txBody>
+                    <a:bodyPr wrap="square"/>
+                    <a:lstStyle/>
+                    <a:p>
+                      <a:r>
+                        <a:rPr sz="1100" b="0">
+                          <a:solidFill>
+                            <a:srgbClr val="282828"/>
+                          </a:solidFill>
+                          <a:latin typeface="Arial"/>
+                        </a:rPr>
+                        <a:t>9.87</a:t>
+                      </a:r>
+                    </a:p>
+                  </a:txBody>
+                  <a:tcPr marL="54864" marR="54864" marT="18288" marB="18288">
+                    <a:solidFill>
+                      <a:srgbClr val="FFFFFF"/>
+                    </a:solidFill>
+                  </a:tcPr>
+                </a:tc>
+                <a:tc>
+                  <a:txBody>
+                    <a:bodyPr wrap="square"/>
+                    <a:lstStyle/>
+                    <a:p>
+                      <a:r>
+                        <a:rPr sz="1100" b="0">
+                          <a:solidFill>
+                            <a:srgbClr val="282828"/>
+                          </a:solidFill>
+                          <a:latin typeface="Arial"/>
+                        </a:rPr>
+                        <a:t>9.86</a:t>
+                      </a:r>
+                    </a:p>
+                  </a:txBody>
+                  <a:tcPr marL="54864" marR="54864" marT="18288" marB="18288">
+                    <a:solidFill>
+                      <a:srgbClr val="FFFFFF"/>
+                    </a:solidFill>
+                  </a:tcPr>
+                </a:tc>
+                <a:tc>
+                  <a:txBody>
+                    <a:bodyPr wrap="square"/>
+                    <a:lstStyle/>
+                    <a:p>
+                      <a:r>
+                        <a:rPr sz="1100" b="0">
+                          <a:solidFill>
+                            <a:srgbClr val="282828"/>
+                          </a:solidFill>
+                          <a:latin typeface="Arial"/>
+                        </a:rPr>
+                        <a:t>9.88 pm</a:t>
                       </a:r>
                     </a:p>
                   </a:txBody>
@@ -31863,20 +31413,20 @@
                   </a:tcPr>
                 </a:tc>
               </a:tr>
-              <a:tr h="468630">
-                <a:tc>
-                  <a:txBody>
-                    <a:bodyPr wrap="square"/>
-                    <a:lstStyle/>
-                    <a:p>
-                      <a:r>
-                        <a:rPr sz="1100" b="0">
-                          <a:solidFill>
-                            <a:srgbClr val="282828"/>
-                          </a:solidFill>
-                          <a:latin typeface="Arial"/>
-                        </a:rPr>
-                        <a:t>analyzer: cube extinction alone</a:t>
+              <a:tr h="280035">
+                <a:tc>
+                  <a:txBody>
+                    <a:bodyPr wrap="square"/>
+                    <a:lstStyle/>
+                    <a:p>
+                      <a:r>
+                        <a:rPr sz="1100" b="0">
+                          <a:solidFill>
+                            <a:srgbClr val="282828"/>
+                          </a:solidFill>
+                          <a:latin typeface="Arial"/>
+                        </a:rPr>
+                        <a:t>5 pm ramp, drifting across the scan</a:t>
                       </a:r>
                     </a:p>
                   </a:txBody>
@@ -31898,7 +31448,7 @@
                           </a:solidFill>
                           <a:latin typeface="Arial"/>
                         </a:rPr>
-                        <a:t>3.5 pm</a:t>
+                        <a:t>27.6</a:t>
                       </a:r>
                     </a:p>
                   </a:txBody>
@@ -31920,7 +31470,7 @@
                           </a:solidFill>
                           <a:latin typeface="Arial"/>
                         </a:rPr>
-                        <a:t>0.9934 / 4 pm</a:t>
+                        <a:t>7.16</a:t>
                       </a:r>
                     </a:p>
                   </a:txBody>
@@ -31930,65 +31480,197 @@
                     </a:solidFill>
                   </a:tcPr>
                 </a:tc>
+                <a:tc>
+                  <a:txBody>
+                    <a:bodyPr wrap="square"/>
+                    <a:lstStyle/>
+                    <a:p>
+                      <a:r>
+                        <a:rPr sz="1100" b="0">
+                          <a:solidFill>
+                            <a:srgbClr val="282828"/>
+                          </a:solidFill>
+                          <a:latin typeface="Arial"/>
+                        </a:rPr>
+                        <a:t>9.87</a:t>
+                      </a:r>
+                    </a:p>
+                  </a:txBody>
+                  <a:tcPr marL="54864" marR="54864" marT="18288" marB="18288">
+                    <a:solidFill>
+                      <a:srgbClr val="ECF1F6"/>
+                    </a:solidFill>
+                  </a:tcPr>
+                </a:tc>
+                <a:tc>
+                  <a:txBody>
+                    <a:bodyPr wrap="square"/>
+                    <a:lstStyle/>
+                    <a:p>
+                      <a:r>
+                        <a:rPr sz="1100" b="0">
+                          <a:solidFill>
+                            <a:srgbClr val="282828"/>
+                          </a:solidFill>
+                          <a:latin typeface="Arial"/>
+                        </a:rPr>
+                        <a:t>6.70</a:t>
+                      </a:r>
+                    </a:p>
+                  </a:txBody>
+                  <a:tcPr marL="54864" marR="54864" marT="18288" marB="18288">
+                    <a:solidFill>
+                      <a:srgbClr val="ECF1F6"/>
+                    </a:solidFill>
+                  </a:tcPr>
+                </a:tc>
+                <a:tc>
+                  <a:txBody>
+                    <a:bodyPr wrap="square"/>
+                    <a:lstStyle/>
+                    <a:p>
+                      <a:r>
+                        <a:rPr sz="1100" b="0">
+                          <a:solidFill>
+                            <a:srgbClr val="282828"/>
+                          </a:solidFill>
+                          <a:latin typeface="Arial"/>
+                        </a:rPr>
+                        <a:t>7.30 pm</a:t>
+                      </a:r>
+                    </a:p>
+                  </a:txBody>
+                  <a:tcPr marL="54864" marR="54864" marT="18288" marB="18288">
+                    <a:solidFill>
+                      <a:srgbClr val="ECF1F6"/>
+                    </a:solidFill>
+                  </a:tcPr>
+                </a:tc>
               </a:tr>
-              <a:tr h="468630">
-                <a:tc>
-                  <a:txBody>
-                    <a:bodyPr wrap="square"/>
-                    <a:lstStyle/>
-                    <a:p>
-                      <a:r>
-                        <a:rPr sz="1100" b="0">
-                          <a:solidFill>
-                            <a:srgbClr val="282828"/>
-                          </a:solidFill>
-                          <a:latin typeface="Arial"/>
-                        </a:rPr>
-                        <a:t>analyzer: plate λ/300; 1° azimuth; λ/100</a:t>
-                      </a:r>
-                    </a:p>
-                  </a:txBody>
-                  <a:tcPr marL="54864" marR="54864" marT="18288" marB="18288">
-                    <a:solidFill>
-                      <a:srgbClr val="FFFFFF"/>
-                    </a:solidFill>
-                  </a:tcPr>
-                </a:tc>
-                <a:tc>
-                  <a:txBody>
-                    <a:bodyPr wrap="square"/>
-                    <a:lstStyle/>
-                    <a:p>
-                      <a:r>
-                        <a:rPr sz="1100" b="0">
-                          <a:solidFill>
-                            <a:srgbClr val="282828"/>
-                          </a:solidFill>
-                          <a:latin typeface="Arial"/>
-                        </a:rPr>
-                        <a:t>165; 263; 496 pm</a:t>
-                      </a:r>
-                    </a:p>
-                  </a:txBody>
-                  <a:tcPr marL="54864" marR="54864" marT="18288" marB="18288">
-                    <a:solidFill>
-                      <a:srgbClr val="FFFFFF"/>
-                    </a:solidFill>
-                  </a:tcPr>
-                </a:tc>
-                <a:tc>
-                  <a:txBody>
-                    <a:bodyPr wrap="square"/>
-                    <a:lstStyle/>
-                    <a:p>
-                      <a:r>
-                        <a:rPr sz="1100" b="0">
-                          <a:solidFill>
-                            <a:srgbClr val="282828"/>
-                          </a:solidFill>
-                          <a:latin typeface="Arial"/>
-                        </a:rPr>
-                        <a:t>0.9932 / 4; 0.9932 / 4; 0.9928 / 4 pm</a:t>
+              <a:tr h="280035">
+                <a:tc>
+                  <a:txBody>
+                    <a:bodyPr wrap="square"/>
+                    <a:lstStyle/>
+                    <a:p>
+                      <a:r>
+                        <a:rPr sz="1100" b="0">
+                          <a:solidFill>
+                            <a:srgbClr val="282828"/>
+                          </a:solidFill>
+                          <a:latin typeface="Arial"/>
+                        </a:rPr>
+                        <a:t>camera scale drifting 1e-3 across the scan</a:t>
+                      </a:r>
+                    </a:p>
+                  </a:txBody>
+                  <a:tcPr marL="54864" marR="54864" marT="18288" marB="18288">
+                    <a:solidFill>
+                      <a:srgbClr val="FFFFFF"/>
+                    </a:solidFill>
+                  </a:tcPr>
+                </a:tc>
+                <a:tc>
+                  <a:txBody>
+                    <a:bodyPr wrap="square"/>
+                    <a:lstStyle/>
+                    <a:p>
+                      <a:r>
+                        <a:rPr sz="1100" b="0">
+                          <a:solidFill>
+                            <a:srgbClr val="282828"/>
+                          </a:solidFill>
+                          <a:latin typeface="Arial"/>
+                        </a:rPr>
+                        <a:t>10.8 nm</a:t>
+                      </a:r>
+                    </a:p>
+                  </a:txBody>
+                  <a:tcPr marL="54864" marR="54864" marT="18288" marB="18288">
+                    <a:solidFill>
+                      <a:srgbClr val="FFFFFF"/>
+                    </a:solidFill>
+                  </a:tcPr>
+                </a:tc>
+                <a:tc>
+                  <a:txBody>
+                    <a:bodyPr wrap="square"/>
+                    <a:lstStyle/>
+                    <a:p>
+                      <a:r>
+                        <a:rPr sz="1100" b="0">
+                          <a:solidFill>
+                            <a:srgbClr val="282828"/>
+                          </a:solidFill>
+                          <a:latin typeface="Arial"/>
+                        </a:rPr>
+                        <a:t>5.4</a:t>
+                      </a:r>
+                    </a:p>
+                  </a:txBody>
+                  <a:tcPr marL="54864" marR="54864" marT="18288" marB="18288">
+                    <a:solidFill>
+                      <a:srgbClr val="FFFFFF"/>
+                    </a:solidFill>
+                  </a:tcPr>
+                </a:tc>
+                <a:tc>
+                  <a:txBody>
+                    <a:bodyPr wrap="square"/>
+                    <a:lstStyle/>
+                    <a:p>
+                      <a:r>
+                        <a:rPr sz="1100" b="0">
+                          <a:solidFill>
+                            <a:srgbClr val="282828"/>
+                          </a:solidFill>
+                          <a:latin typeface="Arial"/>
+                        </a:rPr>
+                        <a:t>89 pm</a:t>
+                      </a:r>
+                    </a:p>
+                  </a:txBody>
+                  <a:tcPr marL="54864" marR="54864" marT="18288" marB="18288">
+                    <a:solidFill>
+                      <a:srgbClr val="FFFFFF"/>
+                    </a:solidFill>
+                  </a:tcPr>
+                </a:tc>
+                <a:tc>
+                  <a:txBody>
+                    <a:bodyPr wrap="square"/>
+                    <a:lstStyle/>
+                    <a:p>
+                      <a:r>
+                        <a:rPr sz="1100" b="0">
+                          <a:solidFill>
+                            <a:srgbClr val="282828"/>
+                          </a:solidFill>
+                          <a:latin typeface="Arial"/>
+                        </a:rPr>
+                        <a:t>5.3</a:t>
+                      </a:r>
+                    </a:p>
+                  </a:txBody>
+                  <a:tcPr marL="54864" marR="54864" marT="18288" marB="18288">
+                    <a:solidFill>
+                      <a:srgbClr val="FFFFFF"/>
+                    </a:solidFill>
+                  </a:tcPr>
+                </a:tc>
+                <a:tc>
+                  <a:txBody>
+                    <a:bodyPr wrap="square"/>
+                    <a:lstStyle/>
+                    <a:p>
+                      <a:r>
+                        <a:rPr sz="1100" b="0">
+                          <a:solidFill>
+                            <a:srgbClr val="282828"/>
+                          </a:solidFill>
+                          <a:latin typeface="Arial"/>
+                        </a:rPr>
+                        <a:t>10.7 pm</a:t>
                       </a:r>
                     </a:p>
                   </a:txBody>
@@ -32037,6 +31719,668 @@
                 </a:solidFill>
                 <a:latin typeface="Arial"/>
               </a:rPr>
+              <a:t>•  Why the mirror's drift helps: a scan reads the surface at its midpoint, a free half-step of prediction; 26-32% less hold error for the stepped readings.  The camera's drift is an additive bias, the opposite sign.</a:t>
+            </a:r>
+          </a:p>
+          <a:p>
+            <a:pPr>
+              <a:spcAft>
+                <a:spcPts val="600"/>
+              </a:spcAft>
+            </a:pPr>
+            <a:r>
+              <a:rPr sz="1200" b="0">
+                <a:solidFill>
+                  <a:srgbClr val="282828"/>
+                </a:solidFill>
+                <a:latin typeface="Arial"/>
+              </a:rPr>
+              <a:t>•  The P/SRI's reference arm walking (a random path walk of 1e-3 to 1e-1 rad per cycle) costs 4% in light over that hundredfold range: a path change is piston, the one mode the actuator estimator nulls.  Not benign for absolute field work; a tilting reference is outside the model.</a:t>
+            </a:r>
+          </a:p>
+          <a:p>
+            <a:pPr>
+              <a:spcAft>
+                <a:spcPts val="600"/>
+              </a:spcAft>
+            </a:pPr>
+            <a:r>
+              <a:rPr sz="1200" b="0">
+                <a:solidFill>
+                  <a:srgbClr val="282828"/>
+                </a:solidFill>
+                <a:latin typeface="Arial"/>
+              </a:rPr>
+              <a:t>•  The paper's camera number (0.13 electrons per pixel per cycle) is invisible to every reading: an electron is 1e-4 of a lit pixel's shot noise at 1e13 photons.</a:t>
+            </a:r>
+          </a:p>
+        </p:txBody>
+      </p:sp>
+      <p:sp>
+        <p:nvSpPr>
+          <p:cNvPr id="6" name="TextBox 5"/>
+          <p:cNvSpPr txBox="1"/>
+          <p:nvPr/>
+        </p:nvSpPr>
+        <p:spPr>
+          <a:xfrm>
+            <a:off x="6400800" y="3934968"/>
+            <a:ext cx="5394960" cy="274320"/>
+          </a:xfrm>
+          <a:prstGeom prst="rect">
+            <a:avLst/>
+          </a:prstGeom>
+          <a:noFill/>
+        </p:spPr>
+        <p:txBody>
+          <a:bodyPr wrap="square">
+            <a:spAutoFit/>
+          </a:bodyPr>
+          <a:lstStyle/>
+          <a:p>
+            <a:pPr>
+              <a:spcAft>
+                <a:spcPts val="600"/>
+              </a:spcAft>
+            </a:pPr>
+            <a:r>
+              <a:rPr sz="1050" b="0">
+                <a:solidFill>
+                  <a:srgbClr val="6E6E6E"/>
+                </a:solidFill>
+                <a:latin typeface="Arial"/>
+              </a:rPr>
+              <a:t>Run tags intra193_0, intra193, pcam193, pcam193r, pcam193ri, rw193_1e3/1e2/1e1, loop_lens_intra, loop_lens_cam.</a:t>
+            </a:r>
+          </a:p>
+        </p:txBody>
+      </p:sp>
+    </p:spTree>
+  </p:cSld>
+  <p:clrMapOvr>
+    <a:masterClrMapping/>
+  </p:clrMapOvr>
+</p:sld>
+</file>
+
+<file path=ppt/slides/slide52.xml><?xml version="1.0" encoding="utf-8"?>
+<p:sld xmlns:a="http://schemas.openxmlformats.org/drawingml/2006/main" xmlns:p="http://schemas.openxmlformats.org/presentationml/2006/main" xmlns:r="http://schemas.openxmlformats.org/officeDocument/2006/relationships">
+  <p:cSld>
+    <p:spTree>
+      <p:nvGrpSpPr>
+        <p:cNvPr id="1" name=""/>
+        <p:cNvGrpSpPr/>
+        <p:nvPr/>
+      </p:nvGrpSpPr>
+      <p:grpSpPr/>
+      <p:sp>
+        <p:nvSpPr>
+          <p:cNvPr id="2" name="TextBox 1"/>
+          <p:cNvSpPr txBox="1"/>
+          <p:nvPr/>
+        </p:nvSpPr>
+        <p:spPr>
+          <a:xfrm>
+            <a:off x="411480" y="201168"/>
+            <a:ext cx="11368735" cy="914400"/>
+          </a:xfrm>
+          <a:prstGeom prst="rect">
+            <a:avLst/>
+          </a:prstGeom>
+          <a:noFill/>
+        </p:spPr>
+        <p:txBody>
+          <a:bodyPr wrap="square">
+            <a:spAutoFit/>
+          </a:bodyPr>
+          <a:lstStyle/>
+          <a:p>
+            <a:pPr>
+              <a:spcAft>
+                <a:spcPts val="400"/>
+              </a:spcAft>
+            </a:pPr>
+            <a:r>
+              <a:rPr sz="2400" b="1">
+                <a:solidFill>
+                  <a:srgbClr val="1F4E79"/>
+                </a:solidFill>
+                <a:latin typeface="Arial"/>
+              </a:rPr>
+              <a:t>Backup: the vector sensor's polarization terms</a:t>
+            </a:r>
+          </a:p>
+          <a:p>
+            <a:pPr>
+              <a:spcAft>
+                <a:spcPts val="0"/>
+              </a:spcAft>
+            </a:pPr>
+            <a:r>
+              <a:rPr sz="1250" b="0">
+                <a:solidFill>
+                  <a:srgbClr val="6E6E6E"/>
+                </a:solidFill>
+                <a:latin typeface="Arial"/>
+              </a:rPr>
+              <a:t>The metasurface's retardance error, the arm's polarization aberration, and the analyzer, each from the engine's polarized traces of this bench</a:t>
+            </a:r>
+          </a:p>
+        </p:txBody>
+      </p:sp>
+      <p:sp>
+        <p:nvSpPr>
+          <p:cNvPr id="3" name="Rectangle 2"/>
+          <p:cNvSpPr/>
+          <p:nvPr/>
+        </p:nvSpPr>
+        <p:spPr>
+          <a:xfrm>
+            <a:off x="411480" y="1133856"/>
+            <a:ext cx="11368735" cy="20320"/>
+          </a:xfrm>
+          <a:prstGeom prst="rect">
+            <a:avLst/>
+          </a:prstGeom>
+          <a:solidFill>
+            <a:srgbClr val="B8C6D4"/>
+          </a:solidFill>
+          <a:ln>
+            <a:noFill/>
+          </a:ln>
+          <a:effectLst/>
+        </p:spPr>
+        <p:style>
+          <a:lnRef idx="1">
+            <a:schemeClr val="accent1"/>
+          </a:lnRef>
+          <a:fillRef idx="3">
+            <a:schemeClr val="accent1"/>
+          </a:fillRef>
+          <a:effectRef idx="2">
+            <a:schemeClr val="accent1"/>
+          </a:effectRef>
+          <a:fontRef idx="minor">
+            <a:schemeClr val="lt1"/>
+          </a:fontRef>
+        </p:style>
+        <p:txBody>
+          <a:bodyPr rtlCol="0" anchor="ctr"/>
+          <a:lstStyle/>
+          <a:p>
+            <a:pPr algn="ctr"/>
+          </a:p>
+        </p:txBody>
+      </p:sp>
+      <p:graphicFrame>
+        <p:nvGraphicFramePr>
+          <p:cNvPr id="4" name="Table 3"/>
+          <p:cNvGraphicFramePr>
+            <a:graphicFrameLocks noGrp="1"/>
+          </p:cNvGraphicFramePr>
+          <p:nvPr/>
+        </p:nvGraphicFramePr>
+        <p:xfrm>
+          <a:off x="411480" y="1298448"/>
+          <a:ext cx="5806439" cy="3377565"/>
+        </p:xfrm>
+        <a:graphic>
+          <a:graphicData uri="http://schemas.openxmlformats.org/drawingml/2006/table">
+            <a:tbl>
+              <a:tblPr firstRow="1" bandRow="1">
+                <a:tableStyleId>{5C22544A-7EE6-4342-B048-85BDC9FD1C3A}</a:tableStyleId>
+              </a:tblPr>
+              <a:tblGrid>
+                <a:gridCol w="1924420"/>
+                <a:gridCol w="1824881"/>
+                <a:gridCol w="2057138"/>
+              </a:tblGrid>
+              <a:tr h="468630">
+                <a:tc>
+                  <a:txBody>
+                    <a:bodyPr wrap="square"/>
+                    <a:lstStyle/>
+                    <a:p>
+                      <a:r>
+                        <a:rPr sz="1100" b="1">
+                          <a:solidFill>
+                            <a:srgbClr val="FFFFFF"/>
+                          </a:solidFill>
+                          <a:latin typeface="Arial"/>
+                        </a:rPr>
+                        <a:t>term</a:t>
+                      </a:r>
+                    </a:p>
+                  </a:txBody>
+                  <a:tcPr marL="54864" marR="54864" marT="18288" marB="18288">
+                    <a:solidFill>
+                      <a:srgbClr val="1F4E79"/>
+                    </a:solidFill>
+                  </a:tcPr>
+                </a:tc>
+                <a:tc>
+                  <a:txBody>
+                    <a:bodyPr wrap="square"/>
+                    <a:lstStyle/>
+                    <a:p>
+                      <a:r>
+                        <a:rPr sz="1100" b="1">
+                          <a:solidFill>
+                            <a:srgbClr val="FFFFFF"/>
+                          </a:solidFill>
+                          <a:latin typeface="Arial"/>
+                        </a:rPr>
+                        <a:t>uncalibrated, on 100 nm pokes (12 nm rms)</a:t>
+                      </a:r>
+                    </a:p>
+                  </a:txBody>
+                  <a:tcPr marL="54864" marR="54864" marT="18288" marB="18288">
+                    <a:solidFill>
+                      <a:srgbClr val="1F4E79"/>
+                    </a:solidFill>
+                  </a:tcPr>
+                </a:tc>
+                <a:tc>
+                  <a:txBody>
+                    <a:bodyPr wrap="square"/>
+                    <a:lstStyle/>
+                    <a:p>
+                      <a:r>
+                        <a:rPr sz="1100" b="1">
+                          <a:solidFill>
+                            <a:srgbClr val="FFFFFF"/>
+                          </a:solidFill>
+                          <a:latin typeface="Arial"/>
+                        </a:rPr>
+                        <a:t>through the matrix measured on the surface</a:t>
+                      </a:r>
+                    </a:p>
+                  </a:txBody>
+                  <a:tcPr marL="54864" marR="54864" marT="18288" marB="18288">
+                    <a:solidFill>
+                      <a:srgbClr val="1F4E79"/>
+                    </a:solidFill>
+                  </a:tcPr>
+                </a:tc>
+              </a:tr>
+              <a:tr h="657225">
+                <a:tc>
+                  <a:txBody>
+                    <a:bodyPr wrap="square"/>
+                    <a:lstStyle/>
+                    <a:p>
+                      <a:r>
+                        <a:rPr sz="1100" b="0">
+                          <a:solidFill>
+                            <a:srgbClr val="282828"/>
+                          </a:solidFill>
+                          <a:latin typeface="Arial"/>
+                        </a:rPr>
+                        <a:t>metasurface retardance error 0.02 / 0.05 / 0.10 / 0.20 rad</a:t>
+                      </a:r>
+                    </a:p>
+                  </a:txBody>
+                  <a:tcPr marL="54864" marR="54864" marT="18288" marB="18288">
+                    <a:solidFill>
+                      <a:srgbClr val="FFFFFF"/>
+                    </a:solidFill>
+                  </a:tcPr>
+                </a:tc>
+                <a:tc>
+                  <a:txBody>
+                    <a:bodyPr wrap="square"/>
+                    <a:lstStyle/>
+                    <a:p>
+                      <a:r>
+                        <a:rPr sz="1100" b="0">
+                          <a:solidFill>
+                            <a:srgbClr val="282828"/>
+                          </a:solidFill>
+                          <a:latin typeface="Arial"/>
+                        </a:rPr>
+                        <a:t>153 / 380 / 750 / 1461 pm</a:t>
+                      </a:r>
+                    </a:p>
+                  </a:txBody>
+                  <a:tcPr marL="54864" marR="54864" marT="18288" marB="18288">
+                    <a:solidFill>
+                      <a:srgbClr val="FFFFFF"/>
+                    </a:solidFill>
+                  </a:tcPr>
+                </a:tc>
+                <a:tc>
+                  <a:txBody>
+                    <a:bodyPr wrap="square"/>
+                    <a:lstStyle/>
+                    <a:p>
+                      <a:r>
+                        <a:rPr sz="1100" b="0">
+                          <a:solidFill>
+                            <a:srgbClr val="282828"/>
+                          </a:solidFill>
+                          <a:latin typeface="Arial"/>
+                        </a:rPr>
+                        <a:t>0.9934 / 4 pm at 0.10 and 0.20: the ideal rows</a:t>
+                      </a:r>
+                    </a:p>
+                  </a:txBody>
+                  <a:tcPr marL="54864" marR="54864" marT="18288" marB="18288">
+                    <a:solidFill>
+                      <a:srgbClr val="FFFFFF"/>
+                    </a:solidFill>
+                  </a:tcPr>
+                </a:tc>
+              </a:tr>
+              <a:tr h="657225">
+                <a:tc>
+                  <a:txBody>
+                    <a:bodyPr wrap="square"/>
+                    <a:lstStyle/>
+                    <a:p>
+                      <a:r>
+                        <a:rPr sz="1100" b="0">
+                          <a:solidFill>
+                            <a:srgbClr val="282828"/>
+                          </a:solidFill>
+                          <a:latin typeface="Arial"/>
+                        </a:rPr>
+                        <a:t>the arm, laser at 45° / 0° / 90° to the fold plane</a:t>
+                      </a:r>
+                    </a:p>
+                  </a:txBody>
+                  <a:tcPr marL="54864" marR="54864" marT="18288" marB="18288">
+                    <a:solidFill>
+                      <a:srgbClr val="ECF1F6"/>
+                    </a:solidFill>
+                  </a:tcPr>
+                </a:tc>
+                <a:tc>
+                  <a:txBody>
+                    <a:bodyPr wrap="square"/>
+                    <a:lstStyle/>
+                    <a:p>
+                      <a:r>
+                        <a:rPr sz="1100" b="0">
+                          <a:solidFill>
+                            <a:srgbClr val="282828"/>
+                          </a:solidFill>
+                          <a:latin typeface="Arial"/>
+                        </a:rPr>
+                        <a:t>9.0 / 17.2 / 11.2 pm (ideal 0.05)</a:t>
+                      </a:r>
+                    </a:p>
+                  </a:txBody>
+                  <a:tcPr marL="54864" marR="54864" marT="18288" marB="18288">
+                    <a:solidFill>
+                      <a:srgbClr val="ECF1F6"/>
+                    </a:solidFill>
+                  </a:tcPr>
+                </a:tc>
+                <a:tc>
+                  <a:txBody>
+                    <a:bodyPr wrap="square"/>
+                    <a:lstStyle/>
+                    <a:p>
+                      <a:r>
+                        <a:rPr sz="1100" b="0">
+                          <a:solidFill>
+                            <a:srgbClr val="282828"/>
+                          </a:solidFill>
+                          <a:latin typeface="Arial"/>
+                        </a:rPr>
+                        <a:t>nothing through 0.1 rad of channel phase; 10% gain loss at 0.3</a:t>
+                      </a:r>
+                    </a:p>
+                  </a:txBody>
+                  <a:tcPr marL="54864" marR="54864" marT="18288" marB="18288">
+                    <a:solidFill>
+                      <a:srgbClr val="ECF1F6"/>
+                    </a:solidFill>
+                  </a:tcPr>
+                </a:tc>
+              </a:tr>
+              <a:tr h="657225">
+                <a:tc>
+                  <a:txBody>
+                    <a:bodyPr wrap="square"/>
+                    <a:lstStyle/>
+                    <a:p>
+                      <a:r>
+                        <a:rPr sz="1100" b="0">
+                          <a:solidFill>
+                            <a:srgbClr val="282828"/>
+                          </a:solidFill>
+                          <a:latin typeface="Arial"/>
+                        </a:rPr>
+                        <a:t>the arm, design scan: 6 nm per rad of channel phase</a:t>
+                      </a:r>
+                    </a:p>
+                  </a:txBody>
+                  <a:tcPr marL="54864" marR="54864" marT="18288" marB="18288">
+                    <a:solidFill>
+                      <a:srgbClr val="FFFFFF"/>
+                    </a:solidFill>
+                  </a:tcPr>
+                </a:tc>
+                <a:tc>
+                  <a:txBody>
+                    <a:bodyPr wrap="square"/>
+                    <a:lstStyle/>
+                    <a:p>
+                      <a:r>
+                        <a:rPr sz="1100" b="0">
+                          <a:solidFill>
+                            <a:srgbClr val="282828"/>
+                          </a:solidFill>
+                          <a:latin typeface="Arial"/>
+                        </a:rPr>
+                        <a:t>59 / 178 / 597 / 1877 pm at 0.01 / 0.03 / 0.1 / 0.3 rad</a:t>
+                      </a:r>
+                    </a:p>
+                  </a:txBody>
+                  <a:tcPr marL="54864" marR="54864" marT="18288" marB="18288">
+                    <a:solidFill>
+                      <a:srgbClr val="FFFFFF"/>
+                    </a:solidFill>
+                  </a:tcPr>
+                </a:tc>
+                <a:tc>
+                  <a:txBody>
+                    <a:bodyPr wrap="square"/>
+                    <a:lstStyle/>
+                    <a:p>
+                      <a:r>
+                        <a:rPr sz="1100" b="0">
+                          <a:solidFill>
+                            <a:srgbClr val="282828"/>
+                          </a:solidFill>
+                          <a:latin typeface="Arial"/>
+                        </a:rPr>
+                        <a:t>—</a:t>
+                      </a:r>
+                    </a:p>
+                  </a:txBody>
+                  <a:tcPr marL="54864" marR="54864" marT="18288" marB="18288">
+                    <a:solidFill>
+                      <a:srgbClr val="FFFFFF"/>
+                    </a:solidFill>
+                  </a:tcPr>
+                </a:tc>
+              </a:tr>
+              <a:tr h="468630">
+                <a:tc>
+                  <a:txBody>
+                    <a:bodyPr wrap="square"/>
+                    <a:lstStyle/>
+                    <a:p>
+                      <a:r>
+                        <a:rPr sz="1100" b="0">
+                          <a:solidFill>
+                            <a:srgbClr val="282828"/>
+                          </a:solidFill>
+                          <a:latin typeface="Arial"/>
+                        </a:rPr>
+                        <a:t>analyzer: cube extinction alone</a:t>
+                      </a:r>
+                    </a:p>
+                  </a:txBody>
+                  <a:tcPr marL="54864" marR="54864" marT="18288" marB="18288">
+                    <a:solidFill>
+                      <a:srgbClr val="ECF1F6"/>
+                    </a:solidFill>
+                  </a:tcPr>
+                </a:tc>
+                <a:tc>
+                  <a:txBody>
+                    <a:bodyPr wrap="square"/>
+                    <a:lstStyle/>
+                    <a:p>
+                      <a:r>
+                        <a:rPr sz="1100" b="0">
+                          <a:solidFill>
+                            <a:srgbClr val="282828"/>
+                          </a:solidFill>
+                          <a:latin typeface="Arial"/>
+                        </a:rPr>
+                        <a:t>3.5 pm</a:t>
+                      </a:r>
+                    </a:p>
+                  </a:txBody>
+                  <a:tcPr marL="54864" marR="54864" marT="18288" marB="18288">
+                    <a:solidFill>
+                      <a:srgbClr val="ECF1F6"/>
+                    </a:solidFill>
+                  </a:tcPr>
+                </a:tc>
+                <a:tc>
+                  <a:txBody>
+                    <a:bodyPr wrap="square"/>
+                    <a:lstStyle/>
+                    <a:p>
+                      <a:r>
+                        <a:rPr sz="1100" b="0">
+                          <a:solidFill>
+                            <a:srgbClr val="282828"/>
+                          </a:solidFill>
+                          <a:latin typeface="Arial"/>
+                        </a:rPr>
+                        <a:t>0.9934 / 4 pm</a:t>
+                      </a:r>
+                    </a:p>
+                  </a:txBody>
+                  <a:tcPr marL="54864" marR="54864" marT="18288" marB="18288">
+                    <a:solidFill>
+                      <a:srgbClr val="ECF1F6"/>
+                    </a:solidFill>
+                  </a:tcPr>
+                </a:tc>
+              </a:tr>
+              <a:tr h="468630">
+                <a:tc>
+                  <a:txBody>
+                    <a:bodyPr wrap="square"/>
+                    <a:lstStyle/>
+                    <a:p>
+                      <a:r>
+                        <a:rPr sz="1100" b="0">
+                          <a:solidFill>
+                            <a:srgbClr val="282828"/>
+                          </a:solidFill>
+                          <a:latin typeface="Arial"/>
+                        </a:rPr>
+                        <a:t>analyzer: plate λ/300; 1° azimuth; λ/100</a:t>
+                      </a:r>
+                    </a:p>
+                  </a:txBody>
+                  <a:tcPr marL="54864" marR="54864" marT="18288" marB="18288">
+                    <a:solidFill>
+                      <a:srgbClr val="FFFFFF"/>
+                    </a:solidFill>
+                  </a:tcPr>
+                </a:tc>
+                <a:tc>
+                  <a:txBody>
+                    <a:bodyPr wrap="square"/>
+                    <a:lstStyle/>
+                    <a:p>
+                      <a:r>
+                        <a:rPr sz="1100" b="0">
+                          <a:solidFill>
+                            <a:srgbClr val="282828"/>
+                          </a:solidFill>
+                          <a:latin typeface="Arial"/>
+                        </a:rPr>
+                        <a:t>165; 263; 496 pm</a:t>
+                      </a:r>
+                    </a:p>
+                  </a:txBody>
+                  <a:tcPr marL="54864" marR="54864" marT="18288" marB="18288">
+                    <a:solidFill>
+                      <a:srgbClr val="FFFFFF"/>
+                    </a:solidFill>
+                  </a:tcPr>
+                </a:tc>
+                <a:tc>
+                  <a:txBody>
+                    <a:bodyPr wrap="square"/>
+                    <a:lstStyle/>
+                    <a:p>
+                      <a:r>
+                        <a:rPr sz="1100" b="0">
+                          <a:solidFill>
+                            <a:srgbClr val="282828"/>
+                          </a:solidFill>
+                          <a:latin typeface="Arial"/>
+                        </a:rPr>
+                        <a:t>0.9932 / 4; 0.9932 / 4; 0.9928 / 4 pm</a:t>
+                      </a:r>
+                    </a:p>
+                  </a:txBody>
+                  <a:tcPr marL="54864" marR="54864" marT="18288" marB="18288">
+                    <a:solidFill>
+                      <a:srgbClr val="FFFFFF"/>
+                    </a:solidFill>
+                  </a:tcPr>
+                </a:tc>
+              </a:tr>
+            </a:tbl>
+          </a:graphicData>
+        </a:graphic>
+      </p:graphicFrame>
+      <p:sp>
+        <p:nvSpPr>
+          <p:cNvPr id="5" name="TextBox 4"/>
+          <p:cNvSpPr txBox="1"/>
+          <p:nvPr/>
+        </p:nvSpPr>
+        <p:spPr>
+          <a:xfrm>
+            <a:off x="6400800" y="1298448"/>
+            <a:ext cx="5394960" cy="274320"/>
+          </a:xfrm>
+          <a:prstGeom prst="rect">
+            <a:avLst/>
+          </a:prstGeom>
+          <a:noFill/>
+        </p:spPr>
+        <p:txBody>
+          <a:bodyPr wrap="square">
+            <a:spAutoFit/>
+          </a:bodyPr>
+          <a:lstStyle/>
+          <a:p>
+            <a:pPr>
+              <a:spcAft>
+                <a:spcPts val="600"/>
+              </a:spcAft>
+            </a:pPr>
+            <a:r>
+              <a:rPr sz="1200" b="0">
+                <a:solidFill>
+                  <a:srgbClr val="282828"/>
+                </a:solidFill>
+                <a:latin typeface="Arial"/>
+              </a:rPr>
               <a:t>•  The arm: six 7° glass faces give 5e-3 diattenuation and 0.9 mrad retardance; because the Jones matrix is real, the two circular channels differ in phase only, 1.6 mrad rms at the worst laser angle and 2e-5 along the fold plane's axis.  Rule: specify pupil-varying diattenuation, put the laser on the eigenaxis.</a:t>
             </a:r>
           </a:p>
@@ -32121,7 +32465,7 @@
 </p:sld>
 </file>
 
-<file path=ppt/slides/slide52.xml><?xml version="1.0" encoding="utf-8"?>
+<file path=ppt/slides/slide53.xml><?xml version="1.0" encoding="utf-8"?>
 <p:sld xmlns:a="http://schemas.openxmlformats.org/drawingml/2006/main" xmlns:p="http://schemas.openxmlformats.org/presentationml/2006/main" xmlns:r="http://schemas.openxmlformats.org/officeDocument/2006/relationships">
   <p:cSld>
     <p:spTree>
@@ -32411,7 +32755,7 @@
 </p:sld>
 </file>
 
-<file path=ppt/slides/slide53.xml><?xml version="1.0" encoding="utf-8"?>
+<file path=ppt/slides/slide54.xml><?xml version="1.0" encoding="utf-8"?>
 <p:sld xmlns:a="http://schemas.openxmlformats.org/drawingml/2006/main" xmlns:p="http://schemas.openxmlformats.org/presentationml/2006/main" xmlns:r="http://schemas.openxmlformats.org/officeDocument/2006/relationships">
   <p:cSld>
     <p:spTree>
@@ -33115,7 +33459,7 @@
 </p:sld>
 </file>
 
-<file path=ppt/slides/slide54.xml><?xml version="1.0" encoding="utf-8"?>
+<file path=ppt/slides/slide55.xml><?xml version="1.0" encoding="utf-8"?>
 <p:sld xmlns:a="http://schemas.openxmlformats.org/drawingml/2006/main" xmlns:p="http://schemas.openxmlformats.org/presentationml/2006/main" xmlns:r="http://schemas.openxmlformats.org/officeDocument/2006/relationships">
   <p:cSld>
     <p:spTree>
@@ -34109,7 +34453,7 @@
 </p:sld>
 </file>
 
-<file path=ppt/slides/slide55.xml><?xml version="1.0" encoding="utf-8"?>
+<file path=ppt/slides/slide56.xml><?xml version="1.0" encoding="utf-8"?>
 <p:sld xmlns:a="http://schemas.openxmlformats.org/drawingml/2006/main" xmlns:p="http://schemas.openxmlformats.org/presentationml/2006/main" xmlns:r="http://schemas.openxmlformats.org/officeDocument/2006/relationships">
   <p:cSld>
     <p:spTree>

--- a/demo_session/deck_gauges_edit.pptx
+++ b/demo_session/deck_gauges_edit.pptx
@@ -3886,8 +3886,8 @@
         </p:blipFill>
         <p:spPr>
           <a:xfrm>
-            <a:off x="3176191" y="1298448"/>
-            <a:ext cx="5839311" cy="3281172"/>
+            <a:off x="3205553" y="1298448"/>
+            <a:ext cx="5780588" cy="3281172"/>
           </a:xfrm>
           <a:prstGeom prst="rect">
             <a:avLst/>
@@ -8846,8 +8846,8 @@
         </p:blipFill>
         <p:spPr>
           <a:xfrm>
-            <a:off x="3041504" y="1298448"/>
-            <a:ext cx="6108686" cy="3446272"/>
+            <a:off x="3312126" y="1298448"/>
+            <a:ext cx="5567442" cy="3446272"/>
           </a:xfrm>
           <a:prstGeom prst="rect">
             <a:avLst/>
@@ -9861,8 +9861,8 @@
         </p:blipFill>
         <p:spPr>
           <a:xfrm>
-            <a:off x="1821277" y="1298448"/>
-            <a:ext cx="8549140" cy="3812032"/>
+            <a:off x="3447982" y="1298448"/>
+            <a:ext cx="5295730" cy="3812032"/>
           </a:xfrm>
           <a:prstGeom prst="rect">
             <a:avLst/>
@@ -17865,7 +17865,7 @@
       </p:sp>
       <p:pic>
         <p:nvPicPr>
-          <p:cNvPr id="4" name="Picture 3" descr="crop_oapdraw3_train.png"/>
+          <p:cNvPr id="4" name="Picture 3" descr="crop_lay96_oap_train.png"/>
           <p:cNvPicPr>
             <a:picLocks noChangeAspect="1"/>
           </p:cNvPicPr>
@@ -17879,8 +17879,8 @@
         </p:blipFill>
         <p:spPr>
           <a:xfrm>
-            <a:off x="1143000" y="1554480"/>
-            <a:ext cx="4343400" cy="3931920"/>
+            <a:off x="1986938" y="1298448"/>
+            <a:ext cx="2655523" cy="2384552"/>
           </a:xfrm>
           <a:prstGeom prst="rect">
             <a:avLst/>
@@ -17895,8 +17895,8 @@
         </p:nvSpPr>
         <p:spPr>
           <a:xfrm>
-            <a:off x="411480" y="5696712"/>
-            <a:ext cx="4343400" cy="1054608"/>
+            <a:off x="411480" y="3701287"/>
+            <a:ext cx="5806440" cy="724408"/>
           </a:xfrm>
           <a:prstGeom prst="rect">
             <a:avLst/>
@@ -22772,8 +22772,8 @@
         </p:blipFill>
         <p:spPr>
           <a:xfrm>
-            <a:off x="1883208" y="1298448"/>
-            <a:ext cx="2862983" cy="1653032"/>
+            <a:off x="1876107" y="1298448"/>
+            <a:ext cx="2877184" cy="1653032"/>
           </a:xfrm>
           <a:prstGeom prst="rect">
             <a:avLst/>
@@ -22821,7 +22821,7 @@
       </p:sp>
       <p:pic>
         <p:nvPicPr>
-          <p:cNvPr id="6" name="Picture 5" descr="crop_oapdraw3_train.png"/>
+          <p:cNvPr id="6" name="Picture 5" descr="crop_lay96_oap_train.png"/>
           <p:cNvPicPr>
             <a:picLocks noChangeAspect="1"/>
           </p:cNvPicPr>
@@ -22835,8 +22835,8 @@
         </p:blipFill>
         <p:spPr>
           <a:xfrm>
-            <a:off x="8185355" y="1298448"/>
-            <a:ext cx="1825848" cy="1653032"/>
+            <a:off x="8177841" y="1298448"/>
+            <a:ext cx="1840876" cy="1653032"/>
           </a:xfrm>
           <a:prstGeom prst="rect">
             <a:avLst/>
@@ -29044,8 +29044,8 @@
         </p:blipFill>
         <p:spPr>
           <a:xfrm>
-            <a:off x="2242989" y="1298448"/>
-            <a:ext cx="7705716" cy="1434592"/>
+            <a:off x="2250210" y="1298448"/>
+            <a:ext cx="7691274" cy="1434592"/>
           </a:xfrm>
           <a:prstGeom prst="rect">
             <a:avLst/>
@@ -33302,8 +33302,8 @@
         </p:blipFill>
         <p:spPr>
           <a:xfrm>
-            <a:off x="7364768" y="1298448"/>
-            <a:ext cx="3467022" cy="1965451"/>
+            <a:off x="7379616" y="1298448"/>
+            <a:ext cx="3437327" cy="1965451"/>
           </a:xfrm>
           <a:prstGeom prst="rect">
             <a:avLst/>
@@ -33365,8 +33365,8 @@
         </p:blipFill>
         <p:spPr>
           <a:xfrm>
-            <a:off x="7355974" y="3547872"/>
-            <a:ext cx="3484610" cy="1965451"/>
+            <a:off x="7382356" y="3547872"/>
+            <a:ext cx="3431846" cy="1965451"/>
           </a:xfrm>
           <a:prstGeom prst="rect">
             <a:avLst/>

--- a/demo_session/deck_gauges_edit.pptx
+++ b/demo_session/deck_gauges_edit.pptx
@@ -3886,8 +3886,8 @@
         </p:blipFill>
         <p:spPr>
           <a:xfrm>
-            <a:off x="3205553" y="1298448"/>
-            <a:ext cx="5780588" cy="3281172"/>
+            <a:off x="3309591" y="1298448"/>
+            <a:ext cx="5572512" cy="3281172"/>
           </a:xfrm>
           <a:prstGeom prst="rect">
             <a:avLst/>
@@ -8846,8 +8846,8 @@
         </p:blipFill>
         <p:spPr>
           <a:xfrm>
-            <a:off x="3312126" y="1298448"/>
-            <a:ext cx="5567442" cy="3446272"/>
+            <a:off x="3601256" y="1298448"/>
+            <a:ext cx="4989182" cy="3446272"/>
           </a:xfrm>
           <a:prstGeom prst="rect">
             <a:avLst/>
@@ -9861,8 +9861,8 @@
         </p:blipFill>
         <p:spPr>
           <a:xfrm>
-            <a:off x="3447982" y="1298448"/>
-            <a:ext cx="5295730" cy="3812032"/>
+            <a:off x="3485248" y="1298448"/>
+            <a:ext cx="5221198" cy="3812032"/>
           </a:xfrm>
           <a:prstGeom prst="rect">
             <a:avLst/>
@@ -17879,8 +17879,8 @@
         </p:blipFill>
         <p:spPr>
           <a:xfrm>
-            <a:off x="1986938" y="1298448"/>
-            <a:ext cx="2655523" cy="2384552"/>
+            <a:off x="2012287" y="1298448"/>
+            <a:ext cx="2604825" cy="2384552"/>
           </a:xfrm>
           <a:prstGeom prst="rect">
             <a:avLst/>
@@ -22772,8 +22772,8 @@
         </p:blipFill>
         <p:spPr>
           <a:xfrm>
-            <a:off x="1876107" y="1298448"/>
-            <a:ext cx="2877184" cy="1653032"/>
+            <a:off x="1927811" y="1298448"/>
+            <a:ext cx="2773776" cy="1653032"/>
           </a:xfrm>
           <a:prstGeom prst="rect">
             <a:avLst/>
@@ -22835,8 +22835,8 @@
         </p:blipFill>
         <p:spPr>
           <a:xfrm>
-            <a:off x="8177841" y="1298448"/>
-            <a:ext cx="1840876" cy="1653032"/>
+            <a:off x="8195414" y="1298448"/>
+            <a:ext cx="1805731" cy="1653032"/>
           </a:xfrm>
           <a:prstGeom prst="rect">
             <a:avLst/>
@@ -29044,8 +29044,8 @@
         </p:blipFill>
         <p:spPr>
           <a:xfrm>
-            <a:off x="2250210" y="1298448"/>
-            <a:ext cx="7691274" cy="1434592"/>
+            <a:off x="2390317" y="1298448"/>
+            <a:ext cx="7411060" cy="1434592"/>
           </a:xfrm>
           <a:prstGeom prst="rect">
             <a:avLst/>
@@ -33302,8 +33302,8 @@
         </p:blipFill>
         <p:spPr>
           <a:xfrm>
-            <a:off x="7379616" y="1298448"/>
-            <a:ext cx="3437327" cy="1965451"/>
+            <a:off x="7420327" y="1298448"/>
+            <a:ext cx="3355904" cy="1965451"/>
           </a:xfrm>
           <a:prstGeom prst="rect">
             <a:avLst/>
@@ -33365,8 +33365,8 @@
         </p:blipFill>
         <p:spPr>
           <a:xfrm>
-            <a:off x="7382356" y="3547872"/>
-            <a:ext cx="3431846" cy="1965451"/>
+            <a:off x="7443648" y="3547872"/>
+            <a:ext cx="3309263" cy="1965451"/>
           </a:xfrm>
           <a:prstGeom prst="rect">
             <a:avLst/>

--- a/demo_session/deck_gauges_edit.pptx
+++ b/demo_session/deck_gauges_edit.pptx
@@ -4040,7 +4040,7 @@
                 </a:solidFill>
                 <a:latin typeface="Arial"/>
               </a:rPr>
-              <a:t>The key signals along the train for the flat mirror and for the 30 nm working surface, on the redesigned mirror rig: the absolute map is within 2% of the engine's field, the differential rows within 2.4 pm</a:t>
+              <a:t>The key signals along the train for the flat mirror and for the 30 nm working surface, on the redesigned mirror rig: the absolute map is within 1.5% of the engine's field, the differential rows within 1.8 pm</a:t>
             </a:r>
           </a:p>
         </p:txBody>
@@ -4091,7 +4091,7 @@
       </p:sp>
       <p:pic>
         <p:nvPicPr>
-          <p:cNvPr id="4" name="Picture 3" descr="stnoap_stations.png"/>
+          <p:cNvPr id="4" name="Picture 3" descr="redo96_oapstn_stations.png"/>
           <p:cNvPicPr>
             <a:picLocks noChangeAspect="1"/>
           </p:cNvPicPr>
@@ -4105,8 +4105,8 @@
         </p:blipFill>
         <p:spPr>
           <a:xfrm>
-            <a:off x="2026767" y="1298448"/>
-            <a:ext cx="8138160" cy="2531872"/>
+            <a:off x="2028583" y="1298448"/>
+            <a:ext cx="8134528" cy="2531872"/>
           </a:xfrm>
           <a:prstGeom prst="rect">
             <a:avLst/>
@@ -4186,7 +4186,7 @@
                 </a:solidFill>
                 <a:latin typeface="Arial"/>
               </a:rPr>
-              <a:t>•  The residual column is the absolute read against the engine: 0.00 pm on the flat, 626 pm on the 30 nm surface (2% of the figure); the differential rows the servo uses read the same surface's changes to 2.4 pm, which is why the matrix is measured on the surface.</a:t>
+              <a:t>•  The residual column is the absolute read against the engine: 0.00 pm on the flat, 463 pm on the 30 nm surface (1.5% of the figure); the differential rows the servo uses read the same surface's changes to 1.8 pm, which is why the matrix is measured on the surface.</a:t>
             </a:r>
           </a:p>
         </p:txBody>
@@ -4225,7 +4225,7 @@
                 </a:solidFill>
                 <a:latin typeface="Arial"/>
               </a:rPr>
-              <a:t>Run tag stnoap (the redesigned mirror rig, seed detector leg; bit-identical to the servo run's figure).  The lens rig's figure exists but its residual panel reads 62 nm against the engine, a misregistration under investigation, so it is not shown.</a:t>
+              <a:t>Run tag redo96_oapstn (the mirror rig on the redo bench, Mac cycle 3c, 2026-09-18).  The lens rig's figure exists but its residual panel reads 51 nm against the engine — a fold, not the pupil-image bowl the earlier hypothesis blamed: the bowl is gone and the residual barely moved (62 → 51 nm).  Under investigation, so it is not shown.</a:t>
             </a:r>
           </a:p>
         </p:txBody>
@@ -4298,7 +4298,7 @@
                 </a:solidFill>
                 <a:latin typeface="Arial"/>
               </a:rPr>
-              <a:t>The camera sees the DM sharply on both front ends; against a single global mapping the image is distorted by a third of a pitch at the edge on lenses and most of a pitch on mirrors, which the measured response matrix absorbs and a geometric mapping would not</a:t>
+              <a:t>The camera sees the DM sharply on both front ends; against a single global mapping the image is distorted by a seventh of a pitch at the edge on lenses and more than a pitch on mirrors, which the measured response matrix absorbs and a geometric mapping would not</a:t>
             </a:r>
           </a:p>
         </p:txBody>
@@ -4349,7 +4349,7 @@
       </p:sp>
       <p:pic>
         <p:nvPicPr>
-          <p:cNvPr id="4" name="Picture 3" descr="pupilq_lens_pupil.png"/>
+          <p:cNvPr id="4" name="Picture 3" descr="pupilq96_lens_pupil.png"/>
           <p:cNvPicPr>
             <a:picLocks noChangeAspect="1"/>
           </p:cNvPicPr>
@@ -4421,7 +4421,7 @@
         </p:nvGraphicFramePr>
         <p:xfrm>
           <a:off x="6400800" y="1298448"/>
-          <a:ext cx="5394958" cy="1314450"/>
+          <a:ext cx="5394958" cy="1657350"/>
         </p:xfrm>
         <a:graphic>
           <a:graphicData uri="http://schemas.openxmlformats.org/drawingml/2006/table">
@@ -4430,9 +4430,9 @@
                 <a:tableStyleId>{5C22544A-7EE6-4342-B048-85BDC9FD1C3A}</a:tableStyleId>
               </a:tblPr>
               <a:tblGrid>
-                <a:gridCol w="3159202"/>
-                <a:gridCol w="1098853"/>
-                <a:gridCol w="1136903"/>
+                <a:gridCol w="2873402"/>
+                <a:gridCol w="1407380"/>
+                <a:gridCol w="1114176"/>
               </a:tblGrid>
               <a:tr h="262890">
                 <a:tc>
@@ -4537,7 +4537,7 @@
                           </a:solidFill>
                           <a:latin typeface="Arial"/>
                         </a:rPr>
-                        <a:t>0.13 / 0.30</a:t>
+                        <a:t>0.047 / 0.138</a:t>
                       </a:r>
                     </a:p>
                   </a:txBody>
@@ -4559,7 +4559,7 @@
                           </a:solidFill>
                           <a:latin typeface="Arial"/>
                         </a:rPr>
-                        <a:t>0.45 / 0.85</a:t>
+                        <a:t>0.62 / 1.19</a:t>
                       </a:r>
                     </a:p>
                   </a:txBody>
@@ -4605,7 +4605,7 @@
                           </a:solidFill>
                           <a:latin typeface="Arial"/>
                         </a:rPr>
-                        <a:t>0.023 / 0.060</a:t>
+                        <a:t>0.066 / 0.133</a:t>
                       </a:r>
                     </a:p>
                   </a:txBody>
@@ -4627,7 +4627,7 @@
                           </a:solidFill>
                           <a:latin typeface="Arial"/>
                         </a:rPr>
-                        <a:t>0.032 / 0.093</a:t>
+                        <a:t>0.051 / 0.143</a:t>
                       </a:r>
                     </a:p>
                   </a:txBody>
@@ -4638,7 +4638,7 @@
                   </a:tcPr>
                 </a:tc>
               </a:tr>
-              <a:tr h="262890">
+              <a:tr h="434340">
                 <a:tc>
                   <a:txBody>
                     <a:bodyPr wrap="square"/>
@@ -4651,7 +4651,7 @@
                           </a:solidFill>
                           <a:latin typeface="Arial"/>
                         </a:rPr>
-                        <a:t>image surface: defocus / tilt (mm of sag)</a:t>
+                        <a:t>image surface: defocus / astig / tilt (mm of sag)</a:t>
                       </a:r>
                     </a:p>
                   </a:txBody>
@@ -4673,7 +4673,7 @@
                           </a:solidFill>
                           <a:latin typeface="Arial"/>
                         </a:rPr>
-                        <a:t>3.8 / 0.0</a:t>
+                        <a:t>-0.0005 / -0.095 / 0.002</a:t>
                       </a:r>
                     </a:p>
                   </a:txBody>
@@ -4695,7 +4695,7 @@
                           </a:solidFill>
                           <a:latin typeface="Arial"/>
                         </a:rPr>
-                        <a:t>-0.5 / 0.45</a:t>
+                        <a:t>-0.45 / 0.14 / 0.42</a:t>
                       </a:r>
                     </a:p>
                   </a:txBody>
@@ -4706,7 +4706,7 @@
                   </a:tcPr>
                 </a:tc>
               </a:tr>
-              <a:tr h="262890">
+              <a:tr h="434340">
                 <a:tc>
                   <a:txBody>
                     <a:bodyPr wrap="square"/>
@@ -4741,7 +4741,7 @@
                           </a:solidFill>
                           <a:latin typeface="Arial"/>
                         </a:rPr>
-                        <a:t>0.16 / 0.16 λF/D</a:t>
+                        <a:t>0.06 / 0.09 λF/D</a:t>
                       </a:r>
                     </a:p>
                   </a:txBody>
@@ -4763,7 +4763,7 @@
                           </a:solidFill>
                           <a:latin typeface="Arial"/>
                         </a:rPr>
-                        <a:t>0.00 / 2.3 λF/D</a:t>
+                        <a:t>0.03 / 2.2 λF/D</a:t>
                       </a:r>
                     </a:p>
                   </a:txBody>
@@ -4786,7 +4786,7 @@
         </p:nvSpPr>
         <p:spPr>
           <a:xfrm>
-            <a:off x="6400800" y="2759202"/>
+            <a:off x="6400800" y="3102102"/>
             <a:ext cx="5394960" cy="274320"/>
           </a:xfrm>
           <a:prstGeom prst="rect">
@@ -4812,7 +4812,7 @@
                 </a:solidFill>
                 <a:latin typeface="Arial"/>
               </a:rPr>
-              <a:t>•  Method: the DM declared the stop; the field a tilt about it (a spatial frequency on its surface); two traces a small field step apart cross at each zone's image at the camera; scored in DM millimeters against the 1 mm pitch and the 0.4 mm pixel.</a:t>
+              <a:t>•  Method: the DM declared the stop, the field a tilt about it; two traces a small field step apart cross at each zone's image at the camera; scored in DM mm against the 1 mm pitch.</a:t>
             </a:r>
           </a:p>
           <a:p>
@@ -4828,7 +4828,23 @@
                 </a:solidFill>
                 <a:latin typeface="Arial"/>
               </a:rPr>
-              <a:t>•  The mirror rig's focus is perfect on axis and coma-limited off it (2.3 λF/D at the actuator-band tilt); not a pupil-image or mask-sensor cost, a number to know for any off-axis reading at the seat.</a:t>
+              <a:t>•  What package A did here: the lens rig's image went flat (0.5 µm of defocus against 3.8 mm) and its distortion fell 2.8×; the mirror rig's went the other way (edge 0.85 → 1.19 mm), the OAP pair's mapping, and why the distortion gate was withdrawn.</a:t>
+            </a:r>
+          </a:p>
+          <a:p>
+            <a:pPr>
+              <a:spcAft>
+                <a:spcPts val="600"/>
+              </a:spcAft>
+            </a:pPr>
+            <a:r>
+              <a:rPr sz="1400" b="0">
+                <a:solidFill>
+                  <a:srgbClr val="282828"/>
+                </a:solidFill>
+                <a:latin typeface="Arial"/>
+              </a:rPr>
+              <a:t>•  The mirror rig's focus is perfect on axis and coma-limited off it (2.2 λF/D at the actuator-band tilt); not a pupil-image cost, a number to know for any off-axis reading at the seat.</a:t>
             </a:r>
           </a:p>
         </p:txBody>
@@ -4841,7 +4857,7 @@
         </p:nvSpPr>
         <p:spPr>
           <a:xfrm>
-            <a:off x="6400800" y="5184648"/>
+            <a:off x="6400800" y="6332982"/>
             <a:ext cx="5394960" cy="274320"/>
           </a:xfrm>
           <a:prstGeom prst="rect">
@@ -4867,7 +4883,7 @@
                 </a:solidFill>
                 <a:latin typeface="Arial"/>
               </a:rPr>
-              <a:t>Run tags pupilq_lens, pupilq_oap (tg96_pupilq, model 512); tg_psi_dm96_oap/REPORT_bench_realism.md section 6.  Requested by Fang Shi.</a:t>
+              <a:t>Run tags pupilq96_lens, pupilq96_oap (tg96_pupilq, model 512, on the emitted redo decks, 2026-09-18); tg_psi_dm96_oap/REPORT_bench_realism.md section 6.  Requested by Fang Shi.  λF/D = 2.83 µm on the 96 mm beam.  Blur grew on both rigs against the record because the beam now fills the DM: it lit 77 / 82 mm of 96, leaving the edge zones, where the walk is largest, out of that average.</a:t>
             </a:r>
           </a:p>
         </p:txBody>
@@ -5183,7 +5199,7 @@
                 </a:solidFill>
                 <a:latin typeface="Arial"/>
               </a:rPr>
-              <a:t>The leg's point-spread function, zone by zone from the rays, applied to the DM's field and read out as the interferometer reads: every mode is observable; the lens rig's camera is not at the pupil image, and 4 mm fixes it</a:t>
+              <a:t>The leg's point-spread function, zone by zone from the rays, applied to the DM's field and read out as the interferometer reads: every mode is observable, and on the redo bench the camera sits AT the pupil image on both rigs — the detector move the record needed is gone</a:t>
             </a:r>
           </a:p>
         </p:txBody>
@@ -5234,7 +5250,7 @@
       </p:sp>
       <p:pic>
         <p:nvPicPr>
-          <p:cNvPr id="4" name="Picture 3" descr="pupilsim_lens_gain.png"/>
+          <p:cNvPr id="4" name="Picture 3" descr="pupilsim_redo_lens_gain.png"/>
           <p:cNvPicPr>
             <a:picLocks noChangeAspect="1"/>
           </p:cNvPicPr>
@@ -5306,7 +5322,7 @@
         </p:nvGraphicFramePr>
         <p:xfrm>
           <a:off x="7086600" y="1298448"/>
-          <a:ext cx="4709159" cy="1223010"/>
+          <a:ext cx="4709159" cy="1394460"/>
         </p:xfrm>
         <a:graphic>
           <a:graphicData uri="http://schemas.openxmlformats.org/drawingml/2006/table">
@@ -5315,11 +5331,11 @@
                 <a:tableStyleId>{5C22544A-7EE6-4342-B048-85BDC9FD1C3A}</a:tableStyleId>
               </a:tblPr>
               <a:tblGrid>
-                <a:gridCol w="2045023"/>
+                <a:gridCol w="2147731"/>
                 <a:gridCol w="542544"/>
-                <a:gridCol w="476504"/>
-                <a:gridCol w="476504"/>
-                <a:gridCol w="1168584"/>
+                <a:gridCol w="542544"/>
+                <a:gridCol w="542544"/>
+                <a:gridCol w="933796"/>
               </a:tblGrid>
               <a:tr h="434340">
                 <a:tc>
@@ -5446,7 +5462,7 @@
                           </a:solidFill>
                           <a:latin typeface="Arial"/>
                         </a:rPr>
-                        <a:t>lens rig, camera as built</a:t>
+                        <a:t>lens rig, redo bench</a:t>
                       </a:r>
                     </a:p>
                   </a:txBody>
@@ -5468,7 +5484,7 @@
                           </a:solidFill>
                           <a:latin typeface="Arial"/>
                         </a:rPr>
-                        <a:t>0.990</a:t>
+                        <a:t>1.0000</a:t>
                       </a:r>
                     </a:p>
                   </a:txBody>
@@ -5490,7 +5506,7 @@
                           </a:solidFill>
                           <a:latin typeface="Arial"/>
                         </a:rPr>
-                        <a:t>0.973</a:t>
+                        <a:t>1.0000</a:t>
                       </a:r>
                     </a:p>
                   </a:txBody>
@@ -5512,7 +5528,7 @@
                           </a:solidFill>
                           <a:latin typeface="Arial"/>
                         </a:rPr>
-                        <a:t>0.954</a:t>
+                        <a:t>1.0000</a:t>
                       </a:r>
                     </a:p>
                   </a:txBody>
@@ -5534,7 +5550,7 @@
                           </a:solidFill>
                           <a:latin typeface="Arial"/>
                         </a:rPr>
-                        <a:t>1.2 nm</a:t>
+                        <a:t>42 pm</a:t>
                       </a:r>
                     </a:p>
                   </a:txBody>
@@ -5558,7 +5574,7 @@
                           </a:solidFill>
                           <a:latin typeface="Arial"/>
                         </a:rPr>
-                        <a:t>lens rig, camera +4.3 mm</a:t>
+                        <a:t>mirror rig, redo bench</a:t>
                       </a:r>
                     </a:p>
                   </a:txBody>
@@ -5580,7 +5596,7 @@
                           </a:solidFill>
                           <a:latin typeface="Arial"/>
                         </a:rPr>
-                        <a:t>0.997</a:t>
+                        <a:t>0.9994</a:t>
                       </a:r>
                     </a:p>
                   </a:txBody>
@@ -5602,7 +5618,7 @@
                           </a:solidFill>
                           <a:latin typeface="Arial"/>
                         </a:rPr>
-                        <a:t>0.998</a:t>
+                        <a:t>0.9994</a:t>
                       </a:r>
                     </a:p>
                   </a:txBody>
@@ -5624,7 +5640,7 @@
                           </a:solidFill>
                           <a:latin typeface="Arial"/>
                         </a:rPr>
-                        <a:t>0.993</a:t>
+                        <a:t>0.9994</a:t>
                       </a:r>
                     </a:p>
                   </a:txBody>
@@ -5646,7 +5662,7 @@
                           </a:solidFill>
                           <a:latin typeface="Arial"/>
                         </a:rPr>
-                        <a:t>0.4 nm</a:t>
+                        <a:t>92 pm</a:t>
                       </a:r>
                     </a:p>
                   </a:txBody>
@@ -5657,7 +5673,7 @@
                   </a:tcPr>
                 </a:tc>
               </a:tr>
-              <a:tr h="262890">
+              <a:tr h="434340">
                 <a:tc>
                   <a:txBody>
                     <a:bodyPr wrap="square"/>
@@ -5670,7 +5686,7 @@
                           </a:solidFill>
                           <a:latin typeface="Arial"/>
                         </a:rPr>
-                        <a:t>mirror rig, as built</a:t>
+                        <a:t>lens rig, the record's tuned tail (superseded)</a:t>
                       </a:r>
                     </a:p>
                   </a:txBody>
@@ -5692,7 +5708,7 @@
                           </a:solidFill>
                           <a:latin typeface="Arial"/>
                         </a:rPr>
-                        <a:t>1.000</a:t>
+                        <a:t>0.990</a:t>
                       </a:r>
                     </a:p>
                   </a:txBody>
@@ -5714,7 +5730,7 @@
                           </a:solidFill>
                           <a:latin typeface="Arial"/>
                         </a:rPr>
-                        <a:t>0.999</a:t>
+                        <a:t>0.973</a:t>
                       </a:r>
                     </a:p>
                   </a:txBody>
@@ -5736,7 +5752,7 @@
                           </a:solidFill>
                           <a:latin typeface="Arial"/>
                         </a:rPr>
-                        <a:t>0.997</a:t>
+                        <a:t>0.954</a:t>
                       </a:r>
                     </a:p>
                   </a:txBody>
@@ -5758,7 +5774,7 @@
                           </a:solidFill>
                           <a:latin typeface="Arial"/>
                         </a:rPr>
-                        <a:t>0.2 nm</a:t>
+                        <a:t>1.2 nm</a:t>
                       </a:r>
                     </a:p>
                   </a:txBody>
@@ -5823,7 +5839,7 @@
                 </a:solidFill>
                 <a:latin typeface="Arial"/>
               </a:rPr>
-              <a:t>•  The image is a bowl the camera sits ahead of on the lens rig: 2.6 mm on axis, 6 mm at the edge (the tail was tuned on the flat-mirror null, which cannot see pupil defocus).  The mirror rig's thin-lens seat is within 1.3 mm of its image.</a:t>
+              <a:t>•  The bowl is gone.  On the record's tuned tail the image was a surface the camera sat 2.6 mm ahead of on axis and 6 at the edge, because that tail was tuned on the flat-mirror null, which cannot see pupil defocus.  On the redo bench the best detector move is −0.00 mm: there is nothing left to correct, and the band-edge phase is 0.000 rad rms on lenses, 0.013 on mirrors.</a:t>
             </a:r>
           </a:p>
           <a:p>
@@ -5852,8 +5868,8 @@
         </p:nvSpPr>
         <p:spPr>
           <a:xfrm>
-            <a:off x="7086600" y="5330952"/>
-            <a:ext cx="4709160" cy="274320"/>
+            <a:off x="6400800" y="5611622"/>
+            <a:ext cx="5394960" cy="274320"/>
           </a:xfrm>
           <a:prstGeom prst="rect">
             <a:avLst/>
@@ -5878,7 +5894,7 @@
                 </a:solidFill>
                 <a:latin typeface="Arial"/>
               </a:rPr>
-              <a:t>Run tags pupilsim_lens, pupilsim_oap (tg96_pupilsim; run it yourself: tg96_pupil_batch.sh both); REPORT_bench_realism.md section 7.  The engine's own plane-to-plane check through reference surfaces is built and needs the station-to-station form (in progress).</a:t>
+              <a:t>Run tags pupilsim_redo_lens, pupilsim_redo_oap (tg96_pupilsim on the emitted redo decks = package A's gate record, 2026-09-17; run it yourself: tg96_pupil_batch.sh both).  The superseded row is the record's tuned tail, kept so the gain is legible; REPORT_bench_realism.md section 7.  The engine's own plane-to-plane check through reference surfaces is built and needs the station-to-station form (in progress).</a:t>
             </a:r>
           </a:p>
         </p:txBody>
@@ -17879,8 +17895,8 @@
         </p:blipFill>
         <p:spPr>
           <a:xfrm>
-            <a:off x="2012287" y="1298448"/>
-            <a:ext cx="2604825" cy="2384552"/>
+            <a:off x="1143000" y="1554480"/>
+            <a:ext cx="4343400" cy="3931920"/>
           </a:xfrm>
           <a:prstGeom prst="rect">
             <a:avLst/>
@@ -17895,8 +17911,8 @@
         </p:nvSpPr>
         <p:spPr>
           <a:xfrm>
-            <a:off x="411480" y="3701287"/>
-            <a:ext cx="5806440" cy="724408"/>
+            <a:off x="411480" y="5696712"/>
+            <a:ext cx="4343400" cy="1054608"/>
           </a:xfrm>
           <a:prstGeom prst="rect">
             <a:avLst/>

--- a/demo_session/deck_gauges_edit.pptx
+++ b/demo_session/deck_gauges_edit.pptx
@@ -4806,7 +4806,23 @@
               </a:spcAft>
             </a:pPr>
             <a:r>
-              <a:rPr sz="1400" b="0">
+              <a:rPr sz="1200" b="0">
+                <a:solidFill>
+                  <a:srgbClr val="282828"/>
+                </a:solidFill>
+                <a:latin typeface="Arial"/>
+              </a:rPr>
+              <a:t>•  The imaging supports picometer measurement on both rigs: carried through to a reading, it costs 42 pm (lenses) and 92 pm (mirrors) on a 30 nm working surface — 0.1 % and 0.3 % of the figure — rising to 0.5 % and 0.9 % in the top spatial band.  It holds because the response matrix is MEASURED: the mirror rig's image is distorted by more than an actuator pitch at the edge, which a geometric mapping would carry straight into the surface.</a:t>
+            </a:r>
+          </a:p>
+          <a:p>
+            <a:pPr>
+              <a:spcAft>
+                <a:spcPts val="600"/>
+              </a:spcAft>
+            </a:pPr>
+            <a:r>
+              <a:rPr sz="1200" b="0">
                 <a:solidFill>
                   <a:srgbClr val="282828"/>
                 </a:solidFill>
@@ -4822,7 +4838,7 @@
               </a:spcAft>
             </a:pPr>
             <a:r>
-              <a:rPr sz="1400" b="0">
+              <a:rPr sz="1200" b="0">
                 <a:solidFill>
                   <a:srgbClr val="282828"/>
                 </a:solidFill>
@@ -4838,7 +4854,7 @@
               </a:spcAft>
             </a:pPr>
             <a:r>
-              <a:rPr sz="1400" b="0">
+              <a:rPr sz="1200" b="0">
                 <a:solidFill>
                   <a:srgbClr val="282828"/>
                 </a:solidFill>
@@ -4857,7 +4873,7 @@
         </p:nvSpPr>
         <p:spPr>
           <a:xfrm>
-            <a:off x="6400800" y="6332982"/>
+            <a:off x="6400800" y="5715000"/>
             <a:ext cx="5394960" cy="274320"/>
           </a:xfrm>
           <a:prstGeom prst="rect">
@@ -5868,8 +5884,8 @@
         </p:nvSpPr>
         <p:spPr>
           <a:xfrm>
-            <a:off x="6400800" y="5611622"/>
-            <a:ext cx="5394960" cy="274320"/>
+            <a:off x="7315200" y="5614416"/>
+            <a:ext cx="4480560" cy="274320"/>
           </a:xfrm>
           <a:prstGeom prst="rect">
             <a:avLst/>
@@ -21317,7 +21333,7 @@
                 </a:solidFill>
                 <a:latin typeface="Arial"/>
               </a:rPr>
-              <a:t>The complex amplitude, for two-mirror control</a:t>
+              <a:t>Measuring the full complex amplitude, for two-mirror control</a:t>
             </a:r>
           </a:p>
           <a:p>
@@ -23195,7 +23211,7 @@
         </p:nvSpPr>
         <p:spPr>
           <a:xfrm>
-            <a:off x="411480" y="6505956"/>
+            <a:off x="411480" y="6364224"/>
             <a:ext cx="11368735" cy="274320"/>
           </a:xfrm>
           <a:prstGeom prst="rect">
@@ -29863,7 +29879,7 @@
         </p:nvSpPr>
         <p:spPr>
           <a:xfrm>
-            <a:off x="411480" y="6511671"/>
+            <a:off x="411480" y="6400800"/>
             <a:ext cx="11368735" cy="274320"/>
           </a:xfrm>
           <a:prstGeom prst="rect">
@@ -34586,7 +34602,7 @@
         </p:nvSpPr>
         <p:spPr>
           <a:xfrm>
-            <a:off x="411480" y="1298448"/>
+            <a:off x="393192" y="1133856"/>
             <a:ext cx="11368735" cy="274320"/>
           </a:xfrm>
           <a:prstGeom prst="rect">
@@ -34689,7 +34705,7 @@
         </p:nvSpPr>
         <p:spPr>
           <a:xfrm>
-            <a:off x="411480" y="7236714"/>
+            <a:off x="411480" y="6400800"/>
             <a:ext cx="11368735" cy="274320"/>
           </a:xfrm>
           <a:prstGeom prst="rect">
@@ -38763,7 +38779,7 @@
         </p:nvSpPr>
         <p:spPr>
           <a:xfrm>
-            <a:off x="411480" y="6422517"/>
+            <a:off x="292608" y="5742432"/>
             <a:ext cx="11368735" cy="274320"/>
           </a:xfrm>
           <a:prstGeom prst="rect">

--- a/demo_session/deck_gauges_edit.pptx
+++ b/demo_session/deck_gauges_edit.pptx
@@ -62,6 +62,8 @@
     <p:sldId id="310" r:id="rId61"/>
     <p:sldId id="311" r:id="rId62"/>
     <p:sldId id="312" r:id="rId63"/>
+    <p:sldId id="313" r:id="rId64"/>
+    <p:sldId id="314" r:id="rId65"/>
   </p:sldIdLst>
   <p:sldSz cx="12191695" cy="6858000" type="screen4x3"/>
   <p:notesSz cx="6858000" cy="9144000"/>
@@ -34552,7 +34554,7 @@
                 </a:solidFill>
                 <a:latin typeface="Arial"/>
               </a:rPr>
-              <a:t>Backup: the path per configuration</a:t>
+              <a:t>Backup: what the Zernike-sensor literature offers, in priority order</a:t>
             </a:r>
           </a:p>
           <a:p>
@@ -34568,7 +34570,7 @@
                 </a:solidFill>
                 <a:latin typeface="Arial"/>
               </a:rPr>
-              <a:t>The runner stages and knobs each approach went through, in the order they ran</a:t>
+              <a:t>Twelve papers read; the first import — re-computing the reference wave — is built and measured here (the S and V readings)</a:t>
             </a:r>
           </a:p>
         </p:txBody>
@@ -34627,6 +34629,1324 @@
         </p:nvGraphicFramePr>
         <p:xfrm>
           <a:off x="411480" y="1298448"/>
+          <a:ext cx="11368734" cy="3091815"/>
+        </p:xfrm>
+        <a:graphic>
+          <a:graphicData uri="http://schemas.openxmlformats.org/drawingml/2006/table">
+            <a:tbl>
+              <a:tblPr firstRow="1" bandRow="1">
+                <a:tableStyleId>{5C22544A-7EE6-4342-B048-85BDC9FD1C3A}</a:tableStyleId>
+              </a:tblPr>
+              <a:tblGrid>
+                <a:gridCol w="218948"/>
+                <a:gridCol w="2691327"/>
+                <a:gridCol w="8458459"/>
+              </a:tblGrid>
+              <a:tr h="280035">
+                <a:tc>
+                  <a:txBody>
+                    <a:bodyPr wrap="square"/>
+                    <a:lstStyle/>
+                    <a:p>
+                      <a:r>
+                        <a:rPr sz="1100" b="1">
+                          <a:solidFill>
+                            <a:srgbClr val="FFFFFF"/>
+                          </a:solidFill>
+                          <a:latin typeface="Arial"/>
+                        </a:rPr>
+                        <a:t>#</a:t>
+                      </a:r>
+                    </a:p>
+                  </a:txBody>
+                  <a:tcPr marL="54864" marR="54864" marT="18288" marB="18288">
+                    <a:solidFill>
+                      <a:srgbClr val="1F4E79"/>
+                    </a:solidFill>
+                  </a:tcPr>
+                </a:tc>
+                <a:tc>
+                  <a:txBody>
+                    <a:bodyPr wrap="square"/>
+                    <a:lstStyle/>
+                    <a:p>
+                      <a:r>
+                        <a:rPr sz="1100" b="1">
+                          <a:solidFill>
+                            <a:srgbClr val="FFFFFF"/>
+                          </a:solidFill>
+                          <a:latin typeface="Arial"/>
+                        </a:rPr>
+                        <a:t>paper</a:t>
+                      </a:r>
+                    </a:p>
+                  </a:txBody>
+                  <a:tcPr marL="54864" marR="54864" marT="18288" marB="18288">
+                    <a:solidFill>
+                      <a:srgbClr val="1F4E79"/>
+                    </a:solidFill>
+                  </a:tcPr>
+                </a:tc>
+                <a:tc>
+                  <a:txBody>
+                    <a:bodyPr wrap="square"/>
+                    <a:lstStyle/>
+                    <a:p>
+                      <a:r>
+                        <a:rPr sz="1100" b="1">
+                          <a:solidFill>
+                            <a:srgbClr val="FFFFFF"/>
+                          </a:solidFill>
+                          <a:latin typeface="Arial"/>
+                        </a:rPr>
+                        <a:t>what it gives this model</a:t>
+                      </a:r>
+                    </a:p>
+                  </a:txBody>
+                  <a:tcPr marL="54864" marR="54864" marT="18288" marB="18288">
+                    <a:solidFill>
+                      <a:srgbClr val="1F4E79"/>
+                    </a:solidFill>
+                  </a:tcPr>
+                </a:tc>
+              </a:tr>
+              <a:tr h="468630">
+                <a:tc>
+                  <a:txBody>
+                    <a:bodyPr wrap="square"/>
+                    <a:lstStyle/>
+                    <a:p>
+                      <a:r>
+                        <a:rPr sz="1100" b="0">
+                          <a:solidFill>
+                            <a:srgbClr val="282828"/>
+                          </a:solidFill>
+                          <a:latin typeface="Arial"/>
+                        </a:rPr>
+                        <a:t>1</a:t>
+                      </a:r>
+                    </a:p>
+                  </a:txBody>
+                  <a:tcPr marL="54864" marR="54864" marT="18288" marB="18288">
+                    <a:solidFill>
+                      <a:srgbClr val="FFFFFF"/>
+                    </a:solidFill>
+                  </a:tcPr>
+                </a:tc>
+                <a:tc>
+                  <a:txBody>
+                    <a:bodyPr wrap="square"/>
+                    <a:lstStyle/>
+                    <a:p>
+                      <a:r>
+                        <a:rPr sz="1100" b="0">
+                          <a:solidFill>
+                            <a:srgbClr val="282828"/>
+                          </a:solidFill>
+                          <a:latin typeface="Arial"/>
+                        </a:rPr>
+                        <a:t>Ruane, Wallace, Steeves et al. 2020, JATIS 6, 045005</a:t>
+                      </a:r>
+                    </a:p>
+                  </a:txBody>
+                  <a:tcPr marL="54864" marR="54864" marT="18288" marB="18288">
+                    <a:solidFill>
+                      <a:srgbClr val="FFFFFF"/>
+                    </a:solidFill>
+                  </a:tcPr>
+                </a:tc>
+                <a:tc>
+                  <a:txBody>
+                    <a:bodyPr wrap="square"/>
+                    <a:lstStyle/>
+                    <a:p>
+                      <a:r>
+                        <a:rPr sz="1100" b="0">
+                          <a:solidFill>
+                            <a:srgbClr val="282828"/>
+                          </a:solidFill>
+                          <a:latin typeface="Arial"/>
+                        </a:rPr>
+                        <a:t>Exact per-pixel reconstruction from the pupil amplitude, the reference wave b and the masked image; a sensitivity factor per pixel; a four-term systematic budget; 1 pm reached at 4.4×10⁵ frames; no loss to 25 % bandwidth</a:t>
+                      </a:r>
+                    </a:p>
+                  </a:txBody>
+                  <a:tcPr marL="54864" marR="54864" marT="18288" marB="18288">
+                    <a:solidFill>
+                      <a:srgbClr val="FFFFFF"/>
+                    </a:solidFill>
+                  </a:tcPr>
+                </a:tc>
+              </a:tr>
+              <a:tr h="468630">
+                <a:tc>
+                  <a:txBody>
+                    <a:bodyPr wrap="square"/>
+                    <a:lstStyle/>
+                    <a:p>
+                      <a:r>
+                        <a:rPr sz="1100" b="0">
+                          <a:solidFill>
+                            <a:srgbClr val="282828"/>
+                          </a:solidFill>
+                          <a:latin typeface="Arial"/>
+                        </a:rPr>
+                        <a:t>2</a:t>
+                      </a:r>
+                    </a:p>
+                  </a:txBody>
+                  <a:tcPr marL="54864" marR="54864" marT="18288" marB="18288">
+                    <a:solidFill>
+                      <a:srgbClr val="ECF1F6"/>
+                    </a:solidFill>
+                  </a:tcPr>
+                </a:tc>
+                <a:tc>
+                  <a:txBody>
+                    <a:bodyPr wrap="square"/>
+                    <a:lstStyle/>
+                    <a:p>
+                      <a:r>
+                        <a:rPr sz="1100" b="0">
+                          <a:solidFill>
+                            <a:srgbClr val="282828"/>
+                          </a:solidFill>
+                          <a:latin typeface="Arial"/>
+                        </a:rPr>
+                        <a:t>Doelman, Fagginger Auer, Escuti, Snik 2019, Opt. Lett. 44, 17</a:t>
+                      </a:r>
+                    </a:p>
+                  </a:txBody>
+                  <a:tcPr marL="54864" marR="54864" marT="18288" marB="18288">
+                    <a:solidFill>
+                      <a:srgbClr val="ECF1F6"/>
+                    </a:solidFill>
+                  </a:tcPr>
+                </a:tc>
+                <a:tc>
+                  <a:txBody>
+                    <a:bodyPr wrap="square"/>
+                    <a:lstStyle/>
+                    <a:p>
+                      <a:r>
+                        <a:rPr sz="1100" b="0">
+                          <a:solidFill>
+                            <a:srgbClr val="282828"/>
+                          </a:solidFill>
+                          <a:latin typeface="Arial"/>
+                        </a:rPr>
+                        <a:t>Vector Zernike: ±π/2 on opposite circular polarizations gives two pupil images, an exact phase-and-amplitude solution, an iterated b, achromatic to 100 % bandwidth; the leakage terms are written down</a:t>
+                      </a:r>
+                    </a:p>
+                  </a:txBody>
+                  <a:tcPr marL="54864" marR="54864" marT="18288" marB="18288">
+                    <a:solidFill>
+                      <a:srgbClr val="ECF1F6"/>
+                    </a:solidFill>
+                  </a:tcPr>
+                </a:tc>
+              </a:tr>
+              <a:tr h="468630">
+                <a:tc>
+                  <a:txBody>
+                    <a:bodyPr wrap="square"/>
+                    <a:lstStyle/>
+                    <a:p>
+                      <a:r>
+                        <a:rPr sz="1100" b="0">
+                          <a:solidFill>
+                            <a:srgbClr val="282828"/>
+                          </a:solidFill>
+                          <a:latin typeface="Arial"/>
+                        </a:rPr>
+                        <a:t>3</a:t>
+                      </a:r>
+                    </a:p>
+                  </a:txBody>
+                  <a:tcPr marL="54864" marR="54864" marT="18288" marB="18288">
+                    <a:solidFill>
+                      <a:srgbClr val="FFFFFF"/>
+                    </a:solidFill>
+                  </a:tcPr>
+                </a:tc>
+                <a:tc>
+                  <a:txBody>
+                    <a:bodyPr wrap="square"/>
+                    <a:lstStyle/>
+                    <a:p>
+                      <a:r>
+                        <a:rPr sz="1100" b="0">
+                          <a:solidFill>
+                            <a:srgbClr val="282828"/>
+                          </a:solidFill>
+                          <a:latin typeface="Arial"/>
+                        </a:rPr>
+                        <a:t>N'Diaye, Vigan, Dohlen et al. 2016, A&amp;A 592, A79 (ZELDA II)</a:t>
+                      </a:r>
+                    </a:p>
+                  </a:txBody>
+                  <a:tcPr marL="54864" marR="54864" marT="18288" marB="18288">
+                    <a:solidFill>
+                      <a:srgbClr val="FFFFFF"/>
+                    </a:solidFill>
+                  </a:tcPr>
+                </a:tc>
+                <a:tc>
+                  <a:txBody>
+                    <a:bodyPr wrap="square"/>
+                    <a:lstStyle/>
+                    <a:p>
+                      <a:r>
+                        <a:rPr sz="1100" b="0">
+                          <a:solidFill>
+                            <a:srgbClr val="282828"/>
+                          </a:solidFill>
+                          <a:latin typeface="Arial"/>
+                        </a:rPr>
+                        <a:t>Second-order reconstruction with b from the mask model; 1.06 λ/D at π/2; range −0.14 to +0.36 λ; the sensitivity factor drifts 10 % day to day on SPHERE</a:t>
+                      </a:r>
+                    </a:p>
+                  </a:txBody>
+                  <a:tcPr marL="54864" marR="54864" marT="18288" marB="18288">
+                    <a:solidFill>
+                      <a:srgbClr val="FFFFFF"/>
+                    </a:solidFill>
+                  </a:tcPr>
+                </a:tc>
+              </a:tr>
+              <a:tr h="468630">
+                <a:tc>
+                  <a:txBody>
+                    <a:bodyPr wrap="square"/>
+                    <a:lstStyle/>
+                    <a:p>
+                      <a:r>
+                        <a:rPr sz="1100" b="0">
+                          <a:solidFill>
+                            <a:srgbClr val="282828"/>
+                          </a:solidFill>
+                          <a:latin typeface="Arial"/>
+                        </a:rPr>
+                        <a:t>4</a:t>
+                      </a:r>
+                    </a:p>
+                  </a:txBody>
+                  <a:tcPr marL="54864" marR="54864" marT="18288" marB="18288">
+                    <a:solidFill>
+                      <a:srgbClr val="ECF1F6"/>
+                    </a:solidFill>
+                  </a:tcPr>
+                </a:tc>
+                <a:tc>
+                  <a:txBody>
+                    <a:bodyPr wrap="square"/>
+                    <a:lstStyle/>
+                    <a:p>
+                      <a:r>
+                        <a:rPr sz="1100" b="0">
+                          <a:solidFill>
+                            <a:srgbClr val="282828"/>
+                          </a:solidFill>
+                          <a:latin typeface="Arial"/>
+                        </a:rPr>
+                        <a:t>Chambouleyron, Cissé, Salama, Haffert, Wallace et al. 2024, SPIE 13097</a:t>
+                      </a:r>
+                    </a:p>
+                  </a:txBody>
+                  <a:tcPr marL="54864" marR="54864" marT="18288" marB="18288">
+                    <a:solidFill>
+                      <a:srgbClr val="ECF1F6"/>
+                    </a:solidFill>
+                  </a:tcPr>
+                </a:tc>
+                <a:tc>
+                  <a:txBody>
+                    <a:bodyPr wrap="square"/>
+                    <a:lstStyle/>
+                    <a:p>
+                      <a:r>
+                        <a:rPr sz="1100" b="0">
+                          <a:solidFill>
+                            <a:srgbClr val="282828"/>
+                          </a:solidFill>
+                          <a:latin typeface="Arial"/>
+                        </a:rPr>
+                        <a:t>A phase-shifted pair (±π/2) yields cos φ and sin φ; iterative reconstructors reach about 1 rad rms; the bench limits were polarization crosstalk and defocus between the two pupils</a:t>
+                      </a:r>
+                    </a:p>
+                  </a:txBody>
+                  <a:tcPr marL="54864" marR="54864" marT="18288" marB="18288">
+                    <a:solidFill>
+                      <a:srgbClr val="ECF1F6"/>
+                    </a:solidFill>
+                  </a:tcPr>
+                </a:tc>
+              </a:tr>
+              <a:tr h="468630">
+                <a:tc>
+                  <a:txBody>
+                    <a:bodyPr wrap="square"/>
+                    <a:lstStyle/>
+                    <a:p>
+                      <a:r>
+                        <a:rPr sz="1100" b="0">
+                          <a:solidFill>
+                            <a:srgbClr val="282828"/>
+                          </a:solidFill>
+                          <a:latin typeface="Arial"/>
+                        </a:rPr>
+                        <a:t>5</a:t>
+                      </a:r>
+                    </a:p>
+                  </a:txBody>
+                  <a:tcPr marL="54864" marR="54864" marT="18288" marB="18288">
+                    <a:solidFill>
+                      <a:srgbClr val="FFFFFF"/>
+                    </a:solidFill>
+                  </a:tcPr>
+                </a:tc>
+                <a:tc>
+                  <a:txBody>
+                    <a:bodyPr wrap="square"/>
+                    <a:lstStyle/>
+                    <a:p>
+                      <a:r>
+                        <a:rPr sz="1100" b="0">
+                          <a:solidFill>
+                            <a:srgbClr val="282828"/>
+                          </a:solidFill>
+                          <a:latin typeface="Arial"/>
+                        </a:rPr>
+                        <a:t>Haffert 2024, A&amp;A 683, A113</a:t>
+                      </a:r>
+                    </a:p>
+                  </a:txBody>
+                  <a:tcPr marL="54864" marR="54864" marT="18288" marB="18288">
+                    <a:solidFill>
+                      <a:srgbClr val="FFFFFF"/>
+                    </a:solidFill>
+                  </a:tcPr>
+                </a:tc>
+                <a:tc>
+                  <a:txBody>
+                    <a:bodyPr wrap="square"/>
+                    <a:lstStyle/>
+                    <a:p>
+                      <a:r>
+                        <a:rPr sz="1100" b="0">
+                          <a:solidFill>
+                            <a:srgbClr val="282828"/>
+                          </a:solidFill>
+                          <a:latin typeface="Arial"/>
+                        </a:rPr>
+                        <a:t>Iterative nonlinear reconstructors reach machine precision below 0.25 rad rms; phase sorting extends to 0.75 rad; adding wavelengths to 1.4 rad rms</a:t>
+                      </a:r>
+                    </a:p>
+                  </a:txBody>
+                  <a:tcPr marL="54864" marR="54864" marT="18288" marB="18288">
+                    <a:solidFill>
+                      <a:srgbClr val="FFFFFF"/>
+                    </a:solidFill>
+                  </a:tcPr>
+                </a:tc>
+              </a:tr>
+              <a:tr h="468630">
+                <a:tc>
+                  <a:txBody>
+                    <a:bodyPr wrap="square"/>
+                    <a:lstStyle/>
+                    <a:p>
+                      <a:r>
+                        <a:rPr sz="1100" b="0">
+                          <a:solidFill>
+                            <a:srgbClr val="282828"/>
+                          </a:solidFill>
+                          <a:latin typeface="Arial"/>
+                        </a:rPr>
+                        <a:t>6</a:t>
+                      </a:r>
+                    </a:p>
+                  </a:txBody>
+                  <a:tcPr marL="54864" marR="54864" marT="18288" marB="18288">
+                    <a:solidFill>
+                      <a:srgbClr val="ECF1F6"/>
+                    </a:solidFill>
+                  </a:tcPr>
+                </a:tc>
+                <a:tc>
+                  <a:txBody>
+                    <a:bodyPr wrap="square"/>
+                    <a:lstStyle/>
+                    <a:p>
+                      <a:r>
+                        <a:rPr sz="1100" b="0">
+                          <a:solidFill>
+                            <a:srgbClr val="282828"/>
+                          </a:solidFill>
+                          <a:latin typeface="Arial"/>
+                        </a:rPr>
+                        <a:t>Darcis, Haffert, Chambouleyron, Doelman et al. 2025, A&amp;A</a:t>
+                      </a:r>
+                    </a:p>
+                  </a:txBody>
+                  <a:tcPr marL="54864" marR="54864" marT="18288" marB="18288">
+                    <a:solidFill>
+                      <a:srgbClr val="ECF1F6"/>
+                    </a:solidFill>
+                  </a:tcPr>
+                </a:tc>
+                <a:tc>
+                  <a:txBody>
+                    <a:bodyPr wrap="square"/>
+                    <a:lstStyle/>
+                    <a:p>
+                      <a:r>
+                        <a:rPr sz="1100" b="0">
+                          <a:solidFill>
+                            <a:srgbClr val="282828"/>
+                          </a:solidFill>
+                          <a:latin typeface="Arial"/>
+                        </a:rPr>
+                        <a:t>Multi-wavelength gradient descent through the forward model: dynamic range for the scalar sensor, photon robustness across a wider band, two-wavelength unwrapping of petal errors</a:t>
+                      </a:r>
+                    </a:p>
+                  </a:txBody>
+                  <a:tcPr marL="54864" marR="54864" marT="18288" marB="18288">
+                    <a:solidFill>
+                      <a:srgbClr val="ECF1F6"/>
+                    </a:solidFill>
+                  </a:tcPr>
+                </a:tc>
+              </a:tr>
+            </a:tbl>
+          </a:graphicData>
+        </a:graphic>
+      </p:graphicFrame>
+      <p:sp>
+        <p:nvSpPr>
+          <p:cNvPr id="5" name="TextBox 4"/>
+          <p:cNvSpPr txBox="1"/>
+          <p:nvPr/>
+        </p:nvSpPr>
+        <p:spPr>
+          <a:xfrm>
+            <a:off x="411480" y="4536567"/>
+            <a:ext cx="11368735" cy="274320"/>
+          </a:xfrm>
+          <a:prstGeom prst="rect">
+            <a:avLst/>
+          </a:prstGeom>
+          <a:noFill/>
+        </p:spPr>
+        <p:txBody>
+          <a:bodyPr wrap="square">
+            <a:spAutoFit/>
+          </a:bodyPr>
+          <a:lstStyle/>
+          <a:p>
+            <a:pPr>
+              <a:spcAft>
+                <a:spcPts val="600"/>
+              </a:spcAft>
+            </a:pPr>
+            <a:r>
+              <a:rPr sz="1050" b="0">
+                <a:solidFill>
+                  <a:srgbClr val="6E6E6E"/>
+                </a:solidFill>
+                <a:latin typeface="Arial"/>
+              </a:rPr>
+              <a:t>Priority = payoff against this campaign's measured weak results.  Synopses and links: macos/REPORT_zwfs_lit_scan.md.</a:t>
+            </a:r>
+          </a:p>
+        </p:txBody>
+      </p:sp>
+    </p:spTree>
+  </p:cSld>
+  <p:clrMapOvr>
+    <a:masterClrMapping/>
+  </p:clrMapOvr>
+</p:sld>
+</file>
+
+<file path=ppt/slides/slide57.xml><?xml version="1.0" encoding="utf-8"?>
+<p:sld xmlns:a="http://schemas.openxmlformats.org/drawingml/2006/main" xmlns:p="http://schemas.openxmlformats.org/presentationml/2006/main" xmlns:r="http://schemas.openxmlformats.org/officeDocument/2006/relationships">
+  <p:cSld>
+    <p:spTree>
+      <p:nvGrpSpPr>
+        <p:cNvPr id="1" name=""/>
+        <p:cNvGrpSpPr/>
+        <p:nvPr/>
+      </p:nvGrpSpPr>
+      <p:grpSpPr/>
+      <p:sp>
+        <p:nvSpPr>
+          <p:cNvPr id="2" name="TextBox 1"/>
+          <p:cNvSpPr txBox="1"/>
+          <p:nvPr/>
+        </p:nvSpPr>
+        <p:spPr>
+          <a:xfrm>
+            <a:off x="411480" y="201168"/>
+            <a:ext cx="11368735" cy="914400"/>
+          </a:xfrm>
+          <a:prstGeom prst="rect">
+            <a:avLst/>
+          </a:prstGeom>
+          <a:noFill/>
+        </p:spPr>
+        <p:txBody>
+          <a:bodyPr wrap="square">
+            <a:spAutoFit/>
+          </a:bodyPr>
+          <a:lstStyle/>
+          <a:p>
+            <a:pPr>
+              <a:spcAft>
+                <a:spcPts val="400"/>
+              </a:spcAft>
+            </a:pPr>
+            <a:r>
+              <a:rPr sz="2400" b="1">
+                <a:solidFill>
+                  <a:srgbClr val="1F4E79"/>
+                </a:solidFill>
+                <a:latin typeface="Arial"/>
+              </a:rPr>
+              <a:t>Backup: demonstrations, segmented mirrors, and the in-house precedent</a:t>
+            </a:r>
+          </a:p>
+          <a:p>
+            <a:pPr>
+              <a:spcAft>
+                <a:spcPts val="0"/>
+              </a:spcAft>
+            </a:pPr>
+            <a:r>
+              <a:rPr sz="1250" b="0">
+                <a:solidFill>
+                  <a:srgbClr val="6E6E6E"/>
+                </a:solidFill>
+                <a:latin typeface="Arial"/>
+              </a:rPr>
+              <a:t>Picometers by alternating DM shapes and averaging; segment piston by model iteration, underestimated below 50 % Strehl</a:t>
+            </a:r>
+          </a:p>
+        </p:txBody>
+      </p:sp>
+      <p:sp>
+        <p:nvSpPr>
+          <p:cNvPr id="3" name="Rectangle 2"/>
+          <p:cNvSpPr/>
+          <p:nvPr/>
+        </p:nvSpPr>
+        <p:spPr>
+          <a:xfrm>
+            <a:off x="411480" y="1133856"/>
+            <a:ext cx="11368735" cy="20320"/>
+          </a:xfrm>
+          <a:prstGeom prst="rect">
+            <a:avLst/>
+          </a:prstGeom>
+          <a:solidFill>
+            <a:srgbClr val="B8C6D4"/>
+          </a:solidFill>
+          <a:ln>
+            <a:noFill/>
+          </a:ln>
+          <a:effectLst/>
+        </p:spPr>
+        <p:style>
+          <a:lnRef idx="1">
+            <a:schemeClr val="accent1"/>
+          </a:lnRef>
+          <a:fillRef idx="3">
+            <a:schemeClr val="accent1"/>
+          </a:fillRef>
+          <a:effectRef idx="2">
+            <a:schemeClr val="accent1"/>
+          </a:effectRef>
+          <a:fontRef idx="minor">
+            <a:schemeClr val="lt1"/>
+          </a:fontRef>
+        </p:style>
+        <p:txBody>
+          <a:bodyPr rtlCol="0" anchor="ctr"/>
+          <a:lstStyle/>
+          <a:p>
+            <a:pPr algn="ctr"/>
+          </a:p>
+        </p:txBody>
+      </p:sp>
+      <p:graphicFrame>
+        <p:nvGraphicFramePr>
+          <p:cNvPr id="4" name="Table 3"/>
+          <p:cNvGraphicFramePr>
+            <a:graphicFrameLocks noGrp="1"/>
+          </p:cNvGraphicFramePr>
+          <p:nvPr/>
+        </p:nvGraphicFramePr>
+        <p:xfrm>
+          <a:off x="411480" y="1298448"/>
+          <a:ext cx="11368734" cy="3091815"/>
+        </p:xfrm>
+        <a:graphic>
+          <a:graphicData uri="http://schemas.openxmlformats.org/drawingml/2006/table">
+            <a:tbl>
+              <a:tblPr firstRow="1" bandRow="1">
+                <a:tableStyleId>{5C22544A-7EE6-4342-B048-85BDC9FD1C3A}</a:tableStyleId>
+              </a:tblPr>
+              <a:tblGrid>
+                <a:gridCol w="291592"/>
+                <a:gridCol w="3730058"/>
+                <a:gridCol w="7347084"/>
+              </a:tblGrid>
+              <a:tr h="280035">
+                <a:tc>
+                  <a:txBody>
+                    <a:bodyPr wrap="square"/>
+                    <a:lstStyle/>
+                    <a:p>
+                      <a:r>
+                        <a:rPr sz="1100" b="1">
+                          <a:solidFill>
+                            <a:srgbClr val="FFFFFF"/>
+                          </a:solidFill>
+                          <a:latin typeface="Arial"/>
+                        </a:rPr>
+                        <a:t>#</a:t>
+                      </a:r>
+                    </a:p>
+                  </a:txBody>
+                  <a:tcPr marL="54864" marR="54864" marT="18288" marB="18288">
+                    <a:solidFill>
+                      <a:srgbClr val="1F4E79"/>
+                    </a:solidFill>
+                  </a:tcPr>
+                </a:tc>
+                <a:tc>
+                  <a:txBody>
+                    <a:bodyPr wrap="square"/>
+                    <a:lstStyle/>
+                    <a:p>
+                      <a:r>
+                        <a:rPr sz="1100" b="1">
+                          <a:solidFill>
+                            <a:srgbClr val="FFFFFF"/>
+                          </a:solidFill>
+                          <a:latin typeface="Arial"/>
+                        </a:rPr>
+                        <a:t>paper</a:t>
+                      </a:r>
+                    </a:p>
+                  </a:txBody>
+                  <a:tcPr marL="54864" marR="54864" marT="18288" marB="18288">
+                    <a:solidFill>
+                      <a:srgbClr val="1F4E79"/>
+                    </a:solidFill>
+                  </a:tcPr>
+                </a:tc>
+                <a:tc>
+                  <a:txBody>
+                    <a:bodyPr wrap="square"/>
+                    <a:lstStyle/>
+                    <a:p>
+                      <a:r>
+                        <a:rPr sz="1100" b="1">
+                          <a:solidFill>
+                            <a:srgbClr val="FFFFFF"/>
+                          </a:solidFill>
+                          <a:latin typeface="Arial"/>
+                        </a:rPr>
+                        <a:t>what it gives this model</a:t>
+                      </a:r>
+                    </a:p>
+                  </a:txBody>
+                  <a:tcPr marL="54864" marR="54864" marT="18288" marB="18288">
+                    <a:solidFill>
+                      <a:srgbClr val="1F4E79"/>
+                    </a:solidFill>
+                  </a:tcPr>
+                </a:tc>
+              </a:tr>
+              <a:tr h="468630">
+                <a:tc>
+                  <a:txBody>
+                    <a:bodyPr wrap="square"/>
+                    <a:lstStyle/>
+                    <a:p>
+                      <a:r>
+                        <a:rPr sz="1100" b="0">
+                          <a:solidFill>
+                            <a:srgbClr val="282828"/>
+                          </a:solidFill>
+                          <a:latin typeface="Arial"/>
+                        </a:rPr>
+                        <a:t>7</a:t>
+                      </a:r>
+                    </a:p>
+                  </a:txBody>
+                  <a:tcPr marL="54864" marR="54864" marT="18288" marB="18288">
+                    <a:solidFill>
+                      <a:srgbClr val="FFFFFF"/>
+                    </a:solidFill>
+                  </a:tcPr>
+                </a:tc>
+                <a:tc>
+                  <a:txBody>
+                    <a:bodyPr wrap="square"/>
+                    <a:lstStyle/>
+                    <a:p>
+                      <a:r>
+                        <a:rPr sz="1100" b="0">
+                          <a:solidFill>
+                            <a:srgbClr val="282828"/>
+                          </a:solidFill>
+                          <a:latin typeface="Arial"/>
+                        </a:rPr>
+                        <a:t>Steeves, Wallace, Kettenbeil, Jewell 2020, Optica 7, 1267</a:t>
+                      </a:r>
+                    </a:p>
+                  </a:txBody>
+                  <a:tcPr marL="54864" marR="54864" marT="18288" marB="18288">
+                    <a:solidFill>
+                      <a:srgbClr val="FFFFFF"/>
+                    </a:solidFill>
+                  </a:tcPr>
+                </a:tc>
+                <a:tc>
+                  <a:txBody>
+                    <a:bodyPr wrap="square"/>
+                    <a:lstStyle/>
+                    <a:p>
+                      <a:r>
+                        <a:rPr sz="1100" b="0">
+                          <a:solidFill>
+                            <a:srgbClr val="282828"/>
+                          </a:solidFill>
+                          <a:latin typeface="Arial"/>
+                        </a:rPr>
+                        <a:t>1.6 pm repeatability in 4.3 s by alternating flat and waffle DM shapes and averaging the differences; a reconstruction robust at the highest spatial frequencies</a:t>
+                      </a:r>
+                    </a:p>
+                  </a:txBody>
+                  <a:tcPr marL="54864" marR="54864" marT="18288" marB="18288">
+                    <a:solidFill>
+                      <a:srgbClr val="FFFFFF"/>
+                    </a:solidFill>
+                  </a:tcPr>
+                </a:tc>
+              </a:tr>
+              <a:tr h="468630">
+                <a:tc>
+                  <a:txBody>
+                    <a:bodyPr wrap="square"/>
+                    <a:lstStyle/>
+                    <a:p>
+                      <a:r>
+                        <a:rPr sz="1100" b="0">
+                          <a:solidFill>
+                            <a:srgbClr val="282828"/>
+                          </a:solidFill>
+                          <a:latin typeface="Arial"/>
+                        </a:rPr>
+                        <a:t>8</a:t>
+                      </a:r>
+                    </a:p>
+                  </a:txBody>
+                  <a:tcPr marL="54864" marR="54864" marT="18288" marB="18288">
+                    <a:solidFill>
+                      <a:srgbClr val="ECF1F6"/>
+                    </a:solidFill>
+                  </a:tcPr>
+                </a:tc>
+                <a:tc>
+                  <a:txBody>
+                    <a:bodyPr wrap="square"/>
+                    <a:lstStyle/>
+                    <a:p>
+                      <a:r>
+                        <a:rPr sz="1100" b="0">
+                          <a:solidFill>
+                            <a:srgbClr val="282828"/>
+                          </a:solidFill>
+                          <a:latin typeface="Arial"/>
+                        </a:rPr>
+                        <a:t>Wallace, Rao, Jensen-Clem, Serabyn 2011, SPIE 8126</a:t>
+                      </a:r>
+                    </a:p>
+                  </a:txBody>
+                  <a:tcPr marL="54864" marR="54864" marT="18288" marB="18288">
+                    <a:solidFill>
+                      <a:srgbClr val="ECF1F6"/>
+                    </a:solidFill>
+                  </a:tcPr>
+                </a:tc>
+                <a:tc>
+                  <a:txBody>
+                    <a:bodyPr wrap="square"/>
+                    <a:lstStyle/>
+                    <a:p>
+                      <a:r>
+                        <a:rPr sz="1100" b="0">
+                          <a:solidFill>
+                            <a:srgbClr val="282828"/>
+                          </a:solidFill>
+                          <a:latin typeface="Arial"/>
+                        </a:rPr>
+                        <a:t>All-reflective phase-shifting Zernike interferometer: a dynamic, arbitrary core phase shift read in four steps gives phase and amplitude; low sensitivity to vibration, polarization and wavelength</a:t>
+                      </a:r>
+                    </a:p>
+                  </a:txBody>
+                  <a:tcPr marL="54864" marR="54864" marT="18288" marB="18288">
+                    <a:solidFill>
+                      <a:srgbClr val="ECF1F6"/>
+                    </a:solidFill>
+                  </a:tcPr>
+                </a:tc>
+              </a:tr>
+              <a:tr h="468630">
+                <a:tc>
+                  <a:txBody>
+                    <a:bodyPr wrap="square"/>
+                    <a:lstStyle/>
+                    <a:p>
+                      <a:r>
+                        <a:rPr sz="1100" b="0">
+                          <a:solidFill>
+                            <a:srgbClr val="282828"/>
+                          </a:solidFill>
+                          <a:latin typeface="Arial"/>
+                        </a:rPr>
+                        <a:t>9</a:t>
+                      </a:r>
+                    </a:p>
+                  </a:txBody>
+                  <a:tcPr marL="54864" marR="54864" marT="18288" marB="18288">
+                    <a:solidFill>
+                      <a:srgbClr val="FFFFFF"/>
+                    </a:solidFill>
+                  </a:tcPr>
+                </a:tc>
+                <a:tc>
+                  <a:txBody>
+                    <a:bodyPr wrap="square"/>
+                    <a:lstStyle/>
+                    <a:p>
+                      <a:r>
+                        <a:rPr sz="1100" b="0">
+                          <a:solidFill>
+                            <a:srgbClr val="282828"/>
+                          </a:solidFill>
+                          <a:latin typeface="Arial"/>
+                        </a:rPr>
+                        <a:t>Moore and Redding 2018, SPIE 10698</a:t>
+                      </a:r>
+                    </a:p>
+                  </a:txBody>
+                  <a:tcPr marL="54864" marR="54864" marT="18288" marB="18288">
+                    <a:solidFill>
+                      <a:srgbClr val="FFFFFF"/>
+                    </a:solidFill>
+                  </a:tcPr>
+                </a:tc>
+                <a:tc>
+                  <a:txBody>
+                    <a:bodyPr wrap="square"/>
+                    <a:lstStyle/>
+                    <a:p>
+                      <a:r>
+                        <a:rPr sz="1100" b="0">
+                          <a:solidFill>
+                            <a:srgbClr val="282828"/>
+                          </a:solidFill>
+                          <a:latin typeface="Arial"/>
+                        </a:rPr>
+                        <a:t>Nonlinear polychromatic physical-optics reconstruction for picometer differential metrology on LUVOIR; the in-house precedent for the reconstructor above</a:t>
+                      </a:r>
+                    </a:p>
+                  </a:txBody>
+                  <a:tcPr marL="54864" marR="54864" marT="18288" marB="18288">
+                    <a:solidFill>
+                      <a:srgbClr val="FFFFFF"/>
+                    </a:solidFill>
+                  </a:tcPr>
+                </a:tc>
+              </a:tr>
+              <a:tr h="468630">
+                <a:tc>
+                  <a:txBody>
+                    <a:bodyPr wrap="square"/>
+                    <a:lstStyle/>
+                    <a:p>
+                      <a:r>
+                        <a:rPr sz="1100" b="0">
+                          <a:solidFill>
+                            <a:srgbClr val="282828"/>
+                          </a:solidFill>
+                          <a:latin typeface="Arial"/>
+                        </a:rPr>
+                        <a:t>10</a:t>
+                      </a:r>
+                    </a:p>
+                  </a:txBody>
+                  <a:tcPr marL="54864" marR="54864" marT="18288" marB="18288">
+                    <a:solidFill>
+                      <a:srgbClr val="ECF1F6"/>
+                    </a:solidFill>
+                  </a:tcPr>
+                </a:tc>
+                <a:tc>
+                  <a:txBody>
+                    <a:bodyPr wrap="square"/>
+                    <a:lstStyle/>
+                    <a:p>
+                      <a:r>
+                        <a:rPr sz="1100" b="0">
+                          <a:solidFill>
+                            <a:srgbClr val="282828"/>
+                          </a:solidFill>
+                          <a:latin typeface="Arial"/>
+                        </a:rPr>
+                        <a:t>Keck vector-Zernike segment control 2024 (arXiv 2404.08728); Wallace et al. 2022 (arXiv 2205.02241)</a:t>
+                      </a:r>
+                    </a:p>
+                  </a:txBody>
+                  <a:tcPr marL="54864" marR="54864" marT="18288" marB="18288">
+                    <a:solidFill>
+                      <a:srgbClr val="ECF1F6"/>
+                    </a:solidFill>
+                  </a:tcPr>
+                </a:tc>
+                <a:tc>
+                  <a:txBody>
+                    <a:bodyPr wrap="square"/>
+                    <a:lstStyle/>
+                    <a:p>
+                      <a:r>
+                        <a:rPr sz="1100" b="0">
+                          <a:solidFill>
+                            <a:srgbClr val="282828"/>
+                          </a:solidFill>
+                          <a:latin typeface="Arial"/>
+                        </a:rPr>
+                        <a:t>Segment piston by model-based iteration; 11 nm rms piston uncertainty; underestimation 2 to 4× below 50 % Strehl; fabricated shifts 0.30π and 0.68π instead of ±0.5π</a:t>
+                      </a:r>
+                    </a:p>
+                  </a:txBody>
+                  <a:tcPr marL="54864" marR="54864" marT="18288" marB="18288">
+                    <a:solidFill>
+                      <a:srgbClr val="ECF1F6"/>
+                    </a:solidFill>
+                  </a:tcPr>
+                </a:tc>
+              </a:tr>
+              <a:tr h="468630">
+                <a:tc>
+                  <a:txBody>
+                    <a:bodyPr wrap="square"/>
+                    <a:lstStyle/>
+                    <a:p>
+                      <a:r>
+                        <a:rPr sz="1100" b="0">
+                          <a:solidFill>
+                            <a:srgbClr val="282828"/>
+                          </a:solidFill>
+                          <a:latin typeface="Arial"/>
+                        </a:rPr>
+                        <a:t>11</a:t>
+                      </a:r>
+                    </a:p>
+                  </a:txBody>
+                  <a:tcPr marL="54864" marR="54864" marT="18288" marB="18288">
+                    <a:solidFill>
+                      <a:srgbClr val="FFFFFF"/>
+                    </a:solidFill>
+                  </a:tcPr>
+                </a:tc>
+                <a:tc>
+                  <a:txBody>
+                    <a:bodyPr wrap="square"/>
+                    <a:lstStyle/>
+                    <a:p>
+                      <a:r>
+                        <a:rPr sz="1100" b="0">
+                          <a:solidFill>
+                            <a:srgbClr val="282828"/>
+                          </a:solidFill>
+                          <a:latin typeface="Arial"/>
+                        </a:rPr>
+                        <a:t>HiCAT mid-order Zernike sensor 2024 (arXiv 2409.03411)</a:t>
+                      </a:r>
+                    </a:p>
+                  </a:txBody>
+                  <a:tcPr marL="54864" marR="54864" marT="18288" marB="18288">
+                    <a:solidFill>
+                      <a:srgbClr val="FFFFFF"/>
+                    </a:solidFill>
+                  </a:tcPr>
+                </a:tc>
+                <a:tc>
+                  <a:txBody>
+                    <a:bodyPr wrap="square"/>
+                    <a:lstStyle/>
+                    <a:p>
+                      <a:r>
+                        <a:rPr sz="1100" b="0">
+                          <a:solidFill>
+                            <a:srgbClr val="282828"/>
+                          </a:solidFill>
+                          <a:latin typeface="Arial"/>
+                        </a:rPr>
+                        <a:t>Per-segment piston, tip and tilt by interaction matrix; a minimal step of 125 ± 31 pm at SNR 4; 14-bit DM quantization reads as steps in the response</a:t>
+                      </a:r>
+                    </a:p>
+                  </a:txBody>
+                  <a:tcPr marL="54864" marR="54864" marT="18288" marB="18288">
+                    <a:solidFill>
+                      <a:srgbClr val="FFFFFF"/>
+                    </a:solidFill>
+                  </a:tcPr>
+                </a:tc>
+              </a:tr>
+              <a:tr h="468630">
+                <a:tc>
+                  <a:txBody>
+                    <a:bodyPr wrap="square"/>
+                    <a:lstStyle/>
+                    <a:p>
+                      <a:r>
+                        <a:rPr sz="1100" b="0">
+                          <a:solidFill>
+                            <a:srgbClr val="282828"/>
+                          </a:solidFill>
+                          <a:latin typeface="Arial"/>
+                        </a:rPr>
+                        <a:t>12</a:t>
+                      </a:r>
+                    </a:p>
+                  </a:txBody>
+                  <a:tcPr marL="54864" marR="54864" marT="18288" marB="18288">
+                    <a:solidFill>
+                      <a:srgbClr val="ECF1F6"/>
+                    </a:solidFill>
+                  </a:tcPr>
+                </a:tc>
+                <a:tc>
+                  <a:txBody>
+                    <a:bodyPr wrap="square"/>
+                    <a:lstStyle/>
+                    <a:p>
+                      <a:r>
+                        <a:rPr sz="1100" b="0">
+                          <a:solidFill>
+                            <a:srgbClr val="282828"/>
+                          </a:solidFill>
+                          <a:latin typeface="Arial"/>
+                        </a:rPr>
+                        <a:t>Shi et al. 2015, SPIE 9605 (Roman low-order sensor)</a:t>
+                      </a:r>
+                    </a:p>
+                  </a:txBody>
+                  <a:tcPr marL="54864" marR="54864" marT="18288" marB="18288">
+                    <a:solidFill>
+                      <a:srgbClr val="ECF1F6"/>
+                    </a:solidFill>
+                  </a:tcPr>
+                </a:tc>
+                <a:tc>
+                  <a:txBody>
+                    <a:bodyPr wrap="square"/>
+                    <a:lstStyle/>
+                    <a:p>
+                      <a:r>
+                        <a:rPr sz="1100" b="0">
+                          <a:solidFill>
+                            <a:srgbClr val="282828"/>
+                          </a:solidFill>
+                          <a:latin typeface="Arial"/>
+                        </a:rPr>
+                        <a:t>A reflective dimple on the focal-plane mask senses Z2 to Z11 from the rejected starlight: the spatially filtered form of the same sensor</a:t>
+                      </a:r>
+                    </a:p>
+                  </a:txBody>
+                  <a:tcPr marL="54864" marR="54864" marT="18288" marB="18288">
+                    <a:solidFill>
+                      <a:srgbClr val="ECF1F6"/>
+                    </a:solidFill>
+                  </a:tcPr>
+                </a:tc>
+              </a:tr>
+            </a:tbl>
+          </a:graphicData>
+        </a:graphic>
+      </p:graphicFrame>
+      <p:sp>
+        <p:nvSpPr>
+          <p:cNvPr id="5" name="TextBox 4"/>
+          <p:cNvSpPr txBox="1"/>
+          <p:nvPr/>
+        </p:nvSpPr>
+        <p:spPr>
+          <a:xfrm>
+            <a:off x="411480" y="4536567"/>
+            <a:ext cx="11368735" cy="274320"/>
+          </a:xfrm>
+          <a:prstGeom prst="rect">
+            <a:avLst/>
+          </a:prstGeom>
+          <a:noFill/>
+        </p:spPr>
+        <p:txBody>
+          <a:bodyPr wrap="square">
+            <a:spAutoFit/>
+          </a:bodyPr>
+          <a:lstStyle/>
+          <a:p>
+            <a:pPr>
+              <a:spcAft>
+                <a:spcPts val="600"/>
+              </a:spcAft>
+            </a:pPr>
+            <a:r>
+              <a:rPr sz="1050" b="0">
+                <a:solidFill>
+                  <a:srgbClr val="6E6E6E"/>
+                </a:solidFill>
+                <a:latin typeface="Arial"/>
+              </a:rPr>
+              <a:t>Also read: PIAA-ZWFS (2026, arXiv 2606.28136), lossless pupil apodization that closes the gap to the fundamental sensitivity limit by 10× — a design lever, not a model change.</a:t>
+            </a:r>
+          </a:p>
+        </p:txBody>
+      </p:sp>
+    </p:spTree>
+  </p:cSld>
+  <p:clrMapOvr>
+    <a:masterClrMapping/>
+  </p:clrMapOvr>
+</p:sld>
+</file>
+
+<file path=ppt/slides/slide58.xml><?xml version="1.0" encoding="utf-8"?>
+<p:sld xmlns:a="http://schemas.openxmlformats.org/drawingml/2006/main" xmlns:p="http://schemas.openxmlformats.org/presentationml/2006/main" xmlns:r="http://schemas.openxmlformats.org/officeDocument/2006/relationships">
+  <p:cSld>
+    <p:spTree>
+      <p:nvGrpSpPr>
+        <p:cNvPr id="1" name=""/>
+        <p:cNvGrpSpPr/>
+        <p:nvPr/>
+      </p:nvGrpSpPr>
+      <p:grpSpPr/>
+      <p:sp>
+        <p:nvSpPr>
+          <p:cNvPr id="2" name="TextBox 1"/>
+          <p:cNvSpPr txBox="1"/>
+          <p:nvPr/>
+        </p:nvSpPr>
+        <p:spPr>
+          <a:xfrm>
+            <a:off x="411480" y="201168"/>
+            <a:ext cx="11368735" cy="914400"/>
+          </a:xfrm>
+          <a:prstGeom prst="rect">
+            <a:avLst/>
+          </a:prstGeom>
+          <a:noFill/>
+        </p:spPr>
+        <p:txBody>
+          <a:bodyPr wrap="square">
+            <a:spAutoFit/>
+          </a:bodyPr>
+          <a:lstStyle/>
+          <a:p>
+            <a:pPr>
+              <a:spcAft>
+                <a:spcPts val="400"/>
+              </a:spcAft>
+            </a:pPr>
+            <a:r>
+              <a:rPr sz="2400" b="1">
+                <a:solidFill>
+                  <a:srgbClr val="1F4E79"/>
+                </a:solidFill>
+                <a:latin typeface="Arial"/>
+              </a:rPr>
+              <a:t>Backup: the path per configuration</a:t>
+            </a:r>
+          </a:p>
+          <a:p>
+            <a:pPr>
+              <a:spcAft>
+                <a:spcPts val="0"/>
+              </a:spcAft>
+            </a:pPr>
+            <a:r>
+              <a:rPr sz="1250" b="0">
+                <a:solidFill>
+                  <a:srgbClr val="6E6E6E"/>
+                </a:solidFill>
+                <a:latin typeface="Arial"/>
+              </a:rPr>
+              <a:t>The runner stages and knobs each approach went through, in the order they ran</a:t>
+            </a:r>
+          </a:p>
+        </p:txBody>
+      </p:sp>
+      <p:sp>
+        <p:nvSpPr>
+          <p:cNvPr id="3" name="Rectangle 2"/>
+          <p:cNvSpPr/>
+          <p:nvPr/>
+        </p:nvSpPr>
+        <p:spPr>
+          <a:xfrm>
+            <a:off x="411480" y="1133856"/>
+            <a:ext cx="11368735" cy="20320"/>
+          </a:xfrm>
+          <a:prstGeom prst="rect">
+            <a:avLst/>
+          </a:prstGeom>
+          <a:solidFill>
+            <a:srgbClr val="B8C6D4"/>
+          </a:solidFill>
+          <a:ln>
+            <a:noFill/>
+          </a:ln>
+          <a:effectLst/>
+        </p:spPr>
+        <p:style>
+          <a:lnRef idx="1">
+            <a:schemeClr val="accent1"/>
+          </a:lnRef>
+          <a:fillRef idx="3">
+            <a:schemeClr val="accent1"/>
+          </a:fillRef>
+          <a:effectRef idx="2">
+            <a:schemeClr val="accent1"/>
+          </a:effectRef>
+          <a:fontRef idx="minor">
+            <a:schemeClr val="lt1"/>
+          </a:fontRef>
+        </p:style>
+        <p:txBody>
+          <a:bodyPr rtlCol="0" anchor="ctr"/>
+          <a:lstStyle/>
+          <a:p>
+            <a:pPr algn="ctr"/>
+          </a:p>
+        </p:txBody>
+      </p:sp>
+      <p:graphicFrame>
+        <p:nvGraphicFramePr>
+          <p:cNvPr id="4" name="Table 3"/>
+          <p:cNvGraphicFramePr>
+            <a:graphicFrameLocks noGrp="1"/>
+          </p:cNvGraphicFramePr>
+          <p:nvPr/>
+        </p:nvGraphicFramePr>
+        <p:xfrm>
+          <a:off x="411480" y="1298448"/>
           <a:ext cx="11368733" cy="4217670"/>
         </p:xfrm>
         <a:graphic>
@@ -35502,7 +36822,7 @@
 </p:sld>
 </file>
 
-<file path=ppt/slides/slide57.xml><?xml version="1.0" encoding="utf-8"?>
+<file path=ppt/slides/slide59.xml><?xml version="1.0" encoding="utf-8"?>
 <p:sld xmlns:a="http://schemas.openxmlformats.org/drawingml/2006/main" xmlns:p="http://schemas.openxmlformats.org/presentationml/2006/main" xmlns:r="http://schemas.openxmlformats.org/officeDocument/2006/relationships">
   <p:cSld>
     <p:spTree>

--- a/demo_session/deck_gauges_edit.pptx
+++ b/demo_session/deck_gauges_edit.pptx
@@ -14849,7 +14849,7 @@
         </p:nvGraphicFramePr>
         <p:xfrm>
           <a:off x="411480" y="1298448"/>
-          <a:ext cx="11368733" cy="2240280"/>
+          <a:ext cx="11368735" cy="1960245"/>
         </p:xfrm>
         <a:graphic>
           <a:graphicData uri="http://schemas.openxmlformats.org/drawingml/2006/table">
@@ -14859,9 +14859,9 @@
               </a:tblPr>
               <a:tblGrid>
                 <a:gridCol w="1090676"/>
-                <a:gridCol w="7370267"/>
-                <a:gridCol w="1453895"/>
-                <a:gridCol w="1453895"/>
+                <a:gridCol w="7951419"/>
+                <a:gridCol w="1163320"/>
+                <a:gridCol w="1163320"/>
               </a:tblGrid>
               <a:tr h="280035">
                 <a:tc>
@@ -15469,96 +15469,6 @@
                   <a:tcPr marL="54864" marR="54864" marT="18288" marB="18288">
                     <a:solidFill>
                       <a:srgbClr val="ECF1F6"/>
-                    </a:solidFill>
-                  </a:tcPr>
-                </a:tc>
-              </a:tr>
-              <a:tr h="280035">
-                <a:tc>
-                  <a:txBody>
-                    <a:bodyPr wrap="square"/>
-                    <a:lstStyle/>
-                    <a:p>
-                      <a:r>
-                        <a:rPr sz="1100" b="0">
-                          <a:solidFill>
-                            <a:srgbClr val="282828"/>
-                          </a:solidFill>
-                          <a:latin typeface="Arial"/>
-                        </a:rPr>
-                        <a:t>differential</a:t>
-                      </a:r>
-                    </a:p>
-                  </a:txBody>
-                  <a:tcPr marL="54864" marR="54864" marT="18288" marB="18288">
-                    <a:solidFill>
-                      <a:srgbClr val="FFFFFF"/>
-                    </a:solidFill>
-                  </a:tcPr>
-                </a:tc>
-                <a:tc>
-                  <a:txBody>
-                    <a:bodyPr wrap="square"/>
-                    <a:lstStyle/>
-                    <a:p>
-                      <a:r>
-                        <a:rPr sz="1100" b="0">
-                          <a:solidFill>
-                            <a:srgbClr val="282828"/>
-                          </a:solidFill>
-                          <a:latin typeface="Arial"/>
-                        </a:rPr>
-                        <a:t>a 10 nm single-actuator change, read against truth</a:t>
-                      </a:r>
-                    </a:p>
-                  </a:txBody>
-                  <a:tcPr marL="54864" marR="54864" marT="18288" marB="18288">
-                    <a:solidFill>
-                      <a:srgbClr val="FFFFFF"/>
-                    </a:solidFill>
-                  </a:tcPr>
-                </a:tc>
-                <a:tc>
-                  <a:txBody>
-                    <a:bodyPr wrap="square"/>
-                    <a:lstStyle/>
-                    <a:p>
-                      <a:r>
-                        <a:rPr sz="1100" b="0">
-                          <a:solidFill>
-                            <a:srgbClr val="282828"/>
-                          </a:solidFill>
-                          <a:latin typeface="Arial"/>
-                        </a:rPr>
-                        <a:t>1.5 pm, gain 1.001</a:t>
-                      </a:r>
-                    </a:p>
-                  </a:txBody>
-                  <a:tcPr marL="54864" marR="54864" marT="18288" marB="18288">
-                    <a:solidFill>
-                      <a:srgbClr val="FFFFFF"/>
-                    </a:solidFill>
-                  </a:tcPr>
-                </a:tc>
-                <a:tc>
-                  <a:txBody>
-                    <a:bodyPr wrap="square"/>
-                    <a:lstStyle/>
-                    <a:p>
-                      <a:r>
-                        <a:rPr sz="1100" b="0">
-                          <a:solidFill>
-                            <a:srgbClr val="282828"/>
-                          </a:solidFill>
-                          <a:latin typeface="Arial"/>
-                        </a:rPr>
-                        <a:t>1.8 pm, gain 0.993</a:t>
-                      </a:r>
-                    </a:p>
-                  </a:txBody>
-                  <a:tcPr marL="54864" marR="54864" marT="18288" marB="18288">
-                    <a:solidFill>
-                      <a:srgbClr val="FFFFFF"/>
                     </a:solidFill>
                   </a:tcPr>
                 </a:tc>
@@ -15575,7 +15485,7 @@
         </p:nvSpPr>
         <p:spPr>
           <a:xfrm>
-            <a:off x="411480" y="3685032"/>
+            <a:off x="411480" y="3404997"/>
             <a:ext cx="11368735" cy="274320"/>
           </a:xfrm>
           <a:prstGeom prst="rect">
@@ -15601,7 +15511,7 @@
                 </a:solidFill>
                 <a:latin typeface="Arial"/>
               </a:rPr>
-              <a:t>•  Picometer measurement is photon-limited, not bench-limited.  One measurement at 1e15 photons — 0.31 mJ, about 1.3 s of a 1 mW laser — is repeatable to 0.7 pm, and a servo fed at that rate holds the surface to under half a picometer.  Both front ends give the same answer to within 10 %.</a:t>
+              <a:t>•  Picometer measurement is photon-limited, not bench-limited.  One measurement at 1e15 photons — 0.31 mJ, about 1.3 s of a 1 mW laser — repeats to 0.7 pm, and a servo fed at that rate holds under half a picometer.  Both front ends agree to within 10 %.  For scale, Steeves et al. (2020, Optica 7, 1267) demonstrate 1.6 pm in 4.3 s on a real interferometer: ours is photon-limited only, carrying no vibration, thermal drift or detector systematics, so it is the floor this design allows rather than a prediction of the built bench — and agreeing within a factor of two is the check that the model is in the right regime.</a:t>
             </a:r>
           </a:p>
           <a:p>
@@ -15617,7 +15527,7 @@
                 </a:solidFill>
                 <a:latin typeface="Arial"/>
               </a:rPr>
-              <a:t>•  The accuracy figure is systematic and proportional: it is a fraction of the figure being read, so a 30 nm working surface costs tens of picometers and a 200 nm capture figure costs hundreds.  It holds because the response matrix is measured on the surface rather than assumed geometric.</a:t>
+              <a:t>•  Accuracy is systematic and proportional — a fraction of the figure read, so 30 nm costs tens of picometers and a 200 nm capture figure costs hundreds.  It holds because the response matrix is measured on the surface, not assumed geometric.</a:t>
             </a:r>
           </a:p>
           <a:p>
@@ -15633,7 +15543,7 @@
                 </a:solidFill>
                 <a:latin typeface="Arial"/>
               </a:rPr>
-              <a:t>•  One disturbance is not photon-limited: under a 5 pm per cycle thermal ramp the loop lags at about 10 pm however many photons it is given.  That is a cadence and a thermal-control requirement, not a sensing one.</a:t>
+              <a:t>•  One disturbance is not photon-limited: under a 5 pm per cycle thermal ramp the loop lags at about 10 pm however many photons it is given — a cadence and thermal-control requirement, not a sensing one.</a:t>
             </a:r>
           </a:p>
         </p:txBody>
@@ -15646,7 +15556,7 @@
         </p:nvSpPr>
         <p:spPr>
           <a:xfrm>
-            <a:off x="411480" y="6123432"/>
+            <a:off x="411480" y="6586347"/>
             <a:ext cx="11368735" cy="274320"/>
           </a:xfrm>
           <a:prstGeom prst="rect">
@@ -15672,7 +15582,7 @@
                 </a:solidFill>
                 <a:latin typeface="Arial"/>
               </a:rPr>
-              <a:t>Every number on this slide is a committed run of the shared model; the run tags are on the provenance slide and each is repeated on the slide that derives it.</a:t>
+              <a:t>A 10 nm single-actuator change — what the servo actually corrects — reads against truth to 1.5 pm at gain 1.001 on lenses and 1.8 pm at 0.993 on mirrors.  Every number here is a committed run of the shared model; the run tags are on the provenance slide and each is repeated on the slide that derives it.</a:t>
             </a:r>
           </a:p>
         </p:txBody>

--- a/demo_session/deck_gauges_edit.pptx
+++ b/demo_session/deck_gauges_edit.pptx
@@ -26759,7 +26759,7 @@
                 </a:solidFill>
                 <a:latin typeface="Arial"/>
               </a:rPr>
-              <a:t>Each directory's README carries the full command list and the run-tag index.</a:t>
+              <a:t>Each directory's README carries the full command list and the run-tag index. All code and documentation is available from the public nasa-jpl github macos and MACOS_resources repos.</a:t>
             </a:r>
           </a:p>
         </p:txBody>

--- a/demo_session/deck_gauges_edit.pptx
+++ b/demo_session/deck_gauges_edit.pptx
@@ -17306,7 +17306,7 @@
         </p:nvGraphicFramePr>
         <p:xfrm>
           <a:off x="411480" y="1298448"/>
-          <a:ext cx="5806439" cy="4029075"/>
+          <a:ext cx="5806438" cy="4783455"/>
         </p:xfrm>
         <a:graphic>
           <a:graphicData uri="http://schemas.openxmlformats.org/drawingml/2006/table">
@@ -17315,11 +17315,11 @@
                 <a:tableStyleId>{5C22544A-7EE6-4342-B048-85BDC9FD1C3A}</a:tableStyleId>
               </a:tblPr>
               <a:tblGrid>
-                <a:gridCol w="1470462"/>
-                <a:gridCol w="1093420"/>
-                <a:gridCol w="3242557"/>
+                <a:gridCol w="1104639"/>
+                <a:gridCol w="821398"/>
+                <a:gridCol w="3880401"/>
               </a:tblGrid>
-              <a:tr h="468630">
+              <a:tr h="657225">
                 <a:tc>
                   <a:txBody>
                     <a:bodyPr wrap="square"/>
@@ -17591,7 +17591,7 @@
                   </a:tcPr>
                 </a:tc>
               </a:tr>
-              <a:tr h="468630">
+              <a:tr h="657225">
                 <a:tc>
                   <a:txBody>
                     <a:bodyPr wrap="square"/>
@@ -17795,7 +17795,7 @@
                   </a:tcPr>
                 </a:tc>
               </a:tr>
-              <a:tr h="468630">
+              <a:tr h="657225">
                 <a:tc>
                   <a:txBody>
                     <a:bodyPr wrap="square"/>
@@ -17852,7 +17852,7 @@
                           </a:solidFill>
                           <a:latin typeface="Arial"/>
                         </a:rPr>
-                        <a:t>unwrap alone: 3 pm in 17 / 19 cycles from 100 / 200 nm, contraction 0.50</a:t>
+                        <a:t>unwrap alone: 3 pm in 19 / 24 cycles from 100 / 200 nm (2.98 pm at cycle 60), contraction 0.52 / 0.57; the 30 nm control holds at 2.97 pm</a:t>
                       </a:r>
                     </a:p>
                   </a:txBody>
@@ -17863,7 +17863,7 @@
                   </a:tcPr>
                 </a:tc>
               </a:tr>
-              <a:tr h="468630">
+              <a:tr h="657225">
                 <a:tc>
                   <a:txBody>
                     <a:bodyPr wrap="square"/>
@@ -18040,7 +18040,7 @@
                 </a:solidFill>
                 <a:latin typeface="Arial"/>
               </a:rPr>
-              <a:t>1e13 and 1e15 photons per cycle give the same convergence: capture is reference-limited, not light-limited.  Run tags cap_nouw, cap_uw, cap_state_uw_recal, descent193, descent_lens, descent_oap, oapdesc2.</a:t>
+              <a:t>1e13 and 1e15 photons per cycle give the same convergence: capture is reference-limited, not light-limited.  Run tags cap_nouw, cap_uw, cap_state_uw_recal, descent193, descent_lens, descent_oap, capt96_oap (the redesigned mirror rig, control set inside the DM aperture).</a:t>
             </a:r>
           </a:p>
         </p:txBody>

--- a/demo_session/deck_gauges_edit.pptx
+++ b/demo_session/deck_gauges_edit.pptx
@@ -17306,7 +17306,7 @@
         </p:nvGraphicFramePr>
         <p:xfrm>
           <a:off x="411480" y="1298448"/>
-          <a:ext cx="5806438" cy="4783455"/>
+          <a:ext cx="5806438" cy="4594860"/>
         </p:xfrm>
         <a:graphic>
           <a:graphicData uri="http://schemas.openxmlformats.org/drawingml/2006/table">
@@ -17315,9 +17315,9 @@
                 <a:tableStyleId>{5C22544A-7EE6-4342-B048-85BDC9FD1C3A}</a:tableStyleId>
               </a:tblPr>
               <a:tblGrid>
-                <a:gridCol w="1104639"/>
-                <a:gridCol w="821398"/>
-                <a:gridCol w="3880401"/>
+                <a:gridCol w="1380799"/>
+                <a:gridCol w="1026748"/>
+                <a:gridCol w="3398891"/>
               </a:tblGrid>
               <a:tr h="657225">
                 <a:tc>
@@ -17591,7 +17591,7 @@
                   </a:tcPr>
                 </a:tc>
               </a:tr>
-              <a:tr h="657225">
+              <a:tr h="468630">
                 <a:tc>
                   <a:txBody>
                     <a:bodyPr wrap="square"/>
@@ -17852,7 +17852,7 @@
                           </a:solidFill>
                           <a:latin typeface="Arial"/>
                         </a:rPr>
-                        <a:t>unwrap alone: 3 pm in 19 / 24 cycles from 100 / 200 nm (2.98 pm at cycle 60), contraction 0.52 / 0.57; the 30 nm control holds at 2.97 pm</a:t>
+                        <a:t>unwrap alone: 3 pm in 19 / 24 cycles from 100 / 200 nm, contraction 0.52 / 0.57; control 2.97 pm</a:t>
                       </a:r>
                     </a:p>
                   </a:txBody>

--- a/demo_session/deck_gauges_edit.pptx
+++ b/demo_session/deck_gauges_edit.pptx
@@ -17306,7 +17306,7 @@
         </p:nvGraphicFramePr>
         <p:xfrm>
           <a:off x="411480" y="1298448"/>
-          <a:ext cx="5806438" cy="4594860"/>
+          <a:ext cx="5806439" cy="4029075"/>
         </p:xfrm>
         <a:graphic>
           <a:graphicData uri="http://schemas.openxmlformats.org/drawingml/2006/table">
@@ -17315,11 +17315,11 @@
                 <a:tableStyleId>{5C22544A-7EE6-4342-B048-85BDC9FD1C3A}</a:tableStyleId>
               </a:tblPr>
               <a:tblGrid>
-                <a:gridCol w="1380799"/>
-                <a:gridCol w="1026748"/>
-                <a:gridCol w="3398891"/>
+                <a:gridCol w="1470462"/>
+                <a:gridCol w="1093420"/>
+                <a:gridCol w="3242557"/>
               </a:tblGrid>
-              <a:tr h="657225">
+              <a:tr h="468630">
                 <a:tc>
                   <a:txBody>
                     <a:bodyPr wrap="square"/>
@@ -17795,7 +17795,7 @@
                   </a:tcPr>
                 </a:tc>
               </a:tr>
-              <a:tr h="657225">
+              <a:tr h="468630">
                 <a:tc>
                   <a:txBody>
                     <a:bodyPr wrap="square"/>
@@ -17852,7 +17852,7 @@
                           </a:solidFill>
                           <a:latin typeface="Arial"/>
                         </a:rPr>
-                        <a:t>unwrap alone: 3 pm in 19 / 24 cycles from 100 / 200 nm, contraction 0.52 / 0.57; control 2.97 pm</a:t>
+                        <a:t>unwrap alone: 3 pm in 19 / 24 cycles from 100 / 200 nm, contraction 0.52</a:t>
                       </a:r>
                     </a:p>
                   </a:txBody>
@@ -17863,7 +17863,7 @@
                   </a:tcPr>
                 </a:tc>
               </a:tr>
-              <a:tr h="657225">
+              <a:tr h="468630">
                 <a:tc>
                   <a:txBody>
                     <a:bodyPr wrap="square"/>
@@ -18040,7 +18040,7 @@
                 </a:solidFill>
                 <a:latin typeface="Arial"/>
               </a:rPr>
-              <a:t>1e13 and 1e15 photons per cycle give the same convergence: capture is reference-limited, not light-limited.  Run tags cap_nouw, cap_uw, cap_state_uw_recal, descent193, descent_lens, descent_oap, capt96_oap (the redesigned mirror rig, control set inside the DM aperture).</a:t>
+              <a:t>1e13 and 1e15 photons per cycle give the same convergence: capture is reference-limited, not light-limited.  Run tags cap_nouw, cap_uw, cap_state_uw_recal, descent193, descent_lens, descent_oap, capt96_oap (the redesigned mirror rig with the control set inside the DM aperture: 2.98 pm at cycle 60 from 100 and 200 nm, the 30 nm control at 2.97 pm).</a:t>
             </a:r>
           </a:p>
         </p:txBody>

--- a/demo_session/deck_gauges_edit.pptx
+++ b/demo_session/deck_gauges_edit.pptx
@@ -10825,8 +10825,8 @@
         </p:blipFill>
         <p:spPr>
           <a:xfrm>
-            <a:off x="5696712" y="1133856"/>
-            <a:ext cx="6144768" cy="1225296"/>
+            <a:off x="4800600" y="1060704"/>
+            <a:ext cx="7287768" cy="1453896"/>
           </a:xfrm>
           <a:prstGeom prst="rect">
             <a:avLst/>
@@ -10841,8 +10841,8 @@
         </p:nvSpPr>
         <p:spPr>
           <a:xfrm>
-            <a:off x="411480" y="1179576"/>
-            <a:ext cx="4206240" cy="724408"/>
+            <a:off x="228600" y="1371600"/>
+            <a:ext cx="3886200" cy="724408"/>
           </a:xfrm>
           <a:prstGeom prst="rect">
             <a:avLst/>
@@ -10882,14 +10882,15 @@
         </p:nvPicPr>
         <p:blipFill>
           <a:blip r:embed="rId3"/>
+          <a:srcRect r="2040" t="10160" b="12700"/>
           <a:stretch>
             <a:fillRect/>
           </a:stretch>
         </p:blipFill>
         <p:spPr>
           <a:xfrm>
-            <a:off x="5422392" y="2432304"/>
-            <a:ext cx="6419088" cy="1051560"/>
+            <a:off x="4233672" y="2487168"/>
+            <a:ext cx="7790688" cy="1005840"/>
           </a:xfrm>
           <a:prstGeom prst="rect">
             <a:avLst/>
@@ -10904,8 +10905,8 @@
         </p:nvSpPr>
         <p:spPr>
           <a:xfrm>
-            <a:off x="411480" y="2478024"/>
-            <a:ext cx="4206240" cy="889508"/>
+            <a:off x="228600" y="2578608"/>
+            <a:ext cx="3886200" cy="1054608"/>
           </a:xfrm>
           <a:prstGeom prst="rect">
             <a:avLst/>
@@ -10945,14 +10946,15 @@
         </p:nvPicPr>
         <p:blipFill>
           <a:blip r:embed="rId4"/>
+          <a:srcRect r="2130" t="10080" b="10710"/>
           <a:stretch>
             <a:fillRect/>
           </a:stretch>
         </p:blipFill>
         <p:spPr>
           <a:xfrm>
-            <a:off x="5422392" y="3557016"/>
-            <a:ext cx="6419088" cy="1051560"/>
+            <a:off x="4215384" y="3566160"/>
+            <a:ext cx="7781544" cy="1033271"/>
           </a:xfrm>
           <a:prstGeom prst="rect">
             <a:avLst/>
@@ -10967,8 +10969,8 @@
         </p:nvSpPr>
         <p:spPr>
           <a:xfrm>
-            <a:off x="411480" y="3602736"/>
-            <a:ext cx="4206240" cy="559307"/>
+            <a:off x="182880" y="3794760"/>
+            <a:ext cx="3931920" cy="559307"/>
           </a:xfrm>
           <a:prstGeom prst="rect">
             <a:avLst/>
@@ -11008,14 +11010,15 @@
         </p:nvPicPr>
         <p:blipFill>
           <a:blip r:embed="rId5"/>
+          <a:srcRect r="1580" t="10550" b="11620"/>
           <a:stretch>
             <a:fillRect/>
           </a:stretch>
         </p:blipFill>
         <p:spPr>
           <a:xfrm>
-            <a:off x="5422392" y="4681728"/>
-            <a:ext cx="6419088" cy="1051560"/>
+            <a:off x="4215384" y="4709160"/>
+            <a:ext cx="7827264" cy="1014984"/>
           </a:xfrm>
           <a:prstGeom prst="rect">
             <a:avLst/>
@@ -11030,8 +11033,8 @@
         </p:nvSpPr>
         <p:spPr>
           <a:xfrm>
-            <a:off x="411480" y="4727448"/>
-            <a:ext cx="4206240" cy="724408"/>
+            <a:off x="182880" y="4937760"/>
+            <a:ext cx="3931920" cy="724408"/>
           </a:xfrm>
           <a:prstGeom prst="rect">
             <a:avLst/>
@@ -11126,8 +11129,8 @@
         </p:nvSpPr>
         <p:spPr>
           <a:xfrm>
-            <a:off x="411480" y="6382512"/>
-            <a:ext cx="11384280" cy="274320"/>
+            <a:off x="411480" y="6327648"/>
+            <a:ext cx="11338560" cy="274320"/>
           </a:xfrm>
           <a:prstGeom prst="rect">
             <a:avLst/>

--- a/demo_session/deck_gauges_edit.pptx
+++ b/demo_session/deck_gauges_edit.pptx
@@ -5135,7 +5135,7 @@
       </p:sp>
       <p:pic>
         <p:nvPicPr>
-          <p:cNvPr id="4" name="Picture 3" descr="redo96_oapstn_stations.png"/>
+          <p:cNvPr id="4" name="Picture 3" descr="redo96_oapstn2_stations.png"/>
           <p:cNvPicPr>
             <a:picLocks noChangeAspect="1"/>
           </p:cNvPicPr>
@@ -5149,8 +5149,8 @@
         </p:blipFill>
         <p:spPr>
           <a:xfrm>
-            <a:off x="2028583" y="1298448"/>
-            <a:ext cx="8134528" cy="2531872"/>
+            <a:off x="1713761" y="1298448"/>
+            <a:ext cx="8764172" cy="2531872"/>
           </a:xfrm>
           <a:prstGeom prst="rect">
             <a:avLst/>
@@ -5287,7 +5287,7 @@
                 </a:solidFill>
                 <a:latin typeface="Arial"/>
               </a:rPr>
-              <a:t>Run tag redo96_oapstn (the mirror rig).  The lens rig's figure exists but its absolute residual reads 51 nm against the engine — a fold of the phase, not an imaging error (its differential rows read the same as the mirror rig's); under investigation, so it is not shown.</a:t>
+              <a:t>Run tag redo96_oapstn2 (the mirror rig; the DM's full-lattice 30 nm command, seed 7, the same surface in every station figure).  The lens rig's figure exists but its absolute residual reads 51 nm against the engine — a fold of the phase, not an imaging error (its differential rows read the same as the mirror rig's); under investigation, so it is not shown.</a:t>
             </a:r>
           </a:p>
         </p:txBody>
@@ -7565,7 +7565,7 @@
                 </a:solidFill>
                 <a:latin typeface="Arial"/>
               </a:rPr>
-              <a:t>The key signals along the train for the flat mirror and for the 30 nm working surface: the raw pixel map on the working surface is off by 4.8 nm because the sensor's reference is made from the beam, which is why the response matrix is measured on the surface</a:t>
+              <a:t>The key signals along the train for the flat mirror and for the 30 nm working surface: the raw pixel map reads the surface 22 % low (7.1 nm rms, gain 0.78) because the sensor's reference is made from the beam, which is why the response matrix is measured on the surface</a:t>
             </a:r>
           </a:p>
         </p:txBody>
@@ -7616,7 +7616,7 @@
       </p:sp>
       <p:pic>
         <p:nvPicPr>
-          <p:cNvPr id="4" name="Picture 3" descr="stations193_stations_S.png"/>
+          <p:cNvPr id="4" name="Picture 3" descr="stations193_oap_stations_S.png"/>
           <p:cNvPicPr>
             <a:picLocks noChangeAspect="1"/>
           </p:cNvPicPr>
@@ -7630,8 +7630,8 @@
         </p:blipFill>
         <p:spPr>
           <a:xfrm>
-            <a:off x="2167487" y="1298448"/>
-            <a:ext cx="7856720" cy="2183892"/>
+            <a:off x="2493141" y="1298448"/>
+            <a:ext cx="7205411" cy="2018792"/>
           </a:xfrm>
           <a:prstGeom prst="rect">
             <a:avLst/>
@@ -7646,8 +7646,8 @@
         </p:nvSpPr>
         <p:spPr>
           <a:xfrm>
-            <a:off x="411480" y="3500628"/>
-            <a:ext cx="11368735" cy="559307"/>
+            <a:off x="411480" y="3335528"/>
+            <a:ext cx="11368735" cy="724408"/>
           </a:xfrm>
           <a:prstGeom prst="rect">
             <a:avLst/>
@@ -7672,7 +7672,7 @@
                 </a:solidFill>
                 <a:latin typeface="Arial"/>
               </a:rPr>
-              <a:t>Row 1 the flat mirror, row 2 the 30 nm working surface.  Left to right: the mirror command; the focal spot at the mask (log scale) with the dimple's footprint; the dimple's phase; the reference wave the dimple makes at the detector; the clear frame and the first depth frame of the four; the surface recovered from the four frames; the raw map minus the engine's own field at the detector (0 on the flat, 4.8 nm rms on the working surface).  The runner's own figure, run stations193 at 193 pixels per pupil.</a:t>
+              <a:t>Row 1 the flat mirror, row 2 the 30 nm working surface.  Left to right: the mirror command; the focal spot at the mask (log scale) with the dimple's footprint; the dimple's phase; the reference wave the dimple makes at the detector; the clear frame and the first depth frame of the four; the surface recovered from the four frames; the raw map minus the engine's own field at the detector (0 on the flat, 7.1 nm rms on the working surface, gain 0.78).  The runner's own figure, run stations193_oap on the mirror rig at 193 pixels per pupil.</a:t>
             </a:r>
           </a:p>
         </p:txBody>
@@ -7685,7 +7685,7 @@
         </p:nvSpPr>
         <p:spPr>
           <a:xfrm>
-            <a:off x="411480" y="4096512"/>
+            <a:off x="411480" y="4096511"/>
             <a:ext cx="11368735" cy="274320"/>
           </a:xfrm>
           <a:prstGeom prst="rect">
@@ -7729,7 +7729,7 @@
                 </a:solidFill>
                 <a:latin typeface="Arial"/>
               </a:rPr>
-              <a:t> (fourth column) is the core of the focal spot spread back over the pupil, and the inversion takes its amplitude from the flat.  On the 30 nm surface (0.6 rad rms of wavefront phase, double pass) the core is weaker, the recovered phase scales as one over that amplitude, and the raw map reads the surface about 16 % low -- 4.8 nm, shaped like the surface: a gain error, not noise.  The matrix measured on the surface absorbs it, which is how the stepped reading reaches 5 pm on its rows; left as calibrated on the flat, it is what limits the self-referenced sensors' capture range to 36-70 nm.</a:t>
+              <a:t> (fourth column) is the core of the focal spot spread back over the pupil, and the inversion takes its amplitude from the flat.  On the 30 nm surface (0.6 rad rms of wavefront phase, double pass) the core is weaker, the recovered phase scales as one over that amplitude, and the raw map reads the surface 22 % low -- gain 0.78, 7.1 nm rms, shaped like the surface: a gain error, not noise.  The matrix measured on the surface absorbs it, which is how the stepped reading reaches 5 pm on its rows; left as calibrated on the flat, it is what limits the self-referenced sensors' capture range to 36-70 nm.</a:t>
             </a:r>
           </a:p>
         </p:txBody>
@@ -9418,7 +9418,7 @@
                 </a:solidFill>
                 <a:latin typeface="Arial"/>
               </a:rPr>
-              <a:t>The two images taken at once, and a raw map within 25 pm of the engine's field on the 30 nm working surface: the pixel-by-pixel solve needs no calibration to read the surface</a:t>
+              <a:t>The two images taken at once, and a raw map at gain 0.993 against the engine's field on the 30 nm working surface: the pixel-by-pixel solve needs no reference amplitude from the flat; what remains (863 pm, 200 of them already on the flat) is the mirror rig's arm term</a:t>
             </a:r>
           </a:p>
         </p:txBody>
@@ -9469,7 +9469,7 @@
       </p:sp>
       <p:pic>
         <p:nvPicPr>
-          <p:cNvPr id="4" name="Picture 3" descr="stations193_stations_V.png"/>
+          <p:cNvPr id="4" name="Picture 3" descr="stations193_oap_stations_V.png"/>
           <p:cNvPicPr>
             <a:picLocks noChangeAspect="1"/>
           </p:cNvPicPr>
@@ -9483,8 +9483,8 @@
         </p:blipFill>
         <p:spPr>
           <a:xfrm>
-            <a:off x="2167487" y="1298448"/>
-            <a:ext cx="7856720" cy="2183892"/>
+            <a:off x="2198506" y="1298448"/>
+            <a:ext cx="7794681" cy="2183892"/>
           </a:xfrm>
           <a:prstGeom prst="rect">
             <a:avLst/>
@@ -9621,7 +9621,7 @@
                 </a:solidFill>
                 <a:latin typeface="Arial"/>
               </a:rPr>
-              <a:t>The 25 pm is the raw absolute map's error on a 30 nm surface with the flat's calibration; on the same surface the calibrated reading is 0.9935 / 4 pm.</a:t>
+              <a:t>The 863 pm is the raw absolute map's error on the 30 nm surface with the flat's calibration, at gain 0.993; 200 pm of it is there on the flat too -- the mirror rig's uncalibrated metasurface-arm term, which the calibration absorbs.  On the same surface the calibrated reading is 0.9935 / 4 pm.  Run stations193_oap.</a:t>
             </a:r>
           </a:p>
         </p:txBody>
@@ -10484,7 +10484,7 @@
                 </a:solidFill>
                 <a:latin typeface="Arial"/>
               </a:rPr>
-              <a:t>The pinhole passes the core as the reference, the attenuated surround passes the rest; the first step frame and the shutter frame; a raw map within 0.18 nm of the engine's field on the working surface</a:t>
+              <a:t>The pinhole passes the core as the reference, the attenuated surround passes the rest; the first step frame and the shutter frame; a raw map at gain 0.981, 0.73 nm rms against the engine's field on the working surface</a:t>
             </a:r>
           </a:p>
         </p:txBody>
@@ -10535,7 +10535,7 @@
       </p:sp>
       <p:pic>
         <p:nvPicPr>
-          <p:cNvPr id="4" name="Picture 3" descr="stations193_stations_P.png"/>
+          <p:cNvPr id="4" name="Picture 3" descr="stations193_oap_stations_P.png"/>
           <p:cNvPicPr>
             <a:picLocks noChangeAspect="1"/>
           </p:cNvPicPr>
@@ -10549,8 +10549,8 @@
         </p:blipFill>
         <p:spPr>
           <a:xfrm>
-            <a:off x="2162193" y="1298448"/>
-            <a:ext cx="7867309" cy="2183892"/>
+            <a:off x="2198506" y="1298448"/>
+            <a:ext cx="7794681" cy="2183892"/>
           </a:xfrm>
           <a:prstGeom prst="rect">
             <a:avLst/>
@@ -10687,7 +10687,7 @@
                 </a:solidFill>
                 <a:latin typeface="Arial"/>
               </a:rPr>
-              <a:t>The 0.18 nm is the raw map's error with the flat's calibration; through the matrix on the surface the pinhole reads 0.9935 / 4 pm, the same as the vector dimple.</a:t>
+              <a:t>The 0.73 nm (gain 0.981) is the raw map's error with the flat's calibration, run stations193_oap on the mirror rig; through the matrix on the surface the pinhole reads 0.9935 / 4 pm, the same as the vector dimple.</a:t>
             </a:r>
           </a:p>
         </p:txBody>
@@ -10825,8 +10825,8 @@
         </p:blipFill>
         <p:spPr>
           <a:xfrm>
-            <a:off x="4800600" y="1060704"/>
-            <a:ext cx="7287768" cy="1453896"/>
+            <a:off x="5212080" y="1060704"/>
+            <a:ext cx="6629400" cy="1225296"/>
           </a:xfrm>
           <a:prstGeom prst="rect">
             <a:avLst/>
@@ -10841,8 +10841,8 @@
         </p:nvSpPr>
         <p:spPr>
           <a:xfrm>
-            <a:off x="228600" y="1371600"/>
-            <a:ext cx="3886200" cy="724408"/>
+            <a:off x="228600" y="1170432"/>
+            <a:ext cx="3931920" cy="724408"/>
           </a:xfrm>
           <a:prstGeom prst="rect">
             <a:avLst/>
@@ -10867,7 +10867,7 @@
                 </a:solidFill>
                 <a:latin typeface="Arial"/>
               </a:rPr>
-              <a:t>Interferometer (hybrid, mirror rig): the command; the test and reference arms at the camera; two of the four phase-stepped frames; the recovered surface; the raw map minus the engine's field, 463 pm (1.5 %).</a:t>
+              <a:t>Interferometer (hybrid): the command; the test and reference arms at the camera; two of the four phase-stepped frames; the recovered surface, 25.8 nm rms; the raw map minus the engine's field, 463 pm, gain 0.987.</a:t>
             </a:r>
           </a:p>
         </p:txBody>
@@ -10882,15 +10882,14 @@
         </p:nvPicPr>
         <p:blipFill>
           <a:blip r:embed="rId3"/>
-          <a:srcRect r="2040" t="10160" b="12700"/>
           <a:stretch>
             <a:fillRect/>
           </a:stretch>
         </p:blipFill>
         <p:spPr>
           <a:xfrm>
-            <a:off x="4233672" y="2487168"/>
-            <a:ext cx="7790688" cy="1005840"/>
+            <a:off x="5212080" y="2340864"/>
+            <a:ext cx="6629400" cy="1161288"/>
           </a:xfrm>
           <a:prstGeom prst="rect">
             <a:avLst/>
@@ -10905,8 +10904,8 @@
         </p:nvSpPr>
         <p:spPr>
           <a:xfrm>
-            <a:off x="228600" y="2578608"/>
-            <a:ext cx="3886200" cy="1054608"/>
+            <a:off x="228600" y="2450592"/>
+            <a:ext cx="3931920" cy="889508"/>
           </a:xfrm>
           <a:prstGeom prst="rect">
             <a:avLst/>
@@ -10931,7 +10930,7 @@
                 </a:solidFill>
                 <a:latin typeface="Arial"/>
               </a:rPr>
-              <a:t>Stepped Zernike: the focal spot with the dimple's footprint; the dimple's phase; the reference wave the dimple makes from the beam; the clear frame and the first depth frame; the recovered surface; raw map minus the engine, 4.8 nm (the beam-made reference, which the matrix measured on the surface absorbs).</a:t>
+              <a:t>Stepped Zernike: the focal spot with the dimple's footprint; the dimple's phase; the reference wave the dimple makes from the beam; the clear frame and the first depth frame; the recovered surface, 24.6 nm rms; raw map minus the engine 7.1 nm, gain 0.78.</a:t>
             </a:r>
           </a:p>
         </p:txBody>
@@ -10946,15 +10945,14 @@
         </p:nvPicPr>
         <p:blipFill>
           <a:blip r:embed="rId4"/>
-          <a:srcRect r="2130" t="10080" b="10710"/>
           <a:stretch>
             <a:fillRect/>
           </a:stretch>
         </p:blipFill>
         <p:spPr>
           <a:xfrm>
-            <a:off x="4215384" y="3566160"/>
-            <a:ext cx="7781544" cy="1033271"/>
+            <a:off x="5212080" y="3557016"/>
+            <a:ext cx="6629400" cy="1143000"/>
           </a:xfrm>
           <a:prstGeom prst="rect">
             <a:avLst/>
@@ -10969,8 +10967,8 @@
         </p:nvSpPr>
         <p:spPr>
           <a:xfrm>
-            <a:off x="182880" y="3794760"/>
-            <a:ext cx="3931920" cy="559307"/>
+            <a:off x="182880" y="3666744"/>
+            <a:ext cx="3977639" cy="724408"/>
           </a:xfrm>
           <a:prstGeom prst="rect">
             <a:avLst/>
@@ -10995,7 +10993,7 @@
                 </a:solidFill>
                 <a:latin typeface="Arial"/>
               </a:rPr>
-              <a:t>Vector Zernike: the metasurface (+90° on one circular state, −90° on the other); camera A and camera B, both frames at once; the pixel-by-pixel solve; raw map minus the engine, 25 pm.</a:t>
+              <a:t>Vector Zernike: the metasurface (+90° on one circular state, −90° on the other); camera A and camera B, both frames at once; the pixel-by-pixel solve, 31.1 nm rms; raw map minus the engine 863 pm, gain 0.993 (200 pm of it on the flat: the arm term).</a:t>
             </a:r>
           </a:p>
         </p:txBody>
@@ -11010,15 +11008,14 @@
         </p:nvPicPr>
         <p:blipFill>
           <a:blip r:embed="rId5"/>
-          <a:srcRect r="1580" t="10550" b="11620"/>
           <a:stretch>
             <a:fillRect/>
           </a:stretch>
         </p:blipFill>
         <p:spPr>
           <a:xfrm>
-            <a:off x="4215384" y="4709160"/>
-            <a:ext cx="7827264" cy="1014984"/>
+            <a:off x="5212080" y="4754880"/>
+            <a:ext cx="6629400" cy="1143000"/>
           </a:xfrm>
           <a:prstGeom prst="rect">
             <a:avLst/>
@@ -11033,8 +11030,8 @@
         </p:nvSpPr>
         <p:spPr>
           <a:xfrm>
-            <a:off x="182880" y="4937760"/>
-            <a:ext cx="3931920" cy="724408"/>
+            <a:off x="182880" y="4864608"/>
+            <a:ext cx="3977639" cy="724408"/>
           </a:xfrm>
           <a:prstGeom prst="rect">
             <a:avLst/>
@@ -11059,7 +11056,7 @@
                 </a:solidFill>
                 <a:latin typeface="Arial"/>
               </a:rPr>
-              <a:t>Stepped pinhole: the pinhole plate (clear pinhole, the surround at 0.72); the first step frame and the shutter frame (the pinhole's light alone); the recovered surface; raw map minus the engine, 184 pm.</a:t>
+              <a:t>Stepped pinhole: the pinhole plate (clear pinhole, the surround at 0.72); the first step frame and the shutter frame (the pinhole's light alone); the recovered surface, 30.7 nm rms; raw map minus the engine 730 pm, gain 0.981.</a:t>
             </a:r>
           </a:p>
         </p:txBody>
@@ -11072,7 +11069,7 @@
         </p:nvSpPr>
         <p:spPr>
           <a:xfrm>
-            <a:off x="411480" y="5788152"/>
+            <a:off x="411480" y="5998464"/>
             <a:ext cx="11384280" cy="274320"/>
           </a:xfrm>
           <a:prstGeom prst="rect">
@@ -11092,7 +11089,7 @@
               </a:spcAft>
             </a:pPr>
             <a:r>
-              <a:rPr sz="1100" b="0">
+              <a:rPr sz="1000" b="0">
                 <a:solidFill>
                   <a:srgbClr val="282828"/>
                 </a:solidFill>
@@ -11101,22 +11098,22 @@
               <a:t>•  </a:t>
             </a:r>
             <a:r>
-              <a:rPr sz="1100" b="1">
+              <a:rPr sz="1000" b="1">
                 <a:solidFill>
                   <a:srgbClr val="282828"/>
                 </a:solidFill>
                 <a:latin typeface="Arial"/>
               </a:rPr>
-              <a:t>The stepped Zernike's 4.8 nm is a gain error, not noise:</a:t>
-            </a:r>
-            <a:r>
-              <a:rPr sz="1100" b="0">
+              <a:t>The stepped Zernike's 7.1 nm is a gain error, not noise:</a:t>
+            </a:r>
+            <a:r>
+              <a:rPr sz="1000" b="0">
                 <a:solidFill>
                   <a:srgbClr val="282828"/>
                 </a:solidFill>
                 <a:latin typeface="Arial"/>
               </a:rPr>
-              <a:t> its inversion takes the reference wave's amplitude from the flat, and on the 30 nm surface the focal core that makes it is weaker, so the raw map reads about 16 % low, shaped like the surface; the matrix measured on the surface absorbs it (5 pm calibrated).  The vector pair's two simultaneous frames divide the reference out: 25 pm raw.</a:t>
+              <a:t> its inversion takes the reference wave's amplitude from the flat; on the 30 nm surface the focal core is weaker, so the raw map reads 22 % low (gain 0.78), shaped like the surface, and the matrix measured on the surface absorbs it (5 pm calibrated).  The vector pair's two simultaneous frames need no amplitude from the flat: gain 0.993.</a:t>
             </a:r>
           </a:p>
         </p:txBody>
@@ -11129,8 +11126,8 @@
         </p:nvSpPr>
         <p:spPr>
           <a:xfrm>
-            <a:off x="411480" y="6327648"/>
-            <a:ext cx="11338560" cy="274320"/>
+            <a:off x="411480" y="6455664"/>
+            <a:ext cx="11384280" cy="274320"/>
           </a:xfrm>
           <a:prstGeom prst="rect">
             <a:avLst/>
@@ -11155,7 +11152,7 @@
                 </a:solidFill>
                 <a:latin typeface="Arial"/>
               </a:rPr>
-              <a:t>Row 2 of each gauge's station-by-station figure (the full figures, with the flat mirror as row 1, are in the backup).  Run tags redo96_oapstn (interferometer) and stations193 (the three sensors, 193 pixels per pupil).</a:t>
+              <a:t>Row 2 of each station figure, mirror rig, the same DM command in all four (30 nm rms over the lattice, seed 7); the full figures are in the backup.  The interferometer's camera sees 25.8 nm rms of it, the sensors' 31: the detector legs image the pupil differently (the pupil-image slide), and each matrix is measured through its own train.  Runs redo96_oapstn2, stations193_oap.</a:t>
             </a:r>
           </a:p>
         </p:txBody>
@@ -34238,7 +34235,7 @@
                 </a:solidFill>
                 <a:latin typeface="Arial"/>
               </a:rPr>
-              <a:t> (tg_psi_dm96_oap/runs): lens_deck, lens_deck_se2, lens_deck_se5, loop_lens, loop_lens_cam, loop_lens_intra, loop_lens_se2, descent_lens, oap_deck, loop_oap, descent_oap, oap_bareAl, oap_coat, oap_jones, zoap (the 7° rigs); lens22, lens22g, lens22h, node22t, fold1-4, loss, loss_src, loss_a2, conj, zseat, zseat2, oap22d, oapdraw3, oap22d_tail, tailA, tailB, oapifo2, oapifol2, oapdesc2, oapuw2, lensuw2, thk22, sub22, aoi_lens22, aoi_oap22, gate3_win, gate3_lens, wrapoap, wraplens, stnoap, stnlens, pupilq_lens, pupilq_oap (the 22.5° bench and the redesigned reflective rig); pdi_dm96/runs/psriclear2 (the P/SRI bench through the clearance tool).  Reports REPORT_gauge_ifo.md (CCMac) with REPORT_oap.md, REPORT_bench_realism.md and REPORT_reflective.md (TO), and README.md.</a:t>
+              <a:t> (tg_psi_dm96_oap/runs): lens_deck, lens_deck_se2, lens_deck_se5, loop_lens, loop_lens_cam, loop_lens_intra, loop_lens_se2, descent_lens, oap_deck, loop_oap, descent_oap, oap_bareAl, oap_coat, oap_jones, zoap (the 7° rigs); lens22, lens22g, lens22h, node22t, fold1-4, loss, loss_src, loss_a2, conj, zseat, zseat2, oap22d, oapdraw3, oap22d_tail, tailA, tailB, oapifo2, oapifol2, oapdesc2, oapuw2, lensuw2, thk22, sub22, aoi_lens22, aoi_oap22, gate3_win, gate3_lens, wrapoap, wraplens, stnoap, stnlens, pupilq_lens, pupilq_oap (the 22.5° bench and the redesigned reflective rig); pdi_dm96/runs/psriclear2 (the P/SRI bench through the clearance tool).  Reports REPORT_gauge_ifo.md (CCMac) with REPORT_oap.md, REPORT_bench_realism.md and REPORT_reflective.md (TO), and README.md, redo96_oapstn2.</a:t>
             </a:r>
           </a:p>
           <a:p>
@@ -34272,7 +34269,7 @@
                 </a:solidFill>
                 <a:latin typeface="Arial"/>
               </a:rPr>
-              <a:t> (zwfs_dm96/runs): matbase, matbase385, m2048, m2048_lat, cap385, cap385_b60-b160, noise193_b30-b160, rec193full, loop193, loop385, v193base, v193noise, vloop193, fold_diag, v2g, v2loop, v3arm, v3s, v3loop, an193_ref/cube/q300/q100/az1/bound/clear, stations193, gate22_193, sub22, thk22 (the 22.5° bench with substrates and thicknesses), oapsens22, oapsens22n, vqw22, vmap22, oaploop22, oapnoise22 (the sensors on the redesigned mirror rig).  README.md (CCL) and deck_zwfs.md.</a:t>
+              <a:t> (zwfs_dm96/runs): matbase, matbase385, m2048, m2048_lat, cap385, cap385_b60-b160, noise193_b30-b160, rec193full, loop193, loop385, v193base, v193noise, vloop193, fold_diag, v2g, v2loop, v3arm, v3s, v3loop, an193_ref/cube/q300/q100/az1/bound/clear, stations193, gate22_193, sub22, thk22 (the 22.5° bench with substrates and thicknesses), oapsens22, oapsens22n, vqw22, vmap22, oaploop22, oapnoise22 (the sensors on the redesigned mirror rig).  README.md (CCL) and deck_zwfs.md, stations193_oap.</a:t>
             </a:r>
           </a:p>
           <a:p>

--- a/demo_session/deck_gauges_edit.pptx
+++ b/demo_session/deck_gauges_edit.pptx
@@ -14506,7 +14506,7 @@
         </p:nvGraphicFramePr>
         <p:xfrm>
           <a:off x="411480" y="1298448"/>
-          <a:ext cx="11368734" cy="1960245"/>
+          <a:ext cx="11368733" cy="2806065"/>
         </p:xfrm>
         <a:graphic>
           <a:graphicData uri="http://schemas.openxmlformats.org/drawingml/2006/table">
@@ -14515,12 +14515,12 @@
                 <a:tableStyleId>{5C22544A-7EE6-4342-B048-85BDC9FD1C3A}</a:tableStyleId>
               </a:tblPr>
               <a:tblGrid>
-                <a:gridCol w="2884116"/>
-                <a:gridCol w="6157978"/>
-                <a:gridCol w="1163320"/>
-                <a:gridCol w="1163320"/>
+                <a:gridCol w="1951109"/>
+                <a:gridCol w="5642398"/>
+                <a:gridCol w="1740178"/>
+                <a:gridCol w="2035048"/>
               </a:tblGrid>
-              <a:tr h="280035">
+              <a:tr h="468630">
                 <a:tc>
                   <a:txBody>
                     <a:bodyPr wrap="square"/>
@@ -14606,6 +14606,176 @@
                   <a:tcPr marL="54864" marR="54864" marT="18288" marB="18288">
                     <a:solidFill>
                       <a:srgbClr val="1F4E79"/>
+                    </a:solidFill>
+                  </a:tcPr>
+                </a:tc>
+              </a:tr>
+              <a:tr h="468630">
+                <a:tc>
+                  <a:txBody>
+                    <a:bodyPr wrap="square"/>
+                    <a:lstStyle/>
+                    <a:p>
+                      <a:r>
+                        <a:rPr sz="1100" b="0">
+                          <a:solidFill>
+                            <a:srgbClr val="282828"/>
+                          </a:solidFill>
+                          <a:latin typeface="Arial"/>
+                        </a:rPr>
+                        <a:t>accuracy</a:t>
+                      </a:r>
+                    </a:p>
+                  </a:txBody>
+                  <a:tcPr marL="54864" marR="54864" marT="18288" marB="18288">
+                    <a:solidFill>
+                      <a:srgbClr val="FFFFFF"/>
+                    </a:solidFill>
+                  </a:tcPr>
+                </a:tc>
+                <a:tc>
+                  <a:txBody>
+                    <a:bodyPr wrap="square"/>
+                    <a:lstStyle/>
+                    <a:p>
+                      <a:r>
+                        <a:rPr sz="1100" b="0">
+                          <a:solidFill>
+                            <a:srgbClr val="282828"/>
+                          </a:solidFill>
+                          <a:latin typeface="Arial"/>
+                        </a:rPr>
+                        <a:t>a 10 nm change on one actuator, read through the matrix measured on the 30 nm surface: gain (error) / floor</a:t>
+                      </a:r>
+                    </a:p>
+                  </a:txBody>
+                  <a:tcPr marL="54864" marR="54864" marT="18288" marB="18288">
+                    <a:solidFill>
+                      <a:srgbClr val="FFFFFF"/>
+                    </a:solidFill>
+                  </a:tcPr>
+                </a:tc>
+                <a:tc>
+                  <a:txBody>
+                    <a:bodyPr wrap="square"/>
+                    <a:lstStyle/>
+                    <a:p>
+                      <a:r>
+                        <a:rPr sz="1100" b="0">
+                          <a:solidFill>
+                            <a:srgbClr val="282828"/>
+                          </a:solidFill>
+                          <a:latin typeface="Arial"/>
+                        </a:rPr>
+                        <a:t>1.004 (0.4 %) / 1.4 pm</a:t>
+                      </a:r>
+                    </a:p>
+                  </a:txBody>
+                  <a:tcPr marL="54864" marR="54864" marT="18288" marB="18288">
+                    <a:solidFill>
+                      <a:srgbClr val="FFFFFF"/>
+                    </a:solidFill>
+                  </a:tcPr>
+                </a:tc>
+                <a:tc>
+                  <a:txBody>
+                    <a:bodyPr wrap="square"/>
+                    <a:lstStyle/>
+                    <a:p>
+                      <a:r>
+                        <a:rPr sz="1100" b="0">
+                          <a:solidFill>
+                            <a:srgbClr val="282828"/>
+                          </a:solidFill>
+                          <a:latin typeface="Arial"/>
+                        </a:rPr>
+                        <a:t>0.986 (1.4 %) / 2.3 pm</a:t>
+                      </a:r>
+                    </a:p>
+                  </a:txBody>
+                  <a:tcPr marL="54864" marR="54864" marT="18288" marB="18288">
+                    <a:solidFill>
+                      <a:srgbClr val="FFFFFF"/>
+                    </a:solidFill>
+                  </a:tcPr>
+                </a:tc>
+              </a:tr>
+              <a:tr h="468630">
+                <a:tc>
+                  <a:txBody>
+                    <a:bodyPr wrap="square"/>
+                    <a:lstStyle/>
+                    <a:p/>
+                  </a:txBody>
+                  <a:tcPr marL="54864" marR="54864" marT="18288" marB="18288">
+                    <a:solidFill>
+                      <a:srgbClr val="ECF1F6"/>
+                    </a:solidFill>
+                  </a:tcPr>
+                </a:tc>
+                <a:tc>
+                  <a:txBody>
+                    <a:bodyPr wrap="square"/>
+                    <a:lstStyle/>
+                    <a:p>
+                      <a:r>
+                        <a:rPr sz="1100" b="0">
+                          <a:solidFill>
+                            <a:srgbClr val="282828"/>
+                          </a:solidFill>
+                          <a:latin typeface="Arial"/>
+                        </a:rPr>
+                        <a:t>the raw map of the 30 nm surface against the engine's field at the camera, before any calibration</a:t>
+                      </a:r>
+                    </a:p>
+                  </a:txBody>
+                  <a:tcPr marL="54864" marR="54864" marT="18288" marB="18288">
+                    <a:solidFill>
+                      <a:srgbClr val="ECF1F6"/>
+                    </a:solidFill>
+                  </a:tcPr>
+                </a:tc>
+                <a:tc>
+                  <a:txBody>
+                    <a:bodyPr wrap="square"/>
+                    <a:lstStyle/>
+                    <a:p>
+                      <a:r>
+                        <a:rPr sz="1100" b="0">
+                          <a:solidFill>
+                            <a:srgbClr val="282828"/>
+                          </a:solidFill>
+                          <a:latin typeface="Arial"/>
+                        </a:rPr>
+                        <a:t>not scored (a phase fold; backup)</a:t>
+                      </a:r>
+                    </a:p>
+                  </a:txBody>
+                  <a:tcPr marL="54864" marR="54864" marT="18288" marB="18288">
+                    <a:solidFill>
+                      <a:srgbClr val="ECF1F6"/>
+                    </a:solidFill>
+                  </a:tcPr>
+                </a:tc>
+                <a:tc>
+                  <a:txBody>
+                    <a:bodyPr wrap="square"/>
+                    <a:lstStyle/>
+                    <a:p>
+                      <a:r>
+                        <a:rPr sz="1100" b="0">
+                          <a:solidFill>
+                            <a:srgbClr val="282828"/>
+                          </a:solidFill>
+                          <a:latin typeface="Arial"/>
+                        </a:rPr>
+                        <a:t>1.5 % (463 pm), gain 0.987</a:t>
+                      </a:r>
+                    </a:p>
+                  </a:txBody>
+                  <a:tcPr marL="54864" marR="54864" marT="18288" marB="18288">
+                    <a:solidFill>
+                      <a:srgbClr val="ECF1F6"/>
                     </a:solidFill>
                   </a:tcPr>
                 </a:tc>
@@ -14615,81 +14785,71 @@
                   <a:txBody>
                     <a:bodyPr wrap="square"/>
                     <a:lstStyle/>
-                    <a:p>
-                      <a:r>
-                        <a:rPr sz="1100" b="0">
-                          <a:solidFill>
-                            <a:srgbClr val="282828"/>
-                          </a:solidFill>
-                          <a:latin typeface="Arial"/>
-                        </a:rPr>
-                        <a:t>accuracy</a:t>
-                      </a:r>
-                    </a:p>
-                  </a:txBody>
-                  <a:tcPr marL="54864" marR="54864" marT="18288" marB="18288">
-                    <a:solidFill>
-                      <a:srgbClr val="FFFFFF"/>
-                    </a:solidFill>
-                  </a:tcPr>
-                </a:tc>
-                <a:tc>
-                  <a:txBody>
-                    <a:bodyPr wrap="square"/>
-                    <a:lstStyle/>
-                    <a:p>
-                      <a:r>
-                        <a:rPr sz="1100" b="0">
-                          <a:solidFill>
-                            <a:srgbClr val="282828"/>
-                          </a:solidFill>
-                          <a:latin typeface="Arial"/>
-                        </a:rPr>
-                        <a:t>the imaging's error in reading a 30 nm working surface, piston and tilt removed</a:t>
-                      </a:r>
-                    </a:p>
-                  </a:txBody>
-                  <a:tcPr marL="54864" marR="54864" marT="18288" marB="18288">
-                    <a:solidFill>
-                      <a:srgbClr val="FFFFFF"/>
-                    </a:solidFill>
-                  </a:tcPr>
-                </a:tc>
-                <a:tc>
-                  <a:txBody>
-                    <a:bodyPr wrap="square"/>
-                    <a:lstStyle/>
-                    <a:p>
-                      <a:r>
-                        <a:rPr sz="1100" b="0">
-                          <a:solidFill>
-                            <a:srgbClr val="282828"/>
-                          </a:solidFill>
-                          <a:latin typeface="Arial"/>
-                        </a:rPr>
-                        <a:t>0.13 % (42 pm)</a:t>
-                      </a:r>
-                    </a:p>
-                  </a:txBody>
-                  <a:tcPr marL="54864" marR="54864" marT="18288" marB="18288">
-                    <a:solidFill>
-                      <a:srgbClr val="FFFFFF"/>
-                    </a:solidFill>
-                  </a:tcPr>
-                </a:tc>
-                <a:tc>
-                  <a:txBody>
-                    <a:bodyPr wrap="square"/>
-                    <a:lstStyle/>
-                    <a:p>
-                      <a:r>
-                        <a:rPr sz="1100" b="0">
-                          <a:solidFill>
-                            <a:srgbClr val="282828"/>
-                          </a:solidFill>
-                          <a:latin typeface="Arial"/>
-                        </a:rPr>
-                        <a:t>0.29 % (92 pm)</a:t>
+                    <a:p/>
+                  </a:txBody>
+                  <a:tcPr marL="54864" marR="54864" marT="18288" marB="18288">
+                    <a:solidFill>
+                      <a:srgbClr val="FFFFFF"/>
+                    </a:solidFill>
+                  </a:tcPr>
+                </a:tc>
+                <a:tc>
+                  <a:txBody>
+                    <a:bodyPr wrap="square"/>
+                    <a:lstStyle/>
+                    <a:p>
+                      <a:r>
+                        <a:rPr sz="1100" b="0">
+                          <a:solidFill>
+                            <a:srgbClr val="282828"/>
+                          </a:solidFill>
+                          <a:latin typeface="Arial"/>
+                        </a:rPr>
+                        <a:t>of which the pupil imaging, piston and tilt removed; in the top spatial band</a:t>
+                      </a:r>
+                    </a:p>
+                  </a:txBody>
+                  <a:tcPr marL="54864" marR="54864" marT="18288" marB="18288">
+                    <a:solidFill>
+                      <a:srgbClr val="FFFFFF"/>
+                    </a:solidFill>
+                  </a:tcPr>
+                </a:tc>
+                <a:tc>
+                  <a:txBody>
+                    <a:bodyPr wrap="square"/>
+                    <a:lstStyle/>
+                    <a:p>
+                      <a:r>
+                        <a:rPr sz="1100" b="0">
+                          <a:solidFill>
+                            <a:srgbClr val="282828"/>
+                          </a:solidFill>
+                          <a:latin typeface="Arial"/>
+                        </a:rPr>
+                        <a:t>0.13 % (42 pm); 0.5 %</a:t>
+                      </a:r>
+                    </a:p>
+                  </a:txBody>
+                  <a:tcPr marL="54864" marR="54864" marT="18288" marB="18288">
+                    <a:solidFill>
+                      <a:srgbClr val="FFFFFF"/>
+                    </a:solidFill>
+                  </a:tcPr>
+                </a:tc>
+                <a:tc>
+                  <a:txBody>
+                    <a:bodyPr wrap="square"/>
+                    <a:lstStyle/>
+                    <a:p>
+                      <a:r>
+                        <a:rPr sz="1100" b="0">
+                          <a:solidFill>
+                            <a:srgbClr val="282828"/>
+                          </a:solidFill>
+                          <a:latin typeface="Arial"/>
+                        </a:rPr>
+                        <a:t>0.29 % (92 pm); 0.9 %</a:t>
                       </a:r>
                     </a:p>
                   </a:txBody>
@@ -14705,7 +14865,17 @@
                   <a:txBody>
                     <a:bodyPr wrap="square"/>
                     <a:lstStyle/>
-                    <a:p/>
+                    <a:p>
+                      <a:r>
+                        <a:rPr sz="1100" b="0">
+                          <a:solidFill>
+                            <a:srgbClr val="282828"/>
+                          </a:solidFill>
+                          <a:latin typeface="Arial"/>
+                        </a:rPr>
+                        <a:t>precision</a:t>
+                      </a:r>
+                    </a:p>
                   </a:txBody>
                   <a:tcPr marL="54864" marR="54864" marT="18288" marB="18288">
                     <a:solidFill>
@@ -14725,7 +14895,7 @@
                           </a:solidFill>
                           <a:latin typeface="Arial"/>
                         </a:rPr>
-                        <a:t>the same, in the top spatial band (at the actuator Nyquist)</a:t>
+                        <a:t>one measurement, photon-limited, at 1e14 / 1e15 photons</a:t>
                       </a:r>
                     </a:p>
                   </a:txBody>
@@ -14747,7 +14917,7 @@
                           </a:solidFill>
                           <a:latin typeface="Arial"/>
                         </a:rPr>
-                        <a:t>0.5 %</a:t>
+                        <a:t>2.3 / 0.7 pm</a:t>
                       </a:r>
                     </a:p>
                   </a:txBody>
@@ -14769,7 +14939,7 @@
                           </a:solidFill>
                           <a:latin typeface="Arial"/>
                         </a:rPr>
-                        <a:t>0.9 %</a:t>
+                        <a:t>2.1 / 0.7 pm</a:t>
                       </a:r>
                     </a:p>
                   </a:txBody>
@@ -14793,73 +14963,73 @@
                           </a:solidFill>
                           <a:latin typeface="Arial"/>
                         </a:rPr>
-                        <a:t>precision</a:t>
-                      </a:r>
-                    </a:p>
-                  </a:txBody>
-                  <a:tcPr marL="54864" marR="54864" marT="18288" marB="18288">
-                    <a:solidFill>
-                      <a:srgbClr val="FFFFFF"/>
-                    </a:solidFill>
-                  </a:tcPr>
-                </a:tc>
-                <a:tc>
-                  <a:txBody>
-                    <a:bodyPr wrap="square"/>
-                    <a:lstStyle/>
-                    <a:p>
-                      <a:r>
-                        <a:rPr sz="1100" b="0">
-                          <a:solidFill>
-                            <a:srgbClr val="282828"/>
-                          </a:solidFill>
-                          <a:latin typeface="Arial"/>
-                        </a:rPr>
-                        <a:t>one measurement, photon-limited, at 1e14 / 1e15 photons</a:t>
-                      </a:r>
-                    </a:p>
-                  </a:txBody>
-                  <a:tcPr marL="54864" marR="54864" marT="18288" marB="18288">
-                    <a:solidFill>
-                      <a:srgbClr val="FFFFFF"/>
-                    </a:solidFill>
-                  </a:tcPr>
-                </a:tc>
-                <a:tc>
-                  <a:txBody>
-                    <a:bodyPr wrap="square"/>
-                    <a:lstStyle/>
-                    <a:p>
-                      <a:r>
-                        <a:rPr sz="1100" b="0">
-                          <a:solidFill>
-                            <a:srgbClr val="282828"/>
-                          </a:solidFill>
-                          <a:latin typeface="Arial"/>
-                        </a:rPr>
-                        <a:t>2.3 / 0.7 pm</a:t>
-                      </a:r>
-                    </a:p>
-                  </a:txBody>
-                  <a:tcPr marL="54864" marR="54864" marT="18288" marB="18288">
-                    <a:solidFill>
-                      <a:srgbClr val="FFFFFF"/>
-                    </a:solidFill>
-                  </a:tcPr>
-                </a:tc>
-                <a:tc>
-                  <a:txBody>
-                    <a:bodyPr wrap="square"/>
-                    <a:lstStyle/>
-                    <a:p>
-                      <a:r>
-                        <a:rPr sz="1100" b="0">
-                          <a:solidFill>
-                            <a:srgbClr val="282828"/>
-                          </a:solidFill>
-                          <a:latin typeface="Arial"/>
-                        </a:rPr>
-                        <a:t>2.1 / 0.7 pm</a:t>
+                        <a:t>repeatability</a:t>
+                      </a:r>
+                    </a:p>
+                  </a:txBody>
+                  <a:tcPr marL="54864" marR="54864" marT="18288" marB="18288">
+                    <a:solidFill>
+                      <a:srgbClr val="FFFFFF"/>
+                    </a:solidFill>
+                  </a:tcPr>
+                </a:tc>
+                <a:tc>
+                  <a:txBody>
+                    <a:bodyPr wrap="square"/>
+                    <a:lstStyle/>
+                    <a:p>
+                      <a:r>
+                        <a:rPr sz="1100" b="0">
+                          <a:solidFill>
+                            <a:srgbClr val="282828"/>
+                          </a:solidFill>
+                          <a:latin typeface="Arial"/>
+                        </a:rPr>
+                        <a:t>the same surface held in a servo, rms over 30 cycles, same photons</a:t>
+                      </a:r>
+                    </a:p>
+                  </a:txBody>
+                  <a:tcPr marL="54864" marR="54864" marT="18288" marB="18288">
+                    <a:solidFill>
+                      <a:srgbClr val="FFFFFF"/>
+                    </a:solidFill>
+                  </a:tcPr>
+                </a:tc>
+                <a:tc>
+                  <a:txBody>
+                    <a:bodyPr wrap="square"/>
+                    <a:lstStyle/>
+                    <a:p>
+                      <a:r>
+                        <a:rPr sz="1100" b="0">
+                          <a:solidFill>
+                            <a:srgbClr val="282828"/>
+                          </a:solidFill>
+                          <a:latin typeface="Arial"/>
+                        </a:rPr>
+                        <a:t>1.4 / 0.5 pm</a:t>
+                      </a:r>
+                    </a:p>
+                  </a:txBody>
+                  <a:tcPr marL="54864" marR="54864" marT="18288" marB="18288">
+                    <a:solidFill>
+                      <a:srgbClr val="FFFFFF"/>
+                    </a:solidFill>
+                  </a:tcPr>
+                </a:tc>
+                <a:tc>
+                  <a:txBody>
+                    <a:bodyPr wrap="square"/>
+                    <a:lstStyle/>
+                    <a:p>
+                      <a:r>
+                        <a:rPr sz="1100" b="0">
+                          <a:solidFill>
+                            <a:srgbClr val="282828"/>
+                          </a:solidFill>
+                          <a:latin typeface="Arial"/>
+                        </a:rPr>
+                        <a:t>1.3 / 0.4 pm</a:t>
                       </a:r>
                     </a:p>
                   </a:txBody>
@@ -14883,7 +15053,7 @@
                           </a:solidFill>
                           <a:latin typeface="Arial"/>
                         </a:rPr>
-                        <a:t>repeatability</a:t>
+                        <a:t>hold</a:t>
                       </a:r>
                     </a:p>
                   </a:txBody>
@@ -14905,7 +15075,7 @@
                           </a:solidFill>
                           <a:latin typeface="Arial"/>
                         </a:rPr>
-                        <a:t>the same surface held in a servo, rms over 30 cycles, same photons</a:t>
+                        <a:t>photons per cycle to keep the surface inside 3 pm</a:t>
                       </a:r>
                     </a:p>
                   </a:txBody>
@@ -14927,7 +15097,7 @@
                           </a:solidFill>
                           <a:latin typeface="Arial"/>
                         </a:rPr>
-                        <a:t>1.4 / 0.5 pm</a:t>
+                        <a:t>2.3e13</a:t>
                       </a:r>
                     </a:p>
                   </a:txBody>
@@ -14949,7 +15119,7 @@
                           </a:solidFill>
                           <a:latin typeface="Arial"/>
                         </a:rPr>
-                        <a:t>1.3 / 0.4 pm</a:t>
+                        <a:t>2.0e13</a:t>
                       </a:r>
                     </a:p>
                   </a:txBody>
@@ -14965,101 +15135,11 @@
                   <a:txBody>
                     <a:bodyPr wrap="square"/>
                     <a:lstStyle/>
-                    <a:p>
-                      <a:r>
-                        <a:rPr sz="1100" b="0">
-                          <a:solidFill>
-                            <a:srgbClr val="282828"/>
-                          </a:solidFill>
-                          <a:latin typeface="Arial"/>
-                        </a:rPr>
-                        <a:t>hold</a:t>
-                      </a:r>
-                    </a:p>
-                  </a:txBody>
-                  <a:tcPr marL="54864" marR="54864" marT="18288" marB="18288">
-                    <a:solidFill>
-                      <a:srgbClr val="FFFFFF"/>
-                    </a:solidFill>
-                  </a:tcPr>
-                </a:tc>
-                <a:tc>
-                  <a:txBody>
-                    <a:bodyPr wrap="square"/>
-                    <a:lstStyle/>
-                    <a:p>
-                      <a:r>
-                        <a:rPr sz="1100" b="0">
-                          <a:solidFill>
-                            <a:srgbClr val="282828"/>
-                          </a:solidFill>
-                          <a:latin typeface="Arial"/>
-                        </a:rPr>
-                        <a:t>photons per cycle to keep the surface inside 3 pm</a:t>
-                      </a:r>
-                    </a:p>
-                  </a:txBody>
-                  <a:tcPr marL="54864" marR="54864" marT="18288" marB="18288">
-                    <a:solidFill>
-                      <a:srgbClr val="FFFFFF"/>
-                    </a:solidFill>
-                  </a:tcPr>
-                </a:tc>
-                <a:tc>
-                  <a:txBody>
-                    <a:bodyPr wrap="square"/>
-                    <a:lstStyle/>
-                    <a:p>
-                      <a:r>
-                        <a:rPr sz="1100" b="0">
-                          <a:solidFill>
-                            <a:srgbClr val="282828"/>
-                          </a:solidFill>
-                          <a:latin typeface="Arial"/>
-                        </a:rPr>
-                        <a:t>2.3e13</a:t>
-                      </a:r>
-                    </a:p>
-                  </a:txBody>
-                  <a:tcPr marL="54864" marR="54864" marT="18288" marB="18288">
-                    <a:solidFill>
-                      <a:srgbClr val="FFFFFF"/>
-                    </a:solidFill>
-                  </a:tcPr>
-                </a:tc>
-                <a:tc>
-                  <a:txBody>
-                    <a:bodyPr wrap="square"/>
-                    <a:lstStyle/>
-                    <a:p>
-                      <a:r>
-                        <a:rPr sz="1100" b="0">
-                          <a:solidFill>
-                            <a:srgbClr val="282828"/>
-                          </a:solidFill>
-                          <a:latin typeface="Arial"/>
-                        </a:rPr>
-                        <a:t>2.0e13</a:t>
-                      </a:r>
-                    </a:p>
-                  </a:txBody>
-                  <a:tcPr marL="54864" marR="54864" marT="18288" marB="18288">
-                    <a:solidFill>
-                      <a:srgbClr val="FFFFFF"/>
-                    </a:solidFill>
-                  </a:tcPr>
-                </a:tc>
-              </a:tr>
-              <a:tr h="280035">
-                <a:tc>
-                  <a:txBody>
-                    <a:bodyPr wrap="square"/>
-                    <a:lstStyle/>
                     <a:p/>
                   </a:txBody>
                   <a:tcPr marL="54864" marR="54864" marT="18288" marB="18288">
                     <a:solidFill>
-                      <a:srgbClr val="ECF1F6"/>
+                      <a:srgbClr val="FFFFFF"/>
                     </a:solidFill>
                   </a:tcPr>
                 </a:tc>
@@ -15081,7 +15161,7 @@
                   </a:txBody>
                   <a:tcPr marL="54864" marR="54864" marT="18288" marB="18288">
                     <a:solidFill>
-                      <a:srgbClr val="ECF1F6"/>
+                      <a:srgbClr val="FFFFFF"/>
                     </a:solidFill>
                   </a:tcPr>
                 </a:tc>
@@ -15103,7 +15183,7 @@
                   </a:txBody>
                   <a:tcPr marL="54864" marR="54864" marT="18288" marB="18288">
                     <a:solidFill>
-                      <a:srgbClr val="ECF1F6"/>
+                      <a:srgbClr val="FFFFFF"/>
                     </a:solidFill>
                   </a:tcPr>
                 </a:tc>
@@ -15125,7 +15205,7 @@
                   </a:txBody>
                   <a:tcPr marL="54864" marR="54864" marT="18288" marB="18288">
                     <a:solidFill>
-                      <a:srgbClr val="ECF1F6"/>
+                      <a:srgbClr val="FFFFFF"/>
                     </a:solidFill>
                   </a:tcPr>
                 </a:tc>
@@ -15142,7 +15222,7 @@
         </p:nvSpPr>
         <p:spPr>
           <a:xfrm>
-            <a:off x="411480" y="3404997"/>
+            <a:off x="411480" y="4250817"/>
             <a:ext cx="11368735" cy="274320"/>
           </a:xfrm>
           <a:prstGeom prst="rect">
@@ -15162,7 +15242,7 @@
               </a:spcAft>
             </a:pPr>
             <a:r>
-              <a:rPr sz="1500" b="0">
+              <a:rPr sz="1200" b="0">
                 <a:solidFill>
                   <a:srgbClr val="282828"/>
                 </a:solidFill>
@@ -15171,7 +15251,7 @@
               <a:t>•  </a:t>
             </a:r>
             <a:r>
-              <a:rPr sz="1500" b="1">
+              <a:rPr sz="1200" b="1">
                 <a:solidFill>
                   <a:srgbClr val="282828"/>
                 </a:solidFill>
@@ -15180,7 +15260,7 @@
               <a:t>Picometer measurement is photon-limited, not bench-limited.</a:t>
             </a:r>
             <a:r>
-              <a:rPr sz="1500" b="0">
+              <a:rPr sz="1200" b="0">
                 <a:solidFill>
                   <a:srgbClr val="282828"/>
                 </a:solidFill>
@@ -15189,7 +15269,7 @@
               <a:t>  One measurement at 1e15 photons — 0.31 mJ, about 1.3 s of a 1 mW laser — repeats to 0.7 pm, and a servo fed at that rate holds under half a picometer.  Both front ends agree to within 10 %.  For scale, </a:t>
             </a:r>
             <a:r>
-              <a:rPr sz="1500" b="1">
+              <a:rPr sz="1200" b="1">
                 <a:solidFill>
                   <a:srgbClr val="282828"/>
                 </a:solidFill>
@@ -15198,7 +15278,7 @@
               <a:t>Steeves et al. (2020, Optica 7, 1267) demonstrate 1.6 pm in 4.3 s on a real interferometer</a:t>
             </a:r>
             <a:r>
-              <a:rPr sz="1500" b="0">
+              <a:rPr sz="1200" b="0">
                 <a:solidFill>
                   <a:srgbClr val="282828"/>
                 </a:solidFill>
@@ -15214,7 +15294,7 @@
               </a:spcAft>
             </a:pPr>
             <a:r>
-              <a:rPr sz="1500" b="0">
+              <a:rPr sz="1200" b="0">
                 <a:solidFill>
                   <a:srgbClr val="282828"/>
                 </a:solidFill>
@@ -15223,22 +15303,22 @@
               <a:t>•  </a:t>
             </a:r>
             <a:r>
-              <a:rPr sz="1500" b="1">
+              <a:rPr sz="1200" b="1">
                 <a:solidFill>
                   <a:srgbClr val="282828"/>
                 </a:solidFill>
                 <a:latin typeface="Arial"/>
               </a:rPr>
-              <a:t>Accuracy is systematic and proportional</a:t>
-            </a:r>
-            <a:r>
-              <a:rPr sz="1500" b="0">
+              <a:t>Accuracy is a gain: systematic and proportional to the figure read.</a:t>
+            </a:r>
+            <a:r>
+              <a:rPr sz="1200" b="0">
                 <a:solidFill>
                   <a:srgbClr val="282828"/>
                 </a:solidFill>
                 <a:latin typeface="Arial"/>
               </a:rPr>
-              <a:t> — a fraction of the figure read, so 30 nm costs tens of picometers and a 200 nm capture figure costs hundreds.  It holds because the response matrix is measured on the surface, not assumed geometric.</a:t>
+              <a:t>  Raw, the four-step reads the 30 nm surface 1.3 % low on the mirror rig (463 pm); through the matrix measured on the surface a 10 nm change reads at gain 1.004 on lenses and 0.986 on mirrors, with floors of 1.4 and 2.3 pm.  The pupil imaging is the smaller part (0.13 % / 0.29 %); the gain is the polarization snapshot's, and the matrix measured on the surface is what carries it.</a:t>
             </a:r>
           </a:p>
           <a:p>
@@ -15248,7 +15328,7 @@
               </a:spcAft>
             </a:pPr>
             <a:r>
-              <a:rPr sz="1500" b="0">
+              <a:rPr sz="1200" b="0">
                 <a:solidFill>
                   <a:srgbClr val="282828"/>
                 </a:solidFill>
@@ -15257,7 +15337,7 @@
               <a:t>•  </a:t>
             </a:r>
             <a:r>
-              <a:rPr sz="1500" b="1">
+              <a:rPr sz="1200" b="1">
                 <a:solidFill>
                   <a:srgbClr val="282828"/>
                 </a:solidFill>
@@ -15266,7 +15346,7 @@
               <a:t>One disturbance is not photon-limited:</a:t>
             </a:r>
             <a:r>
-              <a:rPr sz="1500" b="0">
+              <a:rPr sz="1200" b="0">
                 <a:solidFill>
                   <a:srgbClr val="282828"/>
                 </a:solidFill>
@@ -15285,7 +15365,7 @@
         </p:nvSpPr>
         <p:spPr>
           <a:xfrm>
-            <a:off x="457200" y="5760720"/>
+            <a:off x="457200" y="6199632"/>
             <a:ext cx="11365992" cy="274320"/>
           </a:xfrm>
           <a:prstGeom prst="rect">
@@ -15311,7 +15391,7 @@
                 </a:solidFill>
                 <a:latin typeface="Arial"/>
               </a:rPr>
-              <a:t>The table is the interferometer's, the one gauge scored on both front ends; the three sensors, scored on the mirror rig, read within 1 % and 2 pm of it on the same surface (the side-by-side slide).  A 10 nm single-actuator change, what the servo corrects, reads against truth to 1.5 pm at gain 1.001 on lenses and 1.8 pm at 0.993 on mirrors.  Run tags are on the provenance slide and on each slide that derives a number.</a:t>
+              <a:t>The table is the interferometer's, the one gauge scored on both front ends; the three sensors, scored on the mirror rig, read within 1 % and 2 pm of it on the same surface (the side-by-side slide).  The raw-map row is the station-by-station figure's number (run redo96_oapstn2); the lens rig's raw absolute map folds the phase (51 nm against the engine, backup) and is not scored, while its differential rows read as the mirror rig's.  Run tags are on the provenance slide and on each slide that derives a number.</a:t>
             </a:r>
           </a:p>
         </p:txBody>

--- a/demo_session/deck_gauges_edit.pptx
+++ b/demo_session/deck_gauges_edit.pptx
@@ -5287,7 +5287,7 @@
                 </a:solidFill>
                 <a:latin typeface="Arial"/>
               </a:rPr>
-              <a:t>Run tag redo96_oapstn2 (the mirror rig; the DM's full-lattice 30 nm command, seed 7, the same surface in every station figure).  The lens rig's figure exists but its absolute residual reads 51 nm against the engine — a fold of the phase, not an imaging error (its differential rows read the same as the mirror rig's); under investigation, so it is not shown.</a:t>
+              <a:t>Run tag redo96_oapstn2 (the mirror rig; the DM's full-lattice 30 nm command, seed 7, the same surface in every station figure).  The lens rig's figure (redo96_lensstn2) reads 350 pm at gain 0.993 once the four-step's sign is set by a +50 nm push: the two rigs' polarization inputs ('collimated' on lenses, at the source on mirrors) give opposite fringe directions with the analyzer, so the lens rig's raw map came out as the negative of the surface (the 51 nm residual of the 09-17 figure was 2 x the surface, not a fold); every differential row carries the sign in its matrix and never saw it.</a:t>
             </a:r>
           </a:p>
         </p:txBody>
@@ -14506,7 +14506,7 @@
         </p:nvGraphicFramePr>
         <p:xfrm>
           <a:off x="411480" y="1298448"/>
-          <a:ext cx="11368733" cy="2806065"/>
+          <a:ext cx="11368734" cy="2994660"/>
         </p:xfrm>
         <a:graphic>
           <a:graphicData uri="http://schemas.openxmlformats.org/drawingml/2006/table">
@@ -14515,9 +14515,9 @@
                 <a:tableStyleId>{5C22544A-7EE6-4342-B048-85BDC9FD1C3A}</a:tableStyleId>
               </a:tblPr>
               <a:tblGrid>
-                <a:gridCol w="1951109"/>
-                <a:gridCol w="5642398"/>
-                <a:gridCol w="1740178"/>
+                <a:gridCol w="1875344"/>
+                <a:gridCol w="5423294"/>
+                <a:gridCol w="2035048"/>
                 <a:gridCol w="2035048"/>
               </a:tblGrid>
               <a:tr h="468630">
@@ -14747,7 +14747,7 @@
                           </a:solidFill>
                           <a:latin typeface="Arial"/>
                         </a:rPr>
-                        <a:t>not scored (a phase fold; backup)</a:t>
+                        <a:t>1.4 % (350 pm), gain 0.993</a:t>
                       </a:r>
                     </a:p>
                   </a:txBody>
@@ -14780,7 +14780,7 @@
                   </a:tcPr>
                 </a:tc>
               </a:tr>
-              <a:tr h="280035">
+              <a:tr h="468630">
                 <a:tc>
                   <a:txBody>
                     <a:bodyPr wrap="square"/>
@@ -15222,7 +15222,7 @@
         </p:nvSpPr>
         <p:spPr>
           <a:xfrm>
-            <a:off x="411480" y="4250817"/>
+            <a:off x="411480" y="4439412"/>
             <a:ext cx="11368735" cy="274320"/>
           </a:xfrm>
           <a:prstGeom prst="rect">
@@ -15318,7 +15318,7 @@
                 </a:solidFill>
                 <a:latin typeface="Arial"/>
               </a:rPr>
-              <a:t>  Raw, the four-step reads the 30 nm surface 1.3 % low on the mirror rig (463 pm); through the matrix measured on the surface a 10 nm change reads at gain 1.004 on lenses and 0.986 on mirrors, with floors of 1.4 and 2.3 pm.  The pupil imaging is the smaller part (0.13 % / 0.29 %); the gain is the polarization snapshot's, and the matrix measured on the surface is what carries it.</a:t>
+              <a:t>  Raw, the four-step reads the 30 nm surface 0.7 % low on lenses (350 pm) and 1.3 % low on mirrors (463 pm); through the matrix measured on the surface a 10 nm change reads at gain 1.004 on lenses and 0.986 on mirrors, with floors of 1.4 and 2.3 pm.  The pupil imaging is the smaller part (0.13 % / 0.29 %); the gain is the polarization snapshot's, and the matrix measured on the surface is what carries it.</a:t>
             </a:r>
           </a:p>
           <a:p>
@@ -15391,7 +15391,7 @@
                 </a:solidFill>
                 <a:latin typeface="Arial"/>
               </a:rPr>
-              <a:t>The table is the interferometer's, the one gauge scored on both front ends; the three sensors, scored on the mirror rig, read within 1 % and 2 pm of it on the same surface (the side-by-side slide).  The raw-map row is the station-by-station figure's number (run redo96_oapstn2); the lens rig's raw absolute map folds the phase (51 nm against the engine, backup) and is not scored, while its differential rows read as the mirror rig's.  Run tags are on the provenance slide and on each slide that derives a number.</a:t>
+              <a:t>The table is the interferometer's, the one gauge scored on both front ends; the three sensors, scored on the mirror rig, read within 1 % and 2 pm of it on the same surface (the side-by-side slide).  The raw-map row is the station-by-station figure's number (runs redo96_lensstn2, redo96_oapstn2), the four-step's sign set by a +50 nm push as on a real interferometer: the two rigs' polarization inputs give opposite fringe directions, which the matrix carries and an absolute map does not (the lens rig's earlier 51 nm 'fold' was the sign).  Run tags are on the provenance slide and on each slide that derives a number.</a:t>
             </a:r>
           </a:p>
         </p:txBody>

--- a/demo_session/deck_gauges_edit.pptx
+++ b/demo_session/deck_gauges_edit.pptx
@@ -4429,7 +4429,7 @@
                 </a:solidFill>
                 <a:latin typeface="Arial"/>
               </a:rPr>
-              <a:t> the test beam from the mirror interferes with the flat's beam; four frames at four phase steps give the phase at every pixel.  The snapshot form takes the four frames at once through polarization optics (no drift within a scan); the piezo form steps the flat in time (no polarization systematics).  Each removes the other's error.</a:t>
+              <a:t> the test beam from the mirror interferes with the flat's beam; four frames at four phase steps give the phase at every pixel.  The snapshot form takes the four frames at once through polarization optics (no drift within a scan); the piezo form steps the flat in time (no polarization systematics).  Each removes the other's error, measured: on the 30 nm surface the snapshot's raw map reads the engine's field at gain 0.993 (lenses) / 0.987 (mirrors), the piezo four-step at gain 1.0000, 0.01 pm (station figures) -- the piezo leg sets the snapshot's gain, the snapshot then reads every change without drift.</a:t>
             </a:r>
           </a:p>
           <a:p>
@@ -5149,8 +5149,8 @@
         </p:blipFill>
         <p:spPr>
           <a:xfrm>
-            <a:off x="1713761" y="1298448"/>
-            <a:ext cx="8764172" cy="2531872"/>
+            <a:off x="1226862" y="1298448"/>
+            <a:ext cx="9737969" cy="2531872"/>
           </a:xfrm>
           <a:prstGeom prst="rect">
             <a:avLst/>
@@ -5287,7 +5287,7 @@
                 </a:solidFill>
                 <a:latin typeface="Arial"/>
               </a:rPr>
-              <a:t>Run tag redo96_oapstn2 (the mirror rig; the DM's full-lattice 30 nm command, seed 7, the same surface in every station figure).  The lens rig's figure (redo96_lensstn2) reads 350 pm at gain 0.993 once the four-step's sign is set by a +50 nm push: the two rigs' polarization inputs ('collimated' on lenses, at the source on mirrors) give opposite fringe directions with the analyzer, so the lens rig's raw map came out as the negative of the surface (the 51 nm residual of the 09-17 figure was 2 x the surface, not a fold); every differential row carries the sign in its matrix and never saw it.</a:t>
+              <a:t>Run tag redo96_oapstn2 (the mirror rig; the DM's full-lattice 30 nm command, seed 7, the same surface in every station figure).  The lens rig's figure (redo96_lensstn2) reads 350 pm at gain 0.993 once the four-step's sign is set by a +50 nm push: the two rigs' polarization inputs ('collimated' on lenses, at the source on mirrors) give opposite fringe directions with the analyzer, so the lens rig's raw map came out as the negative of the surface (the 51 nm residual of the 09-17 figure was 2 x the surface, not a fold); every differential row carries the sign in its matrix and never saw it.  The eighth column is the hybrid's piezo four-step on the same frames' fields: 0.01 pm, gain 1.0000 on both rigs -- the snapshot's gain is a polarization term and the piezo leg is its calibration.</a:t>
             </a:r>
           </a:p>
         </p:txBody>
@@ -10826,7 +10826,7 @@
         <p:spPr>
           <a:xfrm>
             <a:off x="5212080" y="1060704"/>
-            <a:ext cx="6629400" cy="1225296"/>
+            <a:ext cx="6629400" cy="1124712"/>
           </a:xfrm>
           <a:prstGeom prst="rect">
             <a:avLst/>
@@ -10842,7 +10842,7 @@
         <p:spPr>
           <a:xfrm>
             <a:off x="228600" y="1170432"/>
-            <a:ext cx="3931920" cy="724408"/>
+            <a:ext cx="3931920" cy="889508"/>
           </a:xfrm>
           <a:prstGeom prst="rect">
             <a:avLst/>
@@ -10867,7 +10867,7 @@
                 </a:solidFill>
                 <a:latin typeface="Arial"/>
               </a:rPr>
-              <a:t>Interferometer (hybrid): the command; the test and reference arms at the camera; two of the four phase-stepped frames; the recovered surface, 25.8 nm rms; the raw map minus the engine's field, 463 pm, gain 0.987.</a:t>
+              <a:t>Interferometer (hybrid): the command; the test and reference arms at the camera; two of the four phase-stepped frames; the recovered surface, 25.8 nm rms; the snapshot's raw map minus the engine's field, 463 pm, gain 0.987; the piezo four-step's, 0.01 pm, gain 1.0000.</a:t>
             </a:r>
           </a:p>
         </p:txBody>
@@ -10888,7 +10888,7 @@
         </p:blipFill>
         <p:spPr>
           <a:xfrm>
-            <a:off x="5212080" y="2340864"/>
+            <a:off x="5212080" y="2240280"/>
             <a:ext cx="6629400" cy="1161288"/>
           </a:xfrm>
           <a:prstGeom prst="rect">
@@ -10904,7 +10904,7 @@
         </p:nvSpPr>
         <p:spPr>
           <a:xfrm>
-            <a:off x="228600" y="2450592"/>
+            <a:off x="228600" y="2350008"/>
             <a:ext cx="3931920" cy="889508"/>
           </a:xfrm>
           <a:prstGeom prst="rect">
@@ -10951,7 +10951,7 @@
         </p:blipFill>
         <p:spPr>
           <a:xfrm>
-            <a:off x="5212080" y="3557016"/>
+            <a:off x="5212080" y="3456432"/>
             <a:ext cx="6629400" cy="1143000"/>
           </a:xfrm>
           <a:prstGeom prst="rect">
@@ -10967,7 +10967,7 @@
         </p:nvSpPr>
         <p:spPr>
           <a:xfrm>
-            <a:off x="182880" y="3666744"/>
+            <a:off x="182880" y="3566160"/>
             <a:ext cx="3977639" cy="724408"/>
           </a:xfrm>
           <a:prstGeom prst="rect">
@@ -11014,7 +11014,7 @@
         </p:blipFill>
         <p:spPr>
           <a:xfrm>
-            <a:off x="5212080" y="4754880"/>
+            <a:off x="5212080" y="4654296"/>
             <a:ext cx="6629400" cy="1143000"/>
           </a:xfrm>
           <a:prstGeom prst="rect">
@@ -11030,7 +11030,7 @@
         </p:nvSpPr>
         <p:spPr>
           <a:xfrm>
-            <a:off x="182880" y="4864608"/>
+            <a:off x="182880" y="4764024"/>
             <a:ext cx="3977639" cy="724408"/>
           </a:xfrm>
           <a:prstGeom prst="rect">
@@ -11069,7 +11069,7 @@
         </p:nvSpPr>
         <p:spPr>
           <a:xfrm>
-            <a:off x="411480" y="5998464"/>
+            <a:off x="411480" y="5897880"/>
             <a:ext cx="11384280" cy="274320"/>
           </a:xfrm>
           <a:prstGeom prst="rect">
@@ -11126,7 +11126,7 @@
         </p:nvSpPr>
         <p:spPr>
           <a:xfrm>
-            <a:off x="411480" y="6455664"/>
+            <a:off x="411480" y="6355080"/>
             <a:ext cx="11384280" cy="274320"/>
           </a:xfrm>
           <a:prstGeom prst="rect">
@@ -14506,7 +14506,7 @@
         </p:nvGraphicFramePr>
         <p:xfrm>
           <a:off x="411480" y="1298448"/>
-          <a:ext cx="11368734" cy="2994660"/>
+          <a:ext cx="11368733" cy="2806065"/>
         </p:xfrm>
         <a:graphic>
           <a:graphicData uri="http://schemas.openxmlformats.org/drawingml/2006/table">
@@ -14515,10 +14515,10 @@
                 <a:tableStyleId>{5C22544A-7EE6-4342-B048-85BDC9FD1C3A}</a:tableStyleId>
               </a:tblPr>
               <a:tblGrid>
-                <a:gridCol w="1875344"/>
-                <a:gridCol w="5423294"/>
-                <a:gridCol w="2035048"/>
-                <a:gridCol w="2035048"/>
+                <a:gridCol w="1450493"/>
+                <a:gridCol w="6076392"/>
+                <a:gridCol w="1920924"/>
+                <a:gridCol w="1920924"/>
               </a:tblGrid>
               <a:tr h="468630">
                 <a:tc>
@@ -14725,7 +14725,7 @@
                           </a:solidFill>
                           <a:latin typeface="Arial"/>
                         </a:rPr>
-                        <a:t>the raw map of the 30 nm surface against the engine's field at the camera, before any calibration</a:t>
+                        <a:t>the raw map of the 30 nm surface against the engine's field at the camera, before any calibration: the polarization snapshot / the hybrid's piezo four-step</a:t>
                       </a:r>
                     </a:p>
                   </a:txBody>
@@ -14747,7 +14747,7 @@
                           </a:solidFill>
                           <a:latin typeface="Arial"/>
                         </a:rPr>
-                        <a:t>1.4 % (350 pm), gain 0.993</a:t>
+                        <a:t>1.4 % (350 pm), gain 0.993 / 0.01 pm, gain 1.0000</a:t>
                       </a:r>
                     </a:p>
                   </a:txBody>
@@ -14769,7 +14769,7 @@
                           </a:solidFill>
                           <a:latin typeface="Arial"/>
                         </a:rPr>
-                        <a:t>1.5 % (463 pm), gain 0.987</a:t>
+                        <a:t>1.5 % (463 pm), gain 0.987 / 0.01 pm, gain 1.0000</a:t>
                       </a:r>
                     </a:p>
                   </a:txBody>
@@ -14780,7 +14780,7 @@
                   </a:tcPr>
                 </a:tc>
               </a:tr>
-              <a:tr h="468630">
+              <a:tr h="280035">
                 <a:tc>
                   <a:txBody>
                     <a:bodyPr wrap="square"/>
@@ -15222,7 +15222,7 @@
         </p:nvSpPr>
         <p:spPr>
           <a:xfrm>
-            <a:off x="411480" y="4439412"/>
+            <a:off x="411480" y="4250817"/>
             <a:ext cx="11368735" cy="274320"/>
           </a:xfrm>
           <a:prstGeom prst="rect">
@@ -15242,7 +15242,7 @@
               </a:spcAft>
             </a:pPr>
             <a:r>
-              <a:rPr sz="1200" b="0">
+              <a:rPr sz="1100" b="0">
                 <a:solidFill>
                   <a:srgbClr val="282828"/>
                 </a:solidFill>
@@ -15251,7 +15251,7 @@
               <a:t>•  </a:t>
             </a:r>
             <a:r>
-              <a:rPr sz="1200" b="1">
+              <a:rPr sz="1100" b="1">
                 <a:solidFill>
                   <a:srgbClr val="282828"/>
                 </a:solidFill>
@@ -15260,16 +15260,16 @@
               <a:t>Picometer measurement is photon-limited, not bench-limited.</a:t>
             </a:r>
             <a:r>
-              <a:rPr sz="1200" b="0">
+              <a:rPr sz="1100" b="0">
                 <a:solidFill>
                   <a:srgbClr val="282828"/>
                 </a:solidFill>
                 <a:latin typeface="Arial"/>
               </a:rPr>
-              <a:t>  One measurement at 1e15 photons — 0.31 mJ, about 1.3 s of a 1 mW laser — repeats to 0.7 pm, and a servo fed at that rate holds under half a picometer.  Both front ends agree to within 10 %.  For scale, </a:t>
-            </a:r>
-            <a:r>
-              <a:rPr sz="1200" b="1">
+              <a:t>  One measurement at 1e15 photons — 0.31 mJ, 1.3 s of a 1 mW laser — repeats to 0.7 pm, and a servo fed at that rate holds under half a picometer; both front ends agree within 10 %.  For scale, </a:t>
+            </a:r>
+            <a:r>
+              <a:rPr sz="1100" b="1">
                 <a:solidFill>
                   <a:srgbClr val="282828"/>
                 </a:solidFill>
@@ -15278,13 +15278,13 @@
               <a:t>Steeves et al. (2020, Optica 7, 1267) demonstrate 1.6 pm in 4.3 s on a real interferometer</a:t>
             </a:r>
             <a:r>
-              <a:rPr sz="1200" b="0">
+              <a:rPr sz="1100" b="0">
                 <a:solidFill>
                   <a:srgbClr val="282828"/>
                 </a:solidFill>
                 <a:latin typeface="Arial"/>
               </a:rPr>
-              <a:t>: ours is photon-limited only, carrying no vibration, thermal drift or detector systematics, so it is the floor this design allows rather than a prediction of the built bench — and agreeing within a factor of two is the check that the model is in the right regime.</a:t>
+              <a:t>: ours is photon-limited only (no vibration, thermal drift or detector systematics), the floor this design allows rather than a prediction of the built bench; agreeing within a factor of two says the model is in the right regime.</a:t>
             </a:r>
           </a:p>
           <a:p>
@@ -15294,7 +15294,7 @@
               </a:spcAft>
             </a:pPr>
             <a:r>
-              <a:rPr sz="1200" b="0">
+              <a:rPr sz="1100" b="0">
                 <a:solidFill>
                   <a:srgbClr val="282828"/>
                 </a:solidFill>
@@ -15303,7 +15303,7 @@
               <a:t>•  </a:t>
             </a:r>
             <a:r>
-              <a:rPr sz="1200" b="1">
+              <a:rPr sz="1100" b="1">
                 <a:solidFill>
                   <a:srgbClr val="282828"/>
                 </a:solidFill>
@@ -15312,13 +15312,13 @@
               <a:t>Accuracy is a gain: systematic and proportional to the figure read.</a:t>
             </a:r>
             <a:r>
-              <a:rPr sz="1200" b="0">
+              <a:rPr sz="1100" b="0">
                 <a:solidFill>
                   <a:srgbClr val="282828"/>
                 </a:solidFill>
                 <a:latin typeface="Arial"/>
               </a:rPr>
-              <a:t>  Raw, the four-step reads the 30 nm surface 0.7 % low on lenses (350 pm) and 1.3 % low on mirrors (463 pm); through the matrix measured on the surface a 10 nm change reads at gain 1.004 on lenses and 0.986 on mirrors, with floors of 1.4 and 2.3 pm.  The pupil imaging is the smaller part (0.13 % / 0.29 %); the gain is the polarization snapshot's, and the matrix measured on the surface is what carries it.</a:t>
+              <a:t>  Raw, the four-step reads the 30 nm surface 0.7 % low on lenses (350 pm) and 1.3 % low on mirrors (463 pm); through the matrix measured on the surface a 10 nm change reads at gain 1.004 on lenses and 0.986 on mirrors, with floors of 1.4 and 2.3 pm.  The gain is the polarization snapshot's -- the hybrid's piezo four-step reads the same surface at gain 1.0000 against the engine, which is what its absolute-calibration leg is for -- and the matrix measured on the surface carries it; the pupil imaging is the smaller part (0.13 % / 0.29 %).</a:t>
             </a:r>
           </a:p>
           <a:p>
@@ -15328,7 +15328,7 @@
               </a:spcAft>
             </a:pPr>
             <a:r>
-              <a:rPr sz="1200" b="0">
+              <a:rPr sz="1100" b="0">
                 <a:solidFill>
                   <a:srgbClr val="282828"/>
                 </a:solidFill>
@@ -15337,7 +15337,7 @@
               <a:t>•  </a:t>
             </a:r>
             <a:r>
-              <a:rPr sz="1200" b="1">
+              <a:rPr sz="1100" b="1">
                 <a:solidFill>
                   <a:srgbClr val="282828"/>
                 </a:solidFill>
@@ -15346,7 +15346,7 @@
               <a:t>One disturbance is not photon-limited:</a:t>
             </a:r>
             <a:r>
-              <a:rPr sz="1200" b="0">
+              <a:rPr sz="1100" b="0">
                 <a:solidFill>
                   <a:srgbClr val="282828"/>
                 </a:solidFill>
@@ -15365,7 +15365,7 @@
         </p:nvSpPr>
         <p:spPr>
           <a:xfrm>
-            <a:off x="457200" y="6199632"/>
+            <a:off x="457200" y="6327648"/>
             <a:ext cx="11365992" cy="274320"/>
           </a:xfrm>
           <a:prstGeom prst="rect">
@@ -15391,7 +15391,7 @@
                 </a:solidFill>
                 <a:latin typeface="Arial"/>
               </a:rPr>
-              <a:t>The table is the interferometer's, the one gauge scored on both front ends; the three sensors, scored on the mirror rig, read within 1 % and 2 pm of it on the same surface (the side-by-side slide).  The raw-map row is the station-by-station figure's number (runs redo96_lensstn2, redo96_oapstn2), the four-step's sign set by a +50 nm push as on a real interferometer: the two rigs' polarization inputs give opposite fringe directions, which the matrix carries and an absolute map does not (the lens rig's earlier 51 nm 'fold' was the sign).  Run tags are on the provenance slide and on each slide that derives a number.</a:t>
+              <a:t>The table is the interferometer's, the one gauge scored on both front ends; the three sensors, scored on the mirror rig, read within 1 % and 2 pm of it (the side-by-side slide).  The raw-map rows are the station figures' (runs redo96_lensstn2, redo96_oapstn2), the snapshot's sign set by a +50 nm push: the two rigs' polarization inputs run the fringe opposite ways, which the matrix carries and an absolute map does not.  Run tags are on the provenance slide and on each slide that derives a number.</a:t>
             </a:r>
           </a:p>
         </p:txBody>
